--- a/assets/ppt/data_exploration.pptx
+++ b/assets/ppt/data_exploration.pptx
@@ -17,11 +17,12 @@
     <p:sldId id="264" r:id="rId11"/>
     <p:sldId id="263" r:id="rId12"/>
     <p:sldId id="259" r:id="rId13"/>
-    <p:sldId id="268" r:id="rId14"/>
-    <p:sldId id="269" r:id="rId15"/>
-    <p:sldId id="271" r:id="rId16"/>
-    <p:sldId id="272" r:id="rId17"/>
-    <p:sldId id="267" r:id="rId18"/>
+    <p:sldId id="274" r:id="rId14"/>
+    <p:sldId id="268" r:id="rId15"/>
+    <p:sldId id="269" r:id="rId16"/>
+    <p:sldId id="271" r:id="rId17"/>
+    <p:sldId id="272" r:id="rId18"/>
+    <p:sldId id="267" r:id="rId19"/>
   </p:sldIdLst>
   <p:sldSz cx="12192000" cy="6858000"/>
   <p:notesSz cx="6858000" cy="9144000"/>
@@ -343,9 +344,6 @@
             </c:numRef>
           </c:val>
           <c:extLst>
-            <c:ext xmlns:c15="http://schemas.microsoft.com/office/drawing/2012/chart" uri="{02D57815-91ED-43cb-92C2-25804820EDAC}">
-              <c15:categoryFilterExceptions/>
-            </c:ext>
             <c:ext xmlns:c16="http://schemas.microsoft.com/office/drawing/2014/chart" uri="{C3380CC4-5D6E-409C-BE32-E72D297353CC}">
               <c16:uniqueId val="{00000000-BC7F-49CF-93C6-9D708D3574D5}"/>
             </c:ext>
@@ -1092,7 +1090,7 @@
           <a:p>
             <a:fld id="{13286422-5540-4AA8-A2A3-FD24E383623F}" type="datetimeFigureOut">
               <a:rPr lang="nl-NL" smtClean="0"/>
-              <a:t>22-8-2024</a:t>
+              <a:t>23-8-2024</a:t>
             </a:fld>
             <a:endParaRPr lang="nl-NL"/>
           </a:p>
@@ -1304,7 +1302,7 @@
           <a:p>
             <a:fld id="{13286422-5540-4AA8-A2A3-FD24E383623F}" type="datetimeFigureOut">
               <a:rPr lang="nl-NL" smtClean="0"/>
-              <a:t>22-8-2024</a:t>
+              <a:t>23-8-2024</a:t>
             </a:fld>
             <a:endParaRPr lang="nl-NL"/>
           </a:p>
@@ -1526,7 +1524,7 @@
           <a:p>
             <a:fld id="{13286422-5540-4AA8-A2A3-FD24E383623F}" type="datetimeFigureOut">
               <a:rPr lang="nl-NL" smtClean="0"/>
-              <a:t>22-8-2024</a:t>
+              <a:t>23-8-2024</a:t>
             </a:fld>
             <a:endParaRPr lang="nl-NL"/>
           </a:p>
@@ -1738,7 +1736,7 @@
           <a:p>
             <a:fld id="{13286422-5540-4AA8-A2A3-FD24E383623F}" type="datetimeFigureOut">
               <a:rPr lang="nl-NL" smtClean="0"/>
-              <a:t>22-8-2024</a:t>
+              <a:t>23-8-2024</a:t>
             </a:fld>
             <a:endParaRPr lang="nl-NL"/>
           </a:p>
@@ -2026,7 +2024,7 @@
           <a:p>
             <a:fld id="{13286422-5540-4AA8-A2A3-FD24E383623F}" type="datetimeFigureOut">
               <a:rPr lang="nl-NL" smtClean="0"/>
-              <a:t>22-8-2024</a:t>
+              <a:t>23-8-2024</a:t>
             </a:fld>
             <a:endParaRPr lang="nl-NL"/>
           </a:p>
@@ -2306,7 +2304,7 @@
           <a:p>
             <a:fld id="{13286422-5540-4AA8-A2A3-FD24E383623F}" type="datetimeFigureOut">
               <a:rPr lang="nl-NL" smtClean="0"/>
-              <a:t>22-8-2024</a:t>
+              <a:t>23-8-2024</a:t>
             </a:fld>
             <a:endParaRPr lang="nl-NL"/>
           </a:p>
@@ -2733,7 +2731,7 @@
           <a:p>
             <a:fld id="{13286422-5540-4AA8-A2A3-FD24E383623F}" type="datetimeFigureOut">
               <a:rPr lang="nl-NL" smtClean="0"/>
-              <a:t>22-8-2024</a:t>
+              <a:t>23-8-2024</a:t>
             </a:fld>
             <a:endParaRPr lang="nl-NL"/>
           </a:p>
@@ -2887,7 +2885,7 @@
           <a:p>
             <a:fld id="{13286422-5540-4AA8-A2A3-FD24E383623F}" type="datetimeFigureOut">
               <a:rPr lang="nl-NL" smtClean="0"/>
-              <a:t>22-8-2024</a:t>
+              <a:t>23-8-2024</a:t>
             </a:fld>
             <a:endParaRPr lang="nl-NL"/>
           </a:p>
@@ -3012,7 +3010,7 @@
           <a:p>
             <a:fld id="{13286422-5540-4AA8-A2A3-FD24E383623F}" type="datetimeFigureOut">
               <a:rPr lang="nl-NL" smtClean="0"/>
-              <a:t>22-8-2024</a:t>
+              <a:t>23-8-2024</a:t>
             </a:fld>
             <a:endParaRPr lang="nl-NL"/>
           </a:p>
@@ -3337,7 +3335,7 @@
           <a:p>
             <a:fld id="{13286422-5540-4AA8-A2A3-FD24E383623F}" type="datetimeFigureOut">
               <a:rPr lang="nl-NL" smtClean="0"/>
-              <a:t>22-8-2024</a:t>
+              <a:t>23-8-2024</a:t>
             </a:fld>
             <a:endParaRPr lang="nl-NL"/>
           </a:p>
@@ -3638,7 +3636,7 @@
           <a:p>
             <a:fld id="{13286422-5540-4AA8-A2A3-FD24E383623F}" type="datetimeFigureOut">
               <a:rPr lang="nl-NL" smtClean="0"/>
-              <a:t>22-8-2024</a:t>
+              <a:t>23-8-2024</a:t>
             </a:fld>
             <a:endParaRPr lang="nl-NL"/>
           </a:p>
@@ -3893,7 +3891,7 @@
           <a:p>
             <a:fld id="{13286422-5540-4AA8-A2A3-FD24E383623F}" type="datetimeFigureOut">
               <a:rPr lang="nl-NL" smtClean="0"/>
-              <a:t>22-8-2024</a:t>
+              <a:t>23-8-2024</a:t>
             </a:fld>
             <a:endParaRPr lang="nl-NL"/>
           </a:p>
@@ -4692,6 +4690,48 @@
           <a:chExt cx="0" cy="0"/>
         </a:xfrm>
       </p:grpSpPr>
+    </p:spTree>
+    <p:extLst>
+      <p:ext uri="{BB962C8B-B14F-4D97-AF65-F5344CB8AC3E}">
+        <p14:creationId xmlns:p14="http://schemas.microsoft.com/office/powerpoint/2010/main" val="2469779366"/>
+      </p:ext>
+    </p:extLst>
+  </p:cSld>
+  <p:clrMapOvr>
+    <a:masterClrMapping/>
+  </p:clrMapOvr>
+  <mc:AlternateContent xmlns:mc="http://schemas.openxmlformats.org/markup-compatibility/2006" xmlns:p159="http://schemas.microsoft.com/office/powerpoint/2015/09/main">
+    <mc:Choice Requires="p159">
+      <p:transition xmlns:p14="http://schemas.microsoft.com/office/powerpoint/2010/main" spd="slow" p14:dur="2000">
+        <p159:morph option="byObject"/>
+      </p:transition>
+    </mc:Choice>
+    <mc:Fallback xmlns="">
+      <p:transition spd="slow">
+        <p:fade/>
+      </p:transition>
+    </mc:Fallback>
+  </mc:AlternateContent>
+</p:sld>
+</file>
+
+<file path=ppt/slides/slide14.xml><?xml version="1.0" encoding="utf-8"?>
+<p:sld xmlns:a="http://schemas.openxmlformats.org/drawingml/2006/main" xmlns:r="http://schemas.openxmlformats.org/officeDocument/2006/relationships" xmlns:p="http://schemas.openxmlformats.org/presentationml/2006/main">
+  <p:cSld>
+    <p:spTree>
+      <p:nvGrpSpPr>
+        <p:cNvPr id="1" name=""/>
+        <p:cNvGrpSpPr/>
+        <p:nvPr/>
+      </p:nvGrpSpPr>
+      <p:grpSpPr>
+        <a:xfrm>
+          <a:off x="0" y="0"/>
+          <a:ext cx="0" cy="0"/>
+          <a:chOff x="0" y="0"/>
+          <a:chExt cx="0" cy="0"/>
+        </a:xfrm>
+      </p:grpSpPr>
       <p:sp>
         <p:nvSpPr>
           <p:cNvPr id="2" name="Title 1">
@@ -4752,7 +4792,7 @@
 </p:sld>
 </file>
 
-<file path=ppt/slides/slide14.xml><?xml version="1.0" encoding="utf-8"?>
+<file path=ppt/slides/slide15.xml><?xml version="1.0" encoding="utf-8"?>
 <p:sld xmlns:a="http://schemas.openxmlformats.org/drawingml/2006/main" xmlns:r="http://schemas.openxmlformats.org/officeDocument/2006/relationships" xmlns:p="http://schemas.openxmlformats.org/presentationml/2006/main">
   <p:cSld>
     <p:spTree>
@@ -5103,7 +5143,7 @@
 </p:sld>
 </file>
 
-<file path=ppt/slides/slide15.xml><?xml version="1.0" encoding="utf-8"?>
+<file path=ppt/slides/slide16.xml><?xml version="1.0" encoding="utf-8"?>
 <p:sld xmlns:a="http://schemas.openxmlformats.org/drawingml/2006/main" xmlns:r="http://schemas.openxmlformats.org/officeDocument/2006/relationships" xmlns:p="http://schemas.openxmlformats.org/presentationml/2006/main">
   <p:cSld>
     <p:spTree>
@@ -5472,7 +5512,7 @@
 </p:sld>
 </file>
 
-<file path=ppt/slides/slide16.xml><?xml version="1.0" encoding="utf-8"?>
+<file path=ppt/slides/slide17.xml><?xml version="1.0" encoding="utf-8"?>
 <p:sld xmlns:a="http://schemas.openxmlformats.org/drawingml/2006/main" xmlns:r="http://schemas.openxmlformats.org/officeDocument/2006/relationships" xmlns:p="http://schemas.openxmlformats.org/presentationml/2006/main">
   <p:cSld>
     <p:spTree>
@@ -5964,7 +6004,7 @@
 </p:sld>
 </file>
 
-<file path=ppt/slides/slide17.xml><?xml version="1.0" encoding="utf-8"?>
+<file path=ppt/slides/slide18.xml><?xml version="1.0" encoding="utf-8"?>
 <p:sld xmlns:a="http://schemas.openxmlformats.org/drawingml/2006/main" xmlns:r="http://schemas.openxmlformats.org/officeDocument/2006/relationships" xmlns:p="http://schemas.openxmlformats.org/presentationml/2006/main">
   <p:cSld>
     <p:spTree>

--- a/assets/ppt/data_exploration.pptx
+++ b/assets/ppt/data_exploration.pptx
@@ -18,11 +18,16 @@
     <p:sldId id="263" r:id="rId12"/>
     <p:sldId id="259" r:id="rId13"/>
     <p:sldId id="274" r:id="rId14"/>
-    <p:sldId id="268" r:id="rId15"/>
-    <p:sldId id="269" r:id="rId16"/>
-    <p:sldId id="271" r:id="rId17"/>
-    <p:sldId id="272" r:id="rId18"/>
-    <p:sldId id="267" r:id="rId19"/>
+    <p:sldId id="275" r:id="rId15"/>
+    <p:sldId id="279" r:id="rId16"/>
+    <p:sldId id="278" r:id="rId17"/>
+    <p:sldId id="276" r:id="rId18"/>
+    <p:sldId id="277" r:id="rId19"/>
+    <p:sldId id="268" r:id="rId20"/>
+    <p:sldId id="269" r:id="rId21"/>
+    <p:sldId id="271" r:id="rId22"/>
+    <p:sldId id="272" r:id="rId23"/>
+    <p:sldId id="267" r:id="rId24"/>
   </p:sldIdLst>
   <p:sldSz cx="12192000" cy="6858000"/>
   <p:notesSz cx="6858000" cy="9144000"/>
@@ -4737,6 +4742,1346 @@
           <p:cNvPr id="2" name="Title 1">
             <a:extLst>
               <a:ext uri="{FF2B5EF4-FFF2-40B4-BE49-F238E27FC236}">
+                <a16:creationId xmlns:a16="http://schemas.microsoft.com/office/drawing/2014/main" id="{6D37F963-7349-4DE3-A960-EEBD333A4E61}"/>
+              </a:ext>
+            </a:extLst>
+          </p:cNvPr>
+          <p:cNvSpPr txBox="1">
+            <a:spLocks/>
+          </p:cNvSpPr>
+          <p:nvPr/>
+        </p:nvSpPr>
+        <p:spPr>
+          <a:xfrm>
+            <a:off x="1524000" y="2235200"/>
+            <a:ext cx="9144000" cy="2387600"/>
+          </a:xfrm>
+          <a:prstGeom prst="rect">
+            <a:avLst/>
+          </a:prstGeom>
+        </p:spPr>
+        <p:txBody>
+          <a:bodyPr anchor="ctr"/>
+          <a:lstStyle>
+            <a:lvl1pPr algn="l" defTabSz="914400" rtl="0" eaLnBrk="1" latinLnBrk="0" hangingPunct="1">
+              <a:lnSpc>
+                <a:spcPct val="90000"/>
+              </a:lnSpc>
+              <a:spcBef>
+                <a:spcPct val="0"/>
+              </a:spcBef>
+              <a:buNone/>
+              <a:defRPr sz="4400" kern="1200">
+                <a:solidFill>
+                  <a:schemeClr val="tx1"/>
+                </a:solidFill>
+                <a:latin typeface="+mj-lt"/>
+                <a:ea typeface="+mj-ea"/>
+                <a:cs typeface="+mj-cs"/>
+              </a:defRPr>
+            </a:lvl1pPr>
+          </a:lstStyle>
+          <a:p>
+            <a:pPr algn="ctr"/>
+            <a:r>
+              <a:rPr lang="it-IT" dirty="0"/>
+              <a:t>Metingen</a:t>
+            </a:r>
+            <a:endParaRPr lang="nl-NL" dirty="0"/>
+          </a:p>
+        </p:txBody>
+      </p:sp>
+    </p:spTree>
+    <p:extLst>
+      <p:ext uri="{BB962C8B-B14F-4D97-AF65-F5344CB8AC3E}">
+        <p14:creationId xmlns:p14="http://schemas.microsoft.com/office/powerpoint/2010/main" val="1644673165"/>
+      </p:ext>
+    </p:extLst>
+  </p:cSld>
+  <p:clrMapOvr>
+    <a:masterClrMapping/>
+  </p:clrMapOvr>
+  <mc:AlternateContent xmlns:mc="http://schemas.openxmlformats.org/markup-compatibility/2006" xmlns:p159="http://schemas.microsoft.com/office/powerpoint/2015/09/main">
+    <mc:Choice Requires="p159">
+      <p:transition xmlns:p14="http://schemas.microsoft.com/office/powerpoint/2010/main" spd="slow" p14:dur="2000">
+        <p159:morph option="byObject"/>
+      </p:transition>
+    </mc:Choice>
+    <mc:Fallback xmlns="">
+      <p:transition spd="slow">
+        <p:fade/>
+      </p:transition>
+    </mc:Fallback>
+  </mc:AlternateContent>
+</p:sld>
+</file>
+
+<file path=ppt/slides/slide15.xml><?xml version="1.0" encoding="utf-8"?>
+<p:sld xmlns:a="http://schemas.openxmlformats.org/drawingml/2006/main" xmlns:r="http://schemas.openxmlformats.org/officeDocument/2006/relationships" xmlns:p="http://schemas.openxmlformats.org/presentationml/2006/main">
+  <p:cSld>
+    <p:spTree>
+      <p:nvGrpSpPr>
+        <p:cNvPr id="1" name=""/>
+        <p:cNvGrpSpPr/>
+        <p:nvPr/>
+      </p:nvGrpSpPr>
+      <p:grpSpPr>
+        <a:xfrm>
+          <a:off x="0" y="0"/>
+          <a:ext cx="0" cy="0"/>
+          <a:chOff x="0" y="0"/>
+          <a:chExt cx="0" cy="0"/>
+        </a:xfrm>
+      </p:grpSpPr>
+    </p:spTree>
+    <p:extLst>
+      <p:ext uri="{BB962C8B-B14F-4D97-AF65-F5344CB8AC3E}">
+        <p14:creationId xmlns:p14="http://schemas.microsoft.com/office/powerpoint/2010/main" val="2416861179"/>
+      </p:ext>
+    </p:extLst>
+  </p:cSld>
+  <p:clrMapOvr>
+    <a:masterClrMapping/>
+  </p:clrMapOvr>
+  <mc:AlternateContent xmlns:mc="http://schemas.openxmlformats.org/markup-compatibility/2006" xmlns:p159="http://schemas.microsoft.com/office/powerpoint/2015/09/main">
+    <mc:Choice Requires="p159">
+      <p:transition xmlns:p14="http://schemas.microsoft.com/office/powerpoint/2010/main" spd="slow" p14:dur="2000">
+        <p159:morph option="byObject"/>
+      </p:transition>
+    </mc:Choice>
+    <mc:Fallback xmlns="">
+      <p:transition spd="slow">
+        <p:fade/>
+      </p:transition>
+    </mc:Fallback>
+  </mc:AlternateContent>
+</p:sld>
+</file>
+
+<file path=ppt/slides/slide16.xml><?xml version="1.0" encoding="utf-8"?>
+<p:sld xmlns:a="http://schemas.openxmlformats.org/drawingml/2006/main" xmlns:r="http://schemas.openxmlformats.org/officeDocument/2006/relationships" xmlns:p="http://schemas.openxmlformats.org/presentationml/2006/main">
+  <p:cSld>
+    <p:spTree>
+      <p:nvGrpSpPr>
+        <p:cNvPr id="1" name=""/>
+        <p:cNvGrpSpPr/>
+        <p:nvPr/>
+      </p:nvGrpSpPr>
+      <p:grpSpPr>
+        <a:xfrm>
+          <a:off x="0" y="0"/>
+          <a:ext cx="0" cy="0"/>
+          <a:chOff x="0" y="0"/>
+          <a:chExt cx="0" cy="0"/>
+        </a:xfrm>
+      </p:grpSpPr>
+      <p:sp>
+        <p:nvSpPr>
+          <p:cNvPr id="2" name="Title 1">
+            <a:extLst>
+              <a:ext uri="{FF2B5EF4-FFF2-40B4-BE49-F238E27FC236}">
+                <a16:creationId xmlns:a16="http://schemas.microsoft.com/office/drawing/2014/main" id="{6D37F963-7349-4DE3-A960-EEBD333A4E61}"/>
+              </a:ext>
+            </a:extLst>
+          </p:cNvPr>
+          <p:cNvSpPr txBox="1">
+            <a:spLocks/>
+          </p:cNvSpPr>
+          <p:nvPr/>
+        </p:nvSpPr>
+        <p:spPr>
+          <a:xfrm>
+            <a:off x="1524000" y="2235200"/>
+            <a:ext cx="9144000" cy="2387600"/>
+          </a:xfrm>
+          <a:prstGeom prst="rect">
+            <a:avLst/>
+          </a:prstGeom>
+        </p:spPr>
+        <p:txBody>
+          <a:bodyPr anchor="ctr"/>
+          <a:lstStyle>
+            <a:lvl1pPr algn="l" defTabSz="914400" rtl="0" eaLnBrk="1" latinLnBrk="0" hangingPunct="1">
+              <a:lnSpc>
+                <a:spcPct val="90000"/>
+              </a:lnSpc>
+              <a:spcBef>
+                <a:spcPct val="0"/>
+              </a:spcBef>
+              <a:buNone/>
+              <a:defRPr sz="4400" kern="1200">
+                <a:solidFill>
+                  <a:schemeClr val="tx1"/>
+                </a:solidFill>
+                <a:latin typeface="+mj-lt"/>
+                <a:ea typeface="+mj-ea"/>
+                <a:cs typeface="+mj-cs"/>
+              </a:defRPr>
+            </a:lvl1pPr>
+          </a:lstStyle>
+          <a:p>
+            <a:pPr algn="ctr"/>
+            <a:r>
+              <a:rPr lang="it-IT" dirty="0"/>
+              <a:t>Blood Pressure Readings</a:t>
+            </a:r>
+            <a:endParaRPr lang="nl-NL" dirty="0"/>
+          </a:p>
+        </p:txBody>
+      </p:sp>
+    </p:spTree>
+    <p:extLst>
+      <p:ext uri="{BB962C8B-B14F-4D97-AF65-F5344CB8AC3E}">
+        <p14:creationId xmlns:p14="http://schemas.microsoft.com/office/powerpoint/2010/main" val="603692568"/>
+      </p:ext>
+    </p:extLst>
+  </p:cSld>
+  <p:clrMapOvr>
+    <a:masterClrMapping/>
+  </p:clrMapOvr>
+  <mc:AlternateContent xmlns:mc="http://schemas.openxmlformats.org/markup-compatibility/2006" xmlns:p159="http://schemas.microsoft.com/office/powerpoint/2015/09/main">
+    <mc:Choice Requires="p159">
+      <p:transition xmlns:p14="http://schemas.microsoft.com/office/powerpoint/2010/main" spd="slow" p14:dur="2000">
+        <p159:morph option="byObject"/>
+      </p:transition>
+    </mc:Choice>
+    <mc:Fallback xmlns="">
+      <p:transition spd="slow">
+        <p:fade/>
+      </p:transition>
+    </mc:Fallback>
+  </mc:AlternateContent>
+</p:sld>
+</file>
+
+<file path=ppt/slides/slide17.xml><?xml version="1.0" encoding="utf-8"?>
+<p:sld xmlns:a="http://schemas.openxmlformats.org/drawingml/2006/main" xmlns:r="http://schemas.openxmlformats.org/officeDocument/2006/relationships" xmlns:p="http://schemas.openxmlformats.org/presentationml/2006/main">
+  <p:cSld>
+    <p:spTree>
+      <p:nvGrpSpPr>
+        <p:cNvPr id="1" name=""/>
+        <p:cNvGrpSpPr/>
+        <p:nvPr/>
+      </p:nvGrpSpPr>
+      <p:grpSpPr>
+        <a:xfrm>
+          <a:off x="0" y="0"/>
+          <a:ext cx="0" cy="0"/>
+          <a:chOff x="0" y="0"/>
+          <a:chExt cx="0" cy="0"/>
+        </a:xfrm>
+      </p:grpSpPr>
+      <p:sp>
+        <p:nvSpPr>
+          <p:cNvPr id="2" name="TextBox 1">
+            <a:extLst>
+              <a:ext uri="{FF2B5EF4-FFF2-40B4-BE49-F238E27FC236}">
+                <a16:creationId xmlns:a16="http://schemas.microsoft.com/office/drawing/2014/main" id="{CC0200F0-ABFF-45F8-A6F5-9F8372AE5C7D}"/>
+              </a:ext>
+            </a:extLst>
+          </p:cNvPr>
+          <p:cNvSpPr txBox="1"/>
+          <p:nvPr/>
+        </p:nvSpPr>
+        <p:spPr>
+          <a:xfrm>
+            <a:off x="0" y="0"/>
+            <a:ext cx="4395537" cy="369332"/>
+          </a:xfrm>
+          <a:prstGeom prst="rect">
+            <a:avLst/>
+          </a:prstGeom>
+          <a:noFill/>
+        </p:spPr>
+        <p:txBody>
+          <a:bodyPr wrap="square" rtlCol="0">
+            <a:spAutoFit/>
+          </a:bodyPr>
+          <a:lstStyle/>
+          <a:p>
+            <a:r>
+              <a:rPr lang="it-IT" u="sng" dirty="0"/>
+              <a:t>Blood Pressure Measurements - Outliers</a:t>
+            </a:r>
+            <a:endParaRPr lang="nl-NL" u="sng" dirty="0"/>
+          </a:p>
+        </p:txBody>
+      </p:sp>
+      <p:pic>
+        <p:nvPicPr>
+          <p:cNvPr id="4" name="Picture 3">
+            <a:extLst>
+              <a:ext uri="{FF2B5EF4-FFF2-40B4-BE49-F238E27FC236}">
+                <a16:creationId xmlns:a16="http://schemas.microsoft.com/office/drawing/2014/main" id="{B141D145-8AC1-45C7-8D61-50D4BD1CC9DF}"/>
+              </a:ext>
+            </a:extLst>
+          </p:cNvPr>
+          <p:cNvPicPr>
+            <a:picLocks noChangeAspect="1"/>
+          </p:cNvPicPr>
+          <p:nvPr/>
+        </p:nvPicPr>
+        <p:blipFill>
+          <a:blip r:embed="rId2">
+            <a:extLst>
+              <a:ext uri="{28A0092B-C50C-407E-A947-70E740481C1C}">
+                <a14:useLocalDpi xmlns:a14="http://schemas.microsoft.com/office/drawing/2010/main" val="0"/>
+              </a:ext>
+            </a:extLst>
+          </a:blip>
+          <a:stretch>
+            <a:fillRect/>
+          </a:stretch>
+        </p:blipFill>
+        <p:spPr>
+          <a:xfrm>
+            <a:off x="6186458" y="1957137"/>
+            <a:ext cx="6005542" cy="3649580"/>
+          </a:xfrm>
+          <a:prstGeom prst="rect">
+            <a:avLst/>
+          </a:prstGeom>
+        </p:spPr>
+      </p:pic>
+      <p:pic>
+        <p:nvPicPr>
+          <p:cNvPr id="8" name="Picture 7">
+            <a:extLst>
+              <a:ext uri="{FF2B5EF4-FFF2-40B4-BE49-F238E27FC236}">
+                <a16:creationId xmlns:a16="http://schemas.microsoft.com/office/drawing/2014/main" id="{B78D7C7E-C973-4558-835C-AE7A82ECC7EF}"/>
+              </a:ext>
+            </a:extLst>
+          </p:cNvPr>
+          <p:cNvPicPr>
+            <a:picLocks noChangeAspect="1"/>
+          </p:cNvPicPr>
+          <p:nvPr/>
+        </p:nvPicPr>
+        <p:blipFill>
+          <a:blip r:embed="rId3">
+            <a:extLst>
+              <a:ext uri="{28A0092B-C50C-407E-A947-70E740481C1C}">
+                <a14:useLocalDpi xmlns:a14="http://schemas.microsoft.com/office/drawing/2010/main" val="0"/>
+              </a:ext>
+            </a:extLst>
+          </a:blip>
+          <a:stretch>
+            <a:fillRect/>
+          </a:stretch>
+        </p:blipFill>
+        <p:spPr>
+          <a:xfrm>
+            <a:off x="14258" y="1957137"/>
+            <a:ext cx="6005542" cy="3649580"/>
+          </a:xfrm>
+          <a:prstGeom prst="rect">
+            <a:avLst/>
+          </a:prstGeom>
+        </p:spPr>
+      </p:pic>
+      <p:cxnSp>
+        <p:nvCxnSpPr>
+          <p:cNvPr id="10" name="Straight Arrow Connector 9">
+            <a:extLst>
+              <a:ext uri="{FF2B5EF4-FFF2-40B4-BE49-F238E27FC236}">
+                <a16:creationId xmlns:a16="http://schemas.microsoft.com/office/drawing/2014/main" id="{D2D21716-6BD7-4A50-9558-0D0C13985C2D}"/>
+              </a:ext>
+            </a:extLst>
+          </p:cNvPr>
+          <p:cNvCxnSpPr>
+            <a:cxnSpLocks/>
+            <a:stCxn id="13" idx="2"/>
+            <a:endCxn id="28" idx="7"/>
+          </p:cNvCxnSpPr>
+          <p:nvPr/>
+        </p:nvCxnSpPr>
+        <p:spPr>
+          <a:xfrm flipH="1">
+            <a:off x="1745476" y="1706964"/>
+            <a:ext cx="1271553" cy="618127"/>
+          </a:xfrm>
+          <a:prstGeom prst="straightConnector1">
+            <a:avLst/>
+          </a:prstGeom>
+          <a:ln>
+            <a:tailEnd type="triangle"/>
+          </a:ln>
+        </p:spPr>
+        <p:style>
+          <a:lnRef idx="3">
+            <a:schemeClr val="dk1"/>
+          </a:lnRef>
+          <a:fillRef idx="0">
+            <a:schemeClr val="dk1"/>
+          </a:fillRef>
+          <a:effectRef idx="2">
+            <a:schemeClr val="dk1"/>
+          </a:effectRef>
+          <a:fontRef idx="minor">
+            <a:schemeClr val="tx1"/>
+          </a:fontRef>
+        </p:style>
+      </p:cxnSp>
+      <p:cxnSp>
+        <p:nvCxnSpPr>
+          <p:cNvPr id="12" name="Straight Arrow Connector 11">
+            <a:extLst>
+              <a:ext uri="{FF2B5EF4-FFF2-40B4-BE49-F238E27FC236}">
+                <a16:creationId xmlns:a16="http://schemas.microsoft.com/office/drawing/2014/main" id="{8588E362-09B2-4B0B-BBDE-2EFEFF000F9B}"/>
+              </a:ext>
+            </a:extLst>
+          </p:cNvPr>
+          <p:cNvCxnSpPr>
+            <a:cxnSpLocks/>
+            <a:stCxn id="13" idx="2"/>
+            <a:endCxn id="30" idx="1"/>
+          </p:cNvCxnSpPr>
+          <p:nvPr/>
+        </p:nvCxnSpPr>
+        <p:spPr>
+          <a:xfrm>
+            <a:off x="3017029" y="1706964"/>
+            <a:ext cx="1532465" cy="797849"/>
+          </a:xfrm>
+          <a:prstGeom prst="straightConnector1">
+            <a:avLst/>
+          </a:prstGeom>
+          <a:ln>
+            <a:tailEnd type="triangle"/>
+          </a:ln>
+        </p:spPr>
+        <p:style>
+          <a:lnRef idx="3">
+            <a:schemeClr val="dk1"/>
+          </a:lnRef>
+          <a:fillRef idx="0">
+            <a:schemeClr val="dk1"/>
+          </a:fillRef>
+          <a:effectRef idx="2">
+            <a:schemeClr val="dk1"/>
+          </a:effectRef>
+          <a:fontRef idx="minor">
+            <a:schemeClr val="tx1"/>
+          </a:fontRef>
+        </p:style>
+      </p:cxnSp>
+      <p:sp>
+        <p:nvSpPr>
+          <p:cNvPr id="13" name="TextBox 12">
+            <a:extLst>
+              <a:ext uri="{FF2B5EF4-FFF2-40B4-BE49-F238E27FC236}">
+                <a16:creationId xmlns:a16="http://schemas.microsoft.com/office/drawing/2014/main" id="{6406D038-F66B-4859-9416-A23E4E34906D}"/>
+              </a:ext>
+            </a:extLst>
+          </p:cNvPr>
+          <p:cNvSpPr txBox="1"/>
+          <p:nvPr/>
+        </p:nvSpPr>
+        <p:spPr>
+          <a:xfrm>
+            <a:off x="1490242" y="1337632"/>
+            <a:ext cx="3053573" cy="369332"/>
+          </a:xfrm>
+          <a:prstGeom prst="rect">
+            <a:avLst/>
+          </a:prstGeom>
+          <a:noFill/>
+        </p:spPr>
+        <p:txBody>
+          <a:bodyPr wrap="square" rtlCol="0">
+            <a:spAutoFit/>
+          </a:bodyPr>
+          <a:lstStyle/>
+          <a:p>
+            <a:pPr algn="ctr"/>
+            <a:r>
+              <a:rPr lang="it-IT" dirty="0"/>
+              <a:t>Set to NaN... Imputation?</a:t>
+            </a:r>
+            <a:endParaRPr lang="nl-NL" dirty="0"/>
+          </a:p>
+        </p:txBody>
+      </p:sp>
+      <p:sp>
+        <p:nvSpPr>
+          <p:cNvPr id="14" name="TextBox 13">
+            <a:extLst>
+              <a:ext uri="{FF2B5EF4-FFF2-40B4-BE49-F238E27FC236}">
+                <a16:creationId xmlns:a16="http://schemas.microsoft.com/office/drawing/2014/main" id="{F98F7243-8499-4EB9-8006-57DE1509E5C3}"/>
+              </a:ext>
+            </a:extLst>
+          </p:cNvPr>
+          <p:cNvSpPr txBox="1"/>
+          <p:nvPr/>
+        </p:nvSpPr>
+        <p:spPr>
+          <a:xfrm>
+            <a:off x="8060265" y="1152966"/>
+            <a:ext cx="2229853" cy="369332"/>
+          </a:xfrm>
+          <a:prstGeom prst="rect">
+            <a:avLst/>
+          </a:prstGeom>
+          <a:noFill/>
+        </p:spPr>
+        <p:txBody>
+          <a:bodyPr wrap="square" rtlCol="0">
+            <a:spAutoFit/>
+          </a:bodyPr>
+          <a:lstStyle/>
+          <a:p>
+            <a:r>
+              <a:rPr lang="it-IT" dirty="0"/>
+              <a:t>Considered Outliers</a:t>
+            </a:r>
+            <a:endParaRPr lang="nl-NL" dirty="0"/>
+          </a:p>
+        </p:txBody>
+      </p:sp>
+      <p:cxnSp>
+        <p:nvCxnSpPr>
+          <p:cNvPr id="16" name="Straight Arrow Connector 15">
+            <a:extLst>
+              <a:ext uri="{FF2B5EF4-FFF2-40B4-BE49-F238E27FC236}">
+                <a16:creationId xmlns:a16="http://schemas.microsoft.com/office/drawing/2014/main" id="{EF44B29E-148B-46BB-A8FF-E530EC852232}"/>
+              </a:ext>
+            </a:extLst>
+          </p:cNvPr>
+          <p:cNvCxnSpPr>
+            <a:cxnSpLocks/>
+            <a:stCxn id="14" idx="2"/>
+          </p:cNvCxnSpPr>
+          <p:nvPr/>
+        </p:nvCxnSpPr>
+        <p:spPr>
+          <a:xfrm>
+            <a:off x="9175192" y="1522298"/>
+            <a:ext cx="1451811" cy="1108426"/>
+          </a:xfrm>
+          <a:prstGeom prst="straightConnector1">
+            <a:avLst/>
+          </a:prstGeom>
+          <a:ln>
+            <a:tailEnd type="triangle"/>
+          </a:ln>
+        </p:spPr>
+        <p:style>
+          <a:lnRef idx="3">
+            <a:schemeClr val="dk1"/>
+          </a:lnRef>
+          <a:fillRef idx="0">
+            <a:schemeClr val="dk1"/>
+          </a:fillRef>
+          <a:effectRef idx="2">
+            <a:schemeClr val="dk1"/>
+          </a:effectRef>
+          <a:fontRef idx="minor">
+            <a:schemeClr val="tx1"/>
+          </a:fontRef>
+        </p:style>
+      </p:cxnSp>
+      <p:cxnSp>
+        <p:nvCxnSpPr>
+          <p:cNvPr id="18" name="Straight Arrow Connector 17">
+            <a:extLst>
+              <a:ext uri="{FF2B5EF4-FFF2-40B4-BE49-F238E27FC236}">
+                <a16:creationId xmlns:a16="http://schemas.microsoft.com/office/drawing/2014/main" id="{496788B4-CBEF-49A2-B29F-3DAC5165F805}"/>
+              </a:ext>
+            </a:extLst>
+          </p:cNvPr>
+          <p:cNvCxnSpPr>
+            <a:cxnSpLocks/>
+            <a:stCxn id="14" idx="2"/>
+          </p:cNvCxnSpPr>
+          <p:nvPr/>
+        </p:nvCxnSpPr>
+        <p:spPr>
+          <a:xfrm flipH="1">
+            <a:off x="7955994" y="1522298"/>
+            <a:ext cx="1219198" cy="1212700"/>
+          </a:xfrm>
+          <a:prstGeom prst="straightConnector1">
+            <a:avLst/>
+          </a:prstGeom>
+          <a:ln>
+            <a:tailEnd type="triangle"/>
+          </a:ln>
+        </p:spPr>
+        <p:style>
+          <a:lnRef idx="3">
+            <a:schemeClr val="dk1"/>
+          </a:lnRef>
+          <a:fillRef idx="0">
+            <a:schemeClr val="dk1"/>
+          </a:fillRef>
+          <a:effectRef idx="2">
+            <a:schemeClr val="dk1"/>
+          </a:effectRef>
+          <a:fontRef idx="minor">
+            <a:schemeClr val="tx1"/>
+          </a:fontRef>
+        </p:style>
+      </p:cxnSp>
+      <p:sp>
+        <p:nvSpPr>
+          <p:cNvPr id="28" name="Oval 27">
+            <a:extLst>
+              <a:ext uri="{FF2B5EF4-FFF2-40B4-BE49-F238E27FC236}">
+                <a16:creationId xmlns:a16="http://schemas.microsoft.com/office/drawing/2014/main" id="{5D3BB183-A2CA-46A2-B9C3-ADAE972B9027}"/>
+              </a:ext>
+            </a:extLst>
+          </p:cNvPr>
+          <p:cNvSpPr/>
+          <p:nvPr/>
+        </p:nvSpPr>
+        <p:spPr>
+          <a:xfrm>
+            <a:off x="1444235" y="2056559"/>
+            <a:ext cx="352926" cy="1833652"/>
+          </a:xfrm>
+          <a:prstGeom prst="ellipse">
+            <a:avLst/>
+          </a:prstGeom>
+          <a:noFill/>
+          <a:ln w="9525" cap="flat" cmpd="sng" algn="ctr">
+            <a:solidFill>
+              <a:schemeClr val="accent1"/>
+            </a:solidFill>
+            <a:prstDash val="solid"/>
+            <a:round/>
+            <a:headEnd type="none" w="med" len="med"/>
+            <a:tailEnd type="none" w="med" len="med"/>
+          </a:ln>
+        </p:spPr>
+        <p:style>
+          <a:lnRef idx="0">
+            <a:scrgbClr r="0" g="0" b="0"/>
+          </a:lnRef>
+          <a:fillRef idx="0">
+            <a:scrgbClr r="0" g="0" b="0"/>
+          </a:fillRef>
+          <a:effectRef idx="0">
+            <a:scrgbClr r="0" g="0" b="0"/>
+          </a:effectRef>
+          <a:fontRef idx="minor">
+            <a:schemeClr val="accent1"/>
+          </a:fontRef>
+        </p:style>
+        <p:txBody>
+          <a:bodyPr rtlCol="0" anchor="ctr"/>
+          <a:lstStyle/>
+          <a:p>
+            <a:pPr algn="ctr"/>
+            <a:endParaRPr lang="nl-NL"/>
+          </a:p>
+        </p:txBody>
+      </p:sp>
+      <p:sp>
+        <p:nvSpPr>
+          <p:cNvPr id="30" name="Oval 29">
+            <a:extLst>
+              <a:ext uri="{FF2B5EF4-FFF2-40B4-BE49-F238E27FC236}">
+                <a16:creationId xmlns:a16="http://schemas.microsoft.com/office/drawing/2014/main" id="{DFC1405A-A1FB-4B7D-A729-6F366D78F1F5}"/>
+              </a:ext>
+            </a:extLst>
+          </p:cNvPr>
+          <p:cNvSpPr/>
+          <p:nvPr/>
+        </p:nvSpPr>
+        <p:spPr>
+          <a:xfrm>
+            <a:off x="4497809" y="2056558"/>
+            <a:ext cx="352926" cy="3060874"/>
+          </a:xfrm>
+          <a:prstGeom prst="ellipse">
+            <a:avLst/>
+          </a:prstGeom>
+          <a:noFill/>
+          <a:ln w="9525" cap="flat" cmpd="sng" algn="ctr">
+            <a:solidFill>
+              <a:schemeClr val="accent1"/>
+            </a:solidFill>
+            <a:prstDash val="solid"/>
+            <a:round/>
+            <a:headEnd type="none" w="med" len="med"/>
+            <a:tailEnd type="none" w="med" len="med"/>
+          </a:ln>
+        </p:spPr>
+        <p:style>
+          <a:lnRef idx="0">
+            <a:scrgbClr r="0" g="0" b="0"/>
+          </a:lnRef>
+          <a:fillRef idx="0">
+            <a:scrgbClr r="0" g="0" b="0"/>
+          </a:fillRef>
+          <a:effectRef idx="0">
+            <a:scrgbClr r="0" g="0" b="0"/>
+          </a:effectRef>
+          <a:fontRef idx="minor">
+            <a:schemeClr val="accent1"/>
+          </a:fontRef>
+        </p:style>
+        <p:txBody>
+          <a:bodyPr rtlCol="0" anchor="ctr"/>
+          <a:lstStyle/>
+          <a:p>
+            <a:pPr algn="ctr"/>
+            <a:endParaRPr lang="nl-NL"/>
+          </a:p>
+        </p:txBody>
+      </p:sp>
+      <p:cxnSp>
+        <p:nvCxnSpPr>
+          <p:cNvPr id="47" name="Straight Connector 46">
+            <a:extLst>
+              <a:ext uri="{FF2B5EF4-FFF2-40B4-BE49-F238E27FC236}">
+                <a16:creationId xmlns:a16="http://schemas.microsoft.com/office/drawing/2014/main" id="{BB77F60D-AA92-4E88-9238-C37C7FCED343}"/>
+              </a:ext>
+            </a:extLst>
+          </p:cNvPr>
+          <p:cNvCxnSpPr/>
+          <p:nvPr/>
+        </p:nvCxnSpPr>
+        <p:spPr>
+          <a:xfrm>
+            <a:off x="344905" y="4868779"/>
+            <a:ext cx="2334126" cy="0"/>
+          </a:xfrm>
+          <a:prstGeom prst="line">
+            <a:avLst/>
+          </a:prstGeom>
+        </p:spPr>
+        <p:style>
+          <a:lnRef idx="3">
+            <a:schemeClr val="accent2"/>
+          </a:lnRef>
+          <a:fillRef idx="0">
+            <a:schemeClr val="accent2"/>
+          </a:fillRef>
+          <a:effectRef idx="2">
+            <a:schemeClr val="accent2"/>
+          </a:effectRef>
+          <a:fontRef idx="minor">
+            <a:schemeClr val="tx1"/>
+          </a:fontRef>
+        </p:style>
+      </p:cxnSp>
+      <p:sp>
+        <p:nvSpPr>
+          <p:cNvPr id="48" name="TextBox 47">
+            <a:extLst>
+              <a:ext uri="{FF2B5EF4-FFF2-40B4-BE49-F238E27FC236}">
+                <a16:creationId xmlns:a16="http://schemas.microsoft.com/office/drawing/2014/main" id="{210063D6-AB12-4D1A-8DD9-1B596D004A2F}"/>
+              </a:ext>
+            </a:extLst>
+          </p:cNvPr>
+          <p:cNvSpPr txBox="1"/>
+          <p:nvPr/>
+        </p:nvSpPr>
+        <p:spPr>
+          <a:xfrm>
+            <a:off x="2310061" y="4588042"/>
+            <a:ext cx="471458" cy="369332"/>
+          </a:xfrm>
+          <a:prstGeom prst="rect">
+            <a:avLst/>
+          </a:prstGeom>
+          <a:noFill/>
+        </p:spPr>
+        <p:txBody>
+          <a:bodyPr wrap="square" rtlCol="0">
+            <a:spAutoFit/>
+          </a:bodyPr>
+          <a:lstStyle/>
+          <a:p>
+            <a:pPr algn="ctr"/>
+            <a:r>
+              <a:rPr lang="it-IT" dirty="0">
+                <a:solidFill>
+                  <a:schemeClr val="accent2"/>
+                </a:solidFill>
+              </a:rPr>
+              <a:t>20</a:t>
+            </a:r>
+            <a:endParaRPr lang="nl-NL" dirty="0">
+              <a:solidFill>
+                <a:schemeClr val="accent2"/>
+              </a:solidFill>
+            </a:endParaRPr>
+          </a:p>
+        </p:txBody>
+      </p:sp>
+      <p:cxnSp>
+        <p:nvCxnSpPr>
+          <p:cNvPr id="49" name="Straight Connector 48">
+            <a:extLst>
+              <a:ext uri="{FF2B5EF4-FFF2-40B4-BE49-F238E27FC236}">
+                <a16:creationId xmlns:a16="http://schemas.microsoft.com/office/drawing/2014/main" id="{0BD6F6C2-AA8F-4637-B394-6AEB8944AE70}"/>
+              </a:ext>
+            </a:extLst>
+          </p:cNvPr>
+          <p:cNvCxnSpPr/>
+          <p:nvPr/>
+        </p:nvCxnSpPr>
+        <p:spPr>
+          <a:xfrm>
+            <a:off x="351141" y="3890211"/>
+            <a:ext cx="2334126" cy="0"/>
+          </a:xfrm>
+          <a:prstGeom prst="line">
+            <a:avLst/>
+          </a:prstGeom>
+        </p:spPr>
+        <p:style>
+          <a:lnRef idx="3">
+            <a:schemeClr val="accent2"/>
+          </a:lnRef>
+          <a:fillRef idx="0">
+            <a:schemeClr val="accent2"/>
+          </a:fillRef>
+          <a:effectRef idx="2">
+            <a:schemeClr val="accent2"/>
+          </a:effectRef>
+          <a:fontRef idx="minor">
+            <a:schemeClr val="tx1"/>
+          </a:fontRef>
+        </p:style>
+      </p:cxnSp>
+      <p:sp>
+        <p:nvSpPr>
+          <p:cNvPr id="50" name="TextBox 49">
+            <a:extLst>
+              <a:ext uri="{FF2B5EF4-FFF2-40B4-BE49-F238E27FC236}">
+                <a16:creationId xmlns:a16="http://schemas.microsoft.com/office/drawing/2014/main" id="{DC3D5BFC-C2C7-4C0B-8CCD-B5F0EF51BD42}"/>
+              </a:ext>
+            </a:extLst>
+          </p:cNvPr>
+          <p:cNvSpPr txBox="1"/>
+          <p:nvPr/>
+        </p:nvSpPr>
+        <p:spPr>
+          <a:xfrm>
+            <a:off x="2181726" y="3609474"/>
+            <a:ext cx="606029" cy="369332"/>
+          </a:xfrm>
+          <a:prstGeom prst="rect">
+            <a:avLst/>
+          </a:prstGeom>
+          <a:noFill/>
+        </p:spPr>
+        <p:txBody>
+          <a:bodyPr wrap="square" rtlCol="0">
+            <a:spAutoFit/>
+          </a:bodyPr>
+          <a:lstStyle/>
+          <a:p>
+            <a:pPr algn="ctr"/>
+            <a:r>
+              <a:rPr lang="it-IT" dirty="0">
+                <a:solidFill>
+                  <a:schemeClr val="accent2"/>
+                </a:solidFill>
+              </a:rPr>
+              <a:t>300</a:t>
+            </a:r>
+            <a:endParaRPr lang="nl-NL" dirty="0">
+              <a:solidFill>
+                <a:schemeClr val="accent2"/>
+              </a:solidFill>
+            </a:endParaRPr>
+          </a:p>
+        </p:txBody>
+      </p:sp>
+      <p:cxnSp>
+        <p:nvCxnSpPr>
+          <p:cNvPr id="51" name="Straight Connector 50">
+            <a:extLst>
+              <a:ext uri="{FF2B5EF4-FFF2-40B4-BE49-F238E27FC236}">
+                <a16:creationId xmlns:a16="http://schemas.microsoft.com/office/drawing/2014/main" id="{44BEA9E8-8FA9-4EBF-ADB1-F15EF59D545A}"/>
+              </a:ext>
+            </a:extLst>
+          </p:cNvPr>
+          <p:cNvCxnSpPr/>
+          <p:nvPr/>
+        </p:nvCxnSpPr>
+        <p:spPr>
+          <a:xfrm>
+            <a:off x="3376752" y="5219798"/>
+            <a:ext cx="2334126" cy="0"/>
+          </a:xfrm>
+          <a:prstGeom prst="line">
+            <a:avLst/>
+          </a:prstGeom>
+        </p:spPr>
+        <p:style>
+          <a:lnRef idx="3">
+            <a:schemeClr val="accent2"/>
+          </a:lnRef>
+          <a:fillRef idx="0">
+            <a:schemeClr val="accent2"/>
+          </a:fillRef>
+          <a:effectRef idx="2">
+            <a:schemeClr val="accent2"/>
+          </a:effectRef>
+          <a:fontRef idx="minor">
+            <a:schemeClr val="tx1"/>
+          </a:fontRef>
+        </p:style>
+      </p:cxnSp>
+      <p:sp>
+        <p:nvSpPr>
+          <p:cNvPr id="52" name="TextBox 51">
+            <a:extLst>
+              <a:ext uri="{FF2B5EF4-FFF2-40B4-BE49-F238E27FC236}">
+                <a16:creationId xmlns:a16="http://schemas.microsoft.com/office/drawing/2014/main" id="{A166A446-0273-44CD-8582-FA57872289AC}"/>
+              </a:ext>
+            </a:extLst>
+          </p:cNvPr>
+          <p:cNvSpPr txBox="1"/>
+          <p:nvPr/>
+        </p:nvSpPr>
+        <p:spPr>
+          <a:xfrm>
+            <a:off x="5624542" y="5035132"/>
+            <a:ext cx="471458" cy="369332"/>
+          </a:xfrm>
+          <a:prstGeom prst="rect">
+            <a:avLst/>
+          </a:prstGeom>
+          <a:noFill/>
+        </p:spPr>
+        <p:txBody>
+          <a:bodyPr wrap="square" rtlCol="0">
+            <a:spAutoFit/>
+          </a:bodyPr>
+          <a:lstStyle/>
+          <a:p>
+            <a:pPr algn="ctr"/>
+            <a:r>
+              <a:rPr lang="it-IT" dirty="0">
+                <a:solidFill>
+                  <a:schemeClr val="accent2"/>
+                </a:solidFill>
+              </a:rPr>
+              <a:t>20</a:t>
+            </a:r>
+            <a:endParaRPr lang="nl-NL" dirty="0">
+              <a:solidFill>
+                <a:schemeClr val="accent2"/>
+              </a:solidFill>
+            </a:endParaRPr>
+          </a:p>
+        </p:txBody>
+      </p:sp>
+      <p:cxnSp>
+        <p:nvCxnSpPr>
+          <p:cNvPr id="53" name="Straight Connector 52">
+            <a:extLst>
+              <a:ext uri="{FF2B5EF4-FFF2-40B4-BE49-F238E27FC236}">
+                <a16:creationId xmlns:a16="http://schemas.microsoft.com/office/drawing/2014/main" id="{7EEC18CD-74D0-4FAF-8860-CE57F8D1CFA6}"/>
+              </a:ext>
+            </a:extLst>
+          </p:cNvPr>
+          <p:cNvCxnSpPr/>
+          <p:nvPr/>
+        </p:nvCxnSpPr>
+        <p:spPr>
+          <a:xfrm>
+            <a:off x="3382988" y="5112781"/>
+            <a:ext cx="2334126" cy="0"/>
+          </a:xfrm>
+          <a:prstGeom prst="line">
+            <a:avLst/>
+          </a:prstGeom>
+        </p:spPr>
+        <p:style>
+          <a:lnRef idx="3">
+            <a:schemeClr val="accent2"/>
+          </a:lnRef>
+          <a:fillRef idx="0">
+            <a:schemeClr val="accent2"/>
+          </a:fillRef>
+          <a:effectRef idx="2">
+            <a:schemeClr val="accent2"/>
+          </a:effectRef>
+          <a:fontRef idx="minor">
+            <a:schemeClr val="tx1"/>
+          </a:fontRef>
+        </p:style>
+      </p:cxnSp>
+      <p:sp>
+        <p:nvSpPr>
+          <p:cNvPr id="54" name="TextBox 53">
+            <a:extLst>
+              <a:ext uri="{FF2B5EF4-FFF2-40B4-BE49-F238E27FC236}">
+                <a16:creationId xmlns:a16="http://schemas.microsoft.com/office/drawing/2014/main" id="{79388AA8-1909-4DBD-B882-1AB427F2771E}"/>
+              </a:ext>
+            </a:extLst>
+          </p:cNvPr>
+          <p:cNvSpPr txBox="1"/>
+          <p:nvPr/>
+        </p:nvSpPr>
+        <p:spPr>
+          <a:xfrm>
+            <a:off x="5566173" y="4796958"/>
+            <a:ext cx="606029" cy="369332"/>
+          </a:xfrm>
+          <a:prstGeom prst="rect">
+            <a:avLst/>
+          </a:prstGeom>
+          <a:noFill/>
+        </p:spPr>
+        <p:txBody>
+          <a:bodyPr wrap="square" rtlCol="0">
+            <a:spAutoFit/>
+          </a:bodyPr>
+          <a:lstStyle/>
+          <a:p>
+            <a:pPr algn="ctr"/>
+            <a:r>
+              <a:rPr lang="it-IT" dirty="0">
+                <a:solidFill>
+                  <a:schemeClr val="accent2"/>
+                </a:solidFill>
+              </a:rPr>
+              <a:t>300</a:t>
+            </a:r>
+            <a:endParaRPr lang="nl-NL" dirty="0">
+              <a:solidFill>
+                <a:schemeClr val="accent2"/>
+              </a:solidFill>
+            </a:endParaRPr>
+          </a:p>
+        </p:txBody>
+      </p:sp>
+      <p:sp>
+        <p:nvSpPr>
+          <p:cNvPr id="55" name="Arrow: Right 54">
+            <a:extLst>
+              <a:ext uri="{FF2B5EF4-FFF2-40B4-BE49-F238E27FC236}">
+                <a16:creationId xmlns:a16="http://schemas.microsoft.com/office/drawing/2014/main" id="{CF186115-EF21-4E45-BA1A-F7A01B55B725}"/>
+              </a:ext>
+            </a:extLst>
+          </p:cNvPr>
+          <p:cNvSpPr/>
+          <p:nvPr/>
+        </p:nvSpPr>
+        <p:spPr>
+          <a:xfrm>
+            <a:off x="5654279" y="3364185"/>
+            <a:ext cx="1094205" cy="369332"/>
+          </a:xfrm>
+          <a:prstGeom prst="rightArrow">
+            <a:avLst/>
+          </a:prstGeom>
+        </p:spPr>
+        <p:style>
+          <a:lnRef idx="2">
+            <a:schemeClr val="accent2">
+              <a:shade val="50000"/>
+            </a:schemeClr>
+          </a:lnRef>
+          <a:fillRef idx="1">
+            <a:schemeClr val="accent2"/>
+          </a:fillRef>
+          <a:effectRef idx="0">
+            <a:schemeClr val="accent2"/>
+          </a:effectRef>
+          <a:fontRef idx="minor">
+            <a:schemeClr val="lt1"/>
+          </a:fontRef>
+        </p:style>
+        <p:txBody>
+          <a:bodyPr rtlCol="0" anchor="ctr"/>
+          <a:lstStyle/>
+          <a:p>
+            <a:pPr algn="ctr"/>
+            <a:endParaRPr lang="nl-NL"/>
+          </a:p>
+        </p:txBody>
+      </p:sp>
+      <p:sp>
+        <p:nvSpPr>
+          <p:cNvPr id="57" name="Oval 56">
+            <a:extLst>
+              <a:ext uri="{FF2B5EF4-FFF2-40B4-BE49-F238E27FC236}">
+                <a16:creationId xmlns:a16="http://schemas.microsoft.com/office/drawing/2014/main" id="{F946F1D0-67D6-45FC-AEDB-3F765ADB089F}"/>
+              </a:ext>
+            </a:extLst>
+          </p:cNvPr>
+          <p:cNvSpPr/>
+          <p:nvPr/>
+        </p:nvSpPr>
+        <p:spPr>
+          <a:xfrm>
+            <a:off x="1444235" y="4886330"/>
+            <a:ext cx="352926" cy="473862"/>
+          </a:xfrm>
+          <a:prstGeom prst="ellipse">
+            <a:avLst/>
+          </a:prstGeom>
+          <a:noFill/>
+          <a:ln w="9525" cap="flat" cmpd="sng" algn="ctr">
+            <a:solidFill>
+              <a:schemeClr val="accent1"/>
+            </a:solidFill>
+            <a:prstDash val="solid"/>
+            <a:round/>
+            <a:headEnd type="none" w="med" len="med"/>
+            <a:tailEnd type="none" w="med" len="med"/>
+          </a:ln>
+        </p:spPr>
+        <p:style>
+          <a:lnRef idx="0">
+            <a:scrgbClr r="0" g="0" b="0"/>
+          </a:lnRef>
+          <a:fillRef idx="0">
+            <a:scrgbClr r="0" g="0" b="0"/>
+          </a:fillRef>
+          <a:effectRef idx="0">
+            <a:scrgbClr r="0" g="0" b="0"/>
+          </a:effectRef>
+          <a:fontRef idx="minor">
+            <a:schemeClr val="accent1"/>
+          </a:fontRef>
+        </p:style>
+        <p:txBody>
+          <a:bodyPr rtlCol="0" anchor="ctr"/>
+          <a:lstStyle/>
+          <a:p>
+            <a:pPr algn="ctr"/>
+            <a:endParaRPr lang="nl-NL"/>
+          </a:p>
+        </p:txBody>
+      </p:sp>
+    </p:spTree>
+    <p:extLst>
+      <p:ext uri="{BB962C8B-B14F-4D97-AF65-F5344CB8AC3E}">
+        <p14:creationId xmlns:p14="http://schemas.microsoft.com/office/powerpoint/2010/main" val="2308014033"/>
+      </p:ext>
+    </p:extLst>
+  </p:cSld>
+  <p:clrMapOvr>
+    <a:masterClrMapping/>
+  </p:clrMapOvr>
+  <mc:AlternateContent xmlns:mc="http://schemas.openxmlformats.org/markup-compatibility/2006" xmlns:p159="http://schemas.microsoft.com/office/powerpoint/2015/09/main">
+    <mc:Choice Requires="p159">
+      <p:transition xmlns:p14="http://schemas.microsoft.com/office/powerpoint/2010/main" spd="slow" p14:dur="2000">
+        <p159:morph option="byObject"/>
+      </p:transition>
+    </mc:Choice>
+    <mc:Fallback xmlns="">
+      <p:transition spd="slow">
+        <p:fade/>
+      </p:transition>
+    </mc:Fallback>
+  </mc:AlternateContent>
+</p:sld>
+</file>
+
+<file path=ppt/slides/slide18.xml><?xml version="1.0" encoding="utf-8"?>
+<p:sld xmlns:a="http://schemas.openxmlformats.org/drawingml/2006/main" xmlns:r="http://schemas.openxmlformats.org/officeDocument/2006/relationships" xmlns:p="http://schemas.openxmlformats.org/presentationml/2006/main">
+  <p:cSld>
+    <p:spTree>
+      <p:nvGrpSpPr>
+        <p:cNvPr id="1" name=""/>
+        <p:cNvGrpSpPr/>
+        <p:nvPr/>
+      </p:nvGrpSpPr>
+      <p:grpSpPr>
+        <a:xfrm>
+          <a:off x="0" y="0"/>
+          <a:ext cx="0" cy="0"/>
+          <a:chOff x="0" y="0"/>
+          <a:chExt cx="0" cy="0"/>
+        </a:xfrm>
+      </p:grpSpPr>
+      <p:pic>
+        <p:nvPicPr>
+          <p:cNvPr id="2" name="Picture 1">
+            <a:extLst>
+              <a:ext uri="{FF2B5EF4-FFF2-40B4-BE49-F238E27FC236}">
+                <a16:creationId xmlns:a16="http://schemas.microsoft.com/office/drawing/2014/main" id="{EFCA64AE-70C0-46DC-9DE0-3BD016877CF0}"/>
+              </a:ext>
+            </a:extLst>
+          </p:cNvPr>
+          <p:cNvPicPr>
+            <a:picLocks noChangeAspect="1"/>
+          </p:cNvPicPr>
+          <p:nvPr/>
+        </p:nvPicPr>
+        <p:blipFill>
+          <a:blip r:embed="rId2">
+            <a:extLst>
+              <a:ext uri="{28A0092B-C50C-407E-A947-70E740481C1C}">
+                <a14:useLocalDpi xmlns:a14="http://schemas.microsoft.com/office/drawing/2010/main" val="0"/>
+              </a:ext>
+            </a:extLst>
+          </a:blip>
+          <a:stretch>
+            <a:fillRect/>
+          </a:stretch>
+        </p:blipFill>
+        <p:spPr>
+          <a:xfrm>
+            <a:off x="2471014" y="2125452"/>
+            <a:ext cx="7249970" cy="4405816"/>
+          </a:xfrm>
+          <a:prstGeom prst="rect">
+            <a:avLst/>
+          </a:prstGeom>
+        </p:spPr>
+      </p:pic>
+      <p:sp>
+        <p:nvSpPr>
+          <p:cNvPr id="3" name="TextBox 2">
+            <a:extLst>
+              <a:ext uri="{FF2B5EF4-FFF2-40B4-BE49-F238E27FC236}">
+                <a16:creationId xmlns:a16="http://schemas.microsoft.com/office/drawing/2014/main" id="{669BC41E-7A1B-450B-AE56-57E23EBB368B}"/>
+              </a:ext>
+            </a:extLst>
+          </p:cNvPr>
+          <p:cNvSpPr txBox="1"/>
+          <p:nvPr/>
+        </p:nvSpPr>
+        <p:spPr>
+          <a:xfrm>
+            <a:off x="0" y="0"/>
+            <a:ext cx="4395537" cy="369332"/>
+          </a:xfrm>
+          <a:prstGeom prst="rect">
+            <a:avLst/>
+          </a:prstGeom>
+          <a:noFill/>
+        </p:spPr>
+        <p:txBody>
+          <a:bodyPr wrap="square" rtlCol="0">
+            <a:spAutoFit/>
+          </a:bodyPr>
+          <a:lstStyle/>
+          <a:p>
+            <a:r>
+              <a:rPr lang="it-IT" u="sng" dirty="0"/>
+              <a:t>Blood Pressure Measurements - Outliers</a:t>
+            </a:r>
+            <a:endParaRPr lang="nl-NL" u="sng" dirty="0"/>
+          </a:p>
+        </p:txBody>
+      </p:sp>
+      <p:sp>
+        <p:nvSpPr>
+          <p:cNvPr id="4" name="TextBox 3">
+            <a:extLst>
+              <a:ext uri="{FF2B5EF4-FFF2-40B4-BE49-F238E27FC236}">
+                <a16:creationId xmlns:a16="http://schemas.microsoft.com/office/drawing/2014/main" id="{9D83727A-AEE6-4E01-9A07-195FB57628BF}"/>
+              </a:ext>
+            </a:extLst>
+          </p:cNvPr>
+          <p:cNvSpPr txBox="1"/>
+          <p:nvPr/>
+        </p:nvSpPr>
+        <p:spPr>
+          <a:xfrm>
+            <a:off x="2709862" y="811929"/>
+            <a:ext cx="6772275" cy="1200329"/>
+          </a:xfrm>
+          <a:prstGeom prst="rect">
+            <a:avLst/>
+          </a:prstGeom>
+          <a:noFill/>
+        </p:spPr>
+        <p:txBody>
+          <a:bodyPr wrap="square" rtlCol="0">
+            <a:spAutoFit/>
+          </a:bodyPr>
+          <a:lstStyle/>
+          <a:p>
+            <a:pPr algn="ctr"/>
+            <a:r>
+              <a:rPr lang="it-IT" sz="2400" dirty="0"/>
+              <a:t>Replaced with Mean value </a:t>
+            </a:r>
+          </a:p>
+          <a:p>
+            <a:pPr algn="ctr"/>
+            <a:r>
+              <a:rPr lang="it-IT" sz="2400" dirty="0"/>
+              <a:t>if </a:t>
+            </a:r>
+          </a:p>
+          <a:p>
+            <a:pPr algn="ctr"/>
+            <a:r>
+              <a:rPr lang="it-IT" sz="2400" dirty="0"/>
+              <a:t>|BP</a:t>
+            </a:r>
+            <a:r>
+              <a:rPr lang="it-IT" sz="2400" baseline="-25000" dirty="0"/>
+              <a:t>Sys,Dia</a:t>
+            </a:r>
+            <a:r>
+              <a:rPr lang="it-IT" sz="2400" dirty="0"/>
+              <a:t>| </a:t>
+            </a:r>
+            <a:r>
+              <a:rPr lang="nl-NL" sz="2400" dirty="0"/>
+              <a:t>&lt; 3·</a:t>
+            </a:r>
+            <a:r>
+              <a:rPr lang="el-GR" sz="2400" dirty="0"/>
+              <a:t>σ</a:t>
+            </a:r>
+            <a:endParaRPr lang="nl-NL" sz="2400" dirty="0"/>
+          </a:p>
+        </p:txBody>
+      </p:sp>
+    </p:spTree>
+    <p:extLst>
+      <p:ext uri="{BB962C8B-B14F-4D97-AF65-F5344CB8AC3E}">
+        <p14:creationId xmlns:p14="http://schemas.microsoft.com/office/powerpoint/2010/main" val="483860090"/>
+      </p:ext>
+    </p:extLst>
+  </p:cSld>
+  <p:clrMapOvr>
+    <a:masterClrMapping/>
+  </p:clrMapOvr>
+  <mc:AlternateContent xmlns:mc="http://schemas.openxmlformats.org/markup-compatibility/2006" xmlns:p159="http://schemas.microsoft.com/office/powerpoint/2015/09/main">
+    <mc:Choice Requires="p159">
+      <p:transition xmlns:p14="http://schemas.microsoft.com/office/powerpoint/2010/main" spd="slow" p14:dur="2000">
+        <p159:morph option="byObject"/>
+      </p:transition>
+    </mc:Choice>
+    <mc:Fallback xmlns="">
+      <p:transition spd="slow">
+        <p:fade/>
+      </p:transition>
+    </mc:Fallback>
+  </mc:AlternateContent>
+</p:sld>
+</file>
+
+<file path=ppt/slides/slide19.xml><?xml version="1.0" encoding="utf-8"?>
+<p:sld xmlns:a="http://schemas.openxmlformats.org/drawingml/2006/main" xmlns:r="http://schemas.openxmlformats.org/officeDocument/2006/relationships" xmlns:p="http://schemas.openxmlformats.org/presentationml/2006/main">
+  <p:cSld>
+    <p:spTree>
+      <p:nvGrpSpPr>
+        <p:cNvPr id="1" name=""/>
+        <p:cNvGrpSpPr/>
+        <p:nvPr/>
+      </p:nvGrpSpPr>
+      <p:grpSpPr>
+        <a:xfrm>
+          <a:off x="0" y="0"/>
+          <a:ext cx="0" cy="0"/>
+          <a:chOff x="0" y="0"/>
+          <a:chExt cx="0" cy="0"/>
+        </a:xfrm>
+      </p:grpSpPr>
+      <p:sp>
+        <p:nvSpPr>
+          <p:cNvPr id="2" name="Title 1">
+            <a:extLst>
+              <a:ext uri="{FF2B5EF4-FFF2-40B4-BE49-F238E27FC236}">
                 <a16:creationId xmlns:a16="http://schemas.microsoft.com/office/drawing/2014/main" id="{E2742523-2057-44B4-9FB1-A3B7126FBF7F}"/>
               </a:ext>
             </a:extLst>
@@ -4792,7 +6137,161 @@
 </p:sld>
 </file>
 
-<file path=ppt/slides/slide15.xml><?xml version="1.0" encoding="utf-8"?>
+<file path=ppt/slides/slide2.xml><?xml version="1.0" encoding="utf-8"?>
+<p:sld xmlns:a="http://schemas.openxmlformats.org/drawingml/2006/main" xmlns:r="http://schemas.openxmlformats.org/officeDocument/2006/relationships" xmlns:p="http://schemas.openxmlformats.org/presentationml/2006/main">
+  <p:cSld>
+    <p:spTree>
+      <p:nvGrpSpPr>
+        <p:cNvPr id="1" name=""/>
+        <p:cNvGrpSpPr/>
+        <p:nvPr/>
+      </p:nvGrpSpPr>
+      <p:grpSpPr>
+        <a:xfrm>
+          <a:off x="0" y="0"/>
+          <a:ext cx="0" cy="0"/>
+          <a:chOff x="0" y="0"/>
+          <a:chExt cx="0" cy="0"/>
+        </a:xfrm>
+      </p:grpSpPr>
+      <p:pic>
+        <p:nvPicPr>
+          <p:cNvPr id="3" name="Graphic 2">
+            <a:extLst>
+              <a:ext uri="{FF2B5EF4-FFF2-40B4-BE49-F238E27FC236}">
+                <a16:creationId xmlns:a16="http://schemas.microsoft.com/office/drawing/2014/main" id="{27A7B6BB-C9E7-42BB-9046-E7EF2AC5E8CA}"/>
+              </a:ext>
+            </a:extLst>
+          </p:cNvPr>
+          <p:cNvPicPr>
+            <a:picLocks noChangeAspect="1"/>
+          </p:cNvPicPr>
+          <p:nvPr/>
+        </p:nvPicPr>
+        <p:blipFill rotWithShape="1">
+          <a:blip r:embed="rId2">
+            <a:extLst>
+              <a:ext uri="{28A0092B-C50C-407E-A947-70E740481C1C}">
+                <a14:useLocalDpi xmlns:a14="http://schemas.microsoft.com/office/drawing/2010/main" val="0"/>
+              </a:ext>
+              <a:ext uri="{96DAC541-7B7A-43D3-8B79-37D633B846F1}">
+                <asvg:svgBlip xmlns:asvg="http://schemas.microsoft.com/office/drawing/2016/SVG/main" r:embed="rId3"/>
+              </a:ext>
+            </a:extLst>
+          </a:blip>
+          <a:srcRect l="4673" t="6127" r="2358" b="15388"/>
+          <a:stretch/>
+        </p:blipFill>
+        <p:spPr>
+          <a:xfrm>
+            <a:off x="561472" y="894345"/>
+            <a:ext cx="4427621" cy="3737807"/>
+          </a:xfrm>
+          <a:prstGeom prst="rect">
+            <a:avLst/>
+          </a:prstGeom>
+        </p:spPr>
+      </p:pic>
+      <p:pic>
+        <p:nvPicPr>
+          <p:cNvPr id="5" name="Graphic 4">
+            <a:extLst>
+              <a:ext uri="{FF2B5EF4-FFF2-40B4-BE49-F238E27FC236}">
+                <a16:creationId xmlns:a16="http://schemas.microsoft.com/office/drawing/2014/main" id="{37652BC0-FD39-45D2-8A89-277F3528032E}"/>
+              </a:ext>
+            </a:extLst>
+          </p:cNvPr>
+          <p:cNvPicPr>
+            <a:picLocks noChangeAspect="1"/>
+          </p:cNvPicPr>
+          <p:nvPr/>
+        </p:nvPicPr>
+        <p:blipFill rotWithShape="1">
+          <a:blip r:embed="rId4">
+            <a:extLst>
+              <a:ext uri="{28A0092B-C50C-407E-A947-70E740481C1C}">
+                <a14:useLocalDpi xmlns:a14="http://schemas.microsoft.com/office/drawing/2010/main" val="0"/>
+              </a:ext>
+              <a:ext uri="{96DAC541-7B7A-43D3-8B79-37D633B846F1}">
+                <asvg:svgBlip xmlns:asvg="http://schemas.microsoft.com/office/drawing/2016/SVG/main" r:embed="rId5"/>
+              </a:ext>
+            </a:extLst>
+          </a:blip>
+          <a:srcRect l="2842" t="1790" r="19895" b="9508"/>
+          <a:stretch/>
+        </p:blipFill>
+        <p:spPr>
+          <a:xfrm>
+            <a:off x="6096000" y="894345"/>
+            <a:ext cx="5534528" cy="4765426"/>
+          </a:xfrm>
+          <a:prstGeom prst="rect">
+            <a:avLst/>
+          </a:prstGeom>
+        </p:spPr>
+      </p:pic>
+      <p:sp>
+        <p:nvSpPr>
+          <p:cNvPr id="7" name="TextBox 6">
+            <a:extLst>
+              <a:ext uri="{FF2B5EF4-FFF2-40B4-BE49-F238E27FC236}">
+                <a16:creationId xmlns:a16="http://schemas.microsoft.com/office/drawing/2014/main" id="{2E91A7E8-B31F-4EB2-A136-C957064F6D69}"/>
+              </a:ext>
+            </a:extLst>
+          </p:cNvPr>
+          <p:cNvSpPr txBox="1"/>
+          <p:nvPr/>
+        </p:nvSpPr>
+        <p:spPr>
+          <a:xfrm>
+            <a:off x="0" y="0"/>
+            <a:ext cx="2542674" cy="369332"/>
+          </a:xfrm>
+          <a:prstGeom prst="rect">
+            <a:avLst/>
+          </a:prstGeom>
+          <a:noFill/>
+        </p:spPr>
+        <p:txBody>
+          <a:bodyPr wrap="square" rtlCol="0">
+            <a:spAutoFit/>
+          </a:bodyPr>
+          <a:lstStyle/>
+          <a:p>
+            <a:r>
+              <a:rPr lang="it-IT" u="sng" dirty="0"/>
+              <a:t>Patient ∩ Lab Meas</a:t>
+            </a:r>
+            <a:endParaRPr lang="nl-NL" u="sng" dirty="0"/>
+          </a:p>
+        </p:txBody>
+      </p:sp>
+    </p:spTree>
+    <p:extLst>
+      <p:ext uri="{BB962C8B-B14F-4D97-AF65-F5344CB8AC3E}">
+        <p14:creationId xmlns:p14="http://schemas.microsoft.com/office/powerpoint/2010/main" val="2129715"/>
+      </p:ext>
+    </p:extLst>
+  </p:cSld>
+  <p:clrMapOvr>
+    <a:masterClrMapping/>
+  </p:clrMapOvr>
+  <mc:AlternateContent xmlns:mc="http://schemas.openxmlformats.org/markup-compatibility/2006" xmlns:p159="http://schemas.microsoft.com/office/powerpoint/2015/09/main">
+    <mc:Choice Requires="p159">
+      <p:transition xmlns:p14="http://schemas.microsoft.com/office/powerpoint/2010/main" spd="slow" p14:dur="2000">
+        <p159:morph option="byObject"/>
+      </p:transition>
+    </mc:Choice>
+    <mc:Fallback xmlns="">
+      <p:transition spd="slow">
+        <p:fade/>
+      </p:transition>
+    </mc:Fallback>
+  </mc:AlternateContent>
+</p:sld>
+</file>
+
+<file path=ppt/slides/slide20.xml><?xml version="1.0" encoding="utf-8"?>
 <p:sld xmlns:a="http://schemas.openxmlformats.org/drawingml/2006/main" xmlns:r="http://schemas.openxmlformats.org/officeDocument/2006/relationships" xmlns:p="http://schemas.openxmlformats.org/presentationml/2006/main">
   <p:cSld>
     <p:spTree>
@@ -5143,7 +6642,7 @@
 </p:sld>
 </file>
 
-<file path=ppt/slides/slide16.xml><?xml version="1.0" encoding="utf-8"?>
+<file path=ppt/slides/slide21.xml><?xml version="1.0" encoding="utf-8"?>
 <p:sld xmlns:a="http://schemas.openxmlformats.org/drawingml/2006/main" xmlns:r="http://schemas.openxmlformats.org/officeDocument/2006/relationships" xmlns:p="http://schemas.openxmlformats.org/presentationml/2006/main">
   <p:cSld>
     <p:spTree>
@@ -5512,7 +7011,7 @@
 </p:sld>
 </file>
 
-<file path=ppt/slides/slide17.xml><?xml version="1.0" encoding="utf-8"?>
+<file path=ppt/slides/slide22.xml><?xml version="1.0" encoding="utf-8"?>
 <p:sld xmlns:a="http://schemas.openxmlformats.org/drawingml/2006/main" xmlns:r="http://schemas.openxmlformats.org/officeDocument/2006/relationships" xmlns:p="http://schemas.openxmlformats.org/presentationml/2006/main">
   <p:cSld>
     <p:spTree>
@@ -6004,7 +7503,7 @@
 </p:sld>
 </file>
 
-<file path=ppt/slides/slide18.xml><?xml version="1.0" encoding="utf-8"?>
+<file path=ppt/slides/slide23.xml><?xml version="1.0" encoding="utf-8"?>
 <p:sld xmlns:a="http://schemas.openxmlformats.org/drawingml/2006/main" xmlns:r="http://schemas.openxmlformats.org/officeDocument/2006/relationships" xmlns:p="http://schemas.openxmlformats.org/presentationml/2006/main">
   <p:cSld>
     <p:spTree>
@@ -6193,160 +7692,6 @@
     <p:extLst>
       <p:ext uri="{BB962C8B-B14F-4D97-AF65-F5344CB8AC3E}">
         <p14:creationId xmlns:p14="http://schemas.microsoft.com/office/powerpoint/2010/main" val="2652313884"/>
-      </p:ext>
-    </p:extLst>
-  </p:cSld>
-  <p:clrMapOvr>
-    <a:masterClrMapping/>
-  </p:clrMapOvr>
-  <mc:AlternateContent xmlns:mc="http://schemas.openxmlformats.org/markup-compatibility/2006" xmlns:p159="http://schemas.microsoft.com/office/powerpoint/2015/09/main">
-    <mc:Choice Requires="p159">
-      <p:transition xmlns:p14="http://schemas.microsoft.com/office/powerpoint/2010/main" spd="slow" p14:dur="2000">
-        <p159:morph option="byObject"/>
-      </p:transition>
-    </mc:Choice>
-    <mc:Fallback xmlns="">
-      <p:transition spd="slow">
-        <p:fade/>
-      </p:transition>
-    </mc:Fallback>
-  </mc:AlternateContent>
-</p:sld>
-</file>
-
-<file path=ppt/slides/slide2.xml><?xml version="1.0" encoding="utf-8"?>
-<p:sld xmlns:a="http://schemas.openxmlformats.org/drawingml/2006/main" xmlns:r="http://schemas.openxmlformats.org/officeDocument/2006/relationships" xmlns:p="http://schemas.openxmlformats.org/presentationml/2006/main">
-  <p:cSld>
-    <p:spTree>
-      <p:nvGrpSpPr>
-        <p:cNvPr id="1" name=""/>
-        <p:cNvGrpSpPr/>
-        <p:nvPr/>
-      </p:nvGrpSpPr>
-      <p:grpSpPr>
-        <a:xfrm>
-          <a:off x="0" y="0"/>
-          <a:ext cx="0" cy="0"/>
-          <a:chOff x="0" y="0"/>
-          <a:chExt cx="0" cy="0"/>
-        </a:xfrm>
-      </p:grpSpPr>
-      <p:pic>
-        <p:nvPicPr>
-          <p:cNvPr id="3" name="Graphic 2">
-            <a:extLst>
-              <a:ext uri="{FF2B5EF4-FFF2-40B4-BE49-F238E27FC236}">
-                <a16:creationId xmlns:a16="http://schemas.microsoft.com/office/drawing/2014/main" id="{27A7B6BB-C9E7-42BB-9046-E7EF2AC5E8CA}"/>
-              </a:ext>
-            </a:extLst>
-          </p:cNvPr>
-          <p:cNvPicPr>
-            <a:picLocks noChangeAspect="1"/>
-          </p:cNvPicPr>
-          <p:nvPr/>
-        </p:nvPicPr>
-        <p:blipFill rotWithShape="1">
-          <a:blip r:embed="rId2">
-            <a:extLst>
-              <a:ext uri="{28A0092B-C50C-407E-A947-70E740481C1C}">
-                <a14:useLocalDpi xmlns:a14="http://schemas.microsoft.com/office/drawing/2010/main" val="0"/>
-              </a:ext>
-              <a:ext uri="{96DAC541-7B7A-43D3-8B79-37D633B846F1}">
-                <asvg:svgBlip xmlns:asvg="http://schemas.microsoft.com/office/drawing/2016/SVG/main" r:embed="rId3"/>
-              </a:ext>
-            </a:extLst>
-          </a:blip>
-          <a:srcRect l="4673" t="6127" r="2358" b="15388"/>
-          <a:stretch/>
-        </p:blipFill>
-        <p:spPr>
-          <a:xfrm>
-            <a:off x="561472" y="894345"/>
-            <a:ext cx="4427621" cy="3737807"/>
-          </a:xfrm>
-          <a:prstGeom prst="rect">
-            <a:avLst/>
-          </a:prstGeom>
-        </p:spPr>
-      </p:pic>
-      <p:pic>
-        <p:nvPicPr>
-          <p:cNvPr id="5" name="Graphic 4">
-            <a:extLst>
-              <a:ext uri="{FF2B5EF4-FFF2-40B4-BE49-F238E27FC236}">
-                <a16:creationId xmlns:a16="http://schemas.microsoft.com/office/drawing/2014/main" id="{37652BC0-FD39-45D2-8A89-277F3528032E}"/>
-              </a:ext>
-            </a:extLst>
-          </p:cNvPr>
-          <p:cNvPicPr>
-            <a:picLocks noChangeAspect="1"/>
-          </p:cNvPicPr>
-          <p:nvPr/>
-        </p:nvPicPr>
-        <p:blipFill rotWithShape="1">
-          <a:blip r:embed="rId4">
-            <a:extLst>
-              <a:ext uri="{28A0092B-C50C-407E-A947-70E740481C1C}">
-                <a14:useLocalDpi xmlns:a14="http://schemas.microsoft.com/office/drawing/2010/main" val="0"/>
-              </a:ext>
-              <a:ext uri="{96DAC541-7B7A-43D3-8B79-37D633B846F1}">
-                <asvg:svgBlip xmlns:asvg="http://schemas.microsoft.com/office/drawing/2016/SVG/main" r:embed="rId5"/>
-              </a:ext>
-            </a:extLst>
-          </a:blip>
-          <a:srcRect l="2842" t="1790" r="19895" b="9508"/>
-          <a:stretch/>
-        </p:blipFill>
-        <p:spPr>
-          <a:xfrm>
-            <a:off x="6096000" y="894345"/>
-            <a:ext cx="5534528" cy="4765426"/>
-          </a:xfrm>
-          <a:prstGeom prst="rect">
-            <a:avLst/>
-          </a:prstGeom>
-        </p:spPr>
-      </p:pic>
-      <p:sp>
-        <p:nvSpPr>
-          <p:cNvPr id="7" name="TextBox 6">
-            <a:extLst>
-              <a:ext uri="{FF2B5EF4-FFF2-40B4-BE49-F238E27FC236}">
-                <a16:creationId xmlns:a16="http://schemas.microsoft.com/office/drawing/2014/main" id="{2E91A7E8-B31F-4EB2-A136-C957064F6D69}"/>
-              </a:ext>
-            </a:extLst>
-          </p:cNvPr>
-          <p:cNvSpPr txBox="1"/>
-          <p:nvPr/>
-        </p:nvSpPr>
-        <p:spPr>
-          <a:xfrm>
-            <a:off x="0" y="0"/>
-            <a:ext cx="2542674" cy="369332"/>
-          </a:xfrm>
-          <a:prstGeom prst="rect">
-            <a:avLst/>
-          </a:prstGeom>
-          <a:noFill/>
-        </p:spPr>
-        <p:txBody>
-          <a:bodyPr wrap="square" rtlCol="0">
-            <a:spAutoFit/>
-          </a:bodyPr>
-          <a:lstStyle/>
-          <a:p>
-            <a:r>
-              <a:rPr lang="it-IT" u="sng" dirty="0"/>
-              <a:t>Patient ∩ Lab Meas</a:t>
-            </a:r>
-            <a:endParaRPr lang="nl-NL" u="sng" dirty="0"/>
-          </a:p>
-        </p:txBody>
-      </p:sp>
-    </p:spTree>
-    <p:extLst>
-      <p:ext uri="{BB962C8B-B14F-4D97-AF65-F5344CB8AC3E}">
-        <p14:creationId xmlns:p14="http://schemas.microsoft.com/office/powerpoint/2010/main" val="2129715"/>
       </p:ext>
     </p:extLst>
   </p:cSld>

--- a/assets/ppt/data_exploration.pptx
+++ b/assets/ppt/data_exploration.pptx
@@ -4,30 +4,35 @@
   <p:sldMasterIdLst>
     <p:sldMasterId id="2147483648" r:id="rId1"/>
   </p:sldMasterIdLst>
+  <p:notesMasterIdLst>
+    <p:notesMasterId r:id="rId27"/>
+  </p:notesMasterIdLst>
   <p:sldIdLst>
     <p:sldId id="257" r:id="rId2"/>
     <p:sldId id="273" r:id="rId3"/>
     <p:sldId id="256" r:id="rId4"/>
     <p:sldId id="266" r:id="rId5"/>
     <p:sldId id="258" r:id="rId6"/>
-    <p:sldId id="262" r:id="rId7"/>
-    <p:sldId id="260" r:id="rId8"/>
-    <p:sldId id="261" r:id="rId9"/>
-    <p:sldId id="265" r:id="rId10"/>
-    <p:sldId id="264" r:id="rId11"/>
-    <p:sldId id="263" r:id="rId12"/>
-    <p:sldId id="259" r:id="rId13"/>
-    <p:sldId id="274" r:id="rId14"/>
-    <p:sldId id="275" r:id="rId15"/>
-    <p:sldId id="279" r:id="rId16"/>
-    <p:sldId id="278" r:id="rId17"/>
-    <p:sldId id="276" r:id="rId18"/>
-    <p:sldId id="277" r:id="rId19"/>
-    <p:sldId id="268" r:id="rId20"/>
-    <p:sldId id="269" r:id="rId21"/>
-    <p:sldId id="271" r:id="rId22"/>
-    <p:sldId id="272" r:id="rId23"/>
-    <p:sldId id="267" r:id="rId24"/>
+    <p:sldId id="280" r:id="rId7"/>
+    <p:sldId id="281" r:id="rId8"/>
+    <p:sldId id="262" r:id="rId9"/>
+    <p:sldId id="260" r:id="rId10"/>
+    <p:sldId id="261" r:id="rId11"/>
+    <p:sldId id="265" r:id="rId12"/>
+    <p:sldId id="264" r:id="rId13"/>
+    <p:sldId id="263" r:id="rId14"/>
+    <p:sldId id="259" r:id="rId15"/>
+    <p:sldId id="274" r:id="rId16"/>
+    <p:sldId id="275" r:id="rId17"/>
+    <p:sldId id="279" r:id="rId18"/>
+    <p:sldId id="278" r:id="rId19"/>
+    <p:sldId id="276" r:id="rId20"/>
+    <p:sldId id="277" r:id="rId21"/>
+    <p:sldId id="268" r:id="rId22"/>
+    <p:sldId id="269" r:id="rId23"/>
+    <p:sldId id="271" r:id="rId24"/>
+    <p:sldId id="272" r:id="rId25"/>
+    <p:sldId id="267" r:id="rId26"/>
   </p:sldIdLst>
   <p:sldSz cx="12192000" cy="6858000"/>
   <p:notesSz cx="6858000" cy="9144000"/>
@@ -946,6 +951,356 @@
 </cs:chartStyle>
 </file>
 
+<file path=ppt/notesMasters/notesMaster1.xml><?xml version="1.0" encoding="utf-8"?>
+<p:notesMaster xmlns:a="http://schemas.openxmlformats.org/drawingml/2006/main" xmlns:r="http://schemas.openxmlformats.org/officeDocument/2006/relationships" xmlns:p="http://schemas.openxmlformats.org/presentationml/2006/main">
+  <p:cSld>
+    <p:bg>
+      <p:bgRef idx="1001">
+        <a:schemeClr val="bg1"/>
+      </p:bgRef>
+    </p:bg>
+    <p:spTree>
+      <p:nvGrpSpPr>
+        <p:cNvPr id="1" name=""/>
+        <p:cNvGrpSpPr/>
+        <p:nvPr/>
+      </p:nvGrpSpPr>
+      <p:grpSpPr>
+        <a:xfrm>
+          <a:off x="0" y="0"/>
+          <a:ext cx="0" cy="0"/>
+          <a:chOff x="0" y="0"/>
+          <a:chExt cx="0" cy="0"/>
+        </a:xfrm>
+      </p:grpSpPr>
+      <p:sp>
+        <p:nvSpPr>
+          <p:cNvPr id="2" name="Header Placeholder 1"/>
+          <p:cNvSpPr>
+            <a:spLocks noGrp="1"/>
+          </p:cNvSpPr>
+          <p:nvPr>
+            <p:ph type="hdr" sz="quarter"/>
+          </p:nvPr>
+        </p:nvSpPr>
+        <p:spPr>
+          <a:xfrm>
+            <a:off x="0" y="0"/>
+            <a:ext cx="2971800" cy="458788"/>
+          </a:xfrm>
+          <a:prstGeom prst="rect">
+            <a:avLst/>
+          </a:prstGeom>
+        </p:spPr>
+        <p:txBody>
+          <a:bodyPr vert="horz" lIns="91440" tIns="45720" rIns="91440" bIns="45720" rtlCol="0"/>
+          <a:lstStyle>
+            <a:lvl1pPr algn="l">
+              <a:defRPr sz="1200"/>
+            </a:lvl1pPr>
+          </a:lstStyle>
+          <a:p>
+            <a:endParaRPr lang="nl-NL"/>
+          </a:p>
+        </p:txBody>
+      </p:sp>
+      <p:sp>
+        <p:nvSpPr>
+          <p:cNvPr id="3" name="Date Placeholder 2"/>
+          <p:cNvSpPr>
+            <a:spLocks noGrp="1"/>
+          </p:cNvSpPr>
+          <p:nvPr>
+            <p:ph type="dt" idx="1"/>
+          </p:nvPr>
+        </p:nvSpPr>
+        <p:spPr>
+          <a:xfrm>
+            <a:off x="3884613" y="0"/>
+            <a:ext cx="2971800" cy="458788"/>
+          </a:xfrm>
+          <a:prstGeom prst="rect">
+            <a:avLst/>
+          </a:prstGeom>
+        </p:spPr>
+        <p:txBody>
+          <a:bodyPr vert="horz" lIns="91440" tIns="45720" rIns="91440" bIns="45720" rtlCol="0"/>
+          <a:lstStyle>
+            <a:lvl1pPr algn="r">
+              <a:defRPr sz="1200"/>
+            </a:lvl1pPr>
+          </a:lstStyle>
+          <a:p>
+            <a:fld id="{511A67EE-E303-4967-962F-9A28980F7F51}" type="datetimeFigureOut">
+              <a:rPr lang="nl-NL" smtClean="0"/>
+              <a:t>26-8-2024</a:t>
+            </a:fld>
+            <a:endParaRPr lang="nl-NL"/>
+          </a:p>
+        </p:txBody>
+      </p:sp>
+      <p:sp>
+        <p:nvSpPr>
+          <p:cNvPr id="4" name="Slide Image Placeholder 3"/>
+          <p:cNvSpPr>
+            <a:spLocks noGrp="1" noRot="1" noChangeAspect="1"/>
+          </p:cNvSpPr>
+          <p:nvPr>
+            <p:ph type="sldImg" idx="2"/>
+          </p:nvPr>
+        </p:nvSpPr>
+        <p:spPr>
+          <a:xfrm>
+            <a:off x="685800" y="1143000"/>
+            <a:ext cx="5486400" cy="3086100"/>
+          </a:xfrm>
+          <a:prstGeom prst="rect">
+            <a:avLst/>
+          </a:prstGeom>
+          <a:noFill/>
+          <a:ln w="12700">
+            <a:solidFill>
+              <a:prstClr val="black"/>
+            </a:solidFill>
+          </a:ln>
+        </p:spPr>
+        <p:txBody>
+          <a:bodyPr vert="horz" lIns="91440" tIns="45720" rIns="91440" bIns="45720" rtlCol="0" anchor="ctr"/>
+          <a:lstStyle/>
+          <a:p>
+            <a:endParaRPr lang="nl-NL"/>
+          </a:p>
+        </p:txBody>
+      </p:sp>
+      <p:sp>
+        <p:nvSpPr>
+          <p:cNvPr id="5" name="Notes Placeholder 4"/>
+          <p:cNvSpPr>
+            <a:spLocks noGrp="1"/>
+          </p:cNvSpPr>
+          <p:nvPr>
+            <p:ph type="body" sz="quarter" idx="3"/>
+          </p:nvPr>
+        </p:nvSpPr>
+        <p:spPr>
+          <a:xfrm>
+            <a:off x="685800" y="4400550"/>
+            <a:ext cx="5486400" cy="3600450"/>
+          </a:xfrm>
+          <a:prstGeom prst="rect">
+            <a:avLst/>
+          </a:prstGeom>
+        </p:spPr>
+        <p:txBody>
+          <a:bodyPr vert="horz" lIns="91440" tIns="45720" rIns="91440" bIns="45720" rtlCol="0"/>
+          <a:lstStyle/>
+          <a:p>
+            <a:pPr lvl="0"/>
+            <a:r>
+              <a:rPr lang="en-US"/>
+              <a:t>Edit Master text styles</a:t>
+            </a:r>
+          </a:p>
+          <a:p>
+            <a:pPr lvl="1"/>
+            <a:r>
+              <a:rPr lang="en-US"/>
+              <a:t>Second level</a:t>
+            </a:r>
+          </a:p>
+          <a:p>
+            <a:pPr lvl="2"/>
+            <a:r>
+              <a:rPr lang="en-US"/>
+              <a:t>Third level</a:t>
+            </a:r>
+          </a:p>
+          <a:p>
+            <a:pPr lvl="3"/>
+            <a:r>
+              <a:rPr lang="en-US"/>
+              <a:t>Fourth level</a:t>
+            </a:r>
+          </a:p>
+          <a:p>
+            <a:pPr lvl="4"/>
+            <a:r>
+              <a:rPr lang="en-US"/>
+              <a:t>Fifth level</a:t>
+            </a:r>
+            <a:endParaRPr lang="nl-NL"/>
+          </a:p>
+        </p:txBody>
+      </p:sp>
+      <p:sp>
+        <p:nvSpPr>
+          <p:cNvPr id="6" name="Footer Placeholder 5"/>
+          <p:cNvSpPr>
+            <a:spLocks noGrp="1"/>
+          </p:cNvSpPr>
+          <p:nvPr>
+            <p:ph type="ftr" sz="quarter" idx="4"/>
+          </p:nvPr>
+        </p:nvSpPr>
+        <p:spPr>
+          <a:xfrm>
+            <a:off x="0" y="8685213"/>
+            <a:ext cx="2971800" cy="458787"/>
+          </a:xfrm>
+          <a:prstGeom prst="rect">
+            <a:avLst/>
+          </a:prstGeom>
+        </p:spPr>
+        <p:txBody>
+          <a:bodyPr vert="horz" lIns="91440" tIns="45720" rIns="91440" bIns="45720" rtlCol="0" anchor="b"/>
+          <a:lstStyle>
+            <a:lvl1pPr algn="l">
+              <a:defRPr sz="1200"/>
+            </a:lvl1pPr>
+          </a:lstStyle>
+          <a:p>
+            <a:endParaRPr lang="nl-NL"/>
+          </a:p>
+        </p:txBody>
+      </p:sp>
+      <p:sp>
+        <p:nvSpPr>
+          <p:cNvPr id="7" name="Slide Number Placeholder 6"/>
+          <p:cNvSpPr>
+            <a:spLocks noGrp="1"/>
+          </p:cNvSpPr>
+          <p:nvPr>
+            <p:ph type="sldNum" sz="quarter" idx="5"/>
+          </p:nvPr>
+        </p:nvSpPr>
+        <p:spPr>
+          <a:xfrm>
+            <a:off x="3884613" y="8685213"/>
+            <a:ext cx="2971800" cy="458787"/>
+          </a:xfrm>
+          <a:prstGeom prst="rect">
+            <a:avLst/>
+          </a:prstGeom>
+        </p:spPr>
+        <p:txBody>
+          <a:bodyPr vert="horz" lIns="91440" tIns="45720" rIns="91440" bIns="45720" rtlCol="0" anchor="b"/>
+          <a:lstStyle>
+            <a:lvl1pPr algn="r">
+              <a:defRPr sz="1200"/>
+            </a:lvl1pPr>
+          </a:lstStyle>
+          <a:p>
+            <a:fld id="{3DC5567A-7AFB-4BD5-B29D-942703DBBD9B}" type="slidenum">
+              <a:rPr lang="nl-NL" smtClean="0"/>
+              <a:t>‹#›</a:t>
+            </a:fld>
+            <a:endParaRPr lang="nl-NL"/>
+          </a:p>
+        </p:txBody>
+      </p:sp>
+    </p:spTree>
+    <p:extLst>
+      <p:ext uri="{BB962C8B-B14F-4D97-AF65-F5344CB8AC3E}">
+        <p14:creationId xmlns:p14="http://schemas.microsoft.com/office/powerpoint/2010/main" val="231062560"/>
+      </p:ext>
+    </p:extLst>
+  </p:cSld>
+  <p:clrMap bg1="lt1" tx1="dk1" bg2="lt2" tx2="dk2" accent1="accent1" accent2="accent2" accent3="accent3" accent4="accent4" accent5="accent5" accent6="accent6" hlink="hlink" folHlink="folHlink"/>
+  <p:notesStyle>
+    <a:lvl1pPr marL="0" algn="l" defTabSz="914400" rtl="0" eaLnBrk="1" latinLnBrk="0" hangingPunct="1">
+      <a:defRPr sz="1200" kern="1200">
+        <a:solidFill>
+          <a:schemeClr val="tx1"/>
+        </a:solidFill>
+        <a:latin typeface="+mn-lt"/>
+        <a:ea typeface="+mn-ea"/>
+        <a:cs typeface="+mn-cs"/>
+      </a:defRPr>
+    </a:lvl1pPr>
+    <a:lvl2pPr marL="457200" algn="l" defTabSz="914400" rtl="0" eaLnBrk="1" latinLnBrk="0" hangingPunct="1">
+      <a:defRPr sz="1200" kern="1200">
+        <a:solidFill>
+          <a:schemeClr val="tx1"/>
+        </a:solidFill>
+        <a:latin typeface="+mn-lt"/>
+        <a:ea typeface="+mn-ea"/>
+        <a:cs typeface="+mn-cs"/>
+      </a:defRPr>
+    </a:lvl2pPr>
+    <a:lvl3pPr marL="914400" algn="l" defTabSz="914400" rtl="0" eaLnBrk="1" latinLnBrk="0" hangingPunct="1">
+      <a:defRPr sz="1200" kern="1200">
+        <a:solidFill>
+          <a:schemeClr val="tx1"/>
+        </a:solidFill>
+        <a:latin typeface="+mn-lt"/>
+        <a:ea typeface="+mn-ea"/>
+        <a:cs typeface="+mn-cs"/>
+      </a:defRPr>
+    </a:lvl3pPr>
+    <a:lvl4pPr marL="1371600" algn="l" defTabSz="914400" rtl="0" eaLnBrk="1" latinLnBrk="0" hangingPunct="1">
+      <a:defRPr sz="1200" kern="1200">
+        <a:solidFill>
+          <a:schemeClr val="tx1"/>
+        </a:solidFill>
+        <a:latin typeface="+mn-lt"/>
+        <a:ea typeface="+mn-ea"/>
+        <a:cs typeface="+mn-cs"/>
+      </a:defRPr>
+    </a:lvl4pPr>
+    <a:lvl5pPr marL="1828800" algn="l" defTabSz="914400" rtl="0" eaLnBrk="1" latinLnBrk="0" hangingPunct="1">
+      <a:defRPr sz="1200" kern="1200">
+        <a:solidFill>
+          <a:schemeClr val="tx1"/>
+        </a:solidFill>
+        <a:latin typeface="+mn-lt"/>
+        <a:ea typeface="+mn-ea"/>
+        <a:cs typeface="+mn-cs"/>
+      </a:defRPr>
+    </a:lvl5pPr>
+    <a:lvl6pPr marL="2286000" algn="l" defTabSz="914400" rtl="0" eaLnBrk="1" latinLnBrk="0" hangingPunct="1">
+      <a:defRPr sz="1200" kern="1200">
+        <a:solidFill>
+          <a:schemeClr val="tx1"/>
+        </a:solidFill>
+        <a:latin typeface="+mn-lt"/>
+        <a:ea typeface="+mn-ea"/>
+        <a:cs typeface="+mn-cs"/>
+      </a:defRPr>
+    </a:lvl6pPr>
+    <a:lvl7pPr marL="2743200" algn="l" defTabSz="914400" rtl="0" eaLnBrk="1" latinLnBrk="0" hangingPunct="1">
+      <a:defRPr sz="1200" kern="1200">
+        <a:solidFill>
+          <a:schemeClr val="tx1"/>
+        </a:solidFill>
+        <a:latin typeface="+mn-lt"/>
+        <a:ea typeface="+mn-ea"/>
+        <a:cs typeface="+mn-cs"/>
+      </a:defRPr>
+    </a:lvl7pPr>
+    <a:lvl8pPr marL="3200400" algn="l" defTabSz="914400" rtl="0" eaLnBrk="1" latinLnBrk="0" hangingPunct="1">
+      <a:defRPr sz="1200" kern="1200">
+        <a:solidFill>
+          <a:schemeClr val="tx1"/>
+        </a:solidFill>
+        <a:latin typeface="+mn-lt"/>
+        <a:ea typeface="+mn-ea"/>
+        <a:cs typeface="+mn-cs"/>
+      </a:defRPr>
+    </a:lvl8pPr>
+    <a:lvl9pPr marL="3657600" algn="l" defTabSz="914400" rtl="0" eaLnBrk="1" latinLnBrk="0" hangingPunct="1">
+      <a:defRPr sz="1200" kern="1200">
+        <a:solidFill>
+          <a:schemeClr val="tx1"/>
+        </a:solidFill>
+        <a:latin typeface="+mn-lt"/>
+        <a:ea typeface="+mn-ea"/>
+        <a:cs typeface="+mn-cs"/>
+      </a:defRPr>
+    </a:lvl9pPr>
+  </p:notesStyle>
+</p:notesMaster>
+</file>
+
 <file path=ppt/slideLayouts/slideLayout1.xml><?xml version="1.0" encoding="utf-8"?>
 <p:sldLayout xmlns:a="http://schemas.openxmlformats.org/drawingml/2006/main" xmlns:r="http://schemas.openxmlformats.org/officeDocument/2006/relationships" xmlns:p="http://schemas.openxmlformats.org/presentationml/2006/main" type="title" preserve="1">
   <p:cSld name="Title Slide">
@@ -1093,9 +1448,9 @@
           <a:bodyPr/>
           <a:lstStyle/>
           <a:p>
-            <a:fld id="{13286422-5540-4AA8-A2A3-FD24E383623F}" type="datetimeFigureOut">
+            <a:fld id="{FED566F3-1D76-4AEC-ABE9-AFABCF495913}" type="datetime1">
               <a:rPr lang="nl-NL" smtClean="0"/>
-              <a:t>23-8-2024</a:t>
+              <a:t>26-8-2024</a:t>
             </a:fld>
             <a:endParaRPr lang="nl-NL"/>
           </a:p>
@@ -1305,9 +1660,9 @@
           <a:bodyPr/>
           <a:lstStyle/>
           <a:p>
-            <a:fld id="{13286422-5540-4AA8-A2A3-FD24E383623F}" type="datetimeFigureOut">
+            <a:fld id="{BC7E55A1-B228-4CF1-BFC3-6AC3B8574AC2}" type="datetime1">
               <a:rPr lang="nl-NL" smtClean="0"/>
-              <a:t>23-8-2024</a:t>
+              <a:t>26-8-2024</a:t>
             </a:fld>
             <a:endParaRPr lang="nl-NL"/>
           </a:p>
@@ -1527,9 +1882,9 @@
           <a:bodyPr/>
           <a:lstStyle/>
           <a:p>
-            <a:fld id="{13286422-5540-4AA8-A2A3-FD24E383623F}" type="datetimeFigureOut">
+            <a:fld id="{31AEBC58-6519-439D-8982-F0178170B57B}" type="datetime1">
               <a:rPr lang="nl-NL" smtClean="0"/>
-              <a:t>23-8-2024</a:t>
+              <a:t>26-8-2024</a:t>
             </a:fld>
             <a:endParaRPr lang="nl-NL"/>
           </a:p>
@@ -1739,9 +2094,9 @@
           <a:bodyPr/>
           <a:lstStyle/>
           <a:p>
-            <a:fld id="{13286422-5540-4AA8-A2A3-FD24E383623F}" type="datetimeFigureOut">
+            <a:fld id="{86DED964-D172-498F-BB83-2F7DE2692B37}" type="datetime1">
               <a:rPr lang="nl-NL" smtClean="0"/>
-              <a:t>23-8-2024</a:t>
+              <a:t>26-8-2024</a:t>
             </a:fld>
             <a:endParaRPr lang="nl-NL"/>
           </a:p>
@@ -2027,9 +2382,9 @@
           <a:bodyPr/>
           <a:lstStyle/>
           <a:p>
-            <a:fld id="{13286422-5540-4AA8-A2A3-FD24E383623F}" type="datetimeFigureOut">
+            <a:fld id="{230F72AC-D91D-48F5-81B4-4889AEA39D06}" type="datetime1">
               <a:rPr lang="nl-NL" smtClean="0"/>
-              <a:t>23-8-2024</a:t>
+              <a:t>26-8-2024</a:t>
             </a:fld>
             <a:endParaRPr lang="nl-NL"/>
           </a:p>
@@ -2307,9 +2662,9 @@
           <a:bodyPr/>
           <a:lstStyle/>
           <a:p>
-            <a:fld id="{13286422-5540-4AA8-A2A3-FD24E383623F}" type="datetimeFigureOut">
+            <a:fld id="{A0669485-26A9-497C-AD22-BCEA88DF9055}" type="datetime1">
               <a:rPr lang="nl-NL" smtClean="0"/>
-              <a:t>23-8-2024</a:t>
+              <a:t>26-8-2024</a:t>
             </a:fld>
             <a:endParaRPr lang="nl-NL"/>
           </a:p>
@@ -2734,9 +3089,9 @@
           <a:bodyPr/>
           <a:lstStyle/>
           <a:p>
-            <a:fld id="{13286422-5540-4AA8-A2A3-FD24E383623F}" type="datetimeFigureOut">
+            <a:fld id="{6216D00C-0C62-40DF-B6FF-B9A70701552F}" type="datetime1">
               <a:rPr lang="nl-NL" smtClean="0"/>
-              <a:t>23-8-2024</a:t>
+              <a:t>26-8-2024</a:t>
             </a:fld>
             <a:endParaRPr lang="nl-NL"/>
           </a:p>
@@ -2888,9 +3243,9 @@
           <a:bodyPr/>
           <a:lstStyle/>
           <a:p>
-            <a:fld id="{13286422-5540-4AA8-A2A3-FD24E383623F}" type="datetimeFigureOut">
+            <a:fld id="{88FE9515-DD39-459B-B4EF-789D74C861A5}" type="datetime1">
               <a:rPr lang="nl-NL" smtClean="0"/>
-              <a:t>23-8-2024</a:t>
+              <a:t>26-8-2024</a:t>
             </a:fld>
             <a:endParaRPr lang="nl-NL"/>
           </a:p>
@@ -3013,9 +3368,9 @@
           <a:bodyPr/>
           <a:lstStyle/>
           <a:p>
-            <a:fld id="{13286422-5540-4AA8-A2A3-FD24E383623F}" type="datetimeFigureOut">
+            <a:fld id="{DFA27954-A76F-4E23-8576-A7D9667CDBCC}" type="datetime1">
               <a:rPr lang="nl-NL" smtClean="0"/>
-              <a:t>23-8-2024</a:t>
+              <a:t>26-8-2024</a:t>
             </a:fld>
             <a:endParaRPr lang="nl-NL"/>
           </a:p>
@@ -3338,9 +3693,9 @@
           <a:bodyPr/>
           <a:lstStyle/>
           <a:p>
-            <a:fld id="{13286422-5540-4AA8-A2A3-FD24E383623F}" type="datetimeFigureOut">
+            <a:fld id="{53C17D54-D850-41AA-94F6-0F7316E4F326}" type="datetime1">
               <a:rPr lang="nl-NL" smtClean="0"/>
-              <a:t>23-8-2024</a:t>
+              <a:t>26-8-2024</a:t>
             </a:fld>
             <a:endParaRPr lang="nl-NL"/>
           </a:p>
@@ -3639,9 +3994,9 @@
           <a:bodyPr/>
           <a:lstStyle/>
           <a:p>
-            <a:fld id="{13286422-5540-4AA8-A2A3-FD24E383623F}" type="datetimeFigureOut">
+            <a:fld id="{0596A96E-3739-43D3-93E5-DAA507EA7B79}" type="datetime1">
               <a:rPr lang="nl-NL" smtClean="0"/>
-              <a:t>23-8-2024</a:t>
+              <a:t>26-8-2024</a:t>
             </a:fld>
             <a:endParaRPr lang="nl-NL"/>
           </a:p>
@@ -3894,9 +4249,9 @@
             </a:lvl1pPr>
           </a:lstStyle>
           <a:p>
-            <a:fld id="{13286422-5540-4AA8-A2A3-FD24E383623F}" type="datetimeFigureOut">
+            <a:fld id="{CFBB0748-A22F-4137-ADB1-6D5A09F7B1DF}" type="datetime1">
               <a:rPr lang="nl-NL" smtClean="0"/>
-              <a:t>23-8-2024</a:t>
+              <a:t>26-8-2024</a:t>
             </a:fld>
             <a:endParaRPr lang="nl-NL"/>
           </a:p>
@@ -4025,6 +4380,7 @@
       </p:transition>
     </mc:Fallback>
   </mc:AlternateContent>
+  <p:hf sldNum="0" hdr="0" ftr="0" dt="0"/>
   <p:txStyles>
     <p:titleStyle>
       <a:lvl1pPr algn="l" defTabSz="914400" rtl="0" eaLnBrk="1" latinLnBrk="0" hangingPunct="1">
@@ -4398,10 +4754,10 @@
       </p:grpSpPr>
       <p:pic>
         <p:nvPicPr>
-          <p:cNvPr id="5" name="Picture 4">
-            <a:extLst>
-              <a:ext uri="{FF2B5EF4-FFF2-40B4-BE49-F238E27FC236}">
-                <a16:creationId xmlns:a16="http://schemas.microsoft.com/office/drawing/2014/main" id="{959EC944-F65A-4355-9EE4-D17542B2E581}"/>
+          <p:cNvPr id="3" name="Graphic 2">
+            <a:extLst>
+              <a:ext uri="{FF2B5EF4-FFF2-40B4-BE49-F238E27FC236}">
+                <a16:creationId xmlns:a16="http://schemas.microsoft.com/office/drawing/2014/main" id="{5104F63A-8305-48CC-A7C8-38D27F499ADB}"/>
               </a:ext>
             </a:extLst>
           </p:cNvPr>
@@ -4416,6 +4772,9 @@
               <a:ext uri="{28A0092B-C50C-407E-A947-70E740481C1C}">
                 <a14:useLocalDpi xmlns:a14="http://schemas.microsoft.com/office/drawing/2010/main" val="0"/>
               </a:ext>
+              <a:ext uri="{96DAC541-7B7A-43D3-8B79-37D633B846F1}">
+                <asvg:svgBlip xmlns:asvg="http://schemas.microsoft.com/office/drawing/2016/SVG/main" r:embed="rId3"/>
+              </a:ext>
             </a:extLst>
           </a:blip>
           <a:stretch>
@@ -4424,54 +4783,213 @@
         </p:blipFill>
         <p:spPr>
           <a:xfrm>
-            <a:off x="0" y="552432"/>
-            <a:ext cx="12192000" cy="5753136"/>
+            <a:off x="6955860" y="3300410"/>
+            <a:ext cx="4471895" cy="3357563"/>
           </a:xfrm>
           <a:prstGeom prst="rect">
             <a:avLst/>
           </a:prstGeom>
         </p:spPr>
       </p:pic>
-      <p:sp>
-        <p:nvSpPr>
-          <p:cNvPr id="6" name="TextBox 5">
-            <a:extLst>
-              <a:ext uri="{FF2B5EF4-FFF2-40B4-BE49-F238E27FC236}">
-                <a16:creationId xmlns:a16="http://schemas.microsoft.com/office/drawing/2014/main" id="{49B55110-826E-47CF-A5A8-A85A55A8AEE0}"/>
-              </a:ext>
-            </a:extLst>
-          </p:cNvPr>
-          <p:cNvSpPr txBox="1"/>
+      <p:pic>
+        <p:nvPicPr>
+          <p:cNvPr id="5" name="Graphic 4">
+            <a:extLst>
+              <a:ext uri="{FF2B5EF4-FFF2-40B4-BE49-F238E27FC236}">
+                <a16:creationId xmlns:a16="http://schemas.microsoft.com/office/drawing/2014/main" id="{B68B9AC6-63AF-4D04-8412-F617E4BD1E25}"/>
+              </a:ext>
+            </a:extLst>
+          </p:cNvPr>
+          <p:cNvPicPr>
+            <a:picLocks noChangeAspect="1"/>
+          </p:cNvPicPr>
           <p:nvPr/>
-        </p:nvSpPr>
+        </p:nvPicPr>
+        <p:blipFill>
+          <a:blip r:embed="rId4">
+            <a:extLst>
+              <a:ext uri="{28A0092B-C50C-407E-A947-70E740481C1C}">
+                <a14:useLocalDpi xmlns:a14="http://schemas.microsoft.com/office/drawing/2010/main" val="0"/>
+              </a:ext>
+              <a:ext uri="{96DAC541-7B7A-43D3-8B79-37D633B846F1}">
+                <asvg:svgBlip xmlns:asvg="http://schemas.microsoft.com/office/drawing/2016/SVG/main" r:embed="rId5"/>
+              </a:ext>
+            </a:extLst>
+          </a:blip>
+          <a:stretch>
+            <a:fillRect/>
+          </a:stretch>
+        </p:blipFill>
         <p:spPr>
           <a:xfrm>
-            <a:off x="0" y="-5807"/>
-            <a:ext cx="2524369" cy="369332"/>
+            <a:off x="915392" y="3300411"/>
+            <a:ext cx="4471895" cy="3357563"/>
           </a:xfrm>
           <a:prstGeom prst="rect">
             <a:avLst/>
           </a:prstGeom>
-          <a:noFill/>
         </p:spPr>
-        <p:txBody>
-          <a:bodyPr wrap="square" rtlCol="0">
-            <a:spAutoFit/>
-          </a:bodyPr>
-          <a:lstStyle/>
-          <a:p>
-            <a:r>
-              <a:rPr lang="it-IT" u="sng" dirty="0"/>
-              <a:t>Imputed Values</a:t>
-            </a:r>
-            <a:endParaRPr lang="nl-NL" u="sng" dirty="0"/>
-          </a:p>
-        </p:txBody>
-      </p:sp>
+      </p:pic>
+      <p:pic>
+        <p:nvPicPr>
+          <p:cNvPr id="7" name="Graphic 6">
+            <a:extLst>
+              <a:ext uri="{FF2B5EF4-FFF2-40B4-BE49-F238E27FC236}">
+                <a16:creationId xmlns:a16="http://schemas.microsoft.com/office/drawing/2014/main" id="{A67BD1E4-1078-48C8-A0CC-A8F92079F4D0}"/>
+              </a:ext>
+            </a:extLst>
+          </p:cNvPr>
+          <p:cNvPicPr>
+            <a:picLocks noChangeAspect="1"/>
+          </p:cNvPicPr>
+          <p:nvPr/>
+        </p:nvPicPr>
+        <p:blipFill>
+          <a:blip r:embed="rId6">
+            <a:extLst>
+              <a:ext uri="{28A0092B-C50C-407E-A947-70E740481C1C}">
+                <a14:useLocalDpi xmlns:a14="http://schemas.microsoft.com/office/drawing/2010/main" val="0"/>
+              </a:ext>
+              <a:ext uri="{96DAC541-7B7A-43D3-8B79-37D633B846F1}">
+                <asvg:svgBlip xmlns:asvg="http://schemas.microsoft.com/office/drawing/2016/SVG/main" r:embed="rId7"/>
+              </a:ext>
+            </a:extLst>
+          </a:blip>
+          <a:stretch>
+            <a:fillRect/>
+          </a:stretch>
+        </p:blipFill>
+        <p:spPr>
+          <a:xfrm>
+            <a:off x="8416461" y="0"/>
+            <a:ext cx="4471895" cy="3357563"/>
+          </a:xfrm>
+          <a:prstGeom prst="rect">
+            <a:avLst/>
+          </a:prstGeom>
+        </p:spPr>
+      </p:pic>
+      <p:pic>
+        <p:nvPicPr>
+          <p:cNvPr id="9" name="Graphic 8">
+            <a:extLst>
+              <a:ext uri="{FF2B5EF4-FFF2-40B4-BE49-F238E27FC236}">
+                <a16:creationId xmlns:a16="http://schemas.microsoft.com/office/drawing/2014/main" id="{9FBB4D53-4F61-4420-B2EA-5DBB2190FBDD}"/>
+              </a:ext>
+            </a:extLst>
+          </p:cNvPr>
+          <p:cNvPicPr>
+            <a:picLocks noChangeAspect="1"/>
+          </p:cNvPicPr>
+          <p:nvPr/>
+        </p:nvPicPr>
+        <p:blipFill>
+          <a:blip r:embed="rId8">
+            <a:extLst>
+              <a:ext uri="{28A0092B-C50C-407E-A947-70E740481C1C}">
+                <a14:useLocalDpi xmlns:a14="http://schemas.microsoft.com/office/drawing/2010/main" val="0"/>
+              </a:ext>
+              <a:ext uri="{96DAC541-7B7A-43D3-8B79-37D633B846F1}">
+                <asvg:svgBlip xmlns:asvg="http://schemas.microsoft.com/office/drawing/2016/SVG/main" r:embed="rId9"/>
+              </a:ext>
+            </a:extLst>
+          </a:blip>
+          <a:stretch>
+            <a:fillRect/>
+          </a:stretch>
+        </p:blipFill>
+        <p:spPr>
+          <a:xfrm>
+            <a:off x="5405166" y="0"/>
+            <a:ext cx="4471895" cy="3357563"/>
+          </a:xfrm>
+          <a:prstGeom prst="rect">
+            <a:avLst/>
+          </a:prstGeom>
+        </p:spPr>
+      </p:pic>
+      <p:pic>
+        <p:nvPicPr>
+          <p:cNvPr id="11" name="Graphic 10">
+            <a:extLst>
+              <a:ext uri="{FF2B5EF4-FFF2-40B4-BE49-F238E27FC236}">
+                <a16:creationId xmlns:a16="http://schemas.microsoft.com/office/drawing/2014/main" id="{9947BBB5-44C5-48CF-969E-441FAF4420ED}"/>
+              </a:ext>
+            </a:extLst>
+          </p:cNvPr>
+          <p:cNvPicPr>
+            <a:picLocks noChangeAspect="1"/>
+          </p:cNvPicPr>
+          <p:nvPr/>
+        </p:nvPicPr>
+        <p:blipFill>
+          <a:blip r:embed="rId10">
+            <a:extLst>
+              <a:ext uri="{28A0092B-C50C-407E-A947-70E740481C1C}">
+                <a14:useLocalDpi xmlns:a14="http://schemas.microsoft.com/office/drawing/2010/main" val="0"/>
+              </a:ext>
+              <a:ext uri="{96DAC541-7B7A-43D3-8B79-37D633B846F1}">
+                <asvg:svgBlip xmlns:asvg="http://schemas.microsoft.com/office/drawing/2016/SVG/main" r:embed="rId11"/>
+              </a:ext>
+            </a:extLst>
+          </a:blip>
+          <a:stretch>
+            <a:fillRect/>
+          </a:stretch>
+        </p:blipFill>
+        <p:spPr>
+          <a:xfrm>
+            <a:off x="2314940" y="0"/>
+            <a:ext cx="4471895" cy="3357563"/>
+          </a:xfrm>
+          <a:prstGeom prst="rect">
+            <a:avLst/>
+          </a:prstGeom>
+        </p:spPr>
+      </p:pic>
+      <p:pic>
+        <p:nvPicPr>
+          <p:cNvPr id="13" name="Graphic 12">
+            <a:extLst>
+              <a:ext uri="{FF2B5EF4-FFF2-40B4-BE49-F238E27FC236}">
+                <a16:creationId xmlns:a16="http://schemas.microsoft.com/office/drawing/2014/main" id="{FC69359F-A5B2-4EC6-BD2E-74DFBA522CFC}"/>
+              </a:ext>
+            </a:extLst>
+          </p:cNvPr>
+          <p:cNvPicPr>
+            <a:picLocks noChangeAspect="1"/>
+          </p:cNvPicPr>
+          <p:nvPr/>
+        </p:nvPicPr>
+        <p:blipFill>
+          <a:blip r:embed="rId12">
+            <a:extLst>
+              <a:ext uri="{28A0092B-C50C-407E-A947-70E740481C1C}">
+                <a14:useLocalDpi xmlns:a14="http://schemas.microsoft.com/office/drawing/2010/main" val="0"/>
+              </a:ext>
+              <a:ext uri="{96DAC541-7B7A-43D3-8B79-37D633B846F1}">
+                <asvg:svgBlip xmlns:asvg="http://schemas.microsoft.com/office/drawing/2016/SVG/main" r:embed="rId13"/>
+              </a:ext>
+            </a:extLst>
+          </a:blip>
+          <a:stretch>
+            <a:fillRect/>
+          </a:stretch>
+        </p:blipFill>
+        <p:spPr>
+          <a:xfrm>
+            <a:off x="-859675" y="-28577"/>
+            <a:ext cx="4471895" cy="3357563"/>
+          </a:xfrm>
+          <a:prstGeom prst="rect">
+            <a:avLst/>
+          </a:prstGeom>
+        </p:spPr>
+      </p:pic>
     </p:spTree>
     <p:extLst>
       <p:ext uri="{BB962C8B-B14F-4D97-AF65-F5344CB8AC3E}">
-        <p14:creationId xmlns:p14="http://schemas.microsoft.com/office/powerpoint/2010/main" val="1759352546"/>
+        <p14:creationId xmlns:p14="http://schemas.microsoft.com/office/powerpoint/2010/main" val="2926366783"/>
       </p:ext>
     </p:extLst>
   </p:cSld>
@@ -4512,10 +5030,10 @@
       </p:grpSpPr>
       <p:pic>
         <p:nvPicPr>
-          <p:cNvPr id="5" name="Picture 4">
-            <a:extLst>
-              <a:ext uri="{FF2B5EF4-FFF2-40B4-BE49-F238E27FC236}">
-                <a16:creationId xmlns:a16="http://schemas.microsoft.com/office/drawing/2014/main" id="{70962B23-E15F-4BCF-9983-5A40DD11EB79}"/>
+          <p:cNvPr id="4" name="Picture 3">
+            <a:extLst>
+              <a:ext uri="{FF2B5EF4-FFF2-40B4-BE49-F238E27FC236}">
+                <a16:creationId xmlns:a16="http://schemas.microsoft.com/office/drawing/2014/main" id="{50D4D3CB-2C2F-4524-B868-41FAEA9F06E8}"/>
               </a:ext>
             </a:extLst>
           </p:cNvPr>
@@ -4525,21 +5043,15 @@
           <p:nvPr/>
         </p:nvPicPr>
         <p:blipFill>
-          <a:blip r:embed="rId2">
-            <a:extLst>
-              <a:ext uri="{28A0092B-C50C-407E-A947-70E740481C1C}">
-                <a14:useLocalDpi xmlns:a14="http://schemas.microsoft.com/office/drawing/2010/main" val="0"/>
-              </a:ext>
-            </a:extLst>
-          </a:blip>
+          <a:blip r:embed="rId2"/>
           <a:stretch>
             <a:fillRect/>
           </a:stretch>
         </p:blipFill>
         <p:spPr>
           <a:xfrm>
-            <a:off x="1810565" y="214923"/>
-            <a:ext cx="8570870" cy="6428153"/>
+            <a:off x="4014497" y="2219156"/>
+            <a:ext cx="4163006" cy="2419688"/>
           </a:xfrm>
           <a:prstGeom prst="rect">
             <a:avLst/>
@@ -4548,10 +5060,10 @@
       </p:pic>
       <p:sp>
         <p:nvSpPr>
-          <p:cNvPr id="6" name="TextBox 5">
-            <a:extLst>
-              <a:ext uri="{FF2B5EF4-FFF2-40B4-BE49-F238E27FC236}">
-                <a16:creationId xmlns:a16="http://schemas.microsoft.com/office/drawing/2014/main" id="{4BE0656D-44CA-4A22-BC1D-23F23E963B16}"/>
+          <p:cNvPr id="5" name="TextBox 4">
+            <a:extLst>
+              <a:ext uri="{FF2B5EF4-FFF2-40B4-BE49-F238E27FC236}">
+                <a16:creationId xmlns:a16="http://schemas.microsoft.com/office/drawing/2014/main" id="{D514EC3D-B477-4A30-911C-BD0F244670E3}"/>
               </a:ext>
             </a:extLst>
           </p:cNvPr>
@@ -4582,10 +5094,96 @@
           </a:p>
         </p:txBody>
       </p:sp>
+      <p:sp>
+        <p:nvSpPr>
+          <p:cNvPr id="7" name="Arrow: Down 6">
+            <a:extLst>
+              <a:ext uri="{FF2B5EF4-FFF2-40B4-BE49-F238E27FC236}">
+                <a16:creationId xmlns:a16="http://schemas.microsoft.com/office/drawing/2014/main" id="{A2FC79F2-6630-4E33-A4C3-8D9A42B46FEF}"/>
+              </a:ext>
+            </a:extLst>
+          </p:cNvPr>
+          <p:cNvSpPr/>
+          <p:nvPr/>
+        </p:nvSpPr>
+        <p:spPr>
+          <a:xfrm rot="4638552">
+            <a:off x="7604369" y="3141785"/>
+            <a:ext cx="140677" cy="1742831"/>
+          </a:xfrm>
+          <a:prstGeom prst="downArrow">
+            <a:avLst/>
+          </a:prstGeom>
+        </p:spPr>
+        <p:style>
+          <a:lnRef idx="0">
+            <a:schemeClr val="accent1"/>
+          </a:lnRef>
+          <a:fillRef idx="3">
+            <a:schemeClr val="accent1"/>
+          </a:fillRef>
+          <a:effectRef idx="3">
+            <a:schemeClr val="accent1"/>
+          </a:effectRef>
+          <a:fontRef idx="minor">
+            <a:schemeClr val="lt1"/>
+          </a:fontRef>
+        </p:style>
+        <p:txBody>
+          <a:bodyPr rtlCol="0" anchor="ctr"/>
+          <a:lstStyle/>
+          <a:p>
+            <a:pPr algn="ctr"/>
+            <a:endParaRPr lang="nl-NL"/>
+          </a:p>
+        </p:txBody>
+      </p:sp>
+      <p:sp>
+        <p:nvSpPr>
+          <p:cNvPr id="8" name="TextBox 7">
+            <a:extLst>
+              <a:ext uri="{FF2B5EF4-FFF2-40B4-BE49-F238E27FC236}">
+                <a16:creationId xmlns:a16="http://schemas.microsoft.com/office/drawing/2014/main" id="{F80A6ACB-2D2C-4E4F-96F1-0D3837C836FC}"/>
+              </a:ext>
+            </a:extLst>
+          </p:cNvPr>
+          <p:cNvSpPr txBox="1"/>
+          <p:nvPr/>
+        </p:nvSpPr>
+        <p:spPr>
+          <a:xfrm>
+            <a:off x="8519452" y="3476396"/>
+            <a:ext cx="2360246" cy="646331"/>
+          </a:xfrm>
+          <a:prstGeom prst="rect">
+            <a:avLst/>
+          </a:prstGeom>
+          <a:noFill/>
+        </p:spPr>
+        <p:txBody>
+          <a:bodyPr wrap="square" rtlCol="0">
+            <a:spAutoFit/>
+          </a:bodyPr>
+          <a:lstStyle/>
+          <a:p>
+            <a:r>
+              <a:rPr lang="it-IT" dirty="0"/>
+              <a:t>Gradient Boosting</a:t>
+            </a:r>
+          </a:p>
+          <a:p>
+            <a:r>
+              <a:rPr lang="it-IT" dirty="0"/>
+              <a:t>Decision Trees</a:t>
+            </a:r>
+            <a:endParaRPr lang="nl-NL" dirty="0"/>
+          </a:p>
+        </p:txBody>
+      </p:sp>
     </p:spTree>
     <p:extLst>
       <p:ext uri="{BB962C8B-B14F-4D97-AF65-F5344CB8AC3E}">
-        <p14:creationId xmlns:p14="http://schemas.microsoft.com/office/powerpoint/2010/main" val="1608275626"/>
+        <p14:creationId xmlns:p14="http://schemas.microsoft.com/office/powerpoint/2010/main" val="3620443842"/>
       </p:ext>
     </p:extLst>
   </p:cSld>
@@ -4624,6 +5222,234 @@
           <a:chExt cx="0" cy="0"/>
         </a:xfrm>
       </p:grpSpPr>
+      <p:pic>
+        <p:nvPicPr>
+          <p:cNvPr id="5" name="Picture 4">
+            <a:extLst>
+              <a:ext uri="{FF2B5EF4-FFF2-40B4-BE49-F238E27FC236}">
+                <a16:creationId xmlns:a16="http://schemas.microsoft.com/office/drawing/2014/main" id="{959EC944-F65A-4355-9EE4-D17542B2E581}"/>
+              </a:ext>
+            </a:extLst>
+          </p:cNvPr>
+          <p:cNvPicPr>
+            <a:picLocks noChangeAspect="1"/>
+          </p:cNvPicPr>
+          <p:nvPr/>
+        </p:nvPicPr>
+        <p:blipFill>
+          <a:blip r:embed="rId2">
+            <a:extLst>
+              <a:ext uri="{28A0092B-C50C-407E-A947-70E740481C1C}">
+                <a14:useLocalDpi xmlns:a14="http://schemas.microsoft.com/office/drawing/2010/main" val="0"/>
+              </a:ext>
+            </a:extLst>
+          </a:blip>
+          <a:stretch>
+            <a:fillRect/>
+          </a:stretch>
+        </p:blipFill>
+        <p:spPr>
+          <a:xfrm>
+            <a:off x="0" y="552432"/>
+            <a:ext cx="12192000" cy="5753136"/>
+          </a:xfrm>
+          <a:prstGeom prst="rect">
+            <a:avLst/>
+          </a:prstGeom>
+        </p:spPr>
+      </p:pic>
+      <p:sp>
+        <p:nvSpPr>
+          <p:cNvPr id="6" name="TextBox 5">
+            <a:extLst>
+              <a:ext uri="{FF2B5EF4-FFF2-40B4-BE49-F238E27FC236}">
+                <a16:creationId xmlns:a16="http://schemas.microsoft.com/office/drawing/2014/main" id="{49B55110-826E-47CF-A5A8-A85A55A8AEE0}"/>
+              </a:ext>
+            </a:extLst>
+          </p:cNvPr>
+          <p:cNvSpPr txBox="1"/>
+          <p:nvPr/>
+        </p:nvSpPr>
+        <p:spPr>
+          <a:xfrm>
+            <a:off x="0" y="-5807"/>
+            <a:ext cx="2524369" cy="369332"/>
+          </a:xfrm>
+          <a:prstGeom prst="rect">
+            <a:avLst/>
+          </a:prstGeom>
+          <a:noFill/>
+        </p:spPr>
+        <p:txBody>
+          <a:bodyPr wrap="square" rtlCol="0">
+            <a:spAutoFit/>
+          </a:bodyPr>
+          <a:lstStyle/>
+          <a:p>
+            <a:r>
+              <a:rPr lang="it-IT" u="sng" dirty="0"/>
+              <a:t>Imputed Values</a:t>
+            </a:r>
+            <a:endParaRPr lang="nl-NL" u="sng" dirty="0"/>
+          </a:p>
+        </p:txBody>
+      </p:sp>
+    </p:spTree>
+    <p:extLst>
+      <p:ext uri="{BB962C8B-B14F-4D97-AF65-F5344CB8AC3E}">
+        <p14:creationId xmlns:p14="http://schemas.microsoft.com/office/powerpoint/2010/main" val="1759352546"/>
+      </p:ext>
+    </p:extLst>
+  </p:cSld>
+  <p:clrMapOvr>
+    <a:masterClrMapping/>
+  </p:clrMapOvr>
+  <mc:AlternateContent xmlns:mc="http://schemas.openxmlformats.org/markup-compatibility/2006" xmlns:p159="http://schemas.microsoft.com/office/powerpoint/2015/09/main">
+    <mc:Choice Requires="p159">
+      <p:transition xmlns:p14="http://schemas.microsoft.com/office/powerpoint/2010/main" spd="slow" p14:dur="2000">
+        <p159:morph option="byObject"/>
+      </p:transition>
+    </mc:Choice>
+    <mc:Fallback xmlns="">
+      <p:transition spd="slow">
+        <p:fade/>
+      </p:transition>
+    </mc:Fallback>
+  </mc:AlternateContent>
+</p:sld>
+</file>
+
+<file path=ppt/slides/slide13.xml><?xml version="1.0" encoding="utf-8"?>
+<p:sld xmlns:a="http://schemas.openxmlformats.org/drawingml/2006/main" xmlns:r="http://schemas.openxmlformats.org/officeDocument/2006/relationships" xmlns:p="http://schemas.openxmlformats.org/presentationml/2006/main">
+  <p:cSld>
+    <p:spTree>
+      <p:nvGrpSpPr>
+        <p:cNvPr id="1" name=""/>
+        <p:cNvGrpSpPr/>
+        <p:nvPr/>
+      </p:nvGrpSpPr>
+      <p:grpSpPr>
+        <a:xfrm>
+          <a:off x="0" y="0"/>
+          <a:ext cx="0" cy="0"/>
+          <a:chOff x="0" y="0"/>
+          <a:chExt cx="0" cy="0"/>
+        </a:xfrm>
+      </p:grpSpPr>
+      <p:pic>
+        <p:nvPicPr>
+          <p:cNvPr id="5" name="Picture 4">
+            <a:extLst>
+              <a:ext uri="{FF2B5EF4-FFF2-40B4-BE49-F238E27FC236}">
+                <a16:creationId xmlns:a16="http://schemas.microsoft.com/office/drawing/2014/main" id="{70962B23-E15F-4BCF-9983-5A40DD11EB79}"/>
+              </a:ext>
+            </a:extLst>
+          </p:cNvPr>
+          <p:cNvPicPr>
+            <a:picLocks noChangeAspect="1"/>
+          </p:cNvPicPr>
+          <p:nvPr/>
+        </p:nvPicPr>
+        <p:blipFill>
+          <a:blip r:embed="rId2">
+            <a:extLst>
+              <a:ext uri="{28A0092B-C50C-407E-A947-70E740481C1C}">
+                <a14:useLocalDpi xmlns:a14="http://schemas.microsoft.com/office/drawing/2010/main" val="0"/>
+              </a:ext>
+            </a:extLst>
+          </a:blip>
+          <a:stretch>
+            <a:fillRect/>
+          </a:stretch>
+        </p:blipFill>
+        <p:spPr>
+          <a:xfrm>
+            <a:off x="1810565" y="214923"/>
+            <a:ext cx="8570870" cy="6428153"/>
+          </a:xfrm>
+          <a:prstGeom prst="rect">
+            <a:avLst/>
+          </a:prstGeom>
+        </p:spPr>
+      </p:pic>
+      <p:sp>
+        <p:nvSpPr>
+          <p:cNvPr id="6" name="TextBox 5">
+            <a:extLst>
+              <a:ext uri="{FF2B5EF4-FFF2-40B4-BE49-F238E27FC236}">
+                <a16:creationId xmlns:a16="http://schemas.microsoft.com/office/drawing/2014/main" id="{4BE0656D-44CA-4A22-BC1D-23F23E963B16}"/>
+              </a:ext>
+            </a:extLst>
+          </p:cNvPr>
+          <p:cNvSpPr txBox="1"/>
+          <p:nvPr/>
+        </p:nvSpPr>
+        <p:spPr>
+          <a:xfrm>
+            <a:off x="0" y="0"/>
+            <a:ext cx="2289908" cy="369332"/>
+          </a:xfrm>
+          <a:prstGeom prst="rect">
+            <a:avLst/>
+          </a:prstGeom>
+          <a:noFill/>
+        </p:spPr>
+        <p:txBody>
+          <a:bodyPr wrap="square" rtlCol="0">
+            <a:spAutoFit/>
+          </a:bodyPr>
+          <a:lstStyle/>
+          <a:p>
+            <a:r>
+              <a:rPr lang="it-IT" u="sng" dirty="0"/>
+              <a:t>MICE Forest</a:t>
+            </a:r>
+            <a:endParaRPr lang="nl-NL" u="sng" dirty="0"/>
+          </a:p>
+        </p:txBody>
+      </p:sp>
+    </p:spTree>
+    <p:extLst>
+      <p:ext uri="{BB962C8B-B14F-4D97-AF65-F5344CB8AC3E}">
+        <p14:creationId xmlns:p14="http://schemas.microsoft.com/office/powerpoint/2010/main" val="1608275626"/>
+      </p:ext>
+    </p:extLst>
+  </p:cSld>
+  <p:clrMapOvr>
+    <a:masterClrMapping/>
+  </p:clrMapOvr>
+  <mc:AlternateContent xmlns:mc="http://schemas.openxmlformats.org/markup-compatibility/2006" xmlns:p159="http://schemas.microsoft.com/office/powerpoint/2015/09/main">
+    <mc:Choice Requires="p159">
+      <p:transition xmlns:p14="http://schemas.microsoft.com/office/powerpoint/2010/main" spd="slow" p14:dur="2000">
+        <p159:morph option="byObject"/>
+      </p:transition>
+    </mc:Choice>
+    <mc:Fallback xmlns="">
+      <p:transition spd="slow">
+        <p:fade/>
+      </p:transition>
+    </mc:Fallback>
+  </mc:AlternateContent>
+</p:sld>
+</file>
+
+<file path=ppt/slides/slide14.xml><?xml version="1.0" encoding="utf-8"?>
+<p:sld xmlns:a="http://schemas.openxmlformats.org/drawingml/2006/main" xmlns:r="http://schemas.openxmlformats.org/officeDocument/2006/relationships" xmlns:p="http://schemas.openxmlformats.org/presentationml/2006/main">
+  <p:cSld>
+    <p:spTree>
+      <p:nvGrpSpPr>
+        <p:cNvPr id="1" name=""/>
+        <p:cNvGrpSpPr/>
+        <p:nvPr/>
+      </p:nvGrpSpPr>
+      <p:grpSpPr>
+        <a:xfrm>
+          <a:off x="0" y="0"/>
+          <a:ext cx="0" cy="0"/>
+          <a:chOff x="0" y="0"/>
+          <a:chExt cx="0" cy="0"/>
+        </a:xfrm>
+      </p:grpSpPr>
       <p:sp>
         <p:nvSpPr>
           <p:cNvPr id="2" name="Title 1">
@@ -4678,7 +5504,7 @@
 </p:sld>
 </file>
 
-<file path=ppt/slides/slide13.xml><?xml version="1.0" encoding="utf-8"?>
+<file path=ppt/slides/slide15.xml><?xml version="1.0" encoding="utf-8"?>
 <p:sld xmlns:a="http://schemas.openxmlformats.org/drawingml/2006/main" xmlns:r="http://schemas.openxmlformats.org/officeDocument/2006/relationships" xmlns:p="http://schemas.openxmlformats.org/presentationml/2006/main">
   <p:cSld>
     <p:spTree>
@@ -4720,7 +5546,7 @@
 </p:sld>
 </file>
 
-<file path=ppt/slides/slide14.xml><?xml version="1.0" encoding="utf-8"?>
+<file path=ppt/slides/slide16.xml><?xml version="1.0" encoding="utf-8"?>
 <p:sld xmlns:a="http://schemas.openxmlformats.org/drawingml/2006/main" xmlns:r="http://schemas.openxmlformats.org/officeDocument/2006/relationships" xmlns:p="http://schemas.openxmlformats.org/presentationml/2006/main">
   <p:cSld>
     <p:spTree>
@@ -4816,7 +5642,7 @@
 </p:sld>
 </file>
 
-<file path=ppt/slides/slide15.xml><?xml version="1.0" encoding="utf-8"?>
+<file path=ppt/slides/slide17.xml><?xml version="1.0" encoding="utf-8"?>
 <p:sld xmlns:a="http://schemas.openxmlformats.org/drawingml/2006/main" xmlns:r="http://schemas.openxmlformats.org/officeDocument/2006/relationships" xmlns:p="http://schemas.openxmlformats.org/presentationml/2006/main">
   <p:cSld>
     <p:spTree>
@@ -4858,7 +5684,7 @@
 </p:sld>
 </file>
 
-<file path=ppt/slides/slide16.xml><?xml version="1.0" encoding="utf-8"?>
+<file path=ppt/slides/slide18.xml><?xml version="1.0" encoding="utf-8"?>
 <p:sld xmlns:a="http://schemas.openxmlformats.org/drawingml/2006/main" xmlns:r="http://schemas.openxmlformats.org/officeDocument/2006/relationships" xmlns:p="http://schemas.openxmlformats.org/presentationml/2006/main">
   <p:cSld>
     <p:spTree>
@@ -4933,1112 +5759,6 @@
     <p:extLst>
       <p:ext uri="{BB962C8B-B14F-4D97-AF65-F5344CB8AC3E}">
         <p14:creationId xmlns:p14="http://schemas.microsoft.com/office/powerpoint/2010/main" val="603692568"/>
-      </p:ext>
-    </p:extLst>
-  </p:cSld>
-  <p:clrMapOvr>
-    <a:masterClrMapping/>
-  </p:clrMapOvr>
-  <mc:AlternateContent xmlns:mc="http://schemas.openxmlformats.org/markup-compatibility/2006" xmlns:p159="http://schemas.microsoft.com/office/powerpoint/2015/09/main">
-    <mc:Choice Requires="p159">
-      <p:transition xmlns:p14="http://schemas.microsoft.com/office/powerpoint/2010/main" spd="slow" p14:dur="2000">
-        <p159:morph option="byObject"/>
-      </p:transition>
-    </mc:Choice>
-    <mc:Fallback xmlns="">
-      <p:transition spd="slow">
-        <p:fade/>
-      </p:transition>
-    </mc:Fallback>
-  </mc:AlternateContent>
-</p:sld>
-</file>
-
-<file path=ppt/slides/slide17.xml><?xml version="1.0" encoding="utf-8"?>
-<p:sld xmlns:a="http://schemas.openxmlformats.org/drawingml/2006/main" xmlns:r="http://schemas.openxmlformats.org/officeDocument/2006/relationships" xmlns:p="http://schemas.openxmlformats.org/presentationml/2006/main">
-  <p:cSld>
-    <p:spTree>
-      <p:nvGrpSpPr>
-        <p:cNvPr id="1" name=""/>
-        <p:cNvGrpSpPr/>
-        <p:nvPr/>
-      </p:nvGrpSpPr>
-      <p:grpSpPr>
-        <a:xfrm>
-          <a:off x="0" y="0"/>
-          <a:ext cx="0" cy="0"/>
-          <a:chOff x="0" y="0"/>
-          <a:chExt cx="0" cy="0"/>
-        </a:xfrm>
-      </p:grpSpPr>
-      <p:sp>
-        <p:nvSpPr>
-          <p:cNvPr id="2" name="TextBox 1">
-            <a:extLst>
-              <a:ext uri="{FF2B5EF4-FFF2-40B4-BE49-F238E27FC236}">
-                <a16:creationId xmlns:a16="http://schemas.microsoft.com/office/drawing/2014/main" id="{CC0200F0-ABFF-45F8-A6F5-9F8372AE5C7D}"/>
-              </a:ext>
-            </a:extLst>
-          </p:cNvPr>
-          <p:cNvSpPr txBox="1"/>
-          <p:nvPr/>
-        </p:nvSpPr>
-        <p:spPr>
-          <a:xfrm>
-            <a:off x="0" y="0"/>
-            <a:ext cx="4395537" cy="369332"/>
-          </a:xfrm>
-          <a:prstGeom prst="rect">
-            <a:avLst/>
-          </a:prstGeom>
-          <a:noFill/>
-        </p:spPr>
-        <p:txBody>
-          <a:bodyPr wrap="square" rtlCol="0">
-            <a:spAutoFit/>
-          </a:bodyPr>
-          <a:lstStyle/>
-          <a:p>
-            <a:r>
-              <a:rPr lang="it-IT" u="sng" dirty="0"/>
-              <a:t>Blood Pressure Measurements - Outliers</a:t>
-            </a:r>
-            <a:endParaRPr lang="nl-NL" u="sng" dirty="0"/>
-          </a:p>
-        </p:txBody>
-      </p:sp>
-      <p:pic>
-        <p:nvPicPr>
-          <p:cNvPr id="4" name="Picture 3">
-            <a:extLst>
-              <a:ext uri="{FF2B5EF4-FFF2-40B4-BE49-F238E27FC236}">
-                <a16:creationId xmlns:a16="http://schemas.microsoft.com/office/drawing/2014/main" id="{B141D145-8AC1-45C7-8D61-50D4BD1CC9DF}"/>
-              </a:ext>
-            </a:extLst>
-          </p:cNvPr>
-          <p:cNvPicPr>
-            <a:picLocks noChangeAspect="1"/>
-          </p:cNvPicPr>
-          <p:nvPr/>
-        </p:nvPicPr>
-        <p:blipFill>
-          <a:blip r:embed="rId2">
-            <a:extLst>
-              <a:ext uri="{28A0092B-C50C-407E-A947-70E740481C1C}">
-                <a14:useLocalDpi xmlns:a14="http://schemas.microsoft.com/office/drawing/2010/main" val="0"/>
-              </a:ext>
-            </a:extLst>
-          </a:blip>
-          <a:stretch>
-            <a:fillRect/>
-          </a:stretch>
-        </p:blipFill>
-        <p:spPr>
-          <a:xfrm>
-            <a:off x="6186458" y="1957137"/>
-            <a:ext cx="6005542" cy="3649580"/>
-          </a:xfrm>
-          <a:prstGeom prst="rect">
-            <a:avLst/>
-          </a:prstGeom>
-        </p:spPr>
-      </p:pic>
-      <p:pic>
-        <p:nvPicPr>
-          <p:cNvPr id="8" name="Picture 7">
-            <a:extLst>
-              <a:ext uri="{FF2B5EF4-FFF2-40B4-BE49-F238E27FC236}">
-                <a16:creationId xmlns:a16="http://schemas.microsoft.com/office/drawing/2014/main" id="{B78D7C7E-C973-4558-835C-AE7A82ECC7EF}"/>
-              </a:ext>
-            </a:extLst>
-          </p:cNvPr>
-          <p:cNvPicPr>
-            <a:picLocks noChangeAspect="1"/>
-          </p:cNvPicPr>
-          <p:nvPr/>
-        </p:nvPicPr>
-        <p:blipFill>
-          <a:blip r:embed="rId3">
-            <a:extLst>
-              <a:ext uri="{28A0092B-C50C-407E-A947-70E740481C1C}">
-                <a14:useLocalDpi xmlns:a14="http://schemas.microsoft.com/office/drawing/2010/main" val="0"/>
-              </a:ext>
-            </a:extLst>
-          </a:blip>
-          <a:stretch>
-            <a:fillRect/>
-          </a:stretch>
-        </p:blipFill>
-        <p:spPr>
-          <a:xfrm>
-            <a:off x="14258" y="1957137"/>
-            <a:ext cx="6005542" cy="3649580"/>
-          </a:xfrm>
-          <a:prstGeom prst="rect">
-            <a:avLst/>
-          </a:prstGeom>
-        </p:spPr>
-      </p:pic>
-      <p:cxnSp>
-        <p:nvCxnSpPr>
-          <p:cNvPr id="10" name="Straight Arrow Connector 9">
-            <a:extLst>
-              <a:ext uri="{FF2B5EF4-FFF2-40B4-BE49-F238E27FC236}">
-                <a16:creationId xmlns:a16="http://schemas.microsoft.com/office/drawing/2014/main" id="{D2D21716-6BD7-4A50-9558-0D0C13985C2D}"/>
-              </a:ext>
-            </a:extLst>
-          </p:cNvPr>
-          <p:cNvCxnSpPr>
-            <a:cxnSpLocks/>
-            <a:stCxn id="13" idx="2"/>
-            <a:endCxn id="28" idx="7"/>
-          </p:cNvCxnSpPr>
-          <p:nvPr/>
-        </p:nvCxnSpPr>
-        <p:spPr>
-          <a:xfrm flipH="1">
-            <a:off x="1745476" y="1706964"/>
-            <a:ext cx="1271553" cy="618127"/>
-          </a:xfrm>
-          <a:prstGeom prst="straightConnector1">
-            <a:avLst/>
-          </a:prstGeom>
-          <a:ln>
-            <a:tailEnd type="triangle"/>
-          </a:ln>
-        </p:spPr>
-        <p:style>
-          <a:lnRef idx="3">
-            <a:schemeClr val="dk1"/>
-          </a:lnRef>
-          <a:fillRef idx="0">
-            <a:schemeClr val="dk1"/>
-          </a:fillRef>
-          <a:effectRef idx="2">
-            <a:schemeClr val="dk1"/>
-          </a:effectRef>
-          <a:fontRef idx="minor">
-            <a:schemeClr val="tx1"/>
-          </a:fontRef>
-        </p:style>
-      </p:cxnSp>
-      <p:cxnSp>
-        <p:nvCxnSpPr>
-          <p:cNvPr id="12" name="Straight Arrow Connector 11">
-            <a:extLst>
-              <a:ext uri="{FF2B5EF4-FFF2-40B4-BE49-F238E27FC236}">
-                <a16:creationId xmlns:a16="http://schemas.microsoft.com/office/drawing/2014/main" id="{8588E362-09B2-4B0B-BBDE-2EFEFF000F9B}"/>
-              </a:ext>
-            </a:extLst>
-          </p:cNvPr>
-          <p:cNvCxnSpPr>
-            <a:cxnSpLocks/>
-            <a:stCxn id="13" idx="2"/>
-            <a:endCxn id="30" idx="1"/>
-          </p:cNvCxnSpPr>
-          <p:nvPr/>
-        </p:nvCxnSpPr>
-        <p:spPr>
-          <a:xfrm>
-            <a:off x="3017029" y="1706964"/>
-            <a:ext cx="1532465" cy="797849"/>
-          </a:xfrm>
-          <a:prstGeom prst="straightConnector1">
-            <a:avLst/>
-          </a:prstGeom>
-          <a:ln>
-            <a:tailEnd type="triangle"/>
-          </a:ln>
-        </p:spPr>
-        <p:style>
-          <a:lnRef idx="3">
-            <a:schemeClr val="dk1"/>
-          </a:lnRef>
-          <a:fillRef idx="0">
-            <a:schemeClr val="dk1"/>
-          </a:fillRef>
-          <a:effectRef idx="2">
-            <a:schemeClr val="dk1"/>
-          </a:effectRef>
-          <a:fontRef idx="minor">
-            <a:schemeClr val="tx1"/>
-          </a:fontRef>
-        </p:style>
-      </p:cxnSp>
-      <p:sp>
-        <p:nvSpPr>
-          <p:cNvPr id="13" name="TextBox 12">
-            <a:extLst>
-              <a:ext uri="{FF2B5EF4-FFF2-40B4-BE49-F238E27FC236}">
-                <a16:creationId xmlns:a16="http://schemas.microsoft.com/office/drawing/2014/main" id="{6406D038-F66B-4859-9416-A23E4E34906D}"/>
-              </a:ext>
-            </a:extLst>
-          </p:cNvPr>
-          <p:cNvSpPr txBox="1"/>
-          <p:nvPr/>
-        </p:nvSpPr>
-        <p:spPr>
-          <a:xfrm>
-            <a:off x="1490242" y="1337632"/>
-            <a:ext cx="3053573" cy="369332"/>
-          </a:xfrm>
-          <a:prstGeom prst="rect">
-            <a:avLst/>
-          </a:prstGeom>
-          <a:noFill/>
-        </p:spPr>
-        <p:txBody>
-          <a:bodyPr wrap="square" rtlCol="0">
-            <a:spAutoFit/>
-          </a:bodyPr>
-          <a:lstStyle/>
-          <a:p>
-            <a:pPr algn="ctr"/>
-            <a:r>
-              <a:rPr lang="it-IT" dirty="0"/>
-              <a:t>Set to NaN... Imputation?</a:t>
-            </a:r>
-            <a:endParaRPr lang="nl-NL" dirty="0"/>
-          </a:p>
-        </p:txBody>
-      </p:sp>
-      <p:sp>
-        <p:nvSpPr>
-          <p:cNvPr id="14" name="TextBox 13">
-            <a:extLst>
-              <a:ext uri="{FF2B5EF4-FFF2-40B4-BE49-F238E27FC236}">
-                <a16:creationId xmlns:a16="http://schemas.microsoft.com/office/drawing/2014/main" id="{F98F7243-8499-4EB9-8006-57DE1509E5C3}"/>
-              </a:ext>
-            </a:extLst>
-          </p:cNvPr>
-          <p:cNvSpPr txBox="1"/>
-          <p:nvPr/>
-        </p:nvSpPr>
-        <p:spPr>
-          <a:xfrm>
-            <a:off x="8060265" y="1152966"/>
-            <a:ext cx="2229853" cy="369332"/>
-          </a:xfrm>
-          <a:prstGeom prst="rect">
-            <a:avLst/>
-          </a:prstGeom>
-          <a:noFill/>
-        </p:spPr>
-        <p:txBody>
-          <a:bodyPr wrap="square" rtlCol="0">
-            <a:spAutoFit/>
-          </a:bodyPr>
-          <a:lstStyle/>
-          <a:p>
-            <a:r>
-              <a:rPr lang="it-IT" dirty="0"/>
-              <a:t>Considered Outliers</a:t>
-            </a:r>
-            <a:endParaRPr lang="nl-NL" dirty="0"/>
-          </a:p>
-        </p:txBody>
-      </p:sp>
-      <p:cxnSp>
-        <p:nvCxnSpPr>
-          <p:cNvPr id="16" name="Straight Arrow Connector 15">
-            <a:extLst>
-              <a:ext uri="{FF2B5EF4-FFF2-40B4-BE49-F238E27FC236}">
-                <a16:creationId xmlns:a16="http://schemas.microsoft.com/office/drawing/2014/main" id="{EF44B29E-148B-46BB-A8FF-E530EC852232}"/>
-              </a:ext>
-            </a:extLst>
-          </p:cNvPr>
-          <p:cNvCxnSpPr>
-            <a:cxnSpLocks/>
-            <a:stCxn id="14" idx="2"/>
-          </p:cNvCxnSpPr>
-          <p:nvPr/>
-        </p:nvCxnSpPr>
-        <p:spPr>
-          <a:xfrm>
-            <a:off x="9175192" y="1522298"/>
-            <a:ext cx="1451811" cy="1108426"/>
-          </a:xfrm>
-          <a:prstGeom prst="straightConnector1">
-            <a:avLst/>
-          </a:prstGeom>
-          <a:ln>
-            <a:tailEnd type="triangle"/>
-          </a:ln>
-        </p:spPr>
-        <p:style>
-          <a:lnRef idx="3">
-            <a:schemeClr val="dk1"/>
-          </a:lnRef>
-          <a:fillRef idx="0">
-            <a:schemeClr val="dk1"/>
-          </a:fillRef>
-          <a:effectRef idx="2">
-            <a:schemeClr val="dk1"/>
-          </a:effectRef>
-          <a:fontRef idx="minor">
-            <a:schemeClr val="tx1"/>
-          </a:fontRef>
-        </p:style>
-      </p:cxnSp>
-      <p:cxnSp>
-        <p:nvCxnSpPr>
-          <p:cNvPr id="18" name="Straight Arrow Connector 17">
-            <a:extLst>
-              <a:ext uri="{FF2B5EF4-FFF2-40B4-BE49-F238E27FC236}">
-                <a16:creationId xmlns:a16="http://schemas.microsoft.com/office/drawing/2014/main" id="{496788B4-CBEF-49A2-B29F-3DAC5165F805}"/>
-              </a:ext>
-            </a:extLst>
-          </p:cNvPr>
-          <p:cNvCxnSpPr>
-            <a:cxnSpLocks/>
-            <a:stCxn id="14" idx="2"/>
-          </p:cNvCxnSpPr>
-          <p:nvPr/>
-        </p:nvCxnSpPr>
-        <p:spPr>
-          <a:xfrm flipH="1">
-            <a:off x="7955994" y="1522298"/>
-            <a:ext cx="1219198" cy="1212700"/>
-          </a:xfrm>
-          <a:prstGeom prst="straightConnector1">
-            <a:avLst/>
-          </a:prstGeom>
-          <a:ln>
-            <a:tailEnd type="triangle"/>
-          </a:ln>
-        </p:spPr>
-        <p:style>
-          <a:lnRef idx="3">
-            <a:schemeClr val="dk1"/>
-          </a:lnRef>
-          <a:fillRef idx="0">
-            <a:schemeClr val="dk1"/>
-          </a:fillRef>
-          <a:effectRef idx="2">
-            <a:schemeClr val="dk1"/>
-          </a:effectRef>
-          <a:fontRef idx="minor">
-            <a:schemeClr val="tx1"/>
-          </a:fontRef>
-        </p:style>
-      </p:cxnSp>
-      <p:sp>
-        <p:nvSpPr>
-          <p:cNvPr id="28" name="Oval 27">
-            <a:extLst>
-              <a:ext uri="{FF2B5EF4-FFF2-40B4-BE49-F238E27FC236}">
-                <a16:creationId xmlns:a16="http://schemas.microsoft.com/office/drawing/2014/main" id="{5D3BB183-A2CA-46A2-B9C3-ADAE972B9027}"/>
-              </a:ext>
-            </a:extLst>
-          </p:cNvPr>
-          <p:cNvSpPr/>
-          <p:nvPr/>
-        </p:nvSpPr>
-        <p:spPr>
-          <a:xfrm>
-            <a:off x="1444235" y="2056559"/>
-            <a:ext cx="352926" cy="1833652"/>
-          </a:xfrm>
-          <a:prstGeom prst="ellipse">
-            <a:avLst/>
-          </a:prstGeom>
-          <a:noFill/>
-          <a:ln w="9525" cap="flat" cmpd="sng" algn="ctr">
-            <a:solidFill>
-              <a:schemeClr val="accent1"/>
-            </a:solidFill>
-            <a:prstDash val="solid"/>
-            <a:round/>
-            <a:headEnd type="none" w="med" len="med"/>
-            <a:tailEnd type="none" w="med" len="med"/>
-          </a:ln>
-        </p:spPr>
-        <p:style>
-          <a:lnRef idx="0">
-            <a:scrgbClr r="0" g="0" b="0"/>
-          </a:lnRef>
-          <a:fillRef idx="0">
-            <a:scrgbClr r="0" g="0" b="0"/>
-          </a:fillRef>
-          <a:effectRef idx="0">
-            <a:scrgbClr r="0" g="0" b="0"/>
-          </a:effectRef>
-          <a:fontRef idx="minor">
-            <a:schemeClr val="accent1"/>
-          </a:fontRef>
-        </p:style>
-        <p:txBody>
-          <a:bodyPr rtlCol="0" anchor="ctr"/>
-          <a:lstStyle/>
-          <a:p>
-            <a:pPr algn="ctr"/>
-            <a:endParaRPr lang="nl-NL"/>
-          </a:p>
-        </p:txBody>
-      </p:sp>
-      <p:sp>
-        <p:nvSpPr>
-          <p:cNvPr id="30" name="Oval 29">
-            <a:extLst>
-              <a:ext uri="{FF2B5EF4-FFF2-40B4-BE49-F238E27FC236}">
-                <a16:creationId xmlns:a16="http://schemas.microsoft.com/office/drawing/2014/main" id="{DFC1405A-A1FB-4B7D-A729-6F366D78F1F5}"/>
-              </a:ext>
-            </a:extLst>
-          </p:cNvPr>
-          <p:cNvSpPr/>
-          <p:nvPr/>
-        </p:nvSpPr>
-        <p:spPr>
-          <a:xfrm>
-            <a:off x="4497809" y="2056558"/>
-            <a:ext cx="352926" cy="3060874"/>
-          </a:xfrm>
-          <a:prstGeom prst="ellipse">
-            <a:avLst/>
-          </a:prstGeom>
-          <a:noFill/>
-          <a:ln w="9525" cap="flat" cmpd="sng" algn="ctr">
-            <a:solidFill>
-              <a:schemeClr val="accent1"/>
-            </a:solidFill>
-            <a:prstDash val="solid"/>
-            <a:round/>
-            <a:headEnd type="none" w="med" len="med"/>
-            <a:tailEnd type="none" w="med" len="med"/>
-          </a:ln>
-        </p:spPr>
-        <p:style>
-          <a:lnRef idx="0">
-            <a:scrgbClr r="0" g="0" b="0"/>
-          </a:lnRef>
-          <a:fillRef idx="0">
-            <a:scrgbClr r="0" g="0" b="0"/>
-          </a:fillRef>
-          <a:effectRef idx="0">
-            <a:scrgbClr r="0" g="0" b="0"/>
-          </a:effectRef>
-          <a:fontRef idx="minor">
-            <a:schemeClr val="accent1"/>
-          </a:fontRef>
-        </p:style>
-        <p:txBody>
-          <a:bodyPr rtlCol="0" anchor="ctr"/>
-          <a:lstStyle/>
-          <a:p>
-            <a:pPr algn="ctr"/>
-            <a:endParaRPr lang="nl-NL"/>
-          </a:p>
-        </p:txBody>
-      </p:sp>
-      <p:cxnSp>
-        <p:nvCxnSpPr>
-          <p:cNvPr id="47" name="Straight Connector 46">
-            <a:extLst>
-              <a:ext uri="{FF2B5EF4-FFF2-40B4-BE49-F238E27FC236}">
-                <a16:creationId xmlns:a16="http://schemas.microsoft.com/office/drawing/2014/main" id="{BB77F60D-AA92-4E88-9238-C37C7FCED343}"/>
-              </a:ext>
-            </a:extLst>
-          </p:cNvPr>
-          <p:cNvCxnSpPr/>
-          <p:nvPr/>
-        </p:nvCxnSpPr>
-        <p:spPr>
-          <a:xfrm>
-            <a:off x="344905" y="4868779"/>
-            <a:ext cx="2334126" cy="0"/>
-          </a:xfrm>
-          <a:prstGeom prst="line">
-            <a:avLst/>
-          </a:prstGeom>
-        </p:spPr>
-        <p:style>
-          <a:lnRef idx="3">
-            <a:schemeClr val="accent2"/>
-          </a:lnRef>
-          <a:fillRef idx="0">
-            <a:schemeClr val="accent2"/>
-          </a:fillRef>
-          <a:effectRef idx="2">
-            <a:schemeClr val="accent2"/>
-          </a:effectRef>
-          <a:fontRef idx="minor">
-            <a:schemeClr val="tx1"/>
-          </a:fontRef>
-        </p:style>
-      </p:cxnSp>
-      <p:sp>
-        <p:nvSpPr>
-          <p:cNvPr id="48" name="TextBox 47">
-            <a:extLst>
-              <a:ext uri="{FF2B5EF4-FFF2-40B4-BE49-F238E27FC236}">
-                <a16:creationId xmlns:a16="http://schemas.microsoft.com/office/drawing/2014/main" id="{210063D6-AB12-4D1A-8DD9-1B596D004A2F}"/>
-              </a:ext>
-            </a:extLst>
-          </p:cNvPr>
-          <p:cNvSpPr txBox="1"/>
-          <p:nvPr/>
-        </p:nvSpPr>
-        <p:spPr>
-          <a:xfrm>
-            <a:off x="2310061" y="4588042"/>
-            <a:ext cx="471458" cy="369332"/>
-          </a:xfrm>
-          <a:prstGeom prst="rect">
-            <a:avLst/>
-          </a:prstGeom>
-          <a:noFill/>
-        </p:spPr>
-        <p:txBody>
-          <a:bodyPr wrap="square" rtlCol="0">
-            <a:spAutoFit/>
-          </a:bodyPr>
-          <a:lstStyle/>
-          <a:p>
-            <a:pPr algn="ctr"/>
-            <a:r>
-              <a:rPr lang="it-IT" dirty="0">
-                <a:solidFill>
-                  <a:schemeClr val="accent2"/>
-                </a:solidFill>
-              </a:rPr>
-              <a:t>20</a:t>
-            </a:r>
-            <a:endParaRPr lang="nl-NL" dirty="0">
-              <a:solidFill>
-                <a:schemeClr val="accent2"/>
-              </a:solidFill>
-            </a:endParaRPr>
-          </a:p>
-        </p:txBody>
-      </p:sp>
-      <p:cxnSp>
-        <p:nvCxnSpPr>
-          <p:cNvPr id="49" name="Straight Connector 48">
-            <a:extLst>
-              <a:ext uri="{FF2B5EF4-FFF2-40B4-BE49-F238E27FC236}">
-                <a16:creationId xmlns:a16="http://schemas.microsoft.com/office/drawing/2014/main" id="{0BD6F6C2-AA8F-4637-B394-6AEB8944AE70}"/>
-              </a:ext>
-            </a:extLst>
-          </p:cNvPr>
-          <p:cNvCxnSpPr/>
-          <p:nvPr/>
-        </p:nvCxnSpPr>
-        <p:spPr>
-          <a:xfrm>
-            <a:off x="351141" y="3890211"/>
-            <a:ext cx="2334126" cy="0"/>
-          </a:xfrm>
-          <a:prstGeom prst="line">
-            <a:avLst/>
-          </a:prstGeom>
-        </p:spPr>
-        <p:style>
-          <a:lnRef idx="3">
-            <a:schemeClr val="accent2"/>
-          </a:lnRef>
-          <a:fillRef idx="0">
-            <a:schemeClr val="accent2"/>
-          </a:fillRef>
-          <a:effectRef idx="2">
-            <a:schemeClr val="accent2"/>
-          </a:effectRef>
-          <a:fontRef idx="minor">
-            <a:schemeClr val="tx1"/>
-          </a:fontRef>
-        </p:style>
-      </p:cxnSp>
-      <p:sp>
-        <p:nvSpPr>
-          <p:cNvPr id="50" name="TextBox 49">
-            <a:extLst>
-              <a:ext uri="{FF2B5EF4-FFF2-40B4-BE49-F238E27FC236}">
-                <a16:creationId xmlns:a16="http://schemas.microsoft.com/office/drawing/2014/main" id="{DC3D5BFC-C2C7-4C0B-8CCD-B5F0EF51BD42}"/>
-              </a:ext>
-            </a:extLst>
-          </p:cNvPr>
-          <p:cNvSpPr txBox="1"/>
-          <p:nvPr/>
-        </p:nvSpPr>
-        <p:spPr>
-          <a:xfrm>
-            <a:off x="2181726" y="3609474"/>
-            <a:ext cx="606029" cy="369332"/>
-          </a:xfrm>
-          <a:prstGeom prst="rect">
-            <a:avLst/>
-          </a:prstGeom>
-          <a:noFill/>
-        </p:spPr>
-        <p:txBody>
-          <a:bodyPr wrap="square" rtlCol="0">
-            <a:spAutoFit/>
-          </a:bodyPr>
-          <a:lstStyle/>
-          <a:p>
-            <a:pPr algn="ctr"/>
-            <a:r>
-              <a:rPr lang="it-IT" dirty="0">
-                <a:solidFill>
-                  <a:schemeClr val="accent2"/>
-                </a:solidFill>
-              </a:rPr>
-              <a:t>300</a:t>
-            </a:r>
-            <a:endParaRPr lang="nl-NL" dirty="0">
-              <a:solidFill>
-                <a:schemeClr val="accent2"/>
-              </a:solidFill>
-            </a:endParaRPr>
-          </a:p>
-        </p:txBody>
-      </p:sp>
-      <p:cxnSp>
-        <p:nvCxnSpPr>
-          <p:cNvPr id="51" name="Straight Connector 50">
-            <a:extLst>
-              <a:ext uri="{FF2B5EF4-FFF2-40B4-BE49-F238E27FC236}">
-                <a16:creationId xmlns:a16="http://schemas.microsoft.com/office/drawing/2014/main" id="{44BEA9E8-8FA9-4EBF-ADB1-F15EF59D545A}"/>
-              </a:ext>
-            </a:extLst>
-          </p:cNvPr>
-          <p:cNvCxnSpPr/>
-          <p:nvPr/>
-        </p:nvCxnSpPr>
-        <p:spPr>
-          <a:xfrm>
-            <a:off x="3376752" y="5219798"/>
-            <a:ext cx="2334126" cy="0"/>
-          </a:xfrm>
-          <a:prstGeom prst="line">
-            <a:avLst/>
-          </a:prstGeom>
-        </p:spPr>
-        <p:style>
-          <a:lnRef idx="3">
-            <a:schemeClr val="accent2"/>
-          </a:lnRef>
-          <a:fillRef idx="0">
-            <a:schemeClr val="accent2"/>
-          </a:fillRef>
-          <a:effectRef idx="2">
-            <a:schemeClr val="accent2"/>
-          </a:effectRef>
-          <a:fontRef idx="minor">
-            <a:schemeClr val="tx1"/>
-          </a:fontRef>
-        </p:style>
-      </p:cxnSp>
-      <p:sp>
-        <p:nvSpPr>
-          <p:cNvPr id="52" name="TextBox 51">
-            <a:extLst>
-              <a:ext uri="{FF2B5EF4-FFF2-40B4-BE49-F238E27FC236}">
-                <a16:creationId xmlns:a16="http://schemas.microsoft.com/office/drawing/2014/main" id="{A166A446-0273-44CD-8582-FA57872289AC}"/>
-              </a:ext>
-            </a:extLst>
-          </p:cNvPr>
-          <p:cNvSpPr txBox="1"/>
-          <p:nvPr/>
-        </p:nvSpPr>
-        <p:spPr>
-          <a:xfrm>
-            <a:off x="5624542" y="5035132"/>
-            <a:ext cx="471458" cy="369332"/>
-          </a:xfrm>
-          <a:prstGeom prst="rect">
-            <a:avLst/>
-          </a:prstGeom>
-          <a:noFill/>
-        </p:spPr>
-        <p:txBody>
-          <a:bodyPr wrap="square" rtlCol="0">
-            <a:spAutoFit/>
-          </a:bodyPr>
-          <a:lstStyle/>
-          <a:p>
-            <a:pPr algn="ctr"/>
-            <a:r>
-              <a:rPr lang="it-IT" dirty="0">
-                <a:solidFill>
-                  <a:schemeClr val="accent2"/>
-                </a:solidFill>
-              </a:rPr>
-              <a:t>20</a:t>
-            </a:r>
-            <a:endParaRPr lang="nl-NL" dirty="0">
-              <a:solidFill>
-                <a:schemeClr val="accent2"/>
-              </a:solidFill>
-            </a:endParaRPr>
-          </a:p>
-        </p:txBody>
-      </p:sp>
-      <p:cxnSp>
-        <p:nvCxnSpPr>
-          <p:cNvPr id="53" name="Straight Connector 52">
-            <a:extLst>
-              <a:ext uri="{FF2B5EF4-FFF2-40B4-BE49-F238E27FC236}">
-                <a16:creationId xmlns:a16="http://schemas.microsoft.com/office/drawing/2014/main" id="{7EEC18CD-74D0-4FAF-8860-CE57F8D1CFA6}"/>
-              </a:ext>
-            </a:extLst>
-          </p:cNvPr>
-          <p:cNvCxnSpPr/>
-          <p:nvPr/>
-        </p:nvCxnSpPr>
-        <p:spPr>
-          <a:xfrm>
-            <a:off x="3382988" y="5112781"/>
-            <a:ext cx="2334126" cy="0"/>
-          </a:xfrm>
-          <a:prstGeom prst="line">
-            <a:avLst/>
-          </a:prstGeom>
-        </p:spPr>
-        <p:style>
-          <a:lnRef idx="3">
-            <a:schemeClr val="accent2"/>
-          </a:lnRef>
-          <a:fillRef idx="0">
-            <a:schemeClr val="accent2"/>
-          </a:fillRef>
-          <a:effectRef idx="2">
-            <a:schemeClr val="accent2"/>
-          </a:effectRef>
-          <a:fontRef idx="minor">
-            <a:schemeClr val="tx1"/>
-          </a:fontRef>
-        </p:style>
-      </p:cxnSp>
-      <p:sp>
-        <p:nvSpPr>
-          <p:cNvPr id="54" name="TextBox 53">
-            <a:extLst>
-              <a:ext uri="{FF2B5EF4-FFF2-40B4-BE49-F238E27FC236}">
-                <a16:creationId xmlns:a16="http://schemas.microsoft.com/office/drawing/2014/main" id="{79388AA8-1909-4DBD-B882-1AB427F2771E}"/>
-              </a:ext>
-            </a:extLst>
-          </p:cNvPr>
-          <p:cNvSpPr txBox="1"/>
-          <p:nvPr/>
-        </p:nvSpPr>
-        <p:spPr>
-          <a:xfrm>
-            <a:off x="5566173" y="4796958"/>
-            <a:ext cx="606029" cy="369332"/>
-          </a:xfrm>
-          <a:prstGeom prst="rect">
-            <a:avLst/>
-          </a:prstGeom>
-          <a:noFill/>
-        </p:spPr>
-        <p:txBody>
-          <a:bodyPr wrap="square" rtlCol="0">
-            <a:spAutoFit/>
-          </a:bodyPr>
-          <a:lstStyle/>
-          <a:p>
-            <a:pPr algn="ctr"/>
-            <a:r>
-              <a:rPr lang="it-IT" dirty="0">
-                <a:solidFill>
-                  <a:schemeClr val="accent2"/>
-                </a:solidFill>
-              </a:rPr>
-              <a:t>300</a:t>
-            </a:r>
-            <a:endParaRPr lang="nl-NL" dirty="0">
-              <a:solidFill>
-                <a:schemeClr val="accent2"/>
-              </a:solidFill>
-            </a:endParaRPr>
-          </a:p>
-        </p:txBody>
-      </p:sp>
-      <p:sp>
-        <p:nvSpPr>
-          <p:cNvPr id="55" name="Arrow: Right 54">
-            <a:extLst>
-              <a:ext uri="{FF2B5EF4-FFF2-40B4-BE49-F238E27FC236}">
-                <a16:creationId xmlns:a16="http://schemas.microsoft.com/office/drawing/2014/main" id="{CF186115-EF21-4E45-BA1A-F7A01B55B725}"/>
-              </a:ext>
-            </a:extLst>
-          </p:cNvPr>
-          <p:cNvSpPr/>
-          <p:nvPr/>
-        </p:nvSpPr>
-        <p:spPr>
-          <a:xfrm>
-            <a:off x="5654279" y="3364185"/>
-            <a:ext cx="1094205" cy="369332"/>
-          </a:xfrm>
-          <a:prstGeom prst="rightArrow">
-            <a:avLst/>
-          </a:prstGeom>
-        </p:spPr>
-        <p:style>
-          <a:lnRef idx="2">
-            <a:schemeClr val="accent2">
-              <a:shade val="50000"/>
-            </a:schemeClr>
-          </a:lnRef>
-          <a:fillRef idx="1">
-            <a:schemeClr val="accent2"/>
-          </a:fillRef>
-          <a:effectRef idx="0">
-            <a:schemeClr val="accent2"/>
-          </a:effectRef>
-          <a:fontRef idx="minor">
-            <a:schemeClr val="lt1"/>
-          </a:fontRef>
-        </p:style>
-        <p:txBody>
-          <a:bodyPr rtlCol="0" anchor="ctr"/>
-          <a:lstStyle/>
-          <a:p>
-            <a:pPr algn="ctr"/>
-            <a:endParaRPr lang="nl-NL"/>
-          </a:p>
-        </p:txBody>
-      </p:sp>
-      <p:sp>
-        <p:nvSpPr>
-          <p:cNvPr id="57" name="Oval 56">
-            <a:extLst>
-              <a:ext uri="{FF2B5EF4-FFF2-40B4-BE49-F238E27FC236}">
-                <a16:creationId xmlns:a16="http://schemas.microsoft.com/office/drawing/2014/main" id="{F946F1D0-67D6-45FC-AEDB-3F765ADB089F}"/>
-              </a:ext>
-            </a:extLst>
-          </p:cNvPr>
-          <p:cNvSpPr/>
-          <p:nvPr/>
-        </p:nvSpPr>
-        <p:spPr>
-          <a:xfrm>
-            <a:off x="1444235" y="4886330"/>
-            <a:ext cx="352926" cy="473862"/>
-          </a:xfrm>
-          <a:prstGeom prst="ellipse">
-            <a:avLst/>
-          </a:prstGeom>
-          <a:noFill/>
-          <a:ln w="9525" cap="flat" cmpd="sng" algn="ctr">
-            <a:solidFill>
-              <a:schemeClr val="accent1"/>
-            </a:solidFill>
-            <a:prstDash val="solid"/>
-            <a:round/>
-            <a:headEnd type="none" w="med" len="med"/>
-            <a:tailEnd type="none" w="med" len="med"/>
-          </a:ln>
-        </p:spPr>
-        <p:style>
-          <a:lnRef idx="0">
-            <a:scrgbClr r="0" g="0" b="0"/>
-          </a:lnRef>
-          <a:fillRef idx="0">
-            <a:scrgbClr r="0" g="0" b="0"/>
-          </a:fillRef>
-          <a:effectRef idx="0">
-            <a:scrgbClr r="0" g="0" b="0"/>
-          </a:effectRef>
-          <a:fontRef idx="minor">
-            <a:schemeClr val="accent1"/>
-          </a:fontRef>
-        </p:style>
-        <p:txBody>
-          <a:bodyPr rtlCol="0" anchor="ctr"/>
-          <a:lstStyle/>
-          <a:p>
-            <a:pPr algn="ctr"/>
-            <a:endParaRPr lang="nl-NL"/>
-          </a:p>
-        </p:txBody>
-      </p:sp>
-    </p:spTree>
-    <p:extLst>
-      <p:ext uri="{BB962C8B-B14F-4D97-AF65-F5344CB8AC3E}">
-        <p14:creationId xmlns:p14="http://schemas.microsoft.com/office/powerpoint/2010/main" val="2308014033"/>
-      </p:ext>
-    </p:extLst>
-  </p:cSld>
-  <p:clrMapOvr>
-    <a:masterClrMapping/>
-  </p:clrMapOvr>
-  <mc:AlternateContent xmlns:mc="http://schemas.openxmlformats.org/markup-compatibility/2006" xmlns:p159="http://schemas.microsoft.com/office/powerpoint/2015/09/main">
-    <mc:Choice Requires="p159">
-      <p:transition xmlns:p14="http://schemas.microsoft.com/office/powerpoint/2010/main" spd="slow" p14:dur="2000">
-        <p159:morph option="byObject"/>
-      </p:transition>
-    </mc:Choice>
-    <mc:Fallback xmlns="">
-      <p:transition spd="slow">
-        <p:fade/>
-      </p:transition>
-    </mc:Fallback>
-  </mc:AlternateContent>
-</p:sld>
-</file>
-
-<file path=ppt/slides/slide18.xml><?xml version="1.0" encoding="utf-8"?>
-<p:sld xmlns:a="http://schemas.openxmlformats.org/drawingml/2006/main" xmlns:r="http://schemas.openxmlformats.org/officeDocument/2006/relationships" xmlns:p="http://schemas.openxmlformats.org/presentationml/2006/main">
-  <p:cSld>
-    <p:spTree>
-      <p:nvGrpSpPr>
-        <p:cNvPr id="1" name=""/>
-        <p:cNvGrpSpPr/>
-        <p:nvPr/>
-      </p:nvGrpSpPr>
-      <p:grpSpPr>
-        <a:xfrm>
-          <a:off x="0" y="0"/>
-          <a:ext cx="0" cy="0"/>
-          <a:chOff x="0" y="0"/>
-          <a:chExt cx="0" cy="0"/>
-        </a:xfrm>
-      </p:grpSpPr>
-      <p:pic>
-        <p:nvPicPr>
-          <p:cNvPr id="2" name="Picture 1">
-            <a:extLst>
-              <a:ext uri="{FF2B5EF4-FFF2-40B4-BE49-F238E27FC236}">
-                <a16:creationId xmlns:a16="http://schemas.microsoft.com/office/drawing/2014/main" id="{EFCA64AE-70C0-46DC-9DE0-3BD016877CF0}"/>
-              </a:ext>
-            </a:extLst>
-          </p:cNvPr>
-          <p:cNvPicPr>
-            <a:picLocks noChangeAspect="1"/>
-          </p:cNvPicPr>
-          <p:nvPr/>
-        </p:nvPicPr>
-        <p:blipFill>
-          <a:blip r:embed="rId2">
-            <a:extLst>
-              <a:ext uri="{28A0092B-C50C-407E-A947-70E740481C1C}">
-                <a14:useLocalDpi xmlns:a14="http://schemas.microsoft.com/office/drawing/2010/main" val="0"/>
-              </a:ext>
-            </a:extLst>
-          </a:blip>
-          <a:stretch>
-            <a:fillRect/>
-          </a:stretch>
-        </p:blipFill>
-        <p:spPr>
-          <a:xfrm>
-            <a:off x="2471014" y="2125452"/>
-            <a:ext cx="7249970" cy="4405816"/>
-          </a:xfrm>
-          <a:prstGeom prst="rect">
-            <a:avLst/>
-          </a:prstGeom>
-        </p:spPr>
-      </p:pic>
-      <p:sp>
-        <p:nvSpPr>
-          <p:cNvPr id="3" name="TextBox 2">
-            <a:extLst>
-              <a:ext uri="{FF2B5EF4-FFF2-40B4-BE49-F238E27FC236}">
-                <a16:creationId xmlns:a16="http://schemas.microsoft.com/office/drawing/2014/main" id="{669BC41E-7A1B-450B-AE56-57E23EBB368B}"/>
-              </a:ext>
-            </a:extLst>
-          </p:cNvPr>
-          <p:cNvSpPr txBox="1"/>
-          <p:nvPr/>
-        </p:nvSpPr>
-        <p:spPr>
-          <a:xfrm>
-            <a:off x="0" y="0"/>
-            <a:ext cx="4395537" cy="369332"/>
-          </a:xfrm>
-          <a:prstGeom prst="rect">
-            <a:avLst/>
-          </a:prstGeom>
-          <a:noFill/>
-        </p:spPr>
-        <p:txBody>
-          <a:bodyPr wrap="square" rtlCol="0">
-            <a:spAutoFit/>
-          </a:bodyPr>
-          <a:lstStyle/>
-          <a:p>
-            <a:r>
-              <a:rPr lang="it-IT" u="sng" dirty="0"/>
-              <a:t>Blood Pressure Measurements - Outliers</a:t>
-            </a:r>
-            <a:endParaRPr lang="nl-NL" u="sng" dirty="0"/>
-          </a:p>
-        </p:txBody>
-      </p:sp>
-      <p:sp>
-        <p:nvSpPr>
-          <p:cNvPr id="4" name="TextBox 3">
-            <a:extLst>
-              <a:ext uri="{FF2B5EF4-FFF2-40B4-BE49-F238E27FC236}">
-                <a16:creationId xmlns:a16="http://schemas.microsoft.com/office/drawing/2014/main" id="{9D83727A-AEE6-4E01-9A07-195FB57628BF}"/>
-              </a:ext>
-            </a:extLst>
-          </p:cNvPr>
-          <p:cNvSpPr txBox="1"/>
-          <p:nvPr/>
-        </p:nvSpPr>
-        <p:spPr>
-          <a:xfrm>
-            <a:off x="2709862" y="811929"/>
-            <a:ext cx="6772275" cy="1200329"/>
-          </a:xfrm>
-          <a:prstGeom prst="rect">
-            <a:avLst/>
-          </a:prstGeom>
-          <a:noFill/>
-        </p:spPr>
-        <p:txBody>
-          <a:bodyPr wrap="square" rtlCol="0">
-            <a:spAutoFit/>
-          </a:bodyPr>
-          <a:lstStyle/>
-          <a:p>
-            <a:pPr algn="ctr"/>
-            <a:r>
-              <a:rPr lang="it-IT" sz="2400" dirty="0"/>
-              <a:t>Replaced with Mean value </a:t>
-            </a:r>
-          </a:p>
-          <a:p>
-            <a:pPr algn="ctr"/>
-            <a:r>
-              <a:rPr lang="it-IT" sz="2400" dirty="0"/>
-              <a:t>if </a:t>
-            </a:r>
-          </a:p>
-          <a:p>
-            <a:pPr algn="ctr"/>
-            <a:r>
-              <a:rPr lang="it-IT" sz="2400" dirty="0"/>
-              <a:t>|BP</a:t>
-            </a:r>
-            <a:r>
-              <a:rPr lang="it-IT" sz="2400" baseline="-25000" dirty="0"/>
-              <a:t>Sys,Dia</a:t>
-            </a:r>
-            <a:r>
-              <a:rPr lang="it-IT" sz="2400" dirty="0"/>
-              <a:t>| </a:t>
-            </a:r>
-            <a:r>
-              <a:rPr lang="nl-NL" sz="2400" dirty="0"/>
-              <a:t>&lt; 3·</a:t>
-            </a:r>
-            <a:r>
-              <a:rPr lang="el-GR" sz="2400" dirty="0"/>
-              <a:t>σ</a:t>
-            </a:r>
-            <a:endParaRPr lang="nl-NL" sz="2400" dirty="0"/>
-          </a:p>
-        </p:txBody>
-      </p:sp>
-    </p:spTree>
-    <p:extLst>
-      <p:ext uri="{BB962C8B-B14F-4D97-AF65-F5344CB8AC3E}">
-        <p14:creationId xmlns:p14="http://schemas.microsoft.com/office/powerpoint/2010/main" val="483860090"/>
       </p:ext>
     </p:extLst>
   </p:cSld>
@@ -6079,43 +5799,891 @@
       </p:grpSpPr>
       <p:sp>
         <p:nvSpPr>
-          <p:cNvPr id="2" name="Title 1">
-            <a:extLst>
-              <a:ext uri="{FF2B5EF4-FFF2-40B4-BE49-F238E27FC236}">
-                <a16:creationId xmlns:a16="http://schemas.microsoft.com/office/drawing/2014/main" id="{E2742523-2057-44B4-9FB1-A3B7126FBF7F}"/>
-              </a:ext>
-            </a:extLst>
-          </p:cNvPr>
-          <p:cNvSpPr>
-            <a:spLocks noGrp="1"/>
-          </p:cNvSpPr>
-          <p:nvPr>
-            <p:ph type="title"/>
-          </p:nvPr>
+          <p:cNvPr id="2" name="TextBox 1">
+            <a:extLst>
+              <a:ext uri="{FF2B5EF4-FFF2-40B4-BE49-F238E27FC236}">
+                <a16:creationId xmlns:a16="http://schemas.microsoft.com/office/drawing/2014/main" id="{CC0200F0-ABFF-45F8-A6F5-9F8372AE5C7D}"/>
+              </a:ext>
+            </a:extLst>
+          </p:cNvPr>
+          <p:cNvSpPr txBox="1"/>
+          <p:nvPr/>
         </p:nvSpPr>
         <p:spPr>
           <a:xfrm>
-            <a:off x="838200" y="2766218"/>
-            <a:ext cx="10515600" cy="1325563"/>
+            <a:off x="0" y="0"/>
+            <a:ext cx="4395537" cy="369332"/>
           </a:xfrm>
+          <a:prstGeom prst="rect">
+            <a:avLst/>
+          </a:prstGeom>
+          <a:noFill/>
         </p:spPr>
         <p:txBody>
-          <a:bodyPr/>
+          <a:bodyPr wrap="square" rtlCol="0">
+            <a:spAutoFit/>
+          </a:bodyPr>
+          <a:lstStyle/>
+          <a:p>
+            <a:r>
+              <a:rPr lang="it-IT" u="sng" dirty="0"/>
+              <a:t>Blood Pressure Measurements - Outliers</a:t>
+            </a:r>
+            <a:endParaRPr lang="nl-NL" u="sng" dirty="0"/>
+          </a:p>
+        </p:txBody>
+      </p:sp>
+      <p:pic>
+        <p:nvPicPr>
+          <p:cNvPr id="4" name="Picture 3">
+            <a:extLst>
+              <a:ext uri="{FF2B5EF4-FFF2-40B4-BE49-F238E27FC236}">
+                <a16:creationId xmlns:a16="http://schemas.microsoft.com/office/drawing/2014/main" id="{B141D145-8AC1-45C7-8D61-50D4BD1CC9DF}"/>
+              </a:ext>
+            </a:extLst>
+          </p:cNvPr>
+          <p:cNvPicPr>
+            <a:picLocks noChangeAspect="1"/>
+          </p:cNvPicPr>
+          <p:nvPr/>
+        </p:nvPicPr>
+        <p:blipFill>
+          <a:blip r:embed="rId2">
+            <a:extLst>
+              <a:ext uri="{28A0092B-C50C-407E-A947-70E740481C1C}">
+                <a14:useLocalDpi xmlns:a14="http://schemas.microsoft.com/office/drawing/2010/main" val="0"/>
+              </a:ext>
+            </a:extLst>
+          </a:blip>
+          <a:stretch>
+            <a:fillRect/>
+          </a:stretch>
+        </p:blipFill>
+        <p:spPr>
+          <a:xfrm>
+            <a:off x="6186458" y="1957137"/>
+            <a:ext cx="6005542" cy="3649580"/>
+          </a:xfrm>
+          <a:prstGeom prst="rect">
+            <a:avLst/>
+          </a:prstGeom>
+        </p:spPr>
+      </p:pic>
+      <p:pic>
+        <p:nvPicPr>
+          <p:cNvPr id="8" name="Picture 7">
+            <a:extLst>
+              <a:ext uri="{FF2B5EF4-FFF2-40B4-BE49-F238E27FC236}">
+                <a16:creationId xmlns:a16="http://schemas.microsoft.com/office/drawing/2014/main" id="{B78D7C7E-C973-4558-835C-AE7A82ECC7EF}"/>
+              </a:ext>
+            </a:extLst>
+          </p:cNvPr>
+          <p:cNvPicPr>
+            <a:picLocks noChangeAspect="1"/>
+          </p:cNvPicPr>
+          <p:nvPr/>
+        </p:nvPicPr>
+        <p:blipFill>
+          <a:blip r:embed="rId3">
+            <a:extLst>
+              <a:ext uri="{28A0092B-C50C-407E-A947-70E740481C1C}">
+                <a14:useLocalDpi xmlns:a14="http://schemas.microsoft.com/office/drawing/2010/main" val="0"/>
+              </a:ext>
+            </a:extLst>
+          </a:blip>
+          <a:stretch>
+            <a:fillRect/>
+          </a:stretch>
+        </p:blipFill>
+        <p:spPr>
+          <a:xfrm>
+            <a:off x="14258" y="1957137"/>
+            <a:ext cx="6005542" cy="3649580"/>
+          </a:xfrm>
+          <a:prstGeom prst="rect">
+            <a:avLst/>
+          </a:prstGeom>
+        </p:spPr>
+      </p:pic>
+      <p:cxnSp>
+        <p:nvCxnSpPr>
+          <p:cNvPr id="10" name="Straight Arrow Connector 9">
+            <a:extLst>
+              <a:ext uri="{FF2B5EF4-FFF2-40B4-BE49-F238E27FC236}">
+                <a16:creationId xmlns:a16="http://schemas.microsoft.com/office/drawing/2014/main" id="{D2D21716-6BD7-4A50-9558-0D0C13985C2D}"/>
+              </a:ext>
+            </a:extLst>
+          </p:cNvPr>
+          <p:cNvCxnSpPr>
+            <a:cxnSpLocks/>
+            <a:stCxn id="13" idx="2"/>
+            <a:endCxn id="28" idx="7"/>
+          </p:cNvCxnSpPr>
+          <p:nvPr/>
+        </p:nvCxnSpPr>
+        <p:spPr>
+          <a:xfrm flipH="1">
+            <a:off x="1745476" y="1706964"/>
+            <a:ext cx="1271553" cy="618127"/>
+          </a:xfrm>
+          <a:prstGeom prst="straightConnector1">
+            <a:avLst/>
+          </a:prstGeom>
+          <a:ln>
+            <a:tailEnd type="triangle"/>
+          </a:ln>
+        </p:spPr>
+        <p:style>
+          <a:lnRef idx="3">
+            <a:schemeClr val="dk1"/>
+          </a:lnRef>
+          <a:fillRef idx="0">
+            <a:schemeClr val="dk1"/>
+          </a:fillRef>
+          <a:effectRef idx="2">
+            <a:schemeClr val="dk1"/>
+          </a:effectRef>
+          <a:fontRef idx="minor">
+            <a:schemeClr val="tx1"/>
+          </a:fontRef>
+        </p:style>
+      </p:cxnSp>
+      <p:cxnSp>
+        <p:nvCxnSpPr>
+          <p:cNvPr id="12" name="Straight Arrow Connector 11">
+            <a:extLst>
+              <a:ext uri="{FF2B5EF4-FFF2-40B4-BE49-F238E27FC236}">
+                <a16:creationId xmlns:a16="http://schemas.microsoft.com/office/drawing/2014/main" id="{8588E362-09B2-4B0B-BBDE-2EFEFF000F9B}"/>
+              </a:ext>
+            </a:extLst>
+          </p:cNvPr>
+          <p:cNvCxnSpPr>
+            <a:cxnSpLocks/>
+            <a:stCxn id="13" idx="2"/>
+            <a:endCxn id="30" idx="1"/>
+          </p:cNvCxnSpPr>
+          <p:nvPr/>
+        </p:nvCxnSpPr>
+        <p:spPr>
+          <a:xfrm>
+            <a:off x="3017029" y="1706964"/>
+            <a:ext cx="1532465" cy="797849"/>
+          </a:xfrm>
+          <a:prstGeom prst="straightConnector1">
+            <a:avLst/>
+          </a:prstGeom>
+          <a:ln>
+            <a:tailEnd type="triangle"/>
+          </a:ln>
+        </p:spPr>
+        <p:style>
+          <a:lnRef idx="3">
+            <a:schemeClr val="dk1"/>
+          </a:lnRef>
+          <a:fillRef idx="0">
+            <a:schemeClr val="dk1"/>
+          </a:fillRef>
+          <a:effectRef idx="2">
+            <a:schemeClr val="dk1"/>
+          </a:effectRef>
+          <a:fontRef idx="minor">
+            <a:schemeClr val="tx1"/>
+          </a:fontRef>
+        </p:style>
+      </p:cxnSp>
+      <p:sp>
+        <p:nvSpPr>
+          <p:cNvPr id="13" name="TextBox 12">
+            <a:extLst>
+              <a:ext uri="{FF2B5EF4-FFF2-40B4-BE49-F238E27FC236}">
+                <a16:creationId xmlns:a16="http://schemas.microsoft.com/office/drawing/2014/main" id="{6406D038-F66B-4859-9416-A23E4E34906D}"/>
+              </a:ext>
+            </a:extLst>
+          </p:cNvPr>
+          <p:cNvSpPr txBox="1"/>
+          <p:nvPr/>
+        </p:nvSpPr>
+        <p:spPr>
+          <a:xfrm>
+            <a:off x="1490242" y="1337632"/>
+            <a:ext cx="3053573" cy="369332"/>
+          </a:xfrm>
+          <a:prstGeom prst="rect">
+            <a:avLst/>
+          </a:prstGeom>
+          <a:noFill/>
+        </p:spPr>
+        <p:txBody>
+          <a:bodyPr wrap="square" rtlCol="0">
+            <a:spAutoFit/>
+          </a:bodyPr>
           <a:lstStyle/>
           <a:p>
             <a:pPr algn="ctr"/>
             <a:r>
               <a:rPr lang="it-IT" dirty="0"/>
-              <a:t>Eligibility to LHS</a:t>
+              <a:t>Set to NaN... Imputation?</a:t>
             </a:r>
             <a:endParaRPr lang="nl-NL" dirty="0"/>
+          </a:p>
+        </p:txBody>
+      </p:sp>
+      <p:sp>
+        <p:nvSpPr>
+          <p:cNvPr id="14" name="TextBox 13">
+            <a:extLst>
+              <a:ext uri="{FF2B5EF4-FFF2-40B4-BE49-F238E27FC236}">
+                <a16:creationId xmlns:a16="http://schemas.microsoft.com/office/drawing/2014/main" id="{F98F7243-8499-4EB9-8006-57DE1509E5C3}"/>
+              </a:ext>
+            </a:extLst>
+          </p:cNvPr>
+          <p:cNvSpPr txBox="1"/>
+          <p:nvPr/>
+        </p:nvSpPr>
+        <p:spPr>
+          <a:xfrm>
+            <a:off x="8060265" y="1152966"/>
+            <a:ext cx="2229853" cy="369332"/>
+          </a:xfrm>
+          <a:prstGeom prst="rect">
+            <a:avLst/>
+          </a:prstGeom>
+          <a:noFill/>
+        </p:spPr>
+        <p:txBody>
+          <a:bodyPr wrap="square" rtlCol="0">
+            <a:spAutoFit/>
+          </a:bodyPr>
+          <a:lstStyle/>
+          <a:p>
+            <a:r>
+              <a:rPr lang="it-IT" dirty="0"/>
+              <a:t>Considered Outliers</a:t>
+            </a:r>
+            <a:endParaRPr lang="nl-NL" dirty="0"/>
+          </a:p>
+        </p:txBody>
+      </p:sp>
+      <p:cxnSp>
+        <p:nvCxnSpPr>
+          <p:cNvPr id="16" name="Straight Arrow Connector 15">
+            <a:extLst>
+              <a:ext uri="{FF2B5EF4-FFF2-40B4-BE49-F238E27FC236}">
+                <a16:creationId xmlns:a16="http://schemas.microsoft.com/office/drawing/2014/main" id="{EF44B29E-148B-46BB-A8FF-E530EC852232}"/>
+              </a:ext>
+            </a:extLst>
+          </p:cNvPr>
+          <p:cNvCxnSpPr>
+            <a:cxnSpLocks/>
+            <a:stCxn id="14" idx="2"/>
+          </p:cNvCxnSpPr>
+          <p:nvPr/>
+        </p:nvCxnSpPr>
+        <p:spPr>
+          <a:xfrm>
+            <a:off x="9175192" y="1522298"/>
+            <a:ext cx="1451811" cy="1108426"/>
+          </a:xfrm>
+          <a:prstGeom prst="straightConnector1">
+            <a:avLst/>
+          </a:prstGeom>
+          <a:ln>
+            <a:tailEnd type="triangle"/>
+          </a:ln>
+        </p:spPr>
+        <p:style>
+          <a:lnRef idx="3">
+            <a:schemeClr val="dk1"/>
+          </a:lnRef>
+          <a:fillRef idx="0">
+            <a:schemeClr val="dk1"/>
+          </a:fillRef>
+          <a:effectRef idx="2">
+            <a:schemeClr val="dk1"/>
+          </a:effectRef>
+          <a:fontRef idx="minor">
+            <a:schemeClr val="tx1"/>
+          </a:fontRef>
+        </p:style>
+      </p:cxnSp>
+      <p:cxnSp>
+        <p:nvCxnSpPr>
+          <p:cNvPr id="18" name="Straight Arrow Connector 17">
+            <a:extLst>
+              <a:ext uri="{FF2B5EF4-FFF2-40B4-BE49-F238E27FC236}">
+                <a16:creationId xmlns:a16="http://schemas.microsoft.com/office/drawing/2014/main" id="{496788B4-CBEF-49A2-B29F-3DAC5165F805}"/>
+              </a:ext>
+            </a:extLst>
+          </p:cNvPr>
+          <p:cNvCxnSpPr>
+            <a:cxnSpLocks/>
+            <a:stCxn id="14" idx="2"/>
+          </p:cNvCxnSpPr>
+          <p:nvPr/>
+        </p:nvCxnSpPr>
+        <p:spPr>
+          <a:xfrm flipH="1">
+            <a:off x="7955994" y="1522298"/>
+            <a:ext cx="1219198" cy="1212700"/>
+          </a:xfrm>
+          <a:prstGeom prst="straightConnector1">
+            <a:avLst/>
+          </a:prstGeom>
+          <a:ln>
+            <a:tailEnd type="triangle"/>
+          </a:ln>
+        </p:spPr>
+        <p:style>
+          <a:lnRef idx="3">
+            <a:schemeClr val="dk1"/>
+          </a:lnRef>
+          <a:fillRef idx="0">
+            <a:schemeClr val="dk1"/>
+          </a:fillRef>
+          <a:effectRef idx="2">
+            <a:schemeClr val="dk1"/>
+          </a:effectRef>
+          <a:fontRef idx="minor">
+            <a:schemeClr val="tx1"/>
+          </a:fontRef>
+        </p:style>
+      </p:cxnSp>
+      <p:sp>
+        <p:nvSpPr>
+          <p:cNvPr id="28" name="Oval 27">
+            <a:extLst>
+              <a:ext uri="{FF2B5EF4-FFF2-40B4-BE49-F238E27FC236}">
+                <a16:creationId xmlns:a16="http://schemas.microsoft.com/office/drawing/2014/main" id="{5D3BB183-A2CA-46A2-B9C3-ADAE972B9027}"/>
+              </a:ext>
+            </a:extLst>
+          </p:cNvPr>
+          <p:cNvSpPr/>
+          <p:nvPr/>
+        </p:nvSpPr>
+        <p:spPr>
+          <a:xfrm>
+            <a:off x="1444235" y="2056559"/>
+            <a:ext cx="352926" cy="1833652"/>
+          </a:xfrm>
+          <a:prstGeom prst="ellipse">
+            <a:avLst/>
+          </a:prstGeom>
+          <a:noFill/>
+          <a:ln w="9525" cap="flat" cmpd="sng" algn="ctr">
+            <a:solidFill>
+              <a:schemeClr val="accent1"/>
+            </a:solidFill>
+            <a:prstDash val="solid"/>
+            <a:round/>
+            <a:headEnd type="none" w="med" len="med"/>
+            <a:tailEnd type="none" w="med" len="med"/>
+          </a:ln>
+        </p:spPr>
+        <p:style>
+          <a:lnRef idx="0">
+            <a:scrgbClr r="0" g="0" b="0"/>
+          </a:lnRef>
+          <a:fillRef idx="0">
+            <a:scrgbClr r="0" g="0" b="0"/>
+          </a:fillRef>
+          <a:effectRef idx="0">
+            <a:scrgbClr r="0" g="0" b="0"/>
+          </a:effectRef>
+          <a:fontRef idx="minor">
+            <a:schemeClr val="accent1"/>
+          </a:fontRef>
+        </p:style>
+        <p:txBody>
+          <a:bodyPr rtlCol="0" anchor="ctr"/>
+          <a:lstStyle/>
+          <a:p>
+            <a:pPr algn="ctr"/>
+            <a:endParaRPr lang="nl-NL"/>
+          </a:p>
+        </p:txBody>
+      </p:sp>
+      <p:sp>
+        <p:nvSpPr>
+          <p:cNvPr id="30" name="Oval 29">
+            <a:extLst>
+              <a:ext uri="{FF2B5EF4-FFF2-40B4-BE49-F238E27FC236}">
+                <a16:creationId xmlns:a16="http://schemas.microsoft.com/office/drawing/2014/main" id="{DFC1405A-A1FB-4B7D-A729-6F366D78F1F5}"/>
+              </a:ext>
+            </a:extLst>
+          </p:cNvPr>
+          <p:cNvSpPr/>
+          <p:nvPr/>
+        </p:nvSpPr>
+        <p:spPr>
+          <a:xfrm>
+            <a:off x="4497809" y="2056558"/>
+            <a:ext cx="352926" cy="3060874"/>
+          </a:xfrm>
+          <a:prstGeom prst="ellipse">
+            <a:avLst/>
+          </a:prstGeom>
+          <a:noFill/>
+          <a:ln w="9525" cap="flat" cmpd="sng" algn="ctr">
+            <a:solidFill>
+              <a:schemeClr val="accent1"/>
+            </a:solidFill>
+            <a:prstDash val="solid"/>
+            <a:round/>
+            <a:headEnd type="none" w="med" len="med"/>
+            <a:tailEnd type="none" w="med" len="med"/>
+          </a:ln>
+        </p:spPr>
+        <p:style>
+          <a:lnRef idx="0">
+            <a:scrgbClr r="0" g="0" b="0"/>
+          </a:lnRef>
+          <a:fillRef idx="0">
+            <a:scrgbClr r="0" g="0" b="0"/>
+          </a:fillRef>
+          <a:effectRef idx="0">
+            <a:scrgbClr r="0" g="0" b="0"/>
+          </a:effectRef>
+          <a:fontRef idx="minor">
+            <a:schemeClr val="accent1"/>
+          </a:fontRef>
+        </p:style>
+        <p:txBody>
+          <a:bodyPr rtlCol="0" anchor="ctr"/>
+          <a:lstStyle/>
+          <a:p>
+            <a:pPr algn="ctr"/>
+            <a:endParaRPr lang="nl-NL"/>
+          </a:p>
+        </p:txBody>
+      </p:sp>
+      <p:cxnSp>
+        <p:nvCxnSpPr>
+          <p:cNvPr id="47" name="Straight Connector 46">
+            <a:extLst>
+              <a:ext uri="{FF2B5EF4-FFF2-40B4-BE49-F238E27FC236}">
+                <a16:creationId xmlns:a16="http://schemas.microsoft.com/office/drawing/2014/main" id="{BB77F60D-AA92-4E88-9238-C37C7FCED343}"/>
+              </a:ext>
+            </a:extLst>
+          </p:cNvPr>
+          <p:cNvCxnSpPr/>
+          <p:nvPr/>
+        </p:nvCxnSpPr>
+        <p:spPr>
+          <a:xfrm>
+            <a:off x="344905" y="4868779"/>
+            <a:ext cx="2334126" cy="0"/>
+          </a:xfrm>
+          <a:prstGeom prst="line">
+            <a:avLst/>
+          </a:prstGeom>
+        </p:spPr>
+        <p:style>
+          <a:lnRef idx="3">
+            <a:schemeClr val="accent2"/>
+          </a:lnRef>
+          <a:fillRef idx="0">
+            <a:schemeClr val="accent2"/>
+          </a:fillRef>
+          <a:effectRef idx="2">
+            <a:schemeClr val="accent2"/>
+          </a:effectRef>
+          <a:fontRef idx="minor">
+            <a:schemeClr val="tx1"/>
+          </a:fontRef>
+        </p:style>
+      </p:cxnSp>
+      <p:sp>
+        <p:nvSpPr>
+          <p:cNvPr id="48" name="TextBox 47">
+            <a:extLst>
+              <a:ext uri="{FF2B5EF4-FFF2-40B4-BE49-F238E27FC236}">
+                <a16:creationId xmlns:a16="http://schemas.microsoft.com/office/drawing/2014/main" id="{210063D6-AB12-4D1A-8DD9-1B596D004A2F}"/>
+              </a:ext>
+            </a:extLst>
+          </p:cNvPr>
+          <p:cNvSpPr txBox="1"/>
+          <p:nvPr/>
+        </p:nvSpPr>
+        <p:spPr>
+          <a:xfrm>
+            <a:off x="2310061" y="4588042"/>
+            <a:ext cx="471458" cy="369332"/>
+          </a:xfrm>
+          <a:prstGeom prst="rect">
+            <a:avLst/>
+          </a:prstGeom>
+          <a:noFill/>
+        </p:spPr>
+        <p:txBody>
+          <a:bodyPr wrap="square" rtlCol="0">
+            <a:spAutoFit/>
+          </a:bodyPr>
+          <a:lstStyle/>
+          <a:p>
+            <a:pPr algn="ctr"/>
+            <a:r>
+              <a:rPr lang="it-IT" dirty="0">
+                <a:solidFill>
+                  <a:schemeClr val="accent2"/>
+                </a:solidFill>
+              </a:rPr>
+              <a:t>20</a:t>
+            </a:r>
+            <a:endParaRPr lang="nl-NL" dirty="0">
+              <a:solidFill>
+                <a:schemeClr val="accent2"/>
+              </a:solidFill>
+            </a:endParaRPr>
+          </a:p>
+        </p:txBody>
+      </p:sp>
+      <p:cxnSp>
+        <p:nvCxnSpPr>
+          <p:cNvPr id="49" name="Straight Connector 48">
+            <a:extLst>
+              <a:ext uri="{FF2B5EF4-FFF2-40B4-BE49-F238E27FC236}">
+                <a16:creationId xmlns:a16="http://schemas.microsoft.com/office/drawing/2014/main" id="{0BD6F6C2-AA8F-4637-B394-6AEB8944AE70}"/>
+              </a:ext>
+            </a:extLst>
+          </p:cNvPr>
+          <p:cNvCxnSpPr/>
+          <p:nvPr/>
+        </p:nvCxnSpPr>
+        <p:spPr>
+          <a:xfrm>
+            <a:off x="351141" y="3890211"/>
+            <a:ext cx="2334126" cy="0"/>
+          </a:xfrm>
+          <a:prstGeom prst="line">
+            <a:avLst/>
+          </a:prstGeom>
+        </p:spPr>
+        <p:style>
+          <a:lnRef idx="3">
+            <a:schemeClr val="accent2"/>
+          </a:lnRef>
+          <a:fillRef idx="0">
+            <a:schemeClr val="accent2"/>
+          </a:fillRef>
+          <a:effectRef idx="2">
+            <a:schemeClr val="accent2"/>
+          </a:effectRef>
+          <a:fontRef idx="minor">
+            <a:schemeClr val="tx1"/>
+          </a:fontRef>
+        </p:style>
+      </p:cxnSp>
+      <p:sp>
+        <p:nvSpPr>
+          <p:cNvPr id="50" name="TextBox 49">
+            <a:extLst>
+              <a:ext uri="{FF2B5EF4-FFF2-40B4-BE49-F238E27FC236}">
+                <a16:creationId xmlns:a16="http://schemas.microsoft.com/office/drawing/2014/main" id="{DC3D5BFC-C2C7-4C0B-8CCD-B5F0EF51BD42}"/>
+              </a:ext>
+            </a:extLst>
+          </p:cNvPr>
+          <p:cNvSpPr txBox="1"/>
+          <p:nvPr/>
+        </p:nvSpPr>
+        <p:spPr>
+          <a:xfrm>
+            <a:off x="2181726" y="3609474"/>
+            <a:ext cx="606029" cy="369332"/>
+          </a:xfrm>
+          <a:prstGeom prst="rect">
+            <a:avLst/>
+          </a:prstGeom>
+          <a:noFill/>
+        </p:spPr>
+        <p:txBody>
+          <a:bodyPr wrap="square" rtlCol="0">
+            <a:spAutoFit/>
+          </a:bodyPr>
+          <a:lstStyle/>
+          <a:p>
+            <a:pPr algn="ctr"/>
+            <a:r>
+              <a:rPr lang="it-IT" dirty="0">
+                <a:solidFill>
+                  <a:schemeClr val="accent2"/>
+                </a:solidFill>
+              </a:rPr>
+              <a:t>300</a:t>
+            </a:r>
+            <a:endParaRPr lang="nl-NL" dirty="0">
+              <a:solidFill>
+                <a:schemeClr val="accent2"/>
+              </a:solidFill>
+            </a:endParaRPr>
+          </a:p>
+        </p:txBody>
+      </p:sp>
+      <p:cxnSp>
+        <p:nvCxnSpPr>
+          <p:cNvPr id="51" name="Straight Connector 50">
+            <a:extLst>
+              <a:ext uri="{FF2B5EF4-FFF2-40B4-BE49-F238E27FC236}">
+                <a16:creationId xmlns:a16="http://schemas.microsoft.com/office/drawing/2014/main" id="{44BEA9E8-8FA9-4EBF-ADB1-F15EF59D545A}"/>
+              </a:ext>
+            </a:extLst>
+          </p:cNvPr>
+          <p:cNvCxnSpPr/>
+          <p:nvPr/>
+        </p:nvCxnSpPr>
+        <p:spPr>
+          <a:xfrm>
+            <a:off x="3376752" y="5219798"/>
+            <a:ext cx="2334126" cy="0"/>
+          </a:xfrm>
+          <a:prstGeom prst="line">
+            <a:avLst/>
+          </a:prstGeom>
+        </p:spPr>
+        <p:style>
+          <a:lnRef idx="3">
+            <a:schemeClr val="accent2"/>
+          </a:lnRef>
+          <a:fillRef idx="0">
+            <a:schemeClr val="accent2"/>
+          </a:fillRef>
+          <a:effectRef idx="2">
+            <a:schemeClr val="accent2"/>
+          </a:effectRef>
+          <a:fontRef idx="minor">
+            <a:schemeClr val="tx1"/>
+          </a:fontRef>
+        </p:style>
+      </p:cxnSp>
+      <p:sp>
+        <p:nvSpPr>
+          <p:cNvPr id="52" name="TextBox 51">
+            <a:extLst>
+              <a:ext uri="{FF2B5EF4-FFF2-40B4-BE49-F238E27FC236}">
+                <a16:creationId xmlns:a16="http://schemas.microsoft.com/office/drawing/2014/main" id="{A166A446-0273-44CD-8582-FA57872289AC}"/>
+              </a:ext>
+            </a:extLst>
+          </p:cNvPr>
+          <p:cNvSpPr txBox="1"/>
+          <p:nvPr/>
+        </p:nvSpPr>
+        <p:spPr>
+          <a:xfrm>
+            <a:off x="5624542" y="5035132"/>
+            <a:ext cx="471458" cy="369332"/>
+          </a:xfrm>
+          <a:prstGeom prst="rect">
+            <a:avLst/>
+          </a:prstGeom>
+          <a:noFill/>
+        </p:spPr>
+        <p:txBody>
+          <a:bodyPr wrap="square" rtlCol="0">
+            <a:spAutoFit/>
+          </a:bodyPr>
+          <a:lstStyle/>
+          <a:p>
+            <a:pPr algn="ctr"/>
+            <a:r>
+              <a:rPr lang="it-IT" dirty="0">
+                <a:solidFill>
+                  <a:schemeClr val="accent2"/>
+                </a:solidFill>
+              </a:rPr>
+              <a:t>20</a:t>
+            </a:r>
+            <a:endParaRPr lang="nl-NL" dirty="0">
+              <a:solidFill>
+                <a:schemeClr val="accent2"/>
+              </a:solidFill>
+            </a:endParaRPr>
+          </a:p>
+        </p:txBody>
+      </p:sp>
+      <p:cxnSp>
+        <p:nvCxnSpPr>
+          <p:cNvPr id="53" name="Straight Connector 52">
+            <a:extLst>
+              <a:ext uri="{FF2B5EF4-FFF2-40B4-BE49-F238E27FC236}">
+                <a16:creationId xmlns:a16="http://schemas.microsoft.com/office/drawing/2014/main" id="{7EEC18CD-74D0-4FAF-8860-CE57F8D1CFA6}"/>
+              </a:ext>
+            </a:extLst>
+          </p:cNvPr>
+          <p:cNvCxnSpPr/>
+          <p:nvPr/>
+        </p:nvCxnSpPr>
+        <p:spPr>
+          <a:xfrm>
+            <a:off x="3382988" y="5112781"/>
+            <a:ext cx="2334126" cy="0"/>
+          </a:xfrm>
+          <a:prstGeom prst="line">
+            <a:avLst/>
+          </a:prstGeom>
+        </p:spPr>
+        <p:style>
+          <a:lnRef idx="3">
+            <a:schemeClr val="accent2"/>
+          </a:lnRef>
+          <a:fillRef idx="0">
+            <a:schemeClr val="accent2"/>
+          </a:fillRef>
+          <a:effectRef idx="2">
+            <a:schemeClr val="accent2"/>
+          </a:effectRef>
+          <a:fontRef idx="minor">
+            <a:schemeClr val="tx1"/>
+          </a:fontRef>
+        </p:style>
+      </p:cxnSp>
+      <p:sp>
+        <p:nvSpPr>
+          <p:cNvPr id="54" name="TextBox 53">
+            <a:extLst>
+              <a:ext uri="{FF2B5EF4-FFF2-40B4-BE49-F238E27FC236}">
+                <a16:creationId xmlns:a16="http://schemas.microsoft.com/office/drawing/2014/main" id="{79388AA8-1909-4DBD-B882-1AB427F2771E}"/>
+              </a:ext>
+            </a:extLst>
+          </p:cNvPr>
+          <p:cNvSpPr txBox="1"/>
+          <p:nvPr/>
+        </p:nvSpPr>
+        <p:spPr>
+          <a:xfrm>
+            <a:off x="5566173" y="4796958"/>
+            <a:ext cx="606029" cy="369332"/>
+          </a:xfrm>
+          <a:prstGeom prst="rect">
+            <a:avLst/>
+          </a:prstGeom>
+          <a:noFill/>
+        </p:spPr>
+        <p:txBody>
+          <a:bodyPr wrap="square" rtlCol="0">
+            <a:spAutoFit/>
+          </a:bodyPr>
+          <a:lstStyle/>
+          <a:p>
+            <a:pPr algn="ctr"/>
+            <a:r>
+              <a:rPr lang="it-IT" dirty="0">
+                <a:solidFill>
+                  <a:schemeClr val="accent2"/>
+                </a:solidFill>
+              </a:rPr>
+              <a:t>300</a:t>
+            </a:r>
+            <a:endParaRPr lang="nl-NL" dirty="0">
+              <a:solidFill>
+                <a:schemeClr val="accent2"/>
+              </a:solidFill>
+            </a:endParaRPr>
+          </a:p>
+        </p:txBody>
+      </p:sp>
+      <p:sp>
+        <p:nvSpPr>
+          <p:cNvPr id="55" name="Arrow: Right 54">
+            <a:extLst>
+              <a:ext uri="{FF2B5EF4-FFF2-40B4-BE49-F238E27FC236}">
+                <a16:creationId xmlns:a16="http://schemas.microsoft.com/office/drawing/2014/main" id="{CF186115-EF21-4E45-BA1A-F7A01B55B725}"/>
+              </a:ext>
+            </a:extLst>
+          </p:cNvPr>
+          <p:cNvSpPr/>
+          <p:nvPr/>
+        </p:nvSpPr>
+        <p:spPr>
+          <a:xfrm>
+            <a:off x="5654279" y="3364185"/>
+            <a:ext cx="1094205" cy="369332"/>
+          </a:xfrm>
+          <a:prstGeom prst="rightArrow">
+            <a:avLst/>
+          </a:prstGeom>
+        </p:spPr>
+        <p:style>
+          <a:lnRef idx="2">
+            <a:schemeClr val="accent2">
+              <a:shade val="50000"/>
+            </a:schemeClr>
+          </a:lnRef>
+          <a:fillRef idx="1">
+            <a:schemeClr val="accent2"/>
+          </a:fillRef>
+          <a:effectRef idx="0">
+            <a:schemeClr val="accent2"/>
+          </a:effectRef>
+          <a:fontRef idx="minor">
+            <a:schemeClr val="lt1"/>
+          </a:fontRef>
+        </p:style>
+        <p:txBody>
+          <a:bodyPr rtlCol="0" anchor="ctr"/>
+          <a:lstStyle/>
+          <a:p>
+            <a:pPr algn="ctr"/>
+            <a:endParaRPr lang="nl-NL"/>
+          </a:p>
+        </p:txBody>
+      </p:sp>
+      <p:sp>
+        <p:nvSpPr>
+          <p:cNvPr id="57" name="Oval 56">
+            <a:extLst>
+              <a:ext uri="{FF2B5EF4-FFF2-40B4-BE49-F238E27FC236}">
+                <a16:creationId xmlns:a16="http://schemas.microsoft.com/office/drawing/2014/main" id="{F946F1D0-67D6-45FC-AEDB-3F765ADB089F}"/>
+              </a:ext>
+            </a:extLst>
+          </p:cNvPr>
+          <p:cNvSpPr/>
+          <p:nvPr/>
+        </p:nvSpPr>
+        <p:spPr>
+          <a:xfrm>
+            <a:off x="1444235" y="4886330"/>
+            <a:ext cx="352926" cy="473862"/>
+          </a:xfrm>
+          <a:prstGeom prst="ellipse">
+            <a:avLst/>
+          </a:prstGeom>
+          <a:noFill/>
+          <a:ln w="9525" cap="flat" cmpd="sng" algn="ctr">
+            <a:solidFill>
+              <a:schemeClr val="accent1"/>
+            </a:solidFill>
+            <a:prstDash val="solid"/>
+            <a:round/>
+            <a:headEnd type="none" w="med" len="med"/>
+            <a:tailEnd type="none" w="med" len="med"/>
+          </a:ln>
+        </p:spPr>
+        <p:style>
+          <a:lnRef idx="0">
+            <a:scrgbClr r="0" g="0" b="0"/>
+          </a:lnRef>
+          <a:fillRef idx="0">
+            <a:scrgbClr r="0" g="0" b="0"/>
+          </a:fillRef>
+          <a:effectRef idx="0">
+            <a:scrgbClr r="0" g="0" b="0"/>
+          </a:effectRef>
+          <a:fontRef idx="minor">
+            <a:schemeClr val="accent1"/>
+          </a:fontRef>
+        </p:style>
+        <p:txBody>
+          <a:bodyPr rtlCol="0" anchor="ctr"/>
+          <a:lstStyle/>
+          <a:p>
+            <a:pPr algn="ctr"/>
+            <a:endParaRPr lang="nl-NL"/>
           </a:p>
         </p:txBody>
       </p:sp>
     </p:spTree>
     <p:extLst>
       <p:ext uri="{BB962C8B-B14F-4D97-AF65-F5344CB8AC3E}">
-        <p14:creationId xmlns:p14="http://schemas.microsoft.com/office/powerpoint/2010/main" val="64685501"/>
+        <p14:creationId xmlns:p14="http://schemas.microsoft.com/office/powerpoint/2010/main" val="2308014033"/>
       </p:ext>
     </p:extLst>
   </p:cSld>
@@ -6292,6 +6860,264 @@
 </file>
 
 <file path=ppt/slides/slide20.xml><?xml version="1.0" encoding="utf-8"?>
+<p:sld xmlns:a="http://schemas.openxmlformats.org/drawingml/2006/main" xmlns:r="http://schemas.openxmlformats.org/officeDocument/2006/relationships" xmlns:p="http://schemas.openxmlformats.org/presentationml/2006/main">
+  <p:cSld>
+    <p:spTree>
+      <p:nvGrpSpPr>
+        <p:cNvPr id="1" name=""/>
+        <p:cNvGrpSpPr/>
+        <p:nvPr/>
+      </p:nvGrpSpPr>
+      <p:grpSpPr>
+        <a:xfrm>
+          <a:off x="0" y="0"/>
+          <a:ext cx="0" cy="0"/>
+          <a:chOff x="0" y="0"/>
+          <a:chExt cx="0" cy="0"/>
+        </a:xfrm>
+      </p:grpSpPr>
+      <p:pic>
+        <p:nvPicPr>
+          <p:cNvPr id="2" name="Picture 1">
+            <a:extLst>
+              <a:ext uri="{FF2B5EF4-FFF2-40B4-BE49-F238E27FC236}">
+                <a16:creationId xmlns:a16="http://schemas.microsoft.com/office/drawing/2014/main" id="{EFCA64AE-70C0-46DC-9DE0-3BD016877CF0}"/>
+              </a:ext>
+            </a:extLst>
+          </p:cNvPr>
+          <p:cNvPicPr>
+            <a:picLocks noChangeAspect="1"/>
+          </p:cNvPicPr>
+          <p:nvPr/>
+        </p:nvPicPr>
+        <p:blipFill>
+          <a:blip r:embed="rId2">
+            <a:extLst>
+              <a:ext uri="{28A0092B-C50C-407E-A947-70E740481C1C}">
+                <a14:useLocalDpi xmlns:a14="http://schemas.microsoft.com/office/drawing/2010/main" val="0"/>
+              </a:ext>
+            </a:extLst>
+          </a:blip>
+          <a:stretch>
+            <a:fillRect/>
+          </a:stretch>
+        </p:blipFill>
+        <p:spPr>
+          <a:xfrm>
+            <a:off x="2471014" y="2125452"/>
+            <a:ext cx="7249970" cy="4405816"/>
+          </a:xfrm>
+          <a:prstGeom prst="rect">
+            <a:avLst/>
+          </a:prstGeom>
+        </p:spPr>
+      </p:pic>
+      <p:sp>
+        <p:nvSpPr>
+          <p:cNvPr id="3" name="TextBox 2">
+            <a:extLst>
+              <a:ext uri="{FF2B5EF4-FFF2-40B4-BE49-F238E27FC236}">
+                <a16:creationId xmlns:a16="http://schemas.microsoft.com/office/drawing/2014/main" id="{669BC41E-7A1B-450B-AE56-57E23EBB368B}"/>
+              </a:ext>
+            </a:extLst>
+          </p:cNvPr>
+          <p:cNvSpPr txBox="1"/>
+          <p:nvPr/>
+        </p:nvSpPr>
+        <p:spPr>
+          <a:xfrm>
+            <a:off x="0" y="0"/>
+            <a:ext cx="4395537" cy="369332"/>
+          </a:xfrm>
+          <a:prstGeom prst="rect">
+            <a:avLst/>
+          </a:prstGeom>
+          <a:noFill/>
+        </p:spPr>
+        <p:txBody>
+          <a:bodyPr wrap="square" rtlCol="0">
+            <a:spAutoFit/>
+          </a:bodyPr>
+          <a:lstStyle/>
+          <a:p>
+            <a:r>
+              <a:rPr lang="it-IT" u="sng" dirty="0"/>
+              <a:t>Blood Pressure Measurements - Outliers</a:t>
+            </a:r>
+            <a:endParaRPr lang="nl-NL" u="sng" dirty="0"/>
+          </a:p>
+        </p:txBody>
+      </p:sp>
+      <p:sp>
+        <p:nvSpPr>
+          <p:cNvPr id="4" name="TextBox 3">
+            <a:extLst>
+              <a:ext uri="{FF2B5EF4-FFF2-40B4-BE49-F238E27FC236}">
+                <a16:creationId xmlns:a16="http://schemas.microsoft.com/office/drawing/2014/main" id="{9D83727A-AEE6-4E01-9A07-195FB57628BF}"/>
+              </a:ext>
+            </a:extLst>
+          </p:cNvPr>
+          <p:cNvSpPr txBox="1"/>
+          <p:nvPr/>
+        </p:nvSpPr>
+        <p:spPr>
+          <a:xfrm>
+            <a:off x="2709862" y="811929"/>
+            <a:ext cx="6772275" cy="1200329"/>
+          </a:xfrm>
+          <a:prstGeom prst="rect">
+            <a:avLst/>
+          </a:prstGeom>
+          <a:noFill/>
+        </p:spPr>
+        <p:txBody>
+          <a:bodyPr wrap="square" rtlCol="0">
+            <a:spAutoFit/>
+          </a:bodyPr>
+          <a:lstStyle/>
+          <a:p>
+            <a:pPr algn="ctr"/>
+            <a:r>
+              <a:rPr lang="it-IT" sz="2400" dirty="0"/>
+              <a:t>Replaced with Mean value </a:t>
+            </a:r>
+          </a:p>
+          <a:p>
+            <a:pPr algn="ctr"/>
+            <a:r>
+              <a:rPr lang="it-IT" sz="2400" dirty="0"/>
+              <a:t>if </a:t>
+            </a:r>
+          </a:p>
+          <a:p>
+            <a:pPr algn="ctr"/>
+            <a:r>
+              <a:rPr lang="it-IT" sz="2400" dirty="0"/>
+              <a:t>|BP</a:t>
+            </a:r>
+            <a:r>
+              <a:rPr lang="it-IT" sz="2400" baseline="-25000" dirty="0"/>
+              <a:t>Sys,Dia</a:t>
+            </a:r>
+            <a:r>
+              <a:rPr lang="it-IT" sz="2400" dirty="0"/>
+              <a:t>| </a:t>
+            </a:r>
+            <a:r>
+              <a:rPr lang="nl-NL" sz="2400" dirty="0"/>
+              <a:t>&lt; 3·</a:t>
+            </a:r>
+            <a:r>
+              <a:rPr lang="el-GR" sz="2400" dirty="0"/>
+              <a:t>σ</a:t>
+            </a:r>
+            <a:endParaRPr lang="nl-NL" sz="2400" dirty="0"/>
+          </a:p>
+        </p:txBody>
+      </p:sp>
+    </p:spTree>
+    <p:extLst>
+      <p:ext uri="{BB962C8B-B14F-4D97-AF65-F5344CB8AC3E}">
+        <p14:creationId xmlns:p14="http://schemas.microsoft.com/office/powerpoint/2010/main" val="483860090"/>
+      </p:ext>
+    </p:extLst>
+  </p:cSld>
+  <p:clrMapOvr>
+    <a:masterClrMapping/>
+  </p:clrMapOvr>
+  <mc:AlternateContent xmlns:mc="http://schemas.openxmlformats.org/markup-compatibility/2006" xmlns:p159="http://schemas.microsoft.com/office/powerpoint/2015/09/main">
+    <mc:Choice Requires="p159">
+      <p:transition xmlns:p14="http://schemas.microsoft.com/office/powerpoint/2010/main" spd="slow" p14:dur="2000">
+        <p159:morph option="byObject"/>
+      </p:transition>
+    </mc:Choice>
+    <mc:Fallback xmlns="">
+      <p:transition spd="slow">
+        <p:fade/>
+      </p:transition>
+    </mc:Fallback>
+  </mc:AlternateContent>
+</p:sld>
+</file>
+
+<file path=ppt/slides/slide21.xml><?xml version="1.0" encoding="utf-8"?>
+<p:sld xmlns:a="http://schemas.openxmlformats.org/drawingml/2006/main" xmlns:r="http://schemas.openxmlformats.org/officeDocument/2006/relationships" xmlns:p="http://schemas.openxmlformats.org/presentationml/2006/main">
+  <p:cSld>
+    <p:spTree>
+      <p:nvGrpSpPr>
+        <p:cNvPr id="1" name=""/>
+        <p:cNvGrpSpPr/>
+        <p:nvPr/>
+      </p:nvGrpSpPr>
+      <p:grpSpPr>
+        <a:xfrm>
+          <a:off x="0" y="0"/>
+          <a:ext cx="0" cy="0"/>
+          <a:chOff x="0" y="0"/>
+          <a:chExt cx="0" cy="0"/>
+        </a:xfrm>
+      </p:grpSpPr>
+      <p:sp>
+        <p:nvSpPr>
+          <p:cNvPr id="2" name="Title 1">
+            <a:extLst>
+              <a:ext uri="{FF2B5EF4-FFF2-40B4-BE49-F238E27FC236}">
+                <a16:creationId xmlns:a16="http://schemas.microsoft.com/office/drawing/2014/main" id="{E2742523-2057-44B4-9FB1-A3B7126FBF7F}"/>
+              </a:ext>
+            </a:extLst>
+          </p:cNvPr>
+          <p:cNvSpPr>
+            <a:spLocks noGrp="1"/>
+          </p:cNvSpPr>
+          <p:nvPr>
+            <p:ph type="title"/>
+          </p:nvPr>
+        </p:nvSpPr>
+        <p:spPr>
+          <a:xfrm>
+            <a:off x="838200" y="2766218"/>
+            <a:ext cx="10515600" cy="1325563"/>
+          </a:xfrm>
+        </p:spPr>
+        <p:txBody>
+          <a:bodyPr/>
+          <a:lstStyle/>
+          <a:p>
+            <a:pPr algn="ctr"/>
+            <a:r>
+              <a:rPr lang="it-IT" dirty="0"/>
+              <a:t>Eligibility to LHS</a:t>
+            </a:r>
+            <a:endParaRPr lang="nl-NL" dirty="0"/>
+          </a:p>
+        </p:txBody>
+      </p:sp>
+    </p:spTree>
+    <p:extLst>
+      <p:ext uri="{BB962C8B-B14F-4D97-AF65-F5344CB8AC3E}">
+        <p14:creationId xmlns:p14="http://schemas.microsoft.com/office/powerpoint/2010/main" val="64685501"/>
+      </p:ext>
+    </p:extLst>
+  </p:cSld>
+  <p:clrMapOvr>
+    <a:masterClrMapping/>
+  </p:clrMapOvr>
+  <mc:AlternateContent xmlns:mc="http://schemas.openxmlformats.org/markup-compatibility/2006" xmlns:p159="http://schemas.microsoft.com/office/powerpoint/2015/09/main">
+    <mc:Choice Requires="p159">
+      <p:transition xmlns:p14="http://schemas.microsoft.com/office/powerpoint/2010/main" spd="slow" p14:dur="2000">
+        <p159:morph option="byObject"/>
+      </p:transition>
+    </mc:Choice>
+    <mc:Fallback xmlns="">
+      <p:transition spd="slow">
+        <p:fade/>
+      </p:transition>
+    </mc:Fallback>
+  </mc:AlternateContent>
+</p:sld>
+</file>
+
+<file path=ppt/slides/slide22.xml><?xml version="1.0" encoding="utf-8"?>
 <p:sld xmlns:a="http://schemas.openxmlformats.org/drawingml/2006/main" xmlns:r="http://schemas.openxmlformats.org/officeDocument/2006/relationships" xmlns:p="http://schemas.openxmlformats.org/presentationml/2006/main">
   <p:cSld>
     <p:spTree>
@@ -6642,7 +7468,7 @@
 </p:sld>
 </file>
 
-<file path=ppt/slides/slide21.xml><?xml version="1.0" encoding="utf-8"?>
+<file path=ppt/slides/slide23.xml><?xml version="1.0" encoding="utf-8"?>
 <p:sld xmlns:a="http://schemas.openxmlformats.org/drawingml/2006/main" xmlns:r="http://schemas.openxmlformats.org/officeDocument/2006/relationships" xmlns:p="http://schemas.openxmlformats.org/presentationml/2006/main">
   <p:cSld>
     <p:spTree>
@@ -7011,7 +7837,7 @@
 </p:sld>
 </file>
 
-<file path=ppt/slides/slide22.xml><?xml version="1.0" encoding="utf-8"?>
+<file path=ppt/slides/slide24.xml><?xml version="1.0" encoding="utf-8"?>
 <p:sld xmlns:a="http://schemas.openxmlformats.org/drawingml/2006/main" xmlns:r="http://schemas.openxmlformats.org/officeDocument/2006/relationships" xmlns:p="http://schemas.openxmlformats.org/presentationml/2006/main">
   <p:cSld>
     <p:spTree>
@@ -7503,7 +8329,7 @@
 </p:sld>
 </file>
 
-<file path=ppt/slides/slide23.xml><?xml version="1.0" encoding="utf-8"?>
+<file path=ppt/slides/slide25.xml><?xml version="1.0" encoding="utf-8"?>
 <p:sld xmlns:a="http://schemas.openxmlformats.org/drawingml/2006/main" xmlns:r="http://schemas.openxmlformats.org/officeDocument/2006/relationships" xmlns:p="http://schemas.openxmlformats.org/presentationml/2006/main">
   <p:cSld>
     <p:spTree>
@@ -8283,48 +9109,12 @@
           <a:chExt cx="0" cy="0"/>
         </a:xfrm>
       </p:grpSpPr>
-      <p:pic>
-        <p:nvPicPr>
-          <p:cNvPr id="3" name="Picture 2">
-            <a:extLst>
-              <a:ext uri="{FF2B5EF4-FFF2-40B4-BE49-F238E27FC236}">
-                <a16:creationId xmlns:a16="http://schemas.microsoft.com/office/drawing/2014/main" id="{C047F34C-2231-469A-9B11-AA44AE7D7A5E}"/>
-              </a:ext>
-            </a:extLst>
-          </p:cNvPr>
-          <p:cNvPicPr>
-            <a:picLocks noChangeAspect="1"/>
-          </p:cNvPicPr>
-          <p:nvPr/>
-        </p:nvPicPr>
-        <p:blipFill>
-          <a:blip r:embed="rId2">
-            <a:extLst>
-              <a:ext uri="{28A0092B-C50C-407E-A947-70E740481C1C}">
-                <a14:useLocalDpi xmlns:a14="http://schemas.microsoft.com/office/drawing/2010/main" val="0"/>
-              </a:ext>
-            </a:extLst>
-          </a:blip>
-          <a:stretch>
-            <a:fillRect/>
-          </a:stretch>
-        </p:blipFill>
-        <p:spPr>
-          <a:xfrm>
-            <a:off x="0" y="534496"/>
-            <a:ext cx="12192000" cy="5789007"/>
-          </a:xfrm>
-          <a:prstGeom prst="rect">
-            <a:avLst/>
-          </a:prstGeom>
-        </p:spPr>
-      </p:pic>
       <p:sp>
         <p:nvSpPr>
           <p:cNvPr id="4" name="TextBox 3">
             <a:extLst>
               <a:ext uri="{FF2B5EF4-FFF2-40B4-BE49-F238E27FC236}">
-                <a16:creationId xmlns:a16="http://schemas.microsoft.com/office/drawing/2014/main" id="{B40CC955-9822-4C97-8EA5-CCA925BF2200}"/>
+                <a16:creationId xmlns:a16="http://schemas.microsoft.com/office/drawing/2014/main" id="{99122CDA-8054-4F30-AA24-7864527ED42D}"/>
               </a:ext>
             </a:extLst>
           </p:cNvPr>
@@ -8333,8 +9123,8 @@
         </p:nvSpPr>
         <p:spPr>
           <a:xfrm>
-            <a:off x="0" y="2009"/>
-            <a:ext cx="3430954" cy="369332"/>
+            <a:off x="0" y="0"/>
+            <a:ext cx="4708358" cy="369332"/>
           </a:xfrm>
           <a:prstGeom prst="rect">
             <a:avLst/>
@@ -8349,16 +9139,52 @@
           <a:p>
             <a:r>
               <a:rPr lang="it-IT" u="sng" dirty="0"/>
-              <a:t>Missing Values</a:t>
+              <a:t>Original Chemical Subs distributions</a:t>
             </a:r>
             <a:endParaRPr lang="nl-NL" u="sng" dirty="0"/>
           </a:p>
         </p:txBody>
       </p:sp>
+      <p:pic>
+        <p:nvPicPr>
+          <p:cNvPr id="6" name="Picture 5">
+            <a:extLst>
+              <a:ext uri="{FF2B5EF4-FFF2-40B4-BE49-F238E27FC236}">
+                <a16:creationId xmlns:a16="http://schemas.microsoft.com/office/drawing/2014/main" id="{62B614DA-B9E5-44DA-9D9F-C33D5F9B5334}"/>
+              </a:ext>
+            </a:extLst>
+          </p:cNvPr>
+          <p:cNvPicPr>
+            <a:picLocks noChangeAspect="1"/>
+          </p:cNvPicPr>
+          <p:nvPr/>
+        </p:nvPicPr>
+        <p:blipFill>
+          <a:blip r:embed="rId2">
+            <a:extLst>
+              <a:ext uri="{28A0092B-C50C-407E-A947-70E740481C1C}">
+                <a14:useLocalDpi xmlns:a14="http://schemas.microsoft.com/office/drawing/2010/main" val="0"/>
+              </a:ext>
+            </a:extLst>
+          </a:blip>
+          <a:stretch>
+            <a:fillRect/>
+          </a:stretch>
+        </p:blipFill>
+        <p:spPr>
+          <a:xfrm>
+            <a:off x="152400" y="538130"/>
+            <a:ext cx="11887200" cy="5958202"/>
+          </a:xfrm>
+          <a:prstGeom prst="rect">
+            <a:avLst/>
+          </a:prstGeom>
+        </p:spPr>
+      </p:pic>
     </p:spTree>
     <p:extLst>
       <p:ext uri="{BB962C8B-B14F-4D97-AF65-F5344CB8AC3E}">
-        <p14:creationId xmlns:p14="http://schemas.microsoft.com/office/powerpoint/2010/main" val="2771455475"/>
+        <p14:creationId xmlns:p14="http://schemas.microsoft.com/office/powerpoint/2010/main" val="1013586166"/>
       </p:ext>
     </p:extLst>
   </p:cSld>
@@ -8397,244 +9223,1731 @@
           <a:chExt cx="0" cy="0"/>
         </a:xfrm>
       </p:grpSpPr>
-      <p:pic>
-        <p:nvPicPr>
-          <p:cNvPr id="56" name="Graphic 55">
-            <a:extLst>
-              <a:ext uri="{FF2B5EF4-FFF2-40B4-BE49-F238E27FC236}">
-                <a16:creationId xmlns:a16="http://schemas.microsoft.com/office/drawing/2014/main" id="{52414F87-F631-4D89-AA4B-5432D50060F8}"/>
-              </a:ext>
-            </a:extLst>
-          </p:cNvPr>
-          <p:cNvPicPr>
-            <a:picLocks noChangeAspect="1"/>
-          </p:cNvPicPr>
+      <p:sp>
+        <p:nvSpPr>
+          <p:cNvPr id="2" name="TextBox 1">
+            <a:extLst>
+              <a:ext uri="{FF2B5EF4-FFF2-40B4-BE49-F238E27FC236}">
+                <a16:creationId xmlns:a16="http://schemas.microsoft.com/office/drawing/2014/main" id="{A60B4FD1-F66A-46C8-A96B-C6DD32132922}"/>
+              </a:ext>
+            </a:extLst>
+          </p:cNvPr>
+          <p:cNvSpPr txBox="1"/>
           <p:nvPr/>
-        </p:nvPicPr>
-        <p:blipFill>
-          <a:blip r:embed="rId2">
-            <a:extLst>
-              <a:ext uri="{28A0092B-C50C-407E-A947-70E740481C1C}">
-                <a14:useLocalDpi xmlns:a14="http://schemas.microsoft.com/office/drawing/2010/main" val="0"/>
-              </a:ext>
-              <a:ext uri="{96DAC541-7B7A-43D3-8B79-37D633B846F1}">
-                <asvg:svgBlip xmlns:asvg="http://schemas.microsoft.com/office/drawing/2016/SVG/main" r:embed="rId3"/>
-              </a:ext>
-            </a:extLst>
-          </a:blip>
-          <a:stretch>
-            <a:fillRect/>
-          </a:stretch>
-        </p:blipFill>
+        </p:nvSpPr>
         <p:spPr>
           <a:xfrm>
-            <a:off x="6935099" y="3299436"/>
-            <a:ext cx="4394477" cy="3299436"/>
+            <a:off x="0" y="0"/>
+            <a:ext cx="4708358" cy="369332"/>
           </a:xfrm>
           <a:prstGeom prst="rect">
             <a:avLst/>
           </a:prstGeom>
+          <a:noFill/>
         </p:spPr>
-      </p:pic>
-      <p:pic>
-        <p:nvPicPr>
-          <p:cNvPr id="58" name="Graphic 57">
-            <a:extLst>
-              <a:ext uri="{FF2B5EF4-FFF2-40B4-BE49-F238E27FC236}">
-                <a16:creationId xmlns:a16="http://schemas.microsoft.com/office/drawing/2014/main" id="{68FD5771-5A2A-484D-A31C-D9D6B471123F}"/>
-              </a:ext>
-            </a:extLst>
-          </p:cNvPr>
-          <p:cNvPicPr>
-            <a:picLocks noChangeAspect="1"/>
-          </p:cNvPicPr>
-          <p:nvPr/>
-        </p:nvPicPr>
-        <p:blipFill>
-          <a:blip r:embed="rId4">
-            <a:extLst>
-              <a:ext uri="{28A0092B-C50C-407E-A947-70E740481C1C}">
-                <a14:useLocalDpi xmlns:a14="http://schemas.microsoft.com/office/drawing/2010/main" val="0"/>
-              </a:ext>
-              <a:ext uri="{96DAC541-7B7A-43D3-8B79-37D633B846F1}">
-                <asvg:svgBlip xmlns:asvg="http://schemas.microsoft.com/office/drawing/2016/SVG/main" r:embed="rId5"/>
-              </a:ext>
-            </a:extLst>
-          </a:blip>
-          <a:stretch>
-            <a:fillRect/>
-          </a:stretch>
-        </p:blipFill>
-        <p:spPr>
-          <a:xfrm>
-            <a:off x="862424" y="3299436"/>
-            <a:ext cx="4394477" cy="3299436"/>
-          </a:xfrm>
-          <a:prstGeom prst="rect">
-            <a:avLst/>
-          </a:prstGeom>
-        </p:spPr>
-      </p:pic>
-      <p:pic>
-        <p:nvPicPr>
-          <p:cNvPr id="60" name="Graphic 59">
-            <a:extLst>
-              <a:ext uri="{FF2B5EF4-FFF2-40B4-BE49-F238E27FC236}">
-                <a16:creationId xmlns:a16="http://schemas.microsoft.com/office/drawing/2014/main" id="{A666AFF7-F3EA-45A7-9012-B02B8CF613E5}"/>
-              </a:ext>
-            </a:extLst>
-          </p:cNvPr>
-          <p:cNvPicPr>
-            <a:picLocks noChangeAspect="1"/>
-          </p:cNvPicPr>
-          <p:nvPr/>
-        </p:nvPicPr>
-        <p:blipFill>
-          <a:blip r:embed="rId6">
-            <a:extLst>
-              <a:ext uri="{28A0092B-C50C-407E-A947-70E740481C1C}">
-                <a14:useLocalDpi xmlns:a14="http://schemas.microsoft.com/office/drawing/2010/main" val="0"/>
-              </a:ext>
-              <a:ext uri="{96DAC541-7B7A-43D3-8B79-37D633B846F1}">
-                <asvg:svgBlip xmlns:asvg="http://schemas.microsoft.com/office/drawing/2016/SVG/main" r:embed="rId7"/>
-              </a:ext>
-            </a:extLst>
-          </a:blip>
-          <a:stretch>
-            <a:fillRect/>
-          </a:stretch>
-        </p:blipFill>
-        <p:spPr>
-          <a:xfrm>
-            <a:off x="8214104" y="0"/>
-            <a:ext cx="4394477" cy="3299436"/>
-          </a:xfrm>
-          <a:prstGeom prst="rect">
-            <a:avLst/>
-          </a:prstGeom>
-        </p:spPr>
-      </p:pic>
-      <p:pic>
-        <p:nvPicPr>
-          <p:cNvPr id="62" name="Graphic 61">
-            <a:extLst>
-              <a:ext uri="{FF2B5EF4-FFF2-40B4-BE49-F238E27FC236}">
-                <a16:creationId xmlns:a16="http://schemas.microsoft.com/office/drawing/2014/main" id="{BC051BED-6050-4585-8170-AF9657F7F502}"/>
-              </a:ext>
-            </a:extLst>
-          </p:cNvPr>
-          <p:cNvPicPr>
-            <a:picLocks noChangeAspect="1"/>
-          </p:cNvPicPr>
-          <p:nvPr/>
-        </p:nvPicPr>
-        <p:blipFill>
-          <a:blip r:embed="rId8">
-            <a:extLst>
-              <a:ext uri="{28A0092B-C50C-407E-A947-70E740481C1C}">
-                <a14:useLocalDpi xmlns:a14="http://schemas.microsoft.com/office/drawing/2010/main" val="0"/>
-              </a:ext>
-              <a:ext uri="{96DAC541-7B7A-43D3-8B79-37D633B846F1}">
-                <asvg:svgBlip xmlns:asvg="http://schemas.microsoft.com/office/drawing/2016/SVG/main" r:embed="rId9"/>
-              </a:ext>
-            </a:extLst>
-          </a:blip>
-          <a:stretch>
-            <a:fillRect/>
-          </a:stretch>
-        </p:blipFill>
-        <p:spPr>
-          <a:xfrm>
-            <a:off x="5256901" y="0"/>
-            <a:ext cx="4394477" cy="3299436"/>
-          </a:xfrm>
-          <a:prstGeom prst="rect">
-            <a:avLst/>
-          </a:prstGeom>
-        </p:spPr>
-      </p:pic>
-      <p:pic>
-        <p:nvPicPr>
-          <p:cNvPr id="64" name="Graphic 63">
-            <a:extLst>
-              <a:ext uri="{FF2B5EF4-FFF2-40B4-BE49-F238E27FC236}">
-                <a16:creationId xmlns:a16="http://schemas.microsoft.com/office/drawing/2014/main" id="{FC29D5F6-41B5-4C6C-A664-E5758A41131A}"/>
-              </a:ext>
-            </a:extLst>
-          </p:cNvPr>
-          <p:cNvPicPr>
-            <a:picLocks noChangeAspect="1"/>
-          </p:cNvPicPr>
-          <p:nvPr/>
-        </p:nvPicPr>
-        <p:blipFill>
-          <a:blip r:embed="rId10">
-            <a:extLst>
-              <a:ext uri="{28A0092B-C50C-407E-A947-70E740481C1C}">
-                <a14:useLocalDpi xmlns:a14="http://schemas.microsoft.com/office/drawing/2010/main" val="0"/>
-              </a:ext>
-              <a:ext uri="{96DAC541-7B7A-43D3-8B79-37D633B846F1}">
-                <asvg:svgBlip xmlns:asvg="http://schemas.microsoft.com/office/drawing/2016/SVG/main" r:embed="rId11"/>
-              </a:ext>
-            </a:extLst>
-          </a:blip>
-          <a:stretch>
-            <a:fillRect/>
-          </a:stretch>
-        </p:blipFill>
-        <p:spPr>
-          <a:xfrm>
-            <a:off x="2299699" y="0"/>
-            <a:ext cx="4394477" cy="3299436"/>
-          </a:xfrm>
-          <a:prstGeom prst="rect">
-            <a:avLst/>
-          </a:prstGeom>
-        </p:spPr>
-      </p:pic>
-      <p:pic>
-        <p:nvPicPr>
-          <p:cNvPr id="66" name="Graphic 65">
-            <a:extLst>
-              <a:ext uri="{FF2B5EF4-FFF2-40B4-BE49-F238E27FC236}">
-                <a16:creationId xmlns:a16="http://schemas.microsoft.com/office/drawing/2014/main" id="{E40859BE-F25B-48B1-B7CF-10C7F1E45D9A}"/>
-              </a:ext>
-            </a:extLst>
-          </p:cNvPr>
-          <p:cNvPicPr>
-            <a:picLocks noChangeAspect="1"/>
-          </p:cNvPicPr>
-          <p:nvPr/>
-        </p:nvPicPr>
-        <p:blipFill>
-          <a:blip r:embed="rId12">
-            <a:extLst>
-              <a:ext uri="{28A0092B-C50C-407E-A947-70E740481C1C}">
-                <a14:useLocalDpi xmlns:a14="http://schemas.microsoft.com/office/drawing/2010/main" val="0"/>
-              </a:ext>
-              <a:ext uri="{96DAC541-7B7A-43D3-8B79-37D633B846F1}">
-                <asvg:svgBlip xmlns:asvg="http://schemas.microsoft.com/office/drawing/2016/SVG/main" r:embed="rId13"/>
-              </a:ext>
-            </a:extLst>
-          </a:blip>
-          <a:stretch>
-            <a:fillRect/>
-          </a:stretch>
-        </p:blipFill>
-        <p:spPr>
-          <a:xfrm>
-            <a:off x="-657503" y="0"/>
-            <a:ext cx="4394477" cy="3299436"/>
-          </a:xfrm>
-          <a:prstGeom prst="rect">
-            <a:avLst/>
-          </a:prstGeom>
-        </p:spPr>
-      </p:pic>
+        <p:txBody>
+          <a:bodyPr wrap="square" rtlCol="0">
+            <a:spAutoFit/>
+          </a:bodyPr>
+          <a:lstStyle/>
+          <a:p>
+            <a:r>
+              <a:rPr lang="it-IT" u="sng" dirty="0"/>
+              <a:t>Instrumental Resolutions</a:t>
+            </a:r>
+            <a:endParaRPr lang="nl-NL" u="sng" dirty="0"/>
+          </a:p>
+        </p:txBody>
+      </p:sp>
+      <p:graphicFrame>
+        <p:nvGraphicFramePr>
+          <p:cNvPr id="3" name="Table 2">
+            <a:extLst>
+              <a:ext uri="{FF2B5EF4-FFF2-40B4-BE49-F238E27FC236}">
+                <a16:creationId xmlns:a16="http://schemas.microsoft.com/office/drawing/2014/main" id="{83FC426F-1024-4721-B560-E6BFB1CE0090}"/>
+              </a:ext>
+            </a:extLst>
+          </p:cNvPr>
+          <p:cNvGraphicFramePr>
+            <a:graphicFrameLocks noGrp="1"/>
+          </p:cNvGraphicFramePr>
+          <p:nvPr>
+            <p:extLst>
+              <p:ext uri="{D42A27DB-BD31-4B8C-83A1-F6EECF244321}">
+                <p14:modId xmlns:p14="http://schemas.microsoft.com/office/powerpoint/2010/main" val="4286925606"/>
+              </p:ext>
+            </p:extLst>
+          </p:nvPr>
+        </p:nvGraphicFramePr>
+        <p:xfrm>
+          <a:off x="1243262" y="903959"/>
+          <a:ext cx="9464845" cy="4606498"/>
+        </p:xfrm>
+        <a:graphic>
+          <a:graphicData uri="http://schemas.openxmlformats.org/drawingml/2006/table">
+            <a:tbl>
+              <a:tblPr firstRow="1">
+                <a:tableStyleId>{9D7B26C5-4107-4FEC-AEDC-1716B250A1EF}</a:tableStyleId>
+              </a:tblPr>
+              <a:tblGrid>
+                <a:gridCol w="1836214">
+                  <a:extLst>
+                    <a:ext uri="{9D8B030D-6E8A-4147-A177-3AD203B41FA5}">
+                      <a16:colId xmlns:a16="http://schemas.microsoft.com/office/drawing/2014/main" val="2076889326"/>
+                    </a:ext>
+                  </a:extLst>
+                </a:gridCol>
+                <a:gridCol w="1418892">
+                  <a:extLst>
+                    <a:ext uri="{9D8B030D-6E8A-4147-A177-3AD203B41FA5}">
+                      <a16:colId xmlns:a16="http://schemas.microsoft.com/office/drawing/2014/main" val="2767547104"/>
+                    </a:ext>
+                  </a:extLst>
+                </a:gridCol>
+                <a:gridCol w="1335428">
+                  <a:extLst>
+                    <a:ext uri="{9D8B030D-6E8A-4147-A177-3AD203B41FA5}">
+                      <a16:colId xmlns:a16="http://schemas.microsoft.com/office/drawing/2014/main" val="4204682836"/>
+                    </a:ext>
+                  </a:extLst>
+                </a:gridCol>
+                <a:gridCol w="2420462">
+                  <a:extLst>
+                    <a:ext uri="{9D8B030D-6E8A-4147-A177-3AD203B41FA5}">
+                      <a16:colId xmlns:a16="http://schemas.microsoft.com/office/drawing/2014/main" val="4008304797"/>
+                    </a:ext>
+                  </a:extLst>
+                </a:gridCol>
+                <a:gridCol w="2453849">
+                  <a:extLst>
+                    <a:ext uri="{9D8B030D-6E8A-4147-A177-3AD203B41FA5}">
+                      <a16:colId xmlns:a16="http://schemas.microsoft.com/office/drawing/2014/main" val="2756115298"/>
+                    </a:ext>
+                  </a:extLst>
+                </a:gridCol>
+              </a:tblGrid>
+              <a:tr h="354346">
+                <a:tc>
+                  <a:txBody>
+                    <a:bodyPr/>
+                    <a:lstStyle/>
+                    <a:p>
+                      <a:pPr algn="ctr" fontAlgn="ctr"/>
+                      <a:endParaRPr lang="nl-NL" sz="1600" b="0" i="0" u="none" strike="noStrike" dirty="0">
+                        <a:solidFill>
+                          <a:srgbClr val="000000"/>
+                        </a:solidFill>
+                        <a:effectLst/>
+                        <a:latin typeface="Calibri" panose="020F0502020204030204" pitchFamily="34" charset="0"/>
+                      </a:endParaRPr>
+                    </a:p>
+                  </a:txBody>
+                  <a:tcPr marL="9525" marR="9525" marT="9525" marB="0" anchor="ctr"/>
+                </a:tc>
+                <a:tc>
+                  <a:txBody>
+                    <a:bodyPr/>
+                    <a:lstStyle/>
+                    <a:p>
+                      <a:pPr algn="ctr" fontAlgn="ctr"/>
+                      <a:r>
+                        <a:rPr lang="nl-NL" sz="1600" u="none" strike="noStrike">
+                          <a:effectLst/>
+                        </a:rPr>
+                        <a:t>unit</a:t>
+                      </a:r>
+                      <a:endParaRPr lang="nl-NL" sz="1600" b="1" i="0" u="none" strike="noStrike">
+                        <a:solidFill>
+                          <a:srgbClr val="000000"/>
+                        </a:solidFill>
+                        <a:effectLst/>
+                        <a:latin typeface="Segoe UI" panose="020B0502040204020203" pitchFamily="34" charset="0"/>
+                      </a:endParaRPr>
+                    </a:p>
+                  </a:txBody>
+                  <a:tcPr marL="9525" marR="9525" marT="9525" marB="0" anchor="ctr"/>
+                </a:tc>
+                <a:tc>
+                  <a:txBody>
+                    <a:bodyPr/>
+                    <a:lstStyle/>
+                    <a:p>
+                      <a:pPr algn="ctr" fontAlgn="ctr"/>
+                      <a:r>
+                        <a:rPr lang="nl-NL" sz="1600" u="none" strike="noStrike">
+                          <a:effectLst/>
+                        </a:rPr>
+                        <a:t>healthyRange</a:t>
+                      </a:r>
+                      <a:endParaRPr lang="nl-NL" sz="1600" b="1" i="0" u="none" strike="noStrike">
+                        <a:solidFill>
+                          <a:srgbClr val="000000"/>
+                        </a:solidFill>
+                        <a:effectLst/>
+                        <a:latin typeface="Segoe UI" panose="020B0502040204020203" pitchFamily="34" charset="0"/>
+                      </a:endParaRPr>
+                    </a:p>
+                  </a:txBody>
+                  <a:tcPr marL="9525" marR="9525" marT="9525" marB="0" anchor="ctr"/>
+                </a:tc>
+                <a:tc>
+                  <a:txBody>
+                    <a:bodyPr/>
+                    <a:lstStyle/>
+                    <a:p>
+                      <a:pPr algn="ctr" fontAlgn="ctr"/>
+                      <a:r>
+                        <a:rPr lang="nl-NL" sz="1600" u="none" strike="noStrike">
+                          <a:effectLst/>
+                        </a:rPr>
+                        <a:t>instrumentResolutionMin</a:t>
+                      </a:r>
+                      <a:endParaRPr lang="nl-NL" sz="1600" b="1" i="0" u="none" strike="noStrike">
+                        <a:solidFill>
+                          <a:srgbClr val="000000"/>
+                        </a:solidFill>
+                        <a:effectLst/>
+                        <a:latin typeface="Segoe UI" panose="020B0502040204020203" pitchFamily="34" charset="0"/>
+                      </a:endParaRPr>
+                    </a:p>
+                  </a:txBody>
+                  <a:tcPr marL="9525" marR="9525" marT="9525" marB="0" anchor="ctr"/>
+                </a:tc>
+                <a:tc>
+                  <a:txBody>
+                    <a:bodyPr/>
+                    <a:lstStyle/>
+                    <a:p>
+                      <a:pPr algn="ctr" fontAlgn="ctr"/>
+                      <a:r>
+                        <a:rPr lang="nl-NL" sz="1600" u="none" strike="noStrike">
+                          <a:effectLst/>
+                        </a:rPr>
+                        <a:t>instrumentResolutionMax</a:t>
+                      </a:r>
+                      <a:endParaRPr lang="nl-NL" sz="1600" b="1" i="0" u="none" strike="noStrike">
+                        <a:solidFill>
+                          <a:srgbClr val="000000"/>
+                        </a:solidFill>
+                        <a:effectLst/>
+                        <a:latin typeface="Segoe UI" panose="020B0502040204020203" pitchFamily="34" charset="0"/>
+                      </a:endParaRPr>
+                    </a:p>
+                  </a:txBody>
+                  <a:tcPr marL="9525" marR="9525" marT="9525" marB="0" anchor="ctr"/>
+                </a:tc>
+                <a:extLst>
+                  <a:ext uri="{0D108BD9-81ED-4DB2-BD59-A6C34878D82A}">
+                    <a16:rowId xmlns:a16="http://schemas.microsoft.com/office/drawing/2014/main" val="1008125472"/>
+                  </a:ext>
+                </a:extLst>
+              </a:tr>
+              <a:tr h="354346">
+                <a:tc>
+                  <a:txBody>
+                    <a:bodyPr/>
+                    <a:lstStyle/>
+                    <a:p>
+                      <a:pPr algn="ctr" fontAlgn="ctr"/>
+                      <a:r>
+                        <a:rPr lang="nl-NL" sz="1600" u="none" strike="noStrike" dirty="0">
+                          <a:effectLst/>
+                        </a:rPr>
+                        <a:t>CRP</a:t>
+                      </a:r>
+                      <a:endParaRPr lang="nl-NL" sz="1600" b="0" i="0" u="none" strike="noStrike" dirty="0">
+                        <a:solidFill>
+                          <a:srgbClr val="000000"/>
+                        </a:solidFill>
+                        <a:effectLst/>
+                        <a:latin typeface="Segoe UI" panose="020B0502040204020203" pitchFamily="34" charset="0"/>
+                      </a:endParaRPr>
+                    </a:p>
+                  </a:txBody>
+                  <a:tcPr marL="9525" marR="9525" marT="9525" marB="0" anchor="ctr"/>
+                </a:tc>
+                <a:tc>
+                  <a:txBody>
+                    <a:bodyPr/>
+                    <a:lstStyle/>
+                    <a:p>
+                      <a:pPr algn="ctr" fontAlgn="ctr"/>
+                      <a:r>
+                        <a:rPr lang="nl-NL" sz="1600" u="none" strike="noStrike">
+                          <a:effectLst/>
+                        </a:rPr>
+                        <a:t>mg/L</a:t>
+                      </a:r>
+                      <a:endParaRPr lang="nl-NL" sz="1600" b="0" i="0" u="none" strike="noStrike">
+                        <a:solidFill>
+                          <a:srgbClr val="000000"/>
+                        </a:solidFill>
+                        <a:effectLst/>
+                        <a:latin typeface="Segoe UI" panose="020B0502040204020203" pitchFamily="34" charset="0"/>
+                      </a:endParaRPr>
+                    </a:p>
+                  </a:txBody>
+                  <a:tcPr marL="9525" marR="9525" marT="9525" marB="0" anchor="ctr"/>
+                </a:tc>
+                <a:tc>
+                  <a:txBody>
+                    <a:bodyPr/>
+                    <a:lstStyle/>
+                    <a:p>
+                      <a:pPr algn="ctr" fontAlgn="ctr"/>
+                      <a:r>
+                        <a:rPr lang="nl-NL" sz="1600" u="none" strike="noStrike">
+                          <a:effectLst/>
+                        </a:rPr>
+                        <a:t>0 - 10</a:t>
+                      </a:r>
+                      <a:endParaRPr lang="nl-NL" sz="1600" b="0" i="0" u="none" strike="noStrike">
+                        <a:solidFill>
+                          <a:srgbClr val="000000"/>
+                        </a:solidFill>
+                        <a:effectLst/>
+                        <a:latin typeface="Segoe UI" panose="020B0502040204020203" pitchFamily="34" charset="0"/>
+                      </a:endParaRPr>
+                    </a:p>
+                  </a:txBody>
+                  <a:tcPr marL="9525" marR="9525" marT="9525" marB="0" anchor="ctr"/>
+                </a:tc>
+                <a:tc>
+                  <a:txBody>
+                    <a:bodyPr/>
+                    <a:lstStyle/>
+                    <a:p>
+                      <a:pPr algn="ctr" fontAlgn="ctr"/>
+                      <a:r>
+                        <a:rPr lang="nl-NL" sz="1600" u="none" strike="noStrike">
+                          <a:effectLst/>
+                        </a:rPr>
+                        <a:t>0.5</a:t>
+                      </a:r>
+                      <a:endParaRPr lang="nl-NL" sz="1600" b="0" i="0" u="none" strike="noStrike">
+                        <a:solidFill>
+                          <a:srgbClr val="000000"/>
+                        </a:solidFill>
+                        <a:effectLst/>
+                        <a:latin typeface="Segoe UI" panose="020B0502040204020203" pitchFamily="34" charset="0"/>
+                      </a:endParaRPr>
+                    </a:p>
+                  </a:txBody>
+                  <a:tcPr marL="9525" marR="9525" marT="9525" marB="0" anchor="ctr"/>
+                </a:tc>
+                <a:tc>
+                  <a:txBody>
+                    <a:bodyPr/>
+                    <a:lstStyle/>
+                    <a:p>
+                      <a:pPr algn="ctr" fontAlgn="ctr"/>
+                      <a:r>
+                        <a:rPr lang="nl-NL" sz="1600" u="none" strike="noStrike">
+                          <a:effectLst/>
+                        </a:rPr>
+                        <a:t>624</a:t>
+                      </a:r>
+                      <a:endParaRPr lang="nl-NL" sz="1600" b="0" i="0" u="none" strike="noStrike">
+                        <a:solidFill>
+                          <a:srgbClr val="000000"/>
+                        </a:solidFill>
+                        <a:effectLst/>
+                        <a:latin typeface="Segoe UI" panose="020B0502040204020203" pitchFamily="34" charset="0"/>
+                      </a:endParaRPr>
+                    </a:p>
+                  </a:txBody>
+                  <a:tcPr marL="9525" marR="9525" marT="9525" marB="0" anchor="ctr"/>
+                </a:tc>
+                <a:extLst>
+                  <a:ext uri="{0D108BD9-81ED-4DB2-BD59-A6C34878D82A}">
+                    <a16:rowId xmlns:a16="http://schemas.microsoft.com/office/drawing/2014/main" val="612131383"/>
+                  </a:ext>
+                </a:extLst>
+              </a:tr>
+              <a:tr h="354346">
+                <a:tc>
+                  <a:txBody>
+                    <a:bodyPr/>
+                    <a:lstStyle/>
+                    <a:p>
+                      <a:pPr algn="ctr" fontAlgn="ctr"/>
+                      <a:r>
+                        <a:rPr lang="nl-NL" sz="1600" u="none" strike="noStrike" dirty="0">
+                          <a:effectLst/>
+                        </a:rPr>
+                        <a:t>Cholesterol</a:t>
+                      </a:r>
+                      <a:endParaRPr lang="nl-NL" sz="1600" b="0" i="0" u="none" strike="noStrike" dirty="0">
+                        <a:solidFill>
+                          <a:srgbClr val="000000"/>
+                        </a:solidFill>
+                        <a:effectLst/>
+                        <a:latin typeface="Segoe UI" panose="020B0502040204020203" pitchFamily="34" charset="0"/>
+                      </a:endParaRPr>
+                    </a:p>
+                  </a:txBody>
+                  <a:tcPr marL="9525" marR="9525" marT="9525" marB="0" anchor="ctr"/>
+                </a:tc>
+                <a:tc>
+                  <a:txBody>
+                    <a:bodyPr/>
+                    <a:lstStyle/>
+                    <a:p>
+                      <a:pPr algn="ctr" fontAlgn="ctr"/>
+                      <a:r>
+                        <a:rPr lang="nl-NL" sz="1600" u="none" strike="noStrike">
+                          <a:effectLst/>
+                        </a:rPr>
+                        <a:t>mmol/L</a:t>
+                      </a:r>
+                      <a:endParaRPr lang="nl-NL" sz="1600" b="0" i="0" u="none" strike="noStrike">
+                        <a:solidFill>
+                          <a:srgbClr val="000000"/>
+                        </a:solidFill>
+                        <a:effectLst/>
+                        <a:latin typeface="Segoe UI" panose="020B0502040204020203" pitchFamily="34" charset="0"/>
+                      </a:endParaRPr>
+                    </a:p>
+                  </a:txBody>
+                  <a:tcPr marL="9525" marR="9525" marT="9525" marB="0" anchor="ctr"/>
+                </a:tc>
+                <a:tc>
+                  <a:txBody>
+                    <a:bodyPr/>
+                    <a:lstStyle/>
+                    <a:p>
+                      <a:pPr algn="ctr" fontAlgn="ctr"/>
+                      <a:r>
+                        <a:rPr lang="nl-NL" sz="1600" u="none" strike="noStrike">
+                          <a:effectLst/>
+                        </a:rPr>
+                        <a:t>3.5 - 6.5</a:t>
+                      </a:r>
+                      <a:endParaRPr lang="nl-NL" sz="1600" b="0" i="0" u="none" strike="noStrike">
+                        <a:solidFill>
+                          <a:srgbClr val="000000"/>
+                        </a:solidFill>
+                        <a:effectLst/>
+                        <a:latin typeface="Segoe UI" panose="020B0502040204020203" pitchFamily="34" charset="0"/>
+                      </a:endParaRPr>
+                    </a:p>
+                  </a:txBody>
+                  <a:tcPr marL="9525" marR="9525" marT="9525" marB="0" anchor="ctr"/>
+                </a:tc>
+                <a:tc>
+                  <a:txBody>
+                    <a:bodyPr/>
+                    <a:lstStyle/>
+                    <a:p>
+                      <a:pPr algn="ctr" fontAlgn="ctr"/>
+                      <a:r>
+                        <a:rPr lang="nl-NL" sz="1600" u="none" strike="noStrike">
+                          <a:effectLst/>
+                        </a:rPr>
+                        <a:t>0.65</a:t>
+                      </a:r>
+                      <a:endParaRPr lang="nl-NL" sz="1600" b="0" i="0" u="none" strike="noStrike">
+                        <a:solidFill>
+                          <a:srgbClr val="000000"/>
+                        </a:solidFill>
+                        <a:effectLst/>
+                        <a:latin typeface="Segoe UI" panose="020B0502040204020203" pitchFamily="34" charset="0"/>
+                      </a:endParaRPr>
+                    </a:p>
+                  </a:txBody>
+                  <a:tcPr marL="9525" marR="9525" marT="9525" marB="0" anchor="ctr"/>
+                </a:tc>
+                <a:tc>
+                  <a:txBody>
+                    <a:bodyPr/>
+                    <a:lstStyle/>
+                    <a:p>
+                      <a:pPr algn="ctr" fontAlgn="ctr"/>
+                      <a:r>
+                        <a:rPr lang="nl-NL" sz="1600" u="none" strike="noStrike">
+                          <a:effectLst/>
+                        </a:rPr>
+                        <a:t>32</a:t>
+                      </a:r>
+                      <a:endParaRPr lang="nl-NL" sz="1600" b="0" i="0" u="none" strike="noStrike">
+                        <a:solidFill>
+                          <a:srgbClr val="000000"/>
+                        </a:solidFill>
+                        <a:effectLst/>
+                        <a:latin typeface="Segoe UI" panose="020B0502040204020203" pitchFamily="34" charset="0"/>
+                      </a:endParaRPr>
+                    </a:p>
+                  </a:txBody>
+                  <a:tcPr marL="9525" marR="9525" marT="9525" marB="0" anchor="ctr"/>
+                </a:tc>
+                <a:extLst>
+                  <a:ext uri="{0D108BD9-81ED-4DB2-BD59-A6C34878D82A}">
+                    <a16:rowId xmlns:a16="http://schemas.microsoft.com/office/drawing/2014/main" val="3942700797"/>
+                  </a:ext>
+                </a:extLst>
+              </a:tr>
+              <a:tr h="354346">
+                <a:tc>
+                  <a:txBody>
+                    <a:bodyPr/>
+                    <a:lstStyle/>
+                    <a:p>
+                      <a:pPr algn="ctr" fontAlgn="ctr"/>
+                      <a:r>
+                        <a:rPr lang="nl-NL" sz="1600" u="none" strike="noStrike" dirty="0">
+                          <a:effectLst/>
+                        </a:rPr>
+                        <a:t>HDL Cholesterol</a:t>
+                      </a:r>
+                      <a:endParaRPr lang="nl-NL" sz="1600" b="0" i="0" u="none" strike="noStrike" dirty="0">
+                        <a:solidFill>
+                          <a:srgbClr val="000000"/>
+                        </a:solidFill>
+                        <a:effectLst/>
+                        <a:latin typeface="Segoe UI" panose="020B0502040204020203" pitchFamily="34" charset="0"/>
+                      </a:endParaRPr>
+                    </a:p>
+                  </a:txBody>
+                  <a:tcPr marL="9525" marR="9525" marT="9525" marB="0" anchor="ctr"/>
+                </a:tc>
+                <a:tc>
+                  <a:txBody>
+                    <a:bodyPr/>
+                    <a:lstStyle/>
+                    <a:p>
+                      <a:pPr algn="ctr" fontAlgn="ctr"/>
+                      <a:r>
+                        <a:rPr lang="nl-NL" sz="1600" u="none" strike="noStrike">
+                          <a:effectLst/>
+                        </a:rPr>
+                        <a:t>mmol/L</a:t>
+                      </a:r>
+                      <a:endParaRPr lang="nl-NL" sz="1600" b="0" i="0" u="none" strike="noStrike">
+                        <a:solidFill>
+                          <a:srgbClr val="000000"/>
+                        </a:solidFill>
+                        <a:effectLst/>
+                        <a:latin typeface="Segoe UI" panose="020B0502040204020203" pitchFamily="34" charset="0"/>
+                      </a:endParaRPr>
+                    </a:p>
+                  </a:txBody>
+                  <a:tcPr marL="9525" marR="9525" marT="9525" marB="0" anchor="ctr"/>
+                </a:tc>
+                <a:tc>
+                  <a:txBody>
+                    <a:bodyPr/>
+                    <a:lstStyle/>
+                    <a:p>
+                      <a:pPr algn="ctr" fontAlgn="ctr"/>
+                      <a:r>
+                        <a:rPr lang="nl-NL" sz="1600" u="none" strike="noStrike">
+                          <a:effectLst/>
+                        </a:rPr>
+                        <a:t>1.10 -</a:t>
+                      </a:r>
+                      <a:endParaRPr lang="nl-NL" sz="1600" b="0" i="0" u="none" strike="noStrike">
+                        <a:solidFill>
+                          <a:srgbClr val="000000"/>
+                        </a:solidFill>
+                        <a:effectLst/>
+                        <a:latin typeface="Segoe UI" panose="020B0502040204020203" pitchFamily="34" charset="0"/>
+                      </a:endParaRPr>
+                    </a:p>
+                  </a:txBody>
+                  <a:tcPr marL="9525" marR="9525" marT="9525" marB="0" anchor="ctr"/>
+                </a:tc>
+                <a:tc>
+                  <a:txBody>
+                    <a:bodyPr/>
+                    <a:lstStyle/>
+                    <a:p>
+                      <a:pPr algn="ctr" fontAlgn="ctr"/>
+                      <a:r>
+                        <a:rPr lang="nl-NL" sz="1600" u="none" strike="noStrike">
+                          <a:effectLst/>
+                        </a:rPr>
+                        <a:t>0.1</a:t>
+                      </a:r>
+                      <a:endParaRPr lang="nl-NL" sz="1600" b="0" i="0" u="none" strike="noStrike">
+                        <a:solidFill>
+                          <a:srgbClr val="000000"/>
+                        </a:solidFill>
+                        <a:effectLst/>
+                        <a:latin typeface="Segoe UI" panose="020B0502040204020203" pitchFamily="34" charset="0"/>
+                      </a:endParaRPr>
+                    </a:p>
+                  </a:txBody>
+                  <a:tcPr marL="9525" marR="9525" marT="9525" marB="0" anchor="ctr"/>
+                </a:tc>
+                <a:tc>
+                  <a:txBody>
+                    <a:bodyPr/>
+                    <a:lstStyle/>
+                    <a:p>
+                      <a:pPr algn="ctr" fontAlgn="ctr"/>
+                      <a:r>
+                        <a:rPr lang="nl-NL" sz="1600" u="none" strike="noStrike">
+                          <a:effectLst/>
+                        </a:rPr>
+                        <a:t>10</a:t>
+                      </a:r>
+                      <a:endParaRPr lang="nl-NL" sz="1600" b="0" i="0" u="none" strike="noStrike">
+                        <a:solidFill>
+                          <a:srgbClr val="000000"/>
+                        </a:solidFill>
+                        <a:effectLst/>
+                        <a:latin typeface="Segoe UI" panose="020B0502040204020203" pitchFamily="34" charset="0"/>
+                      </a:endParaRPr>
+                    </a:p>
+                  </a:txBody>
+                  <a:tcPr marL="9525" marR="9525" marT="9525" marB="0" anchor="ctr"/>
+                </a:tc>
+                <a:extLst>
+                  <a:ext uri="{0D108BD9-81ED-4DB2-BD59-A6C34878D82A}">
+                    <a16:rowId xmlns:a16="http://schemas.microsoft.com/office/drawing/2014/main" val="2595646813"/>
+                  </a:ext>
+                </a:extLst>
+              </a:tr>
+              <a:tr h="354346">
+                <a:tc>
+                  <a:txBody>
+                    <a:bodyPr/>
+                    <a:lstStyle/>
+                    <a:p>
+                      <a:pPr algn="ctr" fontAlgn="ctr"/>
+                      <a:r>
+                        <a:rPr lang="nl-NL" sz="1600" u="none" strike="noStrike" dirty="0">
+                          <a:effectLst/>
+                        </a:rPr>
+                        <a:t>HbA1c</a:t>
+                      </a:r>
+                      <a:endParaRPr lang="nl-NL" sz="1600" b="0" i="0" u="none" strike="noStrike" dirty="0">
+                        <a:solidFill>
+                          <a:srgbClr val="000000"/>
+                        </a:solidFill>
+                        <a:effectLst/>
+                        <a:latin typeface="Segoe UI" panose="020B0502040204020203" pitchFamily="34" charset="0"/>
+                      </a:endParaRPr>
+                    </a:p>
+                  </a:txBody>
+                  <a:tcPr marL="9525" marR="9525" marT="9525" marB="0" anchor="ctr"/>
+                </a:tc>
+                <a:tc>
+                  <a:txBody>
+                    <a:bodyPr/>
+                    <a:lstStyle/>
+                    <a:p>
+                      <a:pPr algn="ctr" fontAlgn="ctr"/>
+                      <a:r>
+                        <a:rPr lang="nl-NL" sz="1600" u="none" strike="noStrike">
+                          <a:effectLst/>
+                        </a:rPr>
+                        <a:t>mmol/mol</a:t>
+                      </a:r>
+                      <a:endParaRPr lang="nl-NL" sz="1600" b="0" i="0" u="none" strike="noStrike">
+                        <a:solidFill>
+                          <a:srgbClr val="000000"/>
+                        </a:solidFill>
+                        <a:effectLst/>
+                        <a:latin typeface="Segoe UI" panose="020B0502040204020203" pitchFamily="34" charset="0"/>
+                      </a:endParaRPr>
+                    </a:p>
+                  </a:txBody>
+                  <a:tcPr marL="9525" marR="9525" marT="9525" marB="0" anchor="ctr"/>
+                </a:tc>
+                <a:tc>
+                  <a:txBody>
+                    <a:bodyPr/>
+                    <a:lstStyle/>
+                    <a:p>
+                      <a:pPr algn="ctr" fontAlgn="ctr"/>
+                      <a:r>
+                        <a:rPr lang="nl-NL" sz="1600" u="none" strike="noStrike">
+                          <a:effectLst/>
+                        </a:rPr>
+                        <a:t>20 - 42</a:t>
+                      </a:r>
+                      <a:endParaRPr lang="nl-NL" sz="1600" b="0" i="0" u="none" strike="noStrike">
+                        <a:solidFill>
+                          <a:srgbClr val="000000"/>
+                        </a:solidFill>
+                        <a:effectLst/>
+                        <a:latin typeface="Segoe UI" panose="020B0502040204020203" pitchFamily="34" charset="0"/>
+                      </a:endParaRPr>
+                    </a:p>
+                  </a:txBody>
+                  <a:tcPr marL="9525" marR="9525" marT="9525" marB="0" anchor="ctr"/>
+                </a:tc>
+                <a:tc>
+                  <a:txBody>
+                    <a:bodyPr/>
+                    <a:lstStyle/>
+                    <a:p>
+                      <a:pPr algn="ctr" fontAlgn="ctr"/>
+                      <a:r>
+                        <a:rPr lang="nl-NL" sz="1600" u="none" strike="noStrike">
+                          <a:effectLst/>
+                        </a:rPr>
+                        <a:t>9</a:t>
+                      </a:r>
+                      <a:endParaRPr lang="nl-NL" sz="1600" b="0" i="0" u="none" strike="noStrike">
+                        <a:solidFill>
+                          <a:srgbClr val="000000"/>
+                        </a:solidFill>
+                        <a:effectLst/>
+                        <a:latin typeface="Segoe UI" panose="020B0502040204020203" pitchFamily="34" charset="0"/>
+                      </a:endParaRPr>
+                    </a:p>
+                  </a:txBody>
+                  <a:tcPr marL="9525" marR="9525" marT="9525" marB="0" anchor="ctr"/>
+                </a:tc>
+                <a:tc>
+                  <a:txBody>
+                    <a:bodyPr/>
+                    <a:lstStyle/>
+                    <a:p>
+                      <a:pPr algn="ctr" fontAlgn="ctr"/>
+                      <a:r>
+                        <a:rPr lang="nl-NL" sz="1600" u="none" strike="noStrike">
+                          <a:effectLst/>
+                        </a:rPr>
+                        <a:t>195</a:t>
+                      </a:r>
+                      <a:endParaRPr lang="nl-NL" sz="1600" b="0" i="0" u="none" strike="noStrike">
+                        <a:solidFill>
+                          <a:srgbClr val="000000"/>
+                        </a:solidFill>
+                        <a:effectLst/>
+                        <a:latin typeface="Segoe UI" panose="020B0502040204020203" pitchFamily="34" charset="0"/>
+                      </a:endParaRPr>
+                    </a:p>
+                  </a:txBody>
+                  <a:tcPr marL="9525" marR="9525" marT="9525" marB="0" anchor="ctr"/>
+                </a:tc>
+                <a:extLst>
+                  <a:ext uri="{0D108BD9-81ED-4DB2-BD59-A6C34878D82A}">
+                    <a16:rowId xmlns:a16="http://schemas.microsoft.com/office/drawing/2014/main" val="3875667427"/>
+                  </a:ext>
+                </a:extLst>
+              </a:tr>
+              <a:tr h="354346">
+                <a:tc>
+                  <a:txBody>
+                    <a:bodyPr/>
+                    <a:lstStyle/>
+                    <a:p>
+                      <a:pPr algn="ctr" fontAlgn="ctr"/>
+                      <a:r>
+                        <a:rPr lang="nl-NL" sz="1600" u="none" strike="noStrike" dirty="0">
+                          <a:effectLst/>
+                        </a:rPr>
+                        <a:t>Hemoglobine</a:t>
+                      </a:r>
+                      <a:endParaRPr lang="nl-NL" sz="1600" b="0" i="0" u="none" strike="noStrike" dirty="0">
+                        <a:solidFill>
+                          <a:srgbClr val="000000"/>
+                        </a:solidFill>
+                        <a:effectLst/>
+                        <a:latin typeface="Segoe UI" panose="020B0502040204020203" pitchFamily="34" charset="0"/>
+                      </a:endParaRPr>
+                    </a:p>
+                  </a:txBody>
+                  <a:tcPr marL="9525" marR="9525" marT="9525" marB="0" anchor="ctr"/>
+                </a:tc>
+                <a:tc>
+                  <a:txBody>
+                    <a:bodyPr/>
+                    <a:lstStyle/>
+                    <a:p>
+                      <a:pPr algn="ctr" fontAlgn="ctr"/>
+                      <a:r>
+                        <a:rPr lang="nl-NL" sz="1600" u="none" strike="noStrike">
+                          <a:effectLst/>
+                        </a:rPr>
+                        <a:t>mmol/L</a:t>
+                      </a:r>
+                      <a:endParaRPr lang="nl-NL" sz="1600" b="0" i="0" u="none" strike="noStrike">
+                        <a:solidFill>
+                          <a:srgbClr val="000000"/>
+                        </a:solidFill>
+                        <a:effectLst/>
+                        <a:latin typeface="Segoe UI" panose="020B0502040204020203" pitchFamily="34" charset="0"/>
+                      </a:endParaRPr>
+                    </a:p>
+                  </a:txBody>
+                  <a:tcPr marL="9525" marR="9525" marT="9525" marB="0" anchor="ctr"/>
+                </a:tc>
+                <a:tc>
+                  <a:txBody>
+                    <a:bodyPr/>
+                    <a:lstStyle/>
+                    <a:p>
+                      <a:pPr algn="ctr" fontAlgn="ctr"/>
+                      <a:r>
+                        <a:rPr lang="nl-NL" sz="1600" u="none" strike="noStrike">
+                          <a:effectLst/>
+                        </a:rPr>
+                        <a:t>7.4 - 9.6</a:t>
+                      </a:r>
+                      <a:endParaRPr lang="nl-NL" sz="1600" b="0" i="0" u="none" strike="noStrike">
+                        <a:solidFill>
+                          <a:srgbClr val="000000"/>
+                        </a:solidFill>
+                        <a:effectLst/>
+                        <a:latin typeface="Segoe UI" panose="020B0502040204020203" pitchFamily="34" charset="0"/>
+                      </a:endParaRPr>
+                    </a:p>
+                  </a:txBody>
+                  <a:tcPr marL="9525" marR="9525" marT="9525" marB="0" anchor="ctr"/>
+                </a:tc>
+                <a:tc>
+                  <a:txBody>
+                    <a:bodyPr/>
+                    <a:lstStyle/>
+                    <a:p>
+                      <a:pPr algn="ctr" fontAlgn="ctr"/>
+                      <a:r>
+                        <a:rPr lang="nl-NL" sz="1600" u="none" strike="noStrike">
+                          <a:effectLst/>
+                        </a:rPr>
+                        <a:t>0.6</a:t>
+                      </a:r>
+                      <a:endParaRPr lang="nl-NL" sz="1600" b="0" i="0" u="none" strike="noStrike">
+                        <a:solidFill>
+                          <a:srgbClr val="000000"/>
+                        </a:solidFill>
+                        <a:effectLst/>
+                        <a:latin typeface="Segoe UI" panose="020B0502040204020203" pitchFamily="34" charset="0"/>
+                      </a:endParaRPr>
+                    </a:p>
+                  </a:txBody>
+                  <a:tcPr marL="9525" marR="9525" marT="9525" marB="0" anchor="ctr"/>
+                </a:tc>
+                <a:tc>
+                  <a:txBody>
+                    <a:bodyPr/>
+                    <a:lstStyle/>
+                    <a:p>
+                      <a:pPr algn="ctr" fontAlgn="ctr"/>
+                      <a:r>
+                        <a:rPr lang="nl-NL" sz="1600" u="none" strike="noStrike">
+                          <a:effectLst/>
+                        </a:rPr>
+                        <a:t>16</a:t>
+                      </a:r>
+                      <a:endParaRPr lang="nl-NL" sz="1600" b="0" i="0" u="none" strike="noStrike">
+                        <a:solidFill>
+                          <a:srgbClr val="000000"/>
+                        </a:solidFill>
+                        <a:effectLst/>
+                        <a:latin typeface="Segoe UI" panose="020B0502040204020203" pitchFamily="34" charset="0"/>
+                      </a:endParaRPr>
+                    </a:p>
+                  </a:txBody>
+                  <a:tcPr marL="9525" marR="9525" marT="9525" marB="0" anchor="ctr"/>
+                </a:tc>
+                <a:extLst>
+                  <a:ext uri="{0D108BD9-81ED-4DB2-BD59-A6C34878D82A}">
+                    <a16:rowId xmlns:a16="http://schemas.microsoft.com/office/drawing/2014/main" val="2347721487"/>
+                  </a:ext>
+                </a:extLst>
+              </a:tr>
+              <a:tr h="354346">
+                <a:tc>
+                  <a:txBody>
+                    <a:bodyPr/>
+                    <a:lstStyle/>
+                    <a:p>
+                      <a:pPr algn="ctr" fontAlgn="ctr"/>
+                      <a:r>
+                        <a:rPr lang="nl-NL" sz="1600" u="none" strike="noStrike" dirty="0">
+                          <a:effectLst/>
+                        </a:rPr>
+                        <a:t>Kalium</a:t>
+                      </a:r>
+                      <a:endParaRPr lang="nl-NL" sz="1600" b="0" i="0" u="none" strike="noStrike" dirty="0">
+                        <a:solidFill>
+                          <a:srgbClr val="000000"/>
+                        </a:solidFill>
+                        <a:effectLst/>
+                        <a:latin typeface="Segoe UI" panose="020B0502040204020203" pitchFamily="34" charset="0"/>
+                      </a:endParaRPr>
+                    </a:p>
+                  </a:txBody>
+                  <a:tcPr marL="9525" marR="9525" marT="9525" marB="0" anchor="ctr"/>
+                </a:tc>
+                <a:tc>
+                  <a:txBody>
+                    <a:bodyPr/>
+                    <a:lstStyle/>
+                    <a:p>
+                      <a:pPr algn="ctr" fontAlgn="ctr"/>
+                      <a:r>
+                        <a:rPr lang="nl-NL" sz="1600" u="none" strike="noStrike">
+                          <a:effectLst/>
+                        </a:rPr>
+                        <a:t>mmol/L</a:t>
+                      </a:r>
+                      <a:endParaRPr lang="nl-NL" sz="1600" b="0" i="0" u="none" strike="noStrike">
+                        <a:solidFill>
+                          <a:srgbClr val="000000"/>
+                        </a:solidFill>
+                        <a:effectLst/>
+                        <a:latin typeface="Segoe UI" panose="020B0502040204020203" pitchFamily="34" charset="0"/>
+                      </a:endParaRPr>
+                    </a:p>
+                  </a:txBody>
+                  <a:tcPr marL="9525" marR="9525" marT="9525" marB="0" anchor="ctr"/>
+                </a:tc>
+                <a:tc>
+                  <a:txBody>
+                    <a:bodyPr/>
+                    <a:lstStyle/>
+                    <a:p>
+                      <a:pPr algn="ctr" fontAlgn="ctr"/>
+                      <a:r>
+                        <a:rPr lang="nl-NL" sz="1600" u="none" strike="noStrike">
+                          <a:effectLst/>
+                        </a:rPr>
+                        <a:t>3.8 - 5.0</a:t>
+                      </a:r>
+                      <a:endParaRPr lang="nl-NL" sz="1600" b="0" i="0" u="none" strike="noStrike">
+                        <a:solidFill>
+                          <a:srgbClr val="000000"/>
+                        </a:solidFill>
+                        <a:effectLst/>
+                        <a:latin typeface="Segoe UI" panose="020B0502040204020203" pitchFamily="34" charset="0"/>
+                      </a:endParaRPr>
+                    </a:p>
+                  </a:txBody>
+                  <a:tcPr marL="9525" marR="9525" marT="9525" marB="0" anchor="ctr"/>
+                </a:tc>
+                <a:tc>
+                  <a:txBody>
+                    <a:bodyPr/>
+                    <a:lstStyle/>
+                    <a:p>
+                      <a:pPr algn="ctr" fontAlgn="ctr"/>
+                      <a:r>
+                        <a:rPr lang="nl-NL" sz="1600" u="none" strike="noStrike">
+                          <a:effectLst/>
+                        </a:rPr>
+                        <a:t>1</a:t>
+                      </a:r>
+                      <a:endParaRPr lang="nl-NL" sz="1600" b="0" i="0" u="none" strike="noStrike">
+                        <a:solidFill>
+                          <a:srgbClr val="000000"/>
+                        </a:solidFill>
+                        <a:effectLst/>
+                        <a:latin typeface="Segoe UI" panose="020B0502040204020203" pitchFamily="34" charset="0"/>
+                      </a:endParaRPr>
+                    </a:p>
+                  </a:txBody>
+                  <a:tcPr marL="9525" marR="9525" marT="9525" marB="0" anchor="ctr"/>
+                </a:tc>
+                <a:tc>
+                  <a:txBody>
+                    <a:bodyPr/>
+                    <a:lstStyle/>
+                    <a:p>
+                      <a:pPr algn="ctr" fontAlgn="ctr"/>
+                      <a:r>
+                        <a:rPr lang="nl-NL" sz="1600" u="none" strike="noStrike">
+                          <a:effectLst/>
+                        </a:rPr>
+                        <a:t>10</a:t>
+                      </a:r>
+                      <a:endParaRPr lang="nl-NL" sz="1600" b="0" i="0" u="none" strike="noStrike">
+                        <a:solidFill>
+                          <a:srgbClr val="000000"/>
+                        </a:solidFill>
+                        <a:effectLst/>
+                        <a:latin typeface="Segoe UI" panose="020B0502040204020203" pitchFamily="34" charset="0"/>
+                      </a:endParaRPr>
+                    </a:p>
+                  </a:txBody>
+                  <a:tcPr marL="9525" marR="9525" marT="9525" marB="0" anchor="ctr"/>
+                </a:tc>
+                <a:extLst>
+                  <a:ext uri="{0D108BD9-81ED-4DB2-BD59-A6C34878D82A}">
+                    <a16:rowId xmlns:a16="http://schemas.microsoft.com/office/drawing/2014/main" val="3982828422"/>
+                  </a:ext>
+                </a:extLst>
+              </a:tr>
+              <a:tr h="354346">
+                <a:tc>
+                  <a:txBody>
+                    <a:bodyPr/>
+                    <a:lstStyle/>
+                    <a:p>
+                      <a:pPr algn="ctr" fontAlgn="ctr"/>
+                      <a:r>
+                        <a:rPr lang="nl-NL" sz="1600" u="none" strike="noStrike" dirty="0" err="1">
+                          <a:effectLst/>
+                        </a:rPr>
+                        <a:t>Kreatinine</a:t>
+                      </a:r>
+                      <a:endParaRPr lang="nl-NL" sz="1600" b="0" i="0" u="none" strike="noStrike" dirty="0">
+                        <a:solidFill>
+                          <a:srgbClr val="000000"/>
+                        </a:solidFill>
+                        <a:effectLst/>
+                        <a:latin typeface="Segoe UI" panose="020B0502040204020203" pitchFamily="34" charset="0"/>
+                      </a:endParaRPr>
+                    </a:p>
+                  </a:txBody>
+                  <a:tcPr marL="9525" marR="9525" marT="9525" marB="0" anchor="ctr"/>
+                </a:tc>
+                <a:tc>
+                  <a:txBody>
+                    <a:bodyPr/>
+                    <a:lstStyle/>
+                    <a:p>
+                      <a:pPr algn="ctr" fontAlgn="ctr"/>
+                      <a:r>
+                        <a:rPr lang="nl-NL" sz="1600" u="none" strike="noStrike">
+                          <a:effectLst/>
+                        </a:rPr>
+                        <a:t>µmol/L</a:t>
+                      </a:r>
+                      <a:endParaRPr lang="nl-NL" sz="1600" b="0" i="0" u="none" strike="noStrike">
+                        <a:solidFill>
+                          <a:srgbClr val="000000"/>
+                        </a:solidFill>
+                        <a:effectLst/>
+                        <a:latin typeface="Segoe UI" panose="020B0502040204020203" pitchFamily="34" charset="0"/>
+                      </a:endParaRPr>
+                    </a:p>
+                  </a:txBody>
+                  <a:tcPr marL="9525" marR="9525" marT="9525" marB="0" anchor="ctr"/>
+                </a:tc>
+                <a:tc>
+                  <a:txBody>
+                    <a:bodyPr/>
+                    <a:lstStyle/>
+                    <a:p>
+                      <a:pPr algn="ctr" fontAlgn="ctr"/>
+                      <a:r>
+                        <a:rPr lang="nl-NL" sz="1600" u="none" strike="noStrike">
+                          <a:effectLst/>
+                        </a:rPr>
+                        <a:t>49 - 90</a:t>
+                      </a:r>
+                      <a:endParaRPr lang="nl-NL" sz="1600" b="0" i="0" u="none" strike="noStrike">
+                        <a:solidFill>
+                          <a:srgbClr val="000000"/>
+                        </a:solidFill>
+                        <a:effectLst/>
+                        <a:latin typeface="Segoe UI" panose="020B0502040204020203" pitchFamily="34" charset="0"/>
+                      </a:endParaRPr>
+                    </a:p>
+                  </a:txBody>
+                  <a:tcPr marL="9525" marR="9525" marT="9525" marB="0" anchor="ctr"/>
+                </a:tc>
+                <a:tc>
+                  <a:txBody>
+                    <a:bodyPr/>
+                    <a:lstStyle/>
+                    <a:p>
+                      <a:pPr algn="ctr" fontAlgn="ctr"/>
+                      <a:r>
+                        <a:rPr lang="nl-NL" sz="1600" u="none" strike="noStrike">
+                          <a:effectLst/>
+                        </a:rPr>
+                        <a:t>13</a:t>
+                      </a:r>
+                      <a:endParaRPr lang="nl-NL" sz="1600" b="0" i="0" u="none" strike="noStrike">
+                        <a:solidFill>
+                          <a:srgbClr val="000000"/>
+                        </a:solidFill>
+                        <a:effectLst/>
+                        <a:latin typeface="Segoe UI" panose="020B0502040204020203" pitchFamily="34" charset="0"/>
+                      </a:endParaRPr>
+                    </a:p>
+                  </a:txBody>
+                  <a:tcPr marL="9525" marR="9525" marT="9525" marB="0" anchor="ctr"/>
+                </a:tc>
+                <a:tc>
+                  <a:txBody>
+                    <a:bodyPr/>
+                    <a:lstStyle/>
+                    <a:p>
+                      <a:pPr algn="ctr" fontAlgn="ctr"/>
+                      <a:r>
+                        <a:rPr lang="nl-NL" sz="1600" u="none" strike="noStrike">
+                          <a:effectLst/>
+                        </a:rPr>
+                        <a:t>13000</a:t>
+                      </a:r>
+                      <a:endParaRPr lang="nl-NL" sz="1600" b="0" i="0" u="none" strike="noStrike">
+                        <a:solidFill>
+                          <a:srgbClr val="000000"/>
+                        </a:solidFill>
+                        <a:effectLst/>
+                        <a:latin typeface="Segoe UI" panose="020B0502040204020203" pitchFamily="34" charset="0"/>
+                      </a:endParaRPr>
+                    </a:p>
+                  </a:txBody>
+                  <a:tcPr marL="9525" marR="9525" marT="9525" marB="0" anchor="ctr"/>
+                </a:tc>
+                <a:extLst>
+                  <a:ext uri="{0D108BD9-81ED-4DB2-BD59-A6C34878D82A}">
+                    <a16:rowId xmlns:a16="http://schemas.microsoft.com/office/drawing/2014/main" val="3837466841"/>
+                  </a:ext>
+                </a:extLst>
+              </a:tr>
+              <a:tr h="354346">
+                <a:tc>
+                  <a:txBody>
+                    <a:bodyPr/>
+                    <a:lstStyle/>
+                    <a:p>
+                      <a:pPr algn="ctr" fontAlgn="ctr"/>
+                      <a:r>
+                        <a:rPr lang="nl-NL" sz="1600" u="none" strike="noStrike" dirty="0">
+                          <a:effectLst/>
+                        </a:rPr>
+                        <a:t>LDL Cholesterol</a:t>
+                      </a:r>
+                      <a:endParaRPr lang="nl-NL" sz="1600" b="0" i="0" u="none" strike="noStrike" dirty="0">
+                        <a:solidFill>
+                          <a:srgbClr val="000000"/>
+                        </a:solidFill>
+                        <a:effectLst/>
+                        <a:latin typeface="Segoe UI" panose="020B0502040204020203" pitchFamily="34" charset="0"/>
+                      </a:endParaRPr>
+                    </a:p>
+                  </a:txBody>
+                  <a:tcPr marL="9525" marR="9525" marT="9525" marB="0" anchor="ctr"/>
+                </a:tc>
+                <a:tc>
+                  <a:txBody>
+                    <a:bodyPr/>
+                    <a:lstStyle/>
+                    <a:p>
+                      <a:pPr algn="ctr" fontAlgn="ctr"/>
+                      <a:r>
+                        <a:rPr lang="nl-NL" sz="1600" u="none" strike="noStrike">
+                          <a:effectLst/>
+                        </a:rPr>
+                        <a:t>mmol/L</a:t>
+                      </a:r>
+                      <a:endParaRPr lang="nl-NL" sz="1600" b="0" i="0" u="none" strike="noStrike">
+                        <a:solidFill>
+                          <a:srgbClr val="000000"/>
+                        </a:solidFill>
+                        <a:effectLst/>
+                        <a:latin typeface="Segoe UI" panose="020B0502040204020203" pitchFamily="34" charset="0"/>
+                      </a:endParaRPr>
+                    </a:p>
+                  </a:txBody>
+                  <a:tcPr marL="9525" marR="9525" marT="9525" marB="0" anchor="ctr"/>
+                </a:tc>
+                <a:tc>
+                  <a:txBody>
+                    <a:bodyPr/>
+                    <a:lstStyle/>
+                    <a:p>
+                      <a:pPr algn="ctr" fontAlgn="ctr"/>
+                      <a:r>
+                        <a:rPr lang="nl-NL" sz="1600" u="none" strike="noStrike">
+                          <a:effectLst/>
+                        </a:rPr>
+                        <a:t>0.0 - 3.0</a:t>
+                      </a:r>
+                      <a:endParaRPr lang="nl-NL" sz="1600" b="0" i="0" u="none" strike="noStrike">
+                        <a:solidFill>
+                          <a:srgbClr val="000000"/>
+                        </a:solidFill>
+                        <a:effectLst/>
+                        <a:latin typeface="Segoe UI" panose="020B0502040204020203" pitchFamily="34" charset="0"/>
+                      </a:endParaRPr>
+                    </a:p>
+                  </a:txBody>
+                  <a:tcPr marL="9525" marR="9525" marT="9525" marB="0" anchor="ctr"/>
+                </a:tc>
+                <a:tc>
+                  <a:txBody>
+                    <a:bodyPr/>
+                    <a:lstStyle/>
+                    <a:p>
+                      <a:pPr algn="ctr" fontAlgn="ctr"/>
+                      <a:r>
+                        <a:rPr lang="nl-NL" sz="1600" u="none" strike="noStrike" dirty="0">
+                          <a:effectLst/>
+                        </a:rPr>
+                        <a:t>0.5</a:t>
+                      </a:r>
+                      <a:endParaRPr lang="nl-NL" sz="1600" b="0" i="0" u="none" strike="noStrike" dirty="0">
+                        <a:solidFill>
+                          <a:srgbClr val="000000"/>
+                        </a:solidFill>
+                        <a:effectLst/>
+                        <a:latin typeface="Segoe UI" panose="020B0502040204020203" pitchFamily="34" charset="0"/>
+                      </a:endParaRPr>
+                    </a:p>
+                  </a:txBody>
+                  <a:tcPr marL="9525" marR="9525" marT="9525" marB="0" anchor="ctr"/>
+                </a:tc>
+                <a:tc>
+                  <a:txBody>
+                    <a:bodyPr/>
+                    <a:lstStyle/>
+                    <a:p>
+                      <a:pPr algn="ctr" fontAlgn="ctr"/>
+                      <a:r>
+                        <a:rPr lang="nl-NL" sz="1600" u="none" strike="noStrike">
+                          <a:effectLst/>
+                        </a:rPr>
+                        <a:t> </a:t>
+                      </a:r>
+                      <a:endParaRPr lang="nl-NL" sz="1600" b="0" i="0" u="none" strike="noStrike">
+                        <a:solidFill>
+                          <a:srgbClr val="000000"/>
+                        </a:solidFill>
+                        <a:effectLst/>
+                        <a:latin typeface="Segoe UI" panose="020B0502040204020203" pitchFamily="34" charset="0"/>
+                      </a:endParaRPr>
+                    </a:p>
+                  </a:txBody>
+                  <a:tcPr marL="9525" marR="9525" marT="9525" marB="0" anchor="ctr"/>
+                </a:tc>
+                <a:extLst>
+                  <a:ext uri="{0D108BD9-81ED-4DB2-BD59-A6C34878D82A}">
+                    <a16:rowId xmlns:a16="http://schemas.microsoft.com/office/drawing/2014/main" val="3793110228"/>
+                  </a:ext>
+                </a:extLst>
+              </a:tr>
+              <a:tr h="354346">
+                <a:tc>
+                  <a:txBody>
+                    <a:bodyPr/>
+                    <a:lstStyle/>
+                    <a:p>
+                      <a:pPr algn="ctr" fontAlgn="ctr"/>
+                      <a:r>
+                        <a:rPr lang="nl-NL" sz="1600" u="none" strike="noStrike" dirty="0">
+                          <a:effectLst/>
+                        </a:rPr>
+                        <a:t>Natrium</a:t>
+                      </a:r>
+                      <a:endParaRPr lang="nl-NL" sz="1600" b="0" i="0" u="none" strike="noStrike" dirty="0">
+                        <a:solidFill>
+                          <a:srgbClr val="000000"/>
+                        </a:solidFill>
+                        <a:effectLst/>
+                        <a:latin typeface="Segoe UI" panose="020B0502040204020203" pitchFamily="34" charset="0"/>
+                      </a:endParaRPr>
+                    </a:p>
+                  </a:txBody>
+                  <a:tcPr marL="9525" marR="9525" marT="9525" marB="0" anchor="ctr"/>
+                </a:tc>
+                <a:tc>
+                  <a:txBody>
+                    <a:bodyPr/>
+                    <a:lstStyle/>
+                    <a:p>
+                      <a:pPr algn="ctr" fontAlgn="ctr"/>
+                      <a:r>
+                        <a:rPr lang="nl-NL" sz="1600" u="none" strike="noStrike">
+                          <a:effectLst/>
+                        </a:rPr>
+                        <a:t>mmol/L</a:t>
+                      </a:r>
+                      <a:endParaRPr lang="nl-NL" sz="1600" b="0" i="0" u="none" strike="noStrike">
+                        <a:solidFill>
+                          <a:srgbClr val="000000"/>
+                        </a:solidFill>
+                        <a:effectLst/>
+                        <a:latin typeface="Segoe UI" panose="020B0502040204020203" pitchFamily="34" charset="0"/>
+                      </a:endParaRPr>
+                    </a:p>
+                  </a:txBody>
+                  <a:tcPr marL="9525" marR="9525" marT="9525" marB="0" anchor="ctr"/>
+                </a:tc>
+                <a:tc>
+                  <a:txBody>
+                    <a:bodyPr/>
+                    <a:lstStyle/>
+                    <a:p>
+                      <a:pPr algn="ctr" fontAlgn="ctr"/>
+                      <a:r>
+                        <a:rPr lang="nl-NL" sz="1600" u="none" strike="noStrike">
+                          <a:effectLst/>
+                        </a:rPr>
+                        <a:t>136 - 146</a:t>
+                      </a:r>
+                      <a:endParaRPr lang="nl-NL" sz="1600" b="0" i="0" u="none" strike="noStrike">
+                        <a:solidFill>
+                          <a:srgbClr val="000000"/>
+                        </a:solidFill>
+                        <a:effectLst/>
+                        <a:latin typeface="Segoe UI" panose="020B0502040204020203" pitchFamily="34" charset="0"/>
+                      </a:endParaRPr>
+                    </a:p>
+                  </a:txBody>
+                  <a:tcPr marL="9525" marR="9525" marT="9525" marB="0" anchor="ctr"/>
+                </a:tc>
+                <a:tc>
+                  <a:txBody>
+                    <a:bodyPr/>
+                    <a:lstStyle/>
+                    <a:p>
+                      <a:pPr algn="ctr" fontAlgn="ctr"/>
+                      <a:r>
+                        <a:rPr lang="nl-NL" sz="1600" u="none" strike="noStrike">
+                          <a:effectLst/>
+                        </a:rPr>
+                        <a:t>50</a:t>
+                      </a:r>
+                      <a:endParaRPr lang="nl-NL" sz="1600" b="0" i="0" u="none" strike="noStrike">
+                        <a:solidFill>
+                          <a:srgbClr val="000000"/>
+                        </a:solidFill>
+                        <a:effectLst/>
+                        <a:latin typeface="Segoe UI" panose="020B0502040204020203" pitchFamily="34" charset="0"/>
+                      </a:endParaRPr>
+                    </a:p>
+                  </a:txBody>
+                  <a:tcPr marL="9525" marR="9525" marT="9525" marB="0" anchor="ctr"/>
+                </a:tc>
+                <a:tc>
+                  <a:txBody>
+                    <a:bodyPr/>
+                    <a:lstStyle/>
+                    <a:p>
+                      <a:pPr algn="ctr" fontAlgn="ctr"/>
+                      <a:r>
+                        <a:rPr lang="nl-NL" sz="1600" u="none" strike="noStrike">
+                          <a:effectLst/>
+                        </a:rPr>
+                        <a:t>200</a:t>
+                      </a:r>
+                      <a:endParaRPr lang="nl-NL" sz="1600" b="0" i="0" u="none" strike="noStrike">
+                        <a:solidFill>
+                          <a:srgbClr val="000000"/>
+                        </a:solidFill>
+                        <a:effectLst/>
+                        <a:latin typeface="Segoe UI" panose="020B0502040204020203" pitchFamily="34" charset="0"/>
+                      </a:endParaRPr>
+                    </a:p>
+                  </a:txBody>
+                  <a:tcPr marL="9525" marR="9525" marT="9525" marB="0" anchor="ctr"/>
+                </a:tc>
+                <a:extLst>
+                  <a:ext uri="{0D108BD9-81ED-4DB2-BD59-A6C34878D82A}">
+                    <a16:rowId xmlns:a16="http://schemas.microsoft.com/office/drawing/2014/main" val="3301654229"/>
+                  </a:ext>
+                </a:extLst>
+              </a:tr>
+              <a:tr h="354346">
+                <a:tc>
+                  <a:txBody>
+                    <a:bodyPr/>
+                    <a:lstStyle/>
+                    <a:p>
+                      <a:pPr algn="ctr" fontAlgn="ctr"/>
+                      <a:r>
+                        <a:rPr lang="nl-NL" sz="1600" u="none" strike="noStrike" dirty="0">
+                          <a:effectLst/>
+                        </a:rPr>
+                        <a:t>Triglyceriden</a:t>
+                      </a:r>
+                      <a:endParaRPr lang="nl-NL" sz="1600" b="0" i="0" u="none" strike="noStrike" dirty="0">
+                        <a:solidFill>
+                          <a:srgbClr val="000000"/>
+                        </a:solidFill>
+                        <a:effectLst/>
+                        <a:latin typeface="Segoe UI" panose="020B0502040204020203" pitchFamily="34" charset="0"/>
+                      </a:endParaRPr>
+                    </a:p>
+                  </a:txBody>
+                  <a:tcPr marL="9525" marR="9525" marT="9525" marB="0" anchor="ctr"/>
+                </a:tc>
+                <a:tc>
+                  <a:txBody>
+                    <a:bodyPr/>
+                    <a:lstStyle/>
+                    <a:p>
+                      <a:pPr algn="ctr" fontAlgn="ctr"/>
+                      <a:r>
+                        <a:rPr lang="nl-NL" sz="1600" u="none" strike="noStrike">
+                          <a:effectLst/>
+                        </a:rPr>
+                        <a:t>mmol/L</a:t>
+                      </a:r>
+                      <a:endParaRPr lang="nl-NL" sz="1600" b="0" i="0" u="none" strike="noStrike">
+                        <a:solidFill>
+                          <a:srgbClr val="000000"/>
+                        </a:solidFill>
+                        <a:effectLst/>
+                        <a:latin typeface="Segoe UI" panose="020B0502040204020203" pitchFamily="34" charset="0"/>
+                      </a:endParaRPr>
+                    </a:p>
+                  </a:txBody>
+                  <a:tcPr marL="9525" marR="9525" marT="9525" marB="0" anchor="ctr"/>
+                </a:tc>
+                <a:tc>
+                  <a:txBody>
+                    <a:bodyPr/>
+                    <a:lstStyle/>
+                    <a:p>
+                      <a:pPr algn="ctr" fontAlgn="ctr"/>
+                      <a:r>
+                        <a:rPr lang="nl-NL" sz="1600" u="none" strike="noStrike">
+                          <a:effectLst/>
+                        </a:rPr>
+                        <a:t>0.0 - 2.0</a:t>
+                      </a:r>
+                      <a:endParaRPr lang="nl-NL" sz="1600" b="0" i="0" u="none" strike="noStrike">
+                        <a:solidFill>
+                          <a:srgbClr val="000000"/>
+                        </a:solidFill>
+                        <a:effectLst/>
+                        <a:latin typeface="Segoe UI" panose="020B0502040204020203" pitchFamily="34" charset="0"/>
+                      </a:endParaRPr>
+                    </a:p>
+                  </a:txBody>
+                  <a:tcPr marL="9525" marR="9525" marT="9525" marB="0" anchor="ctr"/>
+                </a:tc>
+                <a:tc>
+                  <a:txBody>
+                    <a:bodyPr/>
+                    <a:lstStyle/>
+                    <a:p>
+                      <a:pPr algn="ctr" fontAlgn="ctr"/>
+                      <a:r>
+                        <a:rPr lang="nl-NL" sz="1600" u="none" strike="noStrike">
+                          <a:effectLst/>
+                        </a:rPr>
+                        <a:t>0.17</a:t>
+                      </a:r>
+                      <a:endParaRPr lang="nl-NL" sz="1600" b="0" i="0" u="none" strike="noStrike">
+                        <a:solidFill>
+                          <a:srgbClr val="000000"/>
+                        </a:solidFill>
+                        <a:effectLst/>
+                        <a:latin typeface="Segoe UI" panose="020B0502040204020203" pitchFamily="34" charset="0"/>
+                      </a:endParaRPr>
+                    </a:p>
+                  </a:txBody>
+                  <a:tcPr marL="9525" marR="9525" marT="9525" marB="0" anchor="ctr"/>
+                </a:tc>
+                <a:tc>
+                  <a:txBody>
+                    <a:bodyPr/>
+                    <a:lstStyle/>
+                    <a:p>
+                      <a:pPr algn="ctr" fontAlgn="ctr"/>
+                      <a:r>
+                        <a:rPr lang="nl-NL" sz="1600" u="none" strike="noStrike">
+                          <a:effectLst/>
+                        </a:rPr>
+                        <a:t>113</a:t>
+                      </a:r>
+                      <a:endParaRPr lang="nl-NL" sz="1600" b="0" i="0" u="none" strike="noStrike">
+                        <a:solidFill>
+                          <a:srgbClr val="000000"/>
+                        </a:solidFill>
+                        <a:effectLst/>
+                        <a:latin typeface="Segoe UI" panose="020B0502040204020203" pitchFamily="34" charset="0"/>
+                      </a:endParaRPr>
+                    </a:p>
+                  </a:txBody>
+                  <a:tcPr marL="9525" marR="9525" marT="9525" marB="0" anchor="ctr"/>
+                </a:tc>
+                <a:extLst>
+                  <a:ext uri="{0D108BD9-81ED-4DB2-BD59-A6C34878D82A}">
+                    <a16:rowId xmlns:a16="http://schemas.microsoft.com/office/drawing/2014/main" val="513305178"/>
+                  </a:ext>
+                </a:extLst>
+              </a:tr>
+              <a:tr h="354346">
+                <a:tc>
+                  <a:txBody>
+                    <a:bodyPr/>
+                    <a:lstStyle/>
+                    <a:p>
+                      <a:pPr algn="ctr" fontAlgn="ctr"/>
+                      <a:r>
+                        <a:rPr lang="nl-NL" sz="1600" u="none" strike="noStrike" dirty="0" err="1">
+                          <a:effectLst/>
+                        </a:rPr>
+                        <a:t>eGFR</a:t>
+                      </a:r>
+                      <a:r>
+                        <a:rPr lang="nl-NL" sz="1600" u="none" strike="noStrike" dirty="0">
+                          <a:effectLst/>
+                        </a:rPr>
+                        <a:t> (CKD-EPI)</a:t>
+                      </a:r>
+                      <a:endParaRPr lang="nl-NL" sz="1600" b="0" i="0" u="none" strike="noStrike" dirty="0">
+                        <a:solidFill>
+                          <a:srgbClr val="000000"/>
+                        </a:solidFill>
+                        <a:effectLst/>
+                        <a:latin typeface="Segoe UI" panose="020B0502040204020203" pitchFamily="34" charset="0"/>
+                      </a:endParaRPr>
+                    </a:p>
+                  </a:txBody>
+                  <a:tcPr marL="9525" marR="9525" marT="9525" marB="0" anchor="ctr"/>
+                </a:tc>
+                <a:tc>
+                  <a:txBody>
+                    <a:bodyPr/>
+                    <a:lstStyle/>
+                    <a:p>
+                      <a:pPr algn="ctr" fontAlgn="ctr"/>
+                      <a:r>
+                        <a:rPr lang="nl-NL" sz="1600" u="none" strike="noStrike">
+                          <a:effectLst/>
+                        </a:rPr>
+                        <a:t>mL/min/1.73m2</a:t>
+                      </a:r>
+                      <a:endParaRPr lang="nl-NL" sz="1600" b="0" i="0" u="none" strike="noStrike">
+                        <a:solidFill>
+                          <a:srgbClr val="000000"/>
+                        </a:solidFill>
+                        <a:effectLst/>
+                        <a:latin typeface="Segoe UI" panose="020B0502040204020203" pitchFamily="34" charset="0"/>
+                      </a:endParaRPr>
+                    </a:p>
+                  </a:txBody>
+                  <a:tcPr marL="9525" marR="9525" marT="9525" marB="0" anchor="ctr"/>
+                </a:tc>
+                <a:tc>
+                  <a:txBody>
+                    <a:bodyPr/>
+                    <a:lstStyle/>
+                    <a:p>
+                      <a:pPr algn="ctr" fontAlgn="ctr"/>
+                      <a:r>
+                        <a:rPr lang="nl-NL" sz="1600" u="none" strike="noStrike">
+                          <a:effectLst/>
+                        </a:rPr>
+                        <a:t>80 -</a:t>
+                      </a:r>
+                      <a:endParaRPr lang="nl-NL" sz="1600" b="0" i="0" u="none" strike="noStrike">
+                        <a:solidFill>
+                          <a:srgbClr val="000000"/>
+                        </a:solidFill>
+                        <a:effectLst/>
+                        <a:latin typeface="Segoe UI" panose="020B0502040204020203" pitchFamily="34" charset="0"/>
+                      </a:endParaRPr>
+                    </a:p>
+                  </a:txBody>
+                  <a:tcPr marL="9525" marR="9525" marT="9525" marB="0" anchor="ctr"/>
+                </a:tc>
+                <a:tc>
+                  <a:txBody>
+                    <a:bodyPr/>
+                    <a:lstStyle/>
+                    <a:p>
+                      <a:pPr algn="ctr" fontAlgn="ctr"/>
+                      <a:r>
+                        <a:rPr lang="nl-NL" sz="1600" u="none" strike="noStrike">
+                          <a:effectLst/>
+                        </a:rPr>
+                        <a:t> </a:t>
+                      </a:r>
+                      <a:endParaRPr lang="nl-NL" sz="1600" b="0" i="0" u="none" strike="noStrike">
+                        <a:solidFill>
+                          <a:srgbClr val="000000"/>
+                        </a:solidFill>
+                        <a:effectLst/>
+                        <a:latin typeface="Segoe UI" panose="020B0502040204020203" pitchFamily="34" charset="0"/>
+                      </a:endParaRPr>
+                    </a:p>
+                  </a:txBody>
+                  <a:tcPr marL="9525" marR="9525" marT="9525" marB="0" anchor="ctr"/>
+                </a:tc>
+                <a:tc>
+                  <a:txBody>
+                    <a:bodyPr/>
+                    <a:lstStyle/>
+                    <a:p>
+                      <a:pPr algn="ctr" fontAlgn="ctr"/>
+                      <a:r>
+                        <a:rPr lang="nl-NL" sz="1600" u="none" strike="noStrike">
+                          <a:effectLst/>
+                        </a:rPr>
+                        <a:t> </a:t>
+                      </a:r>
+                      <a:endParaRPr lang="nl-NL" sz="1600" b="0" i="0" u="none" strike="noStrike">
+                        <a:solidFill>
+                          <a:srgbClr val="000000"/>
+                        </a:solidFill>
+                        <a:effectLst/>
+                        <a:latin typeface="Segoe UI" panose="020B0502040204020203" pitchFamily="34" charset="0"/>
+                      </a:endParaRPr>
+                    </a:p>
+                  </a:txBody>
+                  <a:tcPr marL="9525" marR="9525" marT="9525" marB="0" anchor="ctr"/>
+                </a:tc>
+                <a:extLst>
+                  <a:ext uri="{0D108BD9-81ED-4DB2-BD59-A6C34878D82A}">
+                    <a16:rowId xmlns:a16="http://schemas.microsoft.com/office/drawing/2014/main" val="3931202181"/>
+                  </a:ext>
+                </a:extLst>
+              </a:tr>
+              <a:tr h="354346">
+                <a:tc>
+                  <a:txBody>
+                    <a:bodyPr/>
+                    <a:lstStyle/>
+                    <a:p>
+                      <a:pPr algn="ctr" fontAlgn="ctr"/>
+                      <a:r>
+                        <a:rPr lang="nl-NL" sz="1600" u="none" strike="noStrike" dirty="0">
+                          <a:effectLst/>
+                        </a:rPr>
+                        <a:t>non-HDL cholesterol</a:t>
+                      </a:r>
+                      <a:endParaRPr lang="nl-NL" sz="1600" b="0" i="0" u="none" strike="noStrike" dirty="0">
+                        <a:solidFill>
+                          <a:srgbClr val="000000"/>
+                        </a:solidFill>
+                        <a:effectLst/>
+                        <a:latin typeface="Segoe UI" panose="020B0502040204020203" pitchFamily="34" charset="0"/>
+                      </a:endParaRPr>
+                    </a:p>
+                  </a:txBody>
+                  <a:tcPr marL="9525" marR="9525" marT="9525" marB="0" anchor="ctr"/>
+                </a:tc>
+                <a:tc>
+                  <a:txBody>
+                    <a:bodyPr/>
+                    <a:lstStyle/>
+                    <a:p>
+                      <a:pPr algn="ctr" fontAlgn="ctr"/>
+                      <a:r>
+                        <a:rPr lang="nl-NL" sz="1600" u="none" strike="noStrike">
+                          <a:effectLst/>
+                        </a:rPr>
+                        <a:t>mmol/L</a:t>
+                      </a:r>
+                      <a:endParaRPr lang="nl-NL" sz="1600" b="0" i="0" u="none" strike="noStrike">
+                        <a:solidFill>
+                          <a:srgbClr val="000000"/>
+                        </a:solidFill>
+                        <a:effectLst/>
+                        <a:latin typeface="Segoe UI" panose="020B0502040204020203" pitchFamily="34" charset="0"/>
+                      </a:endParaRPr>
+                    </a:p>
+                  </a:txBody>
+                  <a:tcPr marL="9525" marR="9525" marT="9525" marB="0" anchor="ctr"/>
+                </a:tc>
+                <a:tc>
+                  <a:txBody>
+                    <a:bodyPr/>
+                    <a:lstStyle/>
+                    <a:p>
+                      <a:pPr algn="ctr" fontAlgn="ctr"/>
+                      <a:r>
+                        <a:rPr lang="nl-NL" sz="1600" u="none" strike="noStrike">
+                          <a:effectLst/>
+                        </a:rPr>
+                        <a:t>0.0 - 3.8</a:t>
+                      </a:r>
+                      <a:endParaRPr lang="nl-NL" sz="1600" b="0" i="0" u="none" strike="noStrike">
+                        <a:solidFill>
+                          <a:srgbClr val="000000"/>
+                        </a:solidFill>
+                        <a:effectLst/>
+                        <a:latin typeface="Segoe UI" panose="020B0502040204020203" pitchFamily="34" charset="0"/>
+                      </a:endParaRPr>
+                    </a:p>
+                  </a:txBody>
+                  <a:tcPr marL="9525" marR="9525" marT="9525" marB="0" anchor="ctr"/>
+                </a:tc>
+                <a:tc>
+                  <a:txBody>
+                    <a:bodyPr/>
+                    <a:lstStyle/>
+                    <a:p>
+                      <a:pPr algn="ctr" fontAlgn="ctr"/>
+                      <a:r>
+                        <a:rPr lang="nl-NL" sz="1600" u="none" strike="noStrike">
+                          <a:effectLst/>
+                        </a:rPr>
+                        <a:t> </a:t>
+                      </a:r>
+                      <a:endParaRPr lang="nl-NL" sz="1600" b="0" i="0" u="none" strike="noStrike">
+                        <a:solidFill>
+                          <a:srgbClr val="000000"/>
+                        </a:solidFill>
+                        <a:effectLst/>
+                        <a:latin typeface="Segoe UI" panose="020B0502040204020203" pitchFamily="34" charset="0"/>
+                      </a:endParaRPr>
+                    </a:p>
+                  </a:txBody>
+                  <a:tcPr marL="9525" marR="9525" marT="9525" marB="0" anchor="ctr"/>
+                </a:tc>
+                <a:tc>
+                  <a:txBody>
+                    <a:bodyPr/>
+                    <a:lstStyle/>
+                    <a:p>
+                      <a:pPr algn="ctr" fontAlgn="ctr"/>
+                      <a:r>
+                        <a:rPr lang="nl-NL" sz="1600" u="none" strike="noStrike" dirty="0">
+                          <a:effectLst/>
+                        </a:rPr>
+                        <a:t> </a:t>
+                      </a:r>
+                      <a:endParaRPr lang="nl-NL" sz="1600" b="0" i="0" u="none" strike="noStrike" dirty="0">
+                        <a:solidFill>
+                          <a:srgbClr val="000000"/>
+                        </a:solidFill>
+                        <a:effectLst/>
+                        <a:latin typeface="Segoe UI" panose="020B0502040204020203" pitchFamily="34" charset="0"/>
+                      </a:endParaRPr>
+                    </a:p>
+                  </a:txBody>
+                  <a:tcPr marL="9525" marR="9525" marT="9525" marB="0" anchor="ctr"/>
+                </a:tc>
+                <a:extLst>
+                  <a:ext uri="{0D108BD9-81ED-4DB2-BD59-A6C34878D82A}">
+                    <a16:rowId xmlns:a16="http://schemas.microsoft.com/office/drawing/2014/main" val="1699768233"/>
+                  </a:ext>
+                </a:extLst>
+              </a:tr>
+            </a:tbl>
+          </a:graphicData>
+        </a:graphic>
+      </p:graphicFrame>
+      <p:sp>
+        <p:nvSpPr>
+          <p:cNvPr id="5" name="Footer Placeholder 4">
+            <a:extLst>
+              <a:ext uri="{FF2B5EF4-FFF2-40B4-BE49-F238E27FC236}">
+                <a16:creationId xmlns:a16="http://schemas.microsoft.com/office/drawing/2014/main" id="{B340C6C2-8A25-4732-ADD4-BBD79F7C8ABB}"/>
+              </a:ext>
+            </a:extLst>
+          </p:cNvPr>
+          <p:cNvSpPr>
+            <a:spLocks noGrp="1"/>
+          </p:cNvSpPr>
+          <p:nvPr>
+            <p:ph type="ftr" sz="quarter" idx="11"/>
+          </p:nvPr>
+        </p:nvSpPr>
+        <p:spPr/>
+        <p:txBody>
+          <a:bodyPr/>
+          <a:lstStyle/>
+          <a:p>
+            <a:r>
+              <a:rPr lang="nl-NL"/>
+              <a:t>Ref: https://www.umcutrecht.nl/bepalingenwijzer</a:t>
+            </a:r>
+          </a:p>
+        </p:txBody>
+      </p:sp>
     </p:spTree>
     <p:extLst>
       <p:ext uri="{BB962C8B-B14F-4D97-AF65-F5344CB8AC3E}">
-        <p14:creationId xmlns:p14="http://schemas.microsoft.com/office/powerpoint/2010/main" val="2692764115"/>
+        <p14:creationId xmlns:p14="http://schemas.microsoft.com/office/powerpoint/2010/main" val="976102967"/>
       </p:ext>
     </p:extLst>
   </p:cSld>
@@ -8673,12 +10986,48 @@
           <a:chExt cx="0" cy="0"/>
         </a:xfrm>
       </p:grpSpPr>
+      <p:sp>
+        <p:nvSpPr>
+          <p:cNvPr id="4" name="TextBox 3">
+            <a:extLst>
+              <a:ext uri="{FF2B5EF4-FFF2-40B4-BE49-F238E27FC236}">
+                <a16:creationId xmlns:a16="http://schemas.microsoft.com/office/drawing/2014/main" id="{B40CC955-9822-4C97-8EA5-CCA925BF2200}"/>
+              </a:ext>
+            </a:extLst>
+          </p:cNvPr>
+          <p:cNvSpPr txBox="1"/>
+          <p:nvPr/>
+        </p:nvSpPr>
+        <p:spPr>
+          <a:xfrm>
+            <a:off x="0" y="2009"/>
+            <a:ext cx="3430954" cy="369332"/>
+          </a:xfrm>
+          <a:prstGeom prst="rect">
+            <a:avLst/>
+          </a:prstGeom>
+          <a:noFill/>
+        </p:spPr>
+        <p:txBody>
+          <a:bodyPr wrap="square" rtlCol="0">
+            <a:spAutoFit/>
+          </a:bodyPr>
+          <a:lstStyle/>
+          <a:p>
+            <a:r>
+              <a:rPr lang="it-IT" u="sng" dirty="0"/>
+              <a:t>Missing Values</a:t>
+            </a:r>
+            <a:endParaRPr lang="nl-NL" u="sng" dirty="0"/>
+          </a:p>
+        </p:txBody>
+      </p:sp>
       <p:pic>
         <p:nvPicPr>
-          <p:cNvPr id="3" name="Graphic 2">
-            <a:extLst>
-              <a:ext uri="{FF2B5EF4-FFF2-40B4-BE49-F238E27FC236}">
-                <a16:creationId xmlns:a16="http://schemas.microsoft.com/office/drawing/2014/main" id="{5104F63A-8305-48CC-A7C8-38D27F499ADB}"/>
+          <p:cNvPr id="5" name="Picture 4">
+            <a:extLst>
+              <a:ext uri="{FF2B5EF4-FFF2-40B4-BE49-F238E27FC236}">
+                <a16:creationId xmlns:a16="http://schemas.microsoft.com/office/drawing/2014/main" id="{634625C7-DC4A-4491-AF1E-52984F047015}"/>
               </a:ext>
             </a:extLst>
           </p:cNvPr>
@@ -8687,220 +11036,21 @@
           </p:cNvPicPr>
           <p:nvPr/>
         </p:nvPicPr>
-        <p:blipFill>
+        <p:blipFill rotWithShape="1">
           <a:blip r:embed="rId2">
             <a:extLst>
               <a:ext uri="{28A0092B-C50C-407E-A947-70E740481C1C}">
                 <a14:useLocalDpi xmlns:a14="http://schemas.microsoft.com/office/drawing/2010/main" val="0"/>
               </a:ext>
-              <a:ext uri="{96DAC541-7B7A-43D3-8B79-37D633B846F1}">
-                <asvg:svgBlip xmlns:asvg="http://schemas.microsoft.com/office/drawing/2016/SVG/main" r:embed="rId3"/>
-              </a:ext>
             </a:extLst>
           </a:blip>
-          <a:stretch>
-            <a:fillRect/>
-          </a:stretch>
+          <a:srcRect t="3309"/>
+          <a:stretch/>
         </p:blipFill>
         <p:spPr>
           <a:xfrm>
-            <a:off x="6955860" y="3300410"/>
-            <a:ext cx="4471895" cy="3357563"/>
-          </a:xfrm>
-          <a:prstGeom prst="rect">
-            <a:avLst/>
-          </a:prstGeom>
-        </p:spPr>
-      </p:pic>
-      <p:pic>
-        <p:nvPicPr>
-          <p:cNvPr id="5" name="Graphic 4">
-            <a:extLst>
-              <a:ext uri="{FF2B5EF4-FFF2-40B4-BE49-F238E27FC236}">
-                <a16:creationId xmlns:a16="http://schemas.microsoft.com/office/drawing/2014/main" id="{B68B9AC6-63AF-4D04-8412-F617E4BD1E25}"/>
-              </a:ext>
-            </a:extLst>
-          </p:cNvPr>
-          <p:cNvPicPr>
-            <a:picLocks noChangeAspect="1"/>
-          </p:cNvPicPr>
-          <p:nvPr/>
-        </p:nvPicPr>
-        <p:blipFill>
-          <a:blip r:embed="rId4">
-            <a:extLst>
-              <a:ext uri="{28A0092B-C50C-407E-A947-70E740481C1C}">
-                <a14:useLocalDpi xmlns:a14="http://schemas.microsoft.com/office/drawing/2010/main" val="0"/>
-              </a:ext>
-              <a:ext uri="{96DAC541-7B7A-43D3-8B79-37D633B846F1}">
-                <asvg:svgBlip xmlns:asvg="http://schemas.microsoft.com/office/drawing/2016/SVG/main" r:embed="rId5"/>
-              </a:ext>
-            </a:extLst>
-          </a:blip>
-          <a:stretch>
-            <a:fillRect/>
-          </a:stretch>
-        </p:blipFill>
-        <p:spPr>
-          <a:xfrm>
-            <a:off x="915392" y="3300411"/>
-            <a:ext cx="4471895" cy="3357563"/>
-          </a:xfrm>
-          <a:prstGeom prst="rect">
-            <a:avLst/>
-          </a:prstGeom>
-        </p:spPr>
-      </p:pic>
-      <p:pic>
-        <p:nvPicPr>
-          <p:cNvPr id="7" name="Graphic 6">
-            <a:extLst>
-              <a:ext uri="{FF2B5EF4-FFF2-40B4-BE49-F238E27FC236}">
-                <a16:creationId xmlns:a16="http://schemas.microsoft.com/office/drawing/2014/main" id="{A67BD1E4-1078-48C8-A0CC-A8F92079F4D0}"/>
-              </a:ext>
-            </a:extLst>
-          </p:cNvPr>
-          <p:cNvPicPr>
-            <a:picLocks noChangeAspect="1"/>
-          </p:cNvPicPr>
-          <p:nvPr/>
-        </p:nvPicPr>
-        <p:blipFill>
-          <a:blip r:embed="rId6">
-            <a:extLst>
-              <a:ext uri="{28A0092B-C50C-407E-A947-70E740481C1C}">
-                <a14:useLocalDpi xmlns:a14="http://schemas.microsoft.com/office/drawing/2010/main" val="0"/>
-              </a:ext>
-              <a:ext uri="{96DAC541-7B7A-43D3-8B79-37D633B846F1}">
-                <asvg:svgBlip xmlns:asvg="http://schemas.microsoft.com/office/drawing/2016/SVG/main" r:embed="rId7"/>
-              </a:ext>
-            </a:extLst>
-          </a:blip>
-          <a:stretch>
-            <a:fillRect/>
-          </a:stretch>
-        </p:blipFill>
-        <p:spPr>
-          <a:xfrm>
-            <a:off x="8416461" y="0"/>
-            <a:ext cx="4471895" cy="3357563"/>
-          </a:xfrm>
-          <a:prstGeom prst="rect">
-            <a:avLst/>
-          </a:prstGeom>
-        </p:spPr>
-      </p:pic>
-      <p:pic>
-        <p:nvPicPr>
-          <p:cNvPr id="9" name="Graphic 8">
-            <a:extLst>
-              <a:ext uri="{FF2B5EF4-FFF2-40B4-BE49-F238E27FC236}">
-                <a16:creationId xmlns:a16="http://schemas.microsoft.com/office/drawing/2014/main" id="{9FBB4D53-4F61-4420-B2EA-5DBB2190FBDD}"/>
-              </a:ext>
-            </a:extLst>
-          </p:cNvPr>
-          <p:cNvPicPr>
-            <a:picLocks noChangeAspect="1"/>
-          </p:cNvPicPr>
-          <p:nvPr/>
-        </p:nvPicPr>
-        <p:blipFill>
-          <a:blip r:embed="rId8">
-            <a:extLst>
-              <a:ext uri="{28A0092B-C50C-407E-A947-70E740481C1C}">
-                <a14:useLocalDpi xmlns:a14="http://schemas.microsoft.com/office/drawing/2010/main" val="0"/>
-              </a:ext>
-              <a:ext uri="{96DAC541-7B7A-43D3-8B79-37D633B846F1}">
-                <asvg:svgBlip xmlns:asvg="http://schemas.microsoft.com/office/drawing/2016/SVG/main" r:embed="rId9"/>
-              </a:ext>
-            </a:extLst>
-          </a:blip>
-          <a:stretch>
-            <a:fillRect/>
-          </a:stretch>
-        </p:blipFill>
-        <p:spPr>
-          <a:xfrm>
-            <a:off x="5405166" y="0"/>
-            <a:ext cx="4471895" cy="3357563"/>
-          </a:xfrm>
-          <a:prstGeom prst="rect">
-            <a:avLst/>
-          </a:prstGeom>
-        </p:spPr>
-      </p:pic>
-      <p:pic>
-        <p:nvPicPr>
-          <p:cNvPr id="11" name="Graphic 10">
-            <a:extLst>
-              <a:ext uri="{FF2B5EF4-FFF2-40B4-BE49-F238E27FC236}">
-                <a16:creationId xmlns:a16="http://schemas.microsoft.com/office/drawing/2014/main" id="{9947BBB5-44C5-48CF-969E-441FAF4420ED}"/>
-              </a:ext>
-            </a:extLst>
-          </p:cNvPr>
-          <p:cNvPicPr>
-            <a:picLocks noChangeAspect="1"/>
-          </p:cNvPicPr>
-          <p:nvPr/>
-        </p:nvPicPr>
-        <p:blipFill>
-          <a:blip r:embed="rId10">
-            <a:extLst>
-              <a:ext uri="{28A0092B-C50C-407E-A947-70E740481C1C}">
-                <a14:useLocalDpi xmlns:a14="http://schemas.microsoft.com/office/drawing/2010/main" val="0"/>
-              </a:ext>
-              <a:ext uri="{96DAC541-7B7A-43D3-8B79-37D633B846F1}">
-                <asvg:svgBlip xmlns:asvg="http://schemas.microsoft.com/office/drawing/2016/SVG/main" r:embed="rId11"/>
-              </a:ext>
-            </a:extLst>
-          </a:blip>
-          <a:stretch>
-            <a:fillRect/>
-          </a:stretch>
-        </p:blipFill>
-        <p:spPr>
-          <a:xfrm>
-            <a:off x="2314940" y="0"/>
-            <a:ext cx="4471895" cy="3357563"/>
-          </a:xfrm>
-          <a:prstGeom prst="rect">
-            <a:avLst/>
-          </a:prstGeom>
-        </p:spPr>
-      </p:pic>
-      <p:pic>
-        <p:nvPicPr>
-          <p:cNvPr id="13" name="Graphic 12">
-            <a:extLst>
-              <a:ext uri="{FF2B5EF4-FFF2-40B4-BE49-F238E27FC236}">
-                <a16:creationId xmlns:a16="http://schemas.microsoft.com/office/drawing/2014/main" id="{FC69359F-A5B2-4EC6-BD2E-74DFBA522CFC}"/>
-              </a:ext>
-            </a:extLst>
-          </p:cNvPr>
-          <p:cNvPicPr>
-            <a:picLocks noChangeAspect="1"/>
-          </p:cNvPicPr>
-          <p:nvPr/>
-        </p:nvPicPr>
-        <p:blipFill>
-          <a:blip r:embed="rId12">
-            <a:extLst>
-              <a:ext uri="{28A0092B-C50C-407E-A947-70E740481C1C}">
-                <a14:useLocalDpi xmlns:a14="http://schemas.microsoft.com/office/drawing/2010/main" val="0"/>
-              </a:ext>
-              <a:ext uri="{96DAC541-7B7A-43D3-8B79-37D633B846F1}">
-                <asvg:svgBlip xmlns:asvg="http://schemas.microsoft.com/office/drawing/2016/SVG/main" r:embed="rId13"/>
-              </a:ext>
-            </a:extLst>
-          </a:blip>
-          <a:stretch>
-            <a:fillRect/>
-          </a:stretch>
-        </p:blipFill>
-        <p:spPr>
-          <a:xfrm>
-            <a:off x="-859675" y="-28577"/>
-            <a:ext cx="4471895" cy="3357563"/>
+            <a:off x="2424139" y="352927"/>
+            <a:ext cx="7343722" cy="6503064"/>
           </a:xfrm>
           <a:prstGeom prst="rect">
             <a:avLst/>
@@ -8910,7 +11060,7 @@
     </p:spTree>
     <p:extLst>
       <p:ext uri="{BB962C8B-B14F-4D97-AF65-F5344CB8AC3E}">
-        <p14:creationId xmlns:p14="http://schemas.microsoft.com/office/powerpoint/2010/main" val="2926366783"/>
+        <p14:creationId xmlns:p14="http://schemas.microsoft.com/office/powerpoint/2010/main" val="2771455475"/>
       </p:ext>
     </p:extLst>
   </p:cSld>
@@ -8951,10 +11101,10 @@
       </p:grpSpPr>
       <p:pic>
         <p:nvPicPr>
-          <p:cNvPr id="4" name="Picture 3">
-            <a:extLst>
-              <a:ext uri="{FF2B5EF4-FFF2-40B4-BE49-F238E27FC236}">
-                <a16:creationId xmlns:a16="http://schemas.microsoft.com/office/drawing/2014/main" id="{50D4D3CB-2C2F-4524-B868-41FAEA9F06E8}"/>
+          <p:cNvPr id="56" name="Graphic 55">
+            <a:extLst>
+              <a:ext uri="{FF2B5EF4-FFF2-40B4-BE49-F238E27FC236}">
+                <a16:creationId xmlns:a16="http://schemas.microsoft.com/office/drawing/2014/main" id="{52414F87-F631-4D89-AA4B-5432D50060F8}"/>
               </a:ext>
             </a:extLst>
           </p:cNvPr>
@@ -8964,147 +11114,229 @@
           <p:nvPr/>
         </p:nvPicPr>
         <p:blipFill>
-          <a:blip r:embed="rId2"/>
+          <a:blip r:embed="rId2">
+            <a:extLst>
+              <a:ext uri="{28A0092B-C50C-407E-A947-70E740481C1C}">
+                <a14:useLocalDpi xmlns:a14="http://schemas.microsoft.com/office/drawing/2010/main" val="0"/>
+              </a:ext>
+              <a:ext uri="{96DAC541-7B7A-43D3-8B79-37D633B846F1}">
+                <asvg:svgBlip xmlns:asvg="http://schemas.microsoft.com/office/drawing/2016/SVG/main" r:embed="rId3"/>
+              </a:ext>
+            </a:extLst>
+          </a:blip>
           <a:stretch>
             <a:fillRect/>
           </a:stretch>
         </p:blipFill>
         <p:spPr>
           <a:xfrm>
-            <a:off x="4014497" y="2219156"/>
-            <a:ext cx="4163006" cy="2419688"/>
+            <a:off x="6935099" y="3299436"/>
+            <a:ext cx="4394477" cy="3299436"/>
           </a:xfrm>
           <a:prstGeom prst="rect">
             <a:avLst/>
           </a:prstGeom>
         </p:spPr>
       </p:pic>
-      <p:sp>
-        <p:nvSpPr>
-          <p:cNvPr id="5" name="TextBox 4">
-            <a:extLst>
-              <a:ext uri="{FF2B5EF4-FFF2-40B4-BE49-F238E27FC236}">
-                <a16:creationId xmlns:a16="http://schemas.microsoft.com/office/drawing/2014/main" id="{D514EC3D-B477-4A30-911C-BD0F244670E3}"/>
-              </a:ext>
-            </a:extLst>
-          </p:cNvPr>
-          <p:cNvSpPr txBox="1"/>
+      <p:pic>
+        <p:nvPicPr>
+          <p:cNvPr id="58" name="Graphic 57">
+            <a:extLst>
+              <a:ext uri="{FF2B5EF4-FFF2-40B4-BE49-F238E27FC236}">
+                <a16:creationId xmlns:a16="http://schemas.microsoft.com/office/drawing/2014/main" id="{68FD5771-5A2A-484D-A31C-D9D6B471123F}"/>
+              </a:ext>
+            </a:extLst>
+          </p:cNvPr>
+          <p:cNvPicPr>
+            <a:picLocks noChangeAspect="1"/>
+          </p:cNvPicPr>
           <p:nvPr/>
-        </p:nvSpPr>
+        </p:nvPicPr>
+        <p:blipFill>
+          <a:blip r:embed="rId4">
+            <a:extLst>
+              <a:ext uri="{28A0092B-C50C-407E-A947-70E740481C1C}">
+                <a14:useLocalDpi xmlns:a14="http://schemas.microsoft.com/office/drawing/2010/main" val="0"/>
+              </a:ext>
+              <a:ext uri="{96DAC541-7B7A-43D3-8B79-37D633B846F1}">
+                <asvg:svgBlip xmlns:asvg="http://schemas.microsoft.com/office/drawing/2016/SVG/main" r:embed="rId5"/>
+              </a:ext>
+            </a:extLst>
+          </a:blip>
+          <a:stretch>
+            <a:fillRect/>
+          </a:stretch>
+        </p:blipFill>
         <p:spPr>
           <a:xfrm>
-            <a:off x="0" y="0"/>
-            <a:ext cx="2289908" cy="369332"/>
+            <a:off x="862424" y="3299436"/>
+            <a:ext cx="4394477" cy="3299436"/>
           </a:xfrm>
           <a:prstGeom prst="rect">
             <a:avLst/>
           </a:prstGeom>
-          <a:noFill/>
         </p:spPr>
-        <p:txBody>
-          <a:bodyPr wrap="square" rtlCol="0">
-            <a:spAutoFit/>
-          </a:bodyPr>
-          <a:lstStyle/>
-          <a:p>
-            <a:r>
-              <a:rPr lang="it-IT" u="sng" dirty="0"/>
-              <a:t>MICE Forest</a:t>
-            </a:r>
-            <a:endParaRPr lang="nl-NL" u="sng" dirty="0"/>
-          </a:p>
-        </p:txBody>
-      </p:sp>
-      <p:sp>
-        <p:nvSpPr>
-          <p:cNvPr id="7" name="Arrow: Down 6">
-            <a:extLst>
-              <a:ext uri="{FF2B5EF4-FFF2-40B4-BE49-F238E27FC236}">
-                <a16:creationId xmlns:a16="http://schemas.microsoft.com/office/drawing/2014/main" id="{A2FC79F2-6630-4E33-A4C3-8D9A42B46FEF}"/>
-              </a:ext>
-            </a:extLst>
-          </p:cNvPr>
-          <p:cNvSpPr/>
+      </p:pic>
+      <p:pic>
+        <p:nvPicPr>
+          <p:cNvPr id="60" name="Graphic 59">
+            <a:extLst>
+              <a:ext uri="{FF2B5EF4-FFF2-40B4-BE49-F238E27FC236}">
+                <a16:creationId xmlns:a16="http://schemas.microsoft.com/office/drawing/2014/main" id="{A666AFF7-F3EA-45A7-9012-B02B8CF613E5}"/>
+              </a:ext>
+            </a:extLst>
+          </p:cNvPr>
+          <p:cNvPicPr>
+            <a:picLocks noChangeAspect="1"/>
+          </p:cNvPicPr>
           <p:nvPr/>
-        </p:nvSpPr>
-        <p:spPr>
-          <a:xfrm rot="4638552">
-            <a:off x="7604369" y="3141785"/>
-            <a:ext cx="140677" cy="1742831"/>
-          </a:xfrm>
-          <a:prstGeom prst="downArrow">
-            <a:avLst/>
-          </a:prstGeom>
-        </p:spPr>
-        <p:style>
-          <a:lnRef idx="0">
-            <a:schemeClr val="accent1"/>
-          </a:lnRef>
-          <a:fillRef idx="3">
-            <a:schemeClr val="accent1"/>
-          </a:fillRef>
-          <a:effectRef idx="3">
-            <a:schemeClr val="accent1"/>
-          </a:effectRef>
-          <a:fontRef idx="minor">
-            <a:schemeClr val="lt1"/>
-          </a:fontRef>
-        </p:style>
-        <p:txBody>
-          <a:bodyPr rtlCol="0" anchor="ctr"/>
-          <a:lstStyle/>
-          <a:p>
-            <a:pPr algn="ctr"/>
-            <a:endParaRPr lang="nl-NL"/>
-          </a:p>
-        </p:txBody>
-      </p:sp>
-      <p:sp>
-        <p:nvSpPr>
-          <p:cNvPr id="8" name="TextBox 7">
-            <a:extLst>
-              <a:ext uri="{FF2B5EF4-FFF2-40B4-BE49-F238E27FC236}">
-                <a16:creationId xmlns:a16="http://schemas.microsoft.com/office/drawing/2014/main" id="{F80A6ACB-2D2C-4E4F-96F1-0D3837C836FC}"/>
-              </a:ext>
-            </a:extLst>
-          </p:cNvPr>
-          <p:cNvSpPr txBox="1"/>
-          <p:nvPr/>
-        </p:nvSpPr>
+        </p:nvPicPr>
+        <p:blipFill>
+          <a:blip r:embed="rId6">
+            <a:extLst>
+              <a:ext uri="{28A0092B-C50C-407E-A947-70E740481C1C}">
+                <a14:useLocalDpi xmlns:a14="http://schemas.microsoft.com/office/drawing/2010/main" val="0"/>
+              </a:ext>
+              <a:ext uri="{96DAC541-7B7A-43D3-8B79-37D633B846F1}">
+                <asvg:svgBlip xmlns:asvg="http://schemas.microsoft.com/office/drawing/2016/SVG/main" r:embed="rId7"/>
+              </a:ext>
+            </a:extLst>
+          </a:blip>
+          <a:stretch>
+            <a:fillRect/>
+          </a:stretch>
+        </p:blipFill>
         <p:spPr>
           <a:xfrm>
-            <a:off x="8519452" y="3476396"/>
-            <a:ext cx="2360246" cy="646331"/>
+            <a:off x="8214104" y="0"/>
+            <a:ext cx="4394477" cy="3299436"/>
           </a:xfrm>
           <a:prstGeom prst="rect">
             <a:avLst/>
           </a:prstGeom>
-          <a:noFill/>
         </p:spPr>
-        <p:txBody>
-          <a:bodyPr wrap="square" rtlCol="0">
-            <a:spAutoFit/>
-          </a:bodyPr>
-          <a:lstStyle/>
-          <a:p>
-            <a:r>
-              <a:rPr lang="it-IT" dirty="0"/>
-              <a:t>Gradient Boosting</a:t>
-            </a:r>
-          </a:p>
-          <a:p>
-            <a:r>
-              <a:rPr lang="it-IT" dirty="0"/>
-              <a:t>Decision Trees</a:t>
-            </a:r>
-            <a:endParaRPr lang="nl-NL" dirty="0"/>
-          </a:p>
-        </p:txBody>
-      </p:sp>
+      </p:pic>
+      <p:pic>
+        <p:nvPicPr>
+          <p:cNvPr id="62" name="Graphic 61">
+            <a:extLst>
+              <a:ext uri="{FF2B5EF4-FFF2-40B4-BE49-F238E27FC236}">
+                <a16:creationId xmlns:a16="http://schemas.microsoft.com/office/drawing/2014/main" id="{BC051BED-6050-4585-8170-AF9657F7F502}"/>
+              </a:ext>
+            </a:extLst>
+          </p:cNvPr>
+          <p:cNvPicPr>
+            <a:picLocks noChangeAspect="1"/>
+          </p:cNvPicPr>
+          <p:nvPr/>
+        </p:nvPicPr>
+        <p:blipFill>
+          <a:blip r:embed="rId8">
+            <a:extLst>
+              <a:ext uri="{28A0092B-C50C-407E-A947-70E740481C1C}">
+                <a14:useLocalDpi xmlns:a14="http://schemas.microsoft.com/office/drawing/2010/main" val="0"/>
+              </a:ext>
+              <a:ext uri="{96DAC541-7B7A-43D3-8B79-37D633B846F1}">
+                <asvg:svgBlip xmlns:asvg="http://schemas.microsoft.com/office/drawing/2016/SVG/main" r:embed="rId9"/>
+              </a:ext>
+            </a:extLst>
+          </a:blip>
+          <a:stretch>
+            <a:fillRect/>
+          </a:stretch>
+        </p:blipFill>
+        <p:spPr>
+          <a:xfrm>
+            <a:off x="5256901" y="0"/>
+            <a:ext cx="4394477" cy="3299436"/>
+          </a:xfrm>
+          <a:prstGeom prst="rect">
+            <a:avLst/>
+          </a:prstGeom>
+        </p:spPr>
+      </p:pic>
+      <p:pic>
+        <p:nvPicPr>
+          <p:cNvPr id="64" name="Graphic 63">
+            <a:extLst>
+              <a:ext uri="{FF2B5EF4-FFF2-40B4-BE49-F238E27FC236}">
+                <a16:creationId xmlns:a16="http://schemas.microsoft.com/office/drawing/2014/main" id="{FC29D5F6-41B5-4C6C-A664-E5758A41131A}"/>
+              </a:ext>
+            </a:extLst>
+          </p:cNvPr>
+          <p:cNvPicPr>
+            <a:picLocks noChangeAspect="1"/>
+          </p:cNvPicPr>
+          <p:nvPr/>
+        </p:nvPicPr>
+        <p:blipFill>
+          <a:blip r:embed="rId10">
+            <a:extLst>
+              <a:ext uri="{28A0092B-C50C-407E-A947-70E740481C1C}">
+                <a14:useLocalDpi xmlns:a14="http://schemas.microsoft.com/office/drawing/2010/main" val="0"/>
+              </a:ext>
+              <a:ext uri="{96DAC541-7B7A-43D3-8B79-37D633B846F1}">
+                <asvg:svgBlip xmlns:asvg="http://schemas.microsoft.com/office/drawing/2016/SVG/main" r:embed="rId11"/>
+              </a:ext>
+            </a:extLst>
+          </a:blip>
+          <a:stretch>
+            <a:fillRect/>
+          </a:stretch>
+        </p:blipFill>
+        <p:spPr>
+          <a:xfrm>
+            <a:off x="2299699" y="0"/>
+            <a:ext cx="4394477" cy="3299436"/>
+          </a:xfrm>
+          <a:prstGeom prst="rect">
+            <a:avLst/>
+          </a:prstGeom>
+        </p:spPr>
+      </p:pic>
+      <p:pic>
+        <p:nvPicPr>
+          <p:cNvPr id="66" name="Graphic 65">
+            <a:extLst>
+              <a:ext uri="{FF2B5EF4-FFF2-40B4-BE49-F238E27FC236}">
+                <a16:creationId xmlns:a16="http://schemas.microsoft.com/office/drawing/2014/main" id="{E40859BE-F25B-48B1-B7CF-10C7F1E45D9A}"/>
+              </a:ext>
+            </a:extLst>
+          </p:cNvPr>
+          <p:cNvPicPr>
+            <a:picLocks noChangeAspect="1"/>
+          </p:cNvPicPr>
+          <p:nvPr/>
+        </p:nvPicPr>
+        <p:blipFill>
+          <a:blip r:embed="rId12">
+            <a:extLst>
+              <a:ext uri="{28A0092B-C50C-407E-A947-70E740481C1C}">
+                <a14:useLocalDpi xmlns:a14="http://schemas.microsoft.com/office/drawing/2010/main" val="0"/>
+              </a:ext>
+              <a:ext uri="{96DAC541-7B7A-43D3-8B79-37D633B846F1}">
+                <asvg:svgBlip xmlns:asvg="http://schemas.microsoft.com/office/drawing/2016/SVG/main" r:embed="rId13"/>
+              </a:ext>
+            </a:extLst>
+          </a:blip>
+          <a:stretch>
+            <a:fillRect/>
+          </a:stretch>
+        </p:blipFill>
+        <p:spPr>
+          <a:xfrm>
+            <a:off x="-657503" y="0"/>
+            <a:ext cx="4394477" cy="3299436"/>
+          </a:xfrm>
+          <a:prstGeom prst="rect">
+            <a:avLst/>
+          </a:prstGeom>
+        </p:spPr>
+      </p:pic>
     </p:spTree>
     <p:extLst>
       <p:ext uri="{BB962C8B-B14F-4D97-AF65-F5344CB8AC3E}">
-        <p14:creationId xmlns:p14="http://schemas.microsoft.com/office/powerpoint/2010/main" val="3620443842"/>
+        <p14:creationId xmlns:p14="http://schemas.microsoft.com/office/powerpoint/2010/main" val="2692764115"/>
       </p:ext>
     </p:extLst>
   </p:cSld>
@@ -9419,4 +11651,299 @@
     </a:ext>
   </a:extLst>
 </a:theme>
+</file>
+
+<file path=ppt/theme/theme2.xml><?xml version="1.0" encoding="utf-8"?>
+<a:theme xmlns:a="http://schemas.openxmlformats.org/drawingml/2006/main" name="Office Theme">
+  <a:themeElements>
+    <a:clrScheme name="Office">
+      <a:dk1>
+        <a:sysClr val="windowText" lastClr="000000"/>
+      </a:dk1>
+      <a:lt1>
+        <a:sysClr val="window" lastClr="FFFFFF"/>
+      </a:lt1>
+      <a:dk2>
+        <a:srgbClr val="44546A"/>
+      </a:dk2>
+      <a:lt2>
+        <a:srgbClr val="E7E6E6"/>
+      </a:lt2>
+      <a:accent1>
+        <a:srgbClr val="4472C4"/>
+      </a:accent1>
+      <a:accent2>
+        <a:srgbClr val="ED7D31"/>
+      </a:accent2>
+      <a:accent3>
+        <a:srgbClr val="A5A5A5"/>
+      </a:accent3>
+      <a:accent4>
+        <a:srgbClr val="FFC000"/>
+      </a:accent4>
+      <a:accent5>
+        <a:srgbClr val="5B9BD5"/>
+      </a:accent5>
+      <a:accent6>
+        <a:srgbClr val="70AD47"/>
+      </a:accent6>
+      <a:hlink>
+        <a:srgbClr val="0563C1"/>
+      </a:hlink>
+      <a:folHlink>
+        <a:srgbClr val="954F72"/>
+      </a:folHlink>
+    </a:clrScheme>
+    <a:fontScheme name="Office">
+      <a:majorFont>
+        <a:latin typeface="Calibri Light" panose="020F0302020204030204"/>
+        <a:ea typeface=""/>
+        <a:cs typeface=""/>
+        <a:font script="Jpan" typeface="游ゴシック Light"/>
+        <a:font script="Hang" typeface="맑은 고딕"/>
+        <a:font script="Hans" typeface="等线 Light"/>
+        <a:font script="Hant" typeface="新細明體"/>
+        <a:font script="Arab" typeface="Times New Roman"/>
+        <a:font script="Hebr" typeface="Times New Roman"/>
+        <a:font script="Thai" typeface="Angsana New"/>
+        <a:font script="Ethi" typeface="Nyala"/>
+        <a:font script="Beng" typeface="Vrinda"/>
+        <a:font script="Gujr" typeface="Shruti"/>
+        <a:font script="Khmr" typeface="MoolBoran"/>
+        <a:font script="Knda" typeface="Tunga"/>
+        <a:font script="Guru" typeface="Raavi"/>
+        <a:font script="Cans" typeface="Euphemia"/>
+        <a:font script="Cher" typeface="Plantagenet Cherokee"/>
+        <a:font script="Yiii" typeface="Microsoft Yi Baiti"/>
+        <a:font script="Tibt" typeface="Microsoft Himalaya"/>
+        <a:font script="Thaa" typeface="MV Boli"/>
+        <a:font script="Deva" typeface="Mangal"/>
+        <a:font script="Telu" typeface="Gautami"/>
+        <a:font script="Taml" typeface="Latha"/>
+        <a:font script="Syrc" typeface="Estrangelo Edessa"/>
+        <a:font script="Orya" typeface="Kalinga"/>
+        <a:font script="Mlym" typeface="Kartika"/>
+        <a:font script="Laoo" typeface="DokChampa"/>
+        <a:font script="Sinh" typeface="Iskoola Pota"/>
+        <a:font script="Mong" typeface="Mongolian Baiti"/>
+        <a:font script="Viet" typeface="Times New Roman"/>
+        <a:font script="Uigh" typeface="Microsoft Uighur"/>
+        <a:font script="Geor" typeface="Sylfaen"/>
+        <a:font script="Armn" typeface="Arial"/>
+        <a:font script="Bugi" typeface="Leelawadee UI"/>
+        <a:font script="Bopo" typeface="Microsoft JhengHei"/>
+        <a:font script="Java" typeface="Javanese Text"/>
+        <a:font script="Lisu" typeface="Segoe UI"/>
+        <a:font script="Mymr" typeface="Myanmar Text"/>
+        <a:font script="Nkoo" typeface="Ebrima"/>
+        <a:font script="Olck" typeface="Nirmala UI"/>
+        <a:font script="Osma" typeface="Ebrima"/>
+        <a:font script="Phag" typeface="Phagspa"/>
+        <a:font script="Syrn" typeface="Estrangelo Edessa"/>
+        <a:font script="Syrj" typeface="Estrangelo Edessa"/>
+        <a:font script="Syre" typeface="Estrangelo Edessa"/>
+        <a:font script="Sora" typeface="Nirmala UI"/>
+        <a:font script="Tale" typeface="Microsoft Tai Le"/>
+        <a:font script="Talu" typeface="Microsoft New Tai Lue"/>
+        <a:font script="Tfng" typeface="Ebrima"/>
+      </a:majorFont>
+      <a:minorFont>
+        <a:latin typeface="Calibri" panose="020F0502020204030204"/>
+        <a:ea typeface=""/>
+        <a:cs typeface=""/>
+        <a:font script="Jpan" typeface="游ゴシック"/>
+        <a:font script="Hang" typeface="맑은 고딕"/>
+        <a:font script="Hans" typeface="等线"/>
+        <a:font script="Hant" typeface="新細明體"/>
+        <a:font script="Arab" typeface="Arial"/>
+        <a:font script="Hebr" typeface="Arial"/>
+        <a:font script="Thai" typeface="Cordia New"/>
+        <a:font script="Ethi" typeface="Nyala"/>
+        <a:font script="Beng" typeface="Vrinda"/>
+        <a:font script="Gujr" typeface="Shruti"/>
+        <a:font script="Khmr" typeface="DaunPenh"/>
+        <a:font script="Knda" typeface="Tunga"/>
+        <a:font script="Guru" typeface="Raavi"/>
+        <a:font script="Cans" typeface="Euphemia"/>
+        <a:font script="Cher" typeface="Plantagenet Cherokee"/>
+        <a:font script="Yiii" typeface="Microsoft Yi Baiti"/>
+        <a:font script="Tibt" typeface="Microsoft Himalaya"/>
+        <a:font script="Thaa" typeface="MV Boli"/>
+        <a:font script="Deva" typeface="Mangal"/>
+        <a:font script="Telu" typeface="Gautami"/>
+        <a:font script="Taml" typeface="Latha"/>
+        <a:font script="Syrc" typeface="Estrangelo Edessa"/>
+        <a:font script="Orya" typeface="Kalinga"/>
+        <a:font script="Mlym" typeface="Kartika"/>
+        <a:font script="Laoo" typeface="DokChampa"/>
+        <a:font script="Sinh" typeface="Iskoola Pota"/>
+        <a:font script="Mong" typeface="Mongolian Baiti"/>
+        <a:font script="Viet" typeface="Arial"/>
+        <a:font script="Uigh" typeface="Microsoft Uighur"/>
+        <a:font script="Geor" typeface="Sylfaen"/>
+        <a:font script="Armn" typeface="Arial"/>
+        <a:font script="Bugi" typeface="Leelawadee UI"/>
+        <a:font script="Bopo" typeface="Microsoft JhengHei"/>
+        <a:font script="Java" typeface="Javanese Text"/>
+        <a:font script="Lisu" typeface="Segoe UI"/>
+        <a:font script="Mymr" typeface="Myanmar Text"/>
+        <a:font script="Nkoo" typeface="Ebrima"/>
+        <a:font script="Olck" typeface="Nirmala UI"/>
+        <a:font script="Osma" typeface="Ebrima"/>
+        <a:font script="Phag" typeface="Phagspa"/>
+        <a:font script="Syrn" typeface="Estrangelo Edessa"/>
+        <a:font script="Syrj" typeface="Estrangelo Edessa"/>
+        <a:font script="Syre" typeface="Estrangelo Edessa"/>
+        <a:font script="Sora" typeface="Nirmala UI"/>
+        <a:font script="Tale" typeface="Microsoft Tai Le"/>
+        <a:font script="Talu" typeface="Microsoft New Tai Lue"/>
+        <a:font script="Tfng" typeface="Ebrima"/>
+      </a:minorFont>
+    </a:fontScheme>
+    <a:fmtScheme name="Office">
+      <a:fillStyleLst>
+        <a:solidFill>
+          <a:schemeClr val="phClr"/>
+        </a:solidFill>
+        <a:gradFill rotWithShape="1">
+          <a:gsLst>
+            <a:gs pos="0">
+              <a:schemeClr val="phClr">
+                <a:lumMod val="110000"/>
+                <a:satMod val="105000"/>
+                <a:tint val="67000"/>
+              </a:schemeClr>
+            </a:gs>
+            <a:gs pos="50000">
+              <a:schemeClr val="phClr">
+                <a:lumMod val="105000"/>
+                <a:satMod val="103000"/>
+                <a:tint val="73000"/>
+              </a:schemeClr>
+            </a:gs>
+            <a:gs pos="100000">
+              <a:schemeClr val="phClr">
+                <a:lumMod val="105000"/>
+                <a:satMod val="109000"/>
+                <a:tint val="81000"/>
+              </a:schemeClr>
+            </a:gs>
+          </a:gsLst>
+          <a:lin ang="5400000" scaled="0"/>
+        </a:gradFill>
+        <a:gradFill rotWithShape="1">
+          <a:gsLst>
+            <a:gs pos="0">
+              <a:schemeClr val="phClr">
+                <a:satMod val="103000"/>
+                <a:lumMod val="102000"/>
+                <a:tint val="94000"/>
+              </a:schemeClr>
+            </a:gs>
+            <a:gs pos="50000">
+              <a:schemeClr val="phClr">
+                <a:satMod val="110000"/>
+                <a:lumMod val="100000"/>
+                <a:shade val="100000"/>
+              </a:schemeClr>
+            </a:gs>
+            <a:gs pos="100000">
+              <a:schemeClr val="phClr">
+                <a:lumMod val="99000"/>
+                <a:satMod val="120000"/>
+                <a:shade val="78000"/>
+              </a:schemeClr>
+            </a:gs>
+          </a:gsLst>
+          <a:lin ang="5400000" scaled="0"/>
+        </a:gradFill>
+      </a:fillStyleLst>
+      <a:lnStyleLst>
+        <a:ln w="6350" cap="flat" cmpd="sng" algn="ctr">
+          <a:solidFill>
+            <a:schemeClr val="phClr"/>
+          </a:solidFill>
+          <a:prstDash val="solid"/>
+          <a:miter lim="800000"/>
+        </a:ln>
+        <a:ln w="12700" cap="flat" cmpd="sng" algn="ctr">
+          <a:solidFill>
+            <a:schemeClr val="phClr"/>
+          </a:solidFill>
+          <a:prstDash val="solid"/>
+          <a:miter lim="800000"/>
+        </a:ln>
+        <a:ln w="19050" cap="flat" cmpd="sng" algn="ctr">
+          <a:solidFill>
+            <a:schemeClr val="phClr"/>
+          </a:solidFill>
+          <a:prstDash val="solid"/>
+          <a:miter lim="800000"/>
+        </a:ln>
+      </a:lnStyleLst>
+      <a:effectStyleLst>
+        <a:effectStyle>
+          <a:effectLst/>
+        </a:effectStyle>
+        <a:effectStyle>
+          <a:effectLst/>
+        </a:effectStyle>
+        <a:effectStyle>
+          <a:effectLst>
+            <a:outerShdw blurRad="57150" dist="19050" dir="5400000" algn="ctr" rotWithShape="0">
+              <a:srgbClr val="000000">
+                <a:alpha val="63000"/>
+              </a:srgbClr>
+            </a:outerShdw>
+          </a:effectLst>
+        </a:effectStyle>
+      </a:effectStyleLst>
+      <a:bgFillStyleLst>
+        <a:solidFill>
+          <a:schemeClr val="phClr"/>
+        </a:solidFill>
+        <a:solidFill>
+          <a:schemeClr val="phClr">
+            <a:tint val="95000"/>
+            <a:satMod val="170000"/>
+          </a:schemeClr>
+        </a:solidFill>
+        <a:gradFill rotWithShape="1">
+          <a:gsLst>
+            <a:gs pos="0">
+              <a:schemeClr val="phClr">
+                <a:tint val="93000"/>
+                <a:satMod val="150000"/>
+                <a:shade val="98000"/>
+                <a:lumMod val="102000"/>
+              </a:schemeClr>
+            </a:gs>
+            <a:gs pos="50000">
+              <a:schemeClr val="phClr">
+                <a:tint val="98000"/>
+                <a:satMod val="130000"/>
+                <a:shade val="90000"/>
+                <a:lumMod val="103000"/>
+              </a:schemeClr>
+            </a:gs>
+            <a:gs pos="100000">
+              <a:schemeClr val="phClr">
+                <a:shade val="63000"/>
+                <a:satMod val="120000"/>
+              </a:schemeClr>
+            </a:gs>
+          </a:gsLst>
+          <a:lin ang="5400000" scaled="0"/>
+        </a:gradFill>
+      </a:bgFillStyleLst>
+    </a:fmtScheme>
+  </a:themeElements>
+  <a:objectDefaults/>
+  <a:extraClrSchemeLst/>
+  <a:extLst>
+    <a:ext uri="{05A4C25C-085E-4340-85A3-A5531E510DB2}">
+      <thm15:themeFamily xmlns:thm15="http://schemas.microsoft.com/office/thememl/2012/main" name="Office Theme" id="{62F939B6-93AF-4DB8-9C6B-D6C7DFDC589F}" vid="{4A3C46E8-61CC-4603-A589-7422A47A8E4A}"/>
+    </a:ext>
+  </a:extLst>
+</a:theme>
 </file>
--- a/assets/ppt/data_exploration.pptx
+++ b/assets/ppt/data_exploration.pptx
@@ -5,7 +5,7 @@
     <p:sldMasterId id="2147483648" r:id="rId1"/>
   </p:sldMasterIdLst>
   <p:notesMasterIdLst>
-    <p:notesMasterId r:id="rId27"/>
+    <p:notesMasterId r:id="rId30"/>
   </p:notesMasterIdLst>
   <p:sldIdLst>
     <p:sldId id="257" r:id="rId2"/>
@@ -21,18 +21,21 @@
     <p:sldId id="265" r:id="rId12"/>
     <p:sldId id="264" r:id="rId13"/>
     <p:sldId id="263" r:id="rId14"/>
-    <p:sldId id="259" r:id="rId15"/>
-    <p:sldId id="274" r:id="rId16"/>
-    <p:sldId id="275" r:id="rId17"/>
-    <p:sldId id="279" r:id="rId18"/>
-    <p:sldId id="278" r:id="rId19"/>
-    <p:sldId id="276" r:id="rId20"/>
-    <p:sldId id="277" r:id="rId21"/>
-    <p:sldId id="268" r:id="rId22"/>
-    <p:sldId id="269" r:id="rId23"/>
-    <p:sldId id="271" r:id="rId24"/>
-    <p:sldId id="272" r:id="rId25"/>
-    <p:sldId id="267" r:id="rId26"/>
+    <p:sldId id="282" r:id="rId15"/>
+    <p:sldId id="283" r:id="rId16"/>
+    <p:sldId id="284" r:id="rId17"/>
+    <p:sldId id="259" r:id="rId18"/>
+    <p:sldId id="274" r:id="rId19"/>
+    <p:sldId id="275" r:id="rId20"/>
+    <p:sldId id="279" r:id="rId21"/>
+    <p:sldId id="278" r:id="rId22"/>
+    <p:sldId id="276" r:id="rId23"/>
+    <p:sldId id="277" r:id="rId24"/>
+    <p:sldId id="268" r:id="rId25"/>
+    <p:sldId id="269" r:id="rId26"/>
+    <p:sldId id="271" r:id="rId27"/>
+    <p:sldId id="272" r:id="rId28"/>
+    <p:sldId id="267" r:id="rId29"/>
   </p:sldIdLst>
   <p:sldSz cx="12192000" cy="6858000"/>
   <p:notesSz cx="6858000" cy="9144000"/>
@@ -1033,7 +1036,7 @@
           <a:p>
             <a:fld id="{511A67EE-E303-4967-962F-9A28980F7F51}" type="datetimeFigureOut">
               <a:rPr lang="nl-NL" smtClean="0"/>
-              <a:t>26-8-2024</a:t>
+              <a:t>27-8-2024</a:t>
             </a:fld>
             <a:endParaRPr lang="nl-NL"/>
           </a:p>
@@ -1450,7 +1453,7 @@
           <a:p>
             <a:fld id="{FED566F3-1D76-4AEC-ABE9-AFABCF495913}" type="datetime1">
               <a:rPr lang="nl-NL" smtClean="0"/>
-              <a:t>26-8-2024</a:t>
+              <a:t>27-8-2024</a:t>
             </a:fld>
             <a:endParaRPr lang="nl-NL"/>
           </a:p>
@@ -1662,7 +1665,7 @@
           <a:p>
             <a:fld id="{BC7E55A1-B228-4CF1-BFC3-6AC3B8574AC2}" type="datetime1">
               <a:rPr lang="nl-NL" smtClean="0"/>
-              <a:t>26-8-2024</a:t>
+              <a:t>27-8-2024</a:t>
             </a:fld>
             <a:endParaRPr lang="nl-NL"/>
           </a:p>
@@ -1884,7 +1887,7 @@
           <a:p>
             <a:fld id="{31AEBC58-6519-439D-8982-F0178170B57B}" type="datetime1">
               <a:rPr lang="nl-NL" smtClean="0"/>
-              <a:t>26-8-2024</a:t>
+              <a:t>27-8-2024</a:t>
             </a:fld>
             <a:endParaRPr lang="nl-NL"/>
           </a:p>
@@ -2096,7 +2099,7 @@
           <a:p>
             <a:fld id="{86DED964-D172-498F-BB83-2F7DE2692B37}" type="datetime1">
               <a:rPr lang="nl-NL" smtClean="0"/>
-              <a:t>26-8-2024</a:t>
+              <a:t>27-8-2024</a:t>
             </a:fld>
             <a:endParaRPr lang="nl-NL"/>
           </a:p>
@@ -2384,7 +2387,7 @@
           <a:p>
             <a:fld id="{230F72AC-D91D-48F5-81B4-4889AEA39D06}" type="datetime1">
               <a:rPr lang="nl-NL" smtClean="0"/>
-              <a:t>26-8-2024</a:t>
+              <a:t>27-8-2024</a:t>
             </a:fld>
             <a:endParaRPr lang="nl-NL"/>
           </a:p>
@@ -2664,7 +2667,7 @@
           <a:p>
             <a:fld id="{A0669485-26A9-497C-AD22-BCEA88DF9055}" type="datetime1">
               <a:rPr lang="nl-NL" smtClean="0"/>
-              <a:t>26-8-2024</a:t>
+              <a:t>27-8-2024</a:t>
             </a:fld>
             <a:endParaRPr lang="nl-NL"/>
           </a:p>
@@ -3091,7 +3094,7 @@
           <a:p>
             <a:fld id="{6216D00C-0C62-40DF-B6FF-B9A70701552F}" type="datetime1">
               <a:rPr lang="nl-NL" smtClean="0"/>
-              <a:t>26-8-2024</a:t>
+              <a:t>27-8-2024</a:t>
             </a:fld>
             <a:endParaRPr lang="nl-NL"/>
           </a:p>
@@ -3245,7 +3248,7 @@
           <a:p>
             <a:fld id="{88FE9515-DD39-459B-B4EF-789D74C861A5}" type="datetime1">
               <a:rPr lang="nl-NL" smtClean="0"/>
-              <a:t>26-8-2024</a:t>
+              <a:t>27-8-2024</a:t>
             </a:fld>
             <a:endParaRPr lang="nl-NL"/>
           </a:p>
@@ -3370,7 +3373,7 @@
           <a:p>
             <a:fld id="{DFA27954-A76F-4E23-8576-A7D9667CDBCC}" type="datetime1">
               <a:rPr lang="nl-NL" smtClean="0"/>
-              <a:t>26-8-2024</a:t>
+              <a:t>27-8-2024</a:t>
             </a:fld>
             <a:endParaRPr lang="nl-NL"/>
           </a:p>
@@ -3695,7 +3698,7 @@
           <a:p>
             <a:fld id="{53C17D54-D850-41AA-94F6-0F7316E4F326}" type="datetime1">
               <a:rPr lang="nl-NL" smtClean="0"/>
-              <a:t>26-8-2024</a:t>
+              <a:t>27-8-2024</a:t>
             </a:fld>
             <a:endParaRPr lang="nl-NL"/>
           </a:p>
@@ -3996,7 +3999,7 @@
           <a:p>
             <a:fld id="{0596A96E-3739-43D3-93E5-DAA507EA7B79}" type="datetime1">
               <a:rPr lang="nl-NL" smtClean="0"/>
-              <a:t>26-8-2024</a:t>
+              <a:t>27-8-2024</a:t>
             </a:fld>
             <a:endParaRPr lang="nl-NL"/>
           </a:p>
@@ -4251,7 +4254,7 @@
           <a:p>
             <a:fld id="{CFBB0748-A22F-4137-ADB1-6D5A09F7B1DF}" type="datetime1">
               <a:rPr lang="nl-NL" smtClean="0"/>
-              <a:t>26-8-2024</a:t>
+              <a:t>27-8-2024</a:t>
             </a:fld>
             <a:endParaRPr lang="nl-NL"/>
           </a:p>
@@ -5450,6 +5453,386 @@
           <a:chExt cx="0" cy="0"/>
         </a:xfrm>
       </p:grpSpPr>
+      <p:pic>
+        <p:nvPicPr>
+          <p:cNvPr id="3" name="Picture 2">
+            <a:extLst>
+              <a:ext uri="{FF2B5EF4-FFF2-40B4-BE49-F238E27FC236}">
+                <a16:creationId xmlns:a16="http://schemas.microsoft.com/office/drawing/2014/main" id="{D9EDA138-723D-402C-81C9-FBE5F72D6622}"/>
+              </a:ext>
+            </a:extLst>
+          </p:cNvPr>
+          <p:cNvPicPr>
+            <a:picLocks noChangeAspect="1"/>
+          </p:cNvPicPr>
+          <p:nvPr/>
+        </p:nvPicPr>
+        <p:blipFill>
+          <a:blip r:embed="rId2">
+            <a:extLst>
+              <a:ext uri="{28A0092B-C50C-407E-A947-70E740481C1C}">
+                <a14:useLocalDpi xmlns:a14="http://schemas.microsoft.com/office/drawing/2010/main" val="0"/>
+              </a:ext>
+            </a:extLst>
+          </a:blip>
+          <a:stretch>
+            <a:fillRect/>
+          </a:stretch>
+        </p:blipFill>
+        <p:spPr>
+          <a:xfrm>
+            <a:off x="0" y="509869"/>
+            <a:ext cx="12192000" cy="6110978"/>
+          </a:xfrm>
+          <a:prstGeom prst="rect">
+            <a:avLst/>
+          </a:prstGeom>
+        </p:spPr>
+      </p:pic>
+      <p:sp>
+        <p:nvSpPr>
+          <p:cNvPr id="4" name="TextBox 3">
+            <a:extLst>
+              <a:ext uri="{FF2B5EF4-FFF2-40B4-BE49-F238E27FC236}">
+                <a16:creationId xmlns:a16="http://schemas.microsoft.com/office/drawing/2014/main" id="{C89BEB55-6184-4AF3-A7C2-E99DE34DA79B}"/>
+              </a:ext>
+            </a:extLst>
+          </p:cNvPr>
+          <p:cNvSpPr txBox="1"/>
+          <p:nvPr/>
+        </p:nvSpPr>
+        <p:spPr>
+          <a:xfrm>
+            <a:off x="0" y="0"/>
+            <a:ext cx="4708358" cy="369332"/>
+          </a:xfrm>
+          <a:prstGeom prst="rect">
+            <a:avLst/>
+          </a:prstGeom>
+          <a:noFill/>
+        </p:spPr>
+        <p:txBody>
+          <a:bodyPr wrap="square" rtlCol="0">
+            <a:spAutoFit/>
+          </a:bodyPr>
+          <a:lstStyle/>
+          <a:p>
+            <a:r>
+              <a:rPr lang="it-IT" u="sng" dirty="0"/>
+              <a:t>After Imputation Chemical Subs distributions</a:t>
+            </a:r>
+            <a:endParaRPr lang="nl-NL" u="sng" dirty="0"/>
+          </a:p>
+        </p:txBody>
+      </p:sp>
+    </p:spTree>
+    <p:extLst>
+      <p:ext uri="{BB962C8B-B14F-4D97-AF65-F5344CB8AC3E}">
+        <p14:creationId xmlns:p14="http://schemas.microsoft.com/office/powerpoint/2010/main" val="1817773863"/>
+      </p:ext>
+    </p:extLst>
+  </p:cSld>
+  <p:clrMapOvr>
+    <a:masterClrMapping/>
+  </p:clrMapOvr>
+  <mc:AlternateContent xmlns:mc="http://schemas.openxmlformats.org/markup-compatibility/2006" xmlns:p159="http://schemas.microsoft.com/office/powerpoint/2015/09/main">
+    <mc:Choice Requires="p159">
+      <p:transition xmlns:p14="http://schemas.microsoft.com/office/powerpoint/2010/main" spd="slow" p14:dur="2000">
+        <p159:morph option="byObject"/>
+      </p:transition>
+    </mc:Choice>
+    <mc:Fallback xmlns="">
+      <p:transition spd="slow">
+        <p:fade/>
+      </p:transition>
+    </mc:Fallback>
+  </mc:AlternateContent>
+</p:sld>
+</file>
+
+<file path=ppt/slides/slide15.xml><?xml version="1.0" encoding="utf-8"?>
+<p:sld xmlns:a="http://schemas.openxmlformats.org/drawingml/2006/main" xmlns:r="http://schemas.openxmlformats.org/officeDocument/2006/relationships" xmlns:p="http://schemas.openxmlformats.org/presentationml/2006/main">
+  <p:cSld>
+    <p:spTree>
+      <p:nvGrpSpPr>
+        <p:cNvPr id="1" name=""/>
+        <p:cNvGrpSpPr/>
+        <p:nvPr/>
+      </p:nvGrpSpPr>
+      <p:grpSpPr>
+        <a:xfrm>
+          <a:off x="0" y="0"/>
+          <a:ext cx="0" cy="0"/>
+          <a:chOff x="0" y="0"/>
+          <a:chExt cx="0" cy="0"/>
+        </a:xfrm>
+      </p:grpSpPr>
+      <p:pic>
+        <p:nvPicPr>
+          <p:cNvPr id="3" name="Picture 2">
+            <a:extLst>
+              <a:ext uri="{FF2B5EF4-FFF2-40B4-BE49-F238E27FC236}">
+                <a16:creationId xmlns:a16="http://schemas.microsoft.com/office/drawing/2014/main" id="{0C597A2D-637D-4700-8FE8-8DCBE5A562CE}"/>
+              </a:ext>
+            </a:extLst>
+          </p:cNvPr>
+          <p:cNvPicPr>
+            <a:picLocks noChangeAspect="1"/>
+          </p:cNvPicPr>
+          <p:nvPr/>
+        </p:nvPicPr>
+        <p:blipFill>
+          <a:blip r:embed="rId2">
+            <a:extLst>
+              <a:ext uri="{28A0092B-C50C-407E-A947-70E740481C1C}">
+                <a14:useLocalDpi xmlns:a14="http://schemas.microsoft.com/office/drawing/2010/main" val="0"/>
+              </a:ext>
+            </a:extLst>
+          </a:blip>
+          <a:stretch>
+            <a:fillRect/>
+          </a:stretch>
+        </p:blipFill>
+        <p:spPr>
+          <a:xfrm>
+            <a:off x="0" y="1109671"/>
+            <a:ext cx="12192000" cy="2132828"/>
+          </a:xfrm>
+          <a:prstGeom prst="rect">
+            <a:avLst/>
+          </a:prstGeom>
+        </p:spPr>
+      </p:pic>
+      <p:pic>
+        <p:nvPicPr>
+          <p:cNvPr id="5" name="Picture 4">
+            <a:extLst>
+              <a:ext uri="{FF2B5EF4-FFF2-40B4-BE49-F238E27FC236}">
+                <a16:creationId xmlns:a16="http://schemas.microsoft.com/office/drawing/2014/main" id="{D14A686D-085E-4768-98CF-61F1F9D8071A}"/>
+              </a:ext>
+            </a:extLst>
+          </p:cNvPr>
+          <p:cNvPicPr>
+            <a:picLocks noChangeAspect="1"/>
+          </p:cNvPicPr>
+          <p:nvPr/>
+        </p:nvPicPr>
+        <p:blipFill>
+          <a:blip r:embed="rId3">
+            <a:extLst>
+              <a:ext uri="{28A0092B-C50C-407E-A947-70E740481C1C}">
+                <a14:useLocalDpi xmlns:a14="http://schemas.microsoft.com/office/drawing/2010/main" val="0"/>
+              </a:ext>
+            </a:extLst>
+          </a:blip>
+          <a:stretch>
+            <a:fillRect/>
+          </a:stretch>
+        </p:blipFill>
+        <p:spPr>
+          <a:xfrm>
+            <a:off x="0" y="4231492"/>
+            <a:ext cx="12192000" cy="2132828"/>
+          </a:xfrm>
+          <a:prstGeom prst="rect">
+            <a:avLst/>
+          </a:prstGeom>
+        </p:spPr>
+      </p:pic>
+      <p:sp>
+        <p:nvSpPr>
+          <p:cNvPr id="6" name="TextBox 5">
+            <a:extLst>
+              <a:ext uri="{FF2B5EF4-FFF2-40B4-BE49-F238E27FC236}">
+                <a16:creationId xmlns:a16="http://schemas.microsoft.com/office/drawing/2014/main" id="{82F73233-438F-4E0E-9D21-5EF1E8E223FC}"/>
+              </a:ext>
+            </a:extLst>
+          </p:cNvPr>
+          <p:cNvSpPr txBox="1"/>
+          <p:nvPr/>
+        </p:nvSpPr>
+        <p:spPr>
+          <a:xfrm>
+            <a:off x="0" y="0"/>
+            <a:ext cx="3400926" cy="369332"/>
+          </a:xfrm>
+          <a:prstGeom prst="rect">
+            <a:avLst/>
+          </a:prstGeom>
+          <a:noFill/>
+        </p:spPr>
+        <p:txBody>
+          <a:bodyPr wrap="square" rtlCol="0">
+            <a:spAutoFit/>
+          </a:bodyPr>
+          <a:lstStyle/>
+          <a:p>
+            <a:r>
+              <a:rPr lang="it-IT" dirty="0"/>
+              <a:t>Kreatinine Data over time</a:t>
+            </a:r>
+            <a:endParaRPr lang="nl-NL" dirty="0"/>
+          </a:p>
+        </p:txBody>
+      </p:sp>
+      <p:sp>
+        <p:nvSpPr>
+          <p:cNvPr id="7" name="TextBox 6">
+            <a:extLst>
+              <a:ext uri="{FF2B5EF4-FFF2-40B4-BE49-F238E27FC236}">
+                <a16:creationId xmlns:a16="http://schemas.microsoft.com/office/drawing/2014/main" id="{44205ADD-760A-43D7-9E5C-1CA26946C863}"/>
+              </a:ext>
+            </a:extLst>
+          </p:cNvPr>
+          <p:cNvSpPr txBox="1"/>
+          <p:nvPr/>
+        </p:nvSpPr>
+        <p:spPr>
+          <a:xfrm>
+            <a:off x="4395537" y="742333"/>
+            <a:ext cx="3400926" cy="369332"/>
+          </a:xfrm>
+          <a:prstGeom prst="rect">
+            <a:avLst/>
+          </a:prstGeom>
+          <a:noFill/>
+        </p:spPr>
+        <p:txBody>
+          <a:bodyPr wrap="square" rtlCol="0">
+            <a:spAutoFit/>
+          </a:bodyPr>
+          <a:lstStyle/>
+          <a:p>
+            <a:pPr algn="ctr"/>
+            <a:r>
+              <a:rPr lang="it-IT" dirty="0"/>
+              <a:t>Kreatinine Registered</a:t>
+            </a:r>
+            <a:endParaRPr lang="nl-NL" dirty="0"/>
+          </a:p>
+        </p:txBody>
+      </p:sp>
+      <p:sp>
+        <p:nvSpPr>
+          <p:cNvPr id="8" name="TextBox 7">
+            <a:extLst>
+              <a:ext uri="{FF2B5EF4-FFF2-40B4-BE49-F238E27FC236}">
+                <a16:creationId xmlns:a16="http://schemas.microsoft.com/office/drawing/2014/main" id="{A39CDD73-B873-496C-A709-535F4F828307}"/>
+              </a:ext>
+            </a:extLst>
+          </p:cNvPr>
+          <p:cNvSpPr txBox="1"/>
+          <p:nvPr/>
+        </p:nvSpPr>
+        <p:spPr>
+          <a:xfrm>
+            <a:off x="4395537" y="3798172"/>
+            <a:ext cx="3400926" cy="369332"/>
+          </a:xfrm>
+          <a:prstGeom prst="rect">
+            <a:avLst/>
+          </a:prstGeom>
+          <a:noFill/>
+        </p:spPr>
+        <p:txBody>
+          <a:bodyPr wrap="square" rtlCol="0">
+            <a:spAutoFit/>
+          </a:bodyPr>
+          <a:lstStyle/>
+          <a:p>
+            <a:pPr algn="ctr"/>
+            <a:r>
+              <a:rPr lang="it-IT" dirty="0"/>
+              <a:t>Kreatinine Registered + Imputed</a:t>
+            </a:r>
+            <a:endParaRPr lang="nl-NL" dirty="0"/>
+          </a:p>
+        </p:txBody>
+      </p:sp>
+    </p:spTree>
+    <p:extLst>
+      <p:ext uri="{BB962C8B-B14F-4D97-AF65-F5344CB8AC3E}">
+        <p14:creationId xmlns:p14="http://schemas.microsoft.com/office/powerpoint/2010/main" val="3977303332"/>
+      </p:ext>
+    </p:extLst>
+  </p:cSld>
+  <p:clrMapOvr>
+    <a:masterClrMapping/>
+  </p:clrMapOvr>
+  <mc:AlternateContent xmlns:mc="http://schemas.openxmlformats.org/markup-compatibility/2006" xmlns:p159="http://schemas.microsoft.com/office/powerpoint/2015/09/main">
+    <mc:Choice Requires="p159">
+      <p:transition xmlns:p14="http://schemas.microsoft.com/office/powerpoint/2010/main" spd="slow" p14:dur="2000">
+        <p159:morph option="byObject"/>
+      </p:transition>
+    </mc:Choice>
+    <mc:Fallback xmlns="">
+      <p:transition spd="slow">
+        <p:fade/>
+      </p:transition>
+    </mc:Fallback>
+  </mc:AlternateContent>
+</p:sld>
+</file>
+
+<file path=ppt/slides/slide16.xml><?xml version="1.0" encoding="utf-8"?>
+<p:sld xmlns:a="http://schemas.openxmlformats.org/drawingml/2006/main" xmlns:r="http://schemas.openxmlformats.org/officeDocument/2006/relationships" xmlns:p="http://schemas.openxmlformats.org/presentationml/2006/main">
+  <p:cSld>
+    <p:spTree>
+      <p:nvGrpSpPr>
+        <p:cNvPr id="1" name=""/>
+        <p:cNvGrpSpPr/>
+        <p:nvPr/>
+      </p:nvGrpSpPr>
+      <p:grpSpPr>
+        <a:xfrm>
+          <a:off x="0" y="0"/>
+          <a:ext cx="0" cy="0"/>
+          <a:chOff x="0" y="0"/>
+          <a:chExt cx="0" cy="0"/>
+        </a:xfrm>
+      </p:grpSpPr>
+    </p:spTree>
+    <p:extLst>
+      <p:ext uri="{BB962C8B-B14F-4D97-AF65-F5344CB8AC3E}">
+        <p14:creationId xmlns:p14="http://schemas.microsoft.com/office/powerpoint/2010/main" val="3596063474"/>
+      </p:ext>
+    </p:extLst>
+  </p:cSld>
+  <p:clrMapOvr>
+    <a:masterClrMapping/>
+  </p:clrMapOvr>
+  <mc:AlternateContent xmlns:mc="http://schemas.openxmlformats.org/markup-compatibility/2006" xmlns:p159="http://schemas.microsoft.com/office/powerpoint/2015/09/main">
+    <mc:Choice Requires="p159">
+      <p:transition xmlns:p14="http://schemas.microsoft.com/office/powerpoint/2010/main" spd="slow" p14:dur="2000">
+        <p159:morph option="byObject"/>
+      </p:transition>
+    </mc:Choice>
+    <mc:Fallback xmlns="">
+      <p:transition spd="slow">
+        <p:fade/>
+      </p:transition>
+    </mc:Fallback>
+  </mc:AlternateContent>
+</p:sld>
+</file>
+
+<file path=ppt/slides/slide17.xml><?xml version="1.0" encoding="utf-8"?>
+<p:sld xmlns:a="http://schemas.openxmlformats.org/drawingml/2006/main" xmlns:r="http://schemas.openxmlformats.org/officeDocument/2006/relationships" xmlns:p="http://schemas.openxmlformats.org/presentationml/2006/main">
+  <p:cSld>
+    <p:spTree>
+      <p:nvGrpSpPr>
+        <p:cNvPr id="1" name=""/>
+        <p:cNvGrpSpPr/>
+        <p:nvPr/>
+      </p:nvGrpSpPr>
+      <p:grpSpPr>
+        <a:xfrm>
+          <a:off x="0" y="0"/>
+          <a:ext cx="0" cy="0"/>
+          <a:chOff x="0" y="0"/>
+          <a:chExt cx="0" cy="0"/>
+        </a:xfrm>
+      </p:grpSpPr>
       <p:sp>
         <p:nvSpPr>
           <p:cNvPr id="2" name="Title 1">
@@ -5504,7 +5887,7 @@
 </p:sld>
 </file>
 
-<file path=ppt/slides/slide15.xml><?xml version="1.0" encoding="utf-8"?>
+<file path=ppt/slides/slide18.xml><?xml version="1.0" encoding="utf-8"?>
 <p:sld xmlns:a="http://schemas.openxmlformats.org/drawingml/2006/main" xmlns:r="http://schemas.openxmlformats.org/officeDocument/2006/relationships" xmlns:p="http://schemas.openxmlformats.org/presentationml/2006/main">
   <p:cSld>
     <p:spTree>
@@ -5546,7 +5929,7 @@
 </p:sld>
 </file>
 
-<file path=ppt/slides/slide16.xml><?xml version="1.0" encoding="utf-8"?>
+<file path=ppt/slides/slide19.xml><?xml version="1.0" encoding="utf-8"?>
 <p:sld xmlns:a="http://schemas.openxmlformats.org/drawingml/2006/main" xmlns:r="http://schemas.openxmlformats.org/officeDocument/2006/relationships" xmlns:p="http://schemas.openxmlformats.org/presentationml/2006/main">
   <p:cSld>
     <p:spTree>
@@ -5621,1069 +6004,6 @@
     <p:extLst>
       <p:ext uri="{BB962C8B-B14F-4D97-AF65-F5344CB8AC3E}">
         <p14:creationId xmlns:p14="http://schemas.microsoft.com/office/powerpoint/2010/main" val="1644673165"/>
-      </p:ext>
-    </p:extLst>
-  </p:cSld>
-  <p:clrMapOvr>
-    <a:masterClrMapping/>
-  </p:clrMapOvr>
-  <mc:AlternateContent xmlns:mc="http://schemas.openxmlformats.org/markup-compatibility/2006" xmlns:p159="http://schemas.microsoft.com/office/powerpoint/2015/09/main">
-    <mc:Choice Requires="p159">
-      <p:transition xmlns:p14="http://schemas.microsoft.com/office/powerpoint/2010/main" spd="slow" p14:dur="2000">
-        <p159:morph option="byObject"/>
-      </p:transition>
-    </mc:Choice>
-    <mc:Fallback xmlns="">
-      <p:transition spd="slow">
-        <p:fade/>
-      </p:transition>
-    </mc:Fallback>
-  </mc:AlternateContent>
-</p:sld>
-</file>
-
-<file path=ppt/slides/slide17.xml><?xml version="1.0" encoding="utf-8"?>
-<p:sld xmlns:a="http://schemas.openxmlformats.org/drawingml/2006/main" xmlns:r="http://schemas.openxmlformats.org/officeDocument/2006/relationships" xmlns:p="http://schemas.openxmlformats.org/presentationml/2006/main">
-  <p:cSld>
-    <p:spTree>
-      <p:nvGrpSpPr>
-        <p:cNvPr id="1" name=""/>
-        <p:cNvGrpSpPr/>
-        <p:nvPr/>
-      </p:nvGrpSpPr>
-      <p:grpSpPr>
-        <a:xfrm>
-          <a:off x="0" y="0"/>
-          <a:ext cx="0" cy="0"/>
-          <a:chOff x="0" y="0"/>
-          <a:chExt cx="0" cy="0"/>
-        </a:xfrm>
-      </p:grpSpPr>
-    </p:spTree>
-    <p:extLst>
-      <p:ext uri="{BB962C8B-B14F-4D97-AF65-F5344CB8AC3E}">
-        <p14:creationId xmlns:p14="http://schemas.microsoft.com/office/powerpoint/2010/main" val="2416861179"/>
-      </p:ext>
-    </p:extLst>
-  </p:cSld>
-  <p:clrMapOvr>
-    <a:masterClrMapping/>
-  </p:clrMapOvr>
-  <mc:AlternateContent xmlns:mc="http://schemas.openxmlformats.org/markup-compatibility/2006" xmlns:p159="http://schemas.microsoft.com/office/powerpoint/2015/09/main">
-    <mc:Choice Requires="p159">
-      <p:transition xmlns:p14="http://schemas.microsoft.com/office/powerpoint/2010/main" spd="slow" p14:dur="2000">
-        <p159:morph option="byObject"/>
-      </p:transition>
-    </mc:Choice>
-    <mc:Fallback xmlns="">
-      <p:transition spd="slow">
-        <p:fade/>
-      </p:transition>
-    </mc:Fallback>
-  </mc:AlternateContent>
-</p:sld>
-</file>
-
-<file path=ppt/slides/slide18.xml><?xml version="1.0" encoding="utf-8"?>
-<p:sld xmlns:a="http://schemas.openxmlformats.org/drawingml/2006/main" xmlns:r="http://schemas.openxmlformats.org/officeDocument/2006/relationships" xmlns:p="http://schemas.openxmlformats.org/presentationml/2006/main">
-  <p:cSld>
-    <p:spTree>
-      <p:nvGrpSpPr>
-        <p:cNvPr id="1" name=""/>
-        <p:cNvGrpSpPr/>
-        <p:nvPr/>
-      </p:nvGrpSpPr>
-      <p:grpSpPr>
-        <a:xfrm>
-          <a:off x="0" y="0"/>
-          <a:ext cx="0" cy="0"/>
-          <a:chOff x="0" y="0"/>
-          <a:chExt cx="0" cy="0"/>
-        </a:xfrm>
-      </p:grpSpPr>
-      <p:sp>
-        <p:nvSpPr>
-          <p:cNvPr id="2" name="Title 1">
-            <a:extLst>
-              <a:ext uri="{FF2B5EF4-FFF2-40B4-BE49-F238E27FC236}">
-                <a16:creationId xmlns:a16="http://schemas.microsoft.com/office/drawing/2014/main" id="{6D37F963-7349-4DE3-A960-EEBD333A4E61}"/>
-              </a:ext>
-            </a:extLst>
-          </p:cNvPr>
-          <p:cNvSpPr txBox="1">
-            <a:spLocks/>
-          </p:cNvSpPr>
-          <p:nvPr/>
-        </p:nvSpPr>
-        <p:spPr>
-          <a:xfrm>
-            <a:off x="1524000" y="2235200"/>
-            <a:ext cx="9144000" cy="2387600"/>
-          </a:xfrm>
-          <a:prstGeom prst="rect">
-            <a:avLst/>
-          </a:prstGeom>
-        </p:spPr>
-        <p:txBody>
-          <a:bodyPr anchor="ctr"/>
-          <a:lstStyle>
-            <a:lvl1pPr algn="l" defTabSz="914400" rtl="0" eaLnBrk="1" latinLnBrk="0" hangingPunct="1">
-              <a:lnSpc>
-                <a:spcPct val="90000"/>
-              </a:lnSpc>
-              <a:spcBef>
-                <a:spcPct val="0"/>
-              </a:spcBef>
-              <a:buNone/>
-              <a:defRPr sz="4400" kern="1200">
-                <a:solidFill>
-                  <a:schemeClr val="tx1"/>
-                </a:solidFill>
-                <a:latin typeface="+mj-lt"/>
-                <a:ea typeface="+mj-ea"/>
-                <a:cs typeface="+mj-cs"/>
-              </a:defRPr>
-            </a:lvl1pPr>
-          </a:lstStyle>
-          <a:p>
-            <a:pPr algn="ctr"/>
-            <a:r>
-              <a:rPr lang="it-IT" dirty="0"/>
-              <a:t>Blood Pressure Readings</a:t>
-            </a:r>
-            <a:endParaRPr lang="nl-NL" dirty="0"/>
-          </a:p>
-        </p:txBody>
-      </p:sp>
-    </p:spTree>
-    <p:extLst>
-      <p:ext uri="{BB962C8B-B14F-4D97-AF65-F5344CB8AC3E}">
-        <p14:creationId xmlns:p14="http://schemas.microsoft.com/office/powerpoint/2010/main" val="603692568"/>
-      </p:ext>
-    </p:extLst>
-  </p:cSld>
-  <p:clrMapOvr>
-    <a:masterClrMapping/>
-  </p:clrMapOvr>
-  <mc:AlternateContent xmlns:mc="http://schemas.openxmlformats.org/markup-compatibility/2006" xmlns:p159="http://schemas.microsoft.com/office/powerpoint/2015/09/main">
-    <mc:Choice Requires="p159">
-      <p:transition xmlns:p14="http://schemas.microsoft.com/office/powerpoint/2010/main" spd="slow" p14:dur="2000">
-        <p159:morph option="byObject"/>
-      </p:transition>
-    </mc:Choice>
-    <mc:Fallback xmlns="">
-      <p:transition spd="slow">
-        <p:fade/>
-      </p:transition>
-    </mc:Fallback>
-  </mc:AlternateContent>
-</p:sld>
-</file>
-
-<file path=ppt/slides/slide19.xml><?xml version="1.0" encoding="utf-8"?>
-<p:sld xmlns:a="http://schemas.openxmlformats.org/drawingml/2006/main" xmlns:r="http://schemas.openxmlformats.org/officeDocument/2006/relationships" xmlns:p="http://schemas.openxmlformats.org/presentationml/2006/main">
-  <p:cSld>
-    <p:spTree>
-      <p:nvGrpSpPr>
-        <p:cNvPr id="1" name=""/>
-        <p:cNvGrpSpPr/>
-        <p:nvPr/>
-      </p:nvGrpSpPr>
-      <p:grpSpPr>
-        <a:xfrm>
-          <a:off x="0" y="0"/>
-          <a:ext cx="0" cy="0"/>
-          <a:chOff x="0" y="0"/>
-          <a:chExt cx="0" cy="0"/>
-        </a:xfrm>
-      </p:grpSpPr>
-      <p:sp>
-        <p:nvSpPr>
-          <p:cNvPr id="2" name="TextBox 1">
-            <a:extLst>
-              <a:ext uri="{FF2B5EF4-FFF2-40B4-BE49-F238E27FC236}">
-                <a16:creationId xmlns:a16="http://schemas.microsoft.com/office/drawing/2014/main" id="{CC0200F0-ABFF-45F8-A6F5-9F8372AE5C7D}"/>
-              </a:ext>
-            </a:extLst>
-          </p:cNvPr>
-          <p:cNvSpPr txBox="1"/>
-          <p:nvPr/>
-        </p:nvSpPr>
-        <p:spPr>
-          <a:xfrm>
-            <a:off x="0" y="0"/>
-            <a:ext cx="4395537" cy="369332"/>
-          </a:xfrm>
-          <a:prstGeom prst="rect">
-            <a:avLst/>
-          </a:prstGeom>
-          <a:noFill/>
-        </p:spPr>
-        <p:txBody>
-          <a:bodyPr wrap="square" rtlCol="0">
-            <a:spAutoFit/>
-          </a:bodyPr>
-          <a:lstStyle/>
-          <a:p>
-            <a:r>
-              <a:rPr lang="it-IT" u="sng" dirty="0"/>
-              <a:t>Blood Pressure Measurements - Outliers</a:t>
-            </a:r>
-            <a:endParaRPr lang="nl-NL" u="sng" dirty="0"/>
-          </a:p>
-        </p:txBody>
-      </p:sp>
-      <p:pic>
-        <p:nvPicPr>
-          <p:cNvPr id="4" name="Picture 3">
-            <a:extLst>
-              <a:ext uri="{FF2B5EF4-FFF2-40B4-BE49-F238E27FC236}">
-                <a16:creationId xmlns:a16="http://schemas.microsoft.com/office/drawing/2014/main" id="{B141D145-8AC1-45C7-8D61-50D4BD1CC9DF}"/>
-              </a:ext>
-            </a:extLst>
-          </p:cNvPr>
-          <p:cNvPicPr>
-            <a:picLocks noChangeAspect="1"/>
-          </p:cNvPicPr>
-          <p:nvPr/>
-        </p:nvPicPr>
-        <p:blipFill>
-          <a:blip r:embed="rId2">
-            <a:extLst>
-              <a:ext uri="{28A0092B-C50C-407E-A947-70E740481C1C}">
-                <a14:useLocalDpi xmlns:a14="http://schemas.microsoft.com/office/drawing/2010/main" val="0"/>
-              </a:ext>
-            </a:extLst>
-          </a:blip>
-          <a:stretch>
-            <a:fillRect/>
-          </a:stretch>
-        </p:blipFill>
-        <p:spPr>
-          <a:xfrm>
-            <a:off x="6186458" y="1957137"/>
-            <a:ext cx="6005542" cy="3649580"/>
-          </a:xfrm>
-          <a:prstGeom prst="rect">
-            <a:avLst/>
-          </a:prstGeom>
-        </p:spPr>
-      </p:pic>
-      <p:pic>
-        <p:nvPicPr>
-          <p:cNvPr id="8" name="Picture 7">
-            <a:extLst>
-              <a:ext uri="{FF2B5EF4-FFF2-40B4-BE49-F238E27FC236}">
-                <a16:creationId xmlns:a16="http://schemas.microsoft.com/office/drawing/2014/main" id="{B78D7C7E-C973-4558-835C-AE7A82ECC7EF}"/>
-              </a:ext>
-            </a:extLst>
-          </p:cNvPr>
-          <p:cNvPicPr>
-            <a:picLocks noChangeAspect="1"/>
-          </p:cNvPicPr>
-          <p:nvPr/>
-        </p:nvPicPr>
-        <p:blipFill>
-          <a:blip r:embed="rId3">
-            <a:extLst>
-              <a:ext uri="{28A0092B-C50C-407E-A947-70E740481C1C}">
-                <a14:useLocalDpi xmlns:a14="http://schemas.microsoft.com/office/drawing/2010/main" val="0"/>
-              </a:ext>
-            </a:extLst>
-          </a:blip>
-          <a:stretch>
-            <a:fillRect/>
-          </a:stretch>
-        </p:blipFill>
-        <p:spPr>
-          <a:xfrm>
-            <a:off x="14258" y="1957137"/>
-            <a:ext cx="6005542" cy="3649580"/>
-          </a:xfrm>
-          <a:prstGeom prst="rect">
-            <a:avLst/>
-          </a:prstGeom>
-        </p:spPr>
-      </p:pic>
-      <p:cxnSp>
-        <p:nvCxnSpPr>
-          <p:cNvPr id="10" name="Straight Arrow Connector 9">
-            <a:extLst>
-              <a:ext uri="{FF2B5EF4-FFF2-40B4-BE49-F238E27FC236}">
-                <a16:creationId xmlns:a16="http://schemas.microsoft.com/office/drawing/2014/main" id="{D2D21716-6BD7-4A50-9558-0D0C13985C2D}"/>
-              </a:ext>
-            </a:extLst>
-          </p:cNvPr>
-          <p:cNvCxnSpPr>
-            <a:cxnSpLocks/>
-            <a:stCxn id="13" idx="2"/>
-            <a:endCxn id="28" idx="7"/>
-          </p:cNvCxnSpPr>
-          <p:nvPr/>
-        </p:nvCxnSpPr>
-        <p:spPr>
-          <a:xfrm flipH="1">
-            <a:off x="1745476" y="1706964"/>
-            <a:ext cx="1271553" cy="618127"/>
-          </a:xfrm>
-          <a:prstGeom prst="straightConnector1">
-            <a:avLst/>
-          </a:prstGeom>
-          <a:ln>
-            <a:tailEnd type="triangle"/>
-          </a:ln>
-        </p:spPr>
-        <p:style>
-          <a:lnRef idx="3">
-            <a:schemeClr val="dk1"/>
-          </a:lnRef>
-          <a:fillRef idx="0">
-            <a:schemeClr val="dk1"/>
-          </a:fillRef>
-          <a:effectRef idx="2">
-            <a:schemeClr val="dk1"/>
-          </a:effectRef>
-          <a:fontRef idx="minor">
-            <a:schemeClr val="tx1"/>
-          </a:fontRef>
-        </p:style>
-      </p:cxnSp>
-      <p:cxnSp>
-        <p:nvCxnSpPr>
-          <p:cNvPr id="12" name="Straight Arrow Connector 11">
-            <a:extLst>
-              <a:ext uri="{FF2B5EF4-FFF2-40B4-BE49-F238E27FC236}">
-                <a16:creationId xmlns:a16="http://schemas.microsoft.com/office/drawing/2014/main" id="{8588E362-09B2-4B0B-BBDE-2EFEFF000F9B}"/>
-              </a:ext>
-            </a:extLst>
-          </p:cNvPr>
-          <p:cNvCxnSpPr>
-            <a:cxnSpLocks/>
-            <a:stCxn id="13" idx="2"/>
-            <a:endCxn id="30" idx="1"/>
-          </p:cNvCxnSpPr>
-          <p:nvPr/>
-        </p:nvCxnSpPr>
-        <p:spPr>
-          <a:xfrm>
-            <a:off x="3017029" y="1706964"/>
-            <a:ext cx="1532465" cy="797849"/>
-          </a:xfrm>
-          <a:prstGeom prst="straightConnector1">
-            <a:avLst/>
-          </a:prstGeom>
-          <a:ln>
-            <a:tailEnd type="triangle"/>
-          </a:ln>
-        </p:spPr>
-        <p:style>
-          <a:lnRef idx="3">
-            <a:schemeClr val="dk1"/>
-          </a:lnRef>
-          <a:fillRef idx="0">
-            <a:schemeClr val="dk1"/>
-          </a:fillRef>
-          <a:effectRef idx="2">
-            <a:schemeClr val="dk1"/>
-          </a:effectRef>
-          <a:fontRef idx="minor">
-            <a:schemeClr val="tx1"/>
-          </a:fontRef>
-        </p:style>
-      </p:cxnSp>
-      <p:sp>
-        <p:nvSpPr>
-          <p:cNvPr id="13" name="TextBox 12">
-            <a:extLst>
-              <a:ext uri="{FF2B5EF4-FFF2-40B4-BE49-F238E27FC236}">
-                <a16:creationId xmlns:a16="http://schemas.microsoft.com/office/drawing/2014/main" id="{6406D038-F66B-4859-9416-A23E4E34906D}"/>
-              </a:ext>
-            </a:extLst>
-          </p:cNvPr>
-          <p:cNvSpPr txBox="1"/>
-          <p:nvPr/>
-        </p:nvSpPr>
-        <p:spPr>
-          <a:xfrm>
-            <a:off x="1490242" y="1337632"/>
-            <a:ext cx="3053573" cy="369332"/>
-          </a:xfrm>
-          <a:prstGeom prst="rect">
-            <a:avLst/>
-          </a:prstGeom>
-          <a:noFill/>
-        </p:spPr>
-        <p:txBody>
-          <a:bodyPr wrap="square" rtlCol="0">
-            <a:spAutoFit/>
-          </a:bodyPr>
-          <a:lstStyle/>
-          <a:p>
-            <a:pPr algn="ctr"/>
-            <a:r>
-              <a:rPr lang="it-IT" dirty="0"/>
-              <a:t>Set to NaN... Imputation?</a:t>
-            </a:r>
-            <a:endParaRPr lang="nl-NL" dirty="0"/>
-          </a:p>
-        </p:txBody>
-      </p:sp>
-      <p:sp>
-        <p:nvSpPr>
-          <p:cNvPr id="14" name="TextBox 13">
-            <a:extLst>
-              <a:ext uri="{FF2B5EF4-FFF2-40B4-BE49-F238E27FC236}">
-                <a16:creationId xmlns:a16="http://schemas.microsoft.com/office/drawing/2014/main" id="{F98F7243-8499-4EB9-8006-57DE1509E5C3}"/>
-              </a:ext>
-            </a:extLst>
-          </p:cNvPr>
-          <p:cNvSpPr txBox="1"/>
-          <p:nvPr/>
-        </p:nvSpPr>
-        <p:spPr>
-          <a:xfrm>
-            <a:off x="8060265" y="1152966"/>
-            <a:ext cx="2229853" cy="369332"/>
-          </a:xfrm>
-          <a:prstGeom prst="rect">
-            <a:avLst/>
-          </a:prstGeom>
-          <a:noFill/>
-        </p:spPr>
-        <p:txBody>
-          <a:bodyPr wrap="square" rtlCol="0">
-            <a:spAutoFit/>
-          </a:bodyPr>
-          <a:lstStyle/>
-          <a:p>
-            <a:r>
-              <a:rPr lang="it-IT" dirty="0"/>
-              <a:t>Considered Outliers</a:t>
-            </a:r>
-            <a:endParaRPr lang="nl-NL" dirty="0"/>
-          </a:p>
-        </p:txBody>
-      </p:sp>
-      <p:cxnSp>
-        <p:nvCxnSpPr>
-          <p:cNvPr id="16" name="Straight Arrow Connector 15">
-            <a:extLst>
-              <a:ext uri="{FF2B5EF4-FFF2-40B4-BE49-F238E27FC236}">
-                <a16:creationId xmlns:a16="http://schemas.microsoft.com/office/drawing/2014/main" id="{EF44B29E-148B-46BB-A8FF-E530EC852232}"/>
-              </a:ext>
-            </a:extLst>
-          </p:cNvPr>
-          <p:cNvCxnSpPr>
-            <a:cxnSpLocks/>
-            <a:stCxn id="14" idx="2"/>
-          </p:cNvCxnSpPr>
-          <p:nvPr/>
-        </p:nvCxnSpPr>
-        <p:spPr>
-          <a:xfrm>
-            <a:off x="9175192" y="1522298"/>
-            <a:ext cx="1451811" cy="1108426"/>
-          </a:xfrm>
-          <a:prstGeom prst="straightConnector1">
-            <a:avLst/>
-          </a:prstGeom>
-          <a:ln>
-            <a:tailEnd type="triangle"/>
-          </a:ln>
-        </p:spPr>
-        <p:style>
-          <a:lnRef idx="3">
-            <a:schemeClr val="dk1"/>
-          </a:lnRef>
-          <a:fillRef idx="0">
-            <a:schemeClr val="dk1"/>
-          </a:fillRef>
-          <a:effectRef idx="2">
-            <a:schemeClr val="dk1"/>
-          </a:effectRef>
-          <a:fontRef idx="minor">
-            <a:schemeClr val="tx1"/>
-          </a:fontRef>
-        </p:style>
-      </p:cxnSp>
-      <p:cxnSp>
-        <p:nvCxnSpPr>
-          <p:cNvPr id="18" name="Straight Arrow Connector 17">
-            <a:extLst>
-              <a:ext uri="{FF2B5EF4-FFF2-40B4-BE49-F238E27FC236}">
-                <a16:creationId xmlns:a16="http://schemas.microsoft.com/office/drawing/2014/main" id="{496788B4-CBEF-49A2-B29F-3DAC5165F805}"/>
-              </a:ext>
-            </a:extLst>
-          </p:cNvPr>
-          <p:cNvCxnSpPr>
-            <a:cxnSpLocks/>
-            <a:stCxn id="14" idx="2"/>
-          </p:cNvCxnSpPr>
-          <p:nvPr/>
-        </p:nvCxnSpPr>
-        <p:spPr>
-          <a:xfrm flipH="1">
-            <a:off x="7955994" y="1522298"/>
-            <a:ext cx="1219198" cy="1212700"/>
-          </a:xfrm>
-          <a:prstGeom prst="straightConnector1">
-            <a:avLst/>
-          </a:prstGeom>
-          <a:ln>
-            <a:tailEnd type="triangle"/>
-          </a:ln>
-        </p:spPr>
-        <p:style>
-          <a:lnRef idx="3">
-            <a:schemeClr val="dk1"/>
-          </a:lnRef>
-          <a:fillRef idx="0">
-            <a:schemeClr val="dk1"/>
-          </a:fillRef>
-          <a:effectRef idx="2">
-            <a:schemeClr val="dk1"/>
-          </a:effectRef>
-          <a:fontRef idx="minor">
-            <a:schemeClr val="tx1"/>
-          </a:fontRef>
-        </p:style>
-      </p:cxnSp>
-      <p:sp>
-        <p:nvSpPr>
-          <p:cNvPr id="28" name="Oval 27">
-            <a:extLst>
-              <a:ext uri="{FF2B5EF4-FFF2-40B4-BE49-F238E27FC236}">
-                <a16:creationId xmlns:a16="http://schemas.microsoft.com/office/drawing/2014/main" id="{5D3BB183-A2CA-46A2-B9C3-ADAE972B9027}"/>
-              </a:ext>
-            </a:extLst>
-          </p:cNvPr>
-          <p:cNvSpPr/>
-          <p:nvPr/>
-        </p:nvSpPr>
-        <p:spPr>
-          <a:xfrm>
-            <a:off x="1444235" y="2056559"/>
-            <a:ext cx="352926" cy="1833652"/>
-          </a:xfrm>
-          <a:prstGeom prst="ellipse">
-            <a:avLst/>
-          </a:prstGeom>
-          <a:noFill/>
-          <a:ln w="9525" cap="flat" cmpd="sng" algn="ctr">
-            <a:solidFill>
-              <a:schemeClr val="accent1"/>
-            </a:solidFill>
-            <a:prstDash val="solid"/>
-            <a:round/>
-            <a:headEnd type="none" w="med" len="med"/>
-            <a:tailEnd type="none" w="med" len="med"/>
-          </a:ln>
-        </p:spPr>
-        <p:style>
-          <a:lnRef idx="0">
-            <a:scrgbClr r="0" g="0" b="0"/>
-          </a:lnRef>
-          <a:fillRef idx="0">
-            <a:scrgbClr r="0" g="0" b="0"/>
-          </a:fillRef>
-          <a:effectRef idx="0">
-            <a:scrgbClr r="0" g="0" b="0"/>
-          </a:effectRef>
-          <a:fontRef idx="minor">
-            <a:schemeClr val="accent1"/>
-          </a:fontRef>
-        </p:style>
-        <p:txBody>
-          <a:bodyPr rtlCol="0" anchor="ctr"/>
-          <a:lstStyle/>
-          <a:p>
-            <a:pPr algn="ctr"/>
-            <a:endParaRPr lang="nl-NL"/>
-          </a:p>
-        </p:txBody>
-      </p:sp>
-      <p:sp>
-        <p:nvSpPr>
-          <p:cNvPr id="30" name="Oval 29">
-            <a:extLst>
-              <a:ext uri="{FF2B5EF4-FFF2-40B4-BE49-F238E27FC236}">
-                <a16:creationId xmlns:a16="http://schemas.microsoft.com/office/drawing/2014/main" id="{DFC1405A-A1FB-4B7D-A729-6F366D78F1F5}"/>
-              </a:ext>
-            </a:extLst>
-          </p:cNvPr>
-          <p:cNvSpPr/>
-          <p:nvPr/>
-        </p:nvSpPr>
-        <p:spPr>
-          <a:xfrm>
-            <a:off x="4497809" y="2056558"/>
-            <a:ext cx="352926" cy="3060874"/>
-          </a:xfrm>
-          <a:prstGeom prst="ellipse">
-            <a:avLst/>
-          </a:prstGeom>
-          <a:noFill/>
-          <a:ln w="9525" cap="flat" cmpd="sng" algn="ctr">
-            <a:solidFill>
-              <a:schemeClr val="accent1"/>
-            </a:solidFill>
-            <a:prstDash val="solid"/>
-            <a:round/>
-            <a:headEnd type="none" w="med" len="med"/>
-            <a:tailEnd type="none" w="med" len="med"/>
-          </a:ln>
-        </p:spPr>
-        <p:style>
-          <a:lnRef idx="0">
-            <a:scrgbClr r="0" g="0" b="0"/>
-          </a:lnRef>
-          <a:fillRef idx="0">
-            <a:scrgbClr r="0" g="0" b="0"/>
-          </a:fillRef>
-          <a:effectRef idx="0">
-            <a:scrgbClr r="0" g="0" b="0"/>
-          </a:effectRef>
-          <a:fontRef idx="minor">
-            <a:schemeClr val="accent1"/>
-          </a:fontRef>
-        </p:style>
-        <p:txBody>
-          <a:bodyPr rtlCol="0" anchor="ctr"/>
-          <a:lstStyle/>
-          <a:p>
-            <a:pPr algn="ctr"/>
-            <a:endParaRPr lang="nl-NL"/>
-          </a:p>
-        </p:txBody>
-      </p:sp>
-      <p:cxnSp>
-        <p:nvCxnSpPr>
-          <p:cNvPr id="47" name="Straight Connector 46">
-            <a:extLst>
-              <a:ext uri="{FF2B5EF4-FFF2-40B4-BE49-F238E27FC236}">
-                <a16:creationId xmlns:a16="http://schemas.microsoft.com/office/drawing/2014/main" id="{BB77F60D-AA92-4E88-9238-C37C7FCED343}"/>
-              </a:ext>
-            </a:extLst>
-          </p:cNvPr>
-          <p:cNvCxnSpPr/>
-          <p:nvPr/>
-        </p:nvCxnSpPr>
-        <p:spPr>
-          <a:xfrm>
-            <a:off x="344905" y="4868779"/>
-            <a:ext cx="2334126" cy="0"/>
-          </a:xfrm>
-          <a:prstGeom prst="line">
-            <a:avLst/>
-          </a:prstGeom>
-        </p:spPr>
-        <p:style>
-          <a:lnRef idx="3">
-            <a:schemeClr val="accent2"/>
-          </a:lnRef>
-          <a:fillRef idx="0">
-            <a:schemeClr val="accent2"/>
-          </a:fillRef>
-          <a:effectRef idx="2">
-            <a:schemeClr val="accent2"/>
-          </a:effectRef>
-          <a:fontRef idx="minor">
-            <a:schemeClr val="tx1"/>
-          </a:fontRef>
-        </p:style>
-      </p:cxnSp>
-      <p:sp>
-        <p:nvSpPr>
-          <p:cNvPr id="48" name="TextBox 47">
-            <a:extLst>
-              <a:ext uri="{FF2B5EF4-FFF2-40B4-BE49-F238E27FC236}">
-                <a16:creationId xmlns:a16="http://schemas.microsoft.com/office/drawing/2014/main" id="{210063D6-AB12-4D1A-8DD9-1B596D004A2F}"/>
-              </a:ext>
-            </a:extLst>
-          </p:cNvPr>
-          <p:cNvSpPr txBox="1"/>
-          <p:nvPr/>
-        </p:nvSpPr>
-        <p:spPr>
-          <a:xfrm>
-            <a:off x="2310061" y="4588042"/>
-            <a:ext cx="471458" cy="369332"/>
-          </a:xfrm>
-          <a:prstGeom prst="rect">
-            <a:avLst/>
-          </a:prstGeom>
-          <a:noFill/>
-        </p:spPr>
-        <p:txBody>
-          <a:bodyPr wrap="square" rtlCol="0">
-            <a:spAutoFit/>
-          </a:bodyPr>
-          <a:lstStyle/>
-          <a:p>
-            <a:pPr algn="ctr"/>
-            <a:r>
-              <a:rPr lang="it-IT" dirty="0">
-                <a:solidFill>
-                  <a:schemeClr val="accent2"/>
-                </a:solidFill>
-              </a:rPr>
-              <a:t>20</a:t>
-            </a:r>
-            <a:endParaRPr lang="nl-NL" dirty="0">
-              <a:solidFill>
-                <a:schemeClr val="accent2"/>
-              </a:solidFill>
-            </a:endParaRPr>
-          </a:p>
-        </p:txBody>
-      </p:sp>
-      <p:cxnSp>
-        <p:nvCxnSpPr>
-          <p:cNvPr id="49" name="Straight Connector 48">
-            <a:extLst>
-              <a:ext uri="{FF2B5EF4-FFF2-40B4-BE49-F238E27FC236}">
-                <a16:creationId xmlns:a16="http://schemas.microsoft.com/office/drawing/2014/main" id="{0BD6F6C2-AA8F-4637-B394-6AEB8944AE70}"/>
-              </a:ext>
-            </a:extLst>
-          </p:cNvPr>
-          <p:cNvCxnSpPr/>
-          <p:nvPr/>
-        </p:nvCxnSpPr>
-        <p:spPr>
-          <a:xfrm>
-            <a:off x="351141" y="3890211"/>
-            <a:ext cx="2334126" cy="0"/>
-          </a:xfrm>
-          <a:prstGeom prst="line">
-            <a:avLst/>
-          </a:prstGeom>
-        </p:spPr>
-        <p:style>
-          <a:lnRef idx="3">
-            <a:schemeClr val="accent2"/>
-          </a:lnRef>
-          <a:fillRef idx="0">
-            <a:schemeClr val="accent2"/>
-          </a:fillRef>
-          <a:effectRef idx="2">
-            <a:schemeClr val="accent2"/>
-          </a:effectRef>
-          <a:fontRef idx="minor">
-            <a:schemeClr val="tx1"/>
-          </a:fontRef>
-        </p:style>
-      </p:cxnSp>
-      <p:sp>
-        <p:nvSpPr>
-          <p:cNvPr id="50" name="TextBox 49">
-            <a:extLst>
-              <a:ext uri="{FF2B5EF4-FFF2-40B4-BE49-F238E27FC236}">
-                <a16:creationId xmlns:a16="http://schemas.microsoft.com/office/drawing/2014/main" id="{DC3D5BFC-C2C7-4C0B-8CCD-B5F0EF51BD42}"/>
-              </a:ext>
-            </a:extLst>
-          </p:cNvPr>
-          <p:cNvSpPr txBox="1"/>
-          <p:nvPr/>
-        </p:nvSpPr>
-        <p:spPr>
-          <a:xfrm>
-            <a:off x="2181726" y="3609474"/>
-            <a:ext cx="606029" cy="369332"/>
-          </a:xfrm>
-          <a:prstGeom prst="rect">
-            <a:avLst/>
-          </a:prstGeom>
-          <a:noFill/>
-        </p:spPr>
-        <p:txBody>
-          <a:bodyPr wrap="square" rtlCol="0">
-            <a:spAutoFit/>
-          </a:bodyPr>
-          <a:lstStyle/>
-          <a:p>
-            <a:pPr algn="ctr"/>
-            <a:r>
-              <a:rPr lang="it-IT" dirty="0">
-                <a:solidFill>
-                  <a:schemeClr val="accent2"/>
-                </a:solidFill>
-              </a:rPr>
-              <a:t>300</a:t>
-            </a:r>
-            <a:endParaRPr lang="nl-NL" dirty="0">
-              <a:solidFill>
-                <a:schemeClr val="accent2"/>
-              </a:solidFill>
-            </a:endParaRPr>
-          </a:p>
-        </p:txBody>
-      </p:sp>
-      <p:cxnSp>
-        <p:nvCxnSpPr>
-          <p:cNvPr id="51" name="Straight Connector 50">
-            <a:extLst>
-              <a:ext uri="{FF2B5EF4-FFF2-40B4-BE49-F238E27FC236}">
-                <a16:creationId xmlns:a16="http://schemas.microsoft.com/office/drawing/2014/main" id="{44BEA9E8-8FA9-4EBF-ADB1-F15EF59D545A}"/>
-              </a:ext>
-            </a:extLst>
-          </p:cNvPr>
-          <p:cNvCxnSpPr/>
-          <p:nvPr/>
-        </p:nvCxnSpPr>
-        <p:spPr>
-          <a:xfrm>
-            <a:off x="3376752" y="5219798"/>
-            <a:ext cx="2334126" cy="0"/>
-          </a:xfrm>
-          <a:prstGeom prst="line">
-            <a:avLst/>
-          </a:prstGeom>
-        </p:spPr>
-        <p:style>
-          <a:lnRef idx="3">
-            <a:schemeClr val="accent2"/>
-          </a:lnRef>
-          <a:fillRef idx="0">
-            <a:schemeClr val="accent2"/>
-          </a:fillRef>
-          <a:effectRef idx="2">
-            <a:schemeClr val="accent2"/>
-          </a:effectRef>
-          <a:fontRef idx="minor">
-            <a:schemeClr val="tx1"/>
-          </a:fontRef>
-        </p:style>
-      </p:cxnSp>
-      <p:sp>
-        <p:nvSpPr>
-          <p:cNvPr id="52" name="TextBox 51">
-            <a:extLst>
-              <a:ext uri="{FF2B5EF4-FFF2-40B4-BE49-F238E27FC236}">
-                <a16:creationId xmlns:a16="http://schemas.microsoft.com/office/drawing/2014/main" id="{A166A446-0273-44CD-8582-FA57872289AC}"/>
-              </a:ext>
-            </a:extLst>
-          </p:cNvPr>
-          <p:cNvSpPr txBox="1"/>
-          <p:nvPr/>
-        </p:nvSpPr>
-        <p:spPr>
-          <a:xfrm>
-            <a:off x="5624542" y="5035132"/>
-            <a:ext cx="471458" cy="369332"/>
-          </a:xfrm>
-          <a:prstGeom prst="rect">
-            <a:avLst/>
-          </a:prstGeom>
-          <a:noFill/>
-        </p:spPr>
-        <p:txBody>
-          <a:bodyPr wrap="square" rtlCol="0">
-            <a:spAutoFit/>
-          </a:bodyPr>
-          <a:lstStyle/>
-          <a:p>
-            <a:pPr algn="ctr"/>
-            <a:r>
-              <a:rPr lang="it-IT" dirty="0">
-                <a:solidFill>
-                  <a:schemeClr val="accent2"/>
-                </a:solidFill>
-              </a:rPr>
-              <a:t>20</a:t>
-            </a:r>
-            <a:endParaRPr lang="nl-NL" dirty="0">
-              <a:solidFill>
-                <a:schemeClr val="accent2"/>
-              </a:solidFill>
-            </a:endParaRPr>
-          </a:p>
-        </p:txBody>
-      </p:sp>
-      <p:cxnSp>
-        <p:nvCxnSpPr>
-          <p:cNvPr id="53" name="Straight Connector 52">
-            <a:extLst>
-              <a:ext uri="{FF2B5EF4-FFF2-40B4-BE49-F238E27FC236}">
-                <a16:creationId xmlns:a16="http://schemas.microsoft.com/office/drawing/2014/main" id="{7EEC18CD-74D0-4FAF-8860-CE57F8D1CFA6}"/>
-              </a:ext>
-            </a:extLst>
-          </p:cNvPr>
-          <p:cNvCxnSpPr/>
-          <p:nvPr/>
-        </p:nvCxnSpPr>
-        <p:spPr>
-          <a:xfrm>
-            <a:off x="3382988" y="5112781"/>
-            <a:ext cx="2334126" cy="0"/>
-          </a:xfrm>
-          <a:prstGeom prst="line">
-            <a:avLst/>
-          </a:prstGeom>
-        </p:spPr>
-        <p:style>
-          <a:lnRef idx="3">
-            <a:schemeClr val="accent2"/>
-          </a:lnRef>
-          <a:fillRef idx="0">
-            <a:schemeClr val="accent2"/>
-          </a:fillRef>
-          <a:effectRef idx="2">
-            <a:schemeClr val="accent2"/>
-          </a:effectRef>
-          <a:fontRef idx="minor">
-            <a:schemeClr val="tx1"/>
-          </a:fontRef>
-        </p:style>
-      </p:cxnSp>
-      <p:sp>
-        <p:nvSpPr>
-          <p:cNvPr id="54" name="TextBox 53">
-            <a:extLst>
-              <a:ext uri="{FF2B5EF4-FFF2-40B4-BE49-F238E27FC236}">
-                <a16:creationId xmlns:a16="http://schemas.microsoft.com/office/drawing/2014/main" id="{79388AA8-1909-4DBD-B882-1AB427F2771E}"/>
-              </a:ext>
-            </a:extLst>
-          </p:cNvPr>
-          <p:cNvSpPr txBox="1"/>
-          <p:nvPr/>
-        </p:nvSpPr>
-        <p:spPr>
-          <a:xfrm>
-            <a:off x="5566173" y="4796958"/>
-            <a:ext cx="606029" cy="369332"/>
-          </a:xfrm>
-          <a:prstGeom prst="rect">
-            <a:avLst/>
-          </a:prstGeom>
-          <a:noFill/>
-        </p:spPr>
-        <p:txBody>
-          <a:bodyPr wrap="square" rtlCol="0">
-            <a:spAutoFit/>
-          </a:bodyPr>
-          <a:lstStyle/>
-          <a:p>
-            <a:pPr algn="ctr"/>
-            <a:r>
-              <a:rPr lang="it-IT" dirty="0">
-                <a:solidFill>
-                  <a:schemeClr val="accent2"/>
-                </a:solidFill>
-              </a:rPr>
-              <a:t>300</a:t>
-            </a:r>
-            <a:endParaRPr lang="nl-NL" dirty="0">
-              <a:solidFill>
-                <a:schemeClr val="accent2"/>
-              </a:solidFill>
-            </a:endParaRPr>
-          </a:p>
-        </p:txBody>
-      </p:sp>
-      <p:sp>
-        <p:nvSpPr>
-          <p:cNvPr id="55" name="Arrow: Right 54">
-            <a:extLst>
-              <a:ext uri="{FF2B5EF4-FFF2-40B4-BE49-F238E27FC236}">
-                <a16:creationId xmlns:a16="http://schemas.microsoft.com/office/drawing/2014/main" id="{CF186115-EF21-4E45-BA1A-F7A01B55B725}"/>
-              </a:ext>
-            </a:extLst>
-          </p:cNvPr>
-          <p:cNvSpPr/>
-          <p:nvPr/>
-        </p:nvSpPr>
-        <p:spPr>
-          <a:xfrm>
-            <a:off x="5654279" y="3364185"/>
-            <a:ext cx="1094205" cy="369332"/>
-          </a:xfrm>
-          <a:prstGeom prst="rightArrow">
-            <a:avLst/>
-          </a:prstGeom>
-        </p:spPr>
-        <p:style>
-          <a:lnRef idx="2">
-            <a:schemeClr val="accent2">
-              <a:shade val="50000"/>
-            </a:schemeClr>
-          </a:lnRef>
-          <a:fillRef idx="1">
-            <a:schemeClr val="accent2"/>
-          </a:fillRef>
-          <a:effectRef idx="0">
-            <a:schemeClr val="accent2"/>
-          </a:effectRef>
-          <a:fontRef idx="minor">
-            <a:schemeClr val="lt1"/>
-          </a:fontRef>
-        </p:style>
-        <p:txBody>
-          <a:bodyPr rtlCol="0" anchor="ctr"/>
-          <a:lstStyle/>
-          <a:p>
-            <a:pPr algn="ctr"/>
-            <a:endParaRPr lang="nl-NL"/>
-          </a:p>
-        </p:txBody>
-      </p:sp>
-      <p:sp>
-        <p:nvSpPr>
-          <p:cNvPr id="57" name="Oval 56">
-            <a:extLst>
-              <a:ext uri="{FF2B5EF4-FFF2-40B4-BE49-F238E27FC236}">
-                <a16:creationId xmlns:a16="http://schemas.microsoft.com/office/drawing/2014/main" id="{F946F1D0-67D6-45FC-AEDB-3F765ADB089F}"/>
-              </a:ext>
-            </a:extLst>
-          </p:cNvPr>
-          <p:cNvSpPr/>
-          <p:nvPr/>
-        </p:nvSpPr>
-        <p:spPr>
-          <a:xfrm>
-            <a:off x="1444235" y="4886330"/>
-            <a:ext cx="352926" cy="473862"/>
-          </a:xfrm>
-          <a:prstGeom prst="ellipse">
-            <a:avLst/>
-          </a:prstGeom>
-          <a:noFill/>
-          <a:ln w="9525" cap="flat" cmpd="sng" algn="ctr">
-            <a:solidFill>
-              <a:schemeClr val="accent1"/>
-            </a:solidFill>
-            <a:prstDash val="solid"/>
-            <a:round/>
-            <a:headEnd type="none" w="med" len="med"/>
-            <a:tailEnd type="none" w="med" len="med"/>
-          </a:ln>
-        </p:spPr>
-        <p:style>
-          <a:lnRef idx="0">
-            <a:scrgbClr r="0" g="0" b="0"/>
-          </a:lnRef>
-          <a:fillRef idx="0">
-            <a:scrgbClr r="0" g="0" b="0"/>
-          </a:fillRef>
-          <a:effectRef idx="0">
-            <a:scrgbClr r="0" g="0" b="0"/>
-          </a:effectRef>
-          <a:fontRef idx="minor">
-            <a:schemeClr val="accent1"/>
-          </a:fontRef>
-        </p:style>
-        <p:txBody>
-          <a:bodyPr rtlCol="0" anchor="ctr"/>
-          <a:lstStyle/>
-          <a:p>
-            <a:pPr algn="ctr"/>
-            <a:endParaRPr lang="nl-NL"/>
-          </a:p>
-        </p:txBody>
-      </p:sp>
-    </p:spTree>
-    <p:extLst>
-      <p:ext uri="{BB962C8B-B14F-4D97-AF65-F5344CB8AC3E}">
-        <p14:creationId xmlns:p14="http://schemas.microsoft.com/office/powerpoint/2010/main" val="2308014033"/>
       </p:ext>
     </p:extLst>
   </p:cSld>
@@ -6876,149 +6196,10 @@
           <a:chExt cx="0" cy="0"/>
         </a:xfrm>
       </p:grpSpPr>
-      <p:pic>
-        <p:nvPicPr>
-          <p:cNvPr id="2" name="Picture 1">
-            <a:extLst>
-              <a:ext uri="{FF2B5EF4-FFF2-40B4-BE49-F238E27FC236}">
-                <a16:creationId xmlns:a16="http://schemas.microsoft.com/office/drawing/2014/main" id="{EFCA64AE-70C0-46DC-9DE0-3BD016877CF0}"/>
-              </a:ext>
-            </a:extLst>
-          </p:cNvPr>
-          <p:cNvPicPr>
-            <a:picLocks noChangeAspect="1"/>
-          </p:cNvPicPr>
-          <p:nvPr/>
-        </p:nvPicPr>
-        <p:blipFill>
-          <a:blip r:embed="rId2">
-            <a:extLst>
-              <a:ext uri="{28A0092B-C50C-407E-A947-70E740481C1C}">
-                <a14:useLocalDpi xmlns:a14="http://schemas.microsoft.com/office/drawing/2010/main" val="0"/>
-              </a:ext>
-            </a:extLst>
-          </a:blip>
-          <a:stretch>
-            <a:fillRect/>
-          </a:stretch>
-        </p:blipFill>
-        <p:spPr>
-          <a:xfrm>
-            <a:off x="2471014" y="2125452"/>
-            <a:ext cx="7249970" cy="4405816"/>
-          </a:xfrm>
-          <a:prstGeom prst="rect">
-            <a:avLst/>
-          </a:prstGeom>
-        </p:spPr>
-      </p:pic>
-      <p:sp>
-        <p:nvSpPr>
-          <p:cNvPr id="3" name="TextBox 2">
-            <a:extLst>
-              <a:ext uri="{FF2B5EF4-FFF2-40B4-BE49-F238E27FC236}">
-                <a16:creationId xmlns:a16="http://schemas.microsoft.com/office/drawing/2014/main" id="{669BC41E-7A1B-450B-AE56-57E23EBB368B}"/>
-              </a:ext>
-            </a:extLst>
-          </p:cNvPr>
-          <p:cNvSpPr txBox="1"/>
-          <p:nvPr/>
-        </p:nvSpPr>
-        <p:spPr>
-          <a:xfrm>
-            <a:off x="0" y="0"/>
-            <a:ext cx="4395537" cy="369332"/>
-          </a:xfrm>
-          <a:prstGeom prst="rect">
-            <a:avLst/>
-          </a:prstGeom>
-          <a:noFill/>
-        </p:spPr>
-        <p:txBody>
-          <a:bodyPr wrap="square" rtlCol="0">
-            <a:spAutoFit/>
-          </a:bodyPr>
-          <a:lstStyle/>
-          <a:p>
-            <a:r>
-              <a:rPr lang="it-IT" u="sng" dirty="0"/>
-              <a:t>Blood Pressure Measurements - Outliers</a:t>
-            </a:r>
-            <a:endParaRPr lang="nl-NL" u="sng" dirty="0"/>
-          </a:p>
-        </p:txBody>
-      </p:sp>
-      <p:sp>
-        <p:nvSpPr>
-          <p:cNvPr id="4" name="TextBox 3">
-            <a:extLst>
-              <a:ext uri="{FF2B5EF4-FFF2-40B4-BE49-F238E27FC236}">
-                <a16:creationId xmlns:a16="http://schemas.microsoft.com/office/drawing/2014/main" id="{9D83727A-AEE6-4E01-9A07-195FB57628BF}"/>
-              </a:ext>
-            </a:extLst>
-          </p:cNvPr>
-          <p:cNvSpPr txBox="1"/>
-          <p:nvPr/>
-        </p:nvSpPr>
-        <p:spPr>
-          <a:xfrm>
-            <a:off x="2709862" y="811929"/>
-            <a:ext cx="6772275" cy="1200329"/>
-          </a:xfrm>
-          <a:prstGeom prst="rect">
-            <a:avLst/>
-          </a:prstGeom>
-          <a:noFill/>
-        </p:spPr>
-        <p:txBody>
-          <a:bodyPr wrap="square" rtlCol="0">
-            <a:spAutoFit/>
-          </a:bodyPr>
-          <a:lstStyle/>
-          <a:p>
-            <a:pPr algn="ctr"/>
-            <a:r>
-              <a:rPr lang="it-IT" sz="2400" dirty="0"/>
-              <a:t>Replaced with Mean value </a:t>
-            </a:r>
-          </a:p>
-          <a:p>
-            <a:pPr algn="ctr"/>
-            <a:r>
-              <a:rPr lang="it-IT" sz="2400" dirty="0"/>
-              <a:t>if </a:t>
-            </a:r>
-          </a:p>
-          <a:p>
-            <a:pPr algn="ctr"/>
-            <a:r>
-              <a:rPr lang="it-IT" sz="2400" dirty="0"/>
-              <a:t>|BP</a:t>
-            </a:r>
-            <a:r>
-              <a:rPr lang="it-IT" sz="2400" baseline="-25000" dirty="0"/>
-              <a:t>Sys,Dia</a:t>
-            </a:r>
-            <a:r>
-              <a:rPr lang="it-IT" sz="2400" dirty="0"/>
-              <a:t>| </a:t>
-            </a:r>
-            <a:r>
-              <a:rPr lang="nl-NL" sz="2400" dirty="0"/>
-              <a:t>&lt; 3·</a:t>
-            </a:r>
-            <a:r>
-              <a:rPr lang="el-GR" sz="2400" dirty="0"/>
-              <a:t>σ</a:t>
-            </a:r>
-            <a:endParaRPr lang="nl-NL" sz="2400" dirty="0"/>
-          </a:p>
-        </p:txBody>
-      </p:sp>
     </p:spTree>
     <p:extLst>
       <p:ext uri="{BB962C8B-B14F-4D97-AF65-F5344CB8AC3E}">
-        <p14:creationId xmlns:p14="http://schemas.microsoft.com/office/powerpoint/2010/main" val="483860090"/>
+        <p14:creationId xmlns:p14="http://schemas.microsoft.com/office/powerpoint/2010/main" val="2416861179"/>
       </p:ext>
     </p:extLst>
   </p:cSld>
@@ -7062,6 +6243,1208 @@
           <p:cNvPr id="2" name="Title 1">
             <a:extLst>
               <a:ext uri="{FF2B5EF4-FFF2-40B4-BE49-F238E27FC236}">
+                <a16:creationId xmlns:a16="http://schemas.microsoft.com/office/drawing/2014/main" id="{6D37F963-7349-4DE3-A960-EEBD333A4E61}"/>
+              </a:ext>
+            </a:extLst>
+          </p:cNvPr>
+          <p:cNvSpPr txBox="1">
+            <a:spLocks/>
+          </p:cNvSpPr>
+          <p:nvPr/>
+        </p:nvSpPr>
+        <p:spPr>
+          <a:xfrm>
+            <a:off x="1524000" y="2235200"/>
+            <a:ext cx="9144000" cy="2387600"/>
+          </a:xfrm>
+          <a:prstGeom prst="rect">
+            <a:avLst/>
+          </a:prstGeom>
+        </p:spPr>
+        <p:txBody>
+          <a:bodyPr anchor="ctr"/>
+          <a:lstStyle>
+            <a:lvl1pPr algn="l" defTabSz="914400" rtl="0" eaLnBrk="1" latinLnBrk="0" hangingPunct="1">
+              <a:lnSpc>
+                <a:spcPct val="90000"/>
+              </a:lnSpc>
+              <a:spcBef>
+                <a:spcPct val="0"/>
+              </a:spcBef>
+              <a:buNone/>
+              <a:defRPr sz="4400" kern="1200">
+                <a:solidFill>
+                  <a:schemeClr val="tx1"/>
+                </a:solidFill>
+                <a:latin typeface="+mj-lt"/>
+                <a:ea typeface="+mj-ea"/>
+                <a:cs typeface="+mj-cs"/>
+              </a:defRPr>
+            </a:lvl1pPr>
+          </a:lstStyle>
+          <a:p>
+            <a:pPr algn="ctr"/>
+            <a:r>
+              <a:rPr lang="it-IT" dirty="0"/>
+              <a:t>Blood Pressure Readings</a:t>
+            </a:r>
+            <a:endParaRPr lang="nl-NL" dirty="0"/>
+          </a:p>
+        </p:txBody>
+      </p:sp>
+    </p:spTree>
+    <p:extLst>
+      <p:ext uri="{BB962C8B-B14F-4D97-AF65-F5344CB8AC3E}">
+        <p14:creationId xmlns:p14="http://schemas.microsoft.com/office/powerpoint/2010/main" val="603692568"/>
+      </p:ext>
+    </p:extLst>
+  </p:cSld>
+  <p:clrMapOvr>
+    <a:masterClrMapping/>
+  </p:clrMapOvr>
+  <mc:AlternateContent xmlns:mc="http://schemas.openxmlformats.org/markup-compatibility/2006" xmlns:p159="http://schemas.microsoft.com/office/powerpoint/2015/09/main">
+    <mc:Choice Requires="p159">
+      <p:transition xmlns:p14="http://schemas.microsoft.com/office/powerpoint/2010/main" spd="slow" p14:dur="2000">
+        <p159:morph option="byObject"/>
+      </p:transition>
+    </mc:Choice>
+    <mc:Fallback xmlns="">
+      <p:transition spd="slow">
+        <p:fade/>
+      </p:transition>
+    </mc:Fallback>
+  </mc:AlternateContent>
+</p:sld>
+</file>
+
+<file path=ppt/slides/slide22.xml><?xml version="1.0" encoding="utf-8"?>
+<p:sld xmlns:a="http://schemas.openxmlformats.org/drawingml/2006/main" xmlns:r="http://schemas.openxmlformats.org/officeDocument/2006/relationships" xmlns:p="http://schemas.openxmlformats.org/presentationml/2006/main">
+  <p:cSld>
+    <p:spTree>
+      <p:nvGrpSpPr>
+        <p:cNvPr id="1" name=""/>
+        <p:cNvGrpSpPr/>
+        <p:nvPr/>
+      </p:nvGrpSpPr>
+      <p:grpSpPr>
+        <a:xfrm>
+          <a:off x="0" y="0"/>
+          <a:ext cx="0" cy="0"/>
+          <a:chOff x="0" y="0"/>
+          <a:chExt cx="0" cy="0"/>
+        </a:xfrm>
+      </p:grpSpPr>
+      <p:sp>
+        <p:nvSpPr>
+          <p:cNvPr id="2" name="TextBox 1">
+            <a:extLst>
+              <a:ext uri="{FF2B5EF4-FFF2-40B4-BE49-F238E27FC236}">
+                <a16:creationId xmlns:a16="http://schemas.microsoft.com/office/drawing/2014/main" id="{CC0200F0-ABFF-45F8-A6F5-9F8372AE5C7D}"/>
+              </a:ext>
+            </a:extLst>
+          </p:cNvPr>
+          <p:cNvSpPr txBox="1"/>
+          <p:nvPr/>
+        </p:nvSpPr>
+        <p:spPr>
+          <a:xfrm>
+            <a:off x="0" y="0"/>
+            <a:ext cx="4395537" cy="369332"/>
+          </a:xfrm>
+          <a:prstGeom prst="rect">
+            <a:avLst/>
+          </a:prstGeom>
+          <a:noFill/>
+        </p:spPr>
+        <p:txBody>
+          <a:bodyPr wrap="square" rtlCol="0">
+            <a:spAutoFit/>
+          </a:bodyPr>
+          <a:lstStyle/>
+          <a:p>
+            <a:r>
+              <a:rPr lang="it-IT" u="sng" dirty="0"/>
+              <a:t>Blood Pressure Measurements - Outliers</a:t>
+            </a:r>
+            <a:endParaRPr lang="nl-NL" u="sng" dirty="0"/>
+          </a:p>
+        </p:txBody>
+      </p:sp>
+      <p:pic>
+        <p:nvPicPr>
+          <p:cNvPr id="4" name="Picture 3">
+            <a:extLst>
+              <a:ext uri="{FF2B5EF4-FFF2-40B4-BE49-F238E27FC236}">
+                <a16:creationId xmlns:a16="http://schemas.microsoft.com/office/drawing/2014/main" id="{B141D145-8AC1-45C7-8D61-50D4BD1CC9DF}"/>
+              </a:ext>
+            </a:extLst>
+          </p:cNvPr>
+          <p:cNvPicPr>
+            <a:picLocks noChangeAspect="1"/>
+          </p:cNvPicPr>
+          <p:nvPr/>
+        </p:nvPicPr>
+        <p:blipFill>
+          <a:blip r:embed="rId2">
+            <a:extLst>
+              <a:ext uri="{28A0092B-C50C-407E-A947-70E740481C1C}">
+                <a14:useLocalDpi xmlns:a14="http://schemas.microsoft.com/office/drawing/2010/main" val="0"/>
+              </a:ext>
+            </a:extLst>
+          </a:blip>
+          <a:stretch>
+            <a:fillRect/>
+          </a:stretch>
+        </p:blipFill>
+        <p:spPr>
+          <a:xfrm>
+            <a:off x="6186458" y="1957137"/>
+            <a:ext cx="6005542" cy="3649580"/>
+          </a:xfrm>
+          <a:prstGeom prst="rect">
+            <a:avLst/>
+          </a:prstGeom>
+        </p:spPr>
+      </p:pic>
+      <p:pic>
+        <p:nvPicPr>
+          <p:cNvPr id="8" name="Picture 7">
+            <a:extLst>
+              <a:ext uri="{FF2B5EF4-FFF2-40B4-BE49-F238E27FC236}">
+                <a16:creationId xmlns:a16="http://schemas.microsoft.com/office/drawing/2014/main" id="{B78D7C7E-C973-4558-835C-AE7A82ECC7EF}"/>
+              </a:ext>
+            </a:extLst>
+          </p:cNvPr>
+          <p:cNvPicPr>
+            <a:picLocks noChangeAspect="1"/>
+          </p:cNvPicPr>
+          <p:nvPr/>
+        </p:nvPicPr>
+        <p:blipFill>
+          <a:blip r:embed="rId3">
+            <a:extLst>
+              <a:ext uri="{28A0092B-C50C-407E-A947-70E740481C1C}">
+                <a14:useLocalDpi xmlns:a14="http://schemas.microsoft.com/office/drawing/2010/main" val="0"/>
+              </a:ext>
+            </a:extLst>
+          </a:blip>
+          <a:stretch>
+            <a:fillRect/>
+          </a:stretch>
+        </p:blipFill>
+        <p:spPr>
+          <a:xfrm>
+            <a:off x="14258" y="1957137"/>
+            <a:ext cx="6005542" cy="3649580"/>
+          </a:xfrm>
+          <a:prstGeom prst="rect">
+            <a:avLst/>
+          </a:prstGeom>
+        </p:spPr>
+      </p:pic>
+      <p:cxnSp>
+        <p:nvCxnSpPr>
+          <p:cNvPr id="10" name="Straight Arrow Connector 9">
+            <a:extLst>
+              <a:ext uri="{FF2B5EF4-FFF2-40B4-BE49-F238E27FC236}">
+                <a16:creationId xmlns:a16="http://schemas.microsoft.com/office/drawing/2014/main" id="{D2D21716-6BD7-4A50-9558-0D0C13985C2D}"/>
+              </a:ext>
+            </a:extLst>
+          </p:cNvPr>
+          <p:cNvCxnSpPr>
+            <a:cxnSpLocks/>
+            <a:stCxn id="13" idx="2"/>
+            <a:endCxn id="28" idx="7"/>
+          </p:cNvCxnSpPr>
+          <p:nvPr/>
+        </p:nvCxnSpPr>
+        <p:spPr>
+          <a:xfrm flipH="1">
+            <a:off x="1745476" y="1706964"/>
+            <a:ext cx="1271553" cy="618127"/>
+          </a:xfrm>
+          <a:prstGeom prst="straightConnector1">
+            <a:avLst/>
+          </a:prstGeom>
+          <a:ln>
+            <a:tailEnd type="triangle"/>
+          </a:ln>
+        </p:spPr>
+        <p:style>
+          <a:lnRef idx="3">
+            <a:schemeClr val="dk1"/>
+          </a:lnRef>
+          <a:fillRef idx="0">
+            <a:schemeClr val="dk1"/>
+          </a:fillRef>
+          <a:effectRef idx="2">
+            <a:schemeClr val="dk1"/>
+          </a:effectRef>
+          <a:fontRef idx="minor">
+            <a:schemeClr val="tx1"/>
+          </a:fontRef>
+        </p:style>
+      </p:cxnSp>
+      <p:cxnSp>
+        <p:nvCxnSpPr>
+          <p:cNvPr id="12" name="Straight Arrow Connector 11">
+            <a:extLst>
+              <a:ext uri="{FF2B5EF4-FFF2-40B4-BE49-F238E27FC236}">
+                <a16:creationId xmlns:a16="http://schemas.microsoft.com/office/drawing/2014/main" id="{8588E362-09B2-4B0B-BBDE-2EFEFF000F9B}"/>
+              </a:ext>
+            </a:extLst>
+          </p:cNvPr>
+          <p:cNvCxnSpPr>
+            <a:cxnSpLocks/>
+            <a:stCxn id="13" idx="2"/>
+            <a:endCxn id="30" idx="1"/>
+          </p:cNvCxnSpPr>
+          <p:nvPr/>
+        </p:nvCxnSpPr>
+        <p:spPr>
+          <a:xfrm>
+            <a:off x="3017029" y="1706964"/>
+            <a:ext cx="1532465" cy="797849"/>
+          </a:xfrm>
+          <a:prstGeom prst="straightConnector1">
+            <a:avLst/>
+          </a:prstGeom>
+          <a:ln>
+            <a:tailEnd type="triangle"/>
+          </a:ln>
+        </p:spPr>
+        <p:style>
+          <a:lnRef idx="3">
+            <a:schemeClr val="dk1"/>
+          </a:lnRef>
+          <a:fillRef idx="0">
+            <a:schemeClr val="dk1"/>
+          </a:fillRef>
+          <a:effectRef idx="2">
+            <a:schemeClr val="dk1"/>
+          </a:effectRef>
+          <a:fontRef idx="minor">
+            <a:schemeClr val="tx1"/>
+          </a:fontRef>
+        </p:style>
+      </p:cxnSp>
+      <p:sp>
+        <p:nvSpPr>
+          <p:cNvPr id="13" name="TextBox 12">
+            <a:extLst>
+              <a:ext uri="{FF2B5EF4-FFF2-40B4-BE49-F238E27FC236}">
+                <a16:creationId xmlns:a16="http://schemas.microsoft.com/office/drawing/2014/main" id="{6406D038-F66B-4859-9416-A23E4E34906D}"/>
+              </a:ext>
+            </a:extLst>
+          </p:cNvPr>
+          <p:cNvSpPr txBox="1"/>
+          <p:nvPr/>
+        </p:nvSpPr>
+        <p:spPr>
+          <a:xfrm>
+            <a:off x="1490242" y="1337632"/>
+            <a:ext cx="3053573" cy="369332"/>
+          </a:xfrm>
+          <a:prstGeom prst="rect">
+            <a:avLst/>
+          </a:prstGeom>
+          <a:noFill/>
+        </p:spPr>
+        <p:txBody>
+          <a:bodyPr wrap="square" rtlCol="0">
+            <a:spAutoFit/>
+          </a:bodyPr>
+          <a:lstStyle/>
+          <a:p>
+            <a:pPr algn="ctr"/>
+            <a:r>
+              <a:rPr lang="it-IT" dirty="0"/>
+              <a:t>Set to NaN... Imputation?</a:t>
+            </a:r>
+            <a:endParaRPr lang="nl-NL" dirty="0"/>
+          </a:p>
+        </p:txBody>
+      </p:sp>
+      <p:sp>
+        <p:nvSpPr>
+          <p:cNvPr id="14" name="TextBox 13">
+            <a:extLst>
+              <a:ext uri="{FF2B5EF4-FFF2-40B4-BE49-F238E27FC236}">
+                <a16:creationId xmlns:a16="http://schemas.microsoft.com/office/drawing/2014/main" id="{F98F7243-8499-4EB9-8006-57DE1509E5C3}"/>
+              </a:ext>
+            </a:extLst>
+          </p:cNvPr>
+          <p:cNvSpPr txBox="1"/>
+          <p:nvPr/>
+        </p:nvSpPr>
+        <p:spPr>
+          <a:xfrm>
+            <a:off x="8060265" y="1152966"/>
+            <a:ext cx="2229853" cy="369332"/>
+          </a:xfrm>
+          <a:prstGeom prst="rect">
+            <a:avLst/>
+          </a:prstGeom>
+          <a:noFill/>
+        </p:spPr>
+        <p:txBody>
+          <a:bodyPr wrap="square" rtlCol="0">
+            <a:spAutoFit/>
+          </a:bodyPr>
+          <a:lstStyle/>
+          <a:p>
+            <a:r>
+              <a:rPr lang="it-IT" dirty="0"/>
+              <a:t>Considered Outliers</a:t>
+            </a:r>
+            <a:endParaRPr lang="nl-NL" dirty="0"/>
+          </a:p>
+        </p:txBody>
+      </p:sp>
+      <p:cxnSp>
+        <p:nvCxnSpPr>
+          <p:cNvPr id="16" name="Straight Arrow Connector 15">
+            <a:extLst>
+              <a:ext uri="{FF2B5EF4-FFF2-40B4-BE49-F238E27FC236}">
+                <a16:creationId xmlns:a16="http://schemas.microsoft.com/office/drawing/2014/main" id="{EF44B29E-148B-46BB-A8FF-E530EC852232}"/>
+              </a:ext>
+            </a:extLst>
+          </p:cNvPr>
+          <p:cNvCxnSpPr>
+            <a:cxnSpLocks/>
+            <a:stCxn id="14" idx="2"/>
+          </p:cNvCxnSpPr>
+          <p:nvPr/>
+        </p:nvCxnSpPr>
+        <p:spPr>
+          <a:xfrm>
+            <a:off x="9175192" y="1522298"/>
+            <a:ext cx="1451811" cy="1108426"/>
+          </a:xfrm>
+          <a:prstGeom prst="straightConnector1">
+            <a:avLst/>
+          </a:prstGeom>
+          <a:ln>
+            <a:tailEnd type="triangle"/>
+          </a:ln>
+        </p:spPr>
+        <p:style>
+          <a:lnRef idx="3">
+            <a:schemeClr val="dk1"/>
+          </a:lnRef>
+          <a:fillRef idx="0">
+            <a:schemeClr val="dk1"/>
+          </a:fillRef>
+          <a:effectRef idx="2">
+            <a:schemeClr val="dk1"/>
+          </a:effectRef>
+          <a:fontRef idx="minor">
+            <a:schemeClr val="tx1"/>
+          </a:fontRef>
+        </p:style>
+      </p:cxnSp>
+      <p:cxnSp>
+        <p:nvCxnSpPr>
+          <p:cNvPr id="18" name="Straight Arrow Connector 17">
+            <a:extLst>
+              <a:ext uri="{FF2B5EF4-FFF2-40B4-BE49-F238E27FC236}">
+                <a16:creationId xmlns:a16="http://schemas.microsoft.com/office/drawing/2014/main" id="{496788B4-CBEF-49A2-B29F-3DAC5165F805}"/>
+              </a:ext>
+            </a:extLst>
+          </p:cNvPr>
+          <p:cNvCxnSpPr>
+            <a:cxnSpLocks/>
+            <a:stCxn id="14" idx="2"/>
+          </p:cNvCxnSpPr>
+          <p:nvPr/>
+        </p:nvCxnSpPr>
+        <p:spPr>
+          <a:xfrm flipH="1">
+            <a:off x="7955994" y="1522298"/>
+            <a:ext cx="1219198" cy="1212700"/>
+          </a:xfrm>
+          <a:prstGeom prst="straightConnector1">
+            <a:avLst/>
+          </a:prstGeom>
+          <a:ln>
+            <a:tailEnd type="triangle"/>
+          </a:ln>
+        </p:spPr>
+        <p:style>
+          <a:lnRef idx="3">
+            <a:schemeClr val="dk1"/>
+          </a:lnRef>
+          <a:fillRef idx="0">
+            <a:schemeClr val="dk1"/>
+          </a:fillRef>
+          <a:effectRef idx="2">
+            <a:schemeClr val="dk1"/>
+          </a:effectRef>
+          <a:fontRef idx="minor">
+            <a:schemeClr val="tx1"/>
+          </a:fontRef>
+        </p:style>
+      </p:cxnSp>
+      <p:sp>
+        <p:nvSpPr>
+          <p:cNvPr id="28" name="Oval 27">
+            <a:extLst>
+              <a:ext uri="{FF2B5EF4-FFF2-40B4-BE49-F238E27FC236}">
+                <a16:creationId xmlns:a16="http://schemas.microsoft.com/office/drawing/2014/main" id="{5D3BB183-A2CA-46A2-B9C3-ADAE972B9027}"/>
+              </a:ext>
+            </a:extLst>
+          </p:cNvPr>
+          <p:cNvSpPr/>
+          <p:nvPr/>
+        </p:nvSpPr>
+        <p:spPr>
+          <a:xfrm>
+            <a:off x="1444235" y="2056559"/>
+            <a:ext cx="352926" cy="1833652"/>
+          </a:xfrm>
+          <a:prstGeom prst="ellipse">
+            <a:avLst/>
+          </a:prstGeom>
+          <a:noFill/>
+          <a:ln w="9525" cap="flat" cmpd="sng" algn="ctr">
+            <a:solidFill>
+              <a:schemeClr val="accent1"/>
+            </a:solidFill>
+            <a:prstDash val="solid"/>
+            <a:round/>
+            <a:headEnd type="none" w="med" len="med"/>
+            <a:tailEnd type="none" w="med" len="med"/>
+          </a:ln>
+        </p:spPr>
+        <p:style>
+          <a:lnRef idx="0">
+            <a:scrgbClr r="0" g="0" b="0"/>
+          </a:lnRef>
+          <a:fillRef idx="0">
+            <a:scrgbClr r="0" g="0" b="0"/>
+          </a:fillRef>
+          <a:effectRef idx="0">
+            <a:scrgbClr r="0" g="0" b="0"/>
+          </a:effectRef>
+          <a:fontRef idx="minor">
+            <a:schemeClr val="accent1"/>
+          </a:fontRef>
+        </p:style>
+        <p:txBody>
+          <a:bodyPr rtlCol="0" anchor="ctr"/>
+          <a:lstStyle/>
+          <a:p>
+            <a:pPr algn="ctr"/>
+            <a:endParaRPr lang="nl-NL"/>
+          </a:p>
+        </p:txBody>
+      </p:sp>
+      <p:sp>
+        <p:nvSpPr>
+          <p:cNvPr id="30" name="Oval 29">
+            <a:extLst>
+              <a:ext uri="{FF2B5EF4-FFF2-40B4-BE49-F238E27FC236}">
+                <a16:creationId xmlns:a16="http://schemas.microsoft.com/office/drawing/2014/main" id="{DFC1405A-A1FB-4B7D-A729-6F366D78F1F5}"/>
+              </a:ext>
+            </a:extLst>
+          </p:cNvPr>
+          <p:cNvSpPr/>
+          <p:nvPr/>
+        </p:nvSpPr>
+        <p:spPr>
+          <a:xfrm>
+            <a:off x="4497809" y="2056558"/>
+            <a:ext cx="352926" cy="3060874"/>
+          </a:xfrm>
+          <a:prstGeom prst="ellipse">
+            <a:avLst/>
+          </a:prstGeom>
+          <a:noFill/>
+          <a:ln w="9525" cap="flat" cmpd="sng" algn="ctr">
+            <a:solidFill>
+              <a:schemeClr val="accent1"/>
+            </a:solidFill>
+            <a:prstDash val="solid"/>
+            <a:round/>
+            <a:headEnd type="none" w="med" len="med"/>
+            <a:tailEnd type="none" w="med" len="med"/>
+          </a:ln>
+        </p:spPr>
+        <p:style>
+          <a:lnRef idx="0">
+            <a:scrgbClr r="0" g="0" b="0"/>
+          </a:lnRef>
+          <a:fillRef idx="0">
+            <a:scrgbClr r="0" g="0" b="0"/>
+          </a:fillRef>
+          <a:effectRef idx="0">
+            <a:scrgbClr r="0" g="0" b="0"/>
+          </a:effectRef>
+          <a:fontRef idx="minor">
+            <a:schemeClr val="accent1"/>
+          </a:fontRef>
+        </p:style>
+        <p:txBody>
+          <a:bodyPr rtlCol="0" anchor="ctr"/>
+          <a:lstStyle/>
+          <a:p>
+            <a:pPr algn="ctr"/>
+            <a:endParaRPr lang="nl-NL"/>
+          </a:p>
+        </p:txBody>
+      </p:sp>
+      <p:cxnSp>
+        <p:nvCxnSpPr>
+          <p:cNvPr id="47" name="Straight Connector 46">
+            <a:extLst>
+              <a:ext uri="{FF2B5EF4-FFF2-40B4-BE49-F238E27FC236}">
+                <a16:creationId xmlns:a16="http://schemas.microsoft.com/office/drawing/2014/main" id="{BB77F60D-AA92-4E88-9238-C37C7FCED343}"/>
+              </a:ext>
+            </a:extLst>
+          </p:cNvPr>
+          <p:cNvCxnSpPr/>
+          <p:nvPr/>
+        </p:nvCxnSpPr>
+        <p:spPr>
+          <a:xfrm>
+            <a:off x="344905" y="4868779"/>
+            <a:ext cx="2334126" cy="0"/>
+          </a:xfrm>
+          <a:prstGeom prst="line">
+            <a:avLst/>
+          </a:prstGeom>
+        </p:spPr>
+        <p:style>
+          <a:lnRef idx="3">
+            <a:schemeClr val="accent2"/>
+          </a:lnRef>
+          <a:fillRef idx="0">
+            <a:schemeClr val="accent2"/>
+          </a:fillRef>
+          <a:effectRef idx="2">
+            <a:schemeClr val="accent2"/>
+          </a:effectRef>
+          <a:fontRef idx="minor">
+            <a:schemeClr val="tx1"/>
+          </a:fontRef>
+        </p:style>
+      </p:cxnSp>
+      <p:sp>
+        <p:nvSpPr>
+          <p:cNvPr id="48" name="TextBox 47">
+            <a:extLst>
+              <a:ext uri="{FF2B5EF4-FFF2-40B4-BE49-F238E27FC236}">
+                <a16:creationId xmlns:a16="http://schemas.microsoft.com/office/drawing/2014/main" id="{210063D6-AB12-4D1A-8DD9-1B596D004A2F}"/>
+              </a:ext>
+            </a:extLst>
+          </p:cNvPr>
+          <p:cNvSpPr txBox="1"/>
+          <p:nvPr/>
+        </p:nvSpPr>
+        <p:spPr>
+          <a:xfrm>
+            <a:off x="2310061" y="4588042"/>
+            <a:ext cx="471458" cy="369332"/>
+          </a:xfrm>
+          <a:prstGeom prst="rect">
+            <a:avLst/>
+          </a:prstGeom>
+          <a:noFill/>
+        </p:spPr>
+        <p:txBody>
+          <a:bodyPr wrap="square" rtlCol="0">
+            <a:spAutoFit/>
+          </a:bodyPr>
+          <a:lstStyle/>
+          <a:p>
+            <a:pPr algn="ctr"/>
+            <a:r>
+              <a:rPr lang="it-IT" dirty="0">
+                <a:solidFill>
+                  <a:schemeClr val="accent2"/>
+                </a:solidFill>
+              </a:rPr>
+              <a:t>20</a:t>
+            </a:r>
+            <a:endParaRPr lang="nl-NL" dirty="0">
+              <a:solidFill>
+                <a:schemeClr val="accent2"/>
+              </a:solidFill>
+            </a:endParaRPr>
+          </a:p>
+        </p:txBody>
+      </p:sp>
+      <p:cxnSp>
+        <p:nvCxnSpPr>
+          <p:cNvPr id="49" name="Straight Connector 48">
+            <a:extLst>
+              <a:ext uri="{FF2B5EF4-FFF2-40B4-BE49-F238E27FC236}">
+                <a16:creationId xmlns:a16="http://schemas.microsoft.com/office/drawing/2014/main" id="{0BD6F6C2-AA8F-4637-B394-6AEB8944AE70}"/>
+              </a:ext>
+            </a:extLst>
+          </p:cNvPr>
+          <p:cNvCxnSpPr/>
+          <p:nvPr/>
+        </p:nvCxnSpPr>
+        <p:spPr>
+          <a:xfrm>
+            <a:off x="351141" y="3890211"/>
+            <a:ext cx="2334126" cy="0"/>
+          </a:xfrm>
+          <a:prstGeom prst="line">
+            <a:avLst/>
+          </a:prstGeom>
+        </p:spPr>
+        <p:style>
+          <a:lnRef idx="3">
+            <a:schemeClr val="accent2"/>
+          </a:lnRef>
+          <a:fillRef idx="0">
+            <a:schemeClr val="accent2"/>
+          </a:fillRef>
+          <a:effectRef idx="2">
+            <a:schemeClr val="accent2"/>
+          </a:effectRef>
+          <a:fontRef idx="minor">
+            <a:schemeClr val="tx1"/>
+          </a:fontRef>
+        </p:style>
+      </p:cxnSp>
+      <p:sp>
+        <p:nvSpPr>
+          <p:cNvPr id="50" name="TextBox 49">
+            <a:extLst>
+              <a:ext uri="{FF2B5EF4-FFF2-40B4-BE49-F238E27FC236}">
+                <a16:creationId xmlns:a16="http://schemas.microsoft.com/office/drawing/2014/main" id="{DC3D5BFC-C2C7-4C0B-8CCD-B5F0EF51BD42}"/>
+              </a:ext>
+            </a:extLst>
+          </p:cNvPr>
+          <p:cNvSpPr txBox="1"/>
+          <p:nvPr/>
+        </p:nvSpPr>
+        <p:spPr>
+          <a:xfrm>
+            <a:off x="2181726" y="3609474"/>
+            <a:ext cx="606029" cy="369332"/>
+          </a:xfrm>
+          <a:prstGeom prst="rect">
+            <a:avLst/>
+          </a:prstGeom>
+          <a:noFill/>
+        </p:spPr>
+        <p:txBody>
+          <a:bodyPr wrap="square" rtlCol="0">
+            <a:spAutoFit/>
+          </a:bodyPr>
+          <a:lstStyle/>
+          <a:p>
+            <a:pPr algn="ctr"/>
+            <a:r>
+              <a:rPr lang="it-IT" dirty="0">
+                <a:solidFill>
+                  <a:schemeClr val="accent2"/>
+                </a:solidFill>
+              </a:rPr>
+              <a:t>300</a:t>
+            </a:r>
+            <a:endParaRPr lang="nl-NL" dirty="0">
+              <a:solidFill>
+                <a:schemeClr val="accent2"/>
+              </a:solidFill>
+            </a:endParaRPr>
+          </a:p>
+        </p:txBody>
+      </p:sp>
+      <p:cxnSp>
+        <p:nvCxnSpPr>
+          <p:cNvPr id="51" name="Straight Connector 50">
+            <a:extLst>
+              <a:ext uri="{FF2B5EF4-FFF2-40B4-BE49-F238E27FC236}">
+                <a16:creationId xmlns:a16="http://schemas.microsoft.com/office/drawing/2014/main" id="{44BEA9E8-8FA9-4EBF-ADB1-F15EF59D545A}"/>
+              </a:ext>
+            </a:extLst>
+          </p:cNvPr>
+          <p:cNvCxnSpPr/>
+          <p:nvPr/>
+        </p:nvCxnSpPr>
+        <p:spPr>
+          <a:xfrm>
+            <a:off x="3376752" y="5219798"/>
+            <a:ext cx="2334126" cy="0"/>
+          </a:xfrm>
+          <a:prstGeom prst="line">
+            <a:avLst/>
+          </a:prstGeom>
+        </p:spPr>
+        <p:style>
+          <a:lnRef idx="3">
+            <a:schemeClr val="accent2"/>
+          </a:lnRef>
+          <a:fillRef idx="0">
+            <a:schemeClr val="accent2"/>
+          </a:fillRef>
+          <a:effectRef idx="2">
+            <a:schemeClr val="accent2"/>
+          </a:effectRef>
+          <a:fontRef idx="minor">
+            <a:schemeClr val="tx1"/>
+          </a:fontRef>
+        </p:style>
+      </p:cxnSp>
+      <p:sp>
+        <p:nvSpPr>
+          <p:cNvPr id="52" name="TextBox 51">
+            <a:extLst>
+              <a:ext uri="{FF2B5EF4-FFF2-40B4-BE49-F238E27FC236}">
+                <a16:creationId xmlns:a16="http://schemas.microsoft.com/office/drawing/2014/main" id="{A166A446-0273-44CD-8582-FA57872289AC}"/>
+              </a:ext>
+            </a:extLst>
+          </p:cNvPr>
+          <p:cNvSpPr txBox="1"/>
+          <p:nvPr/>
+        </p:nvSpPr>
+        <p:spPr>
+          <a:xfrm>
+            <a:off x="5624542" y="5035132"/>
+            <a:ext cx="471458" cy="369332"/>
+          </a:xfrm>
+          <a:prstGeom prst="rect">
+            <a:avLst/>
+          </a:prstGeom>
+          <a:noFill/>
+        </p:spPr>
+        <p:txBody>
+          <a:bodyPr wrap="square" rtlCol="0">
+            <a:spAutoFit/>
+          </a:bodyPr>
+          <a:lstStyle/>
+          <a:p>
+            <a:pPr algn="ctr"/>
+            <a:r>
+              <a:rPr lang="it-IT" dirty="0">
+                <a:solidFill>
+                  <a:schemeClr val="accent2"/>
+                </a:solidFill>
+              </a:rPr>
+              <a:t>20</a:t>
+            </a:r>
+            <a:endParaRPr lang="nl-NL" dirty="0">
+              <a:solidFill>
+                <a:schemeClr val="accent2"/>
+              </a:solidFill>
+            </a:endParaRPr>
+          </a:p>
+        </p:txBody>
+      </p:sp>
+      <p:cxnSp>
+        <p:nvCxnSpPr>
+          <p:cNvPr id="53" name="Straight Connector 52">
+            <a:extLst>
+              <a:ext uri="{FF2B5EF4-FFF2-40B4-BE49-F238E27FC236}">
+                <a16:creationId xmlns:a16="http://schemas.microsoft.com/office/drawing/2014/main" id="{7EEC18CD-74D0-4FAF-8860-CE57F8D1CFA6}"/>
+              </a:ext>
+            </a:extLst>
+          </p:cNvPr>
+          <p:cNvCxnSpPr/>
+          <p:nvPr/>
+        </p:nvCxnSpPr>
+        <p:spPr>
+          <a:xfrm>
+            <a:off x="3382988" y="5112781"/>
+            <a:ext cx="2334126" cy="0"/>
+          </a:xfrm>
+          <a:prstGeom prst="line">
+            <a:avLst/>
+          </a:prstGeom>
+        </p:spPr>
+        <p:style>
+          <a:lnRef idx="3">
+            <a:schemeClr val="accent2"/>
+          </a:lnRef>
+          <a:fillRef idx="0">
+            <a:schemeClr val="accent2"/>
+          </a:fillRef>
+          <a:effectRef idx="2">
+            <a:schemeClr val="accent2"/>
+          </a:effectRef>
+          <a:fontRef idx="minor">
+            <a:schemeClr val="tx1"/>
+          </a:fontRef>
+        </p:style>
+      </p:cxnSp>
+      <p:sp>
+        <p:nvSpPr>
+          <p:cNvPr id="54" name="TextBox 53">
+            <a:extLst>
+              <a:ext uri="{FF2B5EF4-FFF2-40B4-BE49-F238E27FC236}">
+                <a16:creationId xmlns:a16="http://schemas.microsoft.com/office/drawing/2014/main" id="{79388AA8-1909-4DBD-B882-1AB427F2771E}"/>
+              </a:ext>
+            </a:extLst>
+          </p:cNvPr>
+          <p:cNvSpPr txBox="1"/>
+          <p:nvPr/>
+        </p:nvSpPr>
+        <p:spPr>
+          <a:xfrm>
+            <a:off x="5566173" y="4796958"/>
+            <a:ext cx="606029" cy="369332"/>
+          </a:xfrm>
+          <a:prstGeom prst="rect">
+            <a:avLst/>
+          </a:prstGeom>
+          <a:noFill/>
+        </p:spPr>
+        <p:txBody>
+          <a:bodyPr wrap="square" rtlCol="0">
+            <a:spAutoFit/>
+          </a:bodyPr>
+          <a:lstStyle/>
+          <a:p>
+            <a:pPr algn="ctr"/>
+            <a:r>
+              <a:rPr lang="it-IT" dirty="0">
+                <a:solidFill>
+                  <a:schemeClr val="accent2"/>
+                </a:solidFill>
+              </a:rPr>
+              <a:t>300</a:t>
+            </a:r>
+            <a:endParaRPr lang="nl-NL" dirty="0">
+              <a:solidFill>
+                <a:schemeClr val="accent2"/>
+              </a:solidFill>
+            </a:endParaRPr>
+          </a:p>
+        </p:txBody>
+      </p:sp>
+      <p:sp>
+        <p:nvSpPr>
+          <p:cNvPr id="55" name="Arrow: Right 54">
+            <a:extLst>
+              <a:ext uri="{FF2B5EF4-FFF2-40B4-BE49-F238E27FC236}">
+                <a16:creationId xmlns:a16="http://schemas.microsoft.com/office/drawing/2014/main" id="{CF186115-EF21-4E45-BA1A-F7A01B55B725}"/>
+              </a:ext>
+            </a:extLst>
+          </p:cNvPr>
+          <p:cNvSpPr/>
+          <p:nvPr/>
+        </p:nvSpPr>
+        <p:spPr>
+          <a:xfrm>
+            <a:off x="5654279" y="3364185"/>
+            <a:ext cx="1094205" cy="369332"/>
+          </a:xfrm>
+          <a:prstGeom prst="rightArrow">
+            <a:avLst/>
+          </a:prstGeom>
+        </p:spPr>
+        <p:style>
+          <a:lnRef idx="2">
+            <a:schemeClr val="accent2">
+              <a:shade val="50000"/>
+            </a:schemeClr>
+          </a:lnRef>
+          <a:fillRef idx="1">
+            <a:schemeClr val="accent2"/>
+          </a:fillRef>
+          <a:effectRef idx="0">
+            <a:schemeClr val="accent2"/>
+          </a:effectRef>
+          <a:fontRef idx="minor">
+            <a:schemeClr val="lt1"/>
+          </a:fontRef>
+        </p:style>
+        <p:txBody>
+          <a:bodyPr rtlCol="0" anchor="ctr"/>
+          <a:lstStyle/>
+          <a:p>
+            <a:pPr algn="ctr"/>
+            <a:endParaRPr lang="nl-NL"/>
+          </a:p>
+        </p:txBody>
+      </p:sp>
+      <p:sp>
+        <p:nvSpPr>
+          <p:cNvPr id="57" name="Oval 56">
+            <a:extLst>
+              <a:ext uri="{FF2B5EF4-FFF2-40B4-BE49-F238E27FC236}">
+                <a16:creationId xmlns:a16="http://schemas.microsoft.com/office/drawing/2014/main" id="{F946F1D0-67D6-45FC-AEDB-3F765ADB089F}"/>
+              </a:ext>
+            </a:extLst>
+          </p:cNvPr>
+          <p:cNvSpPr/>
+          <p:nvPr/>
+        </p:nvSpPr>
+        <p:spPr>
+          <a:xfrm>
+            <a:off x="1444235" y="4886330"/>
+            <a:ext cx="352926" cy="473862"/>
+          </a:xfrm>
+          <a:prstGeom prst="ellipse">
+            <a:avLst/>
+          </a:prstGeom>
+          <a:noFill/>
+          <a:ln w="9525" cap="flat" cmpd="sng" algn="ctr">
+            <a:solidFill>
+              <a:schemeClr val="accent1"/>
+            </a:solidFill>
+            <a:prstDash val="solid"/>
+            <a:round/>
+            <a:headEnd type="none" w="med" len="med"/>
+            <a:tailEnd type="none" w="med" len="med"/>
+          </a:ln>
+        </p:spPr>
+        <p:style>
+          <a:lnRef idx="0">
+            <a:scrgbClr r="0" g="0" b="0"/>
+          </a:lnRef>
+          <a:fillRef idx="0">
+            <a:scrgbClr r="0" g="0" b="0"/>
+          </a:fillRef>
+          <a:effectRef idx="0">
+            <a:scrgbClr r="0" g="0" b="0"/>
+          </a:effectRef>
+          <a:fontRef idx="minor">
+            <a:schemeClr val="accent1"/>
+          </a:fontRef>
+        </p:style>
+        <p:txBody>
+          <a:bodyPr rtlCol="0" anchor="ctr"/>
+          <a:lstStyle/>
+          <a:p>
+            <a:pPr algn="ctr"/>
+            <a:endParaRPr lang="nl-NL"/>
+          </a:p>
+        </p:txBody>
+      </p:sp>
+    </p:spTree>
+    <p:extLst>
+      <p:ext uri="{BB962C8B-B14F-4D97-AF65-F5344CB8AC3E}">
+        <p14:creationId xmlns:p14="http://schemas.microsoft.com/office/powerpoint/2010/main" val="2308014033"/>
+      </p:ext>
+    </p:extLst>
+  </p:cSld>
+  <p:clrMapOvr>
+    <a:masterClrMapping/>
+  </p:clrMapOvr>
+  <mc:AlternateContent xmlns:mc="http://schemas.openxmlformats.org/markup-compatibility/2006" xmlns:p159="http://schemas.microsoft.com/office/powerpoint/2015/09/main">
+    <mc:Choice Requires="p159">
+      <p:transition xmlns:p14="http://schemas.microsoft.com/office/powerpoint/2010/main" spd="slow" p14:dur="2000">
+        <p159:morph option="byObject"/>
+      </p:transition>
+    </mc:Choice>
+    <mc:Fallback xmlns="">
+      <p:transition spd="slow">
+        <p:fade/>
+      </p:transition>
+    </mc:Fallback>
+  </mc:AlternateContent>
+</p:sld>
+</file>
+
+<file path=ppt/slides/slide23.xml><?xml version="1.0" encoding="utf-8"?>
+<p:sld xmlns:a="http://schemas.openxmlformats.org/drawingml/2006/main" xmlns:r="http://schemas.openxmlformats.org/officeDocument/2006/relationships" xmlns:p="http://schemas.openxmlformats.org/presentationml/2006/main">
+  <p:cSld>
+    <p:spTree>
+      <p:nvGrpSpPr>
+        <p:cNvPr id="1" name=""/>
+        <p:cNvGrpSpPr/>
+        <p:nvPr/>
+      </p:nvGrpSpPr>
+      <p:grpSpPr>
+        <a:xfrm>
+          <a:off x="0" y="0"/>
+          <a:ext cx="0" cy="0"/>
+          <a:chOff x="0" y="0"/>
+          <a:chExt cx="0" cy="0"/>
+        </a:xfrm>
+      </p:grpSpPr>
+      <p:pic>
+        <p:nvPicPr>
+          <p:cNvPr id="2" name="Picture 1">
+            <a:extLst>
+              <a:ext uri="{FF2B5EF4-FFF2-40B4-BE49-F238E27FC236}">
+                <a16:creationId xmlns:a16="http://schemas.microsoft.com/office/drawing/2014/main" id="{EFCA64AE-70C0-46DC-9DE0-3BD016877CF0}"/>
+              </a:ext>
+            </a:extLst>
+          </p:cNvPr>
+          <p:cNvPicPr>
+            <a:picLocks noChangeAspect="1"/>
+          </p:cNvPicPr>
+          <p:nvPr/>
+        </p:nvPicPr>
+        <p:blipFill>
+          <a:blip r:embed="rId2">
+            <a:extLst>
+              <a:ext uri="{28A0092B-C50C-407E-A947-70E740481C1C}">
+                <a14:useLocalDpi xmlns:a14="http://schemas.microsoft.com/office/drawing/2010/main" val="0"/>
+              </a:ext>
+            </a:extLst>
+          </a:blip>
+          <a:stretch>
+            <a:fillRect/>
+          </a:stretch>
+        </p:blipFill>
+        <p:spPr>
+          <a:xfrm>
+            <a:off x="2471014" y="2125452"/>
+            <a:ext cx="7249970" cy="4405816"/>
+          </a:xfrm>
+          <a:prstGeom prst="rect">
+            <a:avLst/>
+          </a:prstGeom>
+        </p:spPr>
+      </p:pic>
+      <p:sp>
+        <p:nvSpPr>
+          <p:cNvPr id="3" name="TextBox 2">
+            <a:extLst>
+              <a:ext uri="{FF2B5EF4-FFF2-40B4-BE49-F238E27FC236}">
+                <a16:creationId xmlns:a16="http://schemas.microsoft.com/office/drawing/2014/main" id="{669BC41E-7A1B-450B-AE56-57E23EBB368B}"/>
+              </a:ext>
+            </a:extLst>
+          </p:cNvPr>
+          <p:cNvSpPr txBox="1"/>
+          <p:nvPr/>
+        </p:nvSpPr>
+        <p:spPr>
+          <a:xfrm>
+            <a:off x="0" y="0"/>
+            <a:ext cx="4395537" cy="369332"/>
+          </a:xfrm>
+          <a:prstGeom prst="rect">
+            <a:avLst/>
+          </a:prstGeom>
+          <a:noFill/>
+        </p:spPr>
+        <p:txBody>
+          <a:bodyPr wrap="square" rtlCol="0">
+            <a:spAutoFit/>
+          </a:bodyPr>
+          <a:lstStyle/>
+          <a:p>
+            <a:r>
+              <a:rPr lang="it-IT" u="sng" dirty="0"/>
+              <a:t>Blood Pressure Measurements - Outliers</a:t>
+            </a:r>
+            <a:endParaRPr lang="nl-NL" u="sng" dirty="0"/>
+          </a:p>
+        </p:txBody>
+      </p:sp>
+      <p:sp>
+        <p:nvSpPr>
+          <p:cNvPr id="4" name="TextBox 3">
+            <a:extLst>
+              <a:ext uri="{FF2B5EF4-FFF2-40B4-BE49-F238E27FC236}">
+                <a16:creationId xmlns:a16="http://schemas.microsoft.com/office/drawing/2014/main" id="{9D83727A-AEE6-4E01-9A07-195FB57628BF}"/>
+              </a:ext>
+            </a:extLst>
+          </p:cNvPr>
+          <p:cNvSpPr txBox="1"/>
+          <p:nvPr/>
+        </p:nvSpPr>
+        <p:spPr>
+          <a:xfrm>
+            <a:off x="2709862" y="811929"/>
+            <a:ext cx="6772275" cy="1200329"/>
+          </a:xfrm>
+          <a:prstGeom prst="rect">
+            <a:avLst/>
+          </a:prstGeom>
+          <a:noFill/>
+        </p:spPr>
+        <p:txBody>
+          <a:bodyPr wrap="square" rtlCol="0">
+            <a:spAutoFit/>
+          </a:bodyPr>
+          <a:lstStyle/>
+          <a:p>
+            <a:pPr algn="ctr"/>
+            <a:r>
+              <a:rPr lang="it-IT" sz="2400" dirty="0"/>
+              <a:t>Replaced with Mean value </a:t>
+            </a:r>
+          </a:p>
+          <a:p>
+            <a:pPr algn="ctr"/>
+            <a:r>
+              <a:rPr lang="it-IT" sz="2400" dirty="0"/>
+              <a:t>if </a:t>
+            </a:r>
+          </a:p>
+          <a:p>
+            <a:pPr algn="ctr"/>
+            <a:r>
+              <a:rPr lang="it-IT" sz="2400" dirty="0"/>
+              <a:t>|BP</a:t>
+            </a:r>
+            <a:r>
+              <a:rPr lang="it-IT" sz="2400" baseline="-25000" dirty="0"/>
+              <a:t>Sys,Dia</a:t>
+            </a:r>
+            <a:r>
+              <a:rPr lang="it-IT" sz="2400" dirty="0"/>
+              <a:t>| </a:t>
+            </a:r>
+            <a:r>
+              <a:rPr lang="nl-NL" sz="2400" dirty="0"/>
+              <a:t>&lt; 3·</a:t>
+            </a:r>
+            <a:r>
+              <a:rPr lang="el-GR" sz="2400" dirty="0"/>
+              <a:t>σ</a:t>
+            </a:r>
+            <a:endParaRPr lang="nl-NL" sz="2400" dirty="0"/>
+          </a:p>
+        </p:txBody>
+      </p:sp>
+    </p:spTree>
+    <p:extLst>
+      <p:ext uri="{BB962C8B-B14F-4D97-AF65-F5344CB8AC3E}">
+        <p14:creationId xmlns:p14="http://schemas.microsoft.com/office/powerpoint/2010/main" val="483860090"/>
+      </p:ext>
+    </p:extLst>
+  </p:cSld>
+  <p:clrMapOvr>
+    <a:masterClrMapping/>
+  </p:clrMapOvr>
+  <mc:AlternateContent xmlns:mc="http://schemas.openxmlformats.org/markup-compatibility/2006" xmlns:p159="http://schemas.microsoft.com/office/powerpoint/2015/09/main">
+    <mc:Choice Requires="p159">
+      <p:transition xmlns:p14="http://schemas.microsoft.com/office/powerpoint/2010/main" spd="slow" p14:dur="2000">
+        <p159:morph option="byObject"/>
+      </p:transition>
+    </mc:Choice>
+    <mc:Fallback xmlns="">
+      <p:transition spd="slow">
+        <p:fade/>
+      </p:transition>
+    </mc:Fallback>
+  </mc:AlternateContent>
+</p:sld>
+</file>
+
+<file path=ppt/slides/slide24.xml><?xml version="1.0" encoding="utf-8"?>
+<p:sld xmlns:a="http://schemas.openxmlformats.org/drawingml/2006/main" xmlns:r="http://schemas.openxmlformats.org/officeDocument/2006/relationships" xmlns:p="http://schemas.openxmlformats.org/presentationml/2006/main">
+  <p:cSld>
+    <p:spTree>
+      <p:nvGrpSpPr>
+        <p:cNvPr id="1" name=""/>
+        <p:cNvGrpSpPr/>
+        <p:nvPr/>
+      </p:nvGrpSpPr>
+      <p:grpSpPr>
+        <a:xfrm>
+          <a:off x="0" y="0"/>
+          <a:ext cx="0" cy="0"/>
+          <a:chOff x="0" y="0"/>
+          <a:chExt cx="0" cy="0"/>
+        </a:xfrm>
+      </p:grpSpPr>
+      <p:sp>
+        <p:nvSpPr>
+          <p:cNvPr id="2" name="Title 1">
+            <a:extLst>
+              <a:ext uri="{FF2B5EF4-FFF2-40B4-BE49-F238E27FC236}">
                 <a16:creationId xmlns:a16="http://schemas.microsoft.com/office/drawing/2014/main" id="{E2742523-2057-44B4-9FB1-A3B7126FBF7F}"/>
               </a:ext>
             </a:extLst>
@@ -7117,7 +7500,7 @@
 </p:sld>
 </file>
 
-<file path=ppt/slides/slide22.xml><?xml version="1.0" encoding="utf-8"?>
+<file path=ppt/slides/slide25.xml><?xml version="1.0" encoding="utf-8"?>
 <p:sld xmlns:a="http://schemas.openxmlformats.org/drawingml/2006/main" xmlns:r="http://schemas.openxmlformats.org/officeDocument/2006/relationships" xmlns:p="http://schemas.openxmlformats.org/presentationml/2006/main">
   <p:cSld>
     <p:spTree>
@@ -7468,7 +7851,7 @@
 </p:sld>
 </file>
 
-<file path=ppt/slides/slide23.xml><?xml version="1.0" encoding="utf-8"?>
+<file path=ppt/slides/slide26.xml><?xml version="1.0" encoding="utf-8"?>
 <p:sld xmlns:a="http://schemas.openxmlformats.org/drawingml/2006/main" xmlns:r="http://schemas.openxmlformats.org/officeDocument/2006/relationships" xmlns:p="http://schemas.openxmlformats.org/presentationml/2006/main">
   <p:cSld>
     <p:spTree>
@@ -7837,7 +8220,7 @@
 </p:sld>
 </file>
 
-<file path=ppt/slides/slide24.xml><?xml version="1.0" encoding="utf-8"?>
+<file path=ppt/slides/slide27.xml><?xml version="1.0" encoding="utf-8"?>
 <p:sld xmlns:a="http://schemas.openxmlformats.org/drawingml/2006/main" xmlns:r="http://schemas.openxmlformats.org/officeDocument/2006/relationships" xmlns:p="http://schemas.openxmlformats.org/presentationml/2006/main">
   <p:cSld>
     <p:spTree>
@@ -8329,7 +8712,7 @@
 </p:sld>
 </file>
 
-<file path=ppt/slides/slide25.xml><?xml version="1.0" encoding="utf-8"?>
+<file path=ppt/slides/slide28.xml><?xml version="1.0" encoding="utf-8"?>
 <p:sld xmlns:a="http://schemas.openxmlformats.org/drawingml/2006/main" xmlns:r="http://schemas.openxmlformats.org/officeDocument/2006/relationships" xmlns:p="http://schemas.openxmlformats.org/presentationml/2006/main">
   <p:cSld>
     <p:spTree>

--- a/assets/ppt/data_exploration.pptx
+++ b/assets/ppt/data_exploration.pptx
@@ -13,14 +13,14 @@
     <p:sldId id="256" r:id="rId4"/>
     <p:sldId id="266" r:id="rId5"/>
     <p:sldId id="258" r:id="rId6"/>
-    <p:sldId id="280" r:id="rId7"/>
-    <p:sldId id="281" r:id="rId8"/>
-    <p:sldId id="262" r:id="rId9"/>
-    <p:sldId id="260" r:id="rId10"/>
-    <p:sldId id="261" r:id="rId11"/>
-    <p:sldId id="265" r:id="rId12"/>
-    <p:sldId id="264" r:id="rId13"/>
-    <p:sldId id="263" r:id="rId14"/>
+    <p:sldId id="281" r:id="rId7"/>
+    <p:sldId id="262" r:id="rId8"/>
+    <p:sldId id="260" r:id="rId9"/>
+    <p:sldId id="261" r:id="rId10"/>
+    <p:sldId id="265" r:id="rId11"/>
+    <p:sldId id="264" r:id="rId12"/>
+    <p:sldId id="263" r:id="rId13"/>
+    <p:sldId id="280" r:id="rId14"/>
     <p:sldId id="282" r:id="rId15"/>
     <p:sldId id="283" r:id="rId16"/>
     <p:sldId id="284" r:id="rId17"/>
@@ -1525,7 +1525,7 @@
   </p:clrMapOvr>
   <mc:AlternateContent xmlns:mc="http://schemas.openxmlformats.org/markup-compatibility/2006" xmlns:p159="http://schemas.microsoft.com/office/powerpoint/2015/09/main">
     <mc:Choice Requires="p159">
-      <p:transition xmlns:p14="http://schemas.microsoft.com/office/powerpoint/2010/main" spd="slow" p14:dur="2000">
+      <p:transition spd="slow">
         <p159:morph option="byObject"/>
       </p:transition>
     </mc:Choice>
@@ -1737,7 +1737,7 @@
   </p:clrMapOvr>
   <mc:AlternateContent xmlns:mc="http://schemas.openxmlformats.org/markup-compatibility/2006" xmlns:p159="http://schemas.microsoft.com/office/powerpoint/2015/09/main">
     <mc:Choice Requires="p159">
-      <p:transition xmlns:p14="http://schemas.microsoft.com/office/powerpoint/2010/main" spd="slow" p14:dur="2000">
+      <p:transition spd="slow">
         <p159:morph option="byObject"/>
       </p:transition>
     </mc:Choice>
@@ -1959,7 +1959,7 @@
   </p:clrMapOvr>
   <mc:AlternateContent xmlns:mc="http://schemas.openxmlformats.org/markup-compatibility/2006" xmlns:p159="http://schemas.microsoft.com/office/powerpoint/2015/09/main">
     <mc:Choice Requires="p159">
-      <p:transition xmlns:p14="http://schemas.microsoft.com/office/powerpoint/2010/main" spd="slow" p14:dur="2000">
+      <p:transition spd="slow">
         <p159:morph option="byObject"/>
       </p:transition>
     </mc:Choice>
@@ -2171,7 +2171,7 @@
   </p:clrMapOvr>
   <mc:AlternateContent xmlns:mc="http://schemas.openxmlformats.org/markup-compatibility/2006" xmlns:p159="http://schemas.microsoft.com/office/powerpoint/2015/09/main">
     <mc:Choice Requires="p159">
-      <p:transition xmlns:p14="http://schemas.microsoft.com/office/powerpoint/2010/main" spd="slow" p14:dur="2000">
+      <p:transition spd="slow">
         <p159:morph option="byObject"/>
       </p:transition>
     </mc:Choice>
@@ -2459,7 +2459,7 @@
   </p:clrMapOvr>
   <mc:AlternateContent xmlns:mc="http://schemas.openxmlformats.org/markup-compatibility/2006" xmlns:p159="http://schemas.microsoft.com/office/powerpoint/2015/09/main">
     <mc:Choice Requires="p159">
-      <p:transition xmlns:p14="http://schemas.microsoft.com/office/powerpoint/2010/main" spd="slow" p14:dur="2000">
+      <p:transition spd="slow">
         <p159:morph option="byObject"/>
       </p:transition>
     </mc:Choice>
@@ -2739,7 +2739,7 @@
   </p:clrMapOvr>
   <mc:AlternateContent xmlns:mc="http://schemas.openxmlformats.org/markup-compatibility/2006" xmlns:p159="http://schemas.microsoft.com/office/powerpoint/2015/09/main">
     <mc:Choice Requires="p159">
-      <p:transition xmlns:p14="http://schemas.microsoft.com/office/powerpoint/2010/main" spd="slow" p14:dur="2000">
+      <p:transition spd="slow">
         <p159:morph option="byObject"/>
       </p:transition>
     </mc:Choice>
@@ -3166,7 +3166,7 @@
   </p:clrMapOvr>
   <mc:AlternateContent xmlns:mc="http://schemas.openxmlformats.org/markup-compatibility/2006" xmlns:p159="http://schemas.microsoft.com/office/powerpoint/2015/09/main">
     <mc:Choice Requires="p159">
-      <p:transition xmlns:p14="http://schemas.microsoft.com/office/powerpoint/2010/main" spd="slow" p14:dur="2000">
+      <p:transition spd="slow">
         <p159:morph option="byObject"/>
       </p:transition>
     </mc:Choice>
@@ -3320,7 +3320,7 @@
   </p:clrMapOvr>
   <mc:AlternateContent xmlns:mc="http://schemas.openxmlformats.org/markup-compatibility/2006" xmlns:p159="http://schemas.microsoft.com/office/powerpoint/2015/09/main">
     <mc:Choice Requires="p159">
-      <p:transition xmlns:p14="http://schemas.microsoft.com/office/powerpoint/2010/main" spd="slow" p14:dur="2000">
+      <p:transition spd="slow">
         <p159:morph option="byObject"/>
       </p:transition>
     </mc:Choice>
@@ -3445,7 +3445,7 @@
   </p:clrMapOvr>
   <mc:AlternateContent xmlns:mc="http://schemas.openxmlformats.org/markup-compatibility/2006" xmlns:p159="http://schemas.microsoft.com/office/powerpoint/2015/09/main">
     <mc:Choice Requires="p159">
-      <p:transition xmlns:p14="http://schemas.microsoft.com/office/powerpoint/2010/main" spd="slow" p14:dur="2000">
+      <p:transition spd="slow">
         <p159:morph option="byObject"/>
       </p:transition>
     </mc:Choice>
@@ -3770,7 +3770,7 @@
   </p:clrMapOvr>
   <mc:AlternateContent xmlns:mc="http://schemas.openxmlformats.org/markup-compatibility/2006" xmlns:p159="http://schemas.microsoft.com/office/powerpoint/2015/09/main">
     <mc:Choice Requires="p159">
-      <p:transition xmlns:p14="http://schemas.microsoft.com/office/powerpoint/2010/main" spd="slow" p14:dur="2000">
+      <p:transition spd="slow">
         <p159:morph option="byObject"/>
       </p:transition>
     </mc:Choice>
@@ -4071,7 +4071,7 @@
   </p:clrMapOvr>
   <mc:AlternateContent xmlns:mc="http://schemas.openxmlformats.org/markup-compatibility/2006" xmlns:p159="http://schemas.microsoft.com/office/powerpoint/2015/09/main">
     <mc:Choice Requires="p159">
-      <p:transition xmlns:p14="http://schemas.microsoft.com/office/powerpoint/2010/main" spd="slow" p14:dur="2000">
+      <p:transition spd="slow">
         <p159:morph option="byObject"/>
       </p:transition>
     </mc:Choice>
@@ -4373,7 +4373,7 @@
   </p:sldLayoutIdLst>
   <mc:AlternateContent xmlns:mc="http://schemas.openxmlformats.org/markup-compatibility/2006" xmlns:p159="http://schemas.microsoft.com/office/powerpoint/2015/09/main">
     <mc:Choice Requires="p159">
-      <p:transition xmlns:p14="http://schemas.microsoft.com/office/powerpoint/2010/main" spd="slow" p14:dur="2000">
+      <p:transition spd="slow">
         <p159:morph option="byObject"/>
       </p:transition>
     </mc:Choice>
@@ -4725,7 +4725,7 @@
   </p:clrMapOvr>
   <mc:AlternateContent xmlns:mc="http://schemas.openxmlformats.org/markup-compatibility/2006" xmlns:p159="http://schemas.microsoft.com/office/powerpoint/2015/09/main">
     <mc:Choice Requires="p159">
-      <p:transition xmlns:p14="http://schemas.microsoft.com/office/powerpoint/2010/main" spd="slow" p14:dur="2000">
+      <p:transition spd="slow">
         <p159:morph option="byObject"/>
       </p:transition>
     </mc:Choice>
@@ -4757,10 +4757,10 @@
       </p:grpSpPr>
       <p:pic>
         <p:nvPicPr>
-          <p:cNvPr id="3" name="Graphic 2">
-            <a:extLst>
-              <a:ext uri="{FF2B5EF4-FFF2-40B4-BE49-F238E27FC236}">
-                <a16:creationId xmlns:a16="http://schemas.microsoft.com/office/drawing/2014/main" id="{5104F63A-8305-48CC-A7C8-38D27F499ADB}"/>
+          <p:cNvPr id="4" name="Picture 3">
+            <a:extLst>
+              <a:ext uri="{FF2B5EF4-FFF2-40B4-BE49-F238E27FC236}">
+                <a16:creationId xmlns:a16="http://schemas.microsoft.com/office/drawing/2014/main" id="{50D4D3CB-2C2F-4524-B868-41FAEA9F06E8}"/>
               </a:ext>
             </a:extLst>
           </p:cNvPr>
@@ -4770,229 +4770,147 @@
           <p:nvPr/>
         </p:nvPicPr>
         <p:blipFill>
-          <a:blip r:embed="rId2">
-            <a:extLst>
-              <a:ext uri="{28A0092B-C50C-407E-A947-70E740481C1C}">
-                <a14:useLocalDpi xmlns:a14="http://schemas.microsoft.com/office/drawing/2010/main" val="0"/>
-              </a:ext>
-              <a:ext uri="{96DAC541-7B7A-43D3-8B79-37D633B846F1}">
-                <asvg:svgBlip xmlns:asvg="http://schemas.microsoft.com/office/drawing/2016/SVG/main" r:embed="rId3"/>
-              </a:ext>
-            </a:extLst>
-          </a:blip>
+          <a:blip r:embed="rId2"/>
           <a:stretch>
             <a:fillRect/>
           </a:stretch>
         </p:blipFill>
         <p:spPr>
           <a:xfrm>
-            <a:off x="6955860" y="3300410"/>
-            <a:ext cx="4471895" cy="3357563"/>
+            <a:off x="4014497" y="2219156"/>
+            <a:ext cx="4163006" cy="2419688"/>
           </a:xfrm>
           <a:prstGeom prst="rect">
             <a:avLst/>
           </a:prstGeom>
         </p:spPr>
       </p:pic>
-      <p:pic>
-        <p:nvPicPr>
-          <p:cNvPr id="5" name="Graphic 4">
-            <a:extLst>
-              <a:ext uri="{FF2B5EF4-FFF2-40B4-BE49-F238E27FC236}">
-                <a16:creationId xmlns:a16="http://schemas.microsoft.com/office/drawing/2014/main" id="{B68B9AC6-63AF-4D04-8412-F617E4BD1E25}"/>
-              </a:ext>
-            </a:extLst>
-          </p:cNvPr>
-          <p:cNvPicPr>
-            <a:picLocks noChangeAspect="1"/>
-          </p:cNvPicPr>
+      <p:sp>
+        <p:nvSpPr>
+          <p:cNvPr id="5" name="TextBox 4">
+            <a:extLst>
+              <a:ext uri="{FF2B5EF4-FFF2-40B4-BE49-F238E27FC236}">
+                <a16:creationId xmlns:a16="http://schemas.microsoft.com/office/drawing/2014/main" id="{D514EC3D-B477-4A30-911C-BD0F244670E3}"/>
+              </a:ext>
+            </a:extLst>
+          </p:cNvPr>
+          <p:cNvSpPr txBox="1"/>
           <p:nvPr/>
-        </p:nvPicPr>
-        <p:blipFill>
-          <a:blip r:embed="rId4">
-            <a:extLst>
-              <a:ext uri="{28A0092B-C50C-407E-A947-70E740481C1C}">
-                <a14:useLocalDpi xmlns:a14="http://schemas.microsoft.com/office/drawing/2010/main" val="0"/>
-              </a:ext>
-              <a:ext uri="{96DAC541-7B7A-43D3-8B79-37D633B846F1}">
-                <asvg:svgBlip xmlns:asvg="http://schemas.microsoft.com/office/drawing/2016/SVG/main" r:embed="rId5"/>
-              </a:ext>
-            </a:extLst>
-          </a:blip>
-          <a:stretch>
-            <a:fillRect/>
-          </a:stretch>
-        </p:blipFill>
+        </p:nvSpPr>
         <p:spPr>
           <a:xfrm>
-            <a:off x="915392" y="3300411"/>
-            <a:ext cx="4471895" cy="3357563"/>
+            <a:off x="0" y="0"/>
+            <a:ext cx="2289908" cy="369332"/>
           </a:xfrm>
           <a:prstGeom prst="rect">
             <a:avLst/>
           </a:prstGeom>
+          <a:noFill/>
         </p:spPr>
-      </p:pic>
-      <p:pic>
-        <p:nvPicPr>
-          <p:cNvPr id="7" name="Graphic 6">
-            <a:extLst>
-              <a:ext uri="{FF2B5EF4-FFF2-40B4-BE49-F238E27FC236}">
-                <a16:creationId xmlns:a16="http://schemas.microsoft.com/office/drawing/2014/main" id="{A67BD1E4-1078-48C8-A0CC-A8F92079F4D0}"/>
-              </a:ext>
-            </a:extLst>
-          </p:cNvPr>
-          <p:cNvPicPr>
-            <a:picLocks noChangeAspect="1"/>
-          </p:cNvPicPr>
+        <p:txBody>
+          <a:bodyPr wrap="square" rtlCol="0">
+            <a:spAutoFit/>
+          </a:bodyPr>
+          <a:lstStyle/>
+          <a:p>
+            <a:r>
+              <a:rPr lang="it-IT" u="sng" dirty="0"/>
+              <a:t>MICE Forest</a:t>
+            </a:r>
+            <a:endParaRPr lang="nl-NL" u="sng" dirty="0"/>
+          </a:p>
+        </p:txBody>
+      </p:sp>
+      <p:sp>
+        <p:nvSpPr>
+          <p:cNvPr id="7" name="Arrow: Down 6">
+            <a:extLst>
+              <a:ext uri="{FF2B5EF4-FFF2-40B4-BE49-F238E27FC236}">
+                <a16:creationId xmlns:a16="http://schemas.microsoft.com/office/drawing/2014/main" id="{A2FC79F2-6630-4E33-A4C3-8D9A42B46FEF}"/>
+              </a:ext>
+            </a:extLst>
+          </p:cNvPr>
+          <p:cNvSpPr/>
           <p:nvPr/>
-        </p:nvPicPr>
-        <p:blipFill>
-          <a:blip r:embed="rId6">
-            <a:extLst>
-              <a:ext uri="{28A0092B-C50C-407E-A947-70E740481C1C}">
-                <a14:useLocalDpi xmlns:a14="http://schemas.microsoft.com/office/drawing/2010/main" val="0"/>
-              </a:ext>
-              <a:ext uri="{96DAC541-7B7A-43D3-8B79-37D633B846F1}">
-                <asvg:svgBlip xmlns:asvg="http://schemas.microsoft.com/office/drawing/2016/SVG/main" r:embed="rId7"/>
-              </a:ext>
-            </a:extLst>
-          </a:blip>
-          <a:stretch>
-            <a:fillRect/>
-          </a:stretch>
-        </p:blipFill>
+        </p:nvSpPr>
+        <p:spPr>
+          <a:xfrm rot="4638552">
+            <a:off x="7604369" y="3141785"/>
+            <a:ext cx="140677" cy="1742831"/>
+          </a:xfrm>
+          <a:prstGeom prst="downArrow">
+            <a:avLst/>
+          </a:prstGeom>
+        </p:spPr>
+        <p:style>
+          <a:lnRef idx="0">
+            <a:schemeClr val="accent1"/>
+          </a:lnRef>
+          <a:fillRef idx="3">
+            <a:schemeClr val="accent1"/>
+          </a:fillRef>
+          <a:effectRef idx="3">
+            <a:schemeClr val="accent1"/>
+          </a:effectRef>
+          <a:fontRef idx="minor">
+            <a:schemeClr val="lt1"/>
+          </a:fontRef>
+        </p:style>
+        <p:txBody>
+          <a:bodyPr rtlCol="0" anchor="ctr"/>
+          <a:lstStyle/>
+          <a:p>
+            <a:pPr algn="ctr"/>
+            <a:endParaRPr lang="nl-NL"/>
+          </a:p>
+        </p:txBody>
+      </p:sp>
+      <p:sp>
+        <p:nvSpPr>
+          <p:cNvPr id="8" name="TextBox 7">
+            <a:extLst>
+              <a:ext uri="{FF2B5EF4-FFF2-40B4-BE49-F238E27FC236}">
+                <a16:creationId xmlns:a16="http://schemas.microsoft.com/office/drawing/2014/main" id="{F80A6ACB-2D2C-4E4F-96F1-0D3837C836FC}"/>
+              </a:ext>
+            </a:extLst>
+          </p:cNvPr>
+          <p:cNvSpPr txBox="1"/>
+          <p:nvPr/>
+        </p:nvSpPr>
         <p:spPr>
           <a:xfrm>
-            <a:off x="8416461" y="0"/>
-            <a:ext cx="4471895" cy="3357563"/>
+            <a:off x="8519452" y="3476396"/>
+            <a:ext cx="2360246" cy="646331"/>
           </a:xfrm>
           <a:prstGeom prst="rect">
             <a:avLst/>
           </a:prstGeom>
+          <a:noFill/>
         </p:spPr>
-      </p:pic>
-      <p:pic>
-        <p:nvPicPr>
-          <p:cNvPr id="9" name="Graphic 8">
-            <a:extLst>
-              <a:ext uri="{FF2B5EF4-FFF2-40B4-BE49-F238E27FC236}">
-                <a16:creationId xmlns:a16="http://schemas.microsoft.com/office/drawing/2014/main" id="{9FBB4D53-4F61-4420-B2EA-5DBB2190FBDD}"/>
-              </a:ext>
-            </a:extLst>
-          </p:cNvPr>
-          <p:cNvPicPr>
-            <a:picLocks noChangeAspect="1"/>
-          </p:cNvPicPr>
-          <p:nvPr/>
-        </p:nvPicPr>
-        <p:blipFill>
-          <a:blip r:embed="rId8">
-            <a:extLst>
-              <a:ext uri="{28A0092B-C50C-407E-A947-70E740481C1C}">
-                <a14:useLocalDpi xmlns:a14="http://schemas.microsoft.com/office/drawing/2010/main" val="0"/>
-              </a:ext>
-              <a:ext uri="{96DAC541-7B7A-43D3-8B79-37D633B846F1}">
-                <asvg:svgBlip xmlns:asvg="http://schemas.microsoft.com/office/drawing/2016/SVG/main" r:embed="rId9"/>
-              </a:ext>
-            </a:extLst>
-          </a:blip>
-          <a:stretch>
-            <a:fillRect/>
-          </a:stretch>
-        </p:blipFill>
-        <p:spPr>
-          <a:xfrm>
-            <a:off x="5405166" y="0"/>
-            <a:ext cx="4471895" cy="3357563"/>
-          </a:xfrm>
-          <a:prstGeom prst="rect">
-            <a:avLst/>
-          </a:prstGeom>
-        </p:spPr>
-      </p:pic>
-      <p:pic>
-        <p:nvPicPr>
-          <p:cNvPr id="11" name="Graphic 10">
-            <a:extLst>
-              <a:ext uri="{FF2B5EF4-FFF2-40B4-BE49-F238E27FC236}">
-                <a16:creationId xmlns:a16="http://schemas.microsoft.com/office/drawing/2014/main" id="{9947BBB5-44C5-48CF-969E-441FAF4420ED}"/>
-              </a:ext>
-            </a:extLst>
-          </p:cNvPr>
-          <p:cNvPicPr>
-            <a:picLocks noChangeAspect="1"/>
-          </p:cNvPicPr>
-          <p:nvPr/>
-        </p:nvPicPr>
-        <p:blipFill>
-          <a:blip r:embed="rId10">
-            <a:extLst>
-              <a:ext uri="{28A0092B-C50C-407E-A947-70E740481C1C}">
-                <a14:useLocalDpi xmlns:a14="http://schemas.microsoft.com/office/drawing/2010/main" val="0"/>
-              </a:ext>
-              <a:ext uri="{96DAC541-7B7A-43D3-8B79-37D633B846F1}">
-                <asvg:svgBlip xmlns:asvg="http://schemas.microsoft.com/office/drawing/2016/SVG/main" r:embed="rId11"/>
-              </a:ext>
-            </a:extLst>
-          </a:blip>
-          <a:stretch>
-            <a:fillRect/>
-          </a:stretch>
-        </p:blipFill>
-        <p:spPr>
-          <a:xfrm>
-            <a:off x="2314940" y="0"/>
-            <a:ext cx="4471895" cy="3357563"/>
-          </a:xfrm>
-          <a:prstGeom prst="rect">
-            <a:avLst/>
-          </a:prstGeom>
-        </p:spPr>
-      </p:pic>
-      <p:pic>
-        <p:nvPicPr>
-          <p:cNvPr id="13" name="Graphic 12">
-            <a:extLst>
-              <a:ext uri="{FF2B5EF4-FFF2-40B4-BE49-F238E27FC236}">
-                <a16:creationId xmlns:a16="http://schemas.microsoft.com/office/drawing/2014/main" id="{FC69359F-A5B2-4EC6-BD2E-74DFBA522CFC}"/>
-              </a:ext>
-            </a:extLst>
-          </p:cNvPr>
-          <p:cNvPicPr>
-            <a:picLocks noChangeAspect="1"/>
-          </p:cNvPicPr>
-          <p:nvPr/>
-        </p:nvPicPr>
-        <p:blipFill>
-          <a:blip r:embed="rId12">
-            <a:extLst>
-              <a:ext uri="{28A0092B-C50C-407E-A947-70E740481C1C}">
-                <a14:useLocalDpi xmlns:a14="http://schemas.microsoft.com/office/drawing/2010/main" val="0"/>
-              </a:ext>
-              <a:ext uri="{96DAC541-7B7A-43D3-8B79-37D633B846F1}">
-                <asvg:svgBlip xmlns:asvg="http://schemas.microsoft.com/office/drawing/2016/SVG/main" r:embed="rId13"/>
-              </a:ext>
-            </a:extLst>
-          </a:blip>
-          <a:stretch>
-            <a:fillRect/>
-          </a:stretch>
-        </p:blipFill>
-        <p:spPr>
-          <a:xfrm>
-            <a:off x="-859675" y="-28577"/>
-            <a:ext cx="4471895" cy="3357563"/>
-          </a:xfrm>
-          <a:prstGeom prst="rect">
-            <a:avLst/>
-          </a:prstGeom>
-        </p:spPr>
-      </p:pic>
+        <p:txBody>
+          <a:bodyPr wrap="square" rtlCol="0">
+            <a:spAutoFit/>
+          </a:bodyPr>
+          <a:lstStyle/>
+          <a:p>
+            <a:r>
+              <a:rPr lang="it-IT" dirty="0"/>
+              <a:t>Gradient Boosting</a:t>
+            </a:r>
+          </a:p>
+          <a:p>
+            <a:r>
+              <a:rPr lang="it-IT" dirty="0"/>
+              <a:t>Decision Trees</a:t>
+            </a:r>
+            <a:endParaRPr lang="nl-NL" dirty="0"/>
+          </a:p>
+        </p:txBody>
+      </p:sp>
     </p:spTree>
     <p:extLst>
       <p:ext uri="{BB962C8B-B14F-4D97-AF65-F5344CB8AC3E}">
-        <p14:creationId xmlns:p14="http://schemas.microsoft.com/office/powerpoint/2010/main" val="2926366783"/>
+        <p14:creationId xmlns:p14="http://schemas.microsoft.com/office/powerpoint/2010/main" val="3620443842"/>
       </p:ext>
     </p:extLst>
   </p:cSld>
@@ -5001,7 +4919,7 @@
   </p:clrMapOvr>
   <mc:AlternateContent xmlns:mc="http://schemas.openxmlformats.org/markup-compatibility/2006" xmlns:p159="http://schemas.microsoft.com/office/powerpoint/2015/09/main">
     <mc:Choice Requires="p159">
-      <p:transition xmlns:p14="http://schemas.microsoft.com/office/powerpoint/2010/main" spd="slow" p14:dur="2000">
+      <p:transition spd="slow">
         <p159:morph option="byObject"/>
       </p:transition>
     </mc:Choice>
@@ -5033,10 +4951,10 @@
       </p:grpSpPr>
       <p:pic>
         <p:nvPicPr>
-          <p:cNvPr id="4" name="Picture 3">
-            <a:extLst>
-              <a:ext uri="{FF2B5EF4-FFF2-40B4-BE49-F238E27FC236}">
-                <a16:creationId xmlns:a16="http://schemas.microsoft.com/office/drawing/2014/main" id="{50D4D3CB-2C2F-4524-B868-41FAEA9F06E8}"/>
+          <p:cNvPr id="5" name="Picture 4">
+            <a:extLst>
+              <a:ext uri="{FF2B5EF4-FFF2-40B4-BE49-F238E27FC236}">
+                <a16:creationId xmlns:a16="http://schemas.microsoft.com/office/drawing/2014/main" id="{959EC944-F65A-4355-9EE4-D17542B2E581}"/>
               </a:ext>
             </a:extLst>
           </p:cNvPr>
@@ -5046,15 +4964,21 @@
           <p:nvPr/>
         </p:nvPicPr>
         <p:blipFill>
-          <a:blip r:embed="rId2"/>
+          <a:blip r:embed="rId2">
+            <a:extLst>
+              <a:ext uri="{28A0092B-C50C-407E-A947-70E740481C1C}">
+                <a14:useLocalDpi xmlns:a14="http://schemas.microsoft.com/office/drawing/2010/main" val="0"/>
+              </a:ext>
+            </a:extLst>
+          </a:blip>
           <a:stretch>
             <a:fillRect/>
           </a:stretch>
         </p:blipFill>
         <p:spPr>
           <a:xfrm>
-            <a:off x="4014497" y="2219156"/>
-            <a:ext cx="4163006" cy="2419688"/>
+            <a:off x="0" y="552432"/>
+            <a:ext cx="12192000" cy="5753136"/>
           </a:xfrm>
           <a:prstGeom prst="rect">
             <a:avLst/>
@@ -5063,10 +4987,10 @@
       </p:pic>
       <p:sp>
         <p:nvSpPr>
-          <p:cNvPr id="5" name="TextBox 4">
-            <a:extLst>
-              <a:ext uri="{FF2B5EF4-FFF2-40B4-BE49-F238E27FC236}">
-                <a16:creationId xmlns:a16="http://schemas.microsoft.com/office/drawing/2014/main" id="{D514EC3D-B477-4A30-911C-BD0F244670E3}"/>
+          <p:cNvPr id="6" name="TextBox 5">
+            <a:extLst>
+              <a:ext uri="{FF2B5EF4-FFF2-40B4-BE49-F238E27FC236}">
+                <a16:creationId xmlns:a16="http://schemas.microsoft.com/office/drawing/2014/main" id="{49B55110-826E-47CF-A5A8-A85A55A8AEE0}"/>
               </a:ext>
             </a:extLst>
           </p:cNvPr>
@@ -5075,8 +4999,8 @@
         </p:nvSpPr>
         <p:spPr>
           <a:xfrm>
-            <a:off x="0" y="0"/>
-            <a:ext cx="2289908" cy="369332"/>
+            <a:off x="0" y="-5807"/>
+            <a:ext cx="2524369" cy="369332"/>
           </a:xfrm>
           <a:prstGeom prst="rect">
             <a:avLst/>
@@ -5091,102 +5015,16 @@
           <a:p>
             <a:r>
               <a:rPr lang="it-IT" u="sng" dirty="0"/>
-              <a:t>MICE Forest</a:t>
+              <a:t>Imputed Values</a:t>
             </a:r>
             <a:endParaRPr lang="nl-NL" u="sng" dirty="0"/>
-          </a:p>
-        </p:txBody>
-      </p:sp>
-      <p:sp>
-        <p:nvSpPr>
-          <p:cNvPr id="7" name="Arrow: Down 6">
-            <a:extLst>
-              <a:ext uri="{FF2B5EF4-FFF2-40B4-BE49-F238E27FC236}">
-                <a16:creationId xmlns:a16="http://schemas.microsoft.com/office/drawing/2014/main" id="{A2FC79F2-6630-4E33-A4C3-8D9A42B46FEF}"/>
-              </a:ext>
-            </a:extLst>
-          </p:cNvPr>
-          <p:cNvSpPr/>
-          <p:nvPr/>
-        </p:nvSpPr>
-        <p:spPr>
-          <a:xfrm rot="4638552">
-            <a:off x="7604369" y="3141785"/>
-            <a:ext cx="140677" cy="1742831"/>
-          </a:xfrm>
-          <a:prstGeom prst="downArrow">
-            <a:avLst/>
-          </a:prstGeom>
-        </p:spPr>
-        <p:style>
-          <a:lnRef idx="0">
-            <a:schemeClr val="accent1"/>
-          </a:lnRef>
-          <a:fillRef idx="3">
-            <a:schemeClr val="accent1"/>
-          </a:fillRef>
-          <a:effectRef idx="3">
-            <a:schemeClr val="accent1"/>
-          </a:effectRef>
-          <a:fontRef idx="minor">
-            <a:schemeClr val="lt1"/>
-          </a:fontRef>
-        </p:style>
-        <p:txBody>
-          <a:bodyPr rtlCol="0" anchor="ctr"/>
-          <a:lstStyle/>
-          <a:p>
-            <a:pPr algn="ctr"/>
-            <a:endParaRPr lang="nl-NL"/>
-          </a:p>
-        </p:txBody>
-      </p:sp>
-      <p:sp>
-        <p:nvSpPr>
-          <p:cNvPr id="8" name="TextBox 7">
-            <a:extLst>
-              <a:ext uri="{FF2B5EF4-FFF2-40B4-BE49-F238E27FC236}">
-                <a16:creationId xmlns:a16="http://schemas.microsoft.com/office/drawing/2014/main" id="{F80A6ACB-2D2C-4E4F-96F1-0D3837C836FC}"/>
-              </a:ext>
-            </a:extLst>
-          </p:cNvPr>
-          <p:cNvSpPr txBox="1"/>
-          <p:nvPr/>
-        </p:nvSpPr>
-        <p:spPr>
-          <a:xfrm>
-            <a:off x="8519452" y="3476396"/>
-            <a:ext cx="2360246" cy="646331"/>
-          </a:xfrm>
-          <a:prstGeom prst="rect">
-            <a:avLst/>
-          </a:prstGeom>
-          <a:noFill/>
-        </p:spPr>
-        <p:txBody>
-          <a:bodyPr wrap="square" rtlCol="0">
-            <a:spAutoFit/>
-          </a:bodyPr>
-          <a:lstStyle/>
-          <a:p>
-            <a:r>
-              <a:rPr lang="it-IT" dirty="0"/>
-              <a:t>Gradient Boosting</a:t>
-            </a:r>
-          </a:p>
-          <a:p>
-            <a:r>
-              <a:rPr lang="it-IT" dirty="0"/>
-              <a:t>Decision Trees</a:t>
-            </a:r>
-            <a:endParaRPr lang="nl-NL" dirty="0"/>
           </a:p>
         </p:txBody>
       </p:sp>
     </p:spTree>
     <p:extLst>
       <p:ext uri="{BB962C8B-B14F-4D97-AF65-F5344CB8AC3E}">
-        <p14:creationId xmlns:p14="http://schemas.microsoft.com/office/powerpoint/2010/main" val="3620443842"/>
+        <p14:creationId xmlns:p14="http://schemas.microsoft.com/office/powerpoint/2010/main" val="1759352546"/>
       </p:ext>
     </p:extLst>
   </p:cSld>
@@ -5195,7 +5033,7 @@
   </p:clrMapOvr>
   <mc:AlternateContent xmlns:mc="http://schemas.openxmlformats.org/markup-compatibility/2006" xmlns:p159="http://schemas.microsoft.com/office/powerpoint/2015/09/main">
     <mc:Choice Requires="p159">
-      <p:transition xmlns:p14="http://schemas.microsoft.com/office/powerpoint/2010/main" spd="slow" p14:dur="2000">
+      <p:transition spd="slow">
         <p159:morph option="byObject"/>
       </p:transition>
     </mc:Choice>
@@ -5230,7 +5068,7 @@
           <p:cNvPr id="5" name="Picture 4">
             <a:extLst>
               <a:ext uri="{FF2B5EF4-FFF2-40B4-BE49-F238E27FC236}">
-                <a16:creationId xmlns:a16="http://schemas.microsoft.com/office/drawing/2014/main" id="{959EC944-F65A-4355-9EE4-D17542B2E581}"/>
+                <a16:creationId xmlns:a16="http://schemas.microsoft.com/office/drawing/2014/main" id="{70962B23-E15F-4BCF-9983-5A40DD11EB79}"/>
               </a:ext>
             </a:extLst>
           </p:cNvPr>
@@ -5253,8 +5091,8 @@
         </p:blipFill>
         <p:spPr>
           <a:xfrm>
-            <a:off x="0" y="552432"/>
-            <a:ext cx="12192000" cy="5753136"/>
+            <a:off x="1810565" y="214923"/>
+            <a:ext cx="8570870" cy="6428153"/>
           </a:xfrm>
           <a:prstGeom prst="rect">
             <a:avLst/>
@@ -5266,7 +5104,7 @@
           <p:cNvPr id="6" name="TextBox 5">
             <a:extLst>
               <a:ext uri="{FF2B5EF4-FFF2-40B4-BE49-F238E27FC236}">
-                <a16:creationId xmlns:a16="http://schemas.microsoft.com/office/drawing/2014/main" id="{49B55110-826E-47CF-A5A8-A85A55A8AEE0}"/>
+                <a16:creationId xmlns:a16="http://schemas.microsoft.com/office/drawing/2014/main" id="{4BE0656D-44CA-4A22-BC1D-23F23E963B16}"/>
               </a:ext>
             </a:extLst>
           </p:cNvPr>
@@ -5275,8 +5113,8 @@
         </p:nvSpPr>
         <p:spPr>
           <a:xfrm>
-            <a:off x="0" y="-5807"/>
-            <a:ext cx="2524369" cy="369332"/>
+            <a:off x="0" y="0"/>
+            <a:ext cx="2289908" cy="369332"/>
           </a:xfrm>
           <a:prstGeom prst="rect">
             <a:avLst/>
@@ -5291,7 +5129,7 @@
           <a:p>
             <a:r>
               <a:rPr lang="it-IT" u="sng" dirty="0"/>
-              <a:t>Imputed Values</a:t>
+              <a:t>MICE Forest</a:t>
             </a:r>
             <a:endParaRPr lang="nl-NL" u="sng" dirty="0"/>
           </a:p>
@@ -5300,7 +5138,7 @@
     </p:spTree>
     <p:extLst>
       <p:ext uri="{BB962C8B-B14F-4D97-AF65-F5344CB8AC3E}">
-        <p14:creationId xmlns:p14="http://schemas.microsoft.com/office/powerpoint/2010/main" val="1759352546"/>
+        <p14:creationId xmlns:p14="http://schemas.microsoft.com/office/powerpoint/2010/main" val="1608275626"/>
       </p:ext>
     </p:extLst>
   </p:cSld>
@@ -5309,7 +5147,7 @@
   </p:clrMapOvr>
   <mc:AlternateContent xmlns:mc="http://schemas.openxmlformats.org/markup-compatibility/2006" xmlns:p159="http://schemas.microsoft.com/office/powerpoint/2015/09/main">
     <mc:Choice Requires="p159">
-      <p:transition xmlns:p14="http://schemas.microsoft.com/office/powerpoint/2010/main" spd="slow" p14:dur="2000">
+      <p:transition spd="slow">
         <p159:morph option="byObject"/>
       </p:transition>
     </mc:Choice>
@@ -5339,48 +5177,12 @@
           <a:chExt cx="0" cy="0"/>
         </a:xfrm>
       </p:grpSpPr>
-      <p:pic>
-        <p:nvPicPr>
-          <p:cNvPr id="5" name="Picture 4">
-            <a:extLst>
-              <a:ext uri="{FF2B5EF4-FFF2-40B4-BE49-F238E27FC236}">
-                <a16:creationId xmlns:a16="http://schemas.microsoft.com/office/drawing/2014/main" id="{70962B23-E15F-4BCF-9983-5A40DD11EB79}"/>
-              </a:ext>
-            </a:extLst>
-          </p:cNvPr>
-          <p:cNvPicPr>
-            <a:picLocks noChangeAspect="1"/>
-          </p:cNvPicPr>
-          <p:nvPr/>
-        </p:nvPicPr>
-        <p:blipFill>
-          <a:blip r:embed="rId2">
-            <a:extLst>
-              <a:ext uri="{28A0092B-C50C-407E-A947-70E740481C1C}">
-                <a14:useLocalDpi xmlns:a14="http://schemas.microsoft.com/office/drawing/2010/main" val="0"/>
-              </a:ext>
-            </a:extLst>
-          </a:blip>
-          <a:stretch>
-            <a:fillRect/>
-          </a:stretch>
-        </p:blipFill>
-        <p:spPr>
-          <a:xfrm>
-            <a:off x="1810565" y="214923"/>
-            <a:ext cx="8570870" cy="6428153"/>
-          </a:xfrm>
-          <a:prstGeom prst="rect">
-            <a:avLst/>
-          </a:prstGeom>
-        </p:spPr>
-      </p:pic>
       <p:sp>
         <p:nvSpPr>
-          <p:cNvPr id="6" name="TextBox 5">
-            <a:extLst>
-              <a:ext uri="{FF2B5EF4-FFF2-40B4-BE49-F238E27FC236}">
-                <a16:creationId xmlns:a16="http://schemas.microsoft.com/office/drawing/2014/main" id="{4BE0656D-44CA-4A22-BC1D-23F23E963B16}"/>
+          <p:cNvPr id="4" name="TextBox 3">
+            <a:extLst>
+              <a:ext uri="{FF2B5EF4-FFF2-40B4-BE49-F238E27FC236}">
+                <a16:creationId xmlns:a16="http://schemas.microsoft.com/office/drawing/2014/main" id="{99122CDA-8054-4F30-AA24-7864527ED42D}"/>
               </a:ext>
             </a:extLst>
           </p:cNvPr>
@@ -5390,7 +5192,7 @@
         <p:spPr>
           <a:xfrm>
             <a:off x="0" y="0"/>
-            <a:ext cx="2289908" cy="369332"/>
+            <a:ext cx="4708358" cy="369332"/>
           </a:xfrm>
           <a:prstGeom prst="rect">
             <a:avLst/>
@@ -5405,16 +5207,52 @@
           <a:p>
             <a:r>
               <a:rPr lang="it-IT" u="sng" dirty="0"/>
-              <a:t>MICE Forest</a:t>
+              <a:t>Original Chemical Subs distributions</a:t>
             </a:r>
             <a:endParaRPr lang="nl-NL" u="sng" dirty="0"/>
           </a:p>
         </p:txBody>
       </p:sp>
+      <p:pic>
+        <p:nvPicPr>
+          <p:cNvPr id="6" name="Picture 5">
+            <a:extLst>
+              <a:ext uri="{FF2B5EF4-FFF2-40B4-BE49-F238E27FC236}">
+                <a16:creationId xmlns:a16="http://schemas.microsoft.com/office/drawing/2014/main" id="{62B614DA-B9E5-44DA-9D9F-C33D5F9B5334}"/>
+              </a:ext>
+            </a:extLst>
+          </p:cNvPr>
+          <p:cNvPicPr>
+            <a:picLocks noChangeAspect="1"/>
+          </p:cNvPicPr>
+          <p:nvPr/>
+        </p:nvPicPr>
+        <p:blipFill>
+          <a:blip r:embed="rId2">
+            <a:extLst>
+              <a:ext uri="{28A0092B-C50C-407E-A947-70E740481C1C}">
+                <a14:useLocalDpi xmlns:a14="http://schemas.microsoft.com/office/drawing/2010/main" val="0"/>
+              </a:ext>
+            </a:extLst>
+          </a:blip>
+          <a:stretch>
+            <a:fillRect/>
+          </a:stretch>
+        </p:blipFill>
+        <p:spPr>
+          <a:xfrm>
+            <a:off x="152400" y="538130"/>
+            <a:ext cx="11887200" cy="5958202"/>
+          </a:xfrm>
+          <a:prstGeom prst="rect">
+            <a:avLst/>
+          </a:prstGeom>
+        </p:spPr>
+      </p:pic>
     </p:spTree>
     <p:extLst>
       <p:ext uri="{BB962C8B-B14F-4D97-AF65-F5344CB8AC3E}">
-        <p14:creationId xmlns:p14="http://schemas.microsoft.com/office/powerpoint/2010/main" val="1608275626"/>
+        <p14:creationId xmlns:p14="http://schemas.microsoft.com/office/powerpoint/2010/main" val="1013586166"/>
       </p:ext>
     </p:extLst>
   </p:cSld>
@@ -5423,7 +5261,7 @@
   </p:clrMapOvr>
   <mc:AlternateContent xmlns:mc="http://schemas.openxmlformats.org/markup-compatibility/2006" xmlns:p159="http://schemas.microsoft.com/office/powerpoint/2015/09/main">
     <mc:Choice Requires="p159">
-      <p:transition xmlns:p14="http://schemas.microsoft.com/office/powerpoint/2010/main" spd="slow" p14:dur="2000">
+      <p:transition spd="slow">
         <p159:morph option="byObject"/>
       </p:transition>
     </mc:Choice>
@@ -5537,7 +5375,7 @@
   </p:clrMapOvr>
   <mc:AlternateContent xmlns:mc="http://schemas.openxmlformats.org/markup-compatibility/2006" xmlns:p159="http://schemas.microsoft.com/office/powerpoint/2015/09/main">
     <mc:Choice Requires="p159">
-      <p:transition xmlns:p14="http://schemas.microsoft.com/office/powerpoint/2010/main" spd="slow" p14:dur="2000">
+      <p:transition spd="slow">
         <p159:morph option="byObject"/>
       </p:transition>
     </mc:Choice>
@@ -5761,7 +5599,7 @@
   </p:clrMapOvr>
   <mc:AlternateContent xmlns:mc="http://schemas.openxmlformats.org/markup-compatibility/2006" xmlns:p159="http://schemas.microsoft.com/office/powerpoint/2015/09/main">
     <mc:Choice Requires="p159">
-      <p:transition xmlns:p14="http://schemas.microsoft.com/office/powerpoint/2010/main" spd="slow" p14:dur="2000">
+      <p:transition spd="slow">
         <p159:morph option="byObject"/>
       </p:transition>
     </mc:Choice>
@@ -5803,7 +5641,7 @@
   </p:clrMapOvr>
   <mc:AlternateContent xmlns:mc="http://schemas.openxmlformats.org/markup-compatibility/2006" xmlns:p159="http://schemas.microsoft.com/office/powerpoint/2015/09/main">
     <mc:Choice Requires="p159">
-      <p:transition xmlns:p14="http://schemas.microsoft.com/office/powerpoint/2010/main" spd="slow" p14:dur="2000">
+      <p:transition spd="slow">
         <p159:morph option="byObject"/>
       </p:transition>
     </mc:Choice>
@@ -5874,7 +5712,7 @@
   </p:clrMapOvr>
   <mc:AlternateContent xmlns:mc="http://schemas.openxmlformats.org/markup-compatibility/2006" xmlns:p159="http://schemas.microsoft.com/office/powerpoint/2015/09/main">
     <mc:Choice Requires="p159">
-      <p:transition xmlns:p14="http://schemas.microsoft.com/office/powerpoint/2010/main" spd="slow" p14:dur="2000">
+      <p:transition spd="slow">
         <p159:morph option="byObject"/>
       </p:transition>
     </mc:Choice>
@@ -5916,7 +5754,7 @@
   </p:clrMapOvr>
   <mc:AlternateContent xmlns:mc="http://schemas.openxmlformats.org/markup-compatibility/2006" xmlns:p159="http://schemas.microsoft.com/office/powerpoint/2015/09/main">
     <mc:Choice Requires="p159">
-      <p:transition xmlns:p14="http://schemas.microsoft.com/office/powerpoint/2010/main" spd="slow" p14:dur="2000">
+      <p:transition spd="slow">
         <p159:morph option="byObject"/>
       </p:transition>
     </mc:Choice>
@@ -6012,7 +5850,7 @@
   </p:clrMapOvr>
   <mc:AlternateContent xmlns:mc="http://schemas.openxmlformats.org/markup-compatibility/2006" xmlns:p159="http://schemas.microsoft.com/office/powerpoint/2015/09/main">
     <mc:Choice Requires="p159">
-      <p:transition xmlns:p14="http://schemas.microsoft.com/office/powerpoint/2010/main" spd="slow" p14:dur="2000">
+      <p:transition spd="slow">
         <p159:morph option="byObject"/>
       </p:transition>
     </mc:Choice>
@@ -6166,7 +6004,7 @@
   </p:clrMapOvr>
   <mc:AlternateContent xmlns:mc="http://schemas.openxmlformats.org/markup-compatibility/2006" xmlns:p159="http://schemas.microsoft.com/office/powerpoint/2015/09/main">
     <mc:Choice Requires="p159">
-      <p:transition xmlns:p14="http://schemas.microsoft.com/office/powerpoint/2010/main" spd="slow" p14:dur="2000">
+      <p:transition spd="slow">
         <p159:morph option="byObject"/>
       </p:transition>
     </mc:Choice>
@@ -6208,7 +6046,7 @@
   </p:clrMapOvr>
   <mc:AlternateContent xmlns:mc="http://schemas.openxmlformats.org/markup-compatibility/2006" xmlns:p159="http://schemas.microsoft.com/office/powerpoint/2015/09/main">
     <mc:Choice Requires="p159">
-      <p:transition xmlns:p14="http://schemas.microsoft.com/office/powerpoint/2010/main" spd="slow" p14:dur="2000">
+      <p:transition spd="slow">
         <p159:morph option="byObject"/>
       </p:transition>
     </mc:Choice>
@@ -6304,7 +6142,7 @@
   </p:clrMapOvr>
   <mc:AlternateContent xmlns:mc="http://schemas.openxmlformats.org/markup-compatibility/2006" xmlns:p159="http://schemas.microsoft.com/office/powerpoint/2015/09/main">
     <mc:Choice Requires="p159">
-      <p:transition xmlns:p14="http://schemas.microsoft.com/office/powerpoint/2010/main" spd="slow" p14:dur="2000">
+      <p:transition spd="slow">
         <p159:morph option="byObject"/>
       </p:transition>
     </mc:Choice>
@@ -7229,7 +7067,7 @@
   </p:clrMapOvr>
   <mc:AlternateContent xmlns:mc="http://schemas.openxmlformats.org/markup-compatibility/2006" xmlns:p159="http://schemas.microsoft.com/office/powerpoint/2015/09/main">
     <mc:Choice Requires="p159">
-      <p:transition xmlns:p14="http://schemas.microsoft.com/office/powerpoint/2010/main" spd="slow" p14:dur="2000">
+      <p:transition spd="slow">
         <p159:morph option="byObject"/>
       </p:transition>
     </mc:Choice>
@@ -7410,7 +7248,7 @@
   </p:clrMapOvr>
   <mc:AlternateContent xmlns:mc="http://schemas.openxmlformats.org/markup-compatibility/2006" xmlns:p159="http://schemas.microsoft.com/office/powerpoint/2015/09/main">
     <mc:Choice Requires="p159">
-      <p:transition xmlns:p14="http://schemas.microsoft.com/office/powerpoint/2010/main" spd="slow" p14:dur="2000">
+      <p:transition spd="slow">
         <p159:morph option="byObject"/>
       </p:transition>
     </mc:Choice>
@@ -7487,7 +7325,7 @@
   </p:clrMapOvr>
   <mc:AlternateContent xmlns:mc="http://schemas.openxmlformats.org/markup-compatibility/2006" xmlns:p159="http://schemas.microsoft.com/office/powerpoint/2015/09/main">
     <mc:Choice Requires="p159">
-      <p:transition xmlns:p14="http://schemas.microsoft.com/office/powerpoint/2010/main" spd="slow" p14:dur="2000">
+      <p:transition spd="slow">
         <p159:morph option="byObject"/>
       </p:transition>
     </mc:Choice>
@@ -7838,7 +7676,7 @@
   </p:clrMapOvr>
   <mc:AlternateContent xmlns:mc="http://schemas.openxmlformats.org/markup-compatibility/2006" xmlns:p159="http://schemas.microsoft.com/office/powerpoint/2015/09/main">
     <mc:Choice Requires="p159">
-      <p:transition xmlns:p14="http://schemas.microsoft.com/office/powerpoint/2010/main" spd="slow" p14:dur="2000">
+      <p:transition spd="slow">
         <p159:morph option="byObject"/>
       </p:transition>
     </mc:Choice>
@@ -8207,7 +8045,7 @@
   </p:clrMapOvr>
   <mc:AlternateContent xmlns:mc="http://schemas.openxmlformats.org/markup-compatibility/2006" xmlns:p159="http://schemas.microsoft.com/office/powerpoint/2015/09/main">
     <mc:Choice Requires="p159">
-      <p:transition xmlns:p14="http://schemas.microsoft.com/office/powerpoint/2010/main" spd="slow" p14:dur="2000">
+      <p:transition spd="slow">
         <p159:morph option="byObject"/>
       </p:transition>
     </mc:Choice>
@@ -8699,7 +8537,7 @@
   </p:clrMapOvr>
   <mc:AlternateContent xmlns:mc="http://schemas.openxmlformats.org/markup-compatibility/2006" xmlns:p159="http://schemas.microsoft.com/office/powerpoint/2015/09/main">
     <mc:Choice Requires="p159">
-      <p:transition xmlns:p14="http://schemas.microsoft.com/office/powerpoint/2010/main" spd="slow" p14:dur="2000">
+      <p:transition spd="slow">
         <p159:morph option="byObject"/>
       </p:transition>
     </mc:Choice>
@@ -8909,7 +8747,7 @@
   </p:clrMapOvr>
   <mc:AlternateContent xmlns:mc="http://schemas.openxmlformats.org/markup-compatibility/2006" xmlns:p159="http://schemas.microsoft.com/office/powerpoint/2015/09/main">
     <mc:Choice Requires="p159">
-      <p:transition xmlns:p14="http://schemas.microsoft.com/office/powerpoint/2010/main" spd="slow" p14:dur="2000">
+      <p:transition spd="slow">
         <p159:morph option="byObject"/>
       </p:transition>
     </mc:Choice>
@@ -8980,7 +8818,7 @@
   </p:clrMapOvr>
   <mc:AlternateContent xmlns:mc="http://schemas.openxmlformats.org/markup-compatibility/2006" xmlns:p159="http://schemas.microsoft.com/office/powerpoint/2015/09/main">
     <mc:Choice Requires="p159">
-      <p:transition xmlns:p14="http://schemas.microsoft.com/office/powerpoint/2010/main" spd="slow" p14:dur="2000">
+      <p:transition spd="slow">
         <p159:morph option="byObject"/>
       </p:transition>
     </mc:Choice>
@@ -9391,7 +9229,7 @@
   </p:clrMapOvr>
   <mc:AlternateContent xmlns:mc="http://schemas.openxmlformats.org/markup-compatibility/2006" xmlns:p159="http://schemas.microsoft.com/office/powerpoint/2015/09/main">
     <mc:Choice Requires="p159">
-      <p:transition xmlns:p14="http://schemas.microsoft.com/office/powerpoint/2010/main" spd="slow" p14:dur="2000">
+      <p:transition spd="slow">
         <p159:morph option="byObject"/>
       </p:transition>
     </mc:Choice>
@@ -9462,7 +9300,7 @@
   </p:clrMapOvr>
   <mc:AlternateContent xmlns:mc="http://schemas.openxmlformats.org/markup-compatibility/2006" xmlns:p159="http://schemas.microsoft.com/office/powerpoint/2015/09/main">
     <mc:Choice Requires="p159">
-      <p:transition xmlns:p14="http://schemas.microsoft.com/office/powerpoint/2010/main" spd="slow" p14:dur="2000">
+      <p:transition spd="slow">
         <p159:morph option="byObject"/>
       </p:transition>
     </mc:Choice>
@@ -9494,10 +9332,10 @@
       </p:grpSpPr>
       <p:sp>
         <p:nvSpPr>
-          <p:cNvPr id="4" name="TextBox 3">
-            <a:extLst>
-              <a:ext uri="{FF2B5EF4-FFF2-40B4-BE49-F238E27FC236}">
-                <a16:creationId xmlns:a16="http://schemas.microsoft.com/office/drawing/2014/main" id="{99122CDA-8054-4F30-AA24-7864527ED42D}"/>
+          <p:cNvPr id="2" name="TextBox 1">
+            <a:extLst>
+              <a:ext uri="{FF2B5EF4-FFF2-40B4-BE49-F238E27FC236}">
+                <a16:creationId xmlns:a16="http://schemas.microsoft.com/office/drawing/2014/main" id="{A60B4FD1-F66A-46C8-A96B-C6DD32132922}"/>
               </a:ext>
             </a:extLst>
           </p:cNvPr>
@@ -9522,120 +9360,6 @@
           <a:p>
             <a:r>
               <a:rPr lang="it-IT" u="sng" dirty="0"/>
-              <a:t>Original Chemical Subs distributions</a:t>
-            </a:r>
-            <a:endParaRPr lang="nl-NL" u="sng" dirty="0"/>
-          </a:p>
-        </p:txBody>
-      </p:sp>
-      <p:pic>
-        <p:nvPicPr>
-          <p:cNvPr id="6" name="Picture 5">
-            <a:extLst>
-              <a:ext uri="{FF2B5EF4-FFF2-40B4-BE49-F238E27FC236}">
-                <a16:creationId xmlns:a16="http://schemas.microsoft.com/office/drawing/2014/main" id="{62B614DA-B9E5-44DA-9D9F-C33D5F9B5334}"/>
-              </a:ext>
-            </a:extLst>
-          </p:cNvPr>
-          <p:cNvPicPr>
-            <a:picLocks noChangeAspect="1"/>
-          </p:cNvPicPr>
-          <p:nvPr/>
-        </p:nvPicPr>
-        <p:blipFill>
-          <a:blip r:embed="rId2">
-            <a:extLst>
-              <a:ext uri="{28A0092B-C50C-407E-A947-70E740481C1C}">
-                <a14:useLocalDpi xmlns:a14="http://schemas.microsoft.com/office/drawing/2010/main" val="0"/>
-              </a:ext>
-            </a:extLst>
-          </a:blip>
-          <a:stretch>
-            <a:fillRect/>
-          </a:stretch>
-        </p:blipFill>
-        <p:spPr>
-          <a:xfrm>
-            <a:off x="152400" y="538130"/>
-            <a:ext cx="11887200" cy="5958202"/>
-          </a:xfrm>
-          <a:prstGeom prst="rect">
-            <a:avLst/>
-          </a:prstGeom>
-        </p:spPr>
-      </p:pic>
-    </p:spTree>
-    <p:extLst>
-      <p:ext uri="{BB962C8B-B14F-4D97-AF65-F5344CB8AC3E}">
-        <p14:creationId xmlns:p14="http://schemas.microsoft.com/office/powerpoint/2010/main" val="1013586166"/>
-      </p:ext>
-    </p:extLst>
-  </p:cSld>
-  <p:clrMapOvr>
-    <a:masterClrMapping/>
-  </p:clrMapOvr>
-  <mc:AlternateContent xmlns:mc="http://schemas.openxmlformats.org/markup-compatibility/2006" xmlns:p159="http://schemas.microsoft.com/office/powerpoint/2015/09/main">
-    <mc:Choice Requires="p159">
-      <p:transition xmlns:p14="http://schemas.microsoft.com/office/powerpoint/2010/main" spd="slow" p14:dur="2000">
-        <p159:morph option="byObject"/>
-      </p:transition>
-    </mc:Choice>
-    <mc:Fallback xmlns="">
-      <p:transition spd="slow">
-        <p:fade/>
-      </p:transition>
-    </mc:Fallback>
-  </mc:AlternateContent>
-</p:sld>
-</file>
-
-<file path=ppt/slides/slide7.xml><?xml version="1.0" encoding="utf-8"?>
-<p:sld xmlns:a="http://schemas.openxmlformats.org/drawingml/2006/main" xmlns:r="http://schemas.openxmlformats.org/officeDocument/2006/relationships" xmlns:p="http://schemas.openxmlformats.org/presentationml/2006/main">
-  <p:cSld>
-    <p:spTree>
-      <p:nvGrpSpPr>
-        <p:cNvPr id="1" name=""/>
-        <p:cNvGrpSpPr/>
-        <p:nvPr/>
-      </p:nvGrpSpPr>
-      <p:grpSpPr>
-        <a:xfrm>
-          <a:off x="0" y="0"/>
-          <a:ext cx="0" cy="0"/>
-          <a:chOff x="0" y="0"/>
-          <a:chExt cx="0" cy="0"/>
-        </a:xfrm>
-      </p:grpSpPr>
-      <p:sp>
-        <p:nvSpPr>
-          <p:cNvPr id="2" name="TextBox 1">
-            <a:extLst>
-              <a:ext uri="{FF2B5EF4-FFF2-40B4-BE49-F238E27FC236}">
-                <a16:creationId xmlns:a16="http://schemas.microsoft.com/office/drawing/2014/main" id="{A60B4FD1-F66A-46C8-A96B-C6DD32132922}"/>
-              </a:ext>
-            </a:extLst>
-          </p:cNvPr>
-          <p:cNvSpPr txBox="1"/>
-          <p:nvPr/>
-        </p:nvSpPr>
-        <p:spPr>
-          <a:xfrm>
-            <a:off x="0" y="0"/>
-            <a:ext cx="4708358" cy="369332"/>
-          </a:xfrm>
-          <a:prstGeom prst="rect">
-            <a:avLst/>
-          </a:prstGeom>
-          <a:noFill/>
-        </p:spPr>
-        <p:txBody>
-          <a:bodyPr wrap="square" rtlCol="0">
-            <a:spAutoFit/>
-          </a:bodyPr>
-          <a:lstStyle/>
-          <a:p>
-            <a:r>
-              <a:rPr lang="it-IT" u="sng" dirty="0"/>
               <a:t>Instrumental Resolutions</a:t>
             </a:r>
             <a:endParaRPr lang="nl-NL" u="sng" dirty="0"/>
@@ -9657,7 +9381,7 @@
           <p:nvPr>
             <p:extLst>
               <p:ext uri="{D42A27DB-BD31-4B8C-83A1-F6EECF244321}">
-                <p14:modId xmlns:p14="http://schemas.microsoft.com/office/powerpoint/2010/main" val="4286925606"/>
+                <p14:modId xmlns:p14="http://schemas.microsoft.com/office/powerpoint/2010/main" val="436792572"/>
               </p:ext>
             </p:extLst>
           </p:nvPr>
@@ -10291,12 +10015,12 @@
                     <a:p>
                       <a:pPr algn="ctr" fontAlgn="ctr"/>
                       <a:r>
-                        <a:rPr lang="nl-NL" sz="1600" u="none" strike="noStrike">
+                        <a:rPr lang="nl-NL" sz="1600" u="none" strike="noStrike" dirty="0">
                           <a:effectLst/>
                         </a:rPr>
-                        <a:t>195</a:t>
+                        <a:t>195*</a:t>
                       </a:r>
-                      <a:endParaRPr lang="nl-NL" sz="1600" b="0" i="0" u="none" strike="noStrike">
+                      <a:endParaRPr lang="nl-NL" sz="1600" b="0" i="0" u="none" strike="noStrike" dirty="0">
                         <a:solidFill>
                           <a:srgbClr val="000000"/>
                         </a:solidFill>
@@ -11315,7 +11039,12 @@
             <p:ph type="ftr" sz="quarter" idx="11"/>
           </p:nvPr>
         </p:nvSpPr>
-        <p:spPr/>
+        <p:spPr>
+          <a:xfrm>
+            <a:off x="4038600" y="6225545"/>
+            <a:ext cx="4114800" cy="365125"/>
+          </a:xfrm>
+        </p:spPr>
         <p:txBody>
           <a:bodyPr/>
           <a:lstStyle/>
@@ -11324,6 +11053,49 @@
               <a:rPr lang="nl-NL"/>
               <a:t>Ref: https://www.umcutrecht.nl/bepalingenwijzer</a:t>
             </a:r>
+          </a:p>
+        </p:txBody>
+      </p:sp>
+      <p:sp>
+        <p:nvSpPr>
+          <p:cNvPr id="4" name="TextBox 3">
+            <a:extLst>
+              <a:ext uri="{FF2B5EF4-FFF2-40B4-BE49-F238E27FC236}">
+                <a16:creationId xmlns:a16="http://schemas.microsoft.com/office/drawing/2014/main" id="{06F0FF0B-34D3-4B7E-B257-2C2107C39FA2}"/>
+              </a:ext>
+            </a:extLst>
+          </p:cNvPr>
+          <p:cNvSpPr txBox="1"/>
+          <p:nvPr/>
+        </p:nvSpPr>
+        <p:spPr>
+          <a:xfrm>
+            <a:off x="5081336" y="6590670"/>
+            <a:ext cx="1788695" cy="261610"/>
+          </a:xfrm>
+          <a:prstGeom prst="rect">
+            <a:avLst/>
+          </a:prstGeom>
+          <a:noFill/>
+        </p:spPr>
+        <p:txBody>
+          <a:bodyPr wrap="square" rtlCol="0">
+            <a:spAutoFit/>
+          </a:bodyPr>
+          <a:lstStyle/>
+          <a:p>
+            <a:pPr algn="ctr"/>
+            <a:r>
+              <a:rPr lang="it-IT" sz="1050" dirty="0"/>
+              <a:t>*</a:t>
+            </a:r>
+            <a:r>
+              <a:rPr lang="it-IT" sz="1050" dirty="0">
+                <a:hlinkClick r:id="rId2" action="ppaction://hlinkfile"/>
+              </a:rPr>
+              <a:t>Machine Reference Manual</a:t>
+            </a:r>
+            <a:endParaRPr lang="nl-NL" sz="1050" dirty="0"/>
           </a:p>
         </p:txBody>
       </p:sp>
@@ -11339,7 +11111,121 @@
   </p:clrMapOvr>
   <mc:AlternateContent xmlns:mc="http://schemas.openxmlformats.org/markup-compatibility/2006" xmlns:p159="http://schemas.microsoft.com/office/powerpoint/2015/09/main">
     <mc:Choice Requires="p159">
-      <p:transition xmlns:p14="http://schemas.microsoft.com/office/powerpoint/2010/main" spd="slow" p14:dur="2000">
+      <p:transition spd="slow">
+        <p159:morph option="byObject"/>
+      </p:transition>
+    </mc:Choice>
+    <mc:Fallback xmlns="">
+      <p:transition spd="slow">
+        <p:fade/>
+      </p:transition>
+    </mc:Fallback>
+  </mc:AlternateContent>
+</p:sld>
+</file>
+
+<file path=ppt/slides/slide7.xml><?xml version="1.0" encoding="utf-8"?>
+<p:sld xmlns:a="http://schemas.openxmlformats.org/drawingml/2006/main" xmlns:r="http://schemas.openxmlformats.org/officeDocument/2006/relationships" xmlns:p="http://schemas.openxmlformats.org/presentationml/2006/main">
+  <p:cSld>
+    <p:spTree>
+      <p:nvGrpSpPr>
+        <p:cNvPr id="1" name=""/>
+        <p:cNvGrpSpPr/>
+        <p:nvPr/>
+      </p:nvGrpSpPr>
+      <p:grpSpPr>
+        <a:xfrm>
+          <a:off x="0" y="0"/>
+          <a:ext cx="0" cy="0"/>
+          <a:chOff x="0" y="0"/>
+          <a:chExt cx="0" cy="0"/>
+        </a:xfrm>
+      </p:grpSpPr>
+      <p:sp>
+        <p:nvSpPr>
+          <p:cNvPr id="4" name="TextBox 3">
+            <a:extLst>
+              <a:ext uri="{FF2B5EF4-FFF2-40B4-BE49-F238E27FC236}">
+                <a16:creationId xmlns:a16="http://schemas.microsoft.com/office/drawing/2014/main" id="{B40CC955-9822-4C97-8EA5-CCA925BF2200}"/>
+              </a:ext>
+            </a:extLst>
+          </p:cNvPr>
+          <p:cNvSpPr txBox="1"/>
+          <p:nvPr/>
+        </p:nvSpPr>
+        <p:spPr>
+          <a:xfrm>
+            <a:off x="0" y="2009"/>
+            <a:ext cx="3430954" cy="369332"/>
+          </a:xfrm>
+          <a:prstGeom prst="rect">
+            <a:avLst/>
+          </a:prstGeom>
+          <a:noFill/>
+        </p:spPr>
+        <p:txBody>
+          <a:bodyPr wrap="square" rtlCol="0">
+            <a:spAutoFit/>
+          </a:bodyPr>
+          <a:lstStyle/>
+          <a:p>
+            <a:r>
+              <a:rPr lang="it-IT" u="sng" dirty="0"/>
+              <a:t>Missing Values</a:t>
+            </a:r>
+            <a:endParaRPr lang="nl-NL" u="sng" dirty="0"/>
+          </a:p>
+        </p:txBody>
+      </p:sp>
+      <p:pic>
+        <p:nvPicPr>
+          <p:cNvPr id="3" name="Picture 2">
+            <a:extLst>
+              <a:ext uri="{FF2B5EF4-FFF2-40B4-BE49-F238E27FC236}">
+                <a16:creationId xmlns:a16="http://schemas.microsoft.com/office/drawing/2014/main" id="{6C52EDD9-3028-4E42-A5D9-F1DB5004F6CA}"/>
+              </a:ext>
+            </a:extLst>
+          </p:cNvPr>
+          <p:cNvPicPr>
+            <a:picLocks noChangeAspect="1"/>
+          </p:cNvPicPr>
+          <p:nvPr/>
+        </p:nvPicPr>
+        <p:blipFill>
+          <a:blip r:embed="rId2">
+            <a:extLst>
+              <a:ext uri="{28A0092B-C50C-407E-A947-70E740481C1C}">
+                <a14:useLocalDpi xmlns:a14="http://schemas.microsoft.com/office/drawing/2010/main" val="0"/>
+              </a:ext>
+            </a:extLst>
+          </a:blip>
+          <a:stretch>
+            <a:fillRect/>
+          </a:stretch>
+        </p:blipFill>
+        <p:spPr>
+          <a:xfrm>
+            <a:off x="2868297" y="0"/>
+            <a:ext cx="6455405" cy="6858000"/>
+          </a:xfrm>
+          <a:prstGeom prst="rect">
+            <a:avLst/>
+          </a:prstGeom>
+        </p:spPr>
+      </p:pic>
+    </p:spTree>
+    <p:extLst>
+      <p:ext uri="{BB962C8B-B14F-4D97-AF65-F5344CB8AC3E}">
+        <p14:creationId xmlns:p14="http://schemas.microsoft.com/office/powerpoint/2010/main" val="2771455475"/>
+      </p:ext>
+    </p:extLst>
+  </p:cSld>
+  <p:clrMapOvr>
+    <a:masterClrMapping/>
+  </p:clrMapOvr>
+  <mc:AlternateContent xmlns:mc="http://schemas.openxmlformats.org/markup-compatibility/2006" xmlns:p159="http://schemas.microsoft.com/office/powerpoint/2015/09/main">
+    <mc:Choice Requires="p159">
+      <p:transition spd="slow">
         <p159:morph option="byObject"/>
       </p:transition>
     </mc:Choice>
@@ -11369,48 +11255,12 @@
           <a:chExt cx="0" cy="0"/>
         </a:xfrm>
       </p:grpSpPr>
-      <p:sp>
-        <p:nvSpPr>
-          <p:cNvPr id="4" name="TextBox 3">
-            <a:extLst>
-              <a:ext uri="{FF2B5EF4-FFF2-40B4-BE49-F238E27FC236}">
-                <a16:creationId xmlns:a16="http://schemas.microsoft.com/office/drawing/2014/main" id="{B40CC955-9822-4C97-8EA5-CCA925BF2200}"/>
-              </a:ext>
-            </a:extLst>
-          </p:cNvPr>
-          <p:cNvSpPr txBox="1"/>
-          <p:nvPr/>
-        </p:nvSpPr>
-        <p:spPr>
-          <a:xfrm>
-            <a:off x="0" y="2009"/>
-            <a:ext cx="3430954" cy="369332"/>
-          </a:xfrm>
-          <a:prstGeom prst="rect">
-            <a:avLst/>
-          </a:prstGeom>
-          <a:noFill/>
-        </p:spPr>
-        <p:txBody>
-          <a:bodyPr wrap="square" rtlCol="0">
-            <a:spAutoFit/>
-          </a:bodyPr>
-          <a:lstStyle/>
-          <a:p>
-            <a:r>
-              <a:rPr lang="it-IT" u="sng" dirty="0"/>
-              <a:t>Missing Values</a:t>
-            </a:r>
-            <a:endParaRPr lang="nl-NL" u="sng" dirty="0"/>
-          </a:p>
-        </p:txBody>
-      </p:sp>
       <p:pic>
         <p:nvPicPr>
-          <p:cNvPr id="5" name="Picture 4">
-            <a:extLst>
-              <a:ext uri="{FF2B5EF4-FFF2-40B4-BE49-F238E27FC236}">
-                <a16:creationId xmlns:a16="http://schemas.microsoft.com/office/drawing/2014/main" id="{634625C7-DC4A-4491-AF1E-52984F047015}"/>
+          <p:cNvPr id="56" name="Graphic 55">
+            <a:extLst>
+              <a:ext uri="{FF2B5EF4-FFF2-40B4-BE49-F238E27FC236}">
+                <a16:creationId xmlns:a16="http://schemas.microsoft.com/office/drawing/2014/main" id="{52414F87-F631-4D89-AA4B-5432D50060F8}"/>
               </a:ext>
             </a:extLst>
           </p:cNvPr>
@@ -11419,21 +11269,220 @@
           </p:cNvPicPr>
           <p:nvPr/>
         </p:nvPicPr>
-        <p:blipFill rotWithShape="1">
+        <p:blipFill>
           <a:blip r:embed="rId2">
             <a:extLst>
               <a:ext uri="{28A0092B-C50C-407E-A947-70E740481C1C}">
                 <a14:useLocalDpi xmlns:a14="http://schemas.microsoft.com/office/drawing/2010/main" val="0"/>
               </a:ext>
+              <a:ext uri="{96DAC541-7B7A-43D3-8B79-37D633B846F1}">
+                <asvg:svgBlip xmlns:asvg="http://schemas.microsoft.com/office/drawing/2016/SVG/main" r:embed="rId3"/>
+              </a:ext>
             </a:extLst>
           </a:blip>
-          <a:srcRect t="3309"/>
-          <a:stretch/>
+          <a:stretch>
+            <a:fillRect/>
+          </a:stretch>
         </p:blipFill>
         <p:spPr>
           <a:xfrm>
-            <a:off x="2424139" y="352927"/>
-            <a:ext cx="7343722" cy="6503064"/>
+            <a:off x="6935099" y="3299436"/>
+            <a:ext cx="4394477" cy="3299436"/>
+          </a:xfrm>
+          <a:prstGeom prst="rect">
+            <a:avLst/>
+          </a:prstGeom>
+        </p:spPr>
+      </p:pic>
+      <p:pic>
+        <p:nvPicPr>
+          <p:cNvPr id="58" name="Graphic 57">
+            <a:extLst>
+              <a:ext uri="{FF2B5EF4-FFF2-40B4-BE49-F238E27FC236}">
+                <a16:creationId xmlns:a16="http://schemas.microsoft.com/office/drawing/2014/main" id="{68FD5771-5A2A-484D-A31C-D9D6B471123F}"/>
+              </a:ext>
+            </a:extLst>
+          </p:cNvPr>
+          <p:cNvPicPr>
+            <a:picLocks noChangeAspect="1"/>
+          </p:cNvPicPr>
+          <p:nvPr/>
+        </p:nvPicPr>
+        <p:blipFill>
+          <a:blip r:embed="rId4">
+            <a:extLst>
+              <a:ext uri="{28A0092B-C50C-407E-A947-70E740481C1C}">
+                <a14:useLocalDpi xmlns:a14="http://schemas.microsoft.com/office/drawing/2010/main" val="0"/>
+              </a:ext>
+              <a:ext uri="{96DAC541-7B7A-43D3-8B79-37D633B846F1}">
+                <asvg:svgBlip xmlns:asvg="http://schemas.microsoft.com/office/drawing/2016/SVG/main" r:embed="rId5"/>
+              </a:ext>
+            </a:extLst>
+          </a:blip>
+          <a:stretch>
+            <a:fillRect/>
+          </a:stretch>
+        </p:blipFill>
+        <p:spPr>
+          <a:xfrm>
+            <a:off x="862424" y="3299436"/>
+            <a:ext cx="4394477" cy="3299436"/>
+          </a:xfrm>
+          <a:prstGeom prst="rect">
+            <a:avLst/>
+          </a:prstGeom>
+        </p:spPr>
+      </p:pic>
+      <p:pic>
+        <p:nvPicPr>
+          <p:cNvPr id="60" name="Graphic 59">
+            <a:extLst>
+              <a:ext uri="{FF2B5EF4-FFF2-40B4-BE49-F238E27FC236}">
+                <a16:creationId xmlns:a16="http://schemas.microsoft.com/office/drawing/2014/main" id="{A666AFF7-F3EA-45A7-9012-B02B8CF613E5}"/>
+              </a:ext>
+            </a:extLst>
+          </p:cNvPr>
+          <p:cNvPicPr>
+            <a:picLocks noChangeAspect="1"/>
+          </p:cNvPicPr>
+          <p:nvPr/>
+        </p:nvPicPr>
+        <p:blipFill>
+          <a:blip r:embed="rId6">
+            <a:extLst>
+              <a:ext uri="{28A0092B-C50C-407E-A947-70E740481C1C}">
+                <a14:useLocalDpi xmlns:a14="http://schemas.microsoft.com/office/drawing/2010/main" val="0"/>
+              </a:ext>
+              <a:ext uri="{96DAC541-7B7A-43D3-8B79-37D633B846F1}">
+                <asvg:svgBlip xmlns:asvg="http://schemas.microsoft.com/office/drawing/2016/SVG/main" r:embed="rId7"/>
+              </a:ext>
+            </a:extLst>
+          </a:blip>
+          <a:stretch>
+            <a:fillRect/>
+          </a:stretch>
+        </p:blipFill>
+        <p:spPr>
+          <a:xfrm>
+            <a:off x="8214104" y="0"/>
+            <a:ext cx="4394477" cy="3299436"/>
+          </a:xfrm>
+          <a:prstGeom prst="rect">
+            <a:avLst/>
+          </a:prstGeom>
+        </p:spPr>
+      </p:pic>
+      <p:pic>
+        <p:nvPicPr>
+          <p:cNvPr id="62" name="Graphic 61">
+            <a:extLst>
+              <a:ext uri="{FF2B5EF4-FFF2-40B4-BE49-F238E27FC236}">
+                <a16:creationId xmlns:a16="http://schemas.microsoft.com/office/drawing/2014/main" id="{BC051BED-6050-4585-8170-AF9657F7F502}"/>
+              </a:ext>
+            </a:extLst>
+          </p:cNvPr>
+          <p:cNvPicPr>
+            <a:picLocks noChangeAspect="1"/>
+          </p:cNvPicPr>
+          <p:nvPr/>
+        </p:nvPicPr>
+        <p:blipFill>
+          <a:blip r:embed="rId8">
+            <a:extLst>
+              <a:ext uri="{28A0092B-C50C-407E-A947-70E740481C1C}">
+                <a14:useLocalDpi xmlns:a14="http://schemas.microsoft.com/office/drawing/2010/main" val="0"/>
+              </a:ext>
+              <a:ext uri="{96DAC541-7B7A-43D3-8B79-37D633B846F1}">
+                <asvg:svgBlip xmlns:asvg="http://schemas.microsoft.com/office/drawing/2016/SVG/main" r:embed="rId9"/>
+              </a:ext>
+            </a:extLst>
+          </a:blip>
+          <a:stretch>
+            <a:fillRect/>
+          </a:stretch>
+        </p:blipFill>
+        <p:spPr>
+          <a:xfrm>
+            <a:off x="5256901" y="0"/>
+            <a:ext cx="4394477" cy="3299436"/>
+          </a:xfrm>
+          <a:prstGeom prst="rect">
+            <a:avLst/>
+          </a:prstGeom>
+        </p:spPr>
+      </p:pic>
+      <p:pic>
+        <p:nvPicPr>
+          <p:cNvPr id="64" name="Graphic 63">
+            <a:extLst>
+              <a:ext uri="{FF2B5EF4-FFF2-40B4-BE49-F238E27FC236}">
+                <a16:creationId xmlns:a16="http://schemas.microsoft.com/office/drawing/2014/main" id="{FC29D5F6-41B5-4C6C-A664-E5758A41131A}"/>
+              </a:ext>
+            </a:extLst>
+          </p:cNvPr>
+          <p:cNvPicPr>
+            <a:picLocks noChangeAspect="1"/>
+          </p:cNvPicPr>
+          <p:nvPr/>
+        </p:nvPicPr>
+        <p:blipFill>
+          <a:blip r:embed="rId10">
+            <a:extLst>
+              <a:ext uri="{28A0092B-C50C-407E-A947-70E740481C1C}">
+                <a14:useLocalDpi xmlns:a14="http://schemas.microsoft.com/office/drawing/2010/main" val="0"/>
+              </a:ext>
+              <a:ext uri="{96DAC541-7B7A-43D3-8B79-37D633B846F1}">
+                <asvg:svgBlip xmlns:asvg="http://schemas.microsoft.com/office/drawing/2016/SVG/main" r:embed="rId11"/>
+              </a:ext>
+            </a:extLst>
+          </a:blip>
+          <a:stretch>
+            <a:fillRect/>
+          </a:stretch>
+        </p:blipFill>
+        <p:spPr>
+          <a:xfrm>
+            <a:off x="2299699" y="0"/>
+            <a:ext cx="4394477" cy="3299436"/>
+          </a:xfrm>
+          <a:prstGeom prst="rect">
+            <a:avLst/>
+          </a:prstGeom>
+        </p:spPr>
+      </p:pic>
+      <p:pic>
+        <p:nvPicPr>
+          <p:cNvPr id="66" name="Graphic 65">
+            <a:extLst>
+              <a:ext uri="{FF2B5EF4-FFF2-40B4-BE49-F238E27FC236}">
+                <a16:creationId xmlns:a16="http://schemas.microsoft.com/office/drawing/2014/main" id="{E40859BE-F25B-48B1-B7CF-10C7F1E45D9A}"/>
+              </a:ext>
+            </a:extLst>
+          </p:cNvPr>
+          <p:cNvPicPr>
+            <a:picLocks noChangeAspect="1"/>
+          </p:cNvPicPr>
+          <p:nvPr/>
+        </p:nvPicPr>
+        <p:blipFill>
+          <a:blip r:embed="rId12">
+            <a:extLst>
+              <a:ext uri="{28A0092B-C50C-407E-A947-70E740481C1C}">
+                <a14:useLocalDpi xmlns:a14="http://schemas.microsoft.com/office/drawing/2010/main" val="0"/>
+              </a:ext>
+              <a:ext uri="{96DAC541-7B7A-43D3-8B79-37D633B846F1}">
+                <asvg:svgBlip xmlns:asvg="http://schemas.microsoft.com/office/drawing/2016/SVG/main" r:embed="rId13"/>
+              </a:ext>
+            </a:extLst>
+          </a:blip>
+          <a:stretch>
+            <a:fillRect/>
+          </a:stretch>
+        </p:blipFill>
+        <p:spPr>
+          <a:xfrm>
+            <a:off x="-657503" y="0"/>
+            <a:ext cx="4394477" cy="3299436"/>
           </a:xfrm>
           <a:prstGeom prst="rect">
             <a:avLst/>
@@ -11443,7 +11492,7 @@
     </p:spTree>
     <p:extLst>
       <p:ext uri="{BB962C8B-B14F-4D97-AF65-F5344CB8AC3E}">
-        <p14:creationId xmlns:p14="http://schemas.microsoft.com/office/powerpoint/2010/main" val="2771455475"/>
+        <p14:creationId xmlns:p14="http://schemas.microsoft.com/office/powerpoint/2010/main" val="2692764115"/>
       </p:ext>
     </p:extLst>
   </p:cSld>
@@ -11452,7 +11501,7 @@
   </p:clrMapOvr>
   <mc:AlternateContent xmlns:mc="http://schemas.openxmlformats.org/markup-compatibility/2006" xmlns:p159="http://schemas.microsoft.com/office/powerpoint/2015/09/main">
     <mc:Choice Requires="p159">
-      <p:transition xmlns:p14="http://schemas.microsoft.com/office/powerpoint/2010/main" spd="slow" p14:dur="2000">
+      <p:transition spd="slow">
         <p159:morph option="byObject"/>
       </p:transition>
     </mc:Choice>
@@ -11484,10 +11533,10 @@
       </p:grpSpPr>
       <p:pic>
         <p:nvPicPr>
-          <p:cNvPr id="56" name="Graphic 55">
-            <a:extLst>
-              <a:ext uri="{FF2B5EF4-FFF2-40B4-BE49-F238E27FC236}">
-                <a16:creationId xmlns:a16="http://schemas.microsoft.com/office/drawing/2014/main" id="{52414F87-F631-4D89-AA4B-5432D50060F8}"/>
+          <p:cNvPr id="3" name="Graphic 2">
+            <a:extLst>
+              <a:ext uri="{FF2B5EF4-FFF2-40B4-BE49-F238E27FC236}">
+                <a16:creationId xmlns:a16="http://schemas.microsoft.com/office/drawing/2014/main" id="{5104F63A-8305-48CC-A7C8-38D27F499ADB}"/>
               </a:ext>
             </a:extLst>
           </p:cNvPr>
@@ -11513,8 +11562,8 @@
         </p:blipFill>
         <p:spPr>
           <a:xfrm>
-            <a:off x="6935099" y="3299436"/>
-            <a:ext cx="4394477" cy="3299436"/>
+            <a:off x="6955860" y="3300410"/>
+            <a:ext cx="4471895" cy="3357563"/>
           </a:xfrm>
           <a:prstGeom prst="rect">
             <a:avLst/>
@@ -11523,10 +11572,10 @@
       </p:pic>
       <p:pic>
         <p:nvPicPr>
-          <p:cNvPr id="58" name="Graphic 57">
-            <a:extLst>
-              <a:ext uri="{FF2B5EF4-FFF2-40B4-BE49-F238E27FC236}">
-                <a16:creationId xmlns:a16="http://schemas.microsoft.com/office/drawing/2014/main" id="{68FD5771-5A2A-484D-A31C-D9D6B471123F}"/>
+          <p:cNvPr id="5" name="Graphic 4">
+            <a:extLst>
+              <a:ext uri="{FF2B5EF4-FFF2-40B4-BE49-F238E27FC236}">
+                <a16:creationId xmlns:a16="http://schemas.microsoft.com/office/drawing/2014/main" id="{B68B9AC6-63AF-4D04-8412-F617E4BD1E25}"/>
               </a:ext>
             </a:extLst>
           </p:cNvPr>
@@ -11552,8 +11601,8 @@
         </p:blipFill>
         <p:spPr>
           <a:xfrm>
-            <a:off x="862424" y="3299436"/>
-            <a:ext cx="4394477" cy="3299436"/>
+            <a:off x="915392" y="3300411"/>
+            <a:ext cx="4471895" cy="3357563"/>
           </a:xfrm>
           <a:prstGeom prst="rect">
             <a:avLst/>
@@ -11562,10 +11611,10 @@
       </p:pic>
       <p:pic>
         <p:nvPicPr>
-          <p:cNvPr id="60" name="Graphic 59">
-            <a:extLst>
-              <a:ext uri="{FF2B5EF4-FFF2-40B4-BE49-F238E27FC236}">
-                <a16:creationId xmlns:a16="http://schemas.microsoft.com/office/drawing/2014/main" id="{A666AFF7-F3EA-45A7-9012-B02B8CF613E5}"/>
+          <p:cNvPr id="7" name="Graphic 6">
+            <a:extLst>
+              <a:ext uri="{FF2B5EF4-FFF2-40B4-BE49-F238E27FC236}">
+                <a16:creationId xmlns:a16="http://schemas.microsoft.com/office/drawing/2014/main" id="{A67BD1E4-1078-48C8-A0CC-A8F92079F4D0}"/>
               </a:ext>
             </a:extLst>
           </p:cNvPr>
@@ -11591,8 +11640,8 @@
         </p:blipFill>
         <p:spPr>
           <a:xfrm>
-            <a:off x="8214104" y="0"/>
-            <a:ext cx="4394477" cy="3299436"/>
+            <a:off x="8416461" y="0"/>
+            <a:ext cx="4471895" cy="3357563"/>
           </a:xfrm>
           <a:prstGeom prst="rect">
             <a:avLst/>
@@ -11601,10 +11650,10 @@
       </p:pic>
       <p:pic>
         <p:nvPicPr>
-          <p:cNvPr id="62" name="Graphic 61">
-            <a:extLst>
-              <a:ext uri="{FF2B5EF4-FFF2-40B4-BE49-F238E27FC236}">
-                <a16:creationId xmlns:a16="http://schemas.microsoft.com/office/drawing/2014/main" id="{BC051BED-6050-4585-8170-AF9657F7F502}"/>
+          <p:cNvPr id="9" name="Graphic 8">
+            <a:extLst>
+              <a:ext uri="{FF2B5EF4-FFF2-40B4-BE49-F238E27FC236}">
+                <a16:creationId xmlns:a16="http://schemas.microsoft.com/office/drawing/2014/main" id="{9FBB4D53-4F61-4420-B2EA-5DBB2190FBDD}"/>
               </a:ext>
             </a:extLst>
           </p:cNvPr>
@@ -11630,8 +11679,8 @@
         </p:blipFill>
         <p:spPr>
           <a:xfrm>
-            <a:off x="5256901" y="0"/>
-            <a:ext cx="4394477" cy="3299436"/>
+            <a:off x="5405166" y="0"/>
+            <a:ext cx="4471895" cy="3357563"/>
           </a:xfrm>
           <a:prstGeom prst="rect">
             <a:avLst/>
@@ -11640,10 +11689,10 @@
       </p:pic>
       <p:pic>
         <p:nvPicPr>
-          <p:cNvPr id="64" name="Graphic 63">
-            <a:extLst>
-              <a:ext uri="{FF2B5EF4-FFF2-40B4-BE49-F238E27FC236}">
-                <a16:creationId xmlns:a16="http://schemas.microsoft.com/office/drawing/2014/main" id="{FC29D5F6-41B5-4C6C-A664-E5758A41131A}"/>
+          <p:cNvPr id="11" name="Graphic 10">
+            <a:extLst>
+              <a:ext uri="{FF2B5EF4-FFF2-40B4-BE49-F238E27FC236}">
+                <a16:creationId xmlns:a16="http://schemas.microsoft.com/office/drawing/2014/main" id="{9947BBB5-44C5-48CF-969E-441FAF4420ED}"/>
               </a:ext>
             </a:extLst>
           </p:cNvPr>
@@ -11669,8 +11718,8 @@
         </p:blipFill>
         <p:spPr>
           <a:xfrm>
-            <a:off x="2299699" y="0"/>
-            <a:ext cx="4394477" cy="3299436"/>
+            <a:off x="2314940" y="0"/>
+            <a:ext cx="4471895" cy="3357563"/>
           </a:xfrm>
           <a:prstGeom prst="rect">
             <a:avLst/>
@@ -11679,10 +11728,10 @@
       </p:pic>
       <p:pic>
         <p:nvPicPr>
-          <p:cNvPr id="66" name="Graphic 65">
-            <a:extLst>
-              <a:ext uri="{FF2B5EF4-FFF2-40B4-BE49-F238E27FC236}">
-                <a16:creationId xmlns:a16="http://schemas.microsoft.com/office/drawing/2014/main" id="{E40859BE-F25B-48B1-B7CF-10C7F1E45D9A}"/>
+          <p:cNvPr id="13" name="Graphic 12">
+            <a:extLst>
+              <a:ext uri="{FF2B5EF4-FFF2-40B4-BE49-F238E27FC236}">
+                <a16:creationId xmlns:a16="http://schemas.microsoft.com/office/drawing/2014/main" id="{FC69359F-A5B2-4EC6-BD2E-74DFBA522CFC}"/>
               </a:ext>
             </a:extLst>
           </p:cNvPr>
@@ -11708,8 +11757,8 @@
         </p:blipFill>
         <p:spPr>
           <a:xfrm>
-            <a:off x="-657503" y="0"/>
-            <a:ext cx="4394477" cy="3299436"/>
+            <a:off x="-859675" y="-28577"/>
+            <a:ext cx="4471895" cy="3357563"/>
           </a:xfrm>
           <a:prstGeom prst="rect">
             <a:avLst/>
@@ -11719,7 +11768,7 @@
     </p:spTree>
     <p:extLst>
       <p:ext uri="{BB962C8B-B14F-4D97-AF65-F5344CB8AC3E}">
-        <p14:creationId xmlns:p14="http://schemas.microsoft.com/office/powerpoint/2010/main" val="2692764115"/>
+        <p14:creationId xmlns:p14="http://schemas.microsoft.com/office/powerpoint/2010/main" val="2926366783"/>
       </p:ext>
     </p:extLst>
   </p:cSld>
@@ -11728,7 +11777,7 @@
   </p:clrMapOvr>
   <mc:AlternateContent xmlns:mc="http://schemas.openxmlformats.org/markup-compatibility/2006" xmlns:p159="http://schemas.microsoft.com/office/powerpoint/2015/09/main">
     <mc:Choice Requires="p159">
-      <p:transition xmlns:p14="http://schemas.microsoft.com/office/powerpoint/2010/main" spd="slow" p14:dur="2000">
+      <p:transition spd="slow">
         <p159:morph option="byObject"/>
       </p:transition>
     </mc:Choice>

--- a/assets/ppt/data_exploration.pptx
+++ b/assets/ppt/data_exploration.pptx
@@ -5,7 +5,7 @@
     <p:sldMasterId id="2147483648" r:id="rId1"/>
   </p:sldMasterIdLst>
   <p:notesMasterIdLst>
-    <p:notesMasterId r:id="rId30"/>
+    <p:notesMasterId r:id="rId35"/>
   </p:notesMasterIdLst>
   <p:sldIdLst>
     <p:sldId id="257" r:id="rId2"/>
@@ -14,28 +14,33 @@
     <p:sldId id="266" r:id="rId5"/>
     <p:sldId id="258" r:id="rId6"/>
     <p:sldId id="281" r:id="rId7"/>
-    <p:sldId id="262" r:id="rId8"/>
-    <p:sldId id="260" r:id="rId9"/>
-    <p:sldId id="261" r:id="rId10"/>
+    <p:sldId id="260" r:id="rId8"/>
+    <p:sldId id="261" r:id="rId9"/>
+    <p:sldId id="262" r:id="rId10"/>
     <p:sldId id="265" r:id="rId11"/>
     <p:sldId id="264" r:id="rId12"/>
     <p:sldId id="263" r:id="rId13"/>
-    <p:sldId id="280" r:id="rId14"/>
-    <p:sldId id="282" r:id="rId15"/>
-    <p:sldId id="283" r:id="rId16"/>
-    <p:sldId id="284" r:id="rId17"/>
-    <p:sldId id="259" r:id="rId18"/>
-    <p:sldId id="274" r:id="rId19"/>
-    <p:sldId id="275" r:id="rId20"/>
-    <p:sldId id="279" r:id="rId21"/>
-    <p:sldId id="278" r:id="rId22"/>
-    <p:sldId id="276" r:id="rId23"/>
-    <p:sldId id="277" r:id="rId24"/>
-    <p:sldId id="268" r:id="rId25"/>
-    <p:sldId id="269" r:id="rId26"/>
-    <p:sldId id="271" r:id="rId27"/>
-    <p:sldId id="272" r:id="rId28"/>
-    <p:sldId id="267" r:id="rId29"/>
+    <p:sldId id="285" r:id="rId14"/>
+    <p:sldId id="280" r:id="rId15"/>
+    <p:sldId id="282" r:id="rId16"/>
+    <p:sldId id="283" r:id="rId17"/>
+    <p:sldId id="286" r:id="rId18"/>
+    <p:sldId id="284" r:id="rId19"/>
+    <p:sldId id="289" r:id="rId20"/>
+    <p:sldId id="288" r:id="rId21"/>
+    <p:sldId id="287" r:id="rId22"/>
+    <p:sldId id="259" r:id="rId23"/>
+    <p:sldId id="274" r:id="rId24"/>
+    <p:sldId id="275" r:id="rId25"/>
+    <p:sldId id="279" r:id="rId26"/>
+    <p:sldId id="278" r:id="rId27"/>
+    <p:sldId id="276" r:id="rId28"/>
+    <p:sldId id="277" r:id="rId29"/>
+    <p:sldId id="268" r:id="rId30"/>
+    <p:sldId id="269" r:id="rId31"/>
+    <p:sldId id="271" r:id="rId32"/>
+    <p:sldId id="272" r:id="rId33"/>
+    <p:sldId id="267" r:id="rId34"/>
   </p:sldIdLst>
   <p:sldSz cx="12192000" cy="6858000"/>
   <p:notesSz cx="6858000" cy="9144000"/>
@@ -136,7 +141,18 @@
   </p:defaultTextStyle>
   <p:extLst>
     <p:ext uri="{EFAFB233-063F-42B5-8137-9DF3F51BA10A}">
-      <p15:sldGuideLst xmlns:p15="http://schemas.microsoft.com/office/powerpoint/2012/main"/>
+      <p15:sldGuideLst xmlns:p15="http://schemas.microsoft.com/office/powerpoint/2012/main">
+        <p15:guide id="1" orient="horz" pos="792" userDrawn="1">
+          <p15:clr>
+            <a:srgbClr val="A4A3A4"/>
+          </p15:clr>
+        </p15:guide>
+        <p15:guide id="2" pos="3840" userDrawn="1">
+          <p15:clr>
+            <a:srgbClr val="A4A3A4"/>
+          </p15:clr>
+        </p15:guide>
+      </p15:sldGuideLst>
     </p:ext>
   </p:extLst>
 </p:presentation>
@@ -1036,7 +1052,7 @@
           <a:p>
             <a:fld id="{511A67EE-E303-4967-962F-9A28980F7F51}" type="datetimeFigureOut">
               <a:rPr lang="nl-NL" smtClean="0"/>
-              <a:t>27-8-2024</a:t>
+              <a:t>28-8-2024</a:t>
             </a:fld>
             <a:endParaRPr lang="nl-NL"/>
           </a:p>
@@ -1453,7 +1469,7 @@
           <a:p>
             <a:fld id="{FED566F3-1D76-4AEC-ABE9-AFABCF495913}" type="datetime1">
               <a:rPr lang="nl-NL" smtClean="0"/>
-              <a:t>27-8-2024</a:t>
+              <a:t>28-8-2024</a:t>
             </a:fld>
             <a:endParaRPr lang="nl-NL"/>
           </a:p>
@@ -1665,7 +1681,7 @@
           <a:p>
             <a:fld id="{BC7E55A1-B228-4CF1-BFC3-6AC3B8574AC2}" type="datetime1">
               <a:rPr lang="nl-NL" smtClean="0"/>
-              <a:t>27-8-2024</a:t>
+              <a:t>28-8-2024</a:t>
             </a:fld>
             <a:endParaRPr lang="nl-NL"/>
           </a:p>
@@ -1887,7 +1903,7 @@
           <a:p>
             <a:fld id="{31AEBC58-6519-439D-8982-F0178170B57B}" type="datetime1">
               <a:rPr lang="nl-NL" smtClean="0"/>
-              <a:t>27-8-2024</a:t>
+              <a:t>28-8-2024</a:t>
             </a:fld>
             <a:endParaRPr lang="nl-NL"/>
           </a:p>
@@ -2099,7 +2115,7 @@
           <a:p>
             <a:fld id="{86DED964-D172-498F-BB83-2F7DE2692B37}" type="datetime1">
               <a:rPr lang="nl-NL" smtClean="0"/>
-              <a:t>27-8-2024</a:t>
+              <a:t>28-8-2024</a:t>
             </a:fld>
             <a:endParaRPr lang="nl-NL"/>
           </a:p>
@@ -2387,7 +2403,7 @@
           <a:p>
             <a:fld id="{230F72AC-D91D-48F5-81B4-4889AEA39D06}" type="datetime1">
               <a:rPr lang="nl-NL" smtClean="0"/>
-              <a:t>27-8-2024</a:t>
+              <a:t>28-8-2024</a:t>
             </a:fld>
             <a:endParaRPr lang="nl-NL"/>
           </a:p>
@@ -2667,7 +2683,7 @@
           <a:p>
             <a:fld id="{A0669485-26A9-497C-AD22-BCEA88DF9055}" type="datetime1">
               <a:rPr lang="nl-NL" smtClean="0"/>
-              <a:t>27-8-2024</a:t>
+              <a:t>28-8-2024</a:t>
             </a:fld>
             <a:endParaRPr lang="nl-NL"/>
           </a:p>
@@ -3094,7 +3110,7 @@
           <a:p>
             <a:fld id="{6216D00C-0C62-40DF-B6FF-B9A70701552F}" type="datetime1">
               <a:rPr lang="nl-NL" smtClean="0"/>
-              <a:t>27-8-2024</a:t>
+              <a:t>28-8-2024</a:t>
             </a:fld>
             <a:endParaRPr lang="nl-NL"/>
           </a:p>
@@ -3248,7 +3264,7 @@
           <a:p>
             <a:fld id="{88FE9515-DD39-459B-B4EF-789D74C861A5}" type="datetime1">
               <a:rPr lang="nl-NL" smtClean="0"/>
-              <a:t>27-8-2024</a:t>
+              <a:t>28-8-2024</a:t>
             </a:fld>
             <a:endParaRPr lang="nl-NL"/>
           </a:p>
@@ -3373,7 +3389,7 @@
           <a:p>
             <a:fld id="{DFA27954-A76F-4E23-8576-A7D9667CDBCC}" type="datetime1">
               <a:rPr lang="nl-NL" smtClean="0"/>
-              <a:t>27-8-2024</a:t>
+              <a:t>28-8-2024</a:t>
             </a:fld>
             <a:endParaRPr lang="nl-NL"/>
           </a:p>
@@ -3698,7 +3714,7 @@
           <a:p>
             <a:fld id="{53C17D54-D850-41AA-94F6-0F7316E4F326}" type="datetime1">
               <a:rPr lang="nl-NL" smtClean="0"/>
-              <a:t>27-8-2024</a:t>
+              <a:t>28-8-2024</a:t>
             </a:fld>
             <a:endParaRPr lang="nl-NL"/>
           </a:p>
@@ -3999,7 +4015,7 @@
           <a:p>
             <a:fld id="{0596A96E-3739-43D3-93E5-DAA507EA7B79}" type="datetime1">
               <a:rPr lang="nl-NL" smtClean="0"/>
-              <a:t>27-8-2024</a:t>
+              <a:t>28-8-2024</a:t>
             </a:fld>
             <a:endParaRPr lang="nl-NL"/>
           </a:p>
@@ -4254,7 +4270,7 @@
           <a:p>
             <a:fld id="{CFBB0748-A22F-4137-ADB1-6D5A09F7B1DF}" type="datetime1">
               <a:rPr lang="nl-NL" smtClean="0"/>
-              <a:t>27-8-2024</a:t>
+              <a:t>28-8-2024</a:t>
             </a:fld>
             <a:endParaRPr lang="nl-NL"/>
           </a:p>
@@ -5177,48 +5193,12 @@
           <a:chExt cx="0" cy="0"/>
         </a:xfrm>
       </p:grpSpPr>
-      <p:sp>
-        <p:nvSpPr>
-          <p:cNvPr id="4" name="TextBox 3">
-            <a:extLst>
-              <a:ext uri="{FF2B5EF4-FFF2-40B4-BE49-F238E27FC236}">
-                <a16:creationId xmlns:a16="http://schemas.microsoft.com/office/drawing/2014/main" id="{99122CDA-8054-4F30-AA24-7864527ED42D}"/>
-              </a:ext>
-            </a:extLst>
-          </p:cNvPr>
-          <p:cNvSpPr txBox="1"/>
-          <p:nvPr/>
-        </p:nvSpPr>
-        <p:spPr>
-          <a:xfrm>
-            <a:off x="0" y="0"/>
-            <a:ext cx="4708358" cy="369332"/>
-          </a:xfrm>
-          <a:prstGeom prst="rect">
-            <a:avLst/>
-          </a:prstGeom>
-          <a:noFill/>
-        </p:spPr>
-        <p:txBody>
-          <a:bodyPr wrap="square" rtlCol="0">
-            <a:spAutoFit/>
-          </a:bodyPr>
-          <a:lstStyle/>
-          <a:p>
-            <a:r>
-              <a:rPr lang="it-IT" u="sng" dirty="0"/>
-              <a:t>Original Chemical Subs distributions</a:t>
-            </a:r>
-            <a:endParaRPr lang="nl-NL" u="sng" dirty="0"/>
-          </a:p>
-        </p:txBody>
-      </p:sp>
       <p:pic>
         <p:nvPicPr>
-          <p:cNvPr id="6" name="Picture 5">
-            <a:extLst>
-              <a:ext uri="{FF2B5EF4-FFF2-40B4-BE49-F238E27FC236}">
-                <a16:creationId xmlns:a16="http://schemas.microsoft.com/office/drawing/2014/main" id="{62B614DA-B9E5-44DA-9D9F-C33D5F9B5334}"/>
+          <p:cNvPr id="5" name="Picture 4">
+            <a:extLst>
+              <a:ext uri="{FF2B5EF4-FFF2-40B4-BE49-F238E27FC236}">
+                <a16:creationId xmlns:a16="http://schemas.microsoft.com/office/drawing/2014/main" id="{70962B23-E15F-4BCF-9983-5A40DD11EB79}"/>
               </a:ext>
             </a:extLst>
           </p:cNvPr>
@@ -5241,18 +5221,90 @@
         </p:blipFill>
         <p:spPr>
           <a:xfrm>
-            <a:off x="152400" y="538130"/>
-            <a:ext cx="11887200" cy="5958202"/>
+            <a:off x="414902" y="214923"/>
+            <a:ext cx="8570870" cy="6428153"/>
           </a:xfrm>
           <a:prstGeom prst="rect">
             <a:avLst/>
           </a:prstGeom>
         </p:spPr>
       </p:pic>
+      <p:sp>
+        <p:nvSpPr>
+          <p:cNvPr id="6" name="TextBox 5">
+            <a:extLst>
+              <a:ext uri="{FF2B5EF4-FFF2-40B4-BE49-F238E27FC236}">
+                <a16:creationId xmlns:a16="http://schemas.microsoft.com/office/drawing/2014/main" id="{4BE0656D-44CA-4A22-BC1D-23F23E963B16}"/>
+              </a:ext>
+            </a:extLst>
+          </p:cNvPr>
+          <p:cNvSpPr txBox="1"/>
+          <p:nvPr/>
+        </p:nvSpPr>
+        <p:spPr>
+          <a:xfrm>
+            <a:off x="0" y="0"/>
+            <a:ext cx="2289908" cy="369332"/>
+          </a:xfrm>
+          <a:prstGeom prst="rect">
+            <a:avLst/>
+          </a:prstGeom>
+          <a:noFill/>
+        </p:spPr>
+        <p:txBody>
+          <a:bodyPr wrap="square" rtlCol="0">
+            <a:spAutoFit/>
+          </a:bodyPr>
+          <a:lstStyle/>
+          <a:p>
+            <a:r>
+              <a:rPr lang="it-IT" u="sng" dirty="0"/>
+              <a:t>MICE Forest</a:t>
+            </a:r>
+            <a:endParaRPr lang="nl-NL" u="sng" dirty="0"/>
+          </a:p>
+        </p:txBody>
+      </p:sp>
+      <p:sp>
+        <p:nvSpPr>
+          <p:cNvPr id="2" name="TextBox 1">
+            <a:extLst>
+              <a:ext uri="{FF2B5EF4-FFF2-40B4-BE49-F238E27FC236}">
+                <a16:creationId xmlns:a16="http://schemas.microsoft.com/office/drawing/2014/main" id="{7EE12EBB-0F27-451D-A1C2-B974EDB76742}"/>
+              </a:ext>
+            </a:extLst>
+          </p:cNvPr>
+          <p:cNvSpPr txBox="1"/>
+          <p:nvPr/>
+        </p:nvSpPr>
+        <p:spPr>
+          <a:xfrm>
+            <a:off x="9681410" y="3244333"/>
+            <a:ext cx="1949116" cy="369332"/>
+          </a:xfrm>
+          <a:prstGeom prst="rect">
+            <a:avLst/>
+          </a:prstGeom>
+          <a:noFill/>
+        </p:spPr>
+        <p:txBody>
+          <a:bodyPr wrap="square" rtlCol="0">
+            <a:spAutoFit/>
+          </a:bodyPr>
+          <a:lstStyle/>
+          <a:p>
+            <a:r>
+              <a:rPr lang="it-IT" dirty="0"/>
+              <a:t>Seems good uh?</a:t>
+            </a:r>
+            <a:endParaRPr lang="nl-NL" dirty="0"/>
+          </a:p>
+        </p:txBody>
+      </p:sp>
     </p:spTree>
     <p:extLst>
       <p:ext uri="{BB962C8B-B14F-4D97-AF65-F5344CB8AC3E}">
-        <p14:creationId xmlns:p14="http://schemas.microsoft.com/office/powerpoint/2010/main" val="1013586166"/>
+        <p14:creationId xmlns:p14="http://schemas.microsoft.com/office/powerpoint/2010/main" val="3874891276"/>
       </p:ext>
     </p:extLst>
   </p:cSld>
@@ -5291,12 +5343,48 @@
           <a:chExt cx="0" cy="0"/>
         </a:xfrm>
       </p:grpSpPr>
+      <p:sp>
+        <p:nvSpPr>
+          <p:cNvPr id="4" name="TextBox 3">
+            <a:extLst>
+              <a:ext uri="{FF2B5EF4-FFF2-40B4-BE49-F238E27FC236}">
+                <a16:creationId xmlns:a16="http://schemas.microsoft.com/office/drawing/2014/main" id="{99122CDA-8054-4F30-AA24-7864527ED42D}"/>
+              </a:ext>
+            </a:extLst>
+          </p:cNvPr>
+          <p:cNvSpPr txBox="1"/>
+          <p:nvPr/>
+        </p:nvSpPr>
+        <p:spPr>
+          <a:xfrm>
+            <a:off x="0" y="0"/>
+            <a:ext cx="4708358" cy="369332"/>
+          </a:xfrm>
+          <a:prstGeom prst="rect">
+            <a:avLst/>
+          </a:prstGeom>
+          <a:noFill/>
+        </p:spPr>
+        <p:txBody>
+          <a:bodyPr wrap="square" rtlCol="0">
+            <a:spAutoFit/>
+          </a:bodyPr>
+          <a:lstStyle/>
+          <a:p>
+            <a:r>
+              <a:rPr lang="it-IT" u="sng" dirty="0"/>
+              <a:t>Original Chemical Subs distributions</a:t>
+            </a:r>
+            <a:endParaRPr lang="nl-NL" u="sng" dirty="0"/>
+          </a:p>
+        </p:txBody>
+      </p:sp>
       <p:pic>
         <p:nvPicPr>
-          <p:cNvPr id="3" name="Picture 2">
-            <a:extLst>
-              <a:ext uri="{FF2B5EF4-FFF2-40B4-BE49-F238E27FC236}">
-                <a16:creationId xmlns:a16="http://schemas.microsoft.com/office/drawing/2014/main" id="{D9EDA138-723D-402C-81C9-FBE5F72D6622}"/>
+          <p:cNvPr id="6" name="Picture 5">
+            <a:extLst>
+              <a:ext uri="{FF2B5EF4-FFF2-40B4-BE49-F238E27FC236}">
+                <a16:creationId xmlns:a16="http://schemas.microsoft.com/office/drawing/2014/main" id="{62B614DA-B9E5-44DA-9D9F-C33D5F9B5334}"/>
               </a:ext>
             </a:extLst>
           </p:cNvPr>
@@ -5319,54 +5407,18 @@
         </p:blipFill>
         <p:spPr>
           <a:xfrm>
-            <a:off x="0" y="509869"/>
-            <a:ext cx="12192000" cy="6110978"/>
+            <a:off x="152400" y="538130"/>
+            <a:ext cx="11887200" cy="5958202"/>
           </a:xfrm>
           <a:prstGeom prst="rect">
             <a:avLst/>
           </a:prstGeom>
         </p:spPr>
       </p:pic>
-      <p:sp>
-        <p:nvSpPr>
-          <p:cNvPr id="4" name="TextBox 3">
-            <a:extLst>
-              <a:ext uri="{FF2B5EF4-FFF2-40B4-BE49-F238E27FC236}">
-                <a16:creationId xmlns:a16="http://schemas.microsoft.com/office/drawing/2014/main" id="{C89BEB55-6184-4AF3-A7C2-E99DE34DA79B}"/>
-              </a:ext>
-            </a:extLst>
-          </p:cNvPr>
-          <p:cNvSpPr txBox="1"/>
-          <p:nvPr/>
-        </p:nvSpPr>
-        <p:spPr>
-          <a:xfrm>
-            <a:off x="0" y="0"/>
-            <a:ext cx="4708358" cy="369332"/>
-          </a:xfrm>
-          <a:prstGeom prst="rect">
-            <a:avLst/>
-          </a:prstGeom>
-          <a:noFill/>
-        </p:spPr>
-        <p:txBody>
-          <a:bodyPr wrap="square" rtlCol="0">
-            <a:spAutoFit/>
-          </a:bodyPr>
-          <a:lstStyle/>
-          <a:p>
-            <a:r>
-              <a:rPr lang="it-IT" u="sng" dirty="0"/>
-              <a:t>After Imputation Chemical Subs distributions</a:t>
-            </a:r>
-            <a:endParaRPr lang="nl-NL" u="sng" dirty="0"/>
-          </a:p>
-        </p:txBody>
-      </p:sp>
     </p:spTree>
     <p:extLst>
       <p:ext uri="{BB962C8B-B14F-4D97-AF65-F5344CB8AC3E}">
-        <p14:creationId xmlns:p14="http://schemas.microsoft.com/office/powerpoint/2010/main" val="1817773863"/>
+        <p14:creationId xmlns:p14="http://schemas.microsoft.com/office/powerpoint/2010/main" val="1013586166"/>
       </p:ext>
     </p:extLst>
   </p:cSld>
@@ -5410,7 +5462,7 @@
           <p:cNvPr id="3" name="Picture 2">
             <a:extLst>
               <a:ext uri="{FF2B5EF4-FFF2-40B4-BE49-F238E27FC236}">
-                <a16:creationId xmlns:a16="http://schemas.microsoft.com/office/drawing/2014/main" id="{0C597A2D-637D-4700-8FE8-8DCBE5A562CE}"/>
+                <a16:creationId xmlns:a16="http://schemas.microsoft.com/office/drawing/2014/main" id="{D9EDA138-723D-402C-81C9-FBE5F72D6622}"/>
               </a:ext>
             </a:extLst>
           </p:cNvPr>
@@ -5433,56 +5485,20 @@
         </p:blipFill>
         <p:spPr>
           <a:xfrm>
-            <a:off x="0" y="1109671"/>
-            <a:ext cx="12192000" cy="2132828"/>
+            <a:off x="0" y="509869"/>
+            <a:ext cx="12192000" cy="6110978"/>
           </a:xfrm>
           <a:prstGeom prst="rect">
             <a:avLst/>
           </a:prstGeom>
         </p:spPr>
       </p:pic>
-      <p:pic>
-        <p:nvPicPr>
-          <p:cNvPr id="5" name="Picture 4">
-            <a:extLst>
-              <a:ext uri="{FF2B5EF4-FFF2-40B4-BE49-F238E27FC236}">
-                <a16:creationId xmlns:a16="http://schemas.microsoft.com/office/drawing/2014/main" id="{D14A686D-085E-4768-98CF-61F1F9D8071A}"/>
-              </a:ext>
-            </a:extLst>
-          </p:cNvPr>
-          <p:cNvPicPr>
-            <a:picLocks noChangeAspect="1"/>
-          </p:cNvPicPr>
-          <p:nvPr/>
-        </p:nvPicPr>
-        <p:blipFill>
-          <a:blip r:embed="rId3">
-            <a:extLst>
-              <a:ext uri="{28A0092B-C50C-407E-A947-70E740481C1C}">
-                <a14:useLocalDpi xmlns:a14="http://schemas.microsoft.com/office/drawing/2010/main" val="0"/>
-              </a:ext>
-            </a:extLst>
-          </a:blip>
-          <a:stretch>
-            <a:fillRect/>
-          </a:stretch>
-        </p:blipFill>
-        <p:spPr>
-          <a:xfrm>
-            <a:off x="0" y="4231492"/>
-            <a:ext cx="12192000" cy="2132828"/>
-          </a:xfrm>
-          <a:prstGeom prst="rect">
-            <a:avLst/>
-          </a:prstGeom>
-        </p:spPr>
-      </p:pic>
       <p:sp>
         <p:nvSpPr>
-          <p:cNvPr id="6" name="TextBox 5">
-            <a:extLst>
-              <a:ext uri="{FF2B5EF4-FFF2-40B4-BE49-F238E27FC236}">
-                <a16:creationId xmlns:a16="http://schemas.microsoft.com/office/drawing/2014/main" id="{82F73233-438F-4E0E-9D21-5EF1E8E223FC}"/>
+          <p:cNvPr id="4" name="TextBox 3">
+            <a:extLst>
+              <a:ext uri="{FF2B5EF4-FFF2-40B4-BE49-F238E27FC236}">
+                <a16:creationId xmlns:a16="http://schemas.microsoft.com/office/drawing/2014/main" id="{C89BEB55-6184-4AF3-A7C2-E99DE34DA79B}"/>
               </a:ext>
             </a:extLst>
           </p:cNvPr>
@@ -5492,7 +5508,7 @@
         <p:spPr>
           <a:xfrm>
             <a:off x="0" y="0"/>
-            <a:ext cx="3400926" cy="369332"/>
+            <a:ext cx="4708358" cy="369332"/>
           </a:xfrm>
           <a:prstGeom prst="rect">
             <a:avLst/>
@@ -5506,91 +5522,17 @@
           <a:lstStyle/>
           <a:p>
             <a:r>
-              <a:rPr lang="it-IT" dirty="0"/>
-              <a:t>Kreatinine Data over time</a:t>
+              <a:rPr lang="it-IT" u="sng" dirty="0"/>
+              <a:t>After Imputation Chemical Subs distributions</a:t>
             </a:r>
-            <a:endParaRPr lang="nl-NL" dirty="0"/>
-          </a:p>
-        </p:txBody>
-      </p:sp>
-      <p:sp>
-        <p:nvSpPr>
-          <p:cNvPr id="7" name="TextBox 6">
-            <a:extLst>
-              <a:ext uri="{FF2B5EF4-FFF2-40B4-BE49-F238E27FC236}">
-                <a16:creationId xmlns:a16="http://schemas.microsoft.com/office/drawing/2014/main" id="{44205ADD-760A-43D7-9E5C-1CA26946C863}"/>
-              </a:ext>
-            </a:extLst>
-          </p:cNvPr>
-          <p:cNvSpPr txBox="1"/>
-          <p:nvPr/>
-        </p:nvSpPr>
-        <p:spPr>
-          <a:xfrm>
-            <a:off x="4395537" y="742333"/>
-            <a:ext cx="3400926" cy="369332"/>
-          </a:xfrm>
-          <a:prstGeom prst="rect">
-            <a:avLst/>
-          </a:prstGeom>
-          <a:noFill/>
-        </p:spPr>
-        <p:txBody>
-          <a:bodyPr wrap="square" rtlCol="0">
-            <a:spAutoFit/>
-          </a:bodyPr>
-          <a:lstStyle/>
-          <a:p>
-            <a:pPr algn="ctr"/>
-            <a:r>
-              <a:rPr lang="it-IT" dirty="0"/>
-              <a:t>Kreatinine Registered</a:t>
-            </a:r>
-            <a:endParaRPr lang="nl-NL" dirty="0"/>
-          </a:p>
-        </p:txBody>
-      </p:sp>
-      <p:sp>
-        <p:nvSpPr>
-          <p:cNvPr id="8" name="TextBox 7">
-            <a:extLst>
-              <a:ext uri="{FF2B5EF4-FFF2-40B4-BE49-F238E27FC236}">
-                <a16:creationId xmlns:a16="http://schemas.microsoft.com/office/drawing/2014/main" id="{A39CDD73-B873-496C-A709-535F4F828307}"/>
-              </a:ext>
-            </a:extLst>
-          </p:cNvPr>
-          <p:cNvSpPr txBox="1"/>
-          <p:nvPr/>
-        </p:nvSpPr>
-        <p:spPr>
-          <a:xfrm>
-            <a:off x="4395537" y="3798172"/>
-            <a:ext cx="3400926" cy="369332"/>
-          </a:xfrm>
-          <a:prstGeom prst="rect">
-            <a:avLst/>
-          </a:prstGeom>
-          <a:noFill/>
-        </p:spPr>
-        <p:txBody>
-          <a:bodyPr wrap="square" rtlCol="0">
-            <a:spAutoFit/>
-          </a:bodyPr>
-          <a:lstStyle/>
-          <a:p>
-            <a:pPr algn="ctr"/>
-            <a:r>
-              <a:rPr lang="it-IT" dirty="0"/>
-              <a:t>Kreatinine Registered + Imputed</a:t>
-            </a:r>
-            <a:endParaRPr lang="nl-NL" dirty="0"/>
+            <a:endParaRPr lang="nl-NL" u="sng" dirty="0"/>
           </a:p>
         </p:txBody>
       </p:sp>
     </p:spTree>
     <p:extLst>
       <p:ext uri="{BB962C8B-B14F-4D97-AF65-F5344CB8AC3E}">
-        <p14:creationId xmlns:p14="http://schemas.microsoft.com/office/powerpoint/2010/main" val="3977303332"/>
+        <p14:creationId xmlns:p14="http://schemas.microsoft.com/office/powerpoint/2010/main" val="1817773863"/>
       </p:ext>
     </p:extLst>
   </p:cSld>
@@ -5629,10 +5571,192 @@
           <a:chExt cx="0" cy="0"/>
         </a:xfrm>
       </p:grpSpPr>
+      <p:pic>
+        <p:nvPicPr>
+          <p:cNvPr id="3" name="Picture 2">
+            <a:extLst>
+              <a:ext uri="{FF2B5EF4-FFF2-40B4-BE49-F238E27FC236}">
+                <a16:creationId xmlns:a16="http://schemas.microsoft.com/office/drawing/2014/main" id="{0C597A2D-637D-4700-8FE8-8DCBE5A562CE}"/>
+              </a:ext>
+            </a:extLst>
+          </p:cNvPr>
+          <p:cNvPicPr>
+            <a:picLocks noChangeAspect="1"/>
+          </p:cNvPicPr>
+          <p:nvPr/>
+        </p:nvPicPr>
+        <p:blipFill>
+          <a:blip r:embed="rId2">
+            <a:extLst>
+              <a:ext uri="{28A0092B-C50C-407E-A947-70E740481C1C}">
+                <a14:useLocalDpi xmlns:a14="http://schemas.microsoft.com/office/drawing/2010/main" val="0"/>
+              </a:ext>
+            </a:extLst>
+          </a:blip>
+          <a:stretch>
+            <a:fillRect/>
+          </a:stretch>
+        </p:blipFill>
+        <p:spPr>
+          <a:xfrm>
+            <a:off x="0" y="1109671"/>
+            <a:ext cx="12192000" cy="2132828"/>
+          </a:xfrm>
+          <a:prstGeom prst="rect">
+            <a:avLst/>
+          </a:prstGeom>
+        </p:spPr>
+      </p:pic>
+      <p:pic>
+        <p:nvPicPr>
+          <p:cNvPr id="5" name="Picture 4">
+            <a:extLst>
+              <a:ext uri="{FF2B5EF4-FFF2-40B4-BE49-F238E27FC236}">
+                <a16:creationId xmlns:a16="http://schemas.microsoft.com/office/drawing/2014/main" id="{D14A686D-085E-4768-98CF-61F1F9D8071A}"/>
+              </a:ext>
+            </a:extLst>
+          </p:cNvPr>
+          <p:cNvPicPr>
+            <a:picLocks noChangeAspect="1"/>
+          </p:cNvPicPr>
+          <p:nvPr/>
+        </p:nvPicPr>
+        <p:blipFill>
+          <a:blip r:embed="rId3">
+            <a:extLst>
+              <a:ext uri="{28A0092B-C50C-407E-A947-70E740481C1C}">
+                <a14:useLocalDpi xmlns:a14="http://schemas.microsoft.com/office/drawing/2010/main" val="0"/>
+              </a:ext>
+            </a:extLst>
+          </a:blip>
+          <a:stretch>
+            <a:fillRect/>
+          </a:stretch>
+        </p:blipFill>
+        <p:spPr>
+          <a:xfrm>
+            <a:off x="0" y="4231492"/>
+            <a:ext cx="12192000" cy="2132828"/>
+          </a:xfrm>
+          <a:prstGeom prst="rect">
+            <a:avLst/>
+          </a:prstGeom>
+        </p:spPr>
+      </p:pic>
+      <p:sp>
+        <p:nvSpPr>
+          <p:cNvPr id="6" name="TextBox 5">
+            <a:extLst>
+              <a:ext uri="{FF2B5EF4-FFF2-40B4-BE49-F238E27FC236}">
+                <a16:creationId xmlns:a16="http://schemas.microsoft.com/office/drawing/2014/main" id="{82F73233-438F-4E0E-9D21-5EF1E8E223FC}"/>
+              </a:ext>
+            </a:extLst>
+          </p:cNvPr>
+          <p:cNvSpPr txBox="1"/>
+          <p:nvPr/>
+        </p:nvSpPr>
+        <p:spPr>
+          <a:xfrm>
+            <a:off x="0" y="0"/>
+            <a:ext cx="3400926" cy="369332"/>
+          </a:xfrm>
+          <a:prstGeom prst="rect">
+            <a:avLst/>
+          </a:prstGeom>
+          <a:noFill/>
+        </p:spPr>
+        <p:txBody>
+          <a:bodyPr wrap="square" rtlCol="0">
+            <a:spAutoFit/>
+          </a:bodyPr>
+          <a:lstStyle/>
+          <a:p>
+            <a:r>
+              <a:rPr lang="it-IT" dirty="0"/>
+              <a:t>Kreatinine Data over time</a:t>
+            </a:r>
+            <a:endParaRPr lang="nl-NL" dirty="0"/>
+          </a:p>
+        </p:txBody>
+      </p:sp>
+      <p:sp>
+        <p:nvSpPr>
+          <p:cNvPr id="7" name="TextBox 6">
+            <a:extLst>
+              <a:ext uri="{FF2B5EF4-FFF2-40B4-BE49-F238E27FC236}">
+                <a16:creationId xmlns:a16="http://schemas.microsoft.com/office/drawing/2014/main" id="{44205ADD-760A-43D7-9E5C-1CA26946C863}"/>
+              </a:ext>
+            </a:extLst>
+          </p:cNvPr>
+          <p:cNvSpPr txBox="1"/>
+          <p:nvPr/>
+        </p:nvSpPr>
+        <p:spPr>
+          <a:xfrm>
+            <a:off x="4395537" y="742333"/>
+            <a:ext cx="3400926" cy="369332"/>
+          </a:xfrm>
+          <a:prstGeom prst="rect">
+            <a:avLst/>
+          </a:prstGeom>
+          <a:noFill/>
+        </p:spPr>
+        <p:txBody>
+          <a:bodyPr wrap="square" rtlCol="0">
+            <a:spAutoFit/>
+          </a:bodyPr>
+          <a:lstStyle/>
+          <a:p>
+            <a:pPr algn="ctr"/>
+            <a:r>
+              <a:rPr lang="it-IT" dirty="0"/>
+              <a:t>Kreatinine Registered</a:t>
+            </a:r>
+            <a:endParaRPr lang="nl-NL" dirty="0"/>
+          </a:p>
+        </p:txBody>
+      </p:sp>
+      <p:sp>
+        <p:nvSpPr>
+          <p:cNvPr id="8" name="TextBox 7">
+            <a:extLst>
+              <a:ext uri="{FF2B5EF4-FFF2-40B4-BE49-F238E27FC236}">
+                <a16:creationId xmlns:a16="http://schemas.microsoft.com/office/drawing/2014/main" id="{A39CDD73-B873-496C-A709-535F4F828307}"/>
+              </a:ext>
+            </a:extLst>
+          </p:cNvPr>
+          <p:cNvSpPr txBox="1"/>
+          <p:nvPr/>
+        </p:nvSpPr>
+        <p:spPr>
+          <a:xfrm>
+            <a:off x="4395537" y="3798172"/>
+            <a:ext cx="3400926" cy="369332"/>
+          </a:xfrm>
+          <a:prstGeom prst="rect">
+            <a:avLst/>
+          </a:prstGeom>
+          <a:noFill/>
+        </p:spPr>
+        <p:txBody>
+          <a:bodyPr wrap="square" rtlCol="0">
+            <a:spAutoFit/>
+          </a:bodyPr>
+          <a:lstStyle/>
+          <a:p>
+            <a:pPr algn="ctr"/>
+            <a:r>
+              <a:rPr lang="it-IT" dirty="0"/>
+              <a:t>Kreatinine Registered + Imputed</a:t>
+            </a:r>
+            <a:endParaRPr lang="nl-NL" dirty="0"/>
+          </a:p>
+        </p:txBody>
+      </p:sp>
     </p:spTree>
     <p:extLst>
       <p:ext uri="{BB962C8B-B14F-4D97-AF65-F5344CB8AC3E}">
-        <p14:creationId xmlns:p14="http://schemas.microsoft.com/office/powerpoint/2010/main" val="3596063474"/>
+        <p14:creationId xmlns:p14="http://schemas.microsoft.com/office/powerpoint/2010/main" val="3977303332"/>
       </p:ext>
     </p:extLst>
   </p:cSld>
@@ -5671,39 +5795,312 @@
           <a:chExt cx="0" cy="0"/>
         </a:xfrm>
       </p:grpSpPr>
+      <p:pic>
+        <p:nvPicPr>
+          <p:cNvPr id="3" name="Picture 2">
+            <a:extLst>
+              <a:ext uri="{FF2B5EF4-FFF2-40B4-BE49-F238E27FC236}">
+                <a16:creationId xmlns:a16="http://schemas.microsoft.com/office/drawing/2014/main" id="{0C597A2D-637D-4700-8FE8-8DCBE5A562CE}"/>
+              </a:ext>
+            </a:extLst>
+          </p:cNvPr>
+          <p:cNvPicPr>
+            <a:picLocks noChangeAspect="1"/>
+          </p:cNvPicPr>
+          <p:nvPr/>
+        </p:nvPicPr>
+        <p:blipFill>
+          <a:blip r:embed="rId2">
+            <a:extLst>
+              <a:ext uri="{28A0092B-C50C-407E-A947-70E740481C1C}">
+                <a14:useLocalDpi xmlns:a14="http://schemas.microsoft.com/office/drawing/2010/main" val="0"/>
+              </a:ext>
+            </a:extLst>
+          </a:blip>
+          <a:stretch>
+            <a:fillRect/>
+          </a:stretch>
+        </p:blipFill>
+        <p:spPr>
+          <a:xfrm>
+            <a:off x="922421" y="1238007"/>
+            <a:ext cx="5919537" cy="2132828"/>
+          </a:xfrm>
+          <a:prstGeom prst="rect">
+            <a:avLst/>
+          </a:prstGeom>
+        </p:spPr>
+      </p:pic>
+      <p:pic>
+        <p:nvPicPr>
+          <p:cNvPr id="5" name="Picture 4">
+            <a:extLst>
+              <a:ext uri="{FF2B5EF4-FFF2-40B4-BE49-F238E27FC236}">
+                <a16:creationId xmlns:a16="http://schemas.microsoft.com/office/drawing/2014/main" id="{D14A686D-085E-4768-98CF-61F1F9D8071A}"/>
+              </a:ext>
+            </a:extLst>
+          </p:cNvPr>
+          <p:cNvPicPr>
+            <a:picLocks noChangeAspect="1"/>
+          </p:cNvPicPr>
+          <p:nvPr/>
+        </p:nvPicPr>
+        <p:blipFill>
+          <a:blip r:embed="rId3">
+            <a:extLst>
+              <a:ext uri="{28A0092B-C50C-407E-A947-70E740481C1C}">
+                <a14:useLocalDpi xmlns:a14="http://schemas.microsoft.com/office/drawing/2010/main" val="0"/>
+              </a:ext>
+            </a:extLst>
+          </a:blip>
+          <a:stretch>
+            <a:fillRect/>
+          </a:stretch>
+        </p:blipFill>
+        <p:spPr>
+          <a:xfrm>
+            <a:off x="922421" y="4359828"/>
+            <a:ext cx="5919537" cy="2132828"/>
+          </a:xfrm>
+          <a:prstGeom prst="rect">
+            <a:avLst/>
+          </a:prstGeom>
+        </p:spPr>
+      </p:pic>
       <p:sp>
         <p:nvSpPr>
-          <p:cNvPr id="2" name="Title 1">
-            <a:extLst>
-              <a:ext uri="{FF2B5EF4-FFF2-40B4-BE49-F238E27FC236}">
-                <a16:creationId xmlns:a16="http://schemas.microsoft.com/office/drawing/2014/main" id="{317E23D3-032D-4C20-8F5B-1840BC892975}"/>
-              </a:ext>
-            </a:extLst>
-          </p:cNvPr>
-          <p:cNvSpPr>
-            <a:spLocks noGrp="1"/>
-          </p:cNvSpPr>
-          <p:nvPr>
-            <p:ph type="ctrTitle"/>
-          </p:nvPr>
+          <p:cNvPr id="6" name="TextBox 5">
+            <a:extLst>
+              <a:ext uri="{FF2B5EF4-FFF2-40B4-BE49-F238E27FC236}">
+                <a16:creationId xmlns:a16="http://schemas.microsoft.com/office/drawing/2014/main" id="{82F73233-438F-4E0E-9D21-5EF1E8E223FC}"/>
+              </a:ext>
+            </a:extLst>
+          </p:cNvPr>
+          <p:cNvSpPr txBox="1"/>
+          <p:nvPr/>
         </p:nvSpPr>
-        <p:spPr/>
+        <p:spPr>
+          <a:xfrm>
+            <a:off x="0" y="0"/>
+            <a:ext cx="3400926" cy="369332"/>
+          </a:xfrm>
+          <a:prstGeom prst="rect">
+            <a:avLst/>
+          </a:prstGeom>
+          <a:noFill/>
+        </p:spPr>
         <p:txBody>
-          <a:bodyPr/>
+          <a:bodyPr wrap="square" rtlCol="0">
+            <a:spAutoFit/>
+          </a:bodyPr>
           <a:lstStyle/>
           <a:p>
             <a:r>
               <a:rPr lang="it-IT" dirty="0"/>
-              <a:t>Medications</a:t>
+              <a:t>Kreatinine Data over time</a:t>
             </a:r>
             <a:endParaRPr lang="nl-NL" dirty="0"/>
           </a:p>
         </p:txBody>
       </p:sp>
+      <p:sp>
+        <p:nvSpPr>
+          <p:cNvPr id="7" name="TextBox 6">
+            <a:extLst>
+              <a:ext uri="{FF2B5EF4-FFF2-40B4-BE49-F238E27FC236}">
+                <a16:creationId xmlns:a16="http://schemas.microsoft.com/office/drawing/2014/main" id="{44205ADD-760A-43D7-9E5C-1CA26946C863}"/>
+              </a:ext>
+            </a:extLst>
+          </p:cNvPr>
+          <p:cNvSpPr txBox="1"/>
+          <p:nvPr/>
+        </p:nvSpPr>
+        <p:spPr>
+          <a:xfrm>
+            <a:off x="2583053" y="865483"/>
+            <a:ext cx="2598270" cy="369332"/>
+          </a:xfrm>
+          <a:prstGeom prst="rect">
+            <a:avLst/>
+          </a:prstGeom>
+          <a:noFill/>
+        </p:spPr>
+        <p:txBody>
+          <a:bodyPr wrap="square" rtlCol="0">
+            <a:spAutoFit/>
+          </a:bodyPr>
+          <a:lstStyle/>
+          <a:p>
+            <a:pPr algn="ctr"/>
+            <a:r>
+              <a:rPr lang="it-IT" dirty="0"/>
+              <a:t>Kreatinine Registered</a:t>
+            </a:r>
+            <a:endParaRPr lang="nl-NL" dirty="0"/>
+          </a:p>
+        </p:txBody>
+      </p:sp>
+      <p:sp>
+        <p:nvSpPr>
+          <p:cNvPr id="8" name="TextBox 7">
+            <a:extLst>
+              <a:ext uri="{FF2B5EF4-FFF2-40B4-BE49-F238E27FC236}">
+                <a16:creationId xmlns:a16="http://schemas.microsoft.com/office/drawing/2014/main" id="{A39CDD73-B873-496C-A709-535F4F828307}"/>
+              </a:ext>
+            </a:extLst>
+          </p:cNvPr>
+          <p:cNvSpPr txBox="1"/>
+          <p:nvPr/>
+        </p:nvSpPr>
+        <p:spPr>
+          <a:xfrm>
+            <a:off x="1937083" y="3990496"/>
+            <a:ext cx="3890211" cy="369332"/>
+          </a:xfrm>
+          <a:prstGeom prst="rect">
+            <a:avLst/>
+          </a:prstGeom>
+          <a:noFill/>
+        </p:spPr>
+        <p:txBody>
+          <a:bodyPr wrap="square" rtlCol="0">
+            <a:spAutoFit/>
+          </a:bodyPr>
+          <a:lstStyle/>
+          <a:p>
+            <a:pPr algn="ctr"/>
+            <a:r>
+              <a:rPr lang="it-IT" dirty="0"/>
+              <a:t>Kreatinine Registered + Imputed</a:t>
+            </a:r>
+            <a:endParaRPr lang="nl-NL" dirty="0"/>
+          </a:p>
+        </p:txBody>
+      </p:sp>
+      <p:sp>
+        <p:nvSpPr>
+          <p:cNvPr id="2" name="TextBox 1">
+            <a:extLst>
+              <a:ext uri="{FF2B5EF4-FFF2-40B4-BE49-F238E27FC236}">
+                <a16:creationId xmlns:a16="http://schemas.microsoft.com/office/drawing/2014/main" id="{484F6C92-4554-46AB-A52E-5085F8CBD941}"/>
+              </a:ext>
+            </a:extLst>
+          </p:cNvPr>
+          <p:cNvSpPr txBox="1"/>
+          <p:nvPr/>
+        </p:nvSpPr>
+        <p:spPr>
+          <a:xfrm>
+            <a:off x="8229601" y="3370835"/>
+            <a:ext cx="2959768" cy="369332"/>
+          </a:xfrm>
+          <a:prstGeom prst="rect">
+            <a:avLst/>
+          </a:prstGeom>
+          <a:noFill/>
+        </p:spPr>
+        <p:txBody>
+          <a:bodyPr wrap="square" rtlCol="0">
+            <a:spAutoFit/>
+          </a:bodyPr>
+          <a:lstStyle/>
+          <a:p>
+            <a:r>
+              <a:rPr lang="it-IT" dirty="0"/>
+              <a:t>We need to change strategy...</a:t>
+            </a:r>
+            <a:endParaRPr lang="nl-NL" dirty="0"/>
+          </a:p>
+        </p:txBody>
+      </p:sp>
+      <p:cxnSp>
+        <p:nvCxnSpPr>
+          <p:cNvPr id="9" name="Straight Arrow Connector 8">
+            <a:extLst>
+              <a:ext uri="{FF2B5EF4-FFF2-40B4-BE49-F238E27FC236}">
+                <a16:creationId xmlns:a16="http://schemas.microsoft.com/office/drawing/2014/main" id="{BF062F9B-75EE-45F0-9939-679479C24314}"/>
+              </a:ext>
+            </a:extLst>
+          </p:cNvPr>
+          <p:cNvCxnSpPr>
+            <a:stCxn id="2" idx="1"/>
+            <a:endCxn id="3" idx="3"/>
+          </p:cNvCxnSpPr>
+          <p:nvPr/>
+        </p:nvCxnSpPr>
+        <p:spPr>
+          <a:xfrm flipH="1" flipV="1">
+            <a:off x="6841958" y="2304421"/>
+            <a:ext cx="1387643" cy="1251080"/>
+          </a:xfrm>
+          <a:prstGeom prst="straightConnector1">
+            <a:avLst/>
+          </a:prstGeom>
+          <a:ln>
+            <a:tailEnd type="triangle"/>
+          </a:ln>
+        </p:spPr>
+        <p:style>
+          <a:lnRef idx="1">
+            <a:schemeClr val="accent1"/>
+          </a:lnRef>
+          <a:fillRef idx="0">
+            <a:schemeClr val="accent1"/>
+          </a:fillRef>
+          <a:effectRef idx="0">
+            <a:schemeClr val="accent1"/>
+          </a:effectRef>
+          <a:fontRef idx="minor">
+            <a:schemeClr val="tx1"/>
+          </a:fontRef>
+        </p:style>
+      </p:cxnSp>
+      <p:cxnSp>
+        <p:nvCxnSpPr>
+          <p:cNvPr id="11" name="Straight Arrow Connector 10">
+            <a:extLst>
+              <a:ext uri="{FF2B5EF4-FFF2-40B4-BE49-F238E27FC236}">
+                <a16:creationId xmlns:a16="http://schemas.microsoft.com/office/drawing/2014/main" id="{3B8C72A0-5C06-4603-82F0-D06B5C07D601}"/>
+              </a:ext>
+            </a:extLst>
+          </p:cNvPr>
+          <p:cNvCxnSpPr>
+            <a:stCxn id="2" idx="1"/>
+            <a:endCxn id="5" idx="3"/>
+          </p:cNvCxnSpPr>
+          <p:nvPr/>
+        </p:nvCxnSpPr>
+        <p:spPr>
+          <a:xfrm flipH="1">
+            <a:off x="6841958" y="3555501"/>
+            <a:ext cx="1387643" cy="1870741"/>
+          </a:xfrm>
+          <a:prstGeom prst="straightConnector1">
+            <a:avLst/>
+          </a:prstGeom>
+          <a:ln>
+            <a:tailEnd type="triangle"/>
+          </a:ln>
+        </p:spPr>
+        <p:style>
+          <a:lnRef idx="1">
+            <a:schemeClr val="accent1"/>
+          </a:lnRef>
+          <a:fillRef idx="0">
+            <a:schemeClr val="accent1"/>
+          </a:fillRef>
+          <a:effectRef idx="0">
+            <a:schemeClr val="accent1"/>
+          </a:effectRef>
+          <a:fontRef idx="minor">
+            <a:schemeClr val="tx1"/>
+          </a:fontRef>
+        </p:style>
+      </p:cxnSp>
     </p:spTree>
     <p:extLst>
       <p:ext uri="{BB962C8B-B14F-4D97-AF65-F5344CB8AC3E}">
-        <p14:creationId xmlns:p14="http://schemas.microsoft.com/office/powerpoint/2010/main" val="4127856213"/>
+        <p14:creationId xmlns:p14="http://schemas.microsoft.com/office/powerpoint/2010/main" val="2960712583"/>
       </p:ext>
     </p:extLst>
   </p:cSld>
@@ -5742,10 +6139,47 @@
           <a:chExt cx="0" cy="0"/>
         </a:xfrm>
       </p:grpSpPr>
+      <p:sp>
+        <p:nvSpPr>
+          <p:cNvPr id="2" name="TextBox 1">
+            <a:extLst>
+              <a:ext uri="{FF2B5EF4-FFF2-40B4-BE49-F238E27FC236}">
+                <a16:creationId xmlns:a16="http://schemas.microsoft.com/office/drawing/2014/main" id="{5ACEB4A5-7556-45C7-AF61-C9952B09F07C}"/>
+              </a:ext>
+            </a:extLst>
+          </p:cNvPr>
+          <p:cNvSpPr txBox="1"/>
+          <p:nvPr/>
+        </p:nvSpPr>
+        <p:spPr>
+          <a:xfrm>
+            <a:off x="3709737" y="3136612"/>
+            <a:ext cx="4772526" cy="584775"/>
+          </a:xfrm>
+          <a:prstGeom prst="rect">
+            <a:avLst/>
+          </a:prstGeom>
+          <a:noFill/>
+        </p:spPr>
+        <p:txBody>
+          <a:bodyPr wrap="square" rtlCol="0">
+            <a:spAutoFit/>
+          </a:bodyPr>
+          <a:lstStyle/>
+          <a:p>
+            <a:pPr algn="ctr"/>
+            <a:r>
+              <a:rPr lang="it-IT" sz="3200" dirty="0"/>
+              <a:t>New Strategy</a:t>
+            </a:r>
+            <a:endParaRPr lang="nl-NL" sz="3200" dirty="0"/>
+          </a:p>
+        </p:txBody>
+      </p:sp>
     </p:spTree>
     <p:extLst>
       <p:ext uri="{BB962C8B-B14F-4D97-AF65-F5344CB8AC3E}">
-        <p14:creationId xmlns:p14="http://schemas.microsoft.com/office/powerpoint/2010/main" val="2469779366"/>
+        <p14:creationId xmlns:p14="http://schemas.microsoft.com/office/powerpoint/2010/main" val="3596063474"/>
       </p:ext>
     </p:extLst>
   </p:cSld>
@@ -5784,64 +6218,990 @@
           <a:chExt cx="0" cy="0"/>
         </a:xfrm>
       </p:grpSpPr>
-      <p:sp>
-        <p:nvSpPr>
-          <p:cNvPr id="2" name="Title 1">
-            <a:extLst>
-              <a:ext uri="{FF2B5EF4-FFF2-40B4-BE49-F238E27FC236}">
-                <a16:creationId xmlns:a16="http://schemas.microsoft.com/office/drawing/2014/main" id="{6D37F963-7349-4DE3-A960-EEBD333A4E61}"/>
-              </a:ext>
-            </a:extLst>
-          </p:cNvPr>
-          <p:cNvSpPr txBox="1">
-            <a:spLocks/>
-          </p:cNvSpPr>
+      <p:pic>
+        <p:nvPicPr>
+          <p:cNvPr id="5" name="Graphic 4" descr="Database">
+            <a:extLst>
+              <a:ext uri="{FF2B5EF4-FFF2-40B4-BE49-F238E27FC236}">
+                <a16:creationId xmlns:a16="http://schemas.microsoft.com/office/drawing/2014/main" id="{0D465E5E-71B4-4CAA-80E1-ADC707F0E799}"/>
+              </a:ext>
+            </a:extLst>
+          </p:cNvPr>
+          <p:cNvPicPr>
+            <a:picLocks noChangeAspect="1"/>
+          </p:cNvPicPr>
           <p:nvPr/>
-        </p:nvSpPr>
+        </p:nvPicPr>
+        <p:blipFill>
+          <a:blip r:embed="rId2">
+            <a:extLst>
+              <a:ext uri="{28A0092B-C50C-407E-A947-70E740481C1C}">
+                <a14:useLocalDpi xmlns:a14="http://schemas.microsoft.com/office/drawing/2010/main" val="0"/>
+              </a:ext>
+              <a:ext uri="{96DAC541-7B7A-43D3-8B79-37D633B846F1}">
+                <asvg:svgBlip xmlns:asvg="http://schemas.microsoft.com/office/drawing/2016/SVG/main" r:embed="rId3"/>
+              </a:ext>
+            </a:extLst>
+          </a:blip>
+          <a:stretch>
+            <a:fillRect/>
+          </a:stretch>
+        </p:blipFill>
         <p:spPr>
           <a:xfrm>
-            <a:off x="1524000" y="2235200"/>
-            <a:ext cx="9144000" cy="2387600"/>
+            <a:off x="729916" y="2993858"/>
+            <a:ext cx="914400" cy="914400"/>
           </a:xfrm>
           <a:prstGeom prst="rect">
             <a:avLst/>
           </a:prstGeom>
         </p:spPr>
+      </p:pic>
+      <p:pic>
+        <p:nvPicPr>
+          <p:cNvPr id="6" name="Graphic 5" descr="Database">
+            <a:extLst>
+              <a:ext uri="{FF2B5EF4-FFF2-40B4-BE49-F238E27FC236}">
+                <a16:creationId xmlns:a16="http://schemas.microsoft.com/office/drawing/2014/main" id="{E81DF561-3B38-4BE3-974A-FE9B9C865346}"/>
+              </a:ext>
+            </a:extLst>
+          </p:cNvPr>
+          <p:cNvPicPr>
+            <a:picLocks noChangeAspect="1"/>
+          </p:cNvPicPr>
+          <p:nvPr/>
+        </p:nvPicPr>
+        <p:blipFill>
+          <a:blip r:embed="rId2">
+            <a:extLst>
+              <a:ext uri="{28A0092B-C50C-407E-A947-70E740481C1C}">
+                <a14:useLocalDpi xmlns:a14="http://schemas.microsoft.com/office/drawing/2010/main" val="0"/>
+              </a:ext>
+              <a:ext uri="{96DAC541-7B7A-43D3-8B79-37D633B846F1}">
+                <asvg:svgBlip xmlns:asvg="http://schemas.microsoft.com/office/drawing/2016/SVG/main" r:embed="rId3"/>
+              </a:ext>
+            </a:extLst>
+          </a:blip>
+          <a:stretch>
+            <a:fillRect/>
+          </a:stretch>
+        </p:blipFill>
+        <p:spPr>
+          <a:xfrm>
+            <a:off x="2919663" y="1439778"/>
+            <a:ext cx="914400" cy="914400"/>
+          </a:xfrm>
+          <a:prstGeom prst="rect">
+            <a:avLst/>
+          </a:prstGeom>
+        </p:spPr>
+      </p:pic>
+      <p:pic>
+        <p:nvPicPr>
+          <p:cNvPr id="7" name="Graphic 6" descr="Database">
+            <a:extLst>
+              <a:ext uri="{FF2B5EF4-FFF2-40B4-BE49-F238E27FC236}">
+                <a16:creationId xmlns:a16="http://schemas.microsoft.com/office/drawing/2014/main" id="{6FE9CA92-798F-4967-8D7B-6A1E2BF3A9CF}"/>
+              </a:ext>
+            </a:extLst>
+          </p:cNvPr>
+          <p:cNvPicPr>
+            <a:picLocks noChangeAspect="1"/>
+          </p:cNvPicPr>
+          <p:nvPr/>
+        </p:nvPicPr>
+        <p:blipFill>
+          <a:blip r:embed="rId2">
+            <a:extLst>
+              <a:ext uri="{28A0092B-C50C-407E-A947-70E740481C1C}">
+                <a14:useLocalDpi xmlns:a14="http://schemas.microsoft.com/office/drawing/2010/main" val="0"/>
+              </a:ext>
+              <a:ext uri="{96DAC541-7B7A-43D3-8B79-37D633B846F1}">
+                <asvg:svgBlip xmlns:asvg="http://schemas.microsoft.com/office/drawing/2016/SVG/main" r:embed="rId3"/>
+              </a:ext>
+            </a:extLst>
+          </a:blip>
+          <a:stretch>
+            <a:fillRect/>
+          </a:stretch>
+        </p:blipFill>
+        <p:spPr>
+          <a:xfrm>
+            <a:off x="2919663" y="4503822"/>
+            <a:ext cx="914400" cy="914400"/>
+          </a:xfrm>
+          <a:prstGeom prst="rect">
+            <a:avLst/>
+          </a:prstGeom>
+        </p:spPr>
+      </p:pic>
+      <p:cxnSp>
+        <p:nvCxnSpPr>
+          <p:cNvPr id="9" name="Connector: Elbow 8">
+            <a:extLst>
+              <a:ext uri="{FF2B5EF4-FFF2-40B4-BE49-F238E27FC236}">
+                <a16:creationId xmlns:a16="http://schemas.microsoft.com/office/drawing/2014/main" id="{2D7E791C-D6D1-49D9-A9B9-CA8B32688F1D}"/>
+              </a:ext>
+            </a:extLst>
+          </p:cNvPr>
+          <p:cNvCxnSpPr>
+            <a:stCxn id="5" idx="3"/>
+            <a:endCxn id="6" idx="1"/>
+          </p:cNvCxnSpPr>
+          <p:nvPr/>
+        </p:nvCxnSpPr>
+        <p:spPr>
+          <a:xfrm flipV="1">
+            <a:off x="1644316" y="1896978"/>
+            <a:ext cx="1275347" cy="1554080"/>
+          </a:xfrm>
+          <a:prstGeom prst="bentConnector3">
+            <a:avLst/>
+          </a:prstGeom>
+          <a:ln>
+            <a:tailEnd type="triangle"/>
+          </a:ln>
+        </p:spPr>
+        <p:style>
+          <a:lnRef idx="1">
+            <a:schemeClr val="dk1"/>
+          </a:lnRef>
+          <a:fillRef idx="0">
+            <a:schemeClr val="dk1"/>
+          </a:fillRef>
+          <a:effectRef idx="0">
+            <a:schemeClr val="dk1"/>
+          </a:effectRef>
+          <a:fontRef idx="minor">
+            <a:schemeClr val="tx1"/>
+          </a:fontRef>
+        </p:style>
+      </p:cxnSp>
+      <p:cxnSp>
+        <p:nvCxnSpPr>
+          <p:cNvPr id="11" name="Connector: Elbow 10">
+            <a:extLst>
+              <a:ext uri="{FF2B5EF4-FFF2-40B4-BE49-F238E27FC236}">
+                <a16:creationId xmlns:a16="http://schemas.microsoft.com/office/drawing/2014/main" id="{D06B5001-B912-4762-8E80-96E82E1A01EB}"/>
+              </a:ext>
+            </a:extLst>
+          </p:cNvPr>
+          <p:cNvCxnSpPr>
+            <a:stCxn id="5" idx="3"/>
+            <a:endCxn id="7" idx="1"/>
+          </p:cNvCxnSpPr>
+          <p:nvPr/>
+        </p:nvCxnSpPr>
+        <p:spPr>
+          <a:xfrm>
+            <a:off x="1644316" y="3451058"/>
+            <a:ext cx="1275347" cy="1509964"/>
+          </a:xfrm>
+          <a:prstGeom prst="bentConnector3">
+            <a:avLst/>
+          </a:prstGeom>
+          <a:ln>
+            <a:tailEnd type="triangle"/>
+          </a:ln>
+        </p:spPr>
+        <p:style>
+          <a:lnRef idx="1">
+            <a:schemeClr val="dk1"/>
+          </a:lnRef>
+          <a:fillRef idx="0">
+            <a:schemeClr val="dk1"/>
+          </a:fillRef>
+          <a:effectRef idx="0">
+            <a:schemeClr val="dk1"/>
+          </a:effectRef>
+          <a:fontRef idx="minor">
+            <a:schemeClr val="tx1"/>
+          </a:fontRef>
+        </p:style>
+      </p:cxnSp>
+      <p:pic>
+        <p:nvPicPr>
+          <p:cNvPr id="14" name="Graphic 13" descr="Braille">
+            <a:extLst>
+              <a:ext uri="{FF2B5EF4-FFF2-40B4-BE49-F238E27FC236}">
+                <a16:creationId xmlns:a16="http://schemas.microsoft.com/office/drawing/2014/main" id="{CFE3DD75-4FF4-4EFC-94BD-D9BF548E1C0C}"/>
+              </a:ext>
+            </a:extLst>
+          </p:cNvPr>
+          <p:cNvPicPr>
+            <a:picLocks noChangeAspect="1"/>
+          </p:cNvPicPr>
+          <p:nvPr/>
+        </p:nvPicPr>
+        <p:blipFill>
+          <a:blip r:embed="rId4">
+            <a:extLst>
+              <a:ext uri="{28A0092B-C50C-407E-A947-70E740481C1C}">
+                <a14:useLocalDpi xmlns:a14="http://schemas.microsoft.com/office/drawing/2010/main" val="0"/>
+              </a:ext>
+              <a:ext uri="{96DAC541-7B7A-43D3-8B79-37D633B846F1}">
+                <asvg:svgBlip xmlns:asvg="http://schemas.microsoft.com/office/drawing/2016/SVG/main" r:embed="rId5"/>
+              </a:ext>
+            </a:extLst>
+          </a:blip>
+          <a:stretch>
+            <a:fillRect/>
+          </a:stretch>
+        </p:blipFill>
+        <p:spPr>
+          <a:xfrm>
+            <a:off x="7154779" y="1439778"/>
+            <a:ext cx="914400" cy="914400"/>
+          </a:xfrm>
+          <a:prstGeom prst="rect">
+            <a:avLst/>
+          </a:prstGeom>
+        </p:spPr>
+      </p:pic>
+      <p:pic>
+        <p:nvPicPr>
+          <p:cNvPr id="16" name="Graphic 15" descr="Head with gears">
+            <a:extLst>
+              <a:ext uri="{FF2B5EF4-FFF2-40B4-BE49-F238E27FC236}">
+                <a16:creationId xmlns:a16="http://schemas.microsoft.com/office/drawing/2014/main" id="{53E289C0-C6F1-4870-99BC-B4F0CD2B59ED}"/>
+              </a:ext>
+            </a:extLst>
+          </p:cNvPr>
+          <p:cNvPicPr>
+            <a:picLocks noChangeAspect="1"/>
+          </p:cNvPicPr>
+          <p:nvPr/>
+        </p:nvPicPr>
+        <p:blipFill>
+          <a:blip r:embed="rId6">
+            <a:extLst>
+              <a:ext uri="{28A0092B-C50C-407E-A947-70E740481C1C}">
+                <a14:useLocalDpi xmlns:a14="http://schemas.microsoft.com/office/drawing/2010/main" val="0"/>
+              </a:ext>
+              <a:ext uri="{96DAC541-7B7A-43D3-8B79-37D633B846F1}">
+                <asvg:svgBlip xmlns:asvg="http://schemas.microsoft.com/office/drawing/2016/SVG/main" r:embed="rId7"/>
+              </a:ext>
+            </a:extLst>
+          </a:blip>
+          <a:stretch>
+            <a:fillRect/>
+          </a:stretch>
+        </p:blipFill>
+        <p:spPr>
+          <a:xfrm>
+            <a:off x="5037221" y="4503822"/>
+            <a:ext cx="914400" cy="914400"/>
+          </a:xfrm>
+          <a:prstGeom prst="rect">
+            <a:avLst/>
+          </a:prstGeom>
+        </p:spPr>
+      </p:pic>
+      <p:pic>
+        <p:nvPicPr>
+          <p:cNvPr id="18" name="Graphic 17" descr="Network diagram">
+            <a:extLst>
+              <a:ext uri="{FF2B5EF4-FFF2-40B4-BE49-F238E27FC236}">
+                <a16:creationId xmlns:a16="http://schemas.microsoft.com/office/drawing/2014/main" id="{F4F2FF9D-9F35-4D8F-ADFB-D0FC4B573764}"/>
+              </a:ext>
+            </a:extLst>
+          </p:cNvPr>
+          <p:cNvPicPr>
+            <a:picLocks noChangeAspect="1"/>
+          </p:cNvPicPr>
+          <p:nvPr/>
+        </p:nvPicPr>
+        <p:blipFill>
+          <a:blip r:embed="rId8">
+            <a:extLst>
+              <a:ext uri="{28A0092B-C50C-407E-A947-70E740481C1C}">
+                <a14:useLocalDpi xmlns:a14="http://schemas.microsoft.com/office/drawing/2010/main" val="0"/>
+              </a:ext>
+              <a:ext uri="{96DAC541-7B7A-43D3-8B79-37D633B846F1}">
+                <asvg:svgBlip xmlns:asvg="http://schemas.microsoft.com/office/drawing/2016/SVG/main" r:embed="rId9"/>
+              </a:ext>
+            </a:extLst>
+          </a:blip>
+          <a:stretch>
+            <a:fillRect/>
+          </a:stretch>
+        </p:blipFill>
+        <p:spPr>
+          <a:xfrm>
+            <a:off x="8686800" y="2993858"/>
+            <a:ext cx="914400" cy="914400"/>
+          </a:xfrm>
+          <a:prstGeom prst="rect">
+            <a:avLst/>
+          </a:prstGeom>
+        </p:spPr>
+      </p:pic>
+      <p:pic>
+        <p:nvPicPr>
+          <p:cNvPr id="20" name="Graphic 19" descr="Statistics">
+            <a:extLst>
+              <a:ext uri="{FF2B5EF4-FFF2-40B4-BE49-F238E27FC236}">
+                <a16:creationId xmlns:a16="http://schemas.microsoft.com/office/drawing/2014/main" id="{FFCFB770-836A-4E84-8798-0AB8A5F21F3B}"/>
+              </a:ext>
+            </a:extLst>
+          </p:cNvPr>
+          <p:cNvPicPr>
+            <a:picLocks noChangeAspect="1"/>
+          </p:cNvPicPr>
+          <p:nvPr/>
+        </p:nvPicPr>
+        <p:blipFill>
+          <a:blip r:embed="rId10">
+            <a:extLst>
+              <a:ext uri="{28A0092B-C50C-407E-A947-70E740481C1C}">
+                <a14:useLocalDpi xmlns:a14="http://schemas.microsoft.com/office/drawing/2010/main" val="0"/>
+              </a:ext>
+              <a:ext uri="{96DAC541-7B7A-43D3-8B79-37D633B846F1}">
+                <asvg:svgBlip xmlns:asvg="http://schemas.microsoft.com/office/drawing/2016/SVG/main" r:embed="rId11"/>
+              </a:ext>
+            </a:extLst>
+          </a:blip>
+          <a:stretch>
+            <a:fillRect/>
+          </a:stretch>
+        </p:blipFill>
+        <p:spPr>
+          <a:xfrm>
+            <a:off x="5037221" y="1439778"/>
+            <a:ext cx="914400" cy="914400"/>
+          </a:xfrm>
+          <a:prstGeom prst="rect">
+            <a:avLst/>
+          </a:prstGeom>
+        </p:spPr>
+      </p:pic>
+      <p:pic>
+        <p:nvPicPr>
+          <p:cNvPr id="21" name="Graphic 20" descr="Braille">
+            <a:extLst>
+              <a:ext uri="{FF2B5EF4-FFF2-40B4-BE49-F238E27FC236}">
+                <a16:creationId xmlns:a16="http://schemas.microsoft.com/office/drawing/2014/main" id="{8AC4798F-98EB-4F3F-92C9-6C7F638058ED}"/>
+              </a:ext>
+            </a:extLst>
+          </p:cNvPr>
+          <p:cNvPicPr>
+            <a:picLocks noChangeAspect="1"/>
+          </p:cNvPicPr>
+          <p:nvPr/>
+        </p:nvPicPr>
+        <p:blipFill>
+          <a:blip r:embed="rId4">
+            <a:extLst>
+              <a:ext uri="{28A0092B-C50C-407E-A947-70E740481C1C}">
+                <a14:useLocalDpi xmlns:a14="http://schemas.microsoft.com/office/drawing/2010/main" val="0"/>
+              </a:ext>
+              <a:ext uri="{96DAC541-7B7A-43D3-8B79-37D633B846F1}">
+                <asvg:svgBlip xmlns:asvg="http://schemas.microsoft.com/office/drawing/2016/SVG/main" r:embed="rId5"/>
+              </a:ext>
+            </a:extLst>
+          </a:blip>
+          <a:stretch>
+            <a:fillRect/>
+          </a:stretch>
+        </p:blipFill>
+        <p:spPr>
+          <a:xfrm>
+            <a:off x="7154779" y="4503822"/>
+            <a:ext cx="914400" cy="914400"/>
+          </a:xfrm>
+          <a:prstGeom prst="rect">
+            <a:avLst/>
+          </a:prstGeom>
+        </p:spPr>
+      </p:pic>
+      <p:cxnSp>
+        <p:nvCxnSpPr>
+          <p:cNvPr id="23" name="Straight Arrow Connector 22">
+            <a:extLst>
+              <a:ext uri="{FF2B5EF4-FFF2-40B4-BE49-F238E27FC236}">
+                <a16:creationId xmlns:a16="http://schemas.microsoft.com/office/drawing/2014/main" id="{073D8E2E-A8A1-4A4F-B04B-888FE81ECC83}"/>
+              </a:ext>
+            </a:extLst>
+          </p:cNvPr>
+          <p:cNvCxnSpPr>
+            <a:stCxn id="6" idx="3"/>
+            <a:endCxn id="20" idx="1"/>
+          </p:cNvCxnSpPr>
+          <p:nvPr/>
+        </p:nvCxnSpPr>
+        <p:spPr>
+          <a:xfrm>
+            <a:off x="3834063" y="1896978"/>
+            <a:ext cx="1203158" cy="0"/>
+          </a:xfrm>
+          <a:prstGeom prst="straightConnector1">
+            <a:avLst/>
+          </a:prstGeom>
+          <a:ln>
+            <a:tailEnd type="triangle"/>
+          </a:ln>
+        </p:spPr>
+        <p:style>
+          <a:lnRef idx="1">
+            <a:schemeClr val="dk1"/>
+          </a:lnRef>
+          <a:fillRef idx="0">
+            <a:schemeClr val="dk1"/>
+          </a:fillRef>
+          <a:effectRef idx="0">
+            <a:schemeClr val="dk1"/>
+          </a:effectRef>
+          <a:fontRef idx="minor">
+            <a:schemeClr val="tx1"/>
+          </a:fontRef>
+        </p:style>
+      </p:cxnSp>
+      <p:cxnSp>
+        <p:nvCxnSpPr>
+          <p:cNvPr id="25" name="Straight Arrow Connector 24">
+            <a:extLst>
+              <a:ext uri="{FF2B5EF4-FFF2-40B4-BE49-F238E27FC236}">
+                <a16:creationId xmlns:a16="http://schemas.microsoft.com/office/drawing/2014/main" id="{9B43F149-E4E7-4783-8884-9E977B5D78BF}"/>
+              </a:ext>
+            </a:extLst>
+          </p:cNvPr>
+          <p:cNvCxnSpPr>
+            <a:stCxn id="20" idx="3"/>
+            <a:endCxn id="14" idx="1"/>
+          </p:cNvCxnSpPr>
+          <p:nvPr/>
+        </p:nvCxnSpPr>
+        <p:spPr>
+          <a:xfrm>
+            <a:off x="5951621" y="1896978"/>
+            <a:ext cx="1203158" cy="0"/>
+          </a:xfrm>
+          <a:prstGeom prst="straightConnector1">
+            <a:avLst/>
+          </a:prstGeom>
+          <a:ln>
+            <a:tailEnd type="triangle"/>
+          </a:ln>
+        </p:spPr>
+        <p:style>
+          <a:lnRef idx="1">
+            <a:schemeClr val="dk1"/>
+          </a:lnRef>
+          <a:fillRef idx="0">
+            <a:schemeClr val="dk1"/>
+          </a:fillRef>
+          <a:effectRef idx="0">
+            <a:schemeClr val="dk1"/>
+          </a:effectRef>
+          <a:fontRef idx="minor">
+            <a:schemeClr val="tx1"/>
+          </a:fontRef>
+        </p:style>
+      </p:cxnSp>
+      <p:cxnSp>
+        <p:nvCxnSpPr>
+          <p:cNvPr id="27" name="Straight Arrow Connector 26">
+            <a:extLst>
+              <a:ext uri="{FF2B5EF4-FFF2-40B4-BE49-F238E27FC236}">
+                <a16:creationId xmlns:a16="http://schemas.microsoft.com/office/drawing/2014/main" id="{37EAEDDD-7130-4679-AED7-6303C1A57890}"/>
+              </a:ext>
+            </a:extLst>
+          </p:cNvPr>
+          <p:cNvCxnSpPr>
+            <a:stCxn id="14" idx="3"/>
+            <a:endCxn id="18" idx="1"/>
+          </p:cNvCxnSpPr>
+          <p:nvPr/>
+        </p:nvCxnSpPr>
+        <p:spPr>
+          <a:xfrm>
+            <a:off x="8069179" y="1896978"/>
+            <a:ext cx="617621" cy="1554080"/>
+          </a:xfrm>
+          <a:prstGeom prst="straightConnector1">
+            <a:avLst/>
+          </a:prstGeom>
+          <a:ln>
+            <a:tailEnd type="triangle"/>
+          </a:ln>
+        </p:spPr>
+        <p:style>
+          <a:lnRef idx="1">
+            <a:schemeClr val="dk1"/>
+          </a:lnRef>
+          <a:fillRef idx="0">
+            <a:schemeClr val="dk1"/>
+          </a:fillRef>
+          <a:effectRef idx="0">
+            <a:schemeClr val="dk1"/>
+          </a:effectRef>
+          <a:fontRef idx="minor">
+            <a:schemeClr val="tx1"/>
+          </a:fontRef>
+        </p:style>
+      </p:cxnSp>
+      <p:cxnSp>
+        <p:nvCxnSpPr>
+          <p:cNvPr id="29" name="Straight Arrow Connector 28">
+            <a:extLst>
+              <a:ext uri="{FF2B5EF4-FFF2-40B4-BE49-F238E27FC236}">
+                <a16:creationId xmlns:a16="http://schemas.microsoft.com/office/drawing/2014/main" id="{51349B75-AD95-4C06-B895-E3C404052A54}"/>
+              </a:ext>
+            </a:extLst>
+          </p:cNvPr>
+          <p:cNvCxnSpPr>
+            <a:stCxn id="7" idx="3"/>
+            <a:endCxn id="16" idx="1"/>
+          </p:cNvCxnSpPr>
+          <p:nvPr/>
+        </p:nvCxnSpPr>
+        <p:spPr>
+          <a:xfrm>
+            <a:off x="3834063" y="4961022"/>
+            <a:ext cx="1203158" cy="0"/>
+          </a:xfrm>
+          <a:prstGeom prst="straightConnector1">
+            <a:avLst/>
+          </a:prstGeom>
+          <a:ln>
+            <a:tailEnd type="triangle"/>
+          </a:ln>
+        </p:spPr>
+        <p:style>
+          <a:lnRef idx="1">
+            <a:schemeClr val="dk1"/>
+          </a:lnRef>
+          <a:fillRef idx="0">
+            <a:schemeClr val="dk1"/>
+          </a:fillRef>
+          <a:effectRef idx="0">
+            <a:schemeClr val="dk1"/>
+          </a:effectRef>
+          <a:fontRef idx="minor">
+            <a:schemeClr val="tx1"/>
+          </a:fontRef>
+        </p:style>
+      </p:cxnSp>
+      <p:cxnSp>
+        <p:nvCxnSpPr>
+          <p:cNvPr id="31" name="Straight Arrow Connector 30">
+            <a:extLst>
+              <a:ext uri="{FF2B5EF4-FFF2-40B4-BE49-F238E27FC236}">
+                <a16:creationId xmlns:a16="http://schemas.microsoft.com/office/drawing/2014/main" id="{939122D0-529A-4924-9F25-179DD8CDEF6E}"/>
+              </a:ext>
+            </a:extLst>
+          </p:cNvPr>
+          <p:cNvCxnSpPr>
+            <a:stCxn id="16" idx="3"/>
+            <a:endCxn id="21" idx="1"/>
+          </p:cNvCxnSpPr>
+          <p:nvPr/>
+        </p:nvCxnSpPr>
+        <p:spPr>
+          <a:xfrm>
+            <a:off x="5951621" y="4961022"/>
+            <a:ext cx="1203158" cy="0"/>
+          </a:xfrm>
+          <a:prstGeom prst="straightConnector1">
+            <a:avLst/>
+          </a:prstGeom>
+          <a:ln>
+            <a:tailEnd type="triangle"/>
+          </a:ln>
+        </p:spPr>
+        <p:style>
+          <a:lnRef idx="1">
+            <a:schemeClr val="dk1"/>
+          </a:lnRef>
+          <a:fillRef idx="0">
+            <a:schemeClr val="dk1"/>
+          </a:fillRef>
+          <a:effectRef idx="0">
+            <a:schemeClr val="dk1"/>
+          </a:effectRef>
+          <a:fontRef idx="minor">
+            <a:schemeClr val="tx1"/>
+          </a:fontRef>
+        </p:style>
+      </p:cxnSp>
+      <p:cxnSp>
+        <p:nvCxnSpPr>
+          <p:cNvPr id="33" name="Straight Arrow Connector 32">
+            <a:extLst>
+              <a:ext uri="{FF2B5EF4-FFF2-40B4-BE49-F238E27FC236}">
+                <a16:creationId xmlns:a16="http://schemas.microsoft.com/office/drawing/2014/main" id="{FA79EF34-8C9A-46B0-A0C8-281492399F29}"/>
+              </a:ext>
+            </a:extLst>
+          </p:cNvPr>
+          <p:cNvCxnSpPr>
+            <a:stCxn id="21" idx="3"/>
+            <a:endCxn id="18" idx="1"/>
+          </p:cNvCxnSpPr>
+          <p:nvPr/>
+        </p:nvCxnSpPr>
+        <p:spPr>
+          <a:xfrm flipV="1">
+            <a:off x="8069179" y="3451058"/>
+            <a:ext cx="617621" cy="1509964"/>
+          </a:xfrm>
+          <a:prstGeom prst="straightConnector1">
+            <a:avLst/>
+          </a:prstGeom>
+          <a:ln>
+            <a:tailEnd type="triangle"/>
+          </a:ln>
+        </p:spPr>
+        <p:style>
+          <a:lnRef idx="1">
+            <a:schemeClr val="dk1"/>
+          </a:lnRef>
+          <a:fillRef idx="0">
+            <a:schemeClr val="dk1"/>
+          </a:fillRef>
+          <a:effectRef idx="0">
+            <a:schemeClr val="dk1"/>
+          </a:effectRef>
+          <a:fontRef idx="minor">
+            <a:schemeClr val="tx1"/>
+          </a:fontRef>
+        </p:style>
+      </p:cxnSp>
+      <p:sp>
+        <p:nvSpPr>
+          <p:cNvPr id="36" name="TextBox 35">
+            <a:extLst>
+              <a:ext uri="{FF2B5EF4-FFF2-40B4-BE49-F238E27FC236}">
+                <a16:creationId xmlns:a16="http://schemas.microsoft.com/office/drawing/2014/main" id="{B92C21B9-73DF-4A50-8732-70B04DB91BB2}"/>
+              </a:ext>
+            </a:extLst>
+          </p:cNvPr>
+          <p:cNvSpPr txBox="1"/>
+          <p:nvPr/>
+        </p:nvSpPr>
+        <p:spPr>
+          <a:xfrm>
+            <a:off x="729916" y="2674018"/>
+            <a:ext cx="914400" cy="369332"/>
+          </a:xfrm>
+          <a:prstGeom prst="rect">
+            <a:avLst/>
+          </a:prstGeom>
+          <a:noFill/>
+        </p:spPr>
         <p:txBody>
-          <a:bodyPr anchor="ctr"/>
-          <a:lstStyle>
-            <a:lvl1pPr algn="l" defTabSz="914400" rtl="0" eaLnBrk="1" latinLnBrk="0" hangingPunct="1">
-              <a:lnSpc>
-                <a:spcPct val="90000"/>
-              </a:lnSpc>
-              <a:spcBef>
-                <a:spcPct val="0"/>
-              </a:spcBef>
-              <a:buNone/>
-              <a:defRPr sz="4400" kern="1200">
-                <a:solidFill>
-                  <a:schemeClr val="tx1"/>
-                </a:solidFill>
-                <a:latin typeface="+mj-lt"/>
-                <a:ea typeface="+mj-ea"/>
-                <a:cs typeface="+mj-cs"/>
-              </a:defRPr>
-            </a:lvl1pPr>
-          </a:lstStyle>
+          <a:bodyPr wrap="square" rtlCol="0">
+            <a:spAutoFit/>
+          </a:bodyPr>
+          <a:lstStyle/>
           <a:p>
             <a:pPr algn="ctr"/>
             <a:r>
               <a:rPr lang="it-IT" dirty="0"/>
-              <a:t>Metingen</a:t>
+              <a:t>Data</a:t>
             </a:r>
             <a:endParaRPr lang="nl-NL" dirty="0"/>
+          </a:p>
+        </p:txBody>
+      </p:sp>
+      <p:sp>
+        <p:nvSpPr>
+          <p:cNvPr id="37" name="TextBox 36">
+            <a:extLst>
+              <a:ext uri="{FF2B5EF4-FFF2-40B4-BE49-F238E27FC236}">
+                <a16:creationId xmlns:a16="http://schemas.microsoft.com/office/drawing/2014/main" id="{F92AB112-5266-4EE3-8175-5625F3CC0148}"/>
+              </a:ext>
+            </a:extLst>
+          </p:cNvPr>
+          <p:cNvSpPr txBox="1"/>
+          <p:nvPr/>
+        </p:nvSpPr>
+        <p:spPr>
+          <a:xfrm>
+            <a:off x="2410326" y="1040458"/>
+            <a:ext cx="1933074" cy="369332"/>
+          </a:xfrm>
+          <a:prstGeom prst="rect">
+            <a:avLst/>
+          </a:prstGeom>
+          <a:noFill/>
+        </p:spPr>
+        <p:txBody>
+          <a:bodyPr wrap="square" rtlCol="0">
+            <a:spAutoFit/>
+          </a:bodyPr>
+          <a:lstStyle/>
+          <a:p>
+            <a:pPr algn="ctr"/>
+            <a:r>
+              <a:rPr lang="it-IT" dirty="0"/>
+              <a:t>To be interpolated</a:t>
+            </a:r>
+            <a:endParaRPr lang="nl-NL" dirty="0"/>
+          </a:p>
+        </p:txBody>
+      </p:sp>
+      <p:sp>
+        <p:nvSpPr>
+          <p:cNvPr id="38" name="TextBox 37">
+            <a:extLst>
+              <a:ext uri="{FF2B5EF4-FFF2-40B4-BE49-F238E27FC236}">
+                <a16:creationId xmlns:a16="http://schemas.microsoft.com/office/drawing/2014/main" id="{21DB563F-66D7-4806-B713-02249C6E6939}"/>
+              </a:ext>
+            </a:extLst>
+          </p:cNvPr>
+          <p:cNvSpPr txBox="1"/>
+          <p:nvPr/>
+        </p:nvSpPr>
+        <p:spPr>
+          <a:xfrm>
+            <a:off x="2486526" y="4206040"/>
+            <a:ext cx="1933074" cy="369332"/>
+          </a:xfrm>
+          <a:prstGeom prst="rect">
+            <a:avLst/>
+          </a:prstGeom>
+          <a:noFill/>
+        </p:spPr>
+        <p:txBody>
+          <a:bodyPr wrap="square" rtlCol="0">
+            <a:spAutoFit/>
+          </a:bodyPr>
+          <a:lstStyle/>
+          <a:p>
+            <a:pPr algn="ctr"/>
+            <a:r>
+              <a:rPr lang="it-IT" dirty="0"/>
+              <a:t>To be imputed</a:t>
+            </a:r>
+            <a:endParaRPr lang="nl-NL" dirty="0"/>
+          </a:p>
+        </p:txBody>
+      </p:sp>
+      <p:sp>
+        <p:nvSpPr>
+          <p:cNvPr id="39" name="TextBox 38">
+            <a:extLst>
+              <a:ext uri="{FF2B5EF4-FFF2-40B4-BE49-F238E27FC236}">
+                <a16:creationId xmlns:a16="http://schemas.microsoft.com/office/drawing/2014/main" id="{7D19FC32-97A8-4104-B28A-CF6DA7AD830C}"/>
+              </a:ext>
+            </a:extLst>
+          </p:cNvPr>
+          <p:cNvSpPr txBox="1"/>
+          <p:nvPr/>
+        </p:nvSpPr>
+        <p:spPr>
+          <a:xfrm>
+            <a:off x="6777789" y="4076383"/>
+            <a:ext cx="1668379" cy="646331"/>
+          </a:xfrm>
+          <a:prstGeom prst="rect">
+            <a:avLst/>
+          </a:prstGeom>
+          <a:noFill/>
+        </p:spPr>
+        <p:txBody>
+          <a:bodyPr wrap="square" rtlCol="0">
+            <a:spAutoFit/>
+          </a:bodyPr>
+          <a:lstStyle/>
+          <a:p>
+            <a:pPr algn="ctr"/>
+            <a:r>
+              <a:rPr lang="it-IT" dirty="0"/>
+              <a:t>Agg Imputed Data</a:t>
+            </a:r>
+            <a:endParaRPr lang="nl-NL" dirty="0"/>
+          </a:p>
+        </p:txBody>
+      </p:sp>
+      <p:sp>
+        <p:nvSpPr>
+          <p:cNvPr id="40" name="TextBox 39">
+            <a:extLst>
+              <a:ext uri="{FF2B5EF4-FFF2-40B4-BE49-F238E27FC236}">
+                <a16:creationId xmlns:a16="http://schemas.microsoft.com/office/drawing/2014/main" id="{D511C0EE-145E-4892-AAC3-2ACC6A2D1834}"/>
+              </a:ext>
+            </a:extLst>
+          </p:cNvPr>
+          <p:cNvSpPr txBox="1"/>
+          <p:nvPr/>
+        </p:nvSpPr>
+        <p:spPr>
+          <a:xfrm>
+            <a:off x="4527884" y="4178424"/>
+            <a:ext cx="1933074" cy="369332"/>
+          </a:xfrm>
+          <a:prstGeom prst="rect">
+            <a:avLst/>
+          </a:prstGeom>
+          <a:noFill/>
+        </p:spPr>
+        <p:txBody>
+          <a:bodyPr wrap="square" rtlCol="0">
+            <a:spAutoFit/>
+          </a:bodyPr>
+          <a:lstStyle/>
+          <a:p>
+            <a:pPr algn="ctr"/>
+            <a:r>
+              <a:rPr lang="it-IT" dirty="0"/>
+              <a:t>Imputer</a:t>
+            </a:r>
+            <a:endParaRPr lang="nl-NL" dirty="0"/>
+          </a:p>
+        </p:txBody>
+      </p:sp>
+      <p:sp>
+        <p:nvSpPr>
+          <p:cNvPr id="41" name="TextBox 40">
+            <a:extLst>
+              <a:ext uri="{FF2B5EF4-FFF2-40B4-BE49-F238E27FC236}">
+                <a16:creationId xmlns:a16="http://schemas.microsoft.com/office/drawing/2014/main" id="{66FA8274-CF09-4053-A202-9FD34F0AD1D7}"/>
+              </a:ext>
+            </a:extLst>
+          </p:cNvPr>
+          <p:cNvSpPr txBox="1"/>
+          <p:nvPr/>
+        </p:nvSpPr>
+        <p:spPr>
+          <a:xfrm>
+            <a:off x="4578016" y="1040458"/>
+            <a:ext cx="1792705" cy="369332"/>
+          </a:xfrm>
+          <a:prstGeom prst="rect">
+            <a:avLst/>
+          </a:prstGeom>
+          <a:noFill/>
+        </p:spPr>
+        <p:txBody>
+          <a:bodyPr wrap="square" rtlCol="0">
+            <a:spAutoFit/>
+          </a:bodyPr>
+          <a:lstStyle/>
+          <a:p>
+            <a:pPr algn="ctr"/>
+            <a:r>
+              <a:rPr lang="it-IT" dirty="0"/>
+              <a:t>Interpolate&amp;Agg</a:t>
+            </a:r>
+            <a:endParaRPr lang="nl-NL" dirty="0"/>
+          </a:p>
+        </p:txBody>
+      </p:sp>
+      <p:sp>
+        <p:nvSpPr>
+          <p:cNvPr id="42" name="TextBox 41">
+            <a:extLst>
+              <a:ext uri="{FF2B5EF4-FFF2-40B4-BE49-F238E27FC236}">
+                <a16:creationId xmlns:a16="http://schemas.microsoft.com/office/drawing/2014/main" id="{4F3F9F64-9CB2-4C49-B464-95ADFA07E271}"/>
+              </a:ext>
+            </a:extLst>
+          </p:cNvPr>
+          <p:cNvSpPr txBox="1"/>
+          <p:nvPr/>
+        </p:nvSpPr>
+        <p:spPr>
+          <a:xfrm>
+            <a:off x="6605337" y="939326"/>
+            <a:ext cx="1973179" cy="646331"/>
+          </a:xfrm>
+          <a:prstGeom prst="rect">
+            <a:avLst/>
+          </a:prstGeom>
+          <a:noFill/>
+        </p:spPr>
+        <p:txBody>
+          <a:bodyPr wrap="square" rtlCol="0">
+            <a:spAutoFit/>
+          </a:bodyPr>
+          <a:lstStyle/>
+          <a:p>
+            <a:pPr algn="ctr"/>
+            <a:r>
+              <a:rPr lang="it-IT" dirty="0"/>
+              <a:t>Weighted Avg based on time</a:t>
+            </a:r>
+            <a:endParaRPr lang="nl-NL" dirty="0"/>
+          </a:p>
+        </p:txBody>
+      </p:sp>
+      <p:sp>
+        <p:nvSpPr>
+          <p:cNvPr id="47" name="TextBox 46">
+            <a:extLst>
+              <a:ext uri="{FF2B5EF4-FFF2-40B4-BE49-F238E27FC236}">
+                <a16:creationId xmlns:a16="http://schemas.microsoft.com/office/drawing/2014/main" id="{70D1AA15-024B-4A22-9E5B-6FCA5290E1CE}"/>
+              </a:ext>
+            </a:extLst>
+          </p:cNvPr>
+          <p:cNvSpPr txBox="1"/>
+          <p:nvPr/>
+        </p:nvSpPr>
+        <p:spPr>
+          <a:xfrm>
+            <a:off x="9436768" y="3244334"/>
+            <a:ext cx="1532021" cy="369332"/>
+          </a:xfrm>
+          <a:prstGeom prst="rect">
+            <a:avLst/>
+          </a:prstGeom>
+          <a:noFill/>
+        </p:spPr>
+        <p:txBody>
+          <a:bodyPr wrap="square" rtlCol="0">
+            <a:spAutoFit/>
+          </a:bodyPr>
+          <a:lstStyle/>
+          <a:p>
+            <a:pPr algn="ctr"/>
+            <a:r>
+              <a:rPr lang="it-IT" dirty="0"/>
+              <a:t>Data Fusion</a:t>
+            </a:r>
+            <a:endParaRPr lang="nl-NL" dirty="0"/>
+          </a:p>
+        </p:txBody>
+      </p:sp>
+      <p:sp>
+        <p:nvSpPr>
+          <p:cNvPr id="48" name="TextBox 47">
+            <a:extLst>
+              <a:ext uri="{FF2B5EF4-FFF2-40B4-BE49-F238E27FC236}">
+                <a16:creationId xmlns:a16="http://schemas.microsoft.com/office/drawing/2014/main" id="{339AB1E6-67B6-4B4E-97CC-380898C45A3E}"/>
+              </a:ext>
+            </a:extLst>
+          </p:cNvPr>
+          <p:cNvSpPr txBox="1"/>
+          <p:nvPr/>
+        </p:nvSpPr>
+        <p:spPr>
+          <a:xfrm>
+            <a:off x="0" y="0"/>
+            <a:ext cx="3457074" cy="369332"/>
+          </a:xfrm>
+          <a:prstGeom prst="rect">
+            <a:avLst/>
+          </a:prstGeom>
+          <a:noFill/>
+        </p:spPr>
+        <p:txBody>
+          <a:bodyPr wrap="square" rtlCol="0">
+            <a:spAutoFit/>
+          </a:bodyPr>
+          <a:lstStyle/>
+          <a:p>
+            <a:r>
+              <a:rPr lang="it-IT" u="sng" dirty="0"/>
+              <a:t>Data processing - Pipeline</a:t>
+            </a:r>
+            <a:endParaRPr lang="nl-NL" u="sng" dirty="0"/>
           </a:p>
         </p:txBody>
       </p:sp>
     </p:spTree>
     <p:extLst>
       <p:ext uri="{BB962C8B-B14F-4D97-AF65-F5344CB8AC3E}">
-        <p14:creationId xmlns:p14="http://schemas.microsoft.com/office/powerpoint/2010/main" val="1644673165"/>
+        <p14:creationId xmlns:p14="http://schemas.microsoft.com/office/powerpoint/2010/main" val="1783811437"/>
       </p:ext>
     </p:extLst>
   </p:cSld>
@@ -6034,10 +7394,1776 @@
           <a:chExt cx="0" cy="0"/>
         </a:xfrm>
       </p:grpSpPr>
+      <p:graphicFrame>
+        <p:nvGraphicFramePr>
+          <p:cNvPr id="3" name="Table 2">
+            <a:extLst>
+              <a:ext uri="{FF2B5EF4-FFF2-40B4-BE49-F238E27FC236}">
+                <a16:creationId xmlns:a16="http://schemas.microsoft.com/office/drawing/2014/main" id="{841EFDCE-6A3A-4FC2-878E-0096095E24B7}"/>
+              </a:ext>
+            </a:extLst>
+          </p:cNvPr>
+          <p:cNvGraphicFramePr>
+            <a:graphicFrameLocks noGrp="1"/>
+          </p:cNvGraphicFramePr>
+          <p:nvPr>
+            <p:extLst>
+              <p:ext uri="{D42A27DB-BD31-4B8C-83A1-F6EECF244321}">
+                <p14:modId xmlns:p14="http://schemas.microsoft.com/office/powerpoint/2010/main" val="2044074226"/>
+              </p:ext>
+            </p:extLst>
+          </p:nvPr>
+        </p:nvGraphicFramePr>
+        <p:xfrm>
+          <a:off x="1048081" y="1018540"/>
+          <a:ext cx="5874084" cy="4820920"/>
+        </p:xfrm>
+        <a:graphic>
+          <a:graphicData uri="http://schemas.openxmlformats.org/drawingml/2006/table">
+            <a:tbl>
+              <a:tblPr firstRow="1" bandRow="1">
+                <a:tableStyleId>{9D7B26C5-4107-4FEC-AEDC-1716B250A1EF}</a:tableStyleId>
+              </a:tblPr>
+              <a:tblGrid>
+                <a:gridCol w="3609474">
+                  <a:extLst>
+                    <a:ext uri="{9D8B030D-6E8A-4147-A177-3AD203B41FA5}">
+                      <a16:colId xmlns:a16="http://schemas.microsoft.com/office/drawing/2014/main" val="2857705795"/>
+                    </a:ext>
+                  </a:extLst>
+                </a:gridCol>
+                <a:gridCol w="2264610">
+                  <a:extLst>
+                    <a:ext uri="{9D8B030D-6E8A-4147-A177-3AD203B41FA5}">
+                      <a16:colId xmlns:a16="http://schemas.microsoft.com/office/drawing/2014/main" val="3255647997"/>
+                    </a:ext>
+                  </a:extLst>
+                </a:gridCol>
+              </a:tblGrid>
+              <a:tr h="370840">
+                <a:tc>
+                  <a:txBody>
+                    <a:bodyPr/>
+                    <a:lstStyle/>
+                    <a:p>
+                      <a:r>
+                        <a:rPr lang="it-IT" dirty="0"/>
+                        <a:t>Substance</a:t>
+                      </a:r>
+                      <a:endParaRPr lang="nl-NL" dirty="0"/>
+                    </a:p>
+                  </a:txBody>
+                  <a:tcPr/>
+                </a:tc>
+                <a:tc>
+                  <a:txBody>
+                    <a:bodyPr/>
+                    <a:lstStyle/>
+                    <a:p>
+                      <a:r>
+                        <a:rPr lang="it-IT" dirty="0"/>
+                        <a:t>Present values count</a:t>
+                      </a:r>
+                      <a:endParaRPr lang="nl-NL" dirty="0"/>
+                    </a:p>
+                  </a:txBody>
+                  <a:tcPr/>
+                </a:tc>
+                <a:extLst>
+                  <a:ext uri="{0D108BD9-81ED-4DB2-BD59-A6C34878D82A}">
+                    <a16:rowId xmlns:a16="http://schemas.microsoft.com/office/drawing/2014/main" val="1180812779"/>
+                  </a:ext>
+                </a:extLst>
+              </a:tr>
+              <a:tr h="370840">
+                <a:tc>
+                  <a:txBody>
+                    <a:bodyPr/>
+                    <a:lstStyle/>
+                    <a:p>
+                      <a:r>
+                        <a:rPr lang="nl-NL" dirty="0"/>
+                        <a:t>CRP</a:t>
+                      </a:r>
+                    </a:p>
+                  </a:txBody>
+                  <a:tcPr/>
+                </a:tc>
+                <a:tc>
+                  <a:txBody>
+                    <a:bodyPr/>
+                    <a:lstStyle/>
+                    <a:p>
+                      <a:r>
+                        <a:rPr lang="nl-NL" dirty="0"/>
+                        <a:t>11669</a:t>
+                      </a:r>
+                    </a:p>
+                  </a:txBody>
+                  <a:tcPr/>
+                </a:tc>
+                <a:extLst>
+                  <a:ext uri="{0D108BD9-81ED-4DB2-BD59-A6C34878D82A}">
+                    <a16:rowId xmlns:a16="http://schemas.microsoft.com/office/drawing/2014/main" val="109603985"/>
+                  </a:ext>
+                </a:extLst>
+              </a:tr>
+              <a:tr h="370840">
+                <a:tc>
+                  <a:txBody>
+                    <a:bodyPr/>
+                    <a:lstStyle/>
+                    <a:p>
+                      <a:r>
+                        <a:rPr lang="nl-NL" dirty="0"/>
+                        <a:t>Cholesterol </a:t>
+                      </a:r>
+                    </a:p>
+                  </a:txBody>
+                  <a:tcPr/>
+                </a:tc>
+                <a:tc>
+                  <a:txBody>
+                    <a:bodyPr/>
+                    <a:lstStyle/>
+                    <a:p>
+                      <a:r>
+                        <a:rPr lang="nl-NL" dirty="0"/>
+                        <a:t>2525</a:t>
+                      </a:r>
+                    </a:p>
+                  </a:txBody>
+                  <a:tcPr/>
+                </a:tc>
+                <a:extLst>
+                  <a:ext uri="{0D108BD9-81ED-4DB2-BD59-A6C34878D82A}">
+                    <a16:rowId xmlns:a16="http://schemas.microsoft.com/office/drawing/2014/main" val="972583283"/>
+                  </a:ext>
+                </a:extLst>
+              </a:tr>
+              <a:tr h="370840">
+                <a:tc>
+                  <a:txBody>
+                    <a:bodyPr/>
+                    <a:lstStyle/>
+                    <a:p>
+                      <a:r>
+                        <a:rPr lang="nl-NL" dirty="0"/>
+                        <a:t>HDL Cholesterol</a:t>
+                      </a:r>
+                    </a:p>
+                  </a:txBody>
+                  <a:tcPr/>
+                </a:tc>
+                <a:tc>
+                  <a:txBody>
+                    <a:bodyPr/>
+                    <a:lstStyle/>
+                    <a:p>
+                      <a:r>
+                        <a:rPr lang="nl-NL" dirty="0"/>
+                        <a:t>2493</a:t>
+                      </a:r>
+                    </a:p>
+                  </a:txBody>
+                  <a:tcPr/>
+                </a:tc>
+                <a:extLst>
+                  <a:ext uri="{0D108BD9-81ED-4DB2-BD59-A6C34878D82A}">
+                    <a16:rowId xmlns:a16="http://schemas.microsoft.com/office/drawing/2014/main" val="2510479191"/>
+                  </a:ext>
+                </a:extLst>
+              </a:tr>
+              <a:tr h="370840">
+                <a:tc>
+                  <a:txBody>
+                    <a:bodyPr/>
+                    <a:lstStyle/>
+                    <a:p>
+                      <a:r>
+                        <a:rPr lang="nl-NL" dirty="0"/>
+                        <a:t>HbA1c </a:t>
+                      </a:r>
+                    </a:p>
+                  </a:txBody>
+                  <a:tcPr/>
+                </a:tc>
+                <a:tc>
+                  <a:txBody>
+                    <a:bodyPr/>
+                    <a:lstStyle/>
+                    <a:p>
+                      <a:r>
+                        <a:rPr lang="nl-NL" dirty="0"/>
+                        <a:t>2803</a:t>
+                      </a:r>
+                    </a:p>
+                  </a:txBody>
+                  <a:tcPr/>
+                </a:tc>
+                <a:extLst>
+                  <a:ext uri="{0D108BD9-81ED-4DB2-BD59-A6C34878D82A}">
+                    <a16:rowId xmlns:a16="http://schemas.microsoft.com/office/drawing/2014/main" val="3209619607"/>
+                  </a:ext>
+                </a:extLst>
+              </a:tr>
+              <a:tr h="370840">
+                <a:tc>
+                  <a:txBody>
+                    <a:bodyPr/>
+                    <a:lstStyle/>
+                    <a:p>
+                      <a:r>
+                        <a:rPr lang="nl-NL" dirty="0"/>
+                        <a:t>Hemoglobine</a:t>
+                      </a:r>
+                    </a:p>
+                  </a:txBody>
+                  <a:tcPr/>
+                </a:tc>
+                <a:tc>
+                  <a:txBody>
+                    <a:bodyPr/>
+                    <a:lstStyle/>
+                    <a:p>
+                      <a:r>
+                        <a:rPr lang="nl-NL" dirty="0"/>
+                        <a:t>23126</a:t>
+                      </a:r>
+                    </a:p>
+                  </a:txBody>
+                  <a:tcPr/>
+                </a:tc>
+                <a:extLst>
+                  <a:ext uri="{0D108BD9-81ED-4DB2-BD59-A6C34878D82A}">
+                    <a16:rowId xmlns:a16="http://schemas.microsoft.com/office/drawing/2014/main" val="2345326245"/>
+                  </a:ext>
+                </a:extLst>
+              </a:tr>
+              <a:tr h="370840">
+                <a:tc>
+                  <a:txBody>
+                    <a:bodyPr/>
+                    <a:lstStyle/>
+                    <a:p>
+                      <a:r>
+                        <a:rPr lang="nl-NL" dirty="0"/>
+                        <a:t>Kalium</a:t>
+                      </a:r>
+                    </a:p>
+                  </a:txBody>
+                  <a:tcPr/>
+                </a:tc>
+                <a:tc>
+                  <a:txBody>
+                    <a:bodyPr/>
+                    <a:lstStyle/>
+                    <a:p>
+                      <a:r>
+                        <a:rPr lang="nl-NL" dirty="0"/>
+                        <a:t>23488</a:t>
+                      </a:r>
+                    </a:p>
+                  </a:txBody>
+                  <a:tcPr/>
+                </a:tc>
+                <a:extLst>
+                  <a:ext uri="{0D108BD9-81ED-4DB2-BD59-A6C34878D82A}">
+                    <a16:rowId xmlns:a16="http://schemas.microsoft.com/office/drawing/2014/main" val="203106008"/>
+                  </a:ext>
+                </a:extLst>
+              </a:tr>
+              <a:tr h="370840">
+                <a:tc>
+                  <a:txBody>
+                    <a:bodyPr/>
+                    <a:lstStyle/>
+                    <a:p>
+                      <a:r>
+                        <a:rPr lang="nl-NL" dirty="0" err="1"/>
+                        <a:t>Kreatinine</a:t>
+                      </a:r>
+                      <a:r>
+                        <a:rPr lang="nl-NL" dirty="0"/>
+                        <a:t> </a:t>
+                      </a:r>
+                    </a:p>
+                  </a:txBody>
+                  <a:tcPr/>
+                </a:tc>
+                <a:tc>
+                  <a:txBody>
+                    <a:bodyPr/>
+                    <a:lstStyle/>
+                    <a:p>
+                      <a:r>
+                        <a:rPr lang="nl-NL" dirty="0"/>
+                        <a:t>21205</a:t>
+                      </a:r>
+                    </a:p>
+                  </a:txBody>
+                  <a:tcPr/>
+                </a:tc>
+                <a:extLst>
+                  <a:ext uri="{0D108BD9-81ED-4DB2-BD59-A6C34878D82A}">
+                    <a16:rowId xmlns:a16="http://schemas.microsoft.com/office/drawing/2014/main" val="2127138018"/>
+                  </a:ext>
+                </a:extLst>
+              </a:tr>
+              <a:tr h="370840">
+                <a:tc>
+                  <a:txBody>
+                    <a:bodyPr/>
+                    <a:lstStyle/>
+                    <a:p>
+                      <a:r>
+                        <a:rPr lang="nl-NL" dirty="0"/>
+                        <a:t>LDL Cholesterol</a:t>
+                      </a:r>
+                    </a:p>
+                  </a:txBody>
+                  <a:tcPr/>
+                </a:tc>
+                <a:tc>
+                  <a:txBody>
+                    <a:bodyPr/>
+                    <a:lstStyle/>
+                    <a:p>
+                      <a:r>
+                        <a:rPr lang="nl-NL" dirty="0"/>
+                        <a:t>2147</a:t>
+                      </a:r>
+                    </a:p>
+                  </a:txBody>
+                  <a:tcPr/>
+                </a:tc>
+                <a:extLst>
+                  <a:ext uri="{0D108BD9-81ED-4DB2-BD59-A6C34878D82A}">
+                    <a16:rowId xmlns:a16="http://schemas.microsoft.com/office/drawing/2014/main" val="2952752006"/>
+                  </a:ext>
+                </a:extLst>
+              </a:tr>
+              <a:tr h="370840">
+                <a:tc>
+                  <a:txBody>
+                    <a:bodyPr/>
+                    <a:lstStyle/>
+                    <a:p>
+                      <a:r>
+                        <a:rPr lang="nl-NL" dirty="0"/>
+                        <a:t>Natrium</a:t>
+                      </a:r>
+                    </a:p>
+                  </a:txBody>
+                  <a:tcPr/>
+                </a:tc>
+                <a:tc>
+                  <a:txBody>
+                    <a:bodyPr/>
+                    <a:lstStyle/>
+                    <a:p>
+                      <a:r>
+                        <a:rPr lang="nl-NL" dirty="0"/>
+                        <a:t>20724</a:t>
+                      </a:r>
+                    </a:p>
+                  </a:txBody>
+                  <a:tcPr/>
+                </a:tc>
+                <a:extLst>
+                  <a:ext uri="{0D108BD9-81ED-4DB2-BD59-A6C34878D82A}">
+                    <a16:rowId xmlns:a16="http://schemas.microsoft.com/office/drawing/2014/main" val="2351056571"/>
+                  </a:ext>
+                </a:extLst>
+              </a:tr>
+              <a:tr h="370840">
+                <a:tc>
+                  <a:txBody>
+                    <a:bodyPr/>
+                    <a:lstStyle/>
+                    <a:p>
+                      <a:r>
+                        <a:rPr lang="nl-NL" dirty="0"/>
+                        <a:t>Triglyceriden</a:t>
+                      </a:r>
+                    </a:p>
+                  </a:txBody>
+                  <a:tcPr/>
+                </a:tc>
+                <a:tc>
+                  <a:txBody>
+                    <a:bodyPr/>
+                    <a:lstStyle/>
+                    <a:p>
+                      <a:r>
+                        <a:rPr lang="nl-NL" dirty="0"/>
+                        <a:t>2626</a:t>
+                      </a:r>
+                    </a:p>
+                  </a:txBody>
+                  <a:tcPr/>
+                </a:tc>
+                <a:extLst>
+                  <a:ext uri="{0D108BD9-81ED-4DB2-BD59-A6C34878D82A}">
+                    <a16:rowId xmlns:a16="http://schemas.microsoft.com/office/drawing/2014/main" val="1643239166"/>
+                  </a:ext>
+                </a:extLst>
+              </a:tr>
+              <a:tr h="370840">
+                <a:tc>
+                  <a:txBody>
+                    <a:bodyPr/>
+                    <a:lstStyle/>
+                    <a:p>
+                      <a:r>
+                        <a:rPr lang="nl-NL" dirty="0" err="1"/>
+                        <a:t>eGFR</a:t>
+                      </a:r>
+                      <a:r>
+                        <a:rPr lang="nl-NL" dirty="0"/>
+                        <a:t> (CKD-EPI) </a:t>
+                      </a:r>
+                    </a:p>
+                  </a:txBody>
+                  <a:tcPr/>
+                </a:tc>
+                <a:tc>
+                  <a:txBody>
+                    <a:bodyPr/>
+                    <a:lstStyle/>
+                    <a:p>
+                      <a:r>
+                        <a:rPr lang="nl-NL" dirty="0"/>
+                        <a:t>21181</a:t>
+                      </a:r>
+                    </a:p>
+                  </a:txBody>
+                  <a:tcPr/>
+                </a:tc>
+                <a:extLst>
+                  <a:ext uri="{0D108BD9-81ED-4DB2-BD59-A6C34878D82A}">
+                    <a16:rowId xmlns:a16="http://schemas.microsoft.com/office/drawing/2014/main" val="3424592230"/>
+                  </a:ext>
+                </a:extLst>
+              </a:tr>
+              <a:tr h="370840">
+                <a:tc>
+                  <a:txBody>
+                    <a:bodyPr/>
+                    <a:lstStyle/>
+                    <a:p>
+                      <a:r>
+                        <a:rPr lang="nl-NL" dirty="0"/>
+                        <a:t>non-HDL cholesterol</a:t>
+                      </a:r>
+                    </a:p>
+                  </a:txBody>
+                  <a:tcPr/>
+                </a:tc>
+                <a:tc>
+                  <a:txBody>
+                    <a:bodyPr/>
+                    <a:lstStyle/>
+                    <a:p>
+                      <a:r>
+                        <a:rPr lang="nl-NL" dirty="0"/>
+                        <a:t>2481</a:t>
+                      </a:r>
+                    </a:p>
+                  </a:txBody>
+                  <a:tcPr/>
+                </a:tc>
+                <a:extLst>
+                  <a:ext uri="{0D108BD9-81ED-4DB2-BD59-A6C34878D82A}">
+                    <a16:rowId xmlns:a16="http://schemas.microsoft.com/office/drawing/2014/main" val="2598904815"/>
+                  </a:ext>
+                </a:extLst>
+              </a:tr>
+            </a:tbl>
+          </a:graphicData>
+        </a:graphic>
+      </p:graphicFrame>
+      <p:sp>
+        <p:nvSpPr>
+          <p:cNvPr id="5" name="Rectangle 4">
+            <a:extLst>
+              <a:ext uri="{FF2B5EF4-FFF2-40B4-BE49-F238E27FC236}">
+                <a16:creationId xmlns:a16="http://schemas.microsoft.com/office/drawing/2014/main" id="{FFDBA18B-D1D7-4CFF-A12B-7FB9E004DF79}"/>
+              </a:ext>
+            </a:extLst>
+          </p:cNvPr>
+          <p:cNvSpPr/>
+          <p:nvPr/>
+        </p:nvSpPr>
+        <p:spPr>
+          <a:xfrm>
+            <a:off x="1048081" y="2863516"/>
+            <a:ext cx="5874084" cy="368968"/>
+          </a:xfrm>
+          <a:prstGeom prst="rect">
+            <a:avLst/>
+          </a:prstGeom>
+          <a:solidFill>
+            <a:schemeClr val="accent6">
+              <a:alpha val="50000"/>
+            </a:schemeClr>
+          </a:solidFill>
+          <a:ln>
+            <a:noFill/>
+          </a:ln>
+        </p:spPr>
+        <p:style>
+          <a:lnRef idx="0">
+            <a:scrgbClr r="0" g="0" b="0"/>
+          </a:lnRef>
+          <a:fillRef idx="0">
+            <a:scrgbClr r="0" g="0" b="0"/>
+          </a:fillRef>
+          <a:effectRef idx="0">
+            <a:scrgbClr r="0" g="0" b="0"/>
+          </a:effectRef>
+          <a:fontRef idx="minor">
+            <a:schemeClr val="lt1"/>
+          </a:fontRef>
+        </p:style>
+        <p:txBody>
+          <a:bodyPr rtlCol="0" anchor="ctr"/>
+          <a:lstStyle/>
+          <a:p>
+            <a:pPr algn="ctr"/>
+            <a:endParaRPr lang="nl-NL"/>
+          </a:p>
+        </p:txBody>
+      </p:sp>
+      <p:sp>
+        <p:nvSpPr>
+          <p:cNvPr id="6" name="Rectangle 5">
+            <a:extLst>
+              <a:ext uri="{FF2B5EF4-FFF2-40B4-BE49-F238E27FC236}">
+                <a16:creationId xmlns:a16="http://schemas.microsoft.com/office/drawing/2014/main" id="{AAC61424-BD8E-4EEF-BF4D-2D8BA8FB26AE}"/>
+              </a:ext>
+            </a:extLst>
+          </p:cNvPr>
+          <p:cNvSpPr/>
+          <p:nvPr/>
+        </p:nvSpPr>
+        <p:spPr>
+          <a:xfrm>
+            <a:off x="1048081" y="3625517"/>
+            <a:ext cx="5874084" cy="368968"/>
+          </a:xfrm>
+          <a:prstGeom prst="rect">
+            <a:avLst/>
+          </a:prstGeom>
+          <a:solidFill>
+            <a:schemeClr val="accent6">
+              <a:alpha val="50000"/>
+            </a:schemeClr>
+          </a:solidFill>
+          <a:ln>
+            <a:noFill/>
+          </a:ln>
+        </p:spPr>
+        <p:style>
+          <a:lnRef idx="0">
+            <a:scrgbClr r="0" g="0" b="0"/>
+          </a:lnRef>
+          <a:fillRef idx="0">
+            <a:scrgbClr r="0" g="0" b="0"/>
+          </a:fillRef>
+          <a:effectRef idx="0">
+            <a:scrgbClr r="0" g="0" b="0"/>
+          </a:effectRef>
+          <a:fontRef idx="minor">
+            <a:schemeClr val="lt1"/>
+          </a:fontRef>
+        </p:style>
+        <p:txBody>
+          <a:bodyPr rtlCol="0" anchor="ctr"/>
+          <a:lstStyle/>
+          <a:p>
+            <a:pPr algn="ctr"/>
+            <a:endParaRPr lang="nl-NL"/>
+          </a:p>
+        </p:txBody>
+      </p:sp>
+      <p:sp>
+        <p:nvSpPr>
+          <p:cNvPr id="7" name="Rectangle 6">
+            <a:extLst>
+              <a:ext uri="{FF2B5EF4-FFF2-40B4-BE49-F238E27FC236}">
+                <a16:creationId xmlns:a16="http://schemas.microsoft.com/office/drawing/2014/main" id="{764DEB25-96EA-4DFC-989E-80095B8F2316}"/>
+              </a:ext>
+            </a:extLst>
+          </p:cNvPr>
+          <p:cNvSpPr/>
+          <p:nvPr/>
+        </p:nvSpPr>
+        <p:spPr>
+          <a:xfrm>
+            <a:off x="1048081" y="4363520"/>
+            <a:ext cx="5874084" cy="368968"/>
+          </a:xfrm>
+          <a:prstGeom prst="rect">
+            <a:avLst/>
+          </a:prstGeom>
+          <a:solidFill>
+            <a:schemeClr val="accent6">
+              <a:alpha val="50000"/>
+            </a:schemeClr>
+          </a:solidFill>
+          <a:ln>
+            <a:noFill/>
+          </a:ln>
+        </p:spPr>
+        <p:style>
+          <a:lnRef idx="0">
+            <a:scrgbClr r="0" g="0" b="0"/>
+          </a:lnRef>
+          <a:fillRef idx="0">
+            <a:scrgbClr r="0" g="0" b="0"/>
+          </a:fillRef>
+          <a:effectRef idx="0">
+            <a:scrgbClr r="0" g="0" b="0"/>
+          </a:effectRef>
+          <a:fontRef idx="minor">
+            <a:schemeClr val="lt1"/>
+          </a:fontRef>
+        </p:style>
+        <p:txBody>
+          <a:bodyPr rtlCol="0" anchor="ctr"/>
+          <a:lstStyle/>
+          <a:p>
+            <a:pPr algn="ctr"/>
+            <a:endParaRPr lang="nl-NL"/>
+          </a:p>
+        </p:txBody>
+      </p:sp>
+      <p:sp>
+        <p:nvSpPr>
+          <p:cNvPr id="8" name="Rectangle 7">
+            <a:extLst>
+              <a:ext uri="{FF2B5EF4-FFF2-40B4-BE49-F238E27FC236}">
+                <a16:creationId xmlns:a16="http://schemas.microsoft.com/office/drawing/2014/main" id="{31EEE006-C5B8-43F0-8A57-0163A12D0E93}"/>
+              </a:ext>
+            </a:extLst>
+          </p:cNvPr>
+          <p:cNvSpPr/>
+          <p:nvPr/>
+        </p:nvSpPr>
+        <p:spPr>
+          <a:xfrm>
+            <a:off x="1048081" y="5101490"/>
+            <a:ext cx="5874084" cy="368968"/>
+          </a:xfrm>
+          <a:prstGeom prst="rect">
+            <a:avLst/>
+          </a:prstGeom>
+          <a:solidFill>
+            <a:schemeClr val="accent6">
+              <a:alpha val="50000"/>
+            </a:schemeClr>
+          </a:solidFill>
+          <a:ln>
+            <a:noFill/>
+          </a:ln>
+        </p:spPr>
+        <p:style>
+          <a:lnRef idx="0">
+            <a:scrgbClr r="0" g="0" b="0"/>
+          </a:lnRef>
+          <a:fillRef idx="0">
+            <a:scrgbClr r="0" g="0" b="0"/>
+          </a:fillRef>
+          <a:effectRef idx="0">
+            <a:scrgbClr r="0" g="0" b="0"/>
+          </a:effectRef>
+          <a:fontRef idx="minor">
+            <a:schemeClr val="lt1"/>
+          </a:fontRef>
+        </p:style>
+        <p:txBody>
+          <a:bodyPr rtlCol="0" anchor="ctr"/>
+          <a:lstStyle/>
+          <a:p>
+            <a:pPr algn="ctr"/>
+            <a:endParaRPr lang="nl-NL"/>
+          </a:p>
+        </p:txBody>
+      </p:sp>
+      <p:sp>
+        <p:nvSpPr>
+          <p:cNvPr id="9" name="Rectangle 8">
+            <a:extLst>
+              <a:ext uri="{FF2B5EF4-FFF2-40B4-BE49-F238E27FC236}">
+                <a16:creationId xmlns:a16="http://schemas.microsoft.com/office/drawing/2014/main" id="{782961CC-91D0-4961-BB42-58A23F6CF0DA}"/>
+              </a:ext>
+            </a:extLst>
+          </p:cNvPr>
+          <p:cNvSpPr/>
+          <p:nvPr/>
+        </p:nvSpPr>
+        <p:spPr>
+          <a:xfrm>
+            <a:off x="1048081" y="1387542"/>
+            <a:ext cx="5874084" cy="368968"/>
+          </a:xfrm>
+          <a:prstGeom prst="rect">
+            <a:avLst/>
+          </a:prstGeom>
+          <a:solidFill>
+            <a:schemeClr val="accent1">
+              <a:alpha val="50000"/>
+            </a:schemeClr>
+          </a:solidFill>
+          <a:ln>
+            <a:noFill/>
+          </a:ln>
+        </p:spPr>
+        <p:style>
+          <a:lnRef idx="0">
+            <a:scrgbClr r="0" g="0" b="0"/>
+          </a:lnRef>
+          <a:fillRef idx="0">
+            <a:scrgbClr r="0" g="0" b="0"/>
+          </a:fillRef>
+          <a:effectRef idx="0">
+            <a:scrgbClr r="0" g="0" b="0"/>
+          </a:effectRef>
+          <a:fontRef idx="minor">
+            <a:schemeClr val="lt1"/>
+          </a:fontRef>
+        </p:style>
+        <p:txBody>
+          <a:bodyPr rtlCol="0" anchor="ctr"/>
+          <a:lstStyle/>
+          <a:p>
+            <a:pPr algn="ctr"/>
+            <a:endParaRPr lang="nl-NL"/>
+          </a:p>
+        </p:txBody>
+      </p:sp>
+      <p:sp>
+        <p:nvSpPr>
+          <p:cNvPr id="10" name="Rectangle 9">
+            <a:extLst>
+              <a:ext uri="{FF2B5EF4-FFF2-40B4-BE49-F238E27FC236}">
+                <a16:creationId xmlns:a16="http://schemas.microsoft.com/office/drawing/2014/main" id="{27307ECC-0C19-49E1-AAE5-B528C69F84A2}"/>
+              </a:ext>
+            </a:extLst>
+          </p:cNvPr>
+          <p:cNvSpPr/>
+          <p:nvPr/>
+        </p:nvSpPr>
+        <p:spPr>
+          <a:xfrm>
+            <a:off x="1048081" y="1756510"/>
+            <a:ext cx="5874084" cy="368968"/>
+          </a:xfrm>
+          <a:prstGeom prst="rect">
+            <a:avLst/>
+          </a:prstGeom>
+          <a:solidFill>
+            <a:schemeClr val="accent1">
+              <a:alpha val="50000"/>
+            </a:schemeClr>
+          </a:solidFill>
+          <a:ln>
+            <a:noFill/>
+          </a:ln>
+        </p:spPr>
+        <p:style>
+          <a:lnRef idx="0">
+            <a:scrgbClr r="0" g="0" b="0"/>
+          </a:lnRef>
+          <a:fillRef idx="0">
+            <a:scrgbClr r="0" g="0" b="0"/>
+          </a:fillRef>
+          <a:effectRef idx="0">
+            <a:scrgbClr r="0" g="0" b="0"/>
+          </a:effectRef>
+          <a:fontRef idx="minor">
+            <a:schemeClr val="lt1"/>
+          </a:fontRef>
+        </p:style>
+        <p:txBody>
+          <a:bodyPr rtlCol="0" anchor="ctr"/>
+          <a:lstStyle/>
+          <a:p>
+            <a:pPr algn="ctr"/>
+            <a:endParaRPr lang="nl-NL"/>
+          </a:p>
+        </p:txBody>
+      </p:sp>
+      <p:sp>
+        <p:nvSpPr>
+          <p:cNvPr id="11" name="Rectangle 10">
+            <a:extLst>
+              <a:ext uri="{FF2B5EF4-FFF2-40B4-BE49-F238E27FC236}">
+                <a16:creationId xmlns:a16="http://schemas.microsoft.com/office/drawing/2014/main" id="{24C1DF77-2156-41BA-B371-314FDAF17CB5}"/>
+              </a:ext>
+            </a:extLst>
+          </p:cNvPr>
+          <p:cNvSpPr/>
+          <p:nvPr/>
+        </p:nvSpPr>
+        <p:spPr>
+          <a:xfrm>
+            <a:off x="1048081" y="2125529"/>
+            <a:ext cx="5874084" cy="368968"/>
+          </a:xfrm>
+          <a:prstGeom prst="rect">
+            <a:avLst/>
+          </a:prstGeom>
+          <a:solidFill>
+            <a:schemeClr val="accent1">
+              <a:alpha val="50000"/>
+            </a:schemeClr>
+          </a:solidFill>
+          <a:ln>
+            <a:noFill/>
+          </a:ln>
+        </p:spPr>
+        <p:style>
+          <a:lnRef idx="0">
+            <a:scrgbClr r="0" g="0" b="0"/>
+          </a:lnRef>
+          <a:fillRef idx="0">
+            <a:scrgbClr r="0" g="0" b="0"/>
+          </a:fillRef>
+          <a:effectRef idx="0">
+            <a:scrgbClr r="0" g="0" b="0"/>
+          </a:effectRef>
+          <a:fontRef idx="minor">
+            <a:schemeClr val="lt1"/>
+          </a:fontRef>
+        </p:style>
+        <p:txBody>
+          <a:bodyPr rtlCol="0" anchor="ctr"/>
+          <a:lstStyle/>
+          <a:p>
+            <a:pPr algn="ctr"/>
+            <a:endParaRPr lang="nl-NL"/>
+          </a:p>
+        </p:txBody>
+      </p:sp>
+      <p:sp>
+        <p:nvSpPr>
+          <p:cNvPr id="12" name="Rectangle 11">
+            <a:extLst>
+              <a:ext uri="{FF2B5EF4-FFF2-40B4-BE49-F238E27FC236}">
+                <a16:creationId xmlns:a16="http://schemas.microsoft.com/office/drawing/2014/main" id="{89DCDDD4-1795-4D71-AAA2-7FCACA5AA2B7}"/>
+              </a:ext>
+            </a:extLst>
+          </p:cNvPr>
+          <p:cNvSpPr/>
+          <p:nvPr/>
+        </p:nvSpPr>
+        <p:spPr>
+          <a:xfrm>
+            <a:off x="1048081" y="2494531"/>
+            <a:ext cx="5874084" cy="368968"/>
+          </a:xfrm>
+          <a:prstGeom prst="rect">
+            <a:avLst/>
+          </a:prstGeom>
+          <a:solidFill>
+            <a:schemeClr val="accent1">
+              <a:alpha val="50000"/>
+            </a:schemeClr>
+          </a:solidFill>
+          <a:ln>
+            <a:noFill/>
+          </a:ln>
+        </p:spPr>
+        <p:style>
+          <a:lnRef idx="0">
+            <a:scrgbClr r="0" g="0" b="0"/>
+          </a:lnRef>
+          <a:fillRef idx="0">
+            <a:scrgbClr r="0" g="0" b="0"/>
+          </a:fillRef>
+          <a:effectRef idx="0">
+            <a:scrgbClr r="0" g="0" b="0"/>
+          </a:effectRef>
+          <a:fontRef idx="minor">
+            <a:schemeClr val="lt1"/>
+          </a:fontRef>
+        </p:style>
+        <p:txBody>
+          <a:bodyPr rtlCol="0" anchor="ctr"/>
+          <a:lstStyle/>
+          <a:p>
+            <a:pPr algn="ctr"/>
+            <a:endParaRPr lang="nl-NL"/>
+          </a:p>
+        </p:txBody>
+      </p:sp>
+      <p:sp>
+        <p:nvSpPr>
+          <p:cNvPr id="13" name="Rectangle 12">
+            <a:extLst>
+              <a:ext uri="{FF2B5EF4-FFF2-40B4-BE49-F238E27FC236}">
+                <a16:creationId xmlns:a16="http://schemas.microsoft.com/office/drawing/2014/main" id="{8E5593BE-D5E6-43BC-AC69-B5F0C659BFB0}"/>
+              </a:ext>
+            </a:extLst>
+          </p:cNvPr>
+          <p:cNvSpPr/>
+          <p:nvPr/>
+        </p:nvSpPr>
+        <p:spPr>
+          <a:xfrm>
+            <a:off x="1048081" y="3232483"/>
+            <a:ext cx="5874084" cy="393034"/>
+          </a:xfrm>
+          <a:prstGeom prst="rect">
+            <a:avLst/>
+          </a:prstGeom>
+          <a:solidFill>
+            <a:schemeClr val="accent1">
+              <a:alpha val="50000"/>
+            </a:schemeClr>
+          </a:solidFill>
+          <a:ln>
+            <a:noFill/>
+          </a:ln>
+        </p:spPr>
+        <p:style>
+          <a:lnRef idx="0">
+            <a:scrgbClr r="0" g="0" b="0"/>
+          </a:lnRef>
+          <a:fillRef idx="0">
+            <a:scrgbClr r="0" g="0" b="0"/>
+          </a:fillRef>
+          <a:effectRef idx="0">
+            <a:scrgbClr r="0" g="0" b="0"/>
+          </a:effectRef>
+          <a:fontRef idx="minor">
+            <a:schemeClr val="lt1"/>
+          </a:fontRef>
+        </p:style>
+        <p:txBody>
+          <a:bodyPr rtlCol="0" anchor="ctr"/>
+          <a:lstStyle/>
+          <a:p>
+            <a:pPr algn="ctr"/>
+            <a:endParaRPr lang="nl-NL"/>
+          </a:p>
+        </p:txBody>
+      </p:sp>
+      <p:sp>
+        <p:nvSpPr>
+          <p:cNvPr id="14" name="Rectangle 13">
+            <a:extLst>
+              <a:ext uri="{FF2B5EF4-FFF2-40B4-BE49-F238E27FC236}">
+                <a16:creationId xmlns:a16="http://schemas.microsoft.com/office/drawing/2014/main" id="{6D521C61-66F1-497B-AE24-312DF4DA282D}"/>
+              </a:ext>
+            </a:extLst>
+          </p:cNvPr>
+          <p:cNvSpPr/>
+          <p:nvPr/>
+        </p:nvSpPr>
+        <p:spPr>
+          <a:xfrm>
+            <a:off x="1048081" y="3982469"/>
+            <a:ext cx="5874084" cy="393034"/>
+          </a:xfrm>
+          <a:prstGeom prst="rect">
+            <a:avLst/>
+          </a:prstGeom>
+          <a:solidFill>
+            <a:schemeClr val="accent1">
+              <a:alpha val="50000"/>
+            </a:schemeClr>
+          </a:solidFill>
+          <a:ln>
+            <a:noFill/>
+          </a:ln>
+        </p:spPr>
+        <p:style>
+          <a:lnRef idx="0">
+            <a:scrgbClr r="0" g="0" b="0"/>
+          </a:lnRef>
+          <a:fillRef idx="0">
+            <a:scrgbClr r="0" g="0" b="0"/>
+          </a:fillRef>
+          <a:effectRef idx="0">
+            <a:scrgbClr r="0" g="0" b="0"/>
+          </a:effectRef>
+          <a:fontRef idx="minor">
+            <a:schemeClr val="lt1"/>
+          </a:fontRef>
+        </p:style>
+        <p:txBody>
+          <a:bodyPr rtlCol="0" anchor="ctr"/>
+          <a:lstStyle/>
+          <a:p>
+            <a:pPr algn="ctr"/>
+            <a:endParaRPr lang="nl-NL"/>
+          </a:p>
+        </p:txBody>
+      </p:sp>
+      <p:sp>
+        <p:nvSpPr>
+          <p:cNvPr id="15" name="Rectangle 14">
+            <a:extLst>
+              <a:ext uri="{FF2B5EF4-FFF2-40B4-BE49-F238E27FC236}">
+                <a16:creationId xmlns:a16="http://schemas.microsoft.com/office/drawing/2014/main" id="{749AD5D4-C117-4800-A408-D2DFD4CA907D}"/>
+              </a:ext>
+            </a:extLst>
+          </p:cNvPr>
+          <p:cNvSpPr/>
+          <p:nvPr/>
+        </p:nvSpPr>
+        <p:spPr>
+          <a:xfrm>
+            <a:off x="1048081" y="4708456"/>
+            <a:ext cx="5874084" cy="393034"/>
+          </a:xfrm>
+          <a:prstGeom prst="rect">
+            <a:avLst/>
+          </a:prstGeom>
+          <a:solidFill>
+            <a:schemeClr val="accent1">
+              <a:alpha val="50000"/>
+            </a:schemeClr>
+          </a:solidFill>
+          <a:ln>
+            <a:noFill/>
+          </a:ln>
+        </p:spPr>
+        <p:style>
+          <a:lnRef idx="0">
+            <a:scrgbClr r="0" g="0" b="0"/>
+          </a:lnRef>
+          <a:fillRef idx="0">
+            <a:scrgbClr r="0" g="0" b="0"/>
+          </a:fillRef>
+          <a:effectRef idx="0">
+            <a:scrgbClr r="0" g="0" b="0"/>
+          </a:effectRef>
+          <a:fontRef idx="minor">
+            <a:schemeClr val="lt1"/>
+          </a:fontRef>
+        </p:style>
+        <p:txBody>
+          <a:bodyPr rtlCol="0" anchor="ctr"/>
+          <a:lstStyle/>
+          <a:p>
+            <a:pPr algn="ctr"/>
+            <a:endParaRPr lang="nl-NL"/>
+          </a:p>
+        </p:txBody>
+      </p:sp>
+      <p:sp>
+        <p:nvSpPr>
+          <p:cNvPr id="16" name="Rectangle 15">
+            <a:extLst>
+              <a:ext uri="{FF2B5EF4-FFF2-40B4-BE49-F238E27FC236}">
+                <a16:creationId xmlns:a16="http://schemas.microsoft.com/office/drawing/2014/main" id="{6F265051-3DEC-4E0B-AD6E-61CD5452612F}"/>
+              </a:ext>
+            </a:extLst>
+          </p:cNvPr>
+          <p:cNvSpPr/>
+          <p:nvPr/>
+        </p:nvSpPr>
+        <p:spPr>
+          <a:xfrm>
+            <a:off x="1048081" y="5446426"/>
+            <a:ext cx="5874084" cy="393034"/>
+          </a:xfrm>
+          <a:prstGeom prst="rect">
+            <a:avLst/>
+          </a:prstGeom>
+          <a:solidFill>
+            <a:schemeClr val="accent1">
+              <a:alpha val="50000"/>
+            </a:schemeClr>
+          </a:solidFill>
+          <a:ln>
+            <a:noFill/>
+          </a:ln>
+        </p:spPr>
+        <p:style>
+          <a:lnRef idx="0">
+            <a:scrgbClr r="0" g="0" b="0"/>
+          </a:lnRef>
+          <a:fillRef idx="0">
+            <a:scrgbClr r="0" g="0" b="0"/>
+          </a:fillRef>
+          <a:effectRef idx="0">
+            <a:scrgbClr r="0" g="0" b="0"/>
+          </a:effectRef>
+          <a:fontRef idx="minor">
+            <a:schemeClr val="lt1"/>
+          </a:fontRef>
+        </p:style>
+        <p:txBody>
+          <a:bodyPr rtlCol="0" anchor="ctr"/>
+          <a:lstStyle/>
+          <a:p>
+            <a:pPr algn="ctr"/>
+            <a:endParaRPr lang="nl-NL"/>
+          </a:p>
+        </p:txBody>
+      </p:sp>
+      <p:cxnSp>
+        <p:nvCxnSpPr>
+          <p:cNvPr id="4" name="Straight Arrow Connector 3">
+            <a:extLst>
+              <a:ext uri="{FF2B5EF4-FFF2-40B4-BE49-F238E27FC236}">
+                <a16:creationId xmlns:a16="http://schemas.microsoft.com/office/drawing/2014/main" id="{4E0FF940-39AD-4449-8ABF-111815A5CB45}"/>
+              </a:ext>
+            </a:extLst>
+          </p:cNvPr>
+          <p:cNvCxnSpPr>
+            <a:cxnSpLocks/>
+            <a:stCxn id="17" idx="1"/>
+            <a:endCxn id="5" idx="3"/>
+          </p:cNvCxnSpPr>
+          <p:nvPr/>
+        </p:nvCxnSpPr>
+        <p:spPr>
+          <a:xfrm flipH="1">
+            <a:off x="6922165" y="3047817"/>
+            <a:ext cx="2021304" cy="183"/>
+          </a:xfrm>
+          <a:prstGeom prst="straightConnector1">
+            <a:avLst/>
+          </a:prstGeom>
+          <a:ln>
+            <a:tailEnd type="triangle"/>
+          </a:ln>
+        </p:spPr>
+        <p:style>
+          <a:lnRef idx="1">
+            <a:schemeClr val="accent6"/>
+          </a:lnRef>
+          <a:fillRef idx="0">
+            <a:schemeClr val="accent6"/>
+          </a:fillRef>
+          <a:effectRef idx="0">
+            <a:schemeClr val="accent6"/>
+          </a:effectRef>
+          <a:fontRef idx="minor">
+            <a:schemeClr val="tx1"/>
+          </a:fontRef>
+        </p:style>
+      </p:cxnSp>
+      <p:sp>
+        <p:nvSpPr>
+          <p:cNvPr id="17" name="TextBox 16">
+            <a:extLst>
+              <a:ext uri="{FF2B5EF4-FFF2-40B4-BE49-F238E27FC236}">
+                <a16:creationId xmlns:a16="http://schemas.microsoft.com/office/drawing/2014/main" id="{29DC9BDA-F7D8-4B2C-8431-93525FA96F49}"/>
+              </a:ext>
+            </a:extLst>
+          </p:cNvPr>
+          <p:cNvSpPr txBox="1"/>
+          <p:nvPr/>
+        </p:nvSpPr>
+        <p:spPr>
+          <a:xfrm>
+            <a:off x="8943469" y="2863151"/>
+            <a:ext cx="2181727" cy="369332"/>
+          </a:xfrm>
+          <a:prstGeom prst="rect">
+            <a:avLst/>
+          </a:prstGeom>
+        </p:spPr>
+        <p:style>
+          <a:lnRef idx="2">
+            <a:schemeClr val="accent6"/>
+          </a:lnRef>
+          <a:fillRef idx="1">
+            <a:schemeClr val="lt1"/>
+          </a:fillRef>
+          <a:effectRef idx="0">
+            <a:schemeClr val="accent6"/>
+          </a:effectRef>
+          <a:fontRef idx="minor">
+            <a:schemeClr val="dk1"/>
+          </a:fontRef>
+        </p:style>
+        <p:txBody>
+          <a:bodyPr wrap="square" rtlCol="0">
+            <a:spAutoFit/>
+          </a:bodyPr>
+          <a:lstStyle/>
+          <a:p>
+            <a:r>
+              <a:rPr lang="it-IT" dirty="0"/>
+              <a:t>Interpolate the data</a:t>
+            </a:r>
+            <a:endParaRPr lang="nl-NL" dirty="0"/>
+          </a:p>
+        </p:txBody>
+      </p:sp>
+      <p:cxnSp>
+        <p:nvCxnSpPr>
+          <p:cNvPr id="25" name="Connector: Elbow 24">
+            <a:extLst>
+              <a:ext uri="{FF2B5EF4-FFF2-40B4-BE49-F238E27FC236}">
+                <a16:creationId xmlns:a16="http://schemas.microsoft.com/office/drawing/2014/main" id="{E3452580-DECD-4053-A95B-2985B8A7F98D}"/>
+              </a:ext>
+            </a:extLst>
+          </p:cNvPr>
+          <p:cNvCxnSpPr>
+            <a:stCxn id="17" idx="1"/>
+            <a:endCxn id="6" idx="3"/>
+          </p:cNvCxnSpPr>
+          <p:nvPr/>
+        </p:nvCxnSpPr>
+        <p:spPr>
+          <a:xfrm rot="10800000" flipV="1">
+            <a:off x="6922165" y="3047817"/>
+            <a:ext cx="2021304" cy="762184"/>
+          </a:xfrm>
+          <a:prstGeom prst="bentConnector3">
+            <a:avLst/>
+          </a:prstGeom>
+          <a:ln>
+            <a:tailEnd type="triangle"/>
+          </a:ln>
+        </p:spPr>
+        <p:style>
+          <a:lnRef idx="1">
+            <a:schemeClr val="accent6"/>
+          </a:lnRef>
+          <a:fillRef idx="0">
+            <a:schemeClr val="accent6"/>
+          </a:fillRef>
+          <a:effectRef idx="0">
+            <a:schemeClr val="accent6"/>
+          </a:effectRef>
+          <a:fontRef idx="minor">
+            <a:schemeClr val="tx1"/>
+          </a:fontRef>
+        </p:style>
+      </p:cxnSp>
+      <p:cxnSp>
+        <p:nvCxnSpPr>
+          <p:cNvPr id="27" name="Connector: Elbow 26">
+            <a:extLst>
+              <a:ext uri="{FF2B5EF4-FFF2-40B4-BE49-F238E27FC236}">
+                <a16:creationId xmlns:a16="http://schemas.microsoft.com/office/drawing/2014/main" id="{3BC5F390-5870-4620-A2E1-8216FECE4532}"/>
+              </a:ext>
+            </a:extLst>
+          </p:cNvPr>
+          <p:cNvCxnSpPr>
+            <a:stCxn id="17" idx="1"/>
+            <a:endCxn id="7" idx="3"/>
+          </p:cNvCxnSpPr>
+          <p:nvPr/>
+        </p:nvCxnSpPr>
+        <p:spPr>
+          <a:xfrm rot="10800000" flipV="1">
+            <a:off x="6922165" y="3047816"/>
+            <a:ext cx="2021304" cy="1500187"/>
+          </a:xfrm>
+          <a:prstGeom prst="bentConnector3">
+            <a:avLst/>
+          </a:prstGeom>
+          <a:ln>
+            <a:tailEnd type="triangle"/>
+          </a:ln>
+        </p:spPr>
+        <p:style>
+          <a:lnRef idx="1">
+            <a:schemeClr val="accent6"/>
+          </a:lnRef>
+          <a:fillRef idx="0">
+            <a:schemeClr val="accent6"/>
+          </a:fillRef>
+          <a:effectRef idx="0">
+            <a:schemeClr val="accent6"/>
+          </a:effectRef>
+          <a:fontRef idx="minor">
+            <a:schemeClr val="tx1"/>
+          </a:fontRef>
+        </p:style>
+      </p:cxnSp>
+      <p:cxnSp>
+        <p:nvCxnSpPr>
+          <p:cNvPr id="29" name="Connector: Elbow 28">
+            <a:extLst>
+              <a:ext uri="{FF2B5EF4-FFF2-40B4-BE49-F238E27FC236}">
+                <a16:creationId xmlns:a16="http://schemas.microsoft.com/office/drawing/2014/main" id="{F71A9B99-C402-402F-B6D6-1175DC078108}"/>
+              </a:ext>
+            </a:extLst>
+          </p:cNvPr>
+          <p:cNvCxnSpPr>
+            <a:stCxn id="17" idx="1"/>
+            <a:endCxn id="8" idx="3"/>
+          </p:cNvCxnSpPr>
+          <p:nvPr/>
+        </p:nvCxnSpPr>
+        <p:spPr>
+          <a:xfrm rot="10800000" flipV="1">
+            <a:off x="6922165" y="3047816"/>
+            <a:ext cx="2021304" cy="2238157"/>
+          </a:xfrm>
+          <a:prstGeom prst="bentConnector3">
+            <a:avLst/>
+          </a:prstGeom>
+          <a:ln>
+            <a:tailEnd type="triangle"/>
+          </a:ln>
+        </p:spPr>
+        <p:style>
+          <a:lnRef idx="1">
+            <a:schemeClr val="accent6"/>
+          </a:lnRef>
+          <a:fillRef idx="0">
+            <a:schemeClr val="accent6"/>
+          </a:fillRef>
+          <a:effectRef idx="0">
+            <a:schemeClr val="accent6"/>
+          </a:effectRef>
+          <a:fontRef idx="minor">
+            <a:schemeClr val="tx1"/>
+          </a:fontRef>
+        </p:style>
+      </p:cxnSp>
+      <p:sp>
+        <p:nvSpPr>
+          <p:cNvPr id="30" name="TextBox 29">
+            <a:extLst>
+              <a:ext uri="{FF2B5EF4-FFF2-40B4-BE49-F238E27FC236}">
+                <a16:creationId xmlns:a16="http://schemas.microsoft.com/office/drawing/2014/main" id="{5B2C1735-87A1-42A0-94CD-065D6E3DB48C}"/>
+              </a:ext>
+            </a:extLst>
+          </p:cNvPr>
+          <p:cNvSpPr txBox="1"/>
+          <p:nvPr/>
+        </p:nvSpPr>
+        <p:spPr>
+          <a:xfrm>
+            <a:off x="8943468" y="1391423"/>
+            <a:ext cx="2181727" cy="369332"/>
+          </a:xfrm>
+          <a:prstGeom prst="rect">
+            <a:avLst/>
+          </a:prstGeom>
+        </p:spPr>
+        <p:style>
+          <a:lnRef idx="2">
+            <a:schemeClr val="accent1"/>
+          </a:lnRef>
+          <a:fillRef idx="1">
+            <a:schemeClr val="lt1"/>
+          </a:fillRef>
+          <a:effectRef idx="0">
+            <a:schemeClr val="accent1"/>
+          </a:effectRef>
+          <a:fontRef idx="minor">
+            <a:schemeClr val="dk1"/>
+          </a:fontRef>
+        </p:style>
+        <p:txBody>
+          <a:bodyPr wrap="square" rtlCol="0">
+            <a:spAutoFit/>
+          </a:bodyPr>
+          <a:lstStyle/>
+          <a:p>
+            <a:r>
+              <a:rPr lang="it-IT" dirty="0"/>
+              <a:t>Impute the data</a:t>
+            </a:r>
+            <a:endParaRPr lang="nl-NL" dirty="0"/>
+          </a:p>
+        </p:txBody>
+      </p:sp>
+      <p:cxnSp>
+        <p:nvCxnSpPr>
+          <p:cNvPr id="34" name="Straight Arrow Connector 33">
+            <a:extLst>
+              <a:ext uri="{FF2B5EF4-FFF2-40B4-BE49-F238E27FC236}">
+                <a16:creationId xmlns:a16="http://schemas.microsoft.com/office/drawing/2014/main" id="{58FD28A1-1CAB-4C27-B1AC-01D86CA0C541}"/>
+              </a:ext>
+            </a:extLst>
+          </p:cNvPr>
+          <p:cNvCxnSpPr>
+            <a:stCxn id="30" idx="1"/>
+            <a:endCxn id="9" idx="3"/>
+          </p:cNvCxnSpPr>
+          <p:nvPr/>
+        </p:nvCxnSpPr>
+        <p:spPr>
+          <a:xfrm flipH="1" flipV="1">
+            <a:off x="6922165" y="1572026"/>
+            <a:ext cx="2021303" cy="4063"/>
+          </a:xfrm>
+          <a:prstGeom prst="straightConnector1">
+            <a:avLst/>
+          </a:prstGeom>
+          <a:ln>
+            <a:tailEnd type="triangle"/>
+          </a:ln>
+        </p:spPr>
+        <p:style>
+          <a:lnRef idx="1">
+            <a:schemeClr val="accent1"/>
+          </a:lnRef>
+          <a:fillRef idx="0">
+            <a:schemeClr val="accent1"/>
+          </a:fillRef>
+          <a:effectRef idx="0">
+            <a:schemeClr val="accent1"/>
+          </a:effectRef>
+          <a:fontRef idx="minor">
+            <a:schemeClr val="tx1"/>
+          </a:fontRef>
+        </p:style>
+      </p:cxnSp>
+      <p:cxnSp>
+        <p:nvCxnSpPr>
+          <p:cNvPr id="37" name="Connector: Elbow 36">
+            <a:extLst>
+              <a:ext uri="{FF2B5EF4-FFF2-40B4-BE49-F238E27FC236}">
+                <a16:creationId xmlns:a16="http://schemas.microsoft.com/office/drawing/2014/main" id="{5E72941C-A0AA-4D4A-9704-784B74E19054}"/>
+              </a:ext>
+            </a:extLst>
+          </p:cNvPr>
+          <p:cNvCxnSpPr>
+            <a:stCxn id="30" idx="1"/>
+            <a:endCxn id="10" idx="3"/>
+          </p:cNvCxnSpPr>
+          <p:nvPr/>
+        </p:nvCxnSpPr>
+        <p:spPr>
+          <a:xfrm rot="10800000" flipV="1">
+            <a:off x="6922166" y="1576088"/>
+            <a:ext cx="2021303" cy="364905"/>
+          </a:xfrm>
+          <a:prstGeom prst="bentConnector3">
+            <a:avLst>
+              <a:gd name="adj1" fmla="val 27381"/>
+            </a:avLst>
+          </a:prstGeom>
+          <a:ln>
+            <a:tailEnd type="triangle"/>
+          </a:ln>
+        </p:spPr>
+        <p:style>
+          <a:lnRef idx="1">
+            <a:schemeClr val="accent1"/>
+          </a:lnRef>
+          <a:fillRef idx="0">
+            <a:schemeClr val="accent1"/>
+          </a:fillRef>
+          <a:effectRef idx="0">
+            <a:schemeClr val="accent1"/>
+          </a:effectRef>
+          <a:fontRef idx="minor">
+            <a:schemeClr val="tx1"/>
+          </a:fontRef>
+        </p:style>
+      </p:cxnSp>
+      <p:cxnSp>
+        <p:nvCxnSpPr>
+          <p:cNvPr id="39" name="Connector: Elbow 38">
+            <a:extLst>
+              <a:ext uri="{FF2B5EF4-FFF2-40B4-BE49-F238E27FC236}">
+                <a16:creationId xmlns:a16="http://schemas.microsoft.com/office/drawing/2014/main" id="{F2EEA8B7-446B-492D-B283-2719BDC4699E}"/>
+              </a:ext>
+            </a:extLst>
+          </p:cNvPr>
+          <p:cNvCxnSpPr>
+            <a:stCxn id="30" idx="1"/>
+            <a:endCxn id="11" idx="3"/>
+          </p:cNvCxnSpPr>
+          <p:nvPr/>
+        </p:nvCxnSpPr>
+        <p:spPr>
+          <a:xfrm rot="10800000" flipV="1">
+            <a:off x="6922166" y="1576089"/>
+            <a:ext cx="2021303" cy="733924"/>
+          </a:xfrm>
+          <a:prstGeom prst="bentConnector3">
+            <a:avLst>
+              <a:gd name="adj1" fmla="val 27381"/>
+            </a:avLst>
+          </a:prstGeom>
+          <a:ln>
+            <a:tailEnd type="triangle"/>
+          </a:ln>
+        </p:spPr>
+        <p:style>
+          <a:lnRef idx="1">
+            <a:schemeClr val="accent1"/>
+          </a:lnRef>
+          <a:fillRef idx="0">
+            <a:schemeClr val="accent1"/>
+          </a:fillRef>
+          <a:effectRef idx="0">
+            <a:schemeClr val="accent1"/>
+          </a:effectRef>
+          <a:fontRef idx="minor">
+            <a:schemeClr val="tx1"/>
+          </a:fontRef>
+        </p:style>
+      </p:cxnSp>
+      <p:cxnSp>
+        <p:nvCxnSpPr>
+          <p:cNvPr id="41" name="Connector: Elbow 40">
+            <a:extLst>
+              <a:ext uri="{FF2B5EF4-FFF2-40B4-BE49-F238E27FC236}">
+                <a16:creationId xmlns:a16="http://schemas.microsoft.com/office/drawing/2014/main" id="{AAA49802-CCEE-401A-A67A-DCAB21AD479F}"/>
+              </a:ext>
+            </a:extLst>
+          </p:cNvPr>
+          <p:cNvCxnSpPr>
+            <a:stCxn id="30" idx="1"/>
+            <a:endCxn id="12" idx="3"/>
+          </p:cNvCxnSpPr>
+          <p:nvPr/>
+        </p:nvCxnSpPr>
+        <p:spPr>
+          <a:xfrm rot="10800000" flipV="1">
+            <a:off x="6922166" y="1576089"/>
+            <a:ext cx="2021303" cy="1102926"/>
+          </a:xfrm>
+          <a:prstGeom prst="bentConnector3">
+            <a:avLst>
+              <a:gd name="adj1" fmla="val 27381"/>
+            </a:avLst>
+          </a:prstGeom>
+          <a:ln>
+            <a:tailEnd type="triangle"/>
+          </a:ln>
+        </p:spPr>
+        <p:style>
+          <a:lnRef idx="1">
+            <a:schemeClr val="accent1"/>
+          </a:lnRef>
+          <a:fillRef idx="0">
+            <a:schemeClr val="accent1"/>
+          </a:fillRef>
+          <a:effectRef idx="0">
+            <a:schemeClr val="accent1"/>
+          </a:effectRef>
+          <a:fontRef idx="minor">
+            <a:schemeClr val="tx1"/>
+          </a:fontRef>
+        </p:style>
+      </p:cxnSp>
+      <p:cxnSp>
+        <p:nvCxnSpPr>
+          <p:cNvPr id="43" name="Connector: Elbow 42">
+            <a:extLst>
+              <a:ext uri="{FF2B5EF4-FFF2-40B4-BE49-F238E27FC236}">
+                <a16:creationId xmlns:a16="http://schemas.microsoft.com/office/drawing/2014/main" id="{BAD846E9-613C-4D64-9871-751D24F7FCB9}"/>
+              </a:ext>
+            </a:extLst>
+          </p:cNvPr>
+          <p:cNvCxnSpPr>
+            <a:stCxn id="30" idx="1"/>
+            <a:endCxn id="3" idx="3"/>
+          </p:cNvCxnSpPr>
+          <p:nvPr/>
+        </p:nvCxnSpPr>
+        <p:spPr>
+          <a:xfrm rot="10800000" flipV="1">
+            <a:off x="6922166" y="1576088"/>
+            <a:ext cx="2021303" cy="1852911"/>
+          </a:xfrm>
+          <a:prstGeom prst="bentConnector3">
+            <a:avLst>
+              <a:gd name="adj1" fmla="val 27381"/>
+            </a:avLst>
+          </a:prstGeom>
+          <a:ln>
+            <a:tailEnd type="triangle"/>
+          </a:ln>
+        </p:spPr>
+        <p:style>
+          <a:lnRef idx="1">
+            <a:schemeClr val="accent1"/>
+          </a:lnRef>
+          <a:fillRef idx="0">
+            <a:schemeClr val="accent1"/>
+          </a:fillRef>
+          <a:effectRef idx="0">
+            <a:schemeClr val="accent1"/>
+          </a:effectRef>
+          <a:fontRef idx="minor">
+            <a:schemeClr val="tx1"/>
+          </a:fontRef>
+        </p:style>
+      </p:cxnSp>
+      <p:cxnSp>
+        <p:nvCxnSpPr>
+          <p:cNvPr id="45" name="Connector: Elbow 44">
+            <a:extLst>
+              <a:ext uri="{FF2B5EF4-FFF2-40B4-BE49-F238E27FC236}">
+                <a16:creationId xmlns:a16="http://schemas.microsoft.com/office/drawing/2014/main" id="{D41878C0-C417-42EF-937F-5D8EAC946940}"/>
+              </a:ext>
+            </a:extLst>
+          </p:cNvPr>
+          <p:cNvCxnSpPr>
+            <a:stCxn id="30" idx="1"/>
+            <a:endCxn id="14" idx="3"/>
+          </p:cNvCxnSpPr>
+          <p:nvPr/>
+        </p:nvCxnSpPr>
+        <p:spPr>
+          <a:xfrm rot="10800000" flipV="1">
+            <a:off x="6922166" y="1576088"/>
+            <a:ext cx="2021303" cy="2602897"/>
+          </a:xfrm>
+          <a:prstGeom prst="bentConnector3">
+            <a:avLst>
+              <a:gd name="adj1" fmla="val 27381"/>
+            </a:avLst>
+          </a:prstGeom>
+          <a:ln>
+            <a:tailEnd type="triangle"/>
+          </a:ln>
+        </p:spPr>
+        <p:style>
+          <a:lnRef idx="1">
+            <a:schemeClr val="accent1"/>
+          </a:lnRef>
+          <a:fillRef idx="0">
+            <a:schemeClr val="accent1"/>
+          </a:fillRef>
+          <a:effectRef idx="0">
+            <a:schemeClr val="accent1"/>
+          </a:effectRef>
+          <a:fontRef idx="minor">
+            <a:schemeClr val="tx1"/>
+          </a:fontRef>
+        </p:style>
+      </p:cxnSp>
+      <p:cxnSp>
+        <p:nvCxnSpPr>
+          <p:cNvPr id="52" name="Connector: Elbow 51">
+            <a:extLst>
+              <a:ext uri="{FF2B5EF4-FFF2-40B4-BE49-F238E27FC236}">
+                <a16:creationId xmlns:a16="http://schemas.microsoft.com/office/drawing/2014/main" id="{E5E577A5-5C4E-4314-B94E-C692A7C075E7}"/>
+              </a:ext>
+            </a:extLst>
+          </p:cNvPr>
+          <p:cNvCxnSpPr>
+            <a:stCxn id="30" idx="1"/>
+            <a:endCxn id="15" idx="3"/>
+          </p:cNvCxnSpPr>
+          <p:nvPr/>
+        </p:nvCxnSpPr>
+        <p:spPr>
+          <a:xfrm rot="10800000" flipV="1">
+            <a:off x="6922166" y="1576089"/>
+            <a:ext cx="2021303" cy="3328884"/>
+          </a:xfrm>
+          <a:prstGeom prst="bentConnector3">
+            <a:avLst>
+              <a:gd name="adj1" fmla="val 27381"/>
+            </a:avLst>
+          </a:prstGeom>
+          <a:ln>
+            <a:tailEnd type="triangle"/>
+          </a:ln>
+        </p:spPr>
+        <p:style>
+          <a:lnRef idx="1">
+            <a:schemeClr val="accent1"/>
+          </a:lnRef>
+          <a:fillRef idx="0">
+            <a:schemeClr val="accent1"/>
+          </a:fillRef>
+          <a:effectRef idx="0">
+            <a:schemeClr val="accent1"/>
+          </a:effectRef>
+          <a:fontRef idx="minor">
+            <a:schemeClr val="tx1"/>
+          </a:fontRef>
+        </p:style>
+      </p:cxnSp>
+      <p:cxnSp>
+        <p:nvCxnSpPr>
+          <p:cNvPr id="55" name="Connector: Elbow 54">
+            <a:extLst>
+              <a:ext uri="{FF2B5EF4-FFF2-40B4-BE49-F238E27FC236}">
+                <a16:creationId xmlns:a16="http://schemas.microsoft.com/office/drawing/2014/main" id="{AAE5AA8C-C949-4CBF-BBC4-FC9FB991F2B3}"/>
+              </a:ext>
+            </a:extLst>
+          </p:cNvPr>
+          <p:cNvCxnSpPr>
+            <a:stCxn id="30" idx="1"/>
+            <a:endCxn id="16" idx="3"/>
+          </p:cNvCxnSpPr>
+          <p:nvPr/>
+        </p:nvCxnSpPr>
+        <p:spPr>
+          <a:xfrm rot="10800000" flipV="1">
+            <a:off x="6922166" y="1576089"/>
+            <a:ext cx="2021303" cy="4066854"/>
+          </a:xfrm>
+          <a:prstGeom prst="bentConnector3">
+            <a:avLst>
+              <a:gd name="adj1" fmla="val 27381"/>
+            </a:avLst>
+          </a:prstGeom>
+          <a:ln>
+            <a:tailEnd type="triangle"/>
+          </a:ln>
+        </p:spPr>
+        <p:style>
+          <a:lnRef idx="1">
+            <a:schemeClr val="accent1"/>
+          </a:lnRef>
+          <a:fillRef idx="0">
+            <a:schemeClr val="accent1"/>
+          </a:fillRef>
+          <a:effectRef idx="0">
+            <a:schemeClr val="accent1"/>
+          </a:effectRef>
+          <a:fontRef idx="minor">
+            <a:schemeClr val="tx1"/>
+          </a:fontRef>
+        </p:style>
+      </p:cxnSp>
+      <p:sp>
+        <p:nvSpPr>
+          <p:cNvPr id="60" name="TextBox 59">
+            <a:extLst>
+              <a:ext uri="{FF2B5EF4-FFF2-40B4-BE49-F238E27FC236}">
+                <a16:creationId xmlns:a16="http://schemas.microsoft.com/office/drawing/2014/main" id="{7908D600-ADD3-4A71-8FD9-84F68F862A78}"/>
+              </a:ext>
+            </a:extLst>
+          </p:cNvPr>
+          <p:cNvSpPr txBox="1"/>
+          <p:nvPr/>
+        </p:nvSpPr>
+        <p:spPr>
+          <a:xfrm>
+            <a:off x="0" y="0"/>
+            <a:ext cx="4251158" cy="369332"/>
+          </a:xfrm>
+          <a:prstGeom prst="rect">
+            <a:avLst/>
+          </a:prstGeom>
+          <a:noFill/>
+        </p:spPr>
+        <p:txBody>
+          <a:bodyPr wrap="square" rtlCol="0">
+            <a:spAutoFit/>
+          </a:bodyPr>
+          <a:lstStyle/>
+          <a:p>
+            <a:r>
+              <a:rPr lang="it-IT" u="sng" dirty="0"/>
+              <a:t>Data processing – Selection values-based</a:t>
+            </a:r>
+            <a:endParaRPr lang="nl-NL" u="sng" dirty="0"/>
+          </a:p>
+        </p:txBody>
+      </p:sp>
     </p:spTree>
     <p:extLst>
       <p:ext uri="{BB962C8B-B14F-4D97-AF65-F5344CB8AC3E}">
-        <p14:creationId xmlns:p14="http://schemas.microsoft.com/office/powerpoint/2010/main" val="2416861179"/>
+        <p14:creationId xmlns:p14="http://schemas.microsoft.com/office/powerpoint/2010/main" val="3961398468"/>
       </p:ext>
     </p:extLst>
   </p:cSld>
@@ -6076,64 +9202,10 @@
           <a:chExt cx="0" cy="0"/>
         </a:xfrm>
       </p:grpSpPr>
-      <p:sp>
-        <p:nvSpPr>
-          <p:cNvPr id="2" name="Title 1">
-            <a:extLst>
-              <a:ext uri="{FF2B5EF4-FFF2-40B4-BE49-F238E27FC236}">
-                <a16:creationId xmlns:a16="http://schemas.microsoft.com/office/drawing/2014/main" id="{6D37F963-7349-4DE3-A960-EEBD333A4E61}"/>
-              </a:ext>
-            </a:extLst>
-          </p:cNvPr>
-          <p:cNvSpPr txBox="1">
-            <a:spLocks/>
-          </p:cNvSpPr>
-          <p:nvPr/>
-        </p:nvSpPr>
-        <p:spPr>
-          <a:xfrm>
-            <a:off x="1524000" y="2235200"/>
-            <a:ext cx="9144000" cy="2387600"/>
-          </a:xfrm>
-          <a:prstGeom prst="rect">
-            <a:avLst/>
-          </a:prstGeom>
-        </p:spPr>
-        <p:txBody>
-          <a:bodyPr anchor="ctr"/>
-          <a:lstStyle>
-            <a:lvl1pPr algn="l" defTabSz="914400" rtl="0" eaLnBrk="1" latinLnBrk="0" hangingPunct="1">
-              <a:lnSpc>
-                <a:spcPct val="90000"/>
-              </a:lnSpc>
-              <a:spcBef>
-                <a:spcPct val="0"/>
-              </a:spcBef>
-              <a:buNone/>
-              <a:defRPr sz="4400" kern="1200">
-                <a:solidFill>
-                  <a:schemeClr val="tx1"/>
-                </a:solidFill>
-                <a:latin typeface="+mj-lt"/>
-                <a:ea typeface="+mj-ea"/>
-                <a:cs typeface="+mj-cs"/>
-              </a:defRPr>
-            </a:lvl1pPr>
-          </a:lstStyle>
-          <a:p>
-            <a:pPr algn="ctr"/>
-            <a:r>
-              <a:rPr lang="it-IT" dirty="0"/>
-              <a:t>Blood Pressure Readings</a:t>
-            </a:r>
-            <a:endParaRPr lang="nl-NL" dirty="0"/>
-          </a:p>
-        </p:txBody>
-      </p:sp>
     </p:spTree>
     <p:extLst>
       <p:ext uri="{BB962C8B-B14F-4D97-AF65-F5344CB8AC3E}">
-        <p14:creationId xmlns:p14="http://schemas.microsoft.com/office/powerpoint/2010/main" val="603692568"/>
+        <p14:creationId xmlns:p14="http://schemas.microsoft.com/office/powerpoint/2010/main" val="1927968865"/>
       </p:ext>
     </p:extLst>
   </p:cSld>
@@ -6174,891 +9246,37 @@
       </p:grpSpPr>
       <p:sp>
         <p:nvSpPr>
-          <p:cNvPr id="2" name="TextBox 1">
-            <a:extLst>
-              <a:ext uri="{FF2B5EF4-FFF2-40B4-BE49-F238E27FC236}">
-                <a16:creationId xmlns:a16="http://schemas.microsoft.com/office/drawing/2014/main" id="{CC0200F0-ABFF-45F8-A6F5-9F8372AE5C7D}"/>
-              </a:ext>
-            </a:extLst>
-          </p:cNvPr>
-          <p:cNvSpPr txBox="1"/>
-          <p:nvPr/>
+          <p:cNvPr id="2" name="Title 1">
+            <a:extLst>
+              <a:ext uri="{FF2B5EF4-FFF2-40B4-BE49-F238E27FC236}">
+                <a16:creationId xmlns:a16="http://schemas.microsoft.com/office/drawing/2014/main" id="{317E23D3-032D-4C20-8F5B-1840BC892975}"/>
+              </a:ext>
+            </a:extLst>
+          </p:cNvPr>
+          <p:cNvSpPr>
+            <a:spLocks noGrp="1"/>
+          </p:cNvSpPr>
+          <p:nvPr>
+            <p:ph type="ctrTitle"/>
+          </p:nvPr>
         </p:nvSpPr>
-        <p:spPr>
-          <a:xfrm>
-            <a:off x="0" y="0"/>
-            <a:ext cx="4395537" cy="369332"/>
-          </a:xfrm>
-          <a:prstGeom prst="rect">
-            <a:avLst/>
-          </a:prstGeom>
-          <a:noFill/>
-        </p:spPr>
+        <p:spPr/>
         <p:txBody>
-          <a:bodyPr wrap="square" rtlCol="0">
-            <a:spAutoFit/>
-          </a:bodyPr>
+          <a:bodyPr/>
           <a:lstStyle/>
           <a:p>
-            <a:r>
-              <a:rPr lang="it-IT" u="sng" dirty="0"/>
-              <a:t>Blood Pressure Measurements - Outliers</a:t>
-            </a:r>
-            <a:endParaRPr lang="nl-NL" u="sng" dirty="0"/>
-          </a:p>
-        </p:txBody>
-      </p:sp>
-      <p:pic>
-        <p:nvPicPr>
-          <p:cNvPr id="4" name="Picture 3">
-            <a:extLst>
-              <a:ext uri="{FF2B5EF4-FFF2-40B4-BE49-F238E27FC236}">
-                <a16:creationId xmlns:a16="http://schemas.microsoft.com/office/drawing/2014/main" id="{B141D145-8AC1-45C7-8D61-50D4BD1CC9DF}"/>
-              </a:ext>
-            </a:extLst>
-          </p:cNvPr>
-          <p:cNvPicPr>
-            <a:picLocks noChangeAspect="1"/>
-          </p:cNvPicPr>
-          <p:nvPr/>
-        </p:nvPicPr>
-        <p:blipFill>
-          <a:blip r:embed="rId2">
-            <a:extLst>
-              <a:ext uri="{28A0092B-C50C-407E-A947-70E740481C1C}">
-                <a14:useLocalDpi xmlns:a14="http://schemas.microsoft.com/office/drawing/2010/main" val="0"/>
-              </a:ext>
-            </a:extLst>
-          </a:blip>
-          <a:stretch>
-            <a:fillRect/>
-          </a:stretch>
-        </p:blipFill>
-        <p:spPr>
-          <a:xfrm>
-            <a:off x="6186458" y="1957137"/>
-            <a:ext cx="6005542" cy="3649580"/>
-          </a:xfrm>
-          <a:prstGeom prst="rect">
-            <a:avLst/>
-          </a:prstGeom>
-        </p:spPr>
-      </p:pic>
-      <p:pic>
-        <p:nvPicPr>
-          <p:cNvPr id="8" name="Picture 7">
-            <a:extLst>
-              <a:ext uri="{FF2B5EF4-FFF2-40B4-BE49-F238E27FC236}">
-                <a16:creationId xmlns:a16="http://schemas.microsoft.com/office/drawing/2014/main" id="{B78D7C7E-C973-4558-835C-AE7A82ECC7EF}"/>
-              </a:ext>
-            </a:extLst>
-          </p:cNvPr>
-          <p:cNvPicPr>
-            <a:picLocks noChangeAspect="1"/>
-          </p:cNvPicPr>
-          <p:nvPr/>
-        </p:nvPicPr>
-        <p:blipFill>
-          <a:blip r:embed="rId3">
-            <a:extLst>
-              <a:ext uri="{28A0092B-C50C-407E-A947-70E740481C1C}">
-                <a14:useLocalDpi xmlns:a14="http://schemas.microsoft.com/office/drawing/2010/main" val="0"/>
-              </a:ext>
-            </a:extLst>
-          </a:blip>
-          <a:stretch>
-            <a:fillRect/>
-          </a:stretch>
-        </p:blipFill>
-        <p:spPr>
-          <a:xfrm>
-            <a:off x="14258" y="1957137"/>
-            <a:ext cx="6005542" cy="3649580"/>
-          </a:xfrm>
-          <a:prstGeom prst="rect">
-            <a:avLst/>
-          </a:prstGeom>
-        </p:spPr>
-      </p:pic>
-      <p:cxnSp>
-        <p:nvCxnSpPr>
-          <p:cNvPr id="10" name="Straight Arrow Connector 9">
-            <a:extLst>
-              <a:ext uri="{FF2B5EF4-FFF2-40B4-BE49-F238E27FC236}">
-                <a16:creationId xmlns:a16="http://schemas.microsoft.com/office/drawing/2014/main" id="{D2D21716-6BD7-4A50-9558-0D0C13985C2D}"/>
-              </a:ext>
-            </a:extLst>
-          </p:cNvPr>
-          <p:cNvCxnSpPr>
-            <a:cxnSpLocks/>
-            <a:stCxn id="13" idx="2"/>
-            <a:endCxn id="28" idx="7"/>
-          </p:cNvCxnSpPr>
-          <p:nvPr/>
-        </p:nvCxnSpPr>
-        <p:spPr>
-          <a:xfrm flipH="1">
-            <a:off x="1745476" y="1706964"/>
-            <a:ext cx="1271553" cy="618127"/>
-          </a:xfrm>
-          <a:prstGeom prst="straightConnector1">
-            <a:avLst/>
-          </a:prstGeom>
-          <a:ln>
-            <a:tailEnd type="triangle"/>
-          </a:ln>
-        </p:spPr>
-        <p:style>
-          <a:lnRef idx="3">
-            <a:schemeClr val="dk1"/>
-          </a:lnRef>
-          <a:fillRef idx="0">
-            <a:schemeClr val="dk1"/>
-          </a:fillRef>
-          <a:effectRef idx="2">
-            <a:schemeClr val="dk1"/>
-          </a:effectRef>
-          <a:fontRef idx="minor">
-            <a:schemeClr val="tx1"/>
-          </a:fontRef>
-        </p:style>
-      </p:cxnSp>
-      <p:cxnSp>
-        <p:nvCxnSpPr>
-          <p:cNvPr id="12" name="Straight Arrow Connector 11">
-            <a:extLst>
-              <a:ext uri="{FF2B5EF4-FFF2-40B4-BE49-F238E27FC236}">
-                <a16:creationId xmlns:a16="http://schemas.microsoft.com/office/drawing/2014/main" id="{8588E362-09B2-4B0B-BBDE-2EFEFF000F9B}"/>
-              </a:ext>
-            </a:extLst>
-          </p:cNvPr>
-          <p:cNvCxnSpPr>
-            <a:cxnSpLocks/>
-            <a:stCxn id="13" idx="2"/>
-            <a:endCxn id="30" idx="1"/>
-          </p:cNvCxnSpPr>
-          <p:nvPr/>
-        </p:nvCxnSpPr>
-        <p:spPr>
-          <a:xfrm>
-            <a:off x="3017029" y="1706964"/>
-            <a:ext cx="1532465" cy="797849"/>
-          </a:xfrm>
-          <a:prstGeom prst="straightConnector1">
-            <a:avLst/>
-          </a:prstGeom>
-          <a:ln>
-            <a:tailEnd type="triangle"/>
-          </a:ln>
-        </p:spPr>
-        <p:style>
-          <a:lnRef idx="3">
-            <a:schemeClr val="dk1"/>
-          </a:lnRef>
-          <a:fillRef idx="0">
-            <a:schemeClr val="dk1"/>
-          </a:fillRef>
-          <a:effectRef idx="2">
-            <a:schemeClr val="dk1"/>
-          </a:effectRef>
-          <a:fontRef idx="minor">
-            <a:schemeClr val="tx1"/>
-          </a:fontRef>
-        </p:style>
-      </p:cxnSp>
-      <p:sp>
-        <p:nvSpPr>
-          <p:cNvPr id="13" name="TextBox 12">
-            <a:extLst>
-              <a:ext uri="{FF2B5EF4-FFF2-40B4-BE49-F238E27FC236}">
-                <a16:creationId xmlns:a16="http://schemas.microsoft.com/office/drawing/2014/main" id="{6406D038-F66B-4859-9416-A23E4E34906D}"/>
-              </a:ext>
-            </a:extLst>
-          </p:cNvPr>
-          <p:cNvSpPr txBox="1"/>
-          <p:nvPr/>
-        </p:nvSpPr>
-        <p:spPr>
-          <a:xfrm>
-            <a:off x="1490242" y="1337632"/>
-            <a:ext cx="3053573" cy="369332"/>
-          </a:xfrm>
-          <a:prstGeom prst="rect">
-            <a:avLst/>
-          </a:prstGeom>
-          <a:noFill/>
-        </p:spPr>
-        <p:txBody>
-          <a:bodyPr wrap="square" rtlCol="0">
-            <a:spAutoFit/>
-          </a:bodyPr>
-          <a:lstStyle/>
-          <a:p>
-            <a:pPr algn="ctr"/>
             <a:r>
               <a:rPr lang="it-IT" dirty="0"/>
-              <a:t>Set to NaN... Imputation?</a:t>
+              <a:t>Medications</a:t>
             </a:r>
             <a:endParaRPr lang="nl-NL" dirty="0"/>
-          </a:p>
-        </p:txBody>
-      </p:sp>
-      <p:sp>
-        <p:nvSpPr>
-          <p:cNvPr id="14" name="TextBox 13">
-            <a:extLst>
-              <a:ext uri="{FF2B5EF4-FFF2-40B4-BE49-F238E27FC236}">
-                <a16:creationId xmlns:a16="http://schemas.microsoft.com/office/drawing/2014/main" id="{F98F7243-8499-4EB9-8006-57DE1509E5C3}"/>
-              </a:ext>
-            </a:extLst>
-          </p:cNvPr>
-          <p:cNvSpPr txBox="1"/>
-          <p:nvPr/>
-        </p:nvSpPr>
-        <p:spPr>
-          <a:xfrm>
-            <a:off x="8060265" y="1152966"/>
-            <a:ext cx="2229853" cy="369332"/>
-          </a:xfrm>
-          <a:prstGeom prst="rect">
-            <a:avLst/>
-          </a:prstGeom>
-          <a:noFill/>
-        </p:spPr>
-        <p:txBody>
-          <a:bodyPr wrap="square" rtlCol="0">
-            <a:spAutoFit/>
-          </a:bodyPr>
-          <a:lstStyle/>
-          <a:p>
-            <a:r>
-              <a:rPr lang="it-IT" dirty="0"/>
-              <a:t>Considered Outliers</a:t>
-            </a:r>
-            <a:endParaRPr lang="nl-NL" dirty="0"/>
-          </a:p>
-        </p:txBody>
-      </p:sp>
-      <p:cxnSp>
-        <p:nvCxnSpPr>
-          <p:cNvPr id="16" name="Straight Arrow Connector 15">
-            <a:extLst>
-              <a:ext uri="{FF2B5EF4-FFF2-40B4-BE49-F238E27FC236}">
-                <a16:creationId xmlns:a16="http://schemas.microsoft.com/office/drawing/2014/main" id="{EF44B29E-148B-46BB-A8FF-E530EC852232}"/>
-              </a:ext>
-            </a:extLst>
-          </p:cNvPr>
-          <p:cNvCxnSpPr>
-            <a:cxnSpLocks/>
-            <a:stCxn id="14" idx="2"/>
-          </p:cNvCxnSpPr>
-          <p:nvPr/>
-        </p:nvCxnSpPr>
-        <p:spPr>
-          <a:xfrm>
-            <a:off x="9175192" y="1522298"/>
-            <a:ext cx="1451811" cy="1108426"/>
-          </a:xfrm>
-          <a:prstGeom prst="straightConnector1">
-            <a:avLst/>
-          </a:prstGeom>
-          <a:ln>
-            <a:tailEnd type="triangle"/>
-          </a:ln>
-        </p:spPr>
-        <p:style>
-          <a:lnRef idx="3">
-            <a:schemeClr val="dk1"/>
-          </a:lnRef>
-          <a:fillRef idx="0">
-            <a:schemeClr val="dk1"/>
-          </a:fillRef>
-          <a:effectRef idx="2">
-            <a:schemeClr val="dk1"/>
-          </a:effectRef>
-          <a:fontRef idx="minor">
-            <a:schemeClr val="tx1"/>
-          </a:fontRef>
-        </p:style>
-      </p:cxnSp>
-      <p:cxnSp>
-        <p:nvCxnSpPr>
-          <p:cNvPr id="18" name="Straight Arrow Connector 17">
-            <a:extLst>
-              <a:ext uri="{FF2B5EF4-FFF2-40B4-BE49-F238E27FC236}">
-                <a16:creationId xmlns:a16="http://schemas.microsoft.com/office/drawing/2014/main" id="{496788B4-CBEF-49A2-B29F-3DAC5165F805}"/>
-              </a:ext>
-            </a:extLst>
-          </p:cNvPr>
-          <p:cNvCxnSpPr>
-            <a:cxnSpLocks/>
-            <a:stCxn id="14" idx="2"/>
-          </p:cNvCxnSpPr>
-          <p:nvPr/>
-        </p:nvCxnSpPr>
-        <p:spPr>
-          <a:xfrm flipH="1">
-            <a:off x="7955994" y="1522298"/>
-            <a:ext cx="1219198" cy="1212700"/>
-          </a:xfrm>
-          <a:prstGeom prst="straightConnector1">
-            <a:avLst/>
-          </a:prstGeom>
-          <a:ln>
-            <a:tailEnd type="triangle"/>
-          </a:ln>
-        </p:spPr>
-        <p:style>
-          <a:lnRef idx="3">
-            <a:schemeClr val="dk1"/>
-          </a:lnRef>
-          <a:fillRef idx="0">
-            <a:schemeClr val="dk1"/>
-          </a:fillRef>
-          <a:effectRef idx="2">
-            <a:schemeClr val="dk1"/>
-          </a:effectRef>
-          <a:fontRef idx="minor">
-            <a:schemeClr val="tx1"/>
-          </a:fontRef>
-        </p:style>
-      </p:cxnSp>
-      <p:sp>
-        <p:nvSpPr>
-          <p:cNvPr id="28" name="Oval 27">
-            <a:extLst>
-              <a:ext uri="{FF2B5EF4-FFF2-40B4-BE49-F238E27FC236}">
-                <a16:creationId xmlns:a16="http://schemas.microsoft.com/office/drawing/2014/main" id="{5D3BB183-A2CA-46A2-B9C3-ADAE972B9027}"/>
-              </a:ext>
-            </a:extLst>
-          </p:cNvPr>
-          <p:cNvSpPr/>
-          <p:nvPr/>
-        </p:nvSpPr>
-        <p:spPr>
-          <a:xfrm>
-            <a:off x="1444235" y="2056559"/>
-            <a:ext cx="352926" cy="1833652"/>
-          </a:xfrm>
-          <a:prstGeom prst="ellipse">
-            <a:avLst/>
-          </a:prstGeom>
-          <a:noFill/>
-          <a:ln w="9525" cap="flat" cmpd="sng" algn="ctr">
-            <a:solidFill>
-              <a:schemeClr val="accent1"/>
-            </a:solidFill>
-            <a:prstDash val="solid"/>
-            <a:round/>
-            <a:headEnd type="none" w="med" len="med"/>
-            <a:tailEnd type="none" w="med" len="med"/>
-          </a:ln>
-        </p:spPr>
-        <p:style>
-          <a:lnRef idx="0">
-            <a:scrgbClr r="0" g="0" b="0"/>
-          </a:lnRef>
-          <a:fillRef idx="0">
-            <a:scrgbClr r="0" g="0" b="0"/>
-          </a:fillRef>
-          <a:effectRef idx="0">
-            <a:scrgbClr r="0" g="0" b="0"/>
-          </a:effectRef>
-          <a:fontRef idx="minor">
-            <a:schemeClr val="accent1"/>
-          </a:fontRef>
-        </p:style>
-        <p:txBody>
-          <a:bodyPr rtlCol="0" anchor="ctr"/>
-          <a:lstStyle/>
-          <a:p>
-            <a:pPr algn="ctr"/>
-            <a:endParaRPr lang="nl-NL"/>
-          </a:p>
-        </p:txBody>
-      </p:sp>
-      <p:sp>
-        <p:nvSpPr>
-          <p:cNvPr id="30" name="Oval 29">
-            <a:extLst>
-              <a:ext uri="{FF2B5EF4-FFF2-40B4-BE49-F238E27FC236}">
-                <a16:creationId xmlns:a16="http://schemas.microsoft.com/office/drawing/2014/main" id="{DFC1405A-A1FB-4B7D-A729-6F366D78F1F5}"/>
-              </a:ext>
-            </a:extLst>
-          </p:cNvPr>
-          <p:cNvSpPr/>
-          <p:nvPr/>
-        </p:nvSpPr>
-        <p:spPr>
-          <a:xfrm>
-            <a:off x="4497809" y="2056558"/>
-            <a:ext cx="352926" cy="3060874"/>
-          </a:xfrm>
-          <a:prstGeom prst="ellipse">
-            <a:avLst/>
-          </a:prstGeom>
-          <a:noFill/>
-          <a:ln w="9525" cap="flat" cmpd="sng" algn="ctr">
-            <a:solidFill>
-              <a:schemeClr val="accent1"/>
-            </a:solidFill>
-            <a:prstDash val="solid"/>
-            <a:round/>
-            <a:headEnd type="none" w="med" len="med"/>
-            <a:tailEnd type="none" w="med" len="med"/>
-          </a:ln>
-        </p:spPr>
-        <p:style>
-          <a:lnRef idx="0">
-            <a:scrgbClr r="0" g="0" b="0"/>
-          </a:lnRef>
-          <a:fillRef idx="0">
-            <a:scrgbClr r="0" g="0" b="0"/>
-          </a:fillRef>
-          <a:effectRef idx="0">
-            <a:scrgbClr r="0" g="0" b="0"/>
-          </a:effectRef>
-          <a:fontRef idx="minor">
-            <a:schemeClr val="accent1"/>
-          </a:fontRef>
-        </p:style>
-        <p:txBody>
-          <a:bodyPr rtlCol="0" anchor="ctr"/>
-          <a:lstStyle/>
-          <a:p>
-            <a:pPr algn="ctr"/>
-            <a:endParaRPr lang="nl-NL"/>
-          </a:p>
-        </p:txBody>
-      </p:sp>
-      <p:cxnSp>
-        <p:nvCxnSpPr>
-          <p:cNvPr id="47" name="Straight Connector 46">
-            <a:extLst>
-              <a:ext uri="{FF2B5EF4-FFF2-40B4-BE49-F238E27FC236}">
-                <a16:creationId xmlns:a16="http://schemas.microsoft.com/office/drawing/2014/main" id="{BB77F60D-AA92-4E88-9238-C37C7FCED343}"/>
-              </a:ext>
-            </a:extLst>
-          </p:cNvPr>
-          <p:cNvCxnSpPr/>
-          <p:nvPr/>
-        </p:nvCxnSpPr>
-        <p:spPr>
-          <a:xfrm>
-            <a:off x="344905" y="4868779"/>
-            <a:ext cx="2334126" cy="0"/>
-          </a:xfrm>
-          <a:prstGeom prst="line">
-            <a:avLst/>
-          </a:prstGeom>
-        </p:spPr>
-        <p:style>
-          <a:lnRef idx="3">
-            <a:schemeClr val="accent2"/>
-          </a:lnRef>
-          <a:fillRef idx="0">
-            <a:schemeClr val="accent2"/>
-          </a:fillRef>
-          <a:effectRef idx="2">
-            <a:schemeClr val="accent2"/>
-          </a:effectRef>
-          <a:fontRef idx="minor">
-            <a:schemeClr val="tx1"/>
-          </a:fontRef>
-        </p:style>
-      </p:cxnSp>
-      <p:sp>
-        <p:nvSpPr>
-          <p:cNvPr id="48" name="TextBox 47">
-            <a:extLst>
-              <a:ext uri="{FF2B5EF4-FFF2-40B4-BE49-F238E27FC236}">
-                <a16:creationId xmlns:a16="http://schemas.microsoft.com/office/drawing/2014/main" id="{210063D6-AB12-4D1A-8DD9-1B596D004A2F}"/>
-              </a:ext>
-            </a:extLst>
-          </p:cNvPr>
-          <p:cNvSpPr txBox="1"/>
-          <p:nvPr/>
-        </p:nvSpPr>
-        <p:spPr>
-          <a:xfrm>
-            <a:off x="2310061" y="4588042"/>
-            <a:ext cx="471458" cy="369332"/>
-          </a:xfrm>
-          <a:prstGeom prst="rect">
-            <a:avLst/>
-          </a:prstGeom>
-          <a:noFill/>
-        </p:spPr>
-        <p:txBody>
-          <a:bodyPr wrap="square" rtlCol="0">
-            <a:spAutoFit/>
-          </a:bodyPr>
-          <a:lstStyle/>
-          <a:p>
-            <a:pPr algn="ctr"/>
-            <a:r>
-              <a:rPr lang="it-IT" dirty="0">
-                <a:solidFill>
-                  <a:schemeClr val="accent2"/>
-                </a:solidFill>
-              </a:rPr>
-              <a:t>20</a:t>
-            </a:r>
-            <a:endParaRPr lang="nl-NL" dirty="0">
-              <a:solidFill>
-                <a:schemeClr val="accent2"/>
-              </a:solidFill>
-            </a:endParaRPr>
-          </a:p>
-        </p:txBody>
-      </p:sp>
-      <p:cxnSp>
-        <p:nvCxnSpPr>
-          <p:cNvPr id="49" name="Straight Connector 48">
-            <a:extLst>
-              <a:ext uri="{FF2B5EF4-FFF2-40B4-BE49-F238E27FC236}">
-                <a16:creationId xmlns:a16="http://schemas.microsoft.com/office/drawing/2014/main" id="{0BD6F6C2-AA8F-4637-B394-6AEB8944AE70}"/>
-              </a:ext>
-            </a:extLst>
-          </p:cNvPr>
-          <p:cNvCxnSpPr/>
-          <p:nvPr/>
-        </p:nvCxnSpPr>
-        <p:spPr>
-          <a:xfrm>
-            <a:off x="351141" y="3890211"/>
-            <a:ext cx="2334126" cy="0"/>
-          </a:xfrm>
-          <a:prstGeom prst="line">
-            <a:avLst/>
-          </a:prstGeom>
-        </p:spPr>
-        <p:style>
-          <a:lnRef idx="3">
-            <a:schemeClr val="accent2"/>
-          </a:lnRef>
-          <a:fillRef idx="0">
-            <a:schemeClr val="accent2"/>
-          </a:fillRef>
-          <a:effectRef idx="2">
-            <a:schemeClr val="accent2"/>
-          </a:effectRef>
-          <a:fontRef idx="minor">
-            <a:schemeClr val="tx1"/>
-          </a:fontRef>
-        </p:style>
-      </p:cxnSp>
-      <p:sp>
-        <p:nvSpPr>
-          <p:cNvPr id="50" name="TextBox 49">
-            <a:extLst>
-              <a:ext uri="{FF2B5EF4-FFF2-40B4-BE49-F238E27FC236}">
-                <a16:creationId xmlns:a16="http://schemas.microsoft.com/office/drawing/2014/main" id="{DC3D5BFC-C2C7-4C0B-8CCD-B5F0EF51BD42}"/>
-              </a:ext>
-            </a:extLst>
-          </p:cNvPr>
-          <p:cNvSpPr txBox="1"/>
-          <p:nvPr/>
-        </p:nvSpPr>
-        <p:spPr>
-          <a:xfrm>
-            <a:off x="2181726" y="3609474"/>
-            <a:ext cx="606029" cy="369332"/>
-          </a:xfrm>
-          <a:prstGeom prst="rect">
-            <a:avLst/>
-          </a:prstGeom>
-          <a:noFill/>
-        </p:spPr>
-        <p:txBody>
-          <a:bodyPr wrap="square" rtlCol="0">
-            <a:spAutoFit/>
-          </a:bodyPr>
-          <a:lstStyle/>
-          <a:p>
-            <a:pPr algn="ctr"/>
-            <a:r>
-              <a:rPr lang="it-IT" dirty="0">
-                <a:solidFill>
-                  <a:schemeClr val="accent2"/>
-                </a:solidFill>
-              </a:rPr>
-              <a:t>300</a:t>
-            </a:r>
-            <a:endParaRPr lang="nl-NL" dirty="0">
-              <a:solidFill>
-                <a:schemeClr val="accent2"/>
-              </a:solidFill>
-            </a:endParaRPr>
-          </a:p>
-        </p:txBody>
-      </p:sp>
-      <p:cxnSp>
-        <p:nvCxnSpPr>
-          <p:cNvPr id="51" name="Straight Connector 50">
-            <a:extLst>
-              <a:ext uri="{FF2B5EF4-FFF2-40B4-BE49-F238E27FC236}">
-                <a16:creationId xmlns:a16="http://schemas.microsoft.com/office/drawing/2014/main" id="{44BEA9E8-8FA9-4EBF-ADB1-F15EF59D545A}"/>
-              </a:ext>
-            </a:extLst>
-          </p:cNvPr>
-          <p:cNvCxnSpPr/>
-          <p:nvPr/>
-        </p:nvCxnSpPr>
-        <p:spPr>
-          <a:xfrm>
-            <a:off x="3376752" y="5219798"/>
-            <a:ext cx="2334126" cy="0"/>
-          </a:xfrm>
-          <a:prstGeom prst="line">
-            <a:avLst/>
-          </a:prstGeom>
-        </p:spPr>
-        <p:style>
-          <a:lnRef idx="3">
-            <a:schemeClr val="accent2"/>
-          </a:lnRef>
-          <a:fillRef idx="0">
-            <a:schemeClr val="accent2"/>
-          </a:fillRef>
-          <a:effectRef idx="2">
-            <a:schemeClr val="accent2"/>
-          </a:effectRef>
-          <a:fontRef idx="minor">
-            <a:schemeClr val="tx1"/>
-          </a:fontRef>
-        </p:style>
-      </p:cxnSp>
-      <p:sp>
-        <p:nvSpPr>
-          <p:cNvPr id="52" name="TextBox 51">
-            <a:extLst>
-              <a:ext uri="{FF2B5EF4-FFF2-40B4-BE49-F238E27FC236}">
-                <a16:creationId xmlns:a16="http://schemas.microsoft.com/office/drawing/2014/main" id="{A166A446-0273-44CD-8582-FA57872289AC}"/>
-              </a:ext>
-            </a:extLst>
-          </p:cNvPr>
-          <p:cNvSpPr txBox="1"/>
-          <p:nvPr/>
-        </p:nvSpPr>
-        <p:spPr>
-          <a:xfrm>
-            <a:off x="5624542" y="5035132"/>
-            <a:ext cx="471458" cy="369332"/>
-          </a:xfrm>
-          <a:prstGeom prst="rect">
-            <a:avLst/>
-          </a:prstGeom>
-          <a:noFill/>
-        </p:spPr>
-        <p:txBody>
-          <a:bodyPr wrap="square" rtlCol="0">
-            <a:spAutoFit/>
-          </a:bodyPr>
-          <a:lstStyle/>
-          <a:p>
-            <a:pPr algn="ctr"/>
-            <a:r>
-              <a:rPr lang="it-IT" dirty="0">
-                <a:solidFill>
-                  <a:schemeClr val="accent2"/>
-                </a:solidFill>
-              </a:rPr>
-              <a:t>20</a:t>
-            </a:r>
-            <a:endParaRPr lang="nl-NL" dirty="0">
-              <a:solidFill>
-                <a:schemeClr val="accent2"/>
-              </a:solidFill>
-            </a:endParaRPr>
-          </a:p>
-        </p:txBody>
-      </p:sp>
-      <p:cxnSp>
-        <p:nvCxnSpPr>
-          <p:cNvPr id="53" name="Straight Connector 52">
-            <a:extLst>
-              <a:ext uri="{FF2B5EF4-FFF2-40B4-BE49-F238E27FC236}">
-                <a16:creationId xmlns:a16="http://schemas.microsoft.com/office/drawing/2014/main" id="{7EEC18CD-74D0-4FAF-8860-CE57F8D1CFA6}"/>
-              </a:ext>
-            </a:extLst>
-          </p:cNvPr>
-          <p:cNvCxnSpPr/>
-          <p:nvPr/>
-        </p:nvCxnSpPr>
-        <p:spPr>
-          <a:xfrm>
-            <a:off x="3382988" y="5112781"/>
-            <a:ext cx="2334126" cy="0"/>
-          </a:xfrm>
-          <a:prstGeom prst="line">
-            <a:avLst/>
-          </a:prstGeom>
-        </p:spPr>
-        <p:style>
-          <a:lnRef idx="3">
-            <a:schemeClr val="accent2"/>
-          </a:lnRef>
-          <a:fillRef idx="0">
-            <a:schemeClr val="accent2"/>
-          </a:fillRef>
-          <a:effectRef idx="2">
-            <a:schemeClr val="accent2"/>
-          </a:effectRef>
-          <a:fontRef idx="minor">
-            <a:schemeClr val="tx1"/>
-          </a:fontRef>
-        </p:style>
-      </p:cxnSp>
-      <p:sp>
-        <p:nvSpPr>
-          <p:cNvPr id="54" name="TextBox 53">
-            <a:extLst>
-              <a:ext uri="{FF2B5EF4-FFF2-40B4-BE49-F238E27FC236}">
-                <a16:creationId xmlns:a16="http://schemas.microsoft.com/office/drawing/2014/main" id="{79388AA8-1909-4DBD-B882-1AB427F2771E}"/>
-              </a:ext>
-            </a:extLst>
-          </p:cNvPr>
-          <p:cNvSpPr txBox="1"/>
-          <p:nvPr/>
-        </p:nvSpPr>
-        <p:spPr>
-          <a:xfrm>
-            <a:off x="5566173" y="4796958"/>
-            <a:ext cx="606029" cy="369332"/>
-          </a:xfrm>
-          <a:prstGeom prst="rect">
-            <a:avLst/>
-          </a:prstGeom>
-          <a:noFill/>
-        </p:spPr>
-        <p:txBody>
-          <a:bodyPr wrap="square" rtlCol="0">
-            <a:spAutoFit/>
-          </a:bodyPr>
-          <a:lstStyle/>
-          <a:p>
-            <a:pPr algn="ctr"/>
-            <a:r>
-              <a:rPr lang="it-IT" dirty="0">
-                <a:solidFill>
-                  <a:schemeClr val="accent2"/>
-                </a:solidFill>
-              </a:rPr>
-              <a:t>300</a:t>
-            </a:r>
-            <a:endParaRPr lang="nl-NL" dirty="0">
-              <a:solidFill>
-                <a:schemeClr val="accent2"/>
-              </a:solidFill>
-            </a:endParaRPr>
-          </a:p>
-        </p:txBody>
-      </p:sp>
-      <p:sp>
-        <p:nvSpPr>
-          <p:cNvPr id="55" name="Arrow: Right 54">
-            <a:extLst>
-              <a:ext uri="{FF2B5EF4-FFF2-40B4-BE49-F238E27FC236}">
-                <a16:creationId xmlns:a16="http://schemas.microsoft.com/office/drawing/2014/main" id="{CF186115-EF21-4E45-BA1A-F7A01B55B725}"/>
-              </a:ext>
-            </a:extLst>
-          </p:cNvPr>
-          <p:cNvSpPr/>
-          <p:nvPr/>
-        </p:nvSpPr>
-        <p:spPr>
-          <a:xfrm>
-            <a:off x="5654279" y="3364185"/>
-            <a:ext cx="1094205" cy="369332"/>
-          </a:xfrm>
-          <a:prstGeom prst="rightArrow">
-            <a:avLst/>
-          </a:prstGeom>
-        </p:spPr>
-        <p:style>
-          <a:lnRef idx="2">
-            <a:schemeClr val="accent2">
-              <a:shade val="50000"/>
-            </a:schemeClr>
-          </a:lnRef>
-          <a:fillRef idx="1">
-            <a:schemeClr val="accent2"/>
-          </a:fillRef>
-          <a:effectRef idx="0">
-            <a:schemeClr val="accent2"/>
-          </a:effectRef>
-          <a:fontRef idx="minor">
-            <a:schemeClr val="lt1"/>
-          </a:fontRef>
-        </p:style>
-        <p:txBody>
-          <a:bodyPr rtlCol="0" anchor="ctr"/>
-          <a:lstStyle/>
-          <a:p>
-            <a:pPr algn="ctr"/>
-            <a:endParaRPr lang="nl-NL"/>
-          </a:p>
-        </p:txBody>
-      </p:sp>
-      <p:sp>
-        <p:nvSpPr>
-          <p:cNvPr id="57" name="Oval 56">
-            <a:extLst>
-              <a:ext uri="{FF2B5EF4-FFF2-40B4-BE49-F238E27FC236}">
-                <a16:creationId xmlns:a16="http://schemas.microsoft.com/office/drawing/2014/main" id="{F946F1D0-67D6-45FC-AEDB-3F765ADB089F}"/>
-              </a:ext>
-            </a:extLst>
-          </p:cNvPr>
-          <p:cNvSpPr/>
-          <p:nvPr/>
-        </p:nvSpPr>
-        <p:spPr>
-          <a:xfrm>
-            <a:off x="1444235" y="4886330"/>
-            <a:ext cx="352926" cy="473862"/>
-          </a:xfrm>
-          <a:prstGeom prst="ellipse">
-            <a:avLst/>
-          </a:prstGeom>
-          <a:noFill/>
-          <a:ln w="9525" cap="flat" cmpd="sng" algn="ctr">
-            <a:solidFill>
-              <a:schemeClr val="accent1"/>
-            </a:solidFill>
-            <a:prstDash val="solid"/>
-            <a:round/>
-            <a:headEnd type="none" w="med" len="med"/>
-            <a:tailEnd type="none" w="med" len="med"/>
-          </a:ln>
-        </p:spPr>
-        <p:style>
-          <a:lnRef idx="0">
-            <a:scrgbClr r="0" g="0" b="0"/>
-          </a:lnRef>
-          <a:fillRef idx="0">
-            <a:scrgbClr r="0" g="0" b="0"/>
-          </a:fillRef>
-          <a:effectRef idx="0">
-            <a:scrgbClr r="0" g="0" b="0"/>
-          </a:effectRef>
-          <a:fontRef idx="minor">
-            <a:schemeClr val="accent1"/>
-          </a:fontRef>
-        </p:style>
-        <p:txBody>
-          <a:bodyPr rtlCol="0" anchor="ctr"/>
-          <a:lstStyle/>
-          <a:p>
-            <a:pPr algn="ctr"/>
-            <a:endParaRPr lang="nl-NL"/>
           </a:p>
         </p:txBody>
       </p:sp>
     </p:spTree>
     <p:extLst>
       <p:ext uri="{BB962C8B-B14F-4D97-AF65-F5344CB8AC3E}">
-        <p14:creationId xmlns:p14="http://schemas.microsoft.com/office/powerpoint/2010/main" val="2308014033"/>
+        <p14:creationId xmlns:p14="http://schemas.microsoft.com/office/powerpoint/2010/main" val="4127856213"/>
       </p:ext>
     </p:extLst>
   </p:cSld>
@@ -7097,149 +9315,10 @@
           <a:chExt cx="0" cy="0"/>
         </a:xfrm>
       </p:grpSpPr>
-      <p:pic>
-        <p:nvPicPr>
-          <p:cNvPr id="2" name="Picture 1">
-            <a:extLst>
-              <a:ext uri="{FF2B5EF4-FFF2-40B4-BE49-F238E27FC236}">
-                <a16:creationId xmlns:a16="http://schemas.microsoft.com/office/drawing/2014/main" id="{EFCA64AE-70C0-46DC-9DE0-3BD016877CF0}"/>
-              </a:ext>
-            </a:extLst>
-          </p:cNvPr>
-          <p:cNvPicPr>
-            <a:picLocks noChangeAspect="1"/>
-          </p:cNvPicPr>
-          <p:nvPr/>
-        </p:nvPicPr>
-        <p:blipFill>
-          <a:blip r:embed="rId2">
-            <a:extLst>
-              <a:ext uri="{28A0092B-C50C-407E-A947-70E740481C1C}">
-                <a14:useLocalDpi xmlns:a14="http://schemas.microsoft.com/office/drawing/2010/main" val="0"/>
-              </a:ext>
-            </a:extLst>
-          </a:blip>
-          <a:stretch>
-            <a:fillRect/>
-          </a:stretch>
-        </p:blipFill>
-        <p:spPr>
-          <a:xfrm>
-            <a:off x="2471014" y="2125452"/>
-            <a:ext cx="7249970" cy="4405816"/>
-          </a:xfrm>
-          <a:prstGeom prst="rect">
-            <a:avLst/>
-          </a:prstGeom>
-        </p:spPr>
-      </p:pic>
-      <p:sp>
-        <p:nvSpPr>
-          <p:cNvPr id="3" name="TextBox 2">
-            <a:extLst>
-              <a:ext uri="{FF2B5EF4-FFF2-40B4-BE49-F238E27FC236}">
-                <a16:creationId xmlns:a16="http://schemas.microsoft.com/office/drawing/2014/main" id="{669BC41E-7A1B-450B-AE56-57E23EBB368B}"/>
-              </a:ext>
-            </a:extLst>
-          </p:cNvPr>
-          <p:cNvSpPr txBox="1"/>
-          <p:nvPr/>
-        </p:nvSpPr>
-        <p:spPr>
-          <a:xfrm>
-            <a:off x="0" y="0"/>
-            <a:ext cx="4395537" cy="369332"/>
-          </a:xfrm>
-          <a:prstGeom prst="rect">
-            <a:avLst/>
-          </a:prstGeom>
-          <a:noFill/>
-        </p:spPr>
-        <p:txBody>
-          <a:bodyPr wrap="square" rtlCol="0">
-            <a:spAutoFit/>
-          </a:bodyPr>
-          <a:lstStyle/>
-          <a:p>
-            <a:r>
-              <a:rPr lang="it-IT" u="sng" dirty="0"/>
-              <a:t>Blood Pressure Measurements - Outliers</a:t>
-            </a:r>
-            <a:endParaRPr lang="nl-NL" u="sng" dirty="0"/>
-          </a:p>
-        </p:txBody>
-      </p:sp>
-      <p:sp>
-        <p:nvSpPr>
-          <p:cNvPr id="4" name="TextBox 3">
-            <a:extLst>
-              <a:ext uri="{FF2B5EF4-FFF2-40B4-BE49-F238E27FC236}">
-                <a16:creationId xmlns:a16="http://schemas.microsoft.com/office/drawing/2014/main" id="{9D83727A-AEE6-4E01-9A07-195FB57628BF}"/>
-              </a:ext>
-            </a:extLst>
-          </p:cNvPr>
-          <p:cNvSpPr txBox="1"/>
-          <p:nvPr/>
-        </p:nvSpPr>
-        <p:spPr>
-          <a:xfrm>
-            <a:off x="2709862" y="811929"/>
-            <a:ext cx="6772275" cy="1200329"/>
-          </a:xfrm>
-          <a:prstGeom prst="rect">
-            <a:avLst/>
-          </a:prstGeom>
-          <a:noFill/>
-        </p:spPr>
-        <p:txBody>
-          <a:bodyPr wrap="square" rtlCol="0">
-            <a:spAutoFit/>
-          </a:bodyPr>
-          <a:lstStyle/>
-          <a:p>
-            <a:pPr algn="ctr"/>
-            <a:r>
-              <a:rPr lang="it-IT" sz="2400" dirty="0"/>
-              <a:t>Replaced with Mean value </a:t>
-            </a:r>
-          </a:p>
-          <a:p>
-            <a:pPr algn="ctr"/>
-            <a:r>
-              <a:rPr lang="it-IT" sz="2400" dirty="0"/>
-              <a:t>if </a:t>
-            </a:r>
-          </a:p>
-          <a:p>
-            <a:pPr algn="ctr"/>
-            <a:r>
-              <a:rPr lang="it-IT" sz="2400" dirty="0"/>
-              <a:t>|BP</a:t>
-            </a:r>
-            <a:r>
-              <a:rPr lang="it-IT" sz="2400" baseline="-25000" dirty="0"/>
-              <a:t>Sys,Dia</a:t>
-            </a:r>
-            <a:r>
-              <a:rPr lang="it-IT" sz="2400" dirty="0"/>
-              <a:t>| </a:t>
-            </a:r>
-            <a:r>
-              <a:rPr lang="nl-NL" sz="2400" dirty="0"/>
-              <a:t>&lt; 3·</a:t>
-            </a:r>
-            <a:r>
-              <a:rPr lang="el-GR" sz="2400" dirty="0"/>
-              <a:t>σ</a:t>
-            </a:r>
-            <a:endParaRPr lang="nl-NL" sz="2400" dirty="0"/>
-          </a:p>
-        </p:txBody>
-      </p:sp>
     </p:spTree>
     <p:extLst>
       <p:ext uri="{BB962C8B-B14F-4D97-AF65-F5344CB8AC3E}">
-        <p14:creationId xmlns:p14="http://schemas.microsoft.com/office/powerpoint/2010/main" val="483860090"/>
+        <p14:creationId xmlns:p14="http://schemas.microsoft.com/office/powerpoint/2010/main" val="2469779366"/>
       </p:ext>
     </p:extLst>
   </p:cSld>
@@ -7283,6 +9362,1346 @@
           <p:cNvPr id="2" name="Title 1">
             <a:extLst>
               <a:ext uri="{FF2B5EF4-FFF2-40B4-BE49-F238E27FC236}">
+                <a16:creationId xmlns:a16="http://schemas.microsoft.com/office/drawing/2014/main" id="{6D37F963-7349-4DE3-A960-EEBD333A4E61}"/>
+              </a:ext>
+            </a:extLst>
+          </p:cNvPr>
+          <p:cNvSpPr txBox="1">
+            <a:spLocks/>
+          </p:cNvSpPr>
+          <p:nvPr/>
+        </p:nvSpPr>
+        <p:spPr>
+          <a:xfrm>
+            <a:off x="1524000" y="2235200"/>
+            <a:ext cx="9144000" cy="2387600"/>
+          </a:xfrm>
+          <a:prstGeom prst="rect">
+            <a:avLst/>
+          </a:prstGeom>
+        </p:spPr>
+        <p:txBody>
+          <a:bodyPr anchor="ctr"/>
+          <a:lstStyle>
+            <a:lvl1pPr algn="l" defTabSz="914400" rtl="0" eaLnBrk="1" latinLnBrk="0" hangingPunct="1">
+              <a:lnSpc>
+                <a:spcPct val="90000"/>
+              </a:lnSpc>
+              <a:spcBef>
+                <a:spcPct val="0"/>
+              </a:spcBef>
+              <a:buNone/>
+              <a:defRPr sz="4400" kern="1200">
+                <a:solidFill>
+                  <a:schemeClr val="tx1"/>
+                </a:solidFill>
+                <a:latin typeface="+mj-lt"/>
+                <a:ea typeface="+mj-ea"/>
+                <a:cs typeface="+mj-cs"/>
+              </a:defRPr>
+            </a:lvl1pPr>
+          </a:lstStyle>
+          <a:p>
+            <a:pPr algn="ctr"/>
+            <a:r>
+              <a:rPr lang="it-IT" dirty="0"/>
+              <a:t>Metingen</a:t>
+            </a:r>
+            <a:endParaRPr lang="nl-NL" dirty="0"/>
+          </a:p>
+        </p:txBody>
+      </p:sp>
+    </p:spTree>
+    <p:extLst>
+      <p:ext uri="{BB962C8B-B14F-4D97-AF65-F5344CB8AC3E}">
+        <p14:creationId xmlns:p14="http://schemas.microsoft.com/office/powerpoint/2010/main" val="1644673165"/>
+      </p:ext>
+    </p:extLst>
+  </p:cSld>
+  <p:clrMapOvr>
+    <a:masterClrMapping/>
+  </p:clrMapOvr>
+  <mc:AlternateContent xmlns:mc="http://schemas.openxmlformats.org/markup-compatibility/2006" xmlns:p159="http://schemas.microsoft.com/office/powerpoint/2015/09/main">
+    <mc:Choice Requires="p159">
+      <p:transition spd="slow">
+        <p159:morph option="byObject"/>
+      </p:transition>
+    </mc:Choice>
+    <mc:Fallback xmlns="">
+      <p:transition spd="slow">
+        <p:fade/>
+      </p:transition>
+    </mc:Fallback>
+  </mc:AlternateContent>
+</p:sld>
+</file>
+
+<file path=ppt/slides/slide25.xml><?xml version="1.0" encoding="utf-8"?>
+<p:sld xmlns:a="http://schemas.openxmlformats.org/drawingml/2006/main" xmlns:r="http://schemas.openxmlformats.org/officeDocument/2006/relationships" xmlns:p="http://schemas.openxmlformats.org/presentationml/2006/main">
+  <p:cSld>
+    <p:spTree>
+      <p:nvGrpSpPr>
+        <p:cNvPr id="1" name=""/>
+        <p:cNvGrpSpPr/>
+        <p:nvPr/>
+      </p:nvGrpSpPr>
+      <p:grpSpPr>
+        <a:xfrm>
+          <a:off x="0" y="0"/>
+          <a:ext cx="0" cy="0"/>
+          <a:chOff x="0" y="0"/>
+          <a:chExt cx="0" cy="0"/>
+        </a:xfrm>
+      </p:grpSpPr>
+    </p:spTree>
+    <p:extLst>
+      <p:ext uri="{BB962C8B-B14F-4D97-AF65-F5344CB8AC3E}">
+        <p14:creationId xmlns:p14="http://schemas.microsoft.com/office/powerpoint/2010/main" val="2416861179"/>
+      </p:ext>
+    </p:extLst>
+  </p:cSld>
+  <p:clrMapOvr>
+    <a:masterClrMapping/>
+  </p:clrMapOvr>
+  <mc:AlternateContent xmlns:mc="http://schemas.openxmlformats.org/markup-compatibility/2006" xmlns:p159="http://schemas.microsoft.com/office/powerpoint/2015/09/main">
+    <mc:Choice Requires="p159">
+      <p:transition spd="slow">
+        <p159:morph option="byObject"/>
+      </p:transition>
+    </mc:Choice>
+    <mc:Fallback xmlns="">
+      <p:transition spd="slow">
+        <p:fade/>
+      </p:transition>
+    </mc:Fallback>
+  </mc:AlternateContent>
+</p:sld>
+</file>
+
+<file path=ppt/slides/slide26.xml><?xml version="1.0" encoding="utf-8"?>
+<p:sld xmlns:a="http://schemas.openxmlformats.org/drawingml/2006/main" xmlns:r="http://schemas.openxmlformats.org/officeDocument/2006/relationships" xmlns:p="http://schemas.openxmlformats.org/presentationml/2006/main">
+  <p:cSld>
+    <p:spTree>
+      <p:nvGrpSpPr>
+        <p:cNvPr id="1" name=""/>
+        <p:cNvGrpSpPr/>
+        <p:nvPr/>
+      </p:nvGrpSpPr>
+      <p:grpSpPr>
+        <a:xfrm>
+          <a:off x="0" y="0"/>
+          <a:ext cx="0" cy="0"/>
+          <a:chOff x="0" y="0"/>
+          <a:chExt cx="0" cy="0"/>
+        </a:xfrm>
+      </p:grpSpPr>
+      <p:sp>
+        <p:nvSpPr>
+          <p:cNvPr id="2" name="Title 1">
+            <a:extLst>
+              <a:ext uri="{FF2B5EF4-FFF2-40B4-BE49-F238E27FC236}">
+                <a16:creationId xmlns:a16="http://schemas.microsoft.com/office/drawing/2014/main" id="{6D37F963-7349-4DE3-A960-EEBD333A4E61}"/>
+              </a:ext>
+            </a:extLst>
+          </p:cNvPr>
+          <p:cNvSpPr txBox="1">
+            <a:spLocks/>
+          </p:cNvSpPr>
+          <p:nvPr/>
+        </p:nvSpPr>
+        <p:spPr>
+          <a:xfrm>
+            <a:off x="1524000" y="2235200"/>
+            <a:ext cx="9144000" cy="2387600"/>
+          </a:xfrm>
+          <a:prstGeom prst="rect">
+            <a:avLst/>
+          </a:prstGeom>
+        </p:spPr>
+        <p:txBody>
+          <a:bodyPr anchor="ctr"/>
+          <a:lstStyle>
+            <a:lvl1pPr algn="l" defTabSz="914400" rtl="0" eaLnBrk="1" latinLnBrk="0" hangingPunct="1">
+              <a:lnSpc>
+                <a:spcPct val="90000"/>
+              </a:lnSpc>
+              <a:spcBef>
+                <a:spcPct val="0"/>
+              </a:spcBef>
+              <a:buNone/>
+              <a:defRPr sz="4400" kern="1200">
+                <a:solidFill>
+                  <a:schemeClr val="tx1"/>
+                </a:solidFill>
+                <a:latin typeface="+mj-lt"/>
+                <a:ea typeface="+mj-ea"/>
+                <a:cs typeface="+mj-cs"/>
+              </a:defRPr>
+            </a:lvl1pPr>
+          </a:lstStyle>
+          <a:p>
+            <a:pPr algn="ctr"/>
+            <a:r>
+              <a:rPr lang="it-IT" dirty="0"/>
+              <a:t>Blood Pressure Readings</a:t>
+            </a:r>
+            <a:endParaRPr lang="nl-NL" dirty="0"/>
+          </a:p>
+        </p:txBody>
+      </p:sp>
+    </p:spTree>
+    <p:extLst>
+      <p:ext uri="{BB962C8B-B14F-4D97-AF65-F5344CB8AC3E}">
+        <p14:creationId xmlns:p14="http://schemas.microsoft.com/office/powerpoint/2010/main" val="603692568"/>
+      </p:ext>
+    </p:extLst>
+  </p:cSld>
+  <p:clrMapOvr>
+    <a:masterClrMapping/>
+  </p:clrMapOvr>
+  <mc:AlternateContent xmlns:mc="http://schemas.openxmlformats.org/markup-compatibility/2006" xmlns:p159="http://schemas.microsoft.com/office/powerpoint/2015/09/main">
+    <mc:Choice Requires="p159">
+      <p:transition spd="slow">
+        <p159:morph option="byObject"/>
+      </p:transition>
+    </mc:Choice>
+    <mc:Fallback xmlns="">
+      <p:transition spd="slow">
+        <p:fade/>
+      </p:transition>
+    </mc:Fallback>
+  </mc:AlternateContent>
+</p:sld>
+</file>
+
+<file path=ppt/slides/slide27.xml><?xml version="1.0" encoding="utf-8"?>
+<p:sld xmlns:a="http://schemas.openxmlformats.org/drawingml/2006/main" xmlns:r="http://schemas.openxmlformats.org/officeDocument/2006/relationships" xmlns:p="http://schemas.openxmlformats.org/presentationml/2006/main">
+  <p:cSld>
+    <p:spTree>
+      <p:nvGrpSpPr>
+        <p:cNvPr id="1" name=""/>
+        <p:cNvGrpSpPr/>
+        <p:nvPr/>
+      </p:nvGrpSpPr>
+      <p:grpSpPr>
+        <a:xfrm>
+          <a:off x="0" y="0"/>
+          <a:ext cx="0" cy="0"/>
+          <a:chOff x="0" y="0"/>
+          <a:chExt cx="0" cy="0"/>
+        </a:xfrm>
+      </p:grpSpPr>
+      <p:sp>
+        <p:nvSpPr>
+          <p:cNvPr id="2" name="TextBox 1">
+            <a:extLst>
+              <a:ext uri="{FF2B5EF4-FFF2-40B4-BE49-F238E27FC236}">
+                <a16:creationId xmlns:a16="http://schemas.microsoft.com/office/drawing/2014/main" id="{CC0200F0-ABFF-45F8-A6F5-9F8372AE5C7D}"/>
+              </a:ext>
+            </a:extLst>
+          </p:cNvPr>
+          <p:cNvSpPr txBox="1"/>
+          <p:nvPr/>
+        </p:nvSpPr>
+        <p:spPr>
+          <a:xfrm>
+            <a:off x="0" y="0"/>
+            <a:ext cx="4395537" cy="369332"/>
+          </a:xfrm>
+          <a:prstGeom prst="rect">
+            <a:avLst/>
+          </a:prstGeom>
+          <a:noFill/>
+        </p:spPr>
+        <p:txBody>
+          <a:bodyPr wrap="square" rtlCol="0">
+            <a:spAutoFit/>
+          </a:bodyPr>
+          <a:lstStyle/>
+          <a:p>
+            <a:r>
+              <a:rPr lang="it-IT" u="sng" dirty="0"/>
+              <a:t>Blood Pressure Measurements - Outliers</a:t>
+            </a:r>
+            <a:endParaRPr lang="nl-NL" u="sng" dirty="0"/>
+          </a:p>
+        </p:txBody>
+      </p:sp>
+      <p:pic>
+        <p:nvPicPr>
+          <p:cNvPr id="4" name="Picture 3">
+            <a:extLst>
+              <a:ext uri="{FF2B5EF4-FFF2-40B4-BE49-F238E27FC236}">
+                <a16:creationId xmlns:a16="http://schemas.microsoft.com/office/drawing/2014/main" id="{B141D145-8AC1-45C7-8D61-50D4BD1CC9DF}"/>
+              </a:ext>
+            </a:extLst>
+          </p:cNvPr>
+          <p:cNvPicPr>
+            <a:picLocks noChangeAspect="1"/>
+          </p:cNvPicPr>
+          <p:nvPr/>
+        </p:nvPicPr>
+        <p:blipFill>
+          <a:blip r:embed="rId2">
+            <a:extLst>
+              <a:ext uri="{28A0092B-C50C-407E-A947-70E740481C1C}">
+                <a14:useLocalDpi xmlns:a14="http://schemas.microsoft.com/office/drawing/2010/main" val="0"/>
+              </a:ext>
+            </a:extLst>
+          </a:blip>
+          <a:stretch>
+            <a:fillRect/>
+          </a:stretch>
+        </p:blipFill>
+        <p:spPr>
+          <a:xfrm>
+            <a:off x="6186458" y="1957137"/>
+            <a:ext cx="6005542" cy="3649580"/>
+          </a:xfrm>
+          <a:prstGeom prst="rect">
+            <a:avLst/>
+          </a:prstGeom>
+        </p:spPr>
+      </p:pic>
+      <p:pic>
+        <p:nvPicPr>
+          <p:cNvPr id="8" name="Picture 7">
+            <a:extLst>
+              <a:ext uri="{FF2B5EF4-FFF2-40B4-BE49-F238E27FC236}">
+                <a16:creationId xmlns:a16="http://schemas.microsoft.com/office/drawing/2014/main" id="{B78D7C7E-C973-4558-835C-AE7A82ECC7EF}"/>
+              </a:ext>
+            </a:extLst>
+          </p:cNvPr>
+          <p:cNvPicPr>
+            <a:picLocks noChangeAspect="1"/>
+          </p:cNvPicPr>
+          <p:nvPr/>
+        </p:nvPicPr>
+        <p:blipFill>
+          <a:blip r:embed="rId3">
+            <a:extLst>
+              <a:ext uri="{28A0092B-C50C-407E-A947-70E740481C1C}">
+                <a14:useLocalDpi xmlns:a14="http://schemas.microsoft.com/office/drawing/2010/main" val="0"/>
+              </a:ext>
+            </a:extLst>
+          </a:blip>
+          <a:stretch>
+            <a:fillRect/>
+          </a:stretch>
+        </p:blipFill>
+        <p:spPr>
+          <a:xfrm>
+            <a:off x="14258" y="1957137"/>
+            <a:ext cx="6005542" cy="3649580"/>
+          </a:xfrm>
+          <a:prstGeom prst="rect">
+            <a:avLst/>
+          </a:prstGeom>
+        </p:spPr>
+      </p:pic>
+      <p:cxnSp>
+        <p:nvCxnSpPr>
+          <p:cNvPr id="10" name="Straight Arrow Connector 9">
+            <a:extLst>
+              <a:ext uri="{FF2B5EF4-FFF2-40B4-BE49-F238E27FC236}">
+                <a16:creationId xmlns:a16="http://schemas.microsoft.com/office/drawing/2014/main" id="{D2D21716-6BD7-4A50-9558-0D0C13985C2D}"/>
+              </a:ext>
+            </a:extLst>
+          </p:cNvPr>
+          <p:cNvCxnSpPr>
+            <a:cxnSpLocks/>
+            <a:stCxn id="13" idx="2"/>
+            <a:endCxn id="28" idx="7"/>
+          </p:cNvCxnSpPr>
+          <p:nvPr/>
+        </p:nvCxnSpPr>
+        <p:spPr>
+          <a:xfrm flipH="1">
+            <a:off x="1745476" y="1706964"/>
+            <a:ext cx="1271553" cy="618127"/>
+          </a:xfrm>
+          <a:prstGeom prst="straightConnector1">
+            <a:avLst/>
+          </a:prstGeom>
+          <a:ln>
+            <a:tailEnd type="triangle"/>
+          </a:ln>
+        </p:spPr>
+        <p:style>
+          <a:lnRef idx="3">
+            <a:schemeClr val="dk1"/>
+          </a:lnRef>
+          <a:fillRef idx="0">
+            <a:schemeClr val="dk1"/>
+          </a:fillRef>
+          <a:effectRef idx="2">
+            <a:schemeClr val="dk1"/>
+          </a:effectRef>
+          <a:fontRef idx="minor">
+            <a:schemeClr val="tx1"/>
+          </a:fontRef>
+        </p:style>
+      </p:cxnSp>
+      <p:cxnSp>
+        <p:nvCxnSpPr>
+          <p:cNvPr id="12" name="Straight Arrow Connector 11">
+            <a:extLst>
+              <a:ext uri="{FF2B5EF4-FFF2-40B4-BE49-F238E27FC236}">
+                <a16:creationId xmlns:a16="http://schemas.microsoft.com/office/drawing/2014/main" id="{8588E362-09B2-4B0B-BBDE-2EFEFF000F9B}"/>
+              </a:ext>
+            </a:extLst>
+          </p:cNvPr>
+          <p:cNvCxnSpPr>
+            <a:cxnSpLocks/>
+            <a:stCxn id="13" idx="2"/>
+            <a:endCxn id="30" idx="1"/>
+          </p:cNvCxnSpPr>
+          <p:nvPr/>
+        </p:nvCxnSpPr>
+        <p:spPr>
+          <a:xfrm>
+            <a:off x="3017029" y="1706964"/>
+            <a:ext cx="1532465" cy="797849"/>
+          </a:xfrm>
+          <a:prstGeom prst="straightConnector1">
+            <a:avLst/>
+          </a:prstGeom>
+          <a:ln>
+            <a:tailEnd type="triangle"/>
+          </a:ln>
+        </p:spPr>
+        <p:style>
+          <a:lnRef idx="3">
+            <a:schemeClr val="dk1"/>
+          </a:lnRef>
+          <a:fillRef idx="0">
+            <a:schemeClr val="dk1"/>
+          </a:fillRef>
+          <a:effectRef idx="2">
+            <a:schemeClr val="dk1"/>
+          </a:effectRef>
+          <a:fontRef idx="minor">
+            <a:schemeClr val="tx1"/>
+          </a:fontRef>
+        </p:style>
+      </p:cxnSp>
+      <p:sp>
+        <p:nvSpPr>
+          <p:cNvPr id="13" name="TextBox 12">
+            <a:extLst>
+              <a:ext uri="{FF2B5EF4-FFF2-40B4-BE49-F238E27FC236}">
+                <a16:creationId xmlns:a16="http://schemas.microsoft.com/office/drawing/2014/main" id="{6406D038-F66B-4859-9416-A23E4E34906D}"/>
+              </a:ext>
+            </a:extLst>
+          </p:cNvPr>
+          <p:cNvSpPr txBox="1"/>
+          <p:nvPr/>
+        </p:nvSpPr>
+        <p:spPr>
+          <a:xfrm>
+            <a:off x="1490242" y="1337632"/>
+            <a:ext cx="3053573" cy="369332"/>
+          </a:xfrm>
+          <a:prstGeom prst="rect">
+            <a:avLst/>
+          </a:prstGeom>
+          <a:noFill/>
+        </p:spPr>
+        <p:txBody>
+          <a:bodyPr wrap="square" rtlCol="0">
+            <a:spAutoFit/>
+          </a:bodyPr>
+          <a:lstStyle/>
+          <a:p>
+            <a:pPr algn="ctr"/>
+            <a:r>
+              <a:rPr lang="it-IT" dirty="0"/>
+              <a:t>Set to NaN... Imputation?</a:t>
+            </a:r>
+            <a:endParaRPr lang="nl-NL" dirty="0"/>
+          </a:p>
+        </p:txBody>
+      </p:sp>
+      <p:sp>
+        <p:nvSpPr>
+          <p:cNvPr id="14" name="TextBox 13">
+            <a:extLst>
+              <a:ext uri="{FF2B5EF4-FFF2-40B4-BE49-F238E27FC236}">
+                <a16:creationId xmlns:a16="http://schemas.microsoft.com/office/drawing/2014/main" id="{F98F7243-8499-4EB9-8006-57DE1509E5C3}"/>
+              </a:ext>
+            </a:extLst>
+          </p:cNvPr>
+          <p:cNvSpPr txBox="1"/>
+          <p:nvPr/>
+        </p:nvSpPr>
+        <p:spPr>
+          <a:xfrm>
+            <a:off x="8060265" y="1152966"/>
+            <a:ext cx="2229853" cy="369332"/>
+          </a:xfrm>
+          <a:prstGeom prst="rect">
+            <a:avLst/>
+          </a:prstGeom>
+          <a:noFill/>
+        </p:spPr>
+        <p:txBody>
+          <a:bodyPr wrap="square" rtlCol="0">
+            <a:spAutoFit/>
+          </a:bodyPr>
+          <a:lstStyle/>
+          <a:p>
+            <a:r>
+              <a:rPr lang="it-IT" dirty="0"/>
+              <a:t>Considered Outliers</a:t>
+            </a:r>
+            <a:endParaRPr lang="nl-NL" dirty="0"/>
+          </a:p>
+        </p:txBody>
+      </p:sp>
+      <p:cxnSp>
+        <p:nvCxnSpPr>
+          <p:cNvPr id="16" name="Straight Arrow Connector 15">
+            <a:extLst>
+              <a:ext uri="{FF2B5EF4-FFF2-40B4-BE49-F238E27FC236}">
+                <a16:creationId xmlns:a16="http://schemas.microsoft.com/office/drawing/2014/main" id="{EF44B29E-148B-46BB-A8FF-E530EC852232}"/>
+              </a:ext>
+            </a:extLst>
+          </p:cNvPr>
+          <p:cNvCxnSpPr>
+            <a:cxnSpLocks/>
+            <a:stCxn id="14" idx="2"/>
+          </p:cNvCxnSpPr>
+          <p:nvPr/>
+        </p:nvCxnSpPr>
+        <p:spPr>
+          <a:xfrm>
+            <a:off x="9175192" y="1522298"/>
+            <a:ext cx="1451811" cy="1108426"/>
+          </a:xfrm>
+          <a:prstGeom prst="straightConnector1">
+            <a:avLst/>
+          </a:prstGeom>
+          <a:ln>
+            <a:tailEnd type="triangle"/>
+          </a:ln>
+        </p:spPr>
+        <p:style>
+          <a:lnRef idx="3">
+            <a:schemeClr val="dk1"/>
+          </a:lnRef>
+          <a:fillRef idx="0">
+            <a:schemeClr val="dk1"/>
+          </a:fillRef>
+          <a:effectRef idx="2">
+            <a:schemeClr val="dk1"/>
+          </a:effectRef>
+          <a:fontRef idx="minor">
+            <a:schemeClr val="tx1"/>
+          </a:fontRef>
+        </p:style>
+      </p:cxnSp>
+      <p:cxnSp>
+        <p:nvCxnSpPr>
+          <p:cNvPr id="18" name="Straight Arrow Connector 17">
+            <a:extLst>
+              <a:ext uri="{FF2B5EF4-FFF2-40B4-BE49-F238E27FC236}">
+                <a16:creationId xmlns:a16="http://schemas.microsoft.com/office/drawing/2014/main" id="{496788B4-CBEF-49A2-B29F-3DAC5165F805}"/>
+              </a:ext>
+            </a:extLst>
+          </p:cNvPr>
+          <p:cNvCxnSpPr>
+            <a:cxnSpLocks/>
+            <a:stCxn id="14" idx="2"/>
+          </p:cNvCxnSpPr>
+          <p:nvPr/>
+        </p:nvCxnSpPr>
+        <p:spPr>
+          <a:xfrm flipH="1">
+            <a:off x="7955994" y="1522298"/>
+            <a:ext cx="1219198" cy="1212700"/>
+          </a:xfrm>
+          <a:prstGeom prst="straightConnector1">
+            <a:avLst/>
+          </a:prstGeom>
+          <a:ln>
+            <a:tailEnd type="triangle"/>
+          </a:ln>
+        </p:spPr>
+        <p:style>
+          <a:lnRef idx="3">
+            <a:schemeClr val="dk1"/>
+          </a:lnRef>
+          <a:fillRef idx="0">
+            <a:schemeClr val="dk1"/>
+          </a:fillRef>
+          <a:effectRef idx="2">
+            <a:schemeClr val="dk1"/>
+          </a:effectRef>
+          <a:fontRef idx="minor">
+            <a:schemeClr val="tx1"/>
+          </a:fontRef>
+        </p:style>
+      </p:cxnSp>
+      <p:sp>
+        <p:nvSpPr>
+          <p:cNvPr id="28" name="Oval 27">
+            <a:extLst>
+              <a:ext uri="{FF2B5EF4-FFF2-40B4-BE49-F238E27FC236}">
+                <a16:creationId xmlns:a16="http://schemas.microsoft.com/office/drawing/2014/main" id="{5D3BB183-A2CA-46A2-B9C3-ADAE972B9027}"/>
+              </a:ext>
+            </a:extLst>
+          </p:cNvPr>
+          <p:cNvSpPr/>
+          <p:nvPr/>
+        </p:nvSpPr>
+        <p:spPr>
+          <a:xfrm>
+            <a:off x="1444235" y="2056559"/>
+            <a:ext cx="352926" cy="1833652"/>
+          </a:xfrm>
+          <a:prstGeom prst="ellipse">
+            <a:avLst/>
+          </a:prstGeom>
+          <a:noFill/>
+          <a:ln w="9525" cap="flat" cmpd="sng" algn="ctr">
+            <a:solidFill>
+              <a:schemeClr val="accent1"/>
+            </a:solidFill>
+            <a:prstDash val="solid"/>
+            <a:round/>
+            <a:headEnd type="none" w="med" len="med"/>
+            <a:tailEnd type="none" w="med" len="med"/>
+          </a:ln>
+        </p:spPr>
+        <p:style>
+          <a:lnRef idx="0">
+            <a:scrgbClr r="0" g="0" b="0"/>
+          </a:lnRef>
+          <a:fillRef idx="0">
+            <a:scrgbClr r="0" g="0" b="0"/>
+          </a:fillRef>
+          <a:effectRef idx="0">
+            <a:scrgbClr r="0" g="0" b="0"/>
+          </a:effectRef>
+          <a:fontRef idx="minor">
+            <a:schemeClr val="accent1"/>
+          </a:fontRef>
+        </p:style>
+        <p:txBody>
+          <a:bodyPr rtlCol="0" anchor="ctr"/>
+          <a:lstStyle/>
+          <a:p>
+            <a:pPr algn="ctr"/>
+            <a:endParaRPr lang="nl-NL"/>
+          </a:p>
+        </p:txBody>
+      </p:sp>
+      <p:sp>
+        <p:nvSpPr>
+          <p:cNvPr id="30" name="Oval 29">
+            <a:extLst>
+              <a:ext uri="{FF2B5EF4-FFF2-40B4-BE49-F238E27FC236}">
+                <a16:creationId xmlns:a16="http://schemas.microsoft.com/office/drawing/2014/main" id="{DFC1405A-A1FB-4B7D-A729-6F366D78F1F5}"/>
+              </a:ext>
+            </a:extLst>
+          </p:cNvPr>
+          <p:cNvSpPr/>
+          <p:nvPr/>
+        </p:nvSpPr>
+        <p:spPr>
+          <a:xfrm>
+            <a:off x="4497809" y="2056558"/>
+            <a:ext cx="352926" cy="3060874"/>
+          </a:xfrm>
+          <a:prstGeom prst="ellipse">
+            <a:avLst/>
+          </a:prstGeom>
+          <a:noFill/>
+          <a:ln w="9525" cap="flat" cmpd="sng" algn="ctr">
+            <a:solidFill>
+              <a:schemeClr val="accent1"/>
+            </a:solidFill>
+            <a:prstDash val="solid"/>
+            <a:round/>
+            <a:headEnd type="none" w="med" len="med"/>
+            <a:tailEnd type="none" w="med" len="med"/>
+          </a:ln>
+        </p:spPr>
+        <p:style>
+          <a:lnRef idx="0">
+            <a:scrgbClr r="0" g="0" b="0"/>
+          </a:lnRef>
+          <a:fillRef idx="0">
+            <a:scrgbClr r="0" g="0" b="0"/>
+          </a:fillRef>
+          <a:effectRef idx="0">
+            <a:scrgbClr r="0" g="0" b="0"/>
+          </a:effectRef>
+          <a:fontRef idx="minor">
+            <a:schemeClr val="accent1"/>
+          </a:fontRef>
+        </p:style>
+        <p:txBody>
+          <a:bodyPr rtlCol="0" anchor="ctr"/>
+          <a:lstStyle/>
+          <a:p>
+            <a:pPr algn="ctr"/>
+            <a:endParaRPr lang="nl-NL"/>
+          </a:p>
+        </p:txBody>
+      </p:sp>
+      <p:cxnSp>
+        <p:nvCxnSpPr>
+          <p:cNvPr id="47" name="Straight Connector 46">
+            <a:extLst>
+              <a:ext uri="{FF2B5EF4-FFF2-40B4-BE49-F238E27FC236}">
+                <a16:creationId xmlns:a16="http://schemas.microsoft.com/office/drawing/2014/main" id="{BB77F60D-AA92-4E88-9238-C37C7FCED343}"/>
+              </a:ext>
+            </a:extLst>
+          </p:cNvPr>
+          <p:cNvCxnSpPr/>
+          <p:nvPr/>
+        </p:nvCxnSpPr>
+        <p:spPr>
+          <a:xfrm>
+            <a:off x="344905" y="4868779"/>
+            <a:ext cx="2334126" cy="0"/>
+          </a:xfrm>
+          <a:prstGeom prst="line">
+            <a:avLst/>
+          </a:prstGeom>
+        </p:spPr>
+        <p:style>
+          <a:lnRef idx="3">
+            <a:schemeClr val="accent2"/>
+          </a:lnRef>
+          <a:fillRef idx="0">
+            <a:schemeClr val="accent2"/>
+          </a:fillRef>
+          <a:effectRef idx="2">
+            <a:schemeClr val="accent2"/>
+          </a:effectRef>
+          <a:fontRef idx="minor">
+            <a:schemeClr val="tx1"/>
+          </a:fontRef>
+        </p:style>
+      </p:cxnSp>
+      <p:sp>
+        <p:nvSpPr>
+          <p:cNvPr id="48" name="TextBox 47">
+            <a:extLst>
+              <a:ext uri="{FF2B5EF4-FFF2-40B4-BE49-F238E27FC236}">
+                <a16:creationId xmlns:a16="http://schemas.microsoft.com/office/drawing/2014/main" id="{210063D6-AB12-4D1A-8DD9-1B596D004A2F}"/>
+              </a:ext>
+            </a:extLst>
+          </p:cNvPr>
+          <p:cNvSpPr txBox="1"/>
+          <p:nvPr/>
+        </p:nvSpPr>
+        <p:spPr>
+          <a:xfrm>
+            <a:off x="2310061" y="4588042"/>
+            <a:ext cx="471458" cy="369332"/>
+          </a:xfrm>
+          <a:prstGeom prst="rect">
+            <a:avLst/>
+          </a:prstGeom>
+          <a:noFill/>
+        </p:spPr>
+        <p:txBody>
+          <a:bodyPr wrap="square" rtlCol="0">
+            <a:spAutoFit/>
+          </a:bodyPr>
+          <a:lstStyle/>
+          <a:p>
+            <a:pPr algn="ctr"/>
+            <a:r>
+              <a:rPr lang="it-IT" dirty="0">
+                <a:solidFill>
+                  <a:schemeClr val="accent2"/>
+                </a:solidFill>
+              </a:rPr>
+              <a:t>20</a:t>
+            </a:r>
+            <a:endParaRPr lang="nl-NL" dirty="0">
+              <a:solidFill>
+                <a:schemeClr val="accent2"/>
+              </a:solidFill>
+            </a:endParaRPr>
+          </a:p>
+        </p:txBody>
+      </p:sp>
+      <p:cxnSp>
+        <p:nvCxnSpPr>
+          <p:cNvPr id="49" name="Straight Connector 48">
+            <a:extLst>
+              <a:ext uri="{FF2B5EF4-FFF2-40B4-BE49-F238E27FC236}">
+                <a16:creationId xmlns:a16="http://schemas.microsoft.com/office/drawing/2014/main" id="{0BD6F6C2-AA8F-4637-B394-6AEB8944AE70}"/>
+              </a:ext>
+            </a:extLst>
+          </p:cNvPr>
+          <p:cNvCxnSpPr/>
+          <p:nvPr/>
+        </p:nvCxnSpPr>
+        <p:spPr>
+          <a:xfrm>
+            <a:off x="351141" y="3890211"/>
+            <a:ext cx="2334126" cy="0"/>
+          </a:xfrm>
+          <a:prstGeom prst="line">
+            <a:avLst/>
+          </a:prstGeom>
+        </p:spPr>
+        <p:style>
+          <a:lnRef idx="3">
+            <a:schemeClr val="accent2"/>
+          </a:lnRef>
+          <a:fillRef idx="0">
+            <a:schemeClr val="accent2"/>
+          </a:fillRef>
+          <a:effectRef idx="2">
+            <a:schemeClr val="accent2"/>
+          </a:effectRef>
+          <a:fontRef idx="minor">
+            <a:schemeClr val="tx1"/>
+          </a:fontRef>
+        </p:style>
+      </p:cxnSp>
+      <p:sp>
+        <p:nvSpPr>
+          <p:cNvPr id="50" name="TextBox 49">
+            <a:extLst>
+              <a:ext uri="{FF2B5EF4-FFF2-40B4-BE49-F238E27FC236}">
+                <a16:creationId xmlns:a16="http://schemas.microsoft.com/office/drawing/2014/main" id="{DC3D5BFC-C2C7-4C0B-8CCD-B5F0EF51BD42}"/>
+              </a:ext>
+            </a:extLst>
+          </p:cNvPr>
+          <p:cNvSpPr txBox="1"/>
+          <p:nvPr/>
+        </p:nvSpPr>
+        <p:spPr>
+          <a:xfrm>
+            <a:off x="2181726" y="3609474"/>
+            <a:ext cx="606029" cy="369332"/>
+          </a:xfrm>
+          <a:prstGeom prst="rect">
+            <a:avLst/>
+          </a:prstGeom>
+          <a:noFill/>
+        </p:spPr>
+        <p:txBody>
+          <a:bodyPr wrap="square" rtlCol="0">
+            <a:spAutoFit/>
+          </a:bodyPr>
+          <a:lstStyle/>
+          <a:p>
+            <a:pPr algn="ctr"/>
+            <a:r>
+              <a:rPr lang="it-IT" dirty="0">
+                <a:solidFill>
+                  <a:schemeClr val="accent2"/>
+                </a:solidFill>
+              </a:rPr>
+              <a:t>300</a:t>
+            </a:r>
+            <a:endParaRPr lang="nl-NL" dirty="0">
+              <a:solidFill>
+                <a:schemeClr val="accent2"/>
+              </a:solidFill>
+            </a:endParaRPr>
+          </a:p>
+        </p:txBody>
+      </p:sp>
+      <p:cxnSp>
+        <p:nvCxnSpPr>
+          <p:cNvPr id="51" name="Straight Connector 50">
+            <a:extLst>
+              <a:ext uri="{FF2B5EF4-FFF2-40B4-BE49-F238E27FC236}">
+                <a16:creationId xmlns:a16="http://schemas.microsoft.com/office/drawing/2014/main" id="{44BEA9E8-8FA9-4EBF-ADB1-F15EF59D545A}"/>
+              </a:ext>
+            </a:extLst>
+          </p:cNvPr>
+          <p:cNvCxnSpPr/>
+          <p:nvPr/>
+        </p:nvCxnSpPr>
+        <p:spPr>
+          <a:xfrm>
+            <a:off x="3376752" y="5219798"/>
+            <a:ext cx="2334126" cy="0"/>
+          </a:xfrm>
+          <a:prstGeom prst="line">
+            <a:avLst/>
+          </a:prstGeom>
+        </p:spPr>
+        <p:style>
+          <a:lnRef idx="3">
+            <a:schemeClr val="accent2"/>
+          </a:lnRef>
+          <a:fillRef idx="0">
+            <a:schemeClr val="accent2"/>
+          </a:fillRef>
+          <a:effectRef idx="2">
+            <a:schemeClr val="accent2"/>
+          </a:effectRef>
+          <a:fontRef idx="minor">
+            <a:schemeClr val="tx1"/>
+          </a:fontRef>
+        </p:style>
+      </p:cxnSp>
+      <p:sp>
+        <p:nvSpPr>
+          <p:cNvPr id="52" name="TextBox 51">
+            <a:extLst>
+              <a:ext uri="{FF2B5EF4-FFF2-40B4-BE49-F238E27FC236}">
+                <a16:creationId xmlns:a16="http://schemas.microsoft.com/office/drawing/2014/main" id="{A166A446-0273-44CD-8582-FA57872289AC}"/>
+              </a:ext>
+            </a:extLst>
+          </p:cNvPr>
+          <p:cNvSpPr txBox="1"/>
+          <p:nvPr/>
+        </p:nvSpPr>
+        <p:spPr>
+          <a:xfrm>
+            <a:off x="5624542" y="5035132"/>
+            <a:ext cx="471458" cy="369332"/>
+          </a:xfrm>
+          <a:prstGeom prst="rect">
+            <a:avLst/>
+          </a:prstGeom>
+          <a:noFill/>
+        </p:spPr>
+        <p:txBody>
+          <a:bodyPr wrap="square" rtlCol="0">
+            <a:spAutoFit/>
+          </a:bodyPr>
+          <a:lstStyle/>
+          <a:p>
+            <a:pPr algn="ctr"/>
+            <a:r>
+              <a:rPr lang="it-IT" dirty="0">
+                <a:solidFill>
+                  <a:schemeClr val="accent2"/>
+                </a:solidFill>
+              </a:rPr>
+              <a:t>20</a:t>
+            </a:r>
+            <a:endParaRPr lang="nl-NL" dirty="0">
+              <a:solidFill>
+                <a:schemeClr val="accent2"/>
+              </a:solidFill>
+            </a:endParaRPr>
+          </a:p>
+        </p:txBody>
+      </p:sp>
+      <p:cxnSp>
+        <p:nvCxnSpPr>
+          <p:cNvPr id="53" name="Straight Connector 52">
+            <a:extLst>
+              <a:ext uri="{FF2B5EF4-FFF2-40B4-BE49-F238E27FC236}">
+                <a16:creationId xmlns:a16="http://schemas.microsoft.com/office/drawing/2014/main" id="{7EEC18CD-74D0-4FAF-8860-CE57F8D1CFA6}"/>
+              </a:ext>
+            </a:extLst>
+          </p:cNvPr>
+          <p:cNvCxnSpPr/>
+          <p:nvPr/>
+        </p:nvCxnSpPr>
+        <p:spPr>
+          <a:xfrm>
+            <a:off x="3382988" y="5112781"/>
+            <a:ext cx="2334126" cy="0"/>
+          </a:xfrm>
+          <a:prstGeom prst="line">
+            <a:avLst/>
+          </a:prstGeom>
+        </p:spPr>
+        <p:style>
+          <a:lnRef idx="3">
+            <a:schemeClr val="accent2"/>
+          </a:lnRef>
+          <a:fillRef idx="0">
+            <a:schemeClr val="accent2"/>
+          </a:fillRef>
+          <a:effectRef idx="2">
+            <a:schemeClr val="accent2"/>
+          </a:effectRef>
+          <a:fontRef idx="minor">
+            <a:schemeClr val="tx1"/>
+          </a:fontRef>
+        </p:style>
+      </p:cxnSp>
+      <p:sp>
+        <p:nvSpPr>
+          <p:cNvPr id="54" name="TextBox 53">
+            <a:extLst>
+              <a:ext uri="{FF2B5EF4-FFF2-40B4-BE49-F238E27FC236}">
+                <a16:creationId xmlns:a16="http://schemas.microsoft.com/office/drawing/2014/main" id="{79388AA8-1909-4DBD-B882-1AB427F2771E}"/>
+              </a:ext>
+            </a:extLst>
+          </p:cNvPr>
+          <p:cNvSpPr txBox="1"/>
+          <p:nvPr/>
+        </p:nvSpPr>
+        <p:spPr>
+          <a:xfrm>
+            <a:off x="5566173" y="4796958"/>
+            <a:ext cx="606029" cy="369332"/>
+          </a:xfrm>
+          <a:prstGeom prst="rect">
+            <a:avLst/>
+          </a:prstGeom>
+          <a:noFill/>
+        </p:spPr>
+        <p:txBody>
+          <a:bodyPr wrap="square" rtlCol="0">
+            <a:spAutoFit/>
+          </a:bodyPr>
+          <a:lstStyle/>
+          <a:p>
+            <a:pPr algn="ctr"/>
+            <a:r>
+              <a:rPr lang="it-IT" dirty="0">
+                <a:solidFill>
+                  <a:schemeClr val="accent2"/>
+                </a:solidFill>
+              </a:rPr>
+              <a:t>300</a:t>
+            </a:r>
+            <a:endParaRPr lang="nl-NL" dirty="0">
+              <a:solidFill>
+                <a:schemeClr val="accent2"/>
+              </a:solidFill>
+            </a:endParaRPr>
+          </a:p>
+        </p:txBody>
+      </p:sp>
+      <p:sp>
+        <p:nvSpPr>
+          <p:cNvPr id="55" name="Arrow: Right 54">
+            <a:extLst>
+              <a:ext uri="{FF2B5EF4-FFF2-40B4-BE49-F238E27FC236}">
+                <a16:creationId xmlns:a16="http://schemas.microsoft.com/office/drawing/2014/main" id="{CF186115-EF21-4E45-BA1A-F7A01B55B725}"/>
+              </a:ext>
+            </a:extLst>
+          </p:cNvPr>
+          <p:cNvSpPr/>
+          <p:nvPr/>
+        </p:nvSpPr>
+        <p:spPr>
+          <a:xfrm>
+            <a:off x="5654279" y="3364185"/>
+            <a:ext cx="1094205" cy="369332"/>
+          </a:xfrm>
+          <a:prstGeom prst="rightArrow">
+            <a:avLst/>
+          </a:prstGeom>
+        </p:spPr>
+        <p:style>
+          <a:lnRef idx="2">
+            <a:schemeClr val="accent2">
+              <a:shade val="50000"/>
+            </a:schemeClr>
+          </a:lnRef>
+          <a:fillRef idx="1">
+            <a:schemeClr val="accent2"/>
+          </a:fillRef>
+          <a:effectRef idx="0">
+            <a:schemeClr val="accent2"/>
+          </a:effectRef>
+          <a:fontRef idx="minor">
+            <a:schemeClr val="lt1"/>
+          </a:fontRef>
+        </p:style>
+        <p:txBody>
+          <a:bodyPr rtlCol="0" anchor="ctr"/>
+          <a:lstStyle/>
+          <a:p>
+            <a:pPr algn="ctr"/>
+            <a:endParaRPr lang="nl-NL"/>
+          </a:p>
+        </p:txBody>
+      </p:sp>
+      <p:sp>
+        <p:nvSpPr>
+          <p:cNvPr id="57" name="Oval 56">
+            <a:extLst>
+              <a:ext uri="{FF2B5EF4-FFF2-40B4-BE49-F238E27FC236}">
+                <a16:creationId xmlns:a16="http://schemas.microsoft.com/office/drawing/2014/main" id="{F946F1D0-67D6-45FC-AEDB-3F765ADB089F}"/>
+              </a:ext>
+            </a:extLst>
+          </p:cNvPr>
+          <p:cNvSpPr/>
+          <p:nvPr/>
+        </p:nvSpPr>
+        <p:spPr>
+          <a:xfrm>
+            <a:off x="1444235" y="4886330"/>
+            <a:ext cx="352926" cy="473862"/>
+          </a:xfrm>
+          <a:prstGeom prst="ellipse">
+            <a:avLst/>
+          </a:prstGeom>
+          <a:noFill/>
+          <a:ln w="9525" cap="flat" cmpd="sng" algn="ctr">
+            <a:solidFill>
+              <a:schemeClr val="accent1"/>
+            </a:solidFill>
+            <a:prstDash val="solid"/>
+            <a:round/>
+            <a:headEnd type="none" w="med" len="med"/>
+            <a:tailEnd type="none" w="med" len="med"/>
+          </a:ln>
+        </p:spPr>
+        <p:style>
+          <a:lnRef idx="0">
+            <a:scrgbClr r="0" g="0" b="0"/>
+          </a:lnRef>
+          <a:fillRef idx="0">
+            <a:scrgbClr r="0" g="0" b="0"/>
+          </a:fillRef>
+          <a:effectRef idx="0">
+            <a:scrgbClr r="0" g="0" b="0"/>
+          </a:effectRef>
+          <a:fontRef idx="minor">
+            <a:schemeClr val="accent1"/>
+          </a:fontRef>
+        </p:style>
+        <p:txBody>
+          <a:bodyPr rtlCol="0" anchor="ctr"/>
+          <a:lstStyle/>
+          <a:p>
+            <a:pPr algn="ctr"/>
+            <a:endParaRPr lang="nl-NL"/>
+          </a:p>
+        </p:txBody>
+      </p:sp>
+    </p:spTree>
+    <p:extLst>
+      <p:ext uri="{BB962C8B-B14F-4D97-AF65-F5344CB8AC3E}">
+        <p14:creationId xmlns:p14="http://schemas.microsoft.com/office/powerpoint/2010/main" val="2308014033"/>
+      </p:ext>
+    </p:extLst>
+  </p:cSld>
+  <p:clrMapOvr>
+    <a:masterClrMapping/>
+  </p:clrMapOvr>
+  <mc:AlternateContent xmlns:mc="http://schemas.openxmlformats.org/markup-compatibility/2006" xmlns:p159="http://schemas.microsoft.com/office/powerpoint/2015/09/main">
+    <mc:Choice Requires="p159">
+      <p:transition spd="slow">
+        <p159:morph option="byObject"/>
+      </p:transition>
+    </mc:Choice>
+    <mc:Fallback xmlns="">
+      <p:transition spd="slow">
+        <p:fade/>
+      </p:transition>
+    </mc:Fallback>
+  </mc:AlternateContent>
+</p:sld>
+</file>
+
+<file path=ppt/slides/slide28.xml><?xml version="1.0" encoding="utf-8"?>
+<p:sld xmlns:a="http://schemas.openxmlformats.org/drawingml/2006/main" xmlns:r="http://schemas.openxmlformats.org/officeDocument/2006/relationships" xmlns:p="http://schemas.openxmlformats.org/presentationml/2006/main">
+  <p:cSld>
+    <p:spTree>
+      <p:nvGrpSpPr>
+        <p:cNvPr id="1" name=""/>
+        <p:cNvGrpSpPr/>
+        <p:nvPr/>
+      </p:nvGrpSpPr>
+      <p:grpSpPr>
+        <a:xfrm>
+          <a:off x="0" y="0"/>
+          <a:ext cx="0" cy="0"/>
+          <a:chOff x="0" y="0"/>
+          <a:chExt cx="0" cy="0"/>
+        </a:xfrm>
+      </p:grpSpPr>
+      <p:pic>
+        <p:nvPicPr>
+          <p:cNvPr id="2" name="Picture 1">
+            <a:extLst>
+              <a:ext uri="{FF2B5EF4-FFF2-40B4-BE49-F238E27FC236}">
+                <a16:creationId xmlns:a16="http://schemas.microsoft.com/office/drawing/2014/main" id="{EFCA64AE-70C0-46DC-9DE0-3BD016877CF0}"/>
+              </a:ext>
+            </a:extLst>
+          </p:cNvPr>
+          <p:cNvPicPr>
+            <a:picLocks noChangeAspect="1"/>
+          </p:cNvPicPr>
+          <p:nvPr/>
+        </p:nvPicPr>
+        <p:blipFill>
+          <a:blip r:embed="rId2">
+            <a:extLst>
+              <a:ext uri="{28A0092B-C50C-407E-A947-70E740481C1C}">
+                <a14:useLocalDpi xmlns:a14="http://schemas.microsoft.com/office/drawing/2010/main" val="0"/>
+              </a:ext>
+            </a:extLst>
+          </a:blip>
+          <a:stretch>
+            <a:fillRect/>
+          </a:stretch>
+        </p:blipFill>
+        <p:spPr>
+          <a:xfrm>
+            <a:off x="2471014" y="2125452"/>
+            <a:ext cx="7249970" cy="4405816"/>
+          </a:xfrm>
+          <a:prstGeom prst="rect">
+            <a:avLst/>
+          </a:prstGeom>
+        </p:spPr>
+      </p:pic>
+      <p:sp>
+        <p:nvSpPr>
+          <p:cNvPr id="3" name="TextBox 2">
+            <a:extLst>
+              <a:ext uri="{FF2B5EF4-FFF2-40B4-BE49-F238E27FC236}">
+                <a16:creationId xmlns:a16="http://schemas.microsoft.com/office/drawing/2014/main" id="{669BC41E-7A1B-450B-AE56-57E23EBB368B}"/>
+              </a:ext>
+            </a:extLst>
+          </p:cNvPr>
+          <p:cNvSpPr txBox="1"/>
+          <p:nvPr/>
+        </p:nvSpPr>
+        <p:spPr>
+          <a:xfrm>
+            <a:off x="0" y="0"/>
+            <a:ext cx="4395537" cy="369332"/>
+          </a:xfrm>
+          <a:prstGeom prst="rect">
+            <a:avLst/>
+          </a:prstGeom>
+          <a:noFill/>
+        </p:spPr>
+        <p:txBody>
+          <a:bodyPr wrap="square" rtlCol="0">
+            <a:spAutoFit/>
+          </a:bodyPr>
+          <a:lstStyle/>
+          <a:p>
+            <a:r>
+              <a:rPr lang="it-IT" u="sng" dirty="0"/>
+              <a:t>Blood Pressure Measurements - Outliers</a:t>
+            </a:r>
+            <a:endParaRPr lang="nl-NL" u="sng" dirty="0"/>
+          </a:p>
+        </p:txBody>
+      </p:sp>
+      <p:sp>
+        <p:nvSpPr>
+          <p:cNvPr id="4" name="TextBox 3">
+            <a:extLst>
+              <a:ext uri="{FF2B5EF4-FFF2-40B4-BE49-F238E27FC236}">
+                <a16:creationId xmlns:a16="http://schemas.microsoft.com/office/drawing/2014/main" id="{9D83727A-AEE6-4E01-9A07-195FB57628BF}"/>
+              </a:ext>
+            </a:extLst>
+          </p:cNvPr>
+          <p:cNvSpPr txBox="1"/>
+          <p:nvPr/>
+        </p:nvSpPr>
+        <p:spPr>
+          <a:xfrm>
+            <a:off x="2709862" y="811929"/>
+            <a:ext cx="6772275" cy="1200329"/>
+          </a:xfrm>
+          <a:prstGeom prst="rect">
+            <a:avLst/>
+          </a:prstGeom>
+          <a:noFill/>
+        </p:spPr>
+        <p:txBody>
+          <a:bodyPr wrap="square" rtlCol="0">
+            <a:spAutoFit/>
+          </a:bodyPr>
+          <a:lstStyle/>
+          <a:p>
+            <a:pPr algn="ctr"/>
+            <a:r>
+              <a:rPr lang="it-IT" sz="2400" dirty="0"/>
+              <a:t>Replaced with Mean value </a:t>
+            </a:r>
+          </a:p>
+          <a:p>
+            <a:pPr algn="ctr"/>
+            <a:r>
+              <a:rPr lang="it-IT" sz="2400" dirty="0"/>
+              <a:t>if </a:t>
+            </a:r>
+          </a:p>
+          <a:p>
+            <a:pPr algn="ctr"/>
+            <a:r>
+              <a:rPr lang="it-IT" sz="2400" dirty="0"/>
+              <a:t>|BP</a:t>
+            </a:r>
+            <a:r>
+              <a:rPr lang="it-IT" sz="2400" baseline="-25000" dirty="0"/>
+              <a:t>Sys,Dia</a:t>
+            </a:r>
+            <a:r>
+              <a:rPr lang="it-IT" sz="2400" dirty="0"/>
+              <a:t>| </a:t>
+            </a:r>
+            <a:r>
+              <a:rPr lang="nl-NL" sz="2400" dirty="0"/>
+              <a:t>&lt; 3·</a:t>
+            </a:r>
+            <a:r>
+              <a:rPr lang="el-GR" sz="2400" dirty="0"/>
+              <a:t>σ</a:t>
+            </a:r>
+            <a:endParaRPr lang="nl-NL" sz="2400" dirty="0"/>
+          </a:p>
+        </p:txBody>
+      </p:sp>
+    </p:spTree>
+    <p:extLst>
+      <p:ext uri="{BB962C8B-B14F-4D97-AF65-F5344CB8AC3E}">
+        <p14:creationId xmlns:p14="http://schemas.microsoft.com/office/powerpoint/2010/main" val="483860090"/>
+      </p:ext>
+    </p:extLst>
+  </p:cSld>
+  <p:clrMapOvr>
+    <a:masterClrMapping/>
+  </p:clrMapOvr>
+  <mc:AlternateContent xmlns:mc="http://schemas.openxmlformats.org/markup-compatibility/2006" xmlns:p159="http://schemas.microsoft.com/office/powerpoint/2015/09/main">
+    <mc:Choice Requires="p159">
+      <p:transition spd="slow">
+        <p159:morph option="byObject"/>
+      </p:transition>
+    </mc:Choice>
+    <mc:Fallback xmlns="">
+      <p:transition spd="slow">
+        <p:fade/>
+      </p:transition>
+    </mc:Fallback>
+  </mc:AlternateContent>
+</p:sld>
+</file>
+
+<file path=ppt/slides/slide29.xml><?xml version="1.0" encoding="utf-8"?>
+<p:sld xmlns:a="http://schemas.openxmlformats.org/drawingml/2006/main" xmlns:r="http://schemas.openxmlformats.org/officeDocument/2006/relationships" xmlns:p="http://schemas.openxmlformats.org/presentationml/2006/main">
+  <p:cSld>
+    <p:spTree>
+      <p:nvGrpSpPr>
+        <p:cNvPr id="1" name=""/>
+        <p:cNvGrpSpPr/>
+        <p:nvPr/>
+      </p:nvGrpSpPr>
+      <p:grpSpPr>
+        <a:xfrm>
+          <a:off x="0" y="0"/>
+          <a:ext cx="0" cy="0"/>
+          <a:chOff x="0" y="0"/>
+          <a:chExt cx="0" cy="0"/>
+        </a:xfrm>
+      </p:grpSpPr>
+      <p:sp>
+        <p:nvSpPr>
+          <p:cNvPr id="2" name="Title 1">
+            <a:extLst>
+              <a:ext uri="{FF2B5EF4-FFF2-40B4-BE49-F238E27FC236}">
                 <a16:creationId xmlns:a16="http://schemas.microsoft.com/office/drawing/2014/main" id="{E2742523-2057-44B4-9FB1-A3B7126FBF7F}"/>
               </a:ext>
             </a:extLst>
@@ -7338,7 +10757,78 @@
 </p:sld>
 </file>
 
-<file path=ppt/slides/slide25.xml><?xml version="1.0" encoding="utf-8"?>
+<file path=ppt/slides/slide3.xml><?xml version="1.0" encoding="utf-8"?>
+<p:sld xmlns:a="http://schemas.openxmlformats.org/drawingml/2006/main" xmlns:r="http://schemas.openxmlformats.org/officeDocument/2006/relationships" xmlns:p="http://schemas.openxmlformats.org/presentationml/2006/main">
+  <p:cSld>
+    <p:spTree>
+      <p:nvGrpSpPr>
+        <p:cNvPr id="1" name=""/>
+        <p:cNvGrpSpPr/>
+        <p:nvPr/>
+      </p:nvGrpSpPr>
+      <p:grpSpPr>
+        <a:xfrm>
+          <a:off x="0" y="0"/>
+          <a:ext cx="0" cy="0"/>
+          <a:chOff x="0" y="0"/>
+          <a:chExt cx="0" cy="0"/>
+        </a:xfrm>
+      </p:grpSpPr>
+      <p:sp>
+        <p:nvSpPr>
+          <p:cNvPr id="2" name="Title 1">
+            <a:extLst>
+              <a:ext uri="{FF2B5EF4-FFF2-40B4-BE49-F238E27FC236}">
+                <a16:creationId xmlns:a16="http://schemas.microsoft.com/office/drawing/2014/main" id="{317E23D3-032D-4C20-8F5B-1840BC892975}"/>
+              </a:ext>
+            </a:extLst>
+          </p:cNvPr>
+          <p:cNvSpPr>
+            <a:spLocks noGrp="1"/>
+          </p:cNvSpPr>
+          <p:nvPr>
+            <p:ph type="ctrTitle"/>
+          </p:nvPr>
+        </p:nvSpPr>
+        <p:spPr/>
+        <p:txBody>
+          <a:bodyPr/>
+          <a:lstStyle/>
+          <a:p>
+            <a:r>
+              <a:rPr lang="it-IT" dirty="0"/>
+              <a:t>Afspraken</a:t>
+            </a:r>
+            <a:endParaRPr lang="nl-NL" dirty="0"/>
+          </a:p>
+        </p:txBody>
+      </p:sp>
+    </p:spTree>
+    <p:extLst>
+      <p:ext uri="{BB962C8B-B14F-4D97-AF65-F5344CB8AC3E}">
+        <p14:creationId xmlns:p14="http://schemas.microsoft.com/office/powerpoint/2010/main" val="1242301480"/>
+      </p:ext>
+    </p:extLst>
+  </p:cSld>
+  <p:clrMapOvr>
+    <a:masterClrMapping/>
+  </p:clrMapOvr>
+  <mc:AlternateContent xmlns:mc="http://schemas.openxmlformats.org/markup-compatibility/2006" xmlns:p159="http://schemas.microsoft.com/office/powerpoint/2015/09/main">
+    <mc:Choice Requires="p159">
+      <p:transition spd="slow">
+        <p159:morph option="byObject"/>
+      </p:transition>
+    </mc:Choice>
+    <mc:Fallback xmlns="">
+      <p:transition spd="slow">
+        <p:fade/>
+      </p:transition>
+    </mc:Fallback>
+  </mc:AlternateContent>
+</p:sld>
+</file>
+
+<file path=ppt/slides/slide30.xml><?xml version="1.0" encoding="utf-8"?>
 <p:sld xmlns:a="http://schemas.openxmlformats.org/drawingml/2006/main" xmlns:r="http://schemas.openxmlformats.org/officeDocument/2006/relationships" xmlns:p="http://schemas.openxmlformats.org/presentationml/2006/main">
   <p:cSld>
     <p:spTree>
@@ -7689,7 +11179,7 @@
 </p:sld>
 </file>
 
-<file path=ppt/slides/slide26.xml><?xml version="1.0" encoding="utf-8"?>
+<file path=ppt/slides/slide31.xml><?xml version="1.0" encoding="utf-8"?>
 <p:sld xmlns:a="http://schemas.openxmlformats.org/drawingml/2006/main" xmlns:r="http://schemas.openxmlformats.org/officeDocument/2006/relationships" xmlns:p="http://schemas.openxmlformats.org/presentationml/2006/main">
   <p:cSld>
     <p:spTree>
@@ -8058,7 +11548,7 @@
 </p:sld>
 </file>
 
-<file path=ppt/slides/slide27.xml><?xml version="1.0" encoding="utf-8"?>
+<file path=ppt/slides/slide32.xml><?xml version="1.0" encoding="utf-8"?>
 <p:sld xmlns:a="http://schemas.openxmlformats.org/drawingml/2006/main" xmlns:r="http://schemas.openxmlformats.org/officeDocument/2006/relationships" xmlns:p="http://schemas.openxmlformats.org/presentationml/2006/main">
   <p:cSld>
     <p:spTree>
@@ -8550,7 +12040,7 @@
 </p:sld>
 </file>
 
-<file path=ppt/slides/slide28.xml><?xml version="1.0" encoding="utf-8"?>
+<file path=ppt/slides/slide33.xml><?xml version="1.0" encoding="utf-8"?>
 <p:sld xmlns:a="http://schemas.openxmlformats.org/drawingml/2006/main" xmlns:r="http://schemas.openxmlformats.org/officeDocument/2006/relationships" xmlns:p="http://schemas.openxmlformats.org/presentationml/2006/main">
   <p:cSld>
     <p:spTree>
@@ -8739,77 +12229,6 @@
     <p:extLst>
       <p:ext uri="{BB962C8B-B14F-4D97-AF65-F5344CB8AC3E}">
         <p14:creationId xmlns:p14="http://schemas.microsoft.com/office/powerpoint/2010/main" val="2652313884"/>
-      </p:ext>
-    </p:extLst>
-  </p:cSld>
-  <p:clrMapOvr>
-    <a:masterClrMapping/>
-  </p:clrMapOvr>
-  <mc:AlternateContent xmlns:mc="http://schemas.openxmlformats.org/markup-compatibility/2006" xmlns:p159="http://schemas.microsoft.com/office/powerpoint/2015/09/main">
-    <mc:Choice Requires="p159">
-      <p:transition spd="slow">
-        <p159:morph option="byObject"/>
-      </p:transition>
-    </mc:Choice>
-    <mc:Fallback xmlns="">
-      <p:transition spd="slow">
-        <p:fade/>
-      </p:transition>
-    </mc:Fallback>
-  </mc:AlternateContent>
-</p:sld>
-</file>
-
-<file path=ppt/slides/slide3.xml><?xml version="1.0" encoding="utf-8"?>
-<p:sld xmlns:a="http://schemas.openxmlformats.org/drawingml/2006/main" xmlns:r="http://schemas.openxmlformats.org/officeDocument/2006/relationships" xmlns:p="http://schemas.openxmlformats.org/presentationml/2006/main">
-  <p:cSld>
-    <p:spTree>
-      <p:nvGrpSpPr>
-        <p:cNvPr id="1" name=""/>
-        <p:cNvGrpSpPr/>
-        <p:nvPr/>
-      </p:nvGrpSpPr>
-      <p:grpSpPr>
-        <a:xfrm>
-          <a:off x="0" y="0"/>
-          <a:ext cx="0" cy="0"/>
-          <a:chOff x="0" y="0"/>
-          <a:chExt cx="0" cy="0"/>
-        </a:xfrm>
-      </p:grpSpPr>
-      <p:sp>
-        <p:nvSpPr>
-          <p:cNvPr id="2" name="Title 1">
-            <a:extLst>
-              <a:ext uri="{FF2B5EF4-FFF2-40B4-BE49-F238E27FC236}">
-                <a16:creationId xmlns:a16="http://schemas.microsoft.com/office/drawing/2014/main" id="{317E23D3-032D-4C20-8F5B-1840BC892975}"/>
-              </a:ext>
-            </a:extLst>
-          </p:cNvPr>
-          <p:cNvSpPr>
-            <a:spLocks noGrp="1"/>
-          </p:cNvSpPr>
-          <p:nvPr>
-            <p:ph type="ctrTitle"/>
-          </p:nvPr>
-        </p:nvSpPr>
-        <p:spPr/>
-        <p:txBody>
-          <a:bodyPr/>
-          <a:lstStyle/>
-          <a:p>
-            <a:r>
-              <a:rPr lang="it-IT" dirty="0"/>
-              <a:t>Afspraken</a:t>
-            </a:r>
-            <a:endParaRPr lang="nl-NL" dirty="0"/>
-          </a:p>
-        </p:txBody>
-      </p:sp>
-    </p:spTree>
-    <p:extLst>
-      <p:ext uri="{BB962C8B-B14F-4D97-AF65-F5344CB8AC3E}">
-        <p14:creationId xmlns:p14="http://schemas.microsoft.com/office/powerpoint/2010/main" val="1242301480"/>
       </p:ext>
     </p:extLst>
   </p:cSld>
@@ -11125,7 +14544,7 @@
 </file>
 
 <file path=ppt/slides/slide7.xml><?xml version="1.0" encoding="utf-8"?>
-<p:sld xmlns:a="http://schemas.openxmlformats.org/drawingml/2006/main" xmlns:r="http://schemas.openxmlformats.org/officeDocument/2006/relationships" xmlns:p="http://schemas.openxmlformats.org/presentationml/2006/main">
+<p:sld xmlns:a="http://schemas.openxmlformats.org/drawingml/2006/main" xmlns:r="http://schemas.openxmlformats.org/officeDocument/2006/relationships" xmlns:p="http://schemas.openxmlformats.org/presentationml/2006/main" show="0">
   <p:cSld>
     <p:spTree>
       <p:nvGrpSpPr>
@@ -11141,48 +14560,12 @@
           <a:chExt cx="0" cy="0"/>
         </a:xfrm>
       </p:grpSpPr>
-      <p:sp>
-        <p:nvSpPr>
-          <p:cNvPr id="4" name="TextBox 3">
-            <a:extLst>
-              <a:ext uri="{FF2B5EF4-FFF2-40B4-BE49-F238E27FC236}">
-                <a16:creationId xmlns:a16="http://schemas.microsoft.com/office/drawing/2014/main" id="{B40CC955-9822-4C97-8EA5-CCA925BF2200}"/>
-              </a:ext>
-            </a:extLst>
-          </p:cNvPr>
-          <p:cNvSpPr txBox="1"/>
-          <p:nvPr/>
-        </p:nvSpPr>
-        <p:spPr>
-          <a:xfrm>
-            <a:off x="0" y="2009"/>
-            <a:ext cx="3430954" cy="369332"/>
-          </a:xfrm>
-          <a:prstGeom prst="rect">
-            <a:avLst/>
-          </a:prstGeom>
-          <a:noFill/>
-        </p:spPr>
-        <p:txBody>
-          <a:bodyPr wrap="square" rtlCol="0">
-            <a:spAutoFit/>
-          </a:bodyPr>
-          <a:lstStyle/>
-          <a:p>
-            <a:r>
-              <a:rPr lang="it-IT" u="sng" dirty="0"/>
-              <a:t>Missing Values</a:t>
-            </a:r>
-            <a:endParaRPr lang="nl-NL" u="sng" dirty="0"/>
-          </a:p>
-        </p:txBody>
-      </p:sp>
       <p:pic>
         <p:nvPicPr>
-          <p:cNvPr id="3" name="Picture 2">
-            <a:extLst>
-              <a:ext uri="{FF2B5EF4-FFF2-40B4-BE49-F238E27FC236}">
-                <a16:creationId xmlns:a16="http://schemas.microsoft.com/office/drawing/2014/main" id="{6C52EDD9-3028-4E42-A5D9-F1DB5004F6CA}"/>
+          <p:cNvPr id="56" name="Graphic 55">
+            <a:extLst>
+              <a:ext uri="{FF2B5EF4-FFF2-40B4-BE49-F238E27FC236}">
+                <a16:creationId xmlns:a16="http://schemas.microsoft.com/office/drawing/2014/main" id="{52414F87-F631-4D89-AA4B-5432D50060F8}"/>
               </a:ext>
             </a:extLst>
           </p:cNvPr>
@@ -11197,6 +14580,9 @@
               <a:ext uri="{28A0092B-C50C-407E-A947-70E740481C1C}">
                 <a14:useLocalDpi xmlns:a14="http://schemas.microsoft.com/office/drawing/2010/main" val="0"/>
               </a:ext>
+              <a:ext uri="{96DAC541-7B7A-43D3-8B79-37D633B846F1}">
+                <asvg:svgBlip xmlns:asvg="http://schemas.microsoft.com/office/drawing/2016/SVG/main" r:embed="rId3"/>
+              </a:ext>
             </a:extLst>
           </a:blip>
           <a:stretch>
@@ -11205,8 +14591,203 @@
         </p:blipFill>
         <p:spPr>
           <a:xfrm>
-            <a:off x="2868297" y="0"/>
-            <a:ext cx="6455405" cy="6858000"/>
+            <a:off x="6935099" y="3299436"/>
+            <a:ext cx="4394477" cy="3299436"/>
+          </a:xfrm>
+          <a:prstGeom prst="rect">
+            <a:avLst/>
+          </a:prstGeom>
+        </p:spPr>
+      </p:pic>
+      <p:pic>
+        <p:nvPicPr>
+          <p:cNvPr id="58" name="Graphic 57">
+            <a:extLst>
+              <a:ext uri="{FF2B5EF4-FFF2-40B4-BE49-F238E27FC236}">
+                <a16:creationId xmlns:a16="http://schemas.microsoft.com/office/drawing/2014/main" id="{68FD5771-5A2A-484D-A31C-D9D6B471123F}"/>
+              </a:ext>
+            </a:extLst>
+          </p:cNvPr>
+          <p:cNvPicPr>
+            <a:picLocks noChangeAspect="1"/>
+          </p:cNvPicPr>
+          <p:nvPr/>
+        </p:nvPicPr>
+        <p:blipFill>
+          <a:blip r:embed="rId4">
+            <a:extLst>
+              <a:ext uri="{28A0092B-C50C-407E-A947-70E740481C1C}">
+                <a14:useLocalDpi xmlns:a14="http://schemas.microsoft.com/office/drawing/2010/main" val="0"/>
+              </a:ext>
+              <a:ext uri="{96DAC541-7B7A-43D3-8B79-37D633B846F1}">
+                <asvg:svgBlip xmlns:asvg="http://schemas.microsoft.com/office/drawing/2016/SVG/main" r:embed="rId5"/>
+              </a:ext>
+            </a:extLst>
+          </a:blip>
+          <a:stretch>
+            <a:fillRect/>
+          </a:stretch>
+        </p:blipFill>
+        <p:spPr>
+          <a:xfrm>
+            <a:off x="862424" y="3299436"/>
+            <a:ext cx="4394477" cy="3299436"/>
+          </a:xfrm>
+          <a:prstGeom prst="rect">
+            <a:avLst/>
+          </a:prstGeom>
+        </p:spPr>
+      </p:pic>
+      <p:pic>
+        <p:nvPicPr>
+          <p:cNvPr id="60" name="Graphic 59">
+            <a:extLst>
+              <a:ext uri="{FF2B5EF4-FFF2-40B4-BE49-F238E27FC236}">
+                <a16:creationId xmlns:a16="http://schemas.microsoft.com/office/drawing/2014/main" id="{A666AFF7-F3EA-45A7-9012-B02B8CF613E5}"/>
+              </a:ext>
+            </a:extLst>
+          </p:cNvPr>
+          <p:cNvPicPr>
+            <a:picLocks noChangeAspect="1"/>
+          </p:cNvPicPr>
+          <p:nvPr/>
+        </p:nvPicPr>
+        <p:blipFill>
+          <a:blip r:embed="rId6">
+            <a:extLst>
+              <a:ext uri="{28A0092B-C50C-407E-A947-70E740481C1C}">
+                <a14:useLocalDpi xmlns:a14="http://schemas.microsoft.com/office/drawing/2010/main" val="0"/>
+              </a:ext>
+              <a:ext uri="{96DAC541-7B7A-43D3-8B79-37D633B846F1}">
+                <asvg:svgBlip xmlns:asvg="http://schemas.microsoft.com/office/drawing/2016/SVG/main" r:embed="rId7"/>
+              </a:ext>
+            </a:extLst>
+          </a:blip>
+          <a:stretch>
+            <a:fillRect/>
+          </a:stretch>
+        </p:blipFill>
+        <p:spPr>
+          <a:xfrm>
+            <a:off x="8214104" y="0"/>
+            <a:ext cx="4394477" cy="3299436"/>
+          </a:xfrm>
+          <a:prstGeom prst="rect">
+            <a:avLst/>
+          </a:prstGeom>
+        </p:spPr>
+      </p:pic>
+      <p:pic>
+        <p:nvPicPr>
+          <p:cNvPr id="62" name="Graphic 61">
+            <a:extLst>
+              <a:ext uri="{FF2B5EF4-FFF2-40B4-BE49-F238E27FC236}">
+                <a16:creationId xmlns:a16="http://schemas.microsoft.com/office/drawing/2014/main" id="{BC051BED-6050-4585-8170-AF9657F7F502}"/>
+              </a:ext>
+            </a:extLst>
+          </p:cNvPr>
+          <p:cNvPicPr>
+            <a:picLocks noChangeAspect="1"/>
+          </p:cNvPicPr>
+          <p:nvPr/>
+        </p:nvPicPr>
+        <p:blipFill>
+          <a:blip r:embed="rId8">
+            <a:extLst>
+              <a:ext uri="{28A0092B-C50C-407E-A947-70E740481C1C}">
+                <a14:useLocalDpi xmlns:a14="http://schemas.microsoft.com/office/drawing/2010/main" val="0"/>
+              </a:ext>
+              <a:ext uri="{96DAC541-7B7A-43D3-8B79-37D633B846F1}">
+                <asvg:svgBlip xmlns:asvg="http://schemas.microsoft.com/office/drawing/2016/SVG/main" r:embed="rId9"/>
+              </a:ext>
+            </a:extLst>
+          </a:blip>
+          <a:stretch>
+            <a:fillRect/>
+          </a:stretch>
+        </p:blipFill>
+        <p:spPr>
+          <a:xfrm>
+            <a:off x="5256901" y="0"/>
+            <a:ext cx="4394477" cy="3299436"/>
+          </a:xfrm>
+          <a:prstGeom prst="rect">
+            <a:avLst/>
+          </a:prstGeom>
+        </p:spPr>
+      </p:pic>
+      <p:pic>
+        <p:nvPicPr>
+          <p:cNvPr id="64" name="Graphic 63">
+            <a:extLst>
+              <a:ext uri="{FF2B5EF4-FFF2-40B4-BE49-F238E27FC236}">
+                <a16:creationId xmlns:a16="http://schemas.microsoft.com/office/drawing/2014/main" id="{FC29D5F6-41B5-4C6C-A664-E5758A41131A}"/>
+              </a:ext>
+            </a:extLst>
+          </p:cNvPr>
+          <p:cNvPicPr>
+            <a:picLocks noChangeAspect="1"/>
+          </p:cNvPicPr>
+          <p:nvPr/>
+        </p:nvPicPr>
+        <p:blipFill>
+          <a:blip r:embed="rId10">
+            <a:extLst>
+              <a:ext uri="{28A0092B-C50C-407E-A947-70E740481C1C}">
+                <a14:useLocalDpi xmlns:a14="http://schemas.microsoft.com/office/drawing/2010/main" val="0"/>
+              </a:ext>
+              <a:ext uri="{96DAC541-7B7A-43D3-8B79-37D633B846F1}">
+                <asvg:svgBlip xmlns:asvg="http://schemas.microsoft.com/office/drawing/2016/SVG/main" r:embed="rId11"/>
+              </a:ext>
+            </a:extLst>
+          </a:blip>
+          <a:stretch>
+            <a:fillRect/>
+          </a:stretch>
+        </p:blipFill>
+        <p:spPr>
+          <a:xfrm>
+            <a:off x="2299699" y="0"/>
+            <a:ext cx="4394477" cy="3299436"/>
+          </a:xfrm>
+          <a:prstGeom prst="rect">
+            <a:avLst/>
+          </a:prstGeom>
+        </p:spPr>
+      </p:pic>
+      <p:pic>
+        <p:nvPicPr>
+          <p:cNvPr id="66" name="Graphic 65">
+            <a:extLst>
+              <a:ext uri="{FF2B5EF4-FFF2-40B4-BE49-F238E27FC236}">
+                <a16:creationId xmlns:a16="http://schemas.microsoft.com/office/drawing/2014/main" id="{E40859BE-F25B-48B1-B7CF-10C7F1E45D9A}"/>
+              </a:ext>
+            </a:extLst>
+          </p:cNvPr>
+          <p:cNvPicPr>
+            <a:picLocks noChangeAspect="1"/>
+          </p:cNvPicPr>
+          <p:nvPr/>
+        </p:nvPicPr>
+        <p:blipFill>
+          <a:blip r:embed="rId12">
+            <a:extLst>
+              <a:ext uri="{28A0092B-C50C-407E-A947-70E740481C1C}">
+                <a14:useLocalDpi xmlns:a14="http://schemas.microsoft.com/office/drawing/2010/main" val="0"/>
+              </a:ext>
+              <a:ext uri="{96DAC541-7B7A-43D3-8B79-37D633B846F1}">
+                <asvg:svgBlip xmlns:asvg="http://schemas.microsoft.com/office/drawing/2016/SVG/main" r:embed="rId13"/>
+              </a:ext>
+            </a:extLst>
+          </a:blip>
+          <a:stretch>
+            <a:fillRect/>
+          </a:stretch>
+        </p:blipFill>
+        <p:spPr>
+          <a:xfrm>
+            <a:off x="-657503" y="0"/>
+            <a:ext cx="4394477" cy="3299436"/>
           </a:xfrm>
           <a:prstGeom prst="rect">
             <a:avLst/>
@@ -11216,7 +14797,7 @@
     </p:spTree>
     <p:extLst>
       <p:ext uri="{BB962C8B-B14F-4D97-AF65-F5344CB8AC3E}">
-        <p14:creationId xmlns:p14="http://schemas.microsoft.com/office/powerpoint/2010/main" val="2771455475"/>
+        <p14:creationId xmlns:p14="http://schemas.microsoft.com/office/powerpoint/2010/main" val="2692764115"/>
       </p:ext>
     </p:extLst>
   </p:cSld>
@@ -11239,7 +14820,7 @@
 </file>
 
 <file path=ppt/slides/slide8.xml><?xml version="1.0" encoding="utf-8"?>
-<p:sld xmlns:a="http://schemas.openxmlformats.org/drawingml/2006/main" xmlns:r="http://schemas.openxmlformats.org/officeDocument/2006/relationships" xmlns:p="http://schemas.openxmlformats.org/presentationml/2006/main">
+<p:sld xmlns:a="http://schemas.openxmlformats.org/drawingml/2006/main" xmlns:r="http://schemas.openxmlformats.org/officeDocument/2006/relationships" xmlns:p="http://schemas.openxmlformats.org/presentationml/2006/main" show="0">
   <p:cSld>
     <p:spTree>
       <p:nvGrpSpPr>
@@ -11257,10 +14838,10 @@
       </p:grpSpPr>
       <p:pic>
         <p:nvPicPr>
-          <p:cNvPr id="56" name="Graphic 55">
-            <a:extLst>
-              <a:ext uri="{FF2B5EF4-FFF2-40B4-BE49-F238E27FC236}">
-                <a16:creationId xmlns:a16="http://schemas.microsoft.com/office/drawing/2014/main" id="{52414F87-F631-4D89-AA4B-5432D50060F8}"/>
+          <p:cNvPr id="3" name="Graphic 2">
+            <a:extLst>
+              <a:ext uri="{FF2B5EF4-FFF2-40B4-BE49-F238E27FC236}">
+                <a16:creationId xmlns:a16="http://schemas.microsoft.com/office/drawing/2014/main" id="{5104F63A-8305-48CC-A7C8-38D27F499ADB}"/>
               </a:ext>
             </a:extLst>
           </p:cNvPr>
@@ -11286,8 +14867,8 @@
         </p:blipFill>
         <p:spPr>
           <a:xfrm>
-            <a:off x="6935099" y="3299436"/>
-            <a:ext cx="4394477" cy="3299436"/>
+            <a:off x="6955860" y="3300410"/>
+            <a:ext cx="4471895" cy="3357563"/>
           </a:xfrm>
           <a:prstGeom prst="rect">
             <a:avLst/>
@@ -11296,10 +14877,10 @@
       </p:pic>
       <p:pic>
         <p:nvPicPr>
-          <p:cNvPr id="58" name="Graphic 57">
-            <a:extLst>
-              <a:ext uri="{FF2B5EF4-FFF2-40B4-BE49-F238E27FC236}">
-                <a16:creationId xmlns:a16="http://schemas.microsoft.com/office/drawing/2014/main" id="{68FD5771-5A2A-484D-A31C-D9D6B471123F}"/>
+          <p:cNvPr id="5" name="Graphic 4">
+            <a:extLst>
+              <a:ext uri="{FF2B5EF4-FFF2-40B4-BE49-F238E27FC236}">
+                <a16:creationId xmlns:a16="http://schemas.microsoft.com/office/drawing/2014/main" id="{B68B9AC6-63AF-4D04-8412-F617E4BD1E25}"/>
               </a:ext>
             </a:extLst>
           </p:cNvPr>
@@ -11325,8 +14906,8 @@
         </p:blipFill>
         <p:spPr>
           <a:xfrm>
-            <a:off x="862424" y="3299436"/>
-            <a:ext cx="4394477" cy="3299436"/>
+            <a:off x="915392" y="3300411"/>
+            <a:ext cx="4471895" cy="3357563"/>
           </a:xfrm>
           <a:prstGeom prst="rect">
             <a:avLst/>
@@ -11335,10 +14916,10 @@
       </p:pic>
       <p:pic>
         <p:nvPicPr>
-          <p:cNvPr id="60" name="Graphic 59">
-            <a:extLst>
-              <a:ext uri="{FF2B5EF4-FFF2-40B4-BE49-F238E27FC236}">
-                <a16:creationId xmlns:a16="http://schemas.microsoft.com/office/drawing/2014/main" id="{A666AFF7-F3EA-45A7-9012-B02B8CF613E5}"/>
+          <p:cNvPr id="7" name="Graphic 6">
+            <a:extLst>
+              <a:ext uri="{FF2B5EF4-FFF2-40B4-BE49-F238E27FC236}">
+                <a16:creationId xmlns:a16="http://schemas.microsoft.com/office/drawing/2014/main" id="{A67BD1E4-1078-48C8-A0CC-A8F92079F4D0}"/>
               </a:ext>
             </a:extLst>
           </p:cNvPr>
@@ -11364,8 +14945,8 @@
         </p:blipFill>
         <p:spPr>
           <a:xfrm>
-            <a:off x="8214104" y="0"/>
-            <a:ext cx="4394477" cy="3299436"/>
+            <a:off x="8416461" y="0"/>
+            <a:ext cx="4471895" cy="3357563"/>
           </a:xfrm>
           <a:prstGeom prst="rect">
             <a:avLst/>
@@ -11374,10 +14955,10 @@
       </p:pic>
       <p:pic>
         <p:nvPicPr>
-          <p:cNvPr id="62" name="Graphic 61">
-            <a:extLst>
-              <a:ext uri="{FF2B5EF4-FFF2-40B4-BE49-F238E27FC236}">
-                <a16:creationId xmlns:a16="http://schemas.microsoft.com/office/drawing/2014/main" id="{BC051BED-6050-4585-8170-AF9657F7F502}"/>
+          <p:cNvPr id="9" name="Graphic 8">
+            <a:extLst>
+              <a:ext uri="{FF2B5EF4-FFF2-40B4-BE49-F238E27FC236}">
+                <a16:creationId xmlns:a16="http://schemas.microsoft.com/office/drawing/2014/main" id="{9FBB4D53-4F61-4420-B2EA-5DBB2190FBDD}"/>
               </a:ext>
             </a:extLst>
           </p:cNvPr>
@@ -11403,8 +14984,8 @@
         </p:blipFill>
         <p:spPr>
           <a:xfrm>
-            <a:off x="5256901" y="0"/>
-            <a:ext cx="4394477" cy="3299436"/>
+            <a:off x="5405166" y="0"/>
+            <a:ext cx="4471895" cy="3357563"/>
           </a:xfrm>
           <a:prstGeom prst="rect">
             <a:avLst/>
@@ -11413,10 +14994,10 @@
       </p:pic>
       <p:pic>
         <p:nvPicPr>
-          <p:cNvPr id="64" name="Graphic 63">
-            <a:extLst>
-              <a:ext uri="{FF2B5EF4-FFF2-40B4-BE49-F238E27FC236}">
-                <a16:creationId xmlns:a16="http://schemas.microsoft.com/office/drawing/2014/main" id="{FC29D5F6-41B5-4C6C-A664-E5758A41131A}"/>
+          <p:cNvPr id="11" name="Graphic 10">
+            <a:extLst>
+              <a:ext uri="{FF2B5EF4-FFF2-40B4-BE49-F238E27FC236}">
+                <a16:creationId xmlns:a16="http://schemas.microsoft.com/office/drawing/2014/main" id="{9947BBB5-44C5-48CF-969E-441FAF4420ED}"/>
               </a:ext>
             </a:extLst>
           </p:cNvPr>
@@ -11442,8 +15023,8 @@
         </p:blipFill>
         <p:spPr>
           <a:xfrm>
-            <a:off x="2299699" y="0"/>
-            <a:ext cx="4394477" cy="3299436"/>
+            <a:off x="2314940" y="0"/>
+            <a:ext cx="4471895" cy="3357563"/>
           </a:xfrm>
           <a:prstGeom prst="rect">
             <a:avLst/>
@@ -11452,10 +15033,10 @@
       </p:pic>
       <p:pic>
         <p:nvPicPr>
-          <p:cNvPr id="66" name="Graphic 65">
-            <a:extLst>
-              <a:ext uri="{FF2B5EF4-FFF2-40B4-BE49-F238E27FC236}">
-                <a16:creationId xmlns:a16="http://schemas.microsoft.com/office/drawing/2014/main" id="{E40859BE-F25B-48B1-B7CF-10C7F1E45D9A}"/>
+          <p:cNvPr id="13" name="Graphic 12">
+            <a:extLst>
+              <a:ext uri="{FF2B5EF4-FFF2-40B4-BE49-F238E27FC236}">
+                <a16:creationId xmlns:a16="http://schemas.microsoft.com/office/drawing/2014/main" id="{FC69359F-A5B2-4EC6-BD2E-74DFBA522CFC}"/>
               </a:ext>
             </a:extLst>
           </p:cNvPr>
@@ -11481,8 +15062,8 @@
         </p:blipFill>
         <p:spPr>
           <a:xfrm>
-            <a:off x="-657503" y="0"/>
-            <a:ext cx="4394477" cy="3299436"/>
+            <a:off x="-859675" y="-28577"/>
+            <a:ext cx="4471895" cy="3357563"/>
           </a:xfrm>
           <a:prstGeom prst="rect">
             <a:avLst/>
@@ -11492,7 +15073,7 @@
     </p:spTree>
     <p:extLst>
       <p:ext uri="{BB962C8B-B14F-4D97-AF65-F5344CB8AC3E}">
-        <p14:creationId xmlns:p14="http://schemas.microsoft.com/office/powerpoint/2010/main" val="2692764115"/>
+        <p14:creationId xmlns:p14="http://schemas.microsoft.com/office/powerpoint/2010/main" val="2926366783"/>
       </p:ext>
     </p:extLst>
   </p:cSld>
@@ -11531,12 +15112,48 @@
           <a:chExt cx="0" cy="0"/>
         </a:xfrm>
       </p:grpSpPr>
+      <p:sp>
+        <p:nvSpPr>
+          <p:cNvPr id="4" name="TextBox 3">
+            <a:extLst>
+              <a:ext uri="{FF2B5EF4-FFF2-40B4-BE49-F238E27FC236}">
+                <a16:creationId xmlns:a16="http://schemas.microsoft.com/office/drawing/2014/main" id="{B40CC955-9822-4C97-8EA5-CCA925BF2200}"/>
+              </a:ext>
+            </a:extLst>
+          </p:cNvPr>
+          <p:cNvSpPr txBox="1"/>
+          <p:nvPr/>
+        </p:nvSpPr>
+        <p:spPr>
+          <a:xfrm>
+            <a:off x="0" y="2009"/>
+            <a:ext cx="3430954" cy="369332"/>
+          </a:xfrm>
+          <a:prstGeom prst="rect">
+            <a:avLst/>
+          </a:prstGeom>
+          <a:noFill/>
+        </p:spPr>
+        <p:txBody>
+          <a:bodyPr wrap="square" rtlCol="0">
+            <a:spAutoFit/>
+          </a:bodyPr>
+          <a:lstStyle/>
+          <a:p>
+            <a:r>
+              <a:rPr lang="it-IT" u="sng" dirty="0"/>
+              <a:t>Missing Values</a:t>
+            </a:r>
+            <a:endParaRPr lang="nl-NL" u="sng" dirty="0"/>
+          </a:p>
+        </p:txBody>
+      </p:sp>
       <p:pic>
         <p:nvPicPr>
-          <p:cNvPr id="3" name="Graphic 2">
-            <a:extLst>
-              <a:ext uri="{FF2B5EF4-FFF2-40B4-BE49-F238E27FC236}">
-                <a16:creationId xmlns:a16="http://schemas.microsoft.com/office/drawing/2014/main" id="{5104F63A-8305-48CC-A7C8-38D27F499ADB}"/>
+          <p:cNvPr id="3" name="Picture 2">
+            <a:extLst>
+              <a:ext uri="{FF2B5EF4-FFF2-40B4-BE49-F238E27FC236}">
+                <a16:creationId xmlns:a16="http://schemas.microsoft.com/office/drawing/2014/main" id="{6C52EDD9-3028-4E42-A5D9-F1DB5004F6CA}"/>
               </a:ext>
             </a:extLst>
           </p:cNvPr>
@@ -11551,9 +15168,6 @@
               <a:ext uri="{28A0092B-C50C-407E-A947-70E740481C1C}">
                 <a14:useLocalDpi xmlns:a14="http://schemas.microsoft.com/office/drawing/2010/main" val="0"/>
               </a:ext>
-              <a:ext uri="{96DAC541-7B7A-43D3-8B79-37D633B846F1}">
-                <asvg:svgBlip xmlns:asvg="http://schemas.microsoft.com/office/drawing/2016/SVG/main" r:embed="rId3"/>
-              </a:ext>
             </a:extLst>
           </a:blip>
           <a:stretch>
@@ -11562,213 +15176,96 @@
         </p:blipFill>
         <p:spPr>
           <a:xfrm>
-            <a:off x="6955860" y="3300410"/>
-            <a:ext cx="4471895" cy="3357563"/>
+            <a:off x="1715477" y="0"/>
+            <a:ext cx="6455405" cy="6858000"/>
           </a:xfrm>
           <a:prstGeom prst="rect">
             <a:avLst/>
           </a:prstGeom>
         </p:spPr>
       </p:pic>
-      <p:pic>
-        <p:nvPicPr>
-          <p:cNvPr id="5" name="Graphic 4">
-            <a:extLst>
-              <a:ext uri="{FF2B5EF4-FFF2-40B4-BE49-F238E27FC236}">
-                <a16:creationId xmlns:a16="http://schemas.microsoft.com/office/drawing/2014/main" id="{B68B9AC6-63AF-4D04-8412-F617E4BD1E25}"/>
-              </a:ext>
-            </a:extLst>
-          </p:cNvPr>
-          <p:cNvPicPr>
-            <a:picLocks noChangeAspect="1"/>
-          </p:cNvPicPr>
+      <p:cxnSp>
+        <p:nvCxnSpPr>
+          <p:cNvPr id="5" name="Straight Arrow Connector 4">
+            <a:extLst>
+              <a:ext uri="{FF2B5EF4-FFF2-40B4-BE49-F238E27FC236}">
+                <a16:creationId xmlns:a16="http://schemas.microsoft.com/office/drawing/2014/main" id="{4DE2BBFA-3EDF-4661-8183-33CEFA6D6234}"/>
+              </a:ext>
+            </a:extLst>
+          </p:cNvPr>
+          <p:cNvCxnSpPr>
+            <a:cxnSpLocks/>
+            <a:stCxn id="6" idx="1"/>
+          </p:cNvCxnSpPr>
           <p:nvPr/>
-        </p:nvPicPr>
-        <p:blipFill>
-          <a:blip r:embed="rId4">
-            <a:extLst>
-              <a:ext uri="{28A0092B-C50C-407E-A947-70E740481C1C}">
-                <a14:useLocalDpi xmlns:a14="http://schemas.microsoft.com/office/drawing/2010/main" val="0"/>
-              </a:ext>
-              <a:ext uri="{96DAC541-7B7A-43D3-8B79-37D633B846F1}">
-                <asvg:svgBlip xmlns:asvg="http://schemas.microsoft.com/office/drawing/2016/SVG/main" r:embed="rId5"/>
-              </a:ext>
-            </a:extLst>
-          </a:blip>
-          <a:stretch>
-            <a:fillRect/>
-          </a:stretch>
-        </p:blipFill>
+        </p:nvCxnSpPr>
+        <p:spPr>
+          <a:xfrm flipH="1">
+            <a:off x="7868654" y="1198693"/>
+            <a:ext cx="1066798" cy="469686"/>
+          </a:xfrm>
+          <a:prstGeom prst="straightConnector1">
+            <a:avLst/>
+          </a:prstGeom>
+          <a:ln>
+            <a:tailEnd type="triangle"/>
+          </a:ln>
+        </p:spPr>
+        <p:style>
+          <a:lnRef idx="1">
+            <a:schemeClr val="accent1"/>
+          </a:lnRef>
+          <a:fillRef idx="0">
+            <a:schemeClr val="accent1"/>
+          </a:fillRef>
+          <a:effectRef idx="0">
+            <a:schemeClr val="accent1"/>
+          </a:effectRef>
+          <a:fontRef idx="minor">
+            <a:schemeClr val="tx1"/>
+          </a:fontRef>
+        </p:style>
+      </p:cxnSp>
+      <p:sp>
+        <p:nvSpPr>
+          <p:cNvPr id="6" name="TextBox 5">
+            <a:extLst>
+              <a:ext uri="{FF2B5EF4-FFF2-40B4-BE49-F238E27FC236}">
+                <a16:creationId xmlns:a16="http://schemas.microsoft.com/office/drawing/2014/main" id="{C5D9A5AB-1C42-4603-9CC8-4255D3AD50A2}"/>
+              </a:ext>
+            </a:extLst>
+          </p:cNvPr>
+          <p:cNvSpPr txBox="1"/>
+          <p:nvPr/>
+        </p:nvSpPr>
         <p:spPr>
           <a:xfrm>
-            <a:off x="915392" y="3300411"/>
-            <a:ext cx="4471895" cy="3357563"/>
+            <a:off x="8935452" y="737028"/>
+            <a:ext cx="2622884" cy="923330"/>
           </a:xfrm>
           <a:prstGeom prst="rect">
             <a:avLst/>
           </a:prstGeom>
-        </p:spPr>
-      </p:pic>
-      <p:pic>
-        <p:nvPicPr>
-          <p:cNvPr id="7" name="Graphic 6">
-            <a:extLst>
-              <a:ext uri="{FF2B5EF4-FFF2-40B4-BE49-F238E27FC236}">
-                <a16:creationId xmlns:a16="http://schemas.microsoft.com/office/drawing/2014/main" id="{A67BD1E4-1078-48C8-A0CC-A8F92079F4D0}"/>
-              </a:ext>
-            </a:extLst>
-          </p:cNvPr>
-          <p:cNvPicPr>
-            <a:picLocks noChangeAspect="1"/>
-          </p:cNvPicPr>
-          <p:nvPr/>
-        </p:nvPicPr>
-        <p:blipFill>
-          <a:blip r:embed="rId6">
-            <a:extLst>
-              <a:ext uri="{28A0092B-C50C-407E-A947-70E740481C1C}">
-                <a14:useLocalDpi xmlns:a14="http://schemas.microsoft.com/office/drawing/2010/main" val="0"/>
-              </a:ext>
-              <a:ext uri="{96DAC541-7B7A-43D3-8B79-37D633B846F1}">
-                <asvg:svgBlip xmlns:asvg="http://schemas.microsoft.com/office/drawing/2016/SVG/main" r:embed="rId7"/>
-              </a:ext>
-            </a:extLst>
-          </a:blip>
-          <a:stretch>
-            <a:fillRect/>
-          </a:stretch>
-        </p:blipFill>
-        <p:spPr>
-          <a:xfrm>
-            <a:off x="8416461" y="0"/>
-            <a:ext cx="4471895" cy="3357563"/>
-          </a:xfrm>
-          <a:prstGeom prst="rect">
-            <a:avLst/>
-          </a:prstGeom>
-        </p:spPr>
-      </p:pic>
-      <p:pic>
-        <p:nvPicPr>
-          <p:cNvPr id="9" name="Graphic 8">
-            <a:extLst>
-              <a:ext uri="{FF2B5EF4-FFF2-40B4-BE49-F238E27FC236}">
-                <a16:creationId xmlns:a16="http://schemas.microsoft.com/office/drawing/2014/main" id="{9FBB4D53-4F61-4420-B2EA-5DBB2190FBDD}"/>
-              </a:ext>
-            </a:extLst>
-          </p:cNvPr>
-          <p:cNvPicPr>
-            <a:picLocks noChangeAspect="1"/>
-          </p:cNvPicPr>
-          <p:nvPr/>
-        </p:nvPicPr>
-        <p:blipFill>
-          <a:blip r:embed="rId8">
-            <a:extLst>
-              <a:ext uri="{28A0092B-C50C-407E-A947-70E740481C1C}">
-                <a14:useLocalDpi xmlns:a14="http://schemas.microsoft.com/office/drawing/2010/main" val="0"/>
-              </a:ext>
-              <a:ext uri="{96DAC541-7B7A-43D3-8B79-37D633B846F1}">
-                <asvg:svgBlip xmlns:asvg="http://schemas.microsoft.com/office/drawing/2016/SVG/main" r:embed="rId9"/>
-              </a:ext>
-            </a:extLst>
-          </a:blip>
-          <a:stretch>
-            <a:fillRect/>
-          </a:stretch>
-        </p:blipFill>
-        <p:spPr>
-          <a:xfrm>
-            <a:off x="5405166" y="0"/>
-            <a:ext cx="4471895" cy="3357563"/>
-          </a:xfrm>
-          <a:prstGeom prst="rect">
-            <a:avLst/>
-          </a:prstGeom>
-        </p:spPr>
-      </p:pic>
-      <p:pic>
-        <p:nvPicPr>
-          <p:cNvPr id="11" name="Graphic 10">
-            <a:extLst>
-              <a:ext uri="{FF2B5EF4-FFF2-40B4-BE49-F238E27FC236}">
-                <a16:creationId xmlns:a16="http://schemas.microsoft.com/office/drawing/2014/main" id="{9947BBB5-44C5-48CF-969E-441FAF4420ED}"/>
-              </a:ext>
-            </a:extLst>
-          </p:cNvPr>
-          <p:cNvPicPr>
-            <a:picLocks noChangeAspect="1"/>
-          </p:cNvPicPr>
-          <p:nvPr/>
-        </p:nvPicPr>
-        <p:blipFill>
-          <a:blip r:embed="rId10">
-            <a:extLst>
-              <a:ext uri="{28A0092B-C50C-407E-A947-70E740481C1C}">
-                <a14:useLocalDpi xmlns:a14="http://schemas.microsoft.com/office/drawing/2010/main" val="0"/>
-              </a:ext>
-              <a:ext uri="{96DAC541-7B7A-43D3-8B79-37D633B846F1}">
-                <asvg:svgBlip xmlns:asvg="http://schemas.microsoft.com/office/drawing/2016/SVG/main" r:embed="rId11"/>
-              </a:ext>
-            </a:extLst>
-          </a:blip>
-          <a:stretch>
-            <a:fillRect/>
-          </a:stretch>
-        </p:blipFill>
-        <p:spPr>
-          <a:xfrm>
-            <a:off x="2314940" y="0"/>
-            <a:ext cx="4471895" cy="3357563"/>
-          </a:xfrm>
-          <a:prstGeom prst="rect">
-            <a:avLst/>
-          </a:prstGeom>
-        </p:spPr>
-      </p:pic>
-      <p:pic>
-        <p:nvPicPr>
-          <p:cNvPr id="13" name="Graphic 12">
-            <a:extLst>
-              <a:ext uri="{FF2B5EF4-FFF2-40B4-BE49-F238E27FC236}">
-                <a16:creationId xmlns:a16="http://schemas.microsoft.com/office/drawing/2014/main" id="{FC69359F-A5B2-4EC6-BD2E-74DFBA522CFC}"/>
-              </a:ext>
-            </a:extLst>
-          </p:cNvPr>
-          <p:cNvPicPr>
-            <a:picLocks noChangeAspect="1"/>
-          </p:cNvPicPr>
-          <p:nvPr/>
-        </p:nvPicPr>
-        <p:blipFill>
-          <a:blip r:embed="rId12">
-            <a:extLst>
-              <a:ext uri="{28A0092B-C50C-407E-A947-70E740481C1C}">
-                <a14:useLocalDpi xmlns:a14="http://schemas.microsoft.com/office/drawing/2010/main" val="0"/>
-              </a:ext>
-              <a:ext uri="{96DAC541-7B7A-43D3-8B79-37D633B846F1}">
-                <asvg:svgBlip xmlns:asvg="http://schemas.microsoft.com/office/drawing/2016/SVG/main" r:embed="rId13"/>
-              </a:ext>
-            </a:extLst>
-          </a:blip>
-          <a:stretch>
-            <a:fillRect/>
-          </a:stretch>
-        </p:blipFill>
-        <p:spPr>
-          <a:xfrm>
-            <a:off x="-859675" y="-28577"/>
-            <a:ext cx="4471895" cy="3357563"/>
-          </a:xfrm>
-          <a:prstGeom prst="rect">
-            <a:avLst/>
-          </a:prstGeom>
-        </p:spPr>
-      </p:pic>
+          <a:noFill/>
+        </p:spPr>
+        <p:txBody>
+          <a:bodyPr wrap="square" rtlCol="0">
+            <a:spAutoFit/>
+          </a:bodyPr>
+          <a:lstStyle/>
+          <a:p>
+            <a:r>
+              <a:rPr lang="it-IT" dirty="0"/>
+              <a:t>This is the Pivoted data, that can increase the scarcity of the data</a:t>
+            </a:r>
+            <a:endParaRPr lang="nl-NL" dirty="0"/>
+          </a:p>
+        </p:txBody>
+      </p:sp>
     </p:spTree>
     <p:extLst>
       <p:ext uri="{BB962C8B-B14F-4D97-AF65-F5344CB8AC3E}">
-        <p14:creationId xmlns:p14="http://schemas.microsoft.com/office/powerpoint/2010/main" val="2926366783"/>
+        <p14:creationId xmlns:p14="http://schemas.microsoft.com/office/powerpoint/2010/main" val="2771455475"/>
       </p:ext>
     </p:extLst>
   </p:cSld>

--- a/assets/ppt/data_exploration.pptx
+++ b/assets/ppt/data_exploration.pptx
@@ -5,7 +5,7 @@
     <p:sldMasterId id="2147483648" r:id="rId1"/>
   </p:sldMasterIdLst>
   <p:notesMasterIdLst>
-    <p:notesMasterId r:id="rId35"/>
+    <p:notesMasterId r:id="rId39"/>
   </p:notesMasterIdLst>
   <p:sldIdLst>
     <p:sldId id="257" r:id="rId2"/>
@@ -28,19 +28,23 @@
     <p:sldId id="284" r:id="rId19"/>
     <p:sldId id="289" r:id="rId20"/>
     <p:sldId id="288" r:id="rId21"/>
-    <p:sldId id="287" r:id="rId22"/>
-    <p:sldId id="259" r:id="rId23"/>
-    <p:sldId id="274" r:id="rId24"/>
-    <p:sldId id="275" r:id="rId25"/>
-    <p:sldId id="279" r:id="rId26"/>
-    <p:sldId id="278" r:id="rId27"/>
-    <p:sldId id="276" r:id="rId28"/>
-    <p:sldId id="277" r:id="rId29"/>
-    <p:sldId id="268" r:id="rId30"/>
-    <p:sldId id="269" r:id="rId31"/>
-    <p:sldId id="271" r:id="rId32"/>
-    <p:sldId id="272" r:id="rId33"/>
-    <p:sldId id="267" r:id="rId34"/>
+    <p:sldId id="291" r:id="rId22"/>
+    <p:sldId id="287" r:id="rId23"/>
+    <p:sldId id="290" r:id="rId24"/>
+    <p:sldId id="292" r:id="rId25"/>
+    <p:sldId id="293" r:id="rId26"/>
+    <p:sldId id="259" r:id="rId27"/>
+    <p:sldId id="274" r:id="rId28"/>
+    <p:sldId id="275" r:id="rId29"/>
+    <p:sldId id="279" r:id="rId30"/>
+    <p:sldId id="278" r:id="rId31"/>
+    <p:sldId id="276" r:id="rId32"/>
+    <p:sldId id="277" r:id="rId33"/>
+    <p:sldId id="268" r:id="rId34"/>
+    <p:sldId id="269" r:id="rId35"/>
+    <p:sldId id="271" r:id="rId36"/>
+    <p:sldId id="272" r:id="rId37"/>
+    <p:sldId id="267" r:id="rId38"/>
   </p:sldIdLst>
   <p:sldSz cx="12192000" cy="6858000"/>
   <p:notesSz cx="6858000" cy="9144000"/>
@@ -1052,7 +1056,7 @@
           <a:p>
             <a:fld id="{511A67EE-E303-4967-962F-9A28980F7F51}" type="datetimeFigureOut">
               <a:rPr lang="nl-NL" smtClean="0"/>
-              <a:t>28-8-2024</a:t>
+              <a:t>29-8-2024</a:t>
             </a:fld>
             <a:endParaRPr lang="nl-NL"/>
           </a:p>
@@ -1469,7 +1473,7 @@
           <a:p>
             <a:fld id="{FED566F3-1D76-4AEC-ABE9-AFABCF495913}" type="datetime1">
               <a:rPr lang="nl-NL" smtClean="0"/>
-              <a:t>28-8-2024</a:t>
+              <a:t>29-8-2024</a:t>
             </a:fld>
             <a:endParaRPr lang="nl-NL"/>
           </a:p>
@@ -1681,7 +1685,7 @@
           <a:p>
             <a:fld id="{BC7E55A1-B228-4CF1-BFC3-6AC3B8574AC2}" type="datetime1">
               <a:rPr lang="nl-NL" smtClean="0"/>
-              <a:t>28-8-2024</a:t>
+              <a:t>29-8-2024</a:t>
             </a:fld>
             <a:endParaRPr lang="nl-NL"/>
           </a:p>
@@ -1903,7 +1907,7 @@
           <a:p>
             <a:fld id="{31AEBC58-6519-439D-8982-F0178170B57B}" type="datetime1">
               <a:rPr lang="nl-NL" smtClean="0"/>
-              <a:t>28-8-2024</a:t>
+              <a:t>29-8-2024</a:t>
             </a:fld>
             <a:endParaRPr lang="nl-NL"/>
           </a:p>
@@ -2115,7 +2119,7 @@
           <a:p>
             <a:fld id="{86DED964-D172-498F-BB83-2F7DE2692B37}" type="datetime1">
               <a:rPr lang="nl-NL" smtClean="0"/>
-              <a:t>28-8-2024</a:t>
+              <a:t>29-8-2024</a:t>
             </a:fld>
             <a:endParaRPr lang="nl-NL"/>
           </a:p>
@@ -2403,7 +2407,7 @@
           <a:p>
             <a:fld id="{230F72AC-D91D-48F5-81B4-4889AEA39D06}" type="datetime1">
               <a:rPr lang="nl-NL" smtClean="0"/>
-              <a:t>28-8-2024</a:t>
+              <a:t>29-8-2024</a:t>
             </a:fld>
             <a:endParaRPr lang="nl-NL"/>
           </a:p>
@@ -2683,7 +2687,7 @@
           <a:p>
             <a:fld id="{A0669485-26A9-497C-AD22-BCEA88DF9055}" type="datetime1">
               <a:rPr lang="nl-NL" smtClean="0"/>
-              <a:t>28-8-2024</a:t>
+              <a:t>29-8-2024</a:t>
             </a:fld>
             <a:endParaRPr lang="nl-NL"/>
           </a:p>
@@ -3110,7 +3114,7 @@
           <a:p>
             <a:fld id="{6216D00C-0C62-40DF-B6FF-B9A70701552F}" type="datetime1">
               <a:rPr lang="nl-NL" smtClean="0"/>
-              <a:t>28-8-2024</a:t>
+              <a:t>29-8-2024</a:t>
             </a:fld>
             <a:endParaRPr lang="nl-NL"/>
           </a:p>
@@ -3264,7 +3268,7 @@
           <a:p>
             <a:fld id="{88FE9515-DD39-459B-B4EF-789D74C861A5}" type="datetime1">
               <a:rPr lang="nl-NL" smtClean="0"/>
-              <a:t>28-8-2024</a:t>
+              <a:t>29-8-2024</a:t>
             </a:fld>
             <a:endParaRPr lang="nl-NL"/>
           </a:p>
@@ -3389,7 +3393,7 @@
           <a:p>
             <a:fld id="{DFA27954-A76F-4E23-8576-A7D9667CDBCC}" type="datetime1">
               <a:rPr lang="nl-NL" smtClean="0"/>
-              <a:t>28-8-2024</a:t>
+              <a:t>29-8-2024</a:t>
             </a:fld>
             <a:endParaRPr lang="nl-NL"/>
           </a:p>
@@ -3714,7 +3718,7 @@
           <a:p>
             <a:fld id="{53C17D54-D850-41AA-94F6-0F7316E4F326}" type="datetime1">
               <a:rPr lang="nl-NL" smtClean="0"/>
-              <a:t>28-8-2024</a:t>
+              <a:t>29-8-2024</a:t>
             </a:fld>
             <a:endParaRPr lang="nl-NL"/>
           </a:p>
@@ -4015,7 +4019,7 @@
           <a:p>
             <a:fld id="{0596A96E-3739-43D3-93E5-DAA507EA7B79}" type="datetime1">
               <a:rPr lang="nl-NL" smtClean="0"/>
-              <a:t>28-8-2024</a:t>
+              <a:t>29-8-2024</a:t>
             </a:fld>
             <a:endParaRPr lang="nl-NL"/>
           </a:p>
@@ -4270,7 +4274,7 @@
           <a:p>
             <a:fld id="{CFBB0748-A22F-4137-ADB1-6D5A09F7B1DF}" type="datetime1">
               <a:rPr lang="nl-NL" smtClean="0"/>
-              <a:t>28-8-2024</a:t>
+              <a:t>29-8-2024</a:t>
             </a:fld>
             <a:endParaRPr lang="nl-NL"/>
           </a:p>
@@ -6170,7 +6174,7 @@
             <a:pPr algn="ctr"/>
             <a:r>
               <a:rPr lang="it-IT" sz="3200" dirty="0"/>
-              <a:t>New Strategy</a:t>
+              <a:t>Strategy 2</a:t>
             </a:r>
             <a:endParaRPr lang="nl-NL" sz="3200" dirty="0"/>
           </a:p>
@@ -9202,10 +9206,47 @@
           <a:chExt cx="0" cy="0"/>
         </a:xfrm>
       </p:grpSpPr>
+      <p:sp>
+        <p:nvSpPr>
+          <p:cNvPr id="2" name="TextBox 1">
+            <a:extLst>
+              <a:ext uri="{FF2B5EF4-FFF2-40B4-BE49-F238E27FC236}">
+                <a16:creationId xmlns:a16="http://schemas.microsoft.com/office/drawing/2014/main" id="{6E0A7A84-3B9F-4444-9267-CAFBABDBBBA3}"/>
+              </a:ext>
+            </a:extLst>
+          </p:cNvPr>
+          <p:cNvSpPr txBox="1"/>
+          <p:nvPr/>
+        </p:nvSpPr>
+        <p:spPr>
+          <a:xfrm>
+            <a:off x="3709737" y="3136612"/>
+            <a:ext cx="4772526" cy="584775"/>
+          </a:xfrm>
+          <a:prstGeom prst="rect">
+            <a:avLst/>
+          </a:prstGeom>
+          <a:noFill/>
+        </p:spPr>
+        <p:txBody>
+          <a:bodyPr wrap="square" rtlCol="0">
+            <a:spAutoFit/>
+          </a:bodyPr>
+          <a:lstStyle/>
+          <a:p>
+            <a:pPr algn="ctr"/>
+            <a:r>
+              <a:rPr lang="it-IT" sz="3200" dirty="0"/>
+              <a:t>Definetly not working...</a:t>
+            </a:r>
+            <a:endParaRPr lang="nl-NL" sz="3200" dirty="0"/>
+          </a:p>
+        </p:txBody>
+      </p:sp>
     </p:spTree>
     <p:extLst>
       <p:ext uri="{BB962C8B-B14F-4D97-AF65-F5344CB8AC3E}">
-        <p14:creationId xmlns:p14="http://schemas.microsoft.com/office/powerpoint/2010/main" val="1927968865"/>
+        <p14:creationId xmlns:p14="http://schemas.microsoft.com/office/powerpoint/2010/main" val="95477958"/>
       </p:ext>
     </p:extLst>
   </p:cSld>
@@ -9246,6 +9287,969 @@
       </p:grpSpPr>
       <p:sp>
         <p:nvSpPr>
+          <p:cNvPr id="2" name="TextBox 1">
+            <a:extLst>
+              <a:ext uri="{FF2B5EF4-FFF2-40B4-BE49-F238E27FC236}">
+                <a16:creationId xmlns:a16="http://schemas.microsoft.com/office/drawing/2014/main" id="{A2173A06-E055-4964-BA41-68DADB5DF996}"/>
+              </a:ext>
+            </a:extLst>
+          </p:cNvPr>
+          <p:cNvSpPr txBox="1"/>
+          <p:nvPr/>
+        </p:nvSpPr>
+        <p:spPr>
+          <a:xfrm>
+            <a:off x="3709737" y="3136612"/>
+            <a:ext cx="4772526" cy="584775"/>
+          </a:xfrm>
+          <a:prstGeom prst="rect">
+            <a:avLst/>
+          </a:prstGeom>
+          <a:noFill/>
+        </p:spPr>
+        <p:txBody>
+          <a:bodyPr wrap="square" rtlCol="0">
+            <a:spAutoFit/>
+          </a:bodyPr>
+          <a:lstStyle/>
+          <a:p>
+            <a:pPr algn="ctr"/>
+            <a:r>
+              <a:rPr lang="it-IT" sz="3200" dirty="0"/>
+              <a:t>Strategy 3</a:t>
+            </a:r>
+            <a:endParaRPr lang="nl-NL" sz="3200" dirty="0"/>
+          </a:p>
+        </p:txBody>
+      </p:sp>
+    </p:spTree>
+    <p:extLst>
+      <p:ext uri="{BB962C8B-B14F-4D97-AF65-F5344CB8AC3E}">
+        <p14:creationId xmlns:p14="http://schemas.microsoft.com/office/powerpoint/2010/main" val="1927968865"/>
+      </p:ext>
+    </p:extLst>
+  </p:cSld>
+  <p:clrMapOvr>
+    <a:masterClrMapping/>
+  </p:clrMapOvr>
+  <mc:AlternateContent xmlns:mc="http://schemas.openxmlformats.org/markup-compatibility/2006" xmlns:p159="http://schemas.microsoft.com/office/powerpoint/2015/09/main">
+    <mc:Choice Requires="p159">
+      <p:transition spd="slow">
+        <p159:morph option="byObject"/>
+      </p:transition>
+    </mc:Choice>
+    <mc:Fallback xmlns="">
+      <p:transition spd="slow">
+        <p:fade/>
+      </p:transition>
+    </mc:Fallback>
+  </mc:AlternateContent>
+</p:sld>
+</file>
+
+<file path=ppt/slides/slide23.xml><?xml version="1.0" encoding="utf-8"?>
+<p:sld xmlns:a="http://schemas.openxmlformats.org/drawingml/2006/main" xmlns:r="http://schemas.openxmlformats.org/officeDocument/2006/relationships" xmlns:p="http://schemas.openxmlformats.org/presentationml/2006/main">
+  <p:cSld>
+    <p:spTree>
+      <p:nvGrpSpPr>
+        <p:cNvPr id="1" name=""/>
+        <p:cNvGrpSpPr/>
+        <p:nvPr/>
+      </p:nvGrpSpPr>
+      <p:grpSpPr>
+        <a:xfrm>
+          <a:off x="0" y="0"/>
+          <a:ext cx="0" cy="0"/>
+          <a:chOff x="0" y="0"/>
+          <a:chExt cx="0" cy="0"/>
+        </a:xfrm>
+      </p:grpSpPr>
+      <p:pic>
+        <p:nvPicPr>
+          <p:cNvPr id="2" name="Graphic 1" descr="Database">
+            <a:extLst>
+              <a:ext uri="{FF2B5EF4-FFF2-40B4-BE49-F238E27FC236}">
+                <a16:creationId xmlns:a16="http://schemas.microsoft.com/office/drawing/2014/main" id="{449AF60D-4D6F-4DF7-80E8-163F21B1FABD}"/>
+              </a:ext>
+            </a:extLst>
+          </p:cNvPr>
+          <p:cNvPicPr>
+            <a:picLocks noChangeAspect="1"/>
+          </p:cNvPicPr>
+          <p:nvPr/>
+        </p:nvPicPr>
+        <p:blipFill>
+          <a:blip r:embed="rId2">
+            <a:extLst>
+              <a:ext uri="{28A0092B-C50C-407E-A947-70E740481C1C}">
+                <a14:useLocalDpi xmlns:a14="http://schemas.microsoft.com/office/drawing/2010/main" val="0"/>
+              </a:ext>
+              <a:ext uri="{96DAC541-7B7A-43D3-8B79-37D633B846F1}">
+                <asvg:svgBlip xmlns:asvg="http://schemas.microsoft.com/office/drawing/2016/SVG/main" r:embed="rId3"/>
+              </a:ext>
+            </a:extLst>
+          </a:blip>
+          <a:stretch>
+            <a:fillRect/>
+          </a:stretch>
+        </p:blipFill>
+        <p:spPr>
+          <a:xfrm>
+            <a:off x="1676400" y="2964920"/>
+            <a:ext cx="914400" cy="914400"/>
+          </a:xfrm>
+          <a:prstGeom prst="rect">
+            <a:avLst/>
+          </a:prstGeom>
+        </p:spPr>
+      </p:pic>
+      <p:sp>
+        <p:nvSpPr>
+          <p:cNvPr id="3" name="TextBox 2">
+            <a:extLst>
+              <a:ext uri="{FF2B5EF4-FFF2-40B4-BE49-F238E27FC236}">
+                <a16:creationId xmlns:a16="http://schemas.microsoft.com/office/drawing/2014/main" id="{EF4B8F17-68DE-42EB-9D5E-7551561D7CEB}"/>
+              </a:ext>
+            </a:extLst>
+          </p:cNvPr>
+          <p:cNvSpPr txBox="1"/>
+          <p:nvPr/>
+        </p:nvSpPr>
+        <p:spPr>
+          <a:xfrm>
+            <a:off x="1275348" y="2704556"/>
+            <a:ext cx="1716502" cy="369332"/>
+          </a:xfrm>
+          <a:prstGeom prst="rect">
+            <a:avLst/>
+          </a:prstGeom>
+          <a:noFill/>
+        </p:spPr>
+        <p:txBody>
+          <a:bodyPr wrap="square" rtlCol="0">
+            <a:spAutoFit/>
+          </a:bodyPr>
+          <a:lstStyle/>
+          <a:p>
+            <a:pPr algn="ctr"/>
+            <a:r>
+              <a:rPr lang="it-IT" dirty="0"/>
+              <a:t>Data with NaNs</a:t>
+            </a:r>
+            <a:endParaRPr lang="nl-NL" dirty="0"/>
+          </a:p>
+        </p:txBody>
+      </p:sp>
+      <p:sp>
+        <p:nvSpPr>
+          <p:cNvPr id="4" name="TextBox 3">
+            <a:extLst>
+              <a:ext uri="{FF2B5EF4-FFF2-40B4-BE49-F238E27FC236}">
+                <a16:creationId xmlns:a16="http://schemas.microsoft.com/office/drawing/2014/main" id="{4BDE646C-1375-4835-99F9-196DF7430ACD}"/>
+              </a:ext>
+            </a:extLst>
+          </p:cNvPr>
+          <p:cNvSpPr txBox="1"/>
+          <p:nvPr/>
+        </p:nvSpPr>
+        <p:spPr>
+          <a:xfrm>
+            <a:off x="0" y="0"/>
+            <a:ext cx="3457074" cy="369332"/>
+          </a:xfrm>
+          <a:prstGeom prst="rect">
+            <a:avLst/>
+          </a:prstGeom>
+          <a:noFill/>
+        </p:spPr>
+        <p:txBody>
+          <a:bodyPr wrap="square" rtlCol="0">
+            <a:spAutoFit/>
+          </a:bodyPr>
+          <a:lstStyle/>
+          <a:p>
+            <a:r>
+              <a:rPr lang="it-IT" u="sng" dirty="0"/>
+              <a:t>Data processing - Pipeline</a:t>
+            </a:r>
+            <a:endParaRPr lang="nl-NL" u="sng" dirty="0"/>
+          </a:p>
+        </p:txBody>
+      </p:sp>
+      <p:cxnSp>
+        <p:nvCxnSpPr>
+          <p:cNvPr id="6" name="Straight Arrow Connector 5">
+            <a:extLst>
+              <a:ext uri="{FF2B5EF4-FFF2-40B4-BE49-F238E27FC236}">
+                <a16:creationId xmlns:a16="http://schemas.microsoft.com/office/drawing/2014/main" id="{D26349C7-BE7C-45C8-AC0A-95708985B7ED}"/>
+              </a:ext>
+            </a:extLst>
+          </p:cNvPr>
+          <p:cNvCxnSpPr>
+            <a:cxnSpLocks/>
+            <a:stCxn id="2" idx="3"/>
+            <a:endCxn id="8" idx="1"/>
+          </p:cNvCxnSpPr>
+          <p:nvPr/>
+        </p:nvCxnSpPr>
+        <p:spPr>
+          <a:xfrm>
+            <a:off x="2590800" y="3422120"/>
+            <a:ext cx="1315452" cy="0"/>
+          </a:xfrm>
+          <a:prstGeom prst="straightConnector1">
+            <a:avLst/>
+          </a:prstGeom>
+          <a:ln>
+            <a:tailEnd type="triangle"/>
+          </a:ln>
+        </p:spPr>
+        <p:style>
+          <a:lnRef idx="1">
+            <a:schemeClr val="accent1"/>
+          </a:lnRef>
+          <a:fillRef idx="0">
+            <a:schemeClr val="accent1"/>
+          </a:fillRef>
+          <a:effectRef idx="0">
+            <a:schemeClr val="accent1"/>
+          </a:effectRef>
+          <a:fontRef idx="minor">
+            <a:schemeClr val="tx1"/>
+          </a:fontRef>
+        </p:style>
+      </p:cxnSp>
+      <p:sp>
+        <p:nvSpPr>
+          <p:cNvPr id="8" name="Rectangle: Rounded Corners 7">
+            <a:extLst>
+              <a:ext uri="{FF2B5EF4-FFF2-40B4-BE49-F238E27FC236}">
+                <a16:creationId xmlns:a16="http://schemas.microsoft.com/office/drawing/2014/main" id="{D795A676-9415-4002-B1B7-7025F9D91A94}"/>
+              </a:ext>
+            </a:extLst>
+          </p:cNvPr>
+          <p:cNvSpPr/>
+          <p:nvPr/>
+        </p:nvSpPr>
+        <p:spPr>
+          <a:xfrm>
+            <a:off x="3906252" y="3007532"/>
+            <a:ext cx="2053389" cy="829176"/>
+          </a:xfrm>
+          <a:prstGeom prst="roundRect">
+            <a:avLst/>
+          </a:prstGeom>
+        </p:spPr>
+        <p:style>
+          <a:lnRef idx="2">
+            <a:schemeClr val="accent1">
+              <a:shade val="50000"/>
+            </a:schemeClr>
+          </a:lnRef>
+          <a:fillRef idx="1">
+            <a:schemeClr val="accent1"/>
+          </a:fillRef>
+          <a:effectRef idx="0">
+            <a:schemeClr val="accent1"/>
+          </a:effectRef>
+          <a:fontRef idx="minor">
+            <a:schemeClr val="lt1"/>
+          </a:fontRef>
+        </p:style>
+        <p:txBody>
+          <a:bodyPr rtlCol="0" anchor="ctr"/>
+          <a:lstStyle/>
+          <a:p>
+            <a:pPr algn="ctr"/>
+            <a:r>
+              <a:rPr lang="it-IT" dirty="0"/>
+              <a:t>Weighted AVG if pt has undergo that meas</a:t>
+            </a:r>
+            <a:endParaRPr lang="nl-NL" dirty="0"/>
+          </a:p>
+        </p:txBody>
+      </p:sp>
+      <p:sp>
+        <p:nvSpPr>
+          <p:cNvPr id="11" name="Rectangle: Rounded Corners 10">
+            <a:extLst>
+              <a:ext uri="{FF2B5EF4-FFF2-40B4-BE49-F238E27FC236}">
+                <a16:creationId xmlns:a16="http://schemas.microsoft.com/office/drawing/2014/main" id="{B3356680-ECA9-49AE-AFFD-FBCE91A67EC0}"/>
+              </a:ext>
+            </a:extLst>
+          </p:cNvPr>
+          <p:cNvSpPr/>
+          <p:nvPr/>
+        </p:nvSpPr>
+        <p:spPr>
+          <a:xfrm>
+            <a:off x="6874043" y="3014412"/>
+            <a:ext cx="1588168" cy="829176"/>
+          </a:xfrm>
+          <a:prstGeom prst="roundRect">
+            <a:avLst/>
+          </a:prstGeom>
+        </p:spPr>
+        <p:style>
+          <a:lnRef idx="2">
+            <a:schemeClr val="accent1">
+              <a:shade val="50000"/>
+            </a:schemeClr>
+          </a:lnRef>
+          <a:fillRef idx="1">
+            <a:schemeClr val="accent1"/>
+          </a:fillRef>
+          <a:effectRef idx="0">
+            <a:schemeClr val="accent1"/>
+          </a:effectRef>
+          <a:fontRef idx="minor">
+            <a:schemeClr val="lt1"/>
+          </a:fontRef>
+        </p:style>
+        <p:txBody>
+          <a:bodyPr rtlCol="0" anchor="ctr"/>
+          <a:lstStyle/>
+          <a:p>
+            <a:pPr algn="ctr"/>
+            <a:r>
+              <a:rPr lang="it-IT" dirty="0"/>
+              <a:t>MICE Forest</a:t>
+            </a:r>
+            <a:endParaRPr lang="nl-NL" dirty="0"/>
+          </a:p>
+        </p:txBody>
+      </p:sp>
+      <p:cxnSp>
+        <p:nvCxnSpPr>
+          <p:cNvPr id="14" name="Straight Arrow Connector 13">
+            <a:extLst>
+              <a:ext uri="{FF2B5EF4-FFF2-40B4-BE49-F238E27FC236}">
+                <a16:creationId xmlns:a16="http://schemas.microsoft.com/office/drawing/2014/main" id="{E5BC7136-27F3-4AF0-A650-313ACCC5D9F3}"/>
+              </a:ext>
+            </a:extLst>
+          </p:cNvPr>
+          <p:cNvCxnSpPr>
+            <a:stCxn id="8" idx="3"/>
+            <a:endCxn id="11" idx="1"/>
+          </p:cNvCxnSpPr>
+          <p:nvPr/>
+        </p:nvCxnSpPr>
+        <p:spPr>
+          <a:xfrm>
+            <a:off x="5959641" y="3422120"/>
+            <a:ext cx="914402" cy="6880"/>
+          </a:xfrm>
+          <a:prstGeom prst="straightConnector1">
+            <a:avLst/>
+          </a:prstGeom>
+          <a:ln>
+            <a:tailEnd type="triangle"/>
+          </a:ln>
+        </p:spPr>
+        <p:style>
+          <a:lnRef idx="1">
+            <a:schemeClr val="accent1"/>
+          </a:lnRef>
+          <a:fillRef idx="0">
+            <a:schemeClr val="accent1"/>
+          </a:fillRef>
+          <a:effectRef idx="0">
+            <a:schemeClr val="accent1"/>
+          </a:effectRef>
+          <a:fontRef idx="minor">
+            <a:schemeClr val="tx1"/>
+          </a:fontRef>
+        </p:style>
+      </p:cxnSp>
+      <p:pic>
+        <p:nvPicPr>
+          <p:cNvPr id="16" name="Graphic 15" descr="Database">
+            <a:extLst>
+              <a:ext uri="{FF2B5EF4-FFF2-40B4-BE49-F238E27FC236}">
+                <a16:creationId xmlns:a16="http://schemas.microsoft.com/office/drawing/2014/main" id="{CFA01DF2-1837-46C5-9A16-1B6A46866A9D}"/>
+              </a:ext>
+            </a:extLst>
+          </p:cNvPr>
+          <p:cNvPicPr>
+            <a:picLocks noChangeAspect="1"/>
+          </p:cNvPicPr>
+          <p:nvPr/>
+        </p:nvPicPr>
+        <p:blipFill>
+          <a:blip r:embed="rId2">
+            <a:extLst>
+              <a:ext uri="{28A0092B-C50C-407E-A947-70E740481C1C}">
+                <a14:useLocalDpi xmlns:a14="http://schemas.microsoft.com/office/drawing/2010/main" val="0"/>
+              </a:ext>
+              <a:ext uri="{96DAC541-7B7A-43D3-8B79-37D633B846F1}">
+                <asvg:svgBlip xmlns:asvg="http://schemas.microsoft.com/office/drawing/2016/SVG/main" r:embed="rId3"/>
+              </a:ext>
+            </a:extLst>
+          </a:blip>
+          <a:stretch>
+            <a:fillRect/>
+          </a:stretch>
+        </p:blipFill>
+        <p:spPr>
+          <a:xfrm>
+            <a:off x="9841833" y="2964920"/>
+            <a:ext cx="914400" cy="914400"/>
+          </a:xfrm>
+          <a:prstGeom prst="rect">
+            <a:avLst/>
+          </a:prstGeom>
+        </p:spPr>
+      </p:pic>
+      <p:cxnSp>
+        <p:nvCxnSpPr>
+          <p:cNvPr id="18" name="Straight Arrow Connector 17">
+            <a:extLst>
+              <a:ext uri="{FF2B5EF4-FFF2-40B4-BE49-F238E27FC236}">
+                <a16:creationId xmlns:a16="http://schemas.microsoft.com/office/drawing/2014/main" id="{D9696F83-8425-432B-8C85-9DE9D194F48A}"/>
+              </a:ext>
+            </a:extLst>
+          </p:cNvPr>
+          <p:cNvCxnSpPr>
+            <a:cxnSpLocks/>
+            <a:stCxn id="11" idx="3"/>
+            <a:endCxn id="16" idx="1"/>
+          </p:cNvCxnSpPr>
+          <p:nvPr/>
+        </p:nvCxnSpPr>
+        <p:spPr>
+          <a:xfrm flipV="1">
+            <a:off x="8462211" y="3422120"/>
+            <a:ext cx="1379622" cy="6880"/>
+          </a:xfrm>
+          <a:prstGeom prst="straightConnector1">
+            <a:avLst/>
+          </a:prstGeom>
+          <a:ln>
+            <a:tailEnd type="triangle"/>
+          </a:ln>
+        </p:spPr>
+        <p:style>
+          <a:lnRef idx="1">
+            <a:schemeClr val="accent1"/>
+          </a:lnRef>
+          <a:fillRef idx="0">
+            <a:schemeClr val="accent1"/>
+          </a:fillRef>
+          <a:effectRef idx="0">
+            <a:schemeClr val="accent1"/>
+          </a:effectRef>
+          <a:fontRef idx="minor">
+            <a:schemeClr val="tx1"/>
+          </a:fontRef>
+        </p:style>
+      </p:cxnSp>
+      <p:sp>
+        <p:nvSpPr>
+          <p:cNvPr id="21" name="TextBox 20">
+            <a:extLst>
+              <a:ext uri="{FF2B5EF4-FFF2-40B4-BE49-F238E27FC236}">
+                <a16:creationId xmlns:a16="http://schemas.microsoft.com/office/drawing/2014/main" id="{A5A0CE27-29B8-440B-BD89-3EC604551F54}"/>
+              </a:ext>
+            </a:extLst>
+          </p:cNvPr>
+          <p:cNvSpPr txBox="1"/>
+          <p:nvPr/>
+        </p:nvSpPr>
+        <p:spPr>
+          <a:xfrm>
+            <a:off x="9220201" y="2602468"/>
+            <a:ext cx="2157664" cy="369332"/>
+          </a:xfrm>
+          <a:prstGeom prst="rect">
+            <a:avLst/>
+          </a:prstGeom>
+          <a:noFill/>
+        </p:spPr>
+        <p:txBody>
+          <a:bodyPr wrap="square" rtlCol="0">
+            <a:spAutoFit/>
+          </a:bodyPr>
+          <a:lstStyle/>
+          <a:p>
+            <a:pPr algn="ctr"/>
+            <a:r>
+              <a:rPr lang="it-IT" dirty="0"/>
+              <a:t>Complete Data</a:t>
+            </a:r>
+            <a:endParaRPr lang="nl-NL" dirty="0"/>
+          </a:p>
+        </p:txBody>
+      </p:sp>
+      <p:sp>
+        <p:nvSpPr>
+          <p:cNvPr id="22" name="Oval 21">
+            <a:extLst>
+              <a:ext uri="{FF2B5EF4-FFF2-40B4-BE49-F238E27FC236}">
+                <a16:creationId xmlns:a16="http://schemas.microsoft.com/office/drawing/2014/main" id="{D3304676-921B-4925-BDF9-B8B88E00BC32}"/>
+              </a:ext>
+            </a:extLst>
+          </p:cNvPr>
+          <p:cNvSpPr/>
+          <p:nvPr/>
+        </p:nvSpPr>
+        <p:spPr>
+          <a:xfrm>
+            <a:off x="1772651" y="3508347"/>
+            <a:ext cx="192505" cy="192505"/>
+          </a:xfrm>
+          <a:prstGeom prst="ellipse">
+            <a:avLst/>
+          </a:prstGeom>
+          <a:solidFill>
+            <a:schemeClr val="bg1"/>
+          </a:solidFill>
+          <a:ln>
+            <a:solidFill>
+              <a:schemeClr val="bg1"/>
+            </a:solidFill>
+          </a:ln>
+        </p:spPr>
+        <p:style>
+          <a:lnRef idx="2">
+            <a:schemeClr val="accent1">
+              <a:shade val="50000"/>
+            </a:schemeClr>
+          </a:lnRef>
+          <a:fillRef idx="1">
+            <a:schemeClr val="accent1"/>
+          </a:fillRef>
+          <a:effectRef idx="0">
+            <a:schemeClr val="accent1"/>
+          </a:effectRef>
+          <a:fontRef idx="minor">
+            <a:schemeClr val="lt1"/>
+          </a:fontRef>
+        </p:style>
+        <p:txBody>
+          <a:bodyPr rtlCol="0" anchor="ctr"/>
+          <a:lstStyle/>
+          <a:p>
+            <a:pPr algn="ctr"/>
+            <a:endParaRPr lang="nl-NL"/>
+          </a:p>
+        </p:txBody>
+      </p:sp>
+      <p:sp>
+        <p:nvSpPr>
+          <p:cNvPr id="23" name="Oval 22">
+            <a:extLst>
+              <a:ext uri="{FF2B5EF4-FFF2-40B4-BE49-F238E27FC236}">
+                <a16:creationId xmlns:a16="http://schemas.microsoft.com/office/drawing/2014/main" id="{A69C32AA-03CD-473E-B6C7-9E2DC28AAEE0}"/>
+              </a:ext>
+            </a:extLst>
+          </p:cNvPr>
+          <p:cNvSpPr/>
+          <p:nvPr/>
+        </p:nvSpPr>
+        <p:spPr>
+          <a:xfrm>
+            <a:off x="2045367" y="3303809"/>
+            <a:ext cx="192505" cy="192505"/>
+          </a:xfrm>
+          <a:prstGeom prst="ellipse">
+            <a:avLst/>
+          </a:prstGeom>
+          <a:solidFill>
+            <a:schemeClr val="bg1"/>
+          </a:solidFill>
+          <a:ln>
+            <a:solidFill>
+              <a:schemeClr val="bg1"/>
+            </a:solidFill>
+          </a:ln>
+        </p:spPr>
+        <p:style>
+          <a:lnRef idx="2">
+            <a:schemeClr val="accent1">
+              <a:shade val="50000"/>
+            </a:schemeClr>
+          </a:lnRef>
+          <a:fillRef idx="1">
+            <a:schemeClr val="accent1"/>
+          </a:fillRef>
+          <a:effectRef idx="0">
+            <a:schemeClr val="accent1"/>
+          </a:effectRef>
+          <a:fontRef idx="minor">
+            <a:schemeClr val="lt1"/>
+          </a:fontRef>
+        </p:style>
+        <p:txBody>
+          <a:bodyPr rtlCol="0" anchor="ctr"/>
+          <a:lstStyle/>
+          <a:p>
+            <a:pPr algn="ctr"/>
+            <a:endParaRPr lang="nl-NL"/>
+          </a:p>
+        </p:txBody>
+      </p:sp>
+      <p:sp>
+        <p:nvSpPr>
+          <p:cNvPr id="24" name="Oval 23">
+            <a:extLst>
+              <a:ext uri="{FF2B5EF4-FFF2-40B4-BE49-F238E27FC236}">
+                <a16:creationId xmlns:a16="http://schemas.microsoft.com/office/drawing/2014/main" id="{D9BD3E5E-5C45-4437-96FD-C757152F3A79}"/>
+              </a:ext>
+            </a:extLst>
+          </p:cNvPr>
+          <p:cNvSpPr/>
+          <p:nvPr/>
+        </p:nvSpPr>
+        <p:spPr>
+          <a:xfrm>
+            <a:off x="2237872" y="3623286"/>
+            <a:ext cx="192505" cy="192505"/>
+          </a:xfrm>
+          <a:prstGeom prst="ellipse">
+            <a:avLst/>
+          </a:prstGeom>
+          <a:solidFill>
+            <a:schemeClr val="bg1"/>
+          </a:solidFill>
+          <a:ln>
+            <a:solidFill>
+              <a:schemeClr val="bg1"/>
+            </a:solidFill>
+          </a:ln>
+        </p:spPr>
+        <p:style>
+          <a:lnRef idx="2">
+            <a:schemeClr val="accent1">
+              <a:shade val="50000"/>
+            </a:schemeClr>
+          </a:lnRef>
+          <a:fillRef idx="1">
+            <a:schemeClr val="accent1"/>
+          </a:fillRef>
+          <a:effectRef idx="0">
+            <a:schemeClr val="accent1"/>
+          </a:effectRef>
+          <a:fontRef idx="minor">
+            <a:schemeClr val="lt1"/>
+          </a:fontRef>
+        </p:style>
+        <p:txBody>
+          <a:bodyPr rtlCol="0" anchor="ctr"/>
+          <a:lstStyle/>
+          <a:p>
+            <a:pPr algn="ctr"/>
+            <a:endParaRPr lang="nl-NL"/>
+          </a:p>
+        </p:txBody>
+      </p:sp>
+    </p:spTree>
+    <p:extLst>
+      <p:ext uri="{BB962C8B-B14F-4D97-AF65-F5344CB8AC3E}">
+        <p14:creationId xmlns:p14="http://schemas.microsoft.com/office/powerpoint/2010/main" val="2980898789"/>
+      </p:ext>
+    </p:extLst>
+  </p:cSld>
+  <p:clrMapOvr>
+    <a:masterClrMapping/>
+  </p:clrMapOvr>
+  <mc:AlternateContent xmlns:mc="http://schemas.openxmlformats.org/markup-compatibility/2006" xmlns:p159="http://schemas.microsoft.com/office/powerpoint/2015/09/main">
+    <mc:Choice Requires="p159">
+      <p:transition spd="slow">
+        <p159:morph option="byObject"/>
+      </p:transition>
+    </mc:Choice>
+    <mc:Fallback xmlns="">
+      <p:transition spd="slow">
+        <p:fade/>
+      </p:transition>
+    </mc:Fallback>
+  </mc:AlternateContent>
+</p:sld>
+</file>
+
+<file path=ppt/slides/slide24.xml><?xml version="1.0" encoding="utf-8"?>
+<p:sld xmlns:a="http://schemas.openxmlformats.org/drawingml/2006/main" xmlns:r="http://schemas.openxmlformats.org/officeDocument/2006/relationships" xmlns:p="http://schemas.openxmlformats.org/presentationml/2006/main">
+  <p:cSld>
+    <p:spTree>
+      <p:nvGrpSpPr>
+        <p:cNvPr id="1" name=""/>
+        <p:cNvGrpSpPr/>
+        <p:nvPr/>
+      </p:nvGrpSpPr>
+      <p:grpSpPr>
+        <a:xfrm>
+          <a:off x="0" y="0"/>
+          <a:ext cx="0" cy="0"/>
+          <a:chOff x="0" y="0"/>
+          <a:chExt cx="0" cy="0"/>
+        </a:xfrm>
+      </p:grpSpPr>
+      <p:pic>
+        <p:nvPicPr>
+          <p:cNvPr id="3" name="Picture 2">
+            <a:extLst>
+              <a:ext uri="{FF2B5EF4-FFF2-40B4-BE49-F238E27FC236}">
+                <a16:creationId xmlns:a16="http://schemas.microsoft.com/office/drawing/2014/main" id="{B65D2315-51B1-4287-BCA6-D30549C2831D}"/>
+              </a:ext>
+            </a:extLst>
+          </p:cNvPr>
+          <p:cNvPicPr>
+            <a:picLocks noChangeAspect="1"/>
+          </p:cNvPicPr>
+          <p:nvPr/>
+        </p:nvPicPr>
+        <p:blipFill>
+          <a:blip r:embed="rId2">
+            <a:extLst>
+              <a:ext uri="{28A0092B-C50C-407E-A947-70E740481C1C}">
+                <a14:useLocalDpi xmlns:a14="http://schemas.microsoft.com/office/drawing/2010/main" val="0"/>
+              </a:ext>
+            </a:extLst>
+          </a:blip>
+          <a:stretch>
+            <a:fillRect/>
+          </a:stretch>
+        </p:blipFill>
+        <p:spPr>
+          <a:xfrm>
+            <a:off x="2491335" y="725501"/>
+            <a:ext cx="7209329" cy="5406997"/>
+          </a:xfrm>
+          <a:prstGeom prst="rect">
+            <a:avLst/>
+          </a:prstGeom>
+        </p:spPr>
+      </p:pic>
+      <p:sp>
+        <p:nvSpPr>
+          <p:cNvPr id="4" name="TextBox 3">
+            <a:extLst>
+              <a:ext uri="{FF2B5EF4-FFF2-40B4-BE49-F238E27FC236}">
+                <a16:creationId xmlns:a16="http://schemas.microsoft.com/office/drawing/2014/main" id="{0A5CCA7C-FF14-4AD7-8D60-609EC3986411}"/>
+              </a:ext>
+            </a:extLst>
+          </p:cNvPr>
+          <p:cNvSpPr txBox="1"/>
+          <p:nvPr/>
+        </p:nvSpPr>
+        <p:spPr>
+          <a:xfrm>
+            <a:off x="0" y="0"/>
+            <a:ext cx="3457074" cy="369332"/>
+          </a:xfrm>
+          <a:prstGeom prst="rect">
+            <a:avLst/>
+          </a:prstGeom>
+          <a:noFill/>
+        </p:spPr>
+        <p:txBody>
+          <a:bodyPr wrap="square" rtlCol="0">
+            <a:spAutoFit/>
+          </a:bodyPr>
+          <a:lstStyle/>
+          <a:p>
+            <a:r>
+              <a:rPr lang="it-IT" u="sng" dirty="0"/>
+              <a:t>MICE Forest Imputed Distributions</a:t>
+            </a:r>
+            <a:endParaRPr lang="nl-NL" u="sng" dirty="0"/>
+          </a:p>
+        </p:txBody>
+      </p:sp>
+    </p:spTree>
+    <p:extLst>
+      <p:ext uri="{BB962C8B-B14F-4D97-AF65-F5344CB8AC3E}">
+        <p14:creationId xmlns:p14="http://schemas.microsoft.com/office/powerpoint/2010/main" val="1751319707"/>
+      </p:ext>
+    </p:extLst>
+  </p:cSld>
+  <p:clrMapOvr>
+    <a:masterClrMapping/>
+  </p:clrMapOvr>
+  <mc:AlternateContent xmlns:mc="http://schemas.openxmlformats.org/markup-compatibility/2006" xmlns:p159="http://schemas.microsoft.com/office/powerpoint/2015/09/main">
+    <mc:Choice Requires="p159">
+      <p:transition spd="slow">
+        <p159:morph option="byObject"/>
+      </p:transition>
+    </mc:Choice>
+    <mc:Fallback xmlns="">
+      <p:transition spd="slow">
+        <p:fade/>
+      </p:transition>
+    </mc:Fallback>
+  </mc:AlternateContent>
+</p:sld>
+</file>
+
+<file path=ppt/slides/slide25.xml><?xml version="1.0" encoding="utf-8"?>
+<p:sld xmlns:a="http://schemas.openxmlformats.org/drawingml/2006/main" xmlns:r="http://schemas.openxmlformats.org/officeDocument/2006/relationships" xmlns:p="http://schemas.openxmlformats.org/presentationml/2006/main">
+  <p:cSld>
+    <p:spTree>
+      <p:nvGrpSpPr>
+        <p:cNvPr id="1" name=""/>
+        <p:cNvGrpSpPr/>
+        <p:nvPr/>
+      </p:nvGrpSpPr>
+      <p:grpSpPr>
+        <a:xfrm>
+          <a:off x="0" y="0"/>
+          <a:ext cx="0" cy="0"/>
+          <a:chOff x="0" y="0"/>
+          <a:chExt cx="0" cy="0"/>
+        </a:xfrm>
+      </p:grpSpPr>
+      <p:pic>
+        <p:nvPicPr>
+          <p:cNvPr id="3" name="Picture 2">
+            <a:extLst>
+              <a:ext uri="{FF2B5EF4-FFF2-40B4-BE49-F238E27FC236}">
+                <a16:creationId xmlns:a16="http://schemas.microsoft.com/office/drawing/2014/main" id="{B65D2315-51B1-4287-BCA6-D30549C2831D}"/>
+              </a:ext>
+            </a:extLst>
+          </p:cNvPr>
+          <p:cNvPicPr>
+            <a:picLocks noChangeAspect="1"/>
+          </p:cNvPicPr>
+          <p:nvPr/>
+        </p:nvPicPr>
+        <p:blipFill>
+          <a:blip r:embed="rId2">
+            <a:extLst>
+              <a:ext uri="{28A0092B-C50C-407E-A947-70E740481C1C}">
+                <a14:useLocalDpi xmlns:a14="http://schemas.microsoft.com/office/drawing/2010/main" val="0"/>
+              </a:ext>
+            </a:extLst>
+          </a:blip>
+          <a:stretch>
+            <a:fillRect/>
+          </a:stretch>
+        </p:blipFill>
+        <p:spPr>
+          <a:xfrm>
+            <a:off x="518158" y="725501"/>
+            <a:ext cx="7209329" cy="5406997"/>
+          </a:xfrm>
+          <a:prstGeom prst="rect">
+            <a:avLst/>
+          </a:prstGeom>
+        </p:spPr>
+      </p:pic>
+      <p:sp>
+        <p:nvSpPr>
+          <p:cNvPr id="4" name="TextBox 3">
+            <a:extLst>
+              <a:ext uri="{FF2B5EF4-FFF2-40B4-BE49-F238E27FC236}">
+                <a16:creationId xmlns:a16="http://schemas.microsoft.com/office/drawing/2014/main" id="{0A5CCA7C-FF14-4AD7-8D60-609EC3986411}"/>
+              </a:ext>
+            </a:extLst>
+          </p:cNvPr>
+          <p:cNvSpPr txBox="1"/>
+          <p:nvPr/>
+        </p:nvSpPr>
+        <p:spPr>
+          <a:xfrm>
+            <a:off x="0" y="0"/>
+            <a:ext cx="3457074" cy="369332"/>
+          </a:xfrm>
+          <a:prstGeom prst="rect">
+            <a:avLst/>
+          </a:prstGeom>
+          <a:noFill/>
+        </p:spPr>
+        <p:txBody>
+          <a:bodyPr wrap="square" rtlCol="0">
+            <a:spAutoFit/>
+          </a:bodyPr>
+          <a:lstStyle/>
+          <a:p>
+            <a:r>
+              <a:rPr lang="it-IT" u="sng" dirty="0"/>
+              <a:t>MICE Forest Imputed Distributions</a:t>
+            </a:r>
+            <a:endParaRPr lang="nl-NL" u="sng" dirty="0"/>
+          </a:p>
+        </p:txBody>
+      </p:sp>
+      <p:sp>
+        <p:nvSpPr>
+          <p:cNvPr id="2" name="TextBox 1">
+            <a:extLst>
+              <a:ext uri="{FF2B5EF4-FFF2-40B4-BE49-F238E27FC236}">
+                <a16:creationId xmlns:a16="http://schemas.microsoft.com/office/drawing/2014/main" id="{01856716-7E6F-49FD-A372-2EF5C92D3712}"/>
+              </a:ext>
+            </a:extLst>
+          </p:cNvPr>
+          <p:cNvSpPr txBox="1"/>
+          <p:nvPr/>
+        </p:nvSpPr>
+        <p:spPr>
+          <a:xfrm>
+            <a:off x="8598568" y="2895600"/>
+            <a:ext cx="2871537" cy="369332"/>
+          </a:xfrm>
+          <a:prstGeom prst="rect">
+            <a:avLst/>
+          </a:prstGeom>
+          <a:noFill/>
+        </p:spPr>
+        <p:txBody>
+          <a:bodyPr wrap="square" rtlCol="0">
+            <a:spAutoFit/>
+          </a:bodyPr>
+          <a:lstStyle/>
+          <a:p>
+            <a:r>
+              <a:rPr lang="it-IT" dirty="0"/>
+              <a:t>Is this acceptable?</a:t>
+            </a:r>
+            <a:endParaRPr lang="nl-NL" dirty="0"/>
+          </a:p>
+        </p:txBody>
+      </p:sp>
+    </p:spTree>
+    <p:extLst>
+      <p:ext uri="{BB962C8B-B14F-4D97-AF65-F5344CB8AC3E}">
+        <p14:creationId xmlns:p14="http://schemas.microsoft.com/office/powerpoint/2010/main" val="3402397846"/>
+      </p:ext>
+    </p:extLst>
+  </p:cSld>
+  <p:clrMapOvr>
+    <a:masterClrMapping/>
+  </p:clrMapOvr>
+  <mc:AlternateContent xmlns:mc="http://schemas.openxmlformats.org/markup-compatibility/2006" xmlns:p159="http://schemas.microsoft.com/office/powerpoint/2015/09/main">
+    <mc:Choice Requires="p159">
+      <p:transition spd="slow">
+        <p159:morph option="byObject"/>
+      </p:transition>
+    </mc:Choice>
+    <mc:Fallback xmlns="">
+      <p:transition spd="slow">
+        <p:fade/>
+      </p:transition>
+    </mc:Fallback>
+  </mc:AlternateContent>
+</p:sld>
+</file>
+
+<file path=ppt/slides/slide26.xml><?xml version="1.0" encoding="utf-8"?>
+<p:sld xmlns:a="http://schemas.openxmlformats.org/drawingml/2006/main" xmlns:r="http://schemas.openxmlformats.org/officeDocument/2006/relationships" xmlns:p="http://schemas.openxmlformats.org/presentationml/2006/main">
+  <p:cSld>
+    <p:spTree>
+      <p:nvGrpSpPr>
+        <p:cNvPr id="1" name=""/>
+        <p:cNvGrpSpPr/>
+        <p:nvPr/>
+      </p:nvGrpSpPr>
+      <p:grpSpPr>
+        <a:xfrm>
+          <a:off x="0" y="0"/>
+          <a:ext cx="0" cy="0"/>
+          <a:chOff x="0" y="0"/>
+          <a:chExt cx="0" cy="0"/>
+        </a:xfrm>
+      </p:grpSpPr>
+      <p:sp>
+        <p:nvSpPr>
           <p:cNvPr id="2" name="Title 1">
             <a:extLst>
               <a:ext uri="{FF2B5EF4-FFF2-40B4-BE49-F238E27FC236}">
@@ -9298,7 +10302,7 @@
 </p:sld>
 </file>
 
-<file path=ppt/slides/slide23.xml><?xml version="1.0" encoding="utf-8"?>
+<file path=ppt/slides/slide27.xml><?xml version="1.0" encoding="utf-8"?>
 <p:sld xmlns:a="http://schemas.openxmlformats.org/drawingml/2006/main" xmlns:r="http://schemas.openxmlformats.org/officeDocument/2006/relationships" xmlns:p="http://schemas.openxmlformats.org/presentationml/2006/main">
   <p:cSld>
     <p:spTree>
@@ -9340,7 +10344,7 @@
 </p:sld>
 </file>
 
-<file path=ppt/slides/slide24.xml><?xml version="1.0" encoding="utf-8"?>
+<file path=ppt/slides/slide28.xml><?xml version="1.0" encoding="utf-8"?>
 <p:sld xmlns:a="http://schemas.openxmlformats.org/drawingml/2006/main" xmlns:r="http://schemas.openxmlformats.org/officeDocument/2006/relationships" xmlns:p="http://schemas.openxmlformats.org/presentationml/2006/main">
   <p:cSld>
     <p:spTree>
@@ -9436,7 +10440,7 @@
 </p:sld>
 </file>
 
-<file path=ppt/slides/slide25.xml><?xml version="1.0" encoding="utf-8"?>
+<file path=ppt/slides/slide29.xml><?xml version="1.0" encoding="utf-8"?>
 <p:sld xmlns:a="http://schemas.openxmlformats.org/drawingml/2006/main" xmlns:r="http://schemas.openxmlformats.org/officeDocument/2006/relationships" xmlns:p="http://schemas.openxmlformats.org/presentationml/2006/main">
   <p:cSld>
     <p:spTree>
@@ -9478,1285 +10482,6 @@
 </p:sld>
 </file>
 
-<file path=ppt/slides/slide26.xml><?xml version="1.0" encoding="utf-8"?>
-<p:sld xmlns:a="http://schemas.openxmlformats.org/drawingml/2006/main" xmlns:r="http://schemas.openxmlformats.org/officeDocument/2006/relationships" xmlns:p="http://schemas.openxmlformats.org/presentationml/2006/main">
-  <p:cSld>
-    <p:spTree>
-      <p:nvGrpSpPr>
-        <p:cNvPr id="1" name=""/>
-        <p:cNvGrpSpPr/>
-        <p:nvPr/>
-      </p:nvGrpSpPr>
-      <p:grpSpPr>
-        <a:xfrm>
-          <a:off x="0" y="0"/>
-          <a:ext cx="0" cy="0"/>
-          <a:chOff x="0" y="0"/>
-          <a:chExt cx="0" cy="0"/>
-        </a:xfrm>
-      </p:grpSpPr>
-      <p:sp>
-        <p:nvSpPr>
-          <p:cNvPr id="2" name="Title 1">
-            <a:extLst>
-              <a:ext uri="{FF2B5EF4-FFF2-40B4-BE49-F238E27FC236}">
-                <a16:creationId xmlns:a16="http://schemas.microsoft.com/office/drawing/2014/main" id="{6D37F963-7349-4DE3-A960-EEBD333A4E61}"/>
-              </a:ext>
-            </a:extLst>
-          </p:cNvPr>
-          <p:cNvSpPr txBox="1">
-            <a:spLocks/>
-          </p:cNvSpPr>
-          <p:nvPr/>
-        </p:nvSpPr>
-        <p:spPr>
-          <a:xfrm>
-            <a:off x="1524000" y="2235200"/>
-            <a:ext cx="9144000" cy="2387600"/>
-          </a:xfrm>
-          <a:prstGeom prst="rect">
-            <a:avLst/>
-          </a:prstGeom>
-        </p:spPr>
-        <p:txBody>
-          <a:bodyPr anchor="ctr"/>
-          <a:lstStyle>
-            <a:lvl1pPr algn="l" defTabSz="914400" rtl="0" eaLnBrk="1" latinLnBrk="0" hangingPunct="1">
-              <a:lnSpc>
-                <a:spcPct val="90000"/>
-              </a:lnSpc>
-              <a:spcBef>
-                <a:spcPct val="0"/>
-              </a:spcBef>
-              <a:buNone/>
-              <a:defRPr sz="4400" kern="1200">
-                <a:solidFill>
-                  <a:schemeClr val="tx1"/>
-                </a:solidFill>
-                <a:latin typeface="+mj-lt"/>
-                <a:ea typeface="+mj-ea"/>
-                <a:cs typeface="+mj-cs"/>
-              </a:defRPr>
-            </a:lvl1pPr>
-          </a:lstStyle>
-          <a:p>
-            <a:pPr algn="ctr"/>
-            <a:r>
-              <a:rPr lang="it-IT" dirty="0"/>
-              <a:t>Blood Pressure Readings</a:t>
-            </a:r>
-            <a:endParaRPr lang="nl-NL" dirty="0"/>
-          </a:p>
-        </p:txBody>
-      </p:sp>
-    </p:spTree>
-    <p:extLst>
-      <p:ext uri="{BB962C8B-B14F-4D97-AF65-F5344CB8AC3E}">
-        <p14:creationId xmlns:p14="http://schemas.microsoft.com/office/powerpoint/2010/main" val="603692568"/>
-      </p:ext>
-    </p:extLst>
-  </p:cSld>
-  <p:clrMapOvr>
-    <a:masterClrMapping/>
-  </p:clrMapOvr>
-  <mc:AlternateContent xmlns:mc="http://schemas.openxmlformats.org/markup-compatibility/2006" xmlns:p159="http://schemas.microsoft.com/office/powerpoint/2015/09/main">
-    <mc:Choice Requires="p159">
-      <p:transition spd="slow">
-        <p159:morph option="byObject"/>
-      </p:transition>
-    </mc:Choice>
-    <mc:Fallback xmlns="">
-      <p:transition spd="slow">
-        <p:fade/>
-      </p:transition>
-    </mc:Fallback>
-  </mc:AlternateContent>
-</p:sld>
-</file>
-
-<file path=ppt/slides/slide27.xml><?xml version="1.0" encoding="utf-8"?>
-<p:sld xmlns:a="http://schemas.openxmlformats.org/drawingml/2006/main" xmlns:r="http://schemas.openxmlformats.org/officeDocument/2006/relationships" xmlns:p="http://schemas.openxmlformats.org/presentationml/2006/main">
-  <p:cSld>
-    <p:spTree>
-      <p:nvGrpSpPr>
-        <p:cNvPr id="1" name=""/>
-        <p:cNvGrpSpPr/>
-        <p:nvPr/>
-      </p:nvGrpSpPr>
-      <p:grpSpPr>
-        <a:xfrm>
-          <a:off x="0" y="0"/>
-          <a:ext cx="0" cy="0"/>
-          <a:chOff x="0" y="0"/>
-          <a:chExt cx="0" cy="0"/>
-        </a:xfrm>
-      </p:grpSpPr>
-      <p:sp>
-        <p:nvSpPr>
-          <p:cNvPr id="2" name="TextBox 1">
-            <a:extLst>
-              <a:ext uri="{FF2B5EF4-FFF2-40B4-BE49-F238E27FC236}">
-                <a16:creationId xmlns:a16="http://schemas.microsoft.com/office/drawing/2014/main" id="{CC0200F0-ABFF-45F8-A6F5-9F8372AE5C7D}"/>
-              </a:ext>
-            </a:extLst>
-          </p:cNvPr>
-          <p:cNvSpPr txBox="1"/>
-          <p:nvPr/>
-        </p:nvSpPr>
-        <p:spPr>
-          <a:xfrm>
-            <a:off x="0" y="0"/>
-            <a:ext cx="4395537" cy="369332"/>
-          </a:xfrm>
-          <a:prstGeom prst="rect">
-            <a:avLst/>
-          </a:prstGeom>
-          <a:noFill/>
-        </p:spPr>
-        <p:txBody>
-          <a:bodyPr wrap="square" rtlCol="0">
-            <a:spAutoFit/>
-          </a:bodyPr>
-          <a:lstStyle/>
-          <a:p>
-            <a:r>
-              <a:rPr lang="it-IT" u="sng" dirty="0"/>
-              <a:t>Blood Pressure Measurements - Outliers</a:t>
-            </a:r>
-            <a:endParaRPr lang="nl-NL" u="sng" dirty="0"/>
-          </a:p>
-        </p:txBody>
-      </p:sp>
-      <p:pic>
-        <p:nvPicPr>
-          <p:cNvPr id="4" name="Picture 3">
-            <a:extLst>
-              <a:ext uri="{FF2B5EF4-FFF2-40B4-BE49-F238E27FC236}">
-                <a16:creationId xmlns:a16="http://schemas.microsoft.com/office/drawing/2014/main" id="{B141D145-8AC1-45C7-8D61-50D4BD1CC9DF}"/>
-              </a:ext>
-            </a:extLst>
-          </p:cNvPr>
-          <p:cNvPicPr>
-            <a:picLocks noChangeAspect="1"/>
-          </p:cNvPicPr>
-          <p:nvPr/>
-        </p:nvPicPr>
-        <p:blipFill>
-          <a:blip r:embed="rId2">
-            <a:extLst>
-              <a:ext uri="{28A0092B-C50C-407E-A947-70E740481C1C}">
-                <a14:useLocalDpi xmlns:a14="http://schemas.microsoft.com/office/drawing/2010/main" val="0"/>
-              </a:ext>
-            </a:extLst>
-          </a:blip>
-          <a:stretch>
-            <a:fillRect/>
-          </a:stretch>
-        </p:blipFill>
-        <p:spPr>
-          <a:xfrm>
-            <a:off x="6186458" y="1957137"/>
-            <a:ext cx="6005542" cy="3649580"/>
-          </a:xfrm>
-          <a:prstGeom prst="rect">
-            <a:avLst/>
-          </a:prstGeom>
-        </p:spPr>
-      </p:pic>
-      <p:pic>
-        <p:nvPicPr>
-          <p:cNvPr id="8" name="Picture 7">
-            <a:extLst>
-              <a:ext uri="{FF2B5EF4-FFF2-40B4-BE49-F238E27FC236}">
-                <a16:creationId xmlns:a16="http://schemas.microsoft.com/office/drawing/2014/main" id="{B78D7C7E-C973-4558-835C-AE7A82ECC7EF}"/>
-              </a:ext>
-            </a:extLst>
-          </p:cNvPr>
-          <p:cNvPicPr>
-            <a:picLocks noChangeAspect="1"/>
-          </p:cNvPicPr>
-          <p:nvPr/>
-        </p:nvPicPr>
-        <p:blipFill>
-          <a:blip r:embed="rId3">
-            <a:extLst>
-              <a:ext uri="{28A0092B-C50C-407E-A947-70E740481C1C}">
-                <a14:useLocalDpi xmlns:a14="http://schemas.microsoft.com/office/drawing/2010/main" val="0"/>
-              </a:ext>
-            </a:extLst>
-          </a:blip>
-          <a:stretch>
-            <a:fillRect/>
-          </a:stretch>
-        </p:blipFill>
-        <p:spPr>
-          <a:xfrm>
-            <a:off x="14258" y="1957137"/>
-            <a:ext cx="6005542" cy="3649580"/>
-          </a:xfrm>
-          <a:prstGeom prst="rect">
-            <a:avLst/>
-          </a:prstGeom>
-        </p:spPr>
-      </p:pic>
-      <p:cxnSp>
-        <p:nvCxnSpPr>
-          <p:cNvPr id="10" name="Straight Arrow Connector 9">
-            <a:extLst>
-              <a:ext uri="{FF2B5EF4-FFF2-40B4-BE49-F238E27FC236}">
-                <a16:creationId xmlns:a16="http://schemas.microsoft.com/office/drawing/2014/main" id="{D2D21716-6BD7-4A50-9558-0D0C13985C2D}"/>
-              </a:ext>
-            </a:extLst>
-          </p:cNvPr>
-          <p:cNvCxnSpPr>
-            <a:cxnSpLocks/>
-            <a:stCxn id="13" idx="2"/>
-            <a:endCxn id="28" idx="7"/>
-          </p:cNvCxnSpPr>
-          <p:nvPr/>
-        </p:nvCxnSpPr>
-        <p:spPr>
-          <a:xfrm flipH="1">
-            <a:off x="1745476" y="1706964"/>
-            <a:ext cx="1271553" cy="618127"/>
-          </a:xfrm>
-          <a:prstGeom prst="straightConnector1">
-            <a:avLst/>
-          </a:prstGeom>
-          <a:ln>
-            <a:tailEnd type="triangle"/>
-          </a:ln>
-        </p:spPr>
-        <p:style>
-          <a:lnRef idx="3">
-            <a:schemeClr val="dk1"/>
-          </a:lnRef>
-          <a:fillRef idx="0">
-            <a:schemeClr val="dk1"/>
-          </a:fillRef>
-          <a:effectRef idx="2">
-            <a:schemeClr val="dk1"/>
-          </a:effectRef>
-          <a:fontRef idx="minor">
-            <a:schemeClr val="tx1"/>
-          </a:fontRef>
-        </p:style>
-      </p:cxnSp>
-      <p:cxnSp>
-        <p:nvCxnSpPr>
-          <p:cNvPr id="12" name="Straight Arrow Connector 11">
-            <a:extLst>
-              <a:ext uri="{FF2B5EF4-FFF2-40B4-BE49-F238E27FC236}">
-                <a16:creationId xmlns:a16="http://schemas.microsoft.com/office/drawing/2014/main" id="{8588E362-09B2-4B0B-BBDE-2EFEFF000F9B}"/>
-              </a:ext>
-            </a:extLst>
-          </p:cNvPr>
-          <p:cNvCxnSpPr>
-            <a:cxnSpLocks/>
-            <a:stCxn id="13" idx="2"/>
-            <a:endCxn id="30" idx="1"/>
-          </p:cNvCxnSpPr>
-          <p:nvPr/>
-        </p:nvCxnSpPr>
-        <p:spPr>
-          <a:xfrm>
-            <a:off x="3017029" y="1706964"/>
-            <a:ext cx="1532465" cy="797849"/>
-          </a:xfrm>
-          <a:prstGeom prst="straightConnector1">
-            <a:avLst/>
-          </a:prstGeom>
-          <a:ln>
-            <a:tailEnd type="triangle"/>
-          </a:ln>
-        </p:spPr>
-        <p:style>
-          <a:lnRef idx="3">
-            <a:schemeClr val="dk1"/>
-          </a:lnRef>
-          <a:fillRef idx="0">
-            <a:schemeClr val="dk1"/>
-          </a:fillRef>
-          <a:effectRef idx="2">
-            <a:schemeClr val="dk1"/>
-          </a:effectRef>
-          <a:fontRef idx="minor">
-            <a:schemeClr val="tx1"/>
-          </a:fontRef>
-        </p:style>
-      </p:cxnSp>
-      <p:sp>
-        <p:nvSpPr>
-          <p:cNvPr id="13" name="TextBox 12">
-            <a:extLst>
-              <a:ext uri="{FF2B5EF4-FFF2-40B4-BE49-F238E27FC236}">
-                <a16:creationId xmlns:a16="http://schemas.microsoft.com/office/drawing/2014/main" id="{6406D038-F66B-4859-9416-A23E4E34906D}"/>
-              </a:ext>
-            </a:extLst>
-          </p:cNvPr>
-          <p:cNvSpPr txBox="1"/>
-          <p:nvPr/>
-        </p:nvSpPr>
-        <p:spPr>
-          <a:xfrm>
-            <a:off x="1490242" y="1337632"/>
-            <a:ext cx="3053573" cy="369332"/>
-          </a:xfrm>
-          <a:prstGeom prst="rect">
-            <a:avLst/>
-          </a:prstGeom>
-          <a:noFill/>
-        </p:spPr>
-        <p:txBody>
-          <a:bodyPr wrap="square" rtlCol="0">
-            <a:spAutoFit/>
-          </a:bodyPr>
-          <a:lstStyle/>
-          <a:p>
-            <a:pPr algn="ctr"/>
-            <a:r>
-              <a:rPr lang="it-IT" dirty="0"/>
-              <a:t>Set to NaN... Imputation?</a:t>
-            </a:r>
-            <a:endParaRPr lang="nl-NL" dirty="0"/>
-          </a:p>
-        </p:txBody>
-      </p:sp>
-      <p:sp>
-        <p:nvSpPr>
-          <p:cNvPr id="14" name="TextBox 13">
-            <a:extLst>
-              <a:ext uri="{FF2B5EF4-FFF2-40B4-BE49-F238E27FC236}">
-                <a16:creationId xmlns:a16="http://schemas.microsoft.com/office/drawing/2014/main" id="{F98F7243-8499-4EB9-8006-57DE1509E5C3}"/>
-              </a:ext>
-            </a:extLst>
-          </p:cNvPr>
-          <p:cNvSpPr txBox="1"/>
-          <p:nvPr/>
-        </p:nvSpPr>
-        <p:spPr>
-          <a:xfrm>
-            <a:off x="8060265" y="1152966"/>
-            <a:ext cx="2229853" cy="369332"/>
-          </a:xfrm>
-          <a:prstGeom prst="rect">
-            <a:avLst/>
-          </a:prstGeom>
-          <a:noFill/>
-        </p:spPr>
-        <p:txBody>
-          <a:bodyPr wrap="square" rtlCol="0">
-            <a:spAutoFit/>
-          </a:bodyPr>
-          <a:lstStyle/>
-          <a:p>
-            <a:r>
-              <a:rPr lang="it-IT" dirty="0"/>
-              <a:t>Considered Outliers</a:t>
-            </a:r>
-            <a:endParaRPr lang="nl-NL" dirty="0"/>
-          </a:p>
-        </p:txBody>
-      </p:sp>
-      <p:cxnSp>
-        <p:nvCxnSpPr>
-          <p:cNvPr id="16" name="Straight Arrow Connector 15">
-            <a:extLst>
-              <a:ext uri="{FF2B5EF4-FFF2-40B4-BE49-F238E27FC236}">
-                <a16:creationId xmlns:a16="http://schemas.microsoft.com/office/drawing/2014/main" id="{EF44B29E-148B-46BB-A8FF-E530EC852232}"/>
-              </a:ext>
-            </a:extLst>
-          </p:cNvPr>
-          <p:cNvCxnSpPr>
-            <a:cxnSpLocks/>
-            <a:stCxn id="14" idx="2"/>
-          </p:cNvCxnSpPr>
-          <p:nvPr/>
-        </p:nvCxnSpPr>
-        <p:spPr>
-          <a:xfrm>
-            <a:off x="9175192" y="1522298"/>
-            <a:ext cx="1451811" cy="1108426"/>
-          </a:xfrm>
-          <a:prstGeom prst="straightConnector1">
-            <a:avLst/>
-          </a:prstGeom>
-          <a:ln>
-            <a:tailEnd type="triangle"/>
-          </a:ln>
-        </p:spPr>
-        <p:style>
-          <a:lnRef idx="3">
-            <a:schemeClr val="dk1"/>
-          </a:lnRef>
-          <a:fillRef idx="0">
-            <a:schemeClr val="dk1"/>
-          </a:fillRef>
-          <a:effectRef idx="2">
-            <a:schemeClr val="dk1"/>
-          </a:effectRef>
-          <a:fontRef idx="minor">
-            <a:schemeClr val="tx1"/>
-          </a:fontRef>
-        </p:style>
-      </p:cxnSp>
-      <p:cxnSp>
-        <p:nvCxnSpPr>
-          <p:cNvPr id="18" name="Straight Arrow Connector 17">
-            <a:extLst>
-              <a:ext uri="{FF2B5EF4-FFF2-40B4-BE49-F238E27FC236}">
-                <a16:creationId xmlns:a16="http://schemas.microsoft.com/office/drawing/2014/main" id="{496788B4-CBEF-49A2-B29F-3DAC5165F805}"/>
-              </a:ext>
-            </a:extLst>
-          </p:cNvPr>
-          <p:cNvCxnSpPr>
-            <a:cxnSpLocks/>
-            <a:stCxn id="14" idx="2"/>
-          </p:cNvCxnSpPr>
-          <p:nvPr/>
-        </p:nvCxnSpPr>
-        <p:spPr>
-          <a:xfrm flipH="1">
-            <a:off x="7955994" y="1522298"/>
-            <a:ext cx="1219198" cy="1212700"/>
-          </a:xfrm>
-          <a:prstGeom prst="straightConnector1">
-            <a:avLst/>
-          </a:prstGeom>
-          <a:ln>
-            <a:tailEnd type="triangle"/>
-          </a:ln>
-        </p:spPr>
-        <p:style>
-          <a:lnRef idx="3">
-            <a:schemeClr val="dk1"/>
-          </a:lnRef>
-          <a:fillRef idx="0">
-            <a:schemeClr val="dk1"/>
-          </a:fillRef>
-          <a:effectRef idx="2">
-            <a:schemeClr val="dk1"/>
-          </a:effectRef>
-          <a:fontRef idx="minor">
-            <a:schemeClr val="tx1"/>
-          </a:fontRef>
-        </p:style>
-      </p:cxnSp>
-      <p:sp>
-        <p:nvSpPr>
-          <p:cNvPr id="28" name="Oval 27">
-            <a:extLst>
-              <a:ext uri="{FF2B5EF4-FFF2-40B4-BE49-F238E27FC236}">
-                <a16:creationId xmlns:a16="http://schemas.microsoft.com/office/drawing/2014/main" id="{5D3BB183-A2CA-46A2-B9C3-ADAE972B9027}"/>
-              </a:ext>
-            </a:extLst>
-          </p:cNvPr>
-          <p:cNvSpPr/>
-          <p:nvPr/>
-        </p:nvSpPr>
-        <p:spPr>
-          <a:xfrm>
-            <a:off x="1444235" y="2056559"/>
-            <a:ext cx="352926" cy="1833652"/>
-          </a:xfrm>
-          <a:prstGeom prst="ellipse">
-            <a:avLst/>
-          </a:prstGeom>
-          <a:noFill/>
-          <a:ln w="9525" cap="flat" cmpd="sng" algn="ctr">
-            <a:solidFill>
-              <a:schemeClr val="accent1"/>
-            </a:solidFill>
-            <a:prstDash val="solid"/>
-            <a:round/>
-            <a:headEnd type="none" w="med" len="med"/>
-            <a:tailEnd type="none" w="med" len="med"/>
-          </a:ln>
-        </p:spPr>
-        <p:style>
-          <a:lnRef idx="0">
-            <a:scrgbClr r="0" g="0" b="0"/>
-          </a:lnRef>
-          <a:fillRef idx="0">
-            <a:scrgbClr r="0" g="0" b="0"/>
-          </a:fillRef>
-          <a:effectRef idx="0">
-            <a:scrgbClr r="0" g="0" b="0"/>
-          </a:effectRef>
-          <a:fontRef idx="minor">
-            <a:schemeClr val="accent1"/>
-          </a:fontRef>
-        </p:style>
-        <p:txBody>
-          <a:bodyPr rtlCol="0" anchor="ctr"/>
-          <a:lstStyle/>
-          <a:p>
-            <a:pPr algn="ctr"/>
-            <a:endParaRPr lang="nl-NL"/>
-          </a:p>
-        </p:txBody>
-      </p:sp>
-      <p:sp>
-        <p:nvSpPr>
-          <p:cNvPr id="30" name="Oval 29">
-            <a:extLst>
-              <a:ext uri="{FF2B5EF4-FFF2-40B4-BE49-F238E27FC236}">
-                <a16:creationId xmlns:a16="http://schemas.microsoft.com/office/drawing/2014/main" id="{DFC1405A-A1FB-4B7D-A729-6F366D78F1F5}"/>
-              </a:ext>
-            </a:extLst>
-          </p:cNvPr>
-          <p:cNvSpPr/>
-          <p:nvPr/>
-        </p:nvSpPr>
-        <p:spPr>
-          <a:xfrm>
-            <a:off x="4497809" y="2056558"/>
-            <a:ext cx="352926" cy="3060874"/>
-          </a:xfrm>
-          <a:prstGeom prst="ellipse">
-            <a:avLst/>
-          </a:prstGeom>
-          <a:noFill/>
-          <a:ln w="9525" cap="flat" cmpd="sng" algn="ctr">
-            <a:solidFill>
-              <a:schemeClr val="accent1"/>
-            </a:solidFill>
-            <a:prstDash val="solid"/>
-            <a:round/>
-            <a:headEnd type="none" w="med" len="med"/>
-            <a:tailEnd type="none" w="med" len="med"/>
-          </a:ln>
-        </p:spPr>
-        <p:style>
-          <a:lnRef idx="0">
-            <a:scrgbClr r="0" g="0" b="0"/>
-          </a:lnRef>
-          <a:fillRef idx="0">
-            <a:scrgbClr r="0" g="0" b="0"/>
-          </a:fillRef>
-          <a:effectRef idx="0">
-            <a:scrgbClr r="0" g="0" b="0"/>
-          </a:effectRef>
-          <a:fontRef idx="minor">
-            <a:schemeClr val="accent1"/>
-          </a:fontRef>
-        </p:style>
-        <p:txBody>
-          <a:bodyPr rtlCol="0" anchor="ctr"/>
-          <a:lstStyle/>
-          <a:p>
-            <a:pPr algn="ctr"/>
-            <a:endParaRPr lang="nl-NL"/>
-          </a:p>
-        </p:txBody>
-      </p:sp>
-      <p:cxnSp>
-        <p:nvCxnSpPr>
-          <p:cNvPr id="47" name="Straight Connector 46">
-            <a:extLst>
-              <a:ext uri="{FF2B5EF4-FFF2-40B4-BE49-F238E27FC236}">
-                <a16:creationId xmlns:a16="http://schemas.microsoft.com/office/drawing/2014/main" id="{BB77F60D-AA92-4E88-9238-C37C7FCED343}"/>
-              </a:ext>
-            </a:extLst>
-          </p:cNvPr>
-          <p:cNvCxnSpPr/>
-          <p:nvPr/>
-        </p:nvCxnSpPr>
-        <p:spPr>
-          <a:xfrm>
-            <a:off x="344905" y="4868779"/>
-            <a:ext cx="2334126" cy="0"/>
-          </a:xfrm>
-          <a:prstGeom prst="line">
-            <a:avLst/>
-          </a:prstGeom>
-        </p:spPr>
-        <p:style>
-          <a:lnRef idx="3">
-            <a:schemeClr val="accent2"/>
-          </a:lnRef>
-          <a:fillRef idx="0">
-            <a:schemeClr val="accent2"/>
-          </a:fillRef>
-          <a:effectRef idx="2">
-            <a:schemeClr val="accent2"/>
-          </a:effectRef>
-          <a:fontRef idx="minor">
-            <a:schemeClr val="tx1"/>
-          </a:fontRef>
-        </p:style>
-      </p:cxnSp>
-      <p:sp>
-        <p:nvSpPr>
-          <p:cNvPr id="48" name="TextBox 47">
-            <a:extLst>
-              <a:ext uri="{FF2B5EF4-FFF2-40B4-BE49-F238E27FC236}">
-                <a16:creationId xmlns:a16="http://schemas.microsoft.com/office/drawing/2014/main" id="{210063D6-AB12-4D1A-8DD9-1B596D004A2F}"/>
-              </a:ext>
-            </a:extLst>
-          </p:cNvPr>
-          <p:cNvSpPr txBox="1"/>
-          <p:nvPr/>
-        </p:nvSpPr>
-        <p:spPr>
-          <a:xfrm>
-            <a:off x="2310061" y="4588042"/>
-            <a:ext cx="471458" cy="369332"/>
-          </a:xfrm>
-          <a:prstGeom prst="rect">
-            <a:avLst/>
-          </a:prstGeom>
-          <a:noFill/>
-        </p:spPr>
-        <p:txBody>
-          <a:bodyPr wrap="square" rtlCol="0">
-            <a:spAutoFit/>
-          </a:bodyPr>
-          <a:lstStyle/>
-          <a:p>
-            <a:pPr algn="ctr"/>
-            <a:r>
-              <a:rPr lang="it-IT" dirty="0">
-                <a:solidFill>
-                  <a:schemeClr val="accent2"/>
-                </a:solidFill>
-              </a:rPr>
-              <a:t>20</a:t>
-            </a:r>
-            <a:endParaRPr lang="nl-NL" dirty="0">
-              <a:solidFill>
-                <a:schemeClr val="accent2"/>
-              </a:solidFill>
-            </a:endParaRPr>
-          </a:p>
-        </p:txBody>
-      </p:sp>
-      <p:cxnSp>
-        <p:nvCxnSpPr>
-          <p:cNvPr id="49" name="Straight Connector 48">
-            <a:extLst>
-              <a:ext uri="{FF2B5EF4-FFF2-40B4-BE49-F238E27FC236}">
-                <a16:creationId xmlns:a16="http://schemas.microsoft.com/office/drawing/2014/main" id="{0BD6F6C2-AA8F-4637-B394-6AEB8944AE70}"/>
-              </a:ext>
-            </a:extLst>
-          </p:cNvPr>
-          <p:cNvCxnSpPr/>
-          <p:nvPr/>
-        </p:nvCxnSpPr>
-        <p:spPr>
-          <a:xfrm>
-            <a:off x="351141" y="3890211"/>
-            <a:ext cx="2334126" cy="0"/>
-          </a:xfrm>
-          <a:prstGeom prst="line">
-            <a:avLst/>
-          </a:prstGeom>
-        </p:spPr>
-        <p:style>
-          <a:lnRef idx="3">
-            <a:schemeClr val="accent2"/>
-          </a:lnRef>
-          <a:fillRef idx="0">
-            <a:schemeClr val="accent2"/>
-          </a:fillRef>
-          <a:effectRef idx="2">
-            <a:schemeClr val="accent2"/>
-          </a:effectRef>
-          <a:fontRef idx="minor">
-            <a:schemeClr val="tx1"/>
-          </a:fontRef>
-        </p:style>
-      </p:cxnSp>
-      <p:sp>
-        <p:nvSpPr>
-          <p:cNvPr id="50" name="TextBox 49">
-            <a:extLst>
-              <a:ext uri="{FF2B5EF4-FFF2-40B4-BE49-F238E27FC236}">
-                <a16:creationId xmlns:a16="http://schemas.microsoft.com/office/drawing/2014/main" id="{DC3D5BFC-C2C7-4C0B-8CCD-B5F0EF51BD42}"/>
-              </a:ext>
-            </a:extLst>
-          </p:cNvPr>
-          <p:cNvSpPr txBox="1"/>
-          <p:nvPr/>
-        </p:nvSpPr>
-        <p:spPr>
-          <a:xfrm>
-            <a:off x="2181726" y="3609474"/>
-            <a:ext cx="606029" cy="369332"/>
-          </a:xfrm>
-          <a:prstGeom prst="rect">
-            <a:avLst/>
-          </a:prstGeom>
-          <a:noFill/>
-        </p:spPr>
-        <p:txBody>
-          <a:bodyPr wrap="square" rtlCol="0">
-            <a:spAutoFit/>
-          </a:bodyPr>
-          <a:lstStyle/>
-          <a:p>
-            <a:pPr algn="ctr"/>
-            <a:r>
-              <a:rPr lang="it-IT" dirty="0">
-                <a:solidFill>
-                  <a:schemeClr val="accent2"/>
-                </a:solidFill>
-              </a:rPr>
-              <a:t>300</a:t>
-            </a:r>
-            <a:endParaRPr lang="nl-NL" dirty="0">
-              <a:solidFill>
-                <a:schemeClr val="accent2"/>
-              </a:solidFill>
-            </a:endParaRPr>
-          </a:p>
-        </p:txBody>
-      </p:sp>
-      <p:cxnSp>
-        <p:nvCxnSpPr>
-          <p:cNvPr id="51" name="Straight Connector 50">
-            <a:extLst>
-              <a:ext uri="{FF2B5EF4-FFF2-40B4-BE49-F238E27FC236}">
-                <a16:creationId xmlns:a16="http://schemas.microsoft.com/office/drawing/2014/main" id="{44BEA9E8-8FA9-4EBF-ADB1-F15EF59D545A}"/>
-              </a:ext>
-            </a:extLst>
-          </p:cNvPr>
-          <p:cNvCxnSpPr/>
-          <p:nvPr/>
-        </p:nvCxnSpPr>
-        <p:spPr>
-          <a:xfrm>
-            <a:off x="3376752" y="5219798"/>
-            <a:ext cx="2334126" cy="0"/>
-          </a:xfrm>
-          <a:prstGeom prst="line">
-            <a:avLst/>
-          </a:prstGeom>
-        </p:spPr>
-        <p:style>
-          <a:lnRef idx="3">
-            <a:schemeClr val="accent2"/>
-          </a:lnRef>
-          <a:fillRef idx="0">
-            <a:schemeClr val="accent2"/>
-          </a:fillRef>
-          <a:effectRef idx="2">
-            <a:schemeClr val="accent2"/>
-          </a:effectRef>
-          <a:fontRef idx="minor">
-            <a:schemeClr val="tx1"/>
-          </a:fontRef>
-        </p:style>
-      </p:cxnSp>
-      <p:sp>
-        <p:nvSpPr>
-          <p:cNvPr id="52" name="TextBox 51">
-            <a:extLst>
-              <a:ext uri="{FF2B5EF4-FFF2-40B4-BE49-F238E27FC236}">
-                <a16:creationId xmlns:a16="http://schemas.microsoft.com/office/drawing/2014/main" id="{A166A446-0273-44CD-8582-FA57872289AC}"/>
-              </a:ext>
-            </a:extLst>
-          </p:cNvPr>
-          <p:cNvSpPr txBox="1"/>
-          <p:nvPr/>
-        </p:nvSpPr>
-        <p:spPr>
-          <a:xfrm>
-            <a:off x="5624542" y="5035132"/>
-            <a:ext cx="471458" cy="369332"/>
-          </a:xfrm>
-          <a:prstGeom prst="rect">
-            <a:avLst/>
-          </a:prstGeom>
-          <a:noFill/>
-        </p:spPr>
-        <p:txBody>
-          <a:bodyPr wrap="square" rtlCol="0">
-            <a:spAutoFit/>
-          </a:bodyPr>
-          <a:lstStyle/>
-          <a:p>
-            <a:pPr algn="ctr"/>
-            <a:r>
-              <a:rPr lang="it-IT" dirty="0">
-                <a:solidFill>
-                  <a:schemeClr val="accent2"/>
-                </a:solidFill>
-              </a:rPr>
-              <a:t>20</a:t>
-            </a:r>
-            <a:endParaRPr lang="nl-NL" dirty="0">
-              <a:solidFill>
-                <a:schemeClr val="accent2"/>
-              </a:solidFill>
-            </a:endParaRPr>
-          </a:p>
-        </p:txBody>
-      </p:sp>
-      <p:cxnSp>
-        <p:nvCxnSpPr>
-          <p:cNvPr id="53" name="Straight Connector 52">
-            <a:extLst>
-              <a:ext uri="{FF2B5EF4-FFF2-40B4-BE49-F238E27FC236}">
-                <a16:creationId xmlns:a16="http://schemas.microsoft.com/office/drawing/2014/main" id="{7EEC18CD-74D0-4FAF-8860-CE57F8D1CFA6}"/>
-              </a:ext>
-            </a:extLst>
-          </p:cNvPr>
-          <p:cNvCxnSpPr/>
-          <p:nvPr/>
-        </p:nvCxnSpPr>
-        <p:spPr>
-          <a:xfrm>
-            <a:off x="3382988" y="5112781"/>
-            <a:ext cx="2334126" cy="0"/>
-          </a:xfrm>
-          <a:prstGeom prst="line">
-            <a:avLst/>
-          </a:prstGeom>
-        </p:spPr>
-        <p:style>
-          <a:lnRef idx="3">
-            <a:schemeClr val="accent2"/>
-          </a:lnRef>
-          <a:fillRef idx="0">
-            <a:schemeClr val="accent2"/>
-          </a:fillRef>
-          <a:effectRef idx="2">
-            <a:schemeClr val="accent2"/>
-          </a:effectRef>
-          <a:fontRef idx="minor">
-            <a:schemeClr val="tx1"/>
-          </a:fontRef>
-        </p:style>
-      </p:cxnSp>
-      <p:sp>
-        <p:nvSpPr>
-          <p:cNvPr id="54" name="TextBox 53">
-            <a:extLst>
-              <a:ext uri="{FF2B5EF4-FFF2-40B4-BE49-F238E27FC236}">
-                <a16:creationId xmlns:a16="http://schemas.microsoft.com/office/drawing/2014/main" id="{79388AA8-1909-4DBD-B882-1AB427F2771E}"/>
-              </a:ext>
-            </a:extLst>
-          </p:cNvPr>
-          <p:cNvSpPr txBox="1"/>
-          <p:nvPr/>
-        </p:nvSpPr>
-        <p:spPr>
-          <a:xfrm>
-            <a:off x="5566173" y="4796958"/>
-            <a:ext cx="606029" cy="369332"/>
-          </a:xfrm>
-          <a:prstGeom prst="rect">
-            <a:avLst/>
-          </a:prstGeom>
-          <a:noFill/>
-        </p:spPr>
-        <p:txBody>
-          <a:bodyPr wrap="square" rtlCol="0">
-            <a:spAutoFit/>
-          </a:bodyPr>
-          <a:lstStyle/>
-          <a:p>
-            <a:pPr algn="ctr"/>
-            <a:r>
-              <a:rPr lang="it-IT" dirty="0">
-                <a:solidFill>
-                  <a:schemeClr val="accent2"/>
-                </a:solidFill>
-              </a:rPr>
-              <a:t>300</a:t>
-            </a:r>
-            <a:endParaRPr lang="nl-NL" dirty="0">
-              <a:solidFill>
-                <a:schemeClr val="accent2"/>
-              </a:solidFill>
-            </a:endParaRPr>
-          </a:p>
-        </p:txBody>
-      </p:sp>
-      <p:sp>
-        <p:nvSpPr>
-          <p:cNvPr id="55" name="Arrow: Right 54">
-            <a:extLst>
-              <a:ext uri="{FF2B5EF4-FFF2-40B4-BE49-F238E27FC236}">
-                <a16:creationId xmlns:a16="http://schemas.microsoft.com/office/drawing/2014/main" id="{CF186115-EF21-4E45-BA1A-F7A01B55B725}"/>
-              </a:ext>
-            </a:extLst>
-          </p:cNvPr>
-          <p:cNvSpPr/>
-          <p:nvPr/>
-        </p:nvSpPr>
-        <p:spPr>
-          <a:xfrm>
-            <a:off x="5654279" y="3364185"/>
-            <a:ext cx="1094205" cy="369332"/>
-          </a:xfrm>
-          <a:prstGeom prst="rightArrow">
-            <a:avLst/>
-          </a:prstGeom>
-        </p:spPr>
-        <p:style>
-          <a:lnRef idx="2">
-            <a:schemeClr val="accent2">
-              <a:shade val="50000"/>
-            </a:schemeClr>
-          </a:lnRef>
-          <a:fillRef idx="1">
-            <a:schemeClr val="accent2"/>
-          </a:fillRef>
-          <a:effectRef idx="0">
-            <a:schemeClr val="accent2"/>
-          </a:effectRef>
-          <a:fontRef idx="minor">
-            <a:schemeClr val="lt1"/>
-          </a:fontRef>
-        </p:style>
-        <p:txBody>
-          <a:bodyPr rtlCol="0" anchor="ctr"/>
-          <a:lstStyle/>
-          <a:p>
-            <a:pPr algn="ctr"/>
-            <a:endParaRPr lang="nl-NL"/>
-          </a:p>
-        </p:txBody>
-      </p:sp>
-      <p:sp>
-        <p:nvSpPr>
-          <p:cNvPr id="57" name="Oval 56">
-            <a:extLst>
-              <a:ext uri="{FF2B5EF4-FFF2-40B4-BE49-F238E27FC236}">
-                <a16:creationId xmlns:a16="http://schemas.microsoft.com/office/drawing/2014/main" id="{F946F1D0-67D6-45FC-AEDB-3F765ADB089F}"/>
-              </a:ext>
-            </a:extLst>
-          </p:cNvPr>
-          <p:cNvSpPr/>
-          <p:nvPr/>
-        </p:nvSpPr>
-        <p:spPr>
-          <a:xfrm>
-            <a:off x="1444235" y="4886330"/>
-            <a:ext cx="352926" cy="473862"/>
-          </a:xfrm>
-          <a:prstGeom prst="ellipse">
-            <a:avLst/>
-          </a:prstGeom>
-          <a:noFill/>
-          <a:ln w="9525" cap="flat" cmpd="sng" algn="ctr">
-            <a:solidFill>
-              <a:schemeClr val="accent1"/>
-            </a:solidFill>
-            <a:prstDash val="solid"/>
-            <a:round/>
-            <a:headEnd type="none" w="med" len="med"/>
-            <a:tailEnd type="none" w="med" len="med"/>
-          </a:ln>
-        </p:spPr>
-        <p:style>
-          <a:lnRef idx="0">
-            <a:scrgbClr r="0" g="0" b="0"/>
-          </a:lnRef>
-          <a:fillRef idx="0">
-            <a:scrgbClr r="0" g="0" b="0"/>
-          </a:fillRef>
-          <a:effectRef idx="0">
-            <a:scrgbClr r="0" g="0" b="0"/>
-          </a:effectRef>
-          <a:fontRef idx="minor">
-            <a:schemeClr val="accent1"/>
-          </a:fontRef>
-        </p:style>
-        <p:txBody>
-          <a:bodyPr rtlCol="0" anchor="ctr"/>
-          <a:lstStyle/>
-          <a:p>
-            <a:pPr algn="ctr"/>
-            <a:endParaRPr lang="nl-NL"/>
-          </a:p>
-        </p:txBody>
-      </p:sp>
-    </p:spTree>
-    <p:extLst>
-      <p:ext uri="{BB962C8B-B14F-4D97-AF65-F5344CB8AC3E}">
-        <p14:creationId xmlns:p14="http://schemas.microsoft.com/office/powerpoint/2010/main" val="2308014033"/>
-      </p:ext>
-    </p:extLst>
-  </p:cSld>
-  <p:clrMapOvr>
-    <a:masterClrMapping/>
-  </p:clrMapOvr>
-  <mc:AlternateContent xmlns:mc="http://schemas.openxmlformats.org/markup-compatibility/2006" xmlns:p159="http://schemas.microsoft.com/office/powerpoint/2015/09/main">
-    <mc:Choice Requires="p159">
-      <p:transition spd="slow">
-        <p159:morph option="byObject"/>
-      </p:transition>
-    </mc:Choice>
-    <mc:Fallback xmlns="">
-      <p:transition spd="slow">
-        <p:fade/>
-      </p:transition>
-    </mc:Fallback>
-  </mc:AlternateContent>
-</p:sld>
-</file>
-
-<file path=ppt/slides/slide28.xml><?xml version="1.0" encoding="utf-8"?>
-<p:sld xmlns:a="http://schemas.openxmlformats.org/drawingml/2006/main" xmlns:r="http://schemas.openxmlformats.org/officeDocument/2006/relationships" xmlns:p="http://schemas.openxmlformats.org/presentationml/2006/main">
-  <p:cSld>
-    <p:spTree>
-      <p:nvGrpSpPr>
-        <p:cNvPr id="1" name=""/>
-        <p:cNvGrpSpPr/>
-        <p:nvPr/>
-      </p:nvGrpSpPr>
-      <p:grpSpPr>
-        <a:xfrm>
-          <a:off x="0" y="0"/>
-          <a:ext cx="0" cy="0"/>
-          <a:chOff x="0" y="0"/>
-          <a:chExt cx="0" cy="0"/>
-        </a:xfrm>
-      </p:grpSpPr>
-      <p:pic>
-        <p:nvPicPr>
-          <p:cNvPr id="2" name="Picture 1">
-            <a:extLst>
-              <a:ext uri="{FF2B5EF4-FFF2-40B4-BE49-F238E27FC236}">
-                <a16:creationId xmlns:a16="http://schemas.microsoft.com/office/drawing/2014/main" id="{EFCA64AE-70C0-46DC-9DE0-3BD016877CF0}"/>
-              </a:ext>
-            </a:extLst>
-          </p:cNvPr>
-          <p:cNvPicPr>
-            <a:picLocks noChangeAspect="1"/>
-          </p:cNvPicPr>
-          <p:nvPr/>
-        </p:nvPicPr>
-        <p:blipFill>
-          <a:blip r:embed="rId2">
-            <a:extLst>
-              <a:ext uri="{28A0092B-C50C-407E-A947-70E740481C1C}">
-                <a14:useLocalDpi xmlns:a14="http://schemas.microsoft.com/office/drawing/2010/main" val="0"/>
-              </a:ext>
-            </a:extLst>
-          </a:blip>
-          <a:stretch>
-            <a:fillRect/>
-          </a:stretch>
-        </p:blipFill>
-        <p:spPr>
-          <a:xfrm>
-            <a:off x="2471014" y="2125452"/>
-            <a:ext cx="7249970" cy="4405816"/>
-          </a:xfrm>
-          <a:prstGeom prst="rect">
-            <a:avLst/>
-          </a:prstGeom>
-        </p:spPr>
-      </p:pic>
-      <p:sp>
-        <p:nvSpPr>
-          <p:cNvPr id="3" name="TextBox 2">
-            <a:extLst>
-              <a:ext uri="{FF2B5EF4-FFF2-40B4-BE49-F238E27FC236}">
-                <a16:creationId xmlns:a16="http://schemas.microsoft.com/office/drawing/2014/main" id="{669BC41E-7A1B-450B-AE56-57E23EBB368B}"/>
-              </a:ext>
-            </a:extLst>
-          </p:cNvPr>
-          <p:cNvSpPr txBox="1"/>
-          <p:nvPr/>
-        </p:nvSpPr>
-        <p:spPr>
-          <a:xfrm>
-            <a:off x="0" y="0"/>
-            <a:ext cx="4395537" cy="369332"/>
-          </a:xfrm>
-          <a:prstGeom prst="rect">
-            <a:avLst/>
-          </a:prstGeom>
-          <a:noFill/>
-        </p:spPr>
-        <p:txBody>
-          <a:bodyPr wrap="square" rtlCol="0">
-            <a:spAutoFit/>
-          </a:bodyPr>
-          <a:lstStyle/>
-          <a:p>
-            <a:r>
-              <a:rPr lang="it-IT" u="sng" dirty="0"/>
-              <a:t>Blood Pressure Measurements - Outliers</a:t>
-            </a:r>
-            <a:endParaRPr lang="nl-NL" u="sng" dirty="0"/>
-          </a:p>
-        </p:txBody>
-      </p:sp>
-      <p:sp>
-        <p:nvSpPr>
-          <p:cNvPr id="4" name="TextBox 3">
-            <a:extLst>
-              <a:ext uri="{FF2B5EF4-FFF2-40B4-BE49-F238E27FC236}">
-                <a16:creationId xmlns:a16="http://schemas.microsoft.com/office/drawing/2014/main" id="{9D83727A-AEE6-4E01-9A07-195FB57628BF}"/>
-              </a:ext>
-            </a:extLst>
-          </p:cNvPr>
-          <p:cNvSpPr txBox="1"/>
-          <p:nvPr/>
-        </p:nvSpPr>
-        <p:spPr>
-          <a:xfrm>
-            <a:off x="2709862" y="811929"/>
-            <a:ext cx="6772275" cy="1200329"/>
-          </a:xfrm>
-          <a:prstGeom prst="rect">
-            <a:avLst/>
-          </a:prstGeom>
-          <a:noFill/>
-        </p:spPr>
-        <p:txBody>
-          <a:bodyPr wrap="square" rtlCol="0">
-            <a:spAutoFit/>
-          </a:bodyPr>
-          <a:lstStyle/>
-          <a:p>
-            <a:pPr algn="ctr"/>
-            <a:r>
-              <a:rPr lang="it-IT" sz="2400" dirty="0"/>
-              <a:t>Replaced with Mean value </a:t>
-            </a:r>
-          </a:p>
-          <a:p>
-            <a:pPr algn="ctr"/>
-            <a:r>
-              <a:rPr lang="it-IT" sz="2400" dirty="0"/>
-              <a:t>if </a:t>
-            </a:r>
-          </a:p>
-          <a:p>
-            <a:pPr algn="ctr"/>
-            <a:r>
-              <a:rPr lang="it-IT" sz="2400" dirty="0"/>
-              <a:t>|BP</a:t>
-            </a:r>
-            <a:r>
-              <a:rPr lang="it-IT" sz="2400" baseline="-25000" dirty="0"/>
-              <a:t>Sys,Dia</a:t>
-            </a:r>
-            <a:r>
-              <a:rPr lang="it-IT" sz="2400" dirty="0"/>
-              <a:t>| </a:t>
-            </a:r>
-            <a:r>
-              <a:rPr lang="nl-NL" sz="2400" dirty="0"/>
-              <a:t>&lt; 3·</a:t>
-            </a:r>
-            <a:r>
-              <a:rPr lang="el-GR" sz="2400" dirty="0"/>
-              <a:t>σ</a:t>
-            </a:r>
-            <a:endParaRPr lang="nl-NL" sz="2400" dirty="0"/>
-          </a:p>
-        </p:txBody>
-      </p:sp>
-    </p:spTree>
-    <p:extLst>
-      <p:ext uri="{BB962C8B-B14F-4D97-AF65-F5344CB8AC3E}">
-        <p14:creationId xmlns:p14="http://schemas.microsoft.com/office/powerpoint/2010/main" val="483860090"/>
-      </p:ext>
-    </p:extLst>
-  </p:cSld>
-  <p:clrMapOvr>
-    <a:masterClrMapping/>
-  </p:clrMapOvr>
-  <mc:AlternateContent xmlns:mc="http://schemas.openxmlformats.org/markup-compatibility/2006" xmlns:p159="http://schemas.microsoft.com/office/powerpoint/2015/09/main">
-    <mc:Choice Requires="p159">
-      <p:transition spd="slow">
-        <p159:morph option="byObject"/>
-      </p:transition>
-    </mc:Choice>
-    <mc:Fallback xmlns="">
-      <p:transition spd="slow">
-        <p:fade/>
-      </p:transition>
-    </mc:Fallback>
-  </mc:AlternateContent>
-</p:sld>
-</file>
-
-<file path=ppt/slides/slide29.xml><?xml version="1.0" encoding="utf-8"?>
-<p:sld xmlns:a="http://schemas.openxmlformats.org/drawingml/2006/main" xmlns:r="http://schemas.openxmlformats.org/officeDocument/2006/relationships" xmlns:p="http://schemas.openxmlformats.org/presentationml/2006/main">
-  <p:cSld>
-    <p:spTree>
-      <p:nvGrpSpPr>
-        <p:cNvPr id="1" name=""/>
-        <p:cNvGrpSpPr/>
-        <p:nvPr/>
-      </p:nvGrpSpPr>
-      <p:grpSpPr>
-        <a:xfrm>
-          <a:off x="0" y="0"/>
-          <a:ext cx="0" cy="0"/>
-          <a:chOff x="0" y="0"/>
-          <a:chExt cx="0" cy="0"/>
-        </a:xfrm>
-      </p:grpSpPr>
-      <p:sp>
-        <p:nvSpPr>
-          <p:cNvPr id="2" name="Title 1">
-            <a:extLst>
-              <a:ext uri="{FF2B5EF4-FFF2-40B4-BE49-F238E27FC236}">
-                <a16:creationId xmlns:a16="http://schemas.microsoft.com/office/drawing/2014/main" id="{E2742523-2057-44B4-9FB1-A3B7126FBF7F}"/>
-              </a:ext>
-            </a:extLst>
-          </p:cNvPr>
-          <p:cNvSpPr>
-            <a:spLocks noGrp="1"/>
-          </p:cNvSpPr>
-          <p:nvPr>
-            <p:ph type="title"/>
-          </p:nvPr>
-        </p:nvSpPr>
-        <p:spPr>
-          <a:xfrm>
-            <a:off x="838200" y="2766218"/>
-            <a:ext cx="10515600" cy="1325563"/>
-          </a:xfrm>
-        </p:spPr>
-        <p:txBody>
-          <a:bodyPr/>
-          <a:lstStyle/>
-          <a:p>
-            <a:pPr algn="ctr"/>
-            <a:r>
-              <a:rPr lang="it-IT" dirty="0"/>
-              <a:t>Eligibility to LHS</a:t>
-            </a:r>
-            <a:endParaRPr lang="nl-NL" dirty="0"/>
-          </a:p>
-        </p:txBody>
-      </p:sp>
-    </p:spTree>
-    <p:extLst>
-      <p:ext uri="{BB962C8B-B14F-4D97-AF65-F5344CB8AC3E}">
-        <p14:creationId xmlns:p14="http://schemas.microsoft.com/office/powerpoint/2010/main" val="64685501"/>
-      </p:ext>
-    </p:extLst>
-  </p:cSld>
-  <p:clrMapOvr>
-    <a:masterClrMapping/>
-  </p:clrMapOvr>
-  <mc:AlternateContent xmlns:mc="http://schemas.openxmlformats.org/markup-compatibility/2006" xmlns:p159="http://schemas.microsoft.com/office/powerpoint/2015/09/main">
-    <mc:Choice Requires="p159">
-      <p:transition spd="slow">
-        <p159:morph option="byObject"/>
-      </p:transition>
-    </mc:Choice>
-    <mc:Fallback xmlns="">
-      <p:transition spd="slow">
-        <p:fade/>
-      </p:transition>
-    </mc:Fallback>
-  </mc:AlternateContent>
-</p:sld>
-</file>
-
 <file path=ppt/slides/slide3.xml><?xml version="1.0" encoding="utf-8"?>
 <p:sld xmlns:a="http://schemas.openxmlformats.org/drawingml/2006/main" xmlns:r="http://schemas.openxmlformats.org/officeDocument/2006/relationships" xmlns:p="http://schemas.openxmlformats.org/presentationml/2006/main">
   <p:cSld>
@@ -10829,6 +10554,1285 @@
 </file>
 
 <file path=ppt/slides/slide30.xml><?xml version="1.0" encoding="utf-8"?>
+<p:sld xmlns:a="http://schemas.openxmlformats.org/drawingml/2006/main" xmlns:r="http://schemas.openxmlformats.org/officeDocument/2006/relationships" xmlns:p="http://schemas.openxmlformats.org/presentationml/2006/main">
+  <p:cSld>
+    <p:spTree>
+      <p:nvGrpSpPr>
+        <p:cNvPr id="1" name=""/>
+        <p:cNvGrpSpPr/>
+        <p:nvPr/>
+      </p:nvGrpSpPr>
+      <p:grpSpPr>
+        <a:xfrm>
+          <a:off x="0" y="0"/>
+          <a:ext cx="0" cy="0"/>
+          <a:chOff x="0" y="0"/>
+          <a:chExt cx="0" cy="0"/>
+        </a:xfrm>
+      </p:grpSpPr>
+      <p:sp>
+        <p:nvSpPr>
+          <p:cNvPr id="2" name="Title 1">
+            <a:extLst>
+              <a:ext uri="{FF2B5EF4-FFF2-40B4-BE49-F238E27FC236}">
+                <a16:creationId xmlns:a16="http://schemas.microsoft.com/office/drawing/2014/main" id="{6D37F963-7349-4DE3-A960-EEBD333A4E61}"/>
+              </a:ext>
+            </a:extLst>
+          </p:cNvPr>
+          <p:cNvSpPr txBox="1">
+            <a:spLocks/>
+          </p:cNvSpPr>
+          <p:nvPr/>
+        </p:nvSpPr>
+        <p:spPr>
+          <a:xfrm>
+            <a:off x="1524000" y="2235200"/>
+            <a:ext cx="9144000" cy="2387600"/>
+          </a:xfrm>
+          <a:prstGeom prst="rect">
+            <a:avLst/>
+          </a:prstGeom>
+        </p:spPr>
+        <p:txBody>
+          <a:bodyPr anchor="ctr"/>
+          <a:lstStyle>
+            <a:lvl1pPr algn="l" defTabSz="914400" rtl="0" eaLnBrk="1" latinLnBrk="0" hangingPunct="1">
+              <a:lnSpc>
+                <a:spcPct val="90000"/>
+              </a:lnSpc>
+              <a:spcBef>
+                <a:spcPct val="0"/>
+              </a:spcBef>
+              <a:buNone/>
+              <a:defRPr sz="4400" kern="1200">
+                <a:solidFill>
+                  <a:schemeClr val="tx1"/>
+                </a:solidFill>
+                <a:latin typeface="+mj-lt"/>
+                <a:ea typeface="+mj-ea"/>
+                <a:cs typeface="+mj-cs"/>
+              </a:defRPr>
+            </a:lvl1pPr>
+          </a:lstStyle>
+          <a:p>
+            <a:pPr algn="ctr"/>
+            <a:r>
+              <a:rPr lang="it-IT" dirty="0"/>
+              <a:t>Blood Pressure Readings</a:t>
+            </a:r>
+            <a:endParaRPr lang="nl-NL" dirty="0"/>
+          </a:p>
+        </p:txBody>
+      </p:sp>
+    </p:spTree>
+    <p:extLst>
+      <p:ext uri="{BB962C8B-B14F-4D97-AF65-F5344CB8AC3E}">
+        <p14:creationId xmlns:p14="http://schemas.microsoft.com/office/powerpoint/2010/main" val="603692568"/>
+      </p:ext>
+    </p:extLst>
+  </p:cSld>
+  <p:clrMapOvr>
+    <a:masterClrMapping/>
+  </p:clrMapOvr>
+  <mc:AlternateContent xmlns:mc="http://schemas.openxmlformats.org/markup-compatibility/2006" xmlns:p159="http://schemas.microsoft.com/office/powerpoint/2015/09/main">
+    <mc:Choice Requires="p159">
+      <p:transition spd="slow">
+        <p159:morph option="byObject"/>
+      </p:transition>
+    </mc:Choice>
+    <mc:Fallback xmlns="">
+      <p:transition spd="slow">
+        <p:fade/>
+      </p:transition>
+    </mc:Fallback>
+  </mc:AlternateContent>
+</p:sld>
+</file>
+
+<file path=ppt/slides/slide31.xml><?xml version="1.0" encoding="utf-8"?>
+<p:sld xmlns:a="http://schemas.openxmlformats.org/drawingml/2006/main" xmlns:r="http://schemas.openxmlformats.org/officeDocument/2006/relationships" xmlns:p="http://schemas.openxmlformats.org/presentationml/2006/main">
+  <p:cSld>
+    <p:spTree>
+      <p:nvGrpSpPr>
+        <p:cNvPr id="1" name=""/>
+        <p:cNvGrpSpPr/>
+        <p:nvPr/>
+      </p:nvGrpSpPr>
+      <p:grpSpPr>
+        <a:xfrm>
+          <a:off x="0" y="0"/>
+          <a:ext cx="0" cy="0"/>
+          <a:chOff x="0" y="0"/>
+          <a:chExt cx="0" cy="0"/>
+        </a:xfrm>
+      </p:grpSpPr>
+      <p:sp>
+        <p:nvSpPr>
+          <p:cNvPr id="2" name="TextBox 1">
+            <a:extLst>
+              <a:ext uri="{FF2B5EF4-FFF2-40B4-BE49-F238E27FC236}">
+                <a16:creationId xmlns:a16="http://schemas.microsoft.com/office/drawing/2014/main" id="{CC0200F0-ABFF-45F8-A6F5-9F8372AE5C7D}"/>
+              </a:ext>
+            </a:extLst>
+          </p:cNvPr>
+          <p:cNvSpPr txBox="1"/>
+          <p:nvPr/>
+        </p:nvSpPr>
+        <p:spPr>
+          <a:xfrm>
+            <a:off x="0" y="0"/>
+            <a:ext cx="4395537" cy="369332"/>
+          </a:xfrm>
+          <a:prstGeom prst="rect">
+            <a:avLst/>
+          </a:prstGeom>
+          <a:noFill/>
+        </p:spPr>
+        <p:txBody>
+          <a:bodyPr wrap="square" rtlCol="0">
+            <a:spAutoFit/>
+          </a:bodyPr>
+          <a:lstStyle/>
+          <a:p>
+            <a:r>
+              <a:rPr lang="it-IT" u="sng" dirty="0"/>
+              <a:t>Blood Pressure Measurements - Outliers</a:t>
+            </a:r>
+            <a:endParaRPr lang="nl-NL" u="sng" dirty="0"/>
+          </a:p>
+        </p:txBody>
+      </p:sp>
+      <p:pic>
+        <p:nvPicPr>
+          <p:cNvPr id="4" name="Picture 3">
+            <a:extLst>
+              <a:ext uri="{FF2B5EF4-FFF2-40B4-BE49-F238E27FC236}">
+                <a16:creationId xmlns:a16="http://schemas.microsoft.com/office/drawing/2014/main" id="{B141D145-8AC1-45C7-8D61-50D4BD1CC9DF}"/>
+              </a:ext>
+            </a:extLst>
+          </p:cNvPr>
+          <p:cNvPicPr>
+            <a:picLocks noChangeAspect="1"/>
+          </p:cNvPicPr>
+          <p:nvPr/>
+        </p:nvPicPr>
+        <p:blipFill>
+          <a:blip r:embed="rId2">
+            <a:extLst>
+              <a:ext uri="{28A0092B-C50C-407E-A947-70E740481C1C}">
+                <a14:useLocalDpi xmlns:a14="http://schemas.microsoft.com/office/drawing/2010/main" val="0"/>
+              </a:ext>
+            </a:extLst>
+          </a:blip>
+          <a:stretch>
+            <a:fillRect/>
+          </a:stretch>
+        </p:blipFill>
+        <p:spPr>
+          <a:xfrm>
+            <a:off x="6186458" y="1957137"/>
+            <a:ext cx="6005542" cy="3649580"/>
+          </a:xfrm>
+          <a:prstGeom prst="rect">
+            <a:avLst/>
+          </a:prstGeom>
+        </p:spPr>
+      </p:pic>
+      <p:pic>
+        <p:nvPicPr>
+          <p:cNvPr id="8" name="Picture 7">
+            <a:extLst>
+              <a:ext uri="{FF2B5EF4-FFF2-40B4-BE49-F238E27FC236}">
+                <a16:creationId xmlns:a16="http://schemas.microsoft.com/office/drawing/2014/main" id="{B78D7C7E-C973-4558-835C-AE7A82ECC7EF}"/>
+              </a:ext>
+            </a:extLst>
+          </p:cNvPr>
+          <p:cNvPicPr>
+            <a:picLocks noChangeAspect="1"/>
+          </p:cNvPicPr>
+          <p:nvPr/>
+        </p:nvPicPr>
+        <p:blipFill>
+          <a:blip r:embed="rId3">
+            <a:extLst>
+              <a:ext uri="{28A0092B-C50C-407E-A947-70E740481C1C}">
+                <a14:useLocalDpi xmlns:a14="http://schemas.microsoft.com/office/drawing/2010/main" val="0"/>
+              </a:ext>
+            </a:extLst>
+          </a:blip>
+          <a:stretch>
+            <a:fillRect/>
+          </a:stretch>
+        </p:blipFill>
+        <p:spPr>
+          <a:xfrm>
+            <a:off x="14258" y="1957137"/>
+            <a:ext cx="6005542" cy="3649580"/>
+          </a:xfrm>
+          <a:prstGeom prst="rect">
+            <a:avLst/>
+          </a:prstGeom>
+        </p:spPr>
+      </p:pic>
+      <p:cxnSp>
+        <p:nvCxnSpPr>
+          <p:cNvPr id="10" name="Straight Arrow Connector 9">
+            <a:extLst>
+              <a:ext uri="{FF2B5EF4-FFF2-40B4-BE49-F238E27FC236}">
+                <a16:creationId xmlns:a16="http://schemas.microsoft.com/office/drawing/2014/main" id="{D2D21716-6BD7-4A50-9558-0D0C13985C2D}"/>
+              </a:ext>
+            </a:extLst>
+          </p:cNvPr>
+          <p:cNvCxnSpPr>
+            <a:cxnSpLocks/>
+            <a:stCxn id="13" idx="2"/>
+            <a:endCxn id="28" idx="7"/>
+          </p:cNvCxnSpPr>
+          <p:nvPr/>
+        </p:nvCxnSpPr>
+        <p:spPr>
+          <a:xfrm flipH="1">
+            <a:off x="1745476" y="1706964"/>
+            <a:ext cx="1271553" cy="618127"/>
+          </a:xfrm>
+          <a:prstGeom prst="straightConnector1">
+            <a:avLst/>
+          </a:prstGeom>
+          <a:ln>
+            <a:tailEnd type="triangle"/>
+          </a:ln>
+        </p:spPr>
+        <p:style>
+          <a:lnRef idx="3">
+            <a:schemeClr val="dk1"/>
+          </a:lnRef>
+          <a:fillRef idx="0">
+            <a:schemeClr val="dk1"/>
+          </a:fillRef>
+          <a:effectRef idx="2">
+            <a:schemeClr val="dk1"/>
+          </a:effectRef>
+          <a:fontRef idx="minor">
+            <a:schemeClr val="tx1"/>
+          </a:fontRef>
+        </p:style>
+      </p:cxnSp>
+      <p:cxnSp>
+        <p:nvCxnSpPr>
+          <p:cNvPr id="12" name="Straight Arrow Connector 11">
+            <a:extLst>
+              <a:ext uri="{FF2B5EF4-FFF2-40B4-BE49-F238E27FC236}">
+                <a16:creationId xmlns:a16="http://schemas.microsoft.com/office/drawing/2014/main" id="{8588E362-09B2-4B0B-BBDE-2EFEFF000F9B}"/>
+              </a:ext>
+            </a:extLst>
+          </p:cNvPr>
+          <p:cNvCxnSpPr>
+            <a:cxnSpLocks/>
+            <a:stCxn id="13" idx="2"/>
+            <a:endCxn id="30" idx="1"/>
+          </p:cNvCxnSpPr>
+          <p:nvPr/>
+        </p:nvCxnSpPr>
+        <p:spPr>
+          <a:xfrm>
+            <a:off x="3017029" y="1706964"/>
+            <a:ext cx="1532465" cy="797849"/>
+          </a:xfrm>
+          <a:prstGeom prst="straightConnector1">
+            <a:avLst/>
+          </a:prstGeom>
+          <a:ln>
+            <a:tailEnd type="triangle"/>
+          </a:ln>
+        </p:spPr>
+        <p:style>
+          <a:lnRef idx="3">
+            <a:schemeClr val="dk1"/>
+          </a:lnRef>
+          <a:fillRef idx="0">
+            <a:schemeClr val="dk1"/>
+          </a:fillRef>
+          <a:effectRef idx="2">
+            <a:schemeClr val="dk1"/>
+          </a:effectRef>
+          <a:fontRef idx="minor">
+            <a:schemeClr val="tx1"/>
+          </a:fontRef>
+        </p:style>
+      </p:cxnSp>
+      <p:sp>
+        <p:nvSpPr>
+          <p:cNvPr id="13" name="TextBox 12">
+            <a:extLst>
+              <a:ext uri="{FF2B5EF4-FFF2-40B4-BE49-F238E27FC236}">
+                <a16:creationId xmlns:a16="http://schemas.microsoft.com/office/drawing/2014/main" id="{6406D038-F66B-4859-9416-A23E4E34906D}"/>
+              </a:ext>
+            </a:extLst>
+          </p:cNvPr>
+          <p:cNvSpPr txBox="1"/>
+          <p:nvPr/>
+        </p:nvSpPr>
+        <p:spPr>
+          <a:xfrm>
+            <a:off x="1490242" y="1337632"/>
+            <a:ext cx="3053573" cy="369332"/>
+          </a:xfrm>
+          <a:prstGeom prst="rect">
+            <a:avLst/>
+          </a:prstGeom>
+          <a:noFill/>
+        </p:spPr>
+        <p:txBody>
+          <a:bodyPr wrap="square" rtlCol="0">
+            <a:spAutoFit/>
+          </a:bodyPr>
+          <a:lstStyle/>
+          <a:p>
+            <a:pPr algn="ctr"/>
+            <a:r>
+              <a:rPr lang="it-IT" dirty="0"/>
+              <a:t>Set to NaN... Imputation?</a:t>
+            </a:r>
+            <a:endParaRPr lang="nl-NL" dirty="0"/>
+          </a:p>
+        </p:txBody>
+      </p:sp>
+      <p:sp>
+        <p:nvSpPr>
+          <p:cNvPr id="14" name="TextBox 13">
+            <a:extLst>
+              <a:ext uri="{FF2B5EF4-FFF2-40B4-BE49-F238E27FC236}">
+                <a16:creationId xmlns:a16="http://schemas.microsoft.com/office/drawing/2014/main" id="{F98F7243-8499-4EB9-8006-57DE1509E5C3}"/>
+              </a:ext>
+            </a:extLst>
+          </p:cNvPr>
+          <p:cNvSpPr txBox="1"/>
+          <p:nvPr/>
+        </p:nvSpPr>
+        <p:spPr>
+          <a:xfrm>
+            <a:off x="8060265" y="1152966"/>
+            <a:ext cx="2229853" cy="369332"/>
+          </a:xfrm>
+          <a:prstGeom prst="rect">
+            <a:avLst/>
+          </a:prstGeom>
+          <a:noFill/>
+        </p:spPr>
+        <p:txBody>
+          <a:bodyPr wrap="square" rtlCol="0">
+            <a:spAutoFit/>
+          </a:bodyPr>
+          <a:lstStyle/>
+          <a:p>
+            <a:r>
+              <a:rPr lang="it-IT" dirty="0"/>
+              <a:t>Considered Outliers</a:t>
+            </a:r>
+            <a:endParaRPr lang="nl-NL" dirty="0"/>
+          </a:p>
+        </p:txBody>
+      </p:sp>
+      <p:cxnSp>
+        <p:nvCxnSpPr>
+          <p:cNvPr id="16" name="Straight Arrow Connector 15">
+            <a:extLst>
+              <a:ext uri="{FF2B5EF4-FFF2-40B4-BE49-F238E27FC236}">
+                <a16:creationId xmlns:a16="http://schemas.microsoft.com/office/drawing/2014/main" id="{EF44B29E-148B-46BB-A8FF-E530EC852232}"/>
+              </a:ext>
+            </a:extLst>
+          </p:cNvPr>
+          <p:cNvCxnSpPr>
+            <a:cxnSpLocks/>
+            <a:stCxn id="14" idx="2"/>
+          </p:cNvCxnSpPr>
+          <p:nvPr/>
+        </p:nvCxnSpPr>
+        <p:spPr>
+          <a:xfrm>
+            <a:off x="9175192" y="1522298"/>
+            <a:ext cx="1451811" cy="1108426"/>
+          </a:xfrm>
+          <a:prstGeom prst="straightConnector1">
+            <a:avLst/>
+          </a:prstGeom>
+          <a:ln>
+            <a:tailEnd type="triangle"/>
+          </a:ln>
+        </p:spPr>
+        <p:style>
+          <a:lnRef idx="3">
+            <a:schemeClr val="dk1"/>
+          </a:lnRef>
+          <a:fillRef idx="0">
+            <a:schemeClr val="dk1"/>
+          </a:fillRef>
+          <a:effectRef idx="2">
+            <a:schemeClr val="dk1"/>
+          </a:effectRef>
+          <a:fontRef idx="minor">
+            <a:schemeClr val="tx1"/>
+          </a:fontRef>
+        </p:style>
+      </p:cxnSp>
+      <p:cxnSp>
+        <p:nvCxnSpPr>
+          <p:cNvPr id="18" name="Straight Arrow Connector 17">
+            <a:extLst>
+              <a:ext uri="{FF2B5EF4-FFF2-40B4-BE49-F238E27FC236}">
+                <a16:creationId xmlns:a16="http://schemas.microsoft.com/office/drawing/2014/main" id="{496788B4-CBEF-49A2-B29F-3DAC5165F805}"/>
+              </a:ext>
+            </a:extLst>
+          </p:cNvPr>
+          <p:cNvCxnSpPr>
+            <a:cxnSpLocks/>
+            <a:stCxn id="14" idx="2"/>
+          </p:cNvCxnSpPr>
+          <p:nvPr/>
+        </p:nvCxnSpPr>
+        <p:spPr>
+          <a:xfrm flipH="1">
+            <a:off x="7955994" y="1522298"/>
+            <a:ext cx="1219198" cy="1212700"/>
+          </a:xfrm>
+          <a:prstGeom prst="straightConnector1">
+            <a:avLst/>
+          </a:prstGeom>
+          <a:ln>
+            <a:tailEnd type="triangle"/>
+          </a:ln>
+        </p:spPr>
+        <p:style>
+          <a:lnRef idx="3">
+            <a:schemeClr val="dk1"/>
+          </a:lnRef>
+          <a:fillRef idx="0">
+            <a:schemeClr val="dk1"/>
+          </a:fillRef>
+          <a:effectRef idx="2">
+            <a:schemeClr val="dk1"/>
+          </a:effectRef>
+          <a:fontRef idx="minor">
+            <a:schemeClr val="tx1"/>
+          </a:fontRef>
+        </p:style>
+      </p:cxnSp>
+      <p:sp>
+        <p:nvSpPr>
+          <p:cNvPr id="28" name="Oval 27">
+            <a:extLst>
+              <a:ext uri="{FF2B5EF4-FFF2-40B4-BE49-F238E27FC236}">
+                <a16:creationId xmlns:a16="http://schemas.microsoft.com/office/drawing/2014/main" id="{5D3BB183-A2CA-46A2-B9C3-ADAE972B9027}"/>
+              </a:ext>
+            </a:extLst>
+          </p:cNvPr>
+          <p:cNvSpPr/>
+          <p:nvPr/>
+        </p:nvSpPr>
+        <p:spPr>
+          <a:xfrm>
+            <a:off x="1444235" y="2056559"/>
+            <a:ext cx="352926" cy="1833652"/>
+          </a:xfrm>
+          <a:prstGeom prst="ellipse">
+            <a:avLst/>
+          </a:prstGeom>
+          <a:noFill/>
+          <a:ln w="9525" cap="flat" cmpd="sng" algn="ctr">
+            <a:solidFill>
+              <a:schemeClr val="accent1"/>
+            </a:solidFill>
+            <a:prstDash val="solid"/>
+            <a:round/>
+            <a:headEnd type="none" w="med" len="med"/>
+            <a:tailEnd type="none" w="med" len="med"/>
+          </a:ln>
+        </p:spPr>
+        <p:style>
+          <a:lnRef idx="0">
+            <a:scrgbClr r="0" g="0" b="0"/>
+          </a:lnRef>
+          <a:fillRef idx="0">
+            <a:scrgbClr r="0" g="0" b="0"/>
+          </a:fillRef>
+          <a:effectRef idx="0">
+            <a:scrgbClr r="0" g="0" b="0"/>
+          </a:effectRef>
+          <a:fontRef idx="minor">
+            <a:schemeClr val="accent1"/>
+          </a:fontRef>
+        </p:style>
+        <p:txBody>
+          <a:bodyPr rtlCol="0" anchor="ctr"/>
+          <a:lstStyle/>
+          <a:p>
+            <a:pPr algn="ctr"/>
+            <a:endParaRPr lang="nl-NL"/>
+          </a:p>
+        </p:txBody>
+      </p:sp>
+      <p:sp>
+        <p:nvSpPr>
+          <p:cNvPr id="30" name="Oval 29">
+            <a:extLst>
+              <a:ext uri="{FF2B5EF4-FFF2-40B4-BE49-F238E27FC236}">
+                <a16:creationId xmlns:a16="http://schemas.microsoft.com/office/drawing/2014/main" id="{DFC1405A-A1FB-4B7D-A729-6F366D78F1F5}"/>
+              </a:ext>
+            </a:extLst>
+          </p:cNvPr>
+          <p:cNvSpPr/>
+          <p:nvPr/>
+        </p:nvSpPr>
+        <p:spPr>
+          <a:xfrm>
+            <a:off x="4497809" y="2056558"/>
+            <a:ext cx="352926" cy="3060874"/>
+          </a:xfrm>
+          <a:prstGeom prst="ellipse">
+            <a:avLst/>
+          </a:prstGeom>
+          <a:noFill/>
+          <a:ln w="9525" cap="flat" cmpd="sng" algn="ctr">
+            <a:solidFill>
+              <a:schemeClr val="accent1"/>
+            </a:solidFill>
+            <a:prstDash val="solid"/>
+            <a:round/>
+            <a:headEnd type="none" w="med" len="med"/>
+            <a:tailEnd type="none" w="med" len="med"/>
+          </a:ln>
+        </p:spPr>
+        <p:style>
+          <a:lnRef idx="0">
+            <a:scrgbClr r="0" g="0" b="0"/>
+          </a:lnRef>
+          <a:fillRef idx="0">
+            <a:scrgbClr r="0" g="0" b="0"/>
+          </a:fillRef>
+          <a:effectRef idx="0">
+            <a:scrgbClr r="0" g="0" b="0"/>
+          </a:effectRef>
+          <a:fontRef idx="minor">
+            <a:schemeClr val="accent1"/>
+          </a:fontRef>
+        </p:style>
+        <p:txBody>
+          <a:bodyPr rtlCol="0" anchor="ctr"/>
+          <a:lstStyle/>
+          <a:p>
+            <a:pPr algn="ctr"/>
+            <a:endParaRPr lang="nl-NL"/>
+          </a:p>
+        </p:txBody>
+      </p:sp>
+      <p:cxnSp>
+        <p:nvCxnSpPr>
+          <p:cNvPr id="47" name="Straight Connector 46">
+            <a:extLst>
+              <a:ext uri="{FF2B5EF4-FFF2-40B4-BE49-F238E27FC236}">
+                <a16:creationId xmlns:a16="http://schemas.microsoft.com/office/drawing/2014/main" id="{BB77F60D-AA92-4E88-9238-C37C7FCED343}"/>
+              </a:ext>
+            </a:extLst>
+          </p:cNvPr>
+          <p:cNvCxnSpPr/>
+          <p:nvPr/>
+        </p:nvCxnSpPr>
+        <p:spPr>
+          <a:xfrm>
+            <a:off x="344905" y="4868779"/>
+            <a:ext cx="2334126" cy="0"/>
+          </a:xfrm>
+          <a:prstGeom prst="line">
+            <a:avLst/>
+          </a:prstGeom>
+        </p:spPr>
+        <p:style>
+          <a:lnRef idx="3">
+            <a:schemeClr val="accent2"/>
+          </a:lnRef>
+          <a:fillRef idx="0">
+            <a:schemeClr val="accent2"/>
+          </a:fillRef>
+          <a:effectRef idx="2">
+            <a:schemeClr val="accent2"/>
+          </a:effectRef>
+          <a:fontRef idx="minor">
+            <a:schemeClr val="tx1"/>
+          </a:fontRef>
+        </p:style>
+      </p:cxnSp>
+      <p:sp>
+        <p:nvSpPr>
+          <p:cNvPr id="48" name="TextBox 47">
+            <a:extLst>
+              <a:ext uri="{FF2B5EF4-FFF2-40B4-BE49-F238E27FC236}">
+                <a16:creationId xmlns:a16="http://schemas.microsoft.com/office/drawing/2014/main" id="{210063D6-AB12-4D1A-8DD9-1B596D004A2F}"/>
+              </a:ext>
+            </a:extLst>
+          </p:cNvPr>
+          <p:cNvSpPr txBox="1"/>
+          <p:nvPr/>
+        </p:nvSpPr>
+        <p:spPr>
+          <a:xfrm>
+            <a:off x="2310061" y="4588042"/>
+            <a:ext cx="471458" cy="369332"/>
+          </a:xfrm>
+          <a:prstGeom prst="rect">
+            <a:avLst/>
+          </a:prstGeom>
+          <a:noFill/>
+        </p:spPr>
+        <p:txBody>
+          <a:bodyPr wrap="square" rtlCol="0">
+            <a:spAutoFit/>
+          </a:bodyPr>
+          <a:lstStyle/>
+          <a:p>
+            <a:pPr algn="ctr"/>
+            <a:r>
+              <a:rPr lang="it-IT" dirty="0">
+                <a:solidFill>
+                  <a:schemeClr val="accent2"/>
+                </a:solidFill>
+              </a:rPr>
+              <a:t>20</a:t>
+            </a:r>
+            <a:endParaRPr lang="nl-NL" dirty="0">
+              <a:solidFill>
+                <a:schemeClr val="accent2"/>
+              </a:solidFill>
+            </a:endParaRPr>
+          </a:p>
+        </p:txBody>
+      </p:sp>
+      <p:cxnSp>
+        <p:nvCxnSpPr>
+          <p:cNvPr id="49" name="Straight Connector 48">
+            <a:extLst>
+              <a:ext uri="{FF2B5EF4-FFF2-40B4-BE49-F238E27FC236}">
+                <a16:creationId xmlns:a16="http://schemas.microsoft.com/office/drawing/2014/main" id="{0BD6F6C2-AA8F-4637-B394-6AEB8944AE70}"/>
+              </a:ext>
+            </a:extLst>
+          </p:cNvPr>
+          <p:cNvCxnSpPr/>
+          <p:nvPr/>
+        </p:nvCxnSpPr>
+        <p:spPr>
+          <a:xfrm>
+            <a:off x="351141" y="3890211"/>
+            <a:ext cx="2334126" cy="0"/>
+          </a:xfrm>
+          <a:prstGeom prst="line">
+            <a:avLst/>
+          </a:prstGeom>
+        </p:spPr>
+        <p:style>
+          <a:lnRef idx="3">
+            <a:schemeClr val="accent2"/>
+          </a:lnRef>
+          <a:fillRef idx="0">
+            <a:schemeClr val="accent2"/>
+          </a:fillRef>
+          <a:effectRef idx="2">
+            <a:schemeClr val="accent2"/>
+          </a:effectRef>
+          <a:fontRef idx="minor">
+            <a:schemeClr val="tx1"/>
+          </a:fontRef>
+        </p:style>
+      </p:cxnSp>
+      <p:sp>
+        <p:nvSpPr>
+          <p:cNvPr id="50" name="TextBox 49">
+            <a:extLst>
+              <a:ext uri="{FF2B5EF4-FFF2-40B4-BE49-F238E27FC236}">
+                <a16:creationId xmlns:a16="http://schemas.microsoft.com/office/drawing/2014/main" id="{DC3D5BFC-C2C7-4C0B-8CCD-B5F0EF51BD42}"/>
+              </a:ext>
+            </a:extLst>
+          </p:cNvPr>
+          <p:cNvSpPr txBox="1"/>
+          <p:nvPr/>
+        </p:nvSpPr>
+        <p:spPr>
+          <a:xfrm>
+            <a:off x="2181726" y="3609474"/>
+            <a:ext cx="606029" cy="369332"/>
+          </a:xfrm>
+          <a:prstGeom prst="rect">
+            <a:avLst/>
+          </a:prstGeom>
+          <a:noFill/>
+        </p:spPr>
+        <p:txBody>
+          <a:bodyPr wrap="square" rtlCol="0">
+            <a:spAutoFit/>
+          </a:bodyPr>
+          <a:lstStyle/>
+          <a:p>
+            <a:pPr algn="ctr"/>
+            <a:r>
+              <a:rPr lang="it-IT" dirty="0">
+                <a:solidFill>
+                  <a:schemeClr val="accent2"/>
+                </a:solidFill>
+              </a:rPr>
+              <a:t>300</a:t>
+            </a:r>
+            <a:endParaRPr lang="nl-NL" dirty="0">
+              <a:solidFill>
+                <a:schemeClr val="accent2"/>
+              </a:solidFill>
+            </a:endParaRPr>
+          </a:p>
+        </p:txBody>
+      </p:sp>
+      <p:cxnSp>
+        <p:nvCxnSpPr>
+          <p:cNvPr id="51" name="Straight Connector 50">
+            <a:extLst>
+              <a:ext uri="{FF2B5EF4-FFF2-40B4-BE49-F238E27FC236}">
+                <a16:creationId xmlns:a16="http://schemas.microsoft.com/office/drawing/2014/main" id="{44BEA9E8-8FA9-4EBF-ADB1-F15EF59D545A}"/>
+              </a:ext>
+            </a:extLst>
+          </p:cNvPr>
+          <p:cNvCxnSpPr/>
+          <p:nvPr/>
+        </p:nvCxnSpPr>
+        <p:spPr>
+          <a:xfrm>
+            <a:off x="3376752" y="5219798"/>
+            <a:ext cx="2334126" cy="0"/>
+          </a:xfrm>
+          <a:prstGeom prst="line">
+            <a:avLst/>
+          </a:prstGeom>
+        </p:spPr>
+        <p:style>
+          <a:lnRef idx="3">
+            <a:schemeClr val="accent2"/>
+          </a:lnRef>
+          <a:fillRef idx="0">
+            <a:schemeClr val="accent2"/>
+          </a:fillRef>
+          <a:effectRef idx="2">
+            <a:schemeClr val="accent2"/>
+          </a:effectRef>
+          <a:fontRef idx="minor">
+            <a:schemeClr val="tx1"/>
+          </a:fontRef>
+        </p:style>
+      </p:cxnSp>
+      <p:sp>
+        <p:nvSpPr>
+          <p:cNvPr id="52" name="TextBox 51">
+            <a:extLst>
+              <a:ext uri="{FF2B5EF4-FFF2-40B4-BE49-F238E27FC236}">
+                <a16:creationId xmlns:a16="http://schemas.microsoft.com/office/drawing/2014/main" id="{A166A446-0273-44CD-8582-FA57872289AC}"/>
+              </a:ext>
+            </a:extLst>
+          </p:cNvPr>
+          <p:cNvSpPr txBox="1"/>
+          <p:nvPr/>
+        </p:nvSpPr>
+        <p:spPr>
+          <a:xfrm>
+            <a:off x="5624542" y="5035132"/>
+            <a:ext cx="471458" cy="369332"/>
+          </a:xfrm>
+          <a:prstGeom prst="rect">
+            <a:avLst/>
+          </a:prstGeom>
+          <a:noFill/>
+        </p:spPr>
+        <p:txBody>
+          <a:bodyPr wrap="square" rtlCol="0">
+            <a:spAutoFit/>
+          </a:bodyPr>
+          <a:lstStyle/>
+          <a:p>
+            <a:pPr algn="ctr"/>
+            <a:r>
+              <a:rPr lang="it-IT" dirty="0">
+                <a:solidFill>
+                  <a:schemeClr val="accent2"/>
+                </a:solidFill>
+              </a:rPr>
+              <a:t>20</a:t>
+            </a:r>
+            <a:endParaRPr lang="nl-NL" dirty="0">
+              <a:solidFill>
+                <a:schemeClr val="accent2"/>
+              </a:solidFill>
+            </a:endParaRPr>
+          </a:p>
+        </p:txBody>
+      </p:sp>
+      <p:cxnSp>
+        <p:nvCxnSpPr>
+          <p:cNvPr id="53" name="Straight Connector 52">
+            <a:extLst>
+              <a:ext uri="{FF2B5EF4-FFF2-40B4-BE49-F238E27FC236}">
+                <a16:creationId xmlns:a16="http://schemas.microsoft.com/office/drawing/2014/main" id="{7EEC18CD-74D0-4FAF-8860-CE57F8D1CFA6}"/>
+              </a:ext>
+            </a:extLst>
+          </p:cNvPr>
+          <p:cNvCxnSpPr/>
+          <p:nvPr/>
+        </p:nvCxnSpPr>
+        <p:spPr>
+          <a:xfrm>
+            <a:off x="3382988" y="5112781"/>
+            <a:ext cx="2334126" cy="0"/>
+          </a:xfrm>
+          <a:prstGeom prst="line">
+            <a:avLst/>
+          </a:prstGeom>
+        </p:spPr>
+        <p:style>
+          <a:lnRef idx="3">
+            <a:schemeClr val="accent2"/>
+          </a:lnRef>
+          <a:fillRef idx="0">
+            <a:schemeClr val="accent2"/>
+          </a:fillRef>
+          <a:effectRef idx="2">
+            <a:schemeClr val="accent2"/>
+          </a:effectRef>
+          <a:fontRef idx="minor">
+            <a:schemeClr val="tx1"/>
+          </a:fontRef>
+        </p:style>
+      </p:cxnSp>
+      <p:sp>
+        <p:nvSpPr>
+          <p:cNvPr id="54" name="TextBox 53">
+            <a:extLst>
+              <a:ext uri="{FF2B5EF4-FFF2-40B4-BE49-F238E27FC236}">
+                <a16:creationId xmlns:a16="http://schemas.microsoft.com/office/drawing/2014/main" id="{79388AA8-1909-4DBD-B882-1AB427F2771E}"/>
+              </a:ext>
+            </a:extLst>
+          </p:cNvPr>
+          <p:cNvSpPr txBox="1"/>
+          <p:nvPr/>
+        </p:nvSpPr>
+        <p:spPr>
+          <a:xfrm>
+            <a:off x="5566173" y="4796958"/>
+            <a:ext cx="606029" cy="369332"/>
+          </a:xfrm>
+          <a:prstGeom prst="rect">
+            <a:avLst/>
+          </a:prstGeom>
+          <a:noFill/>
+        </p:spPr>
+        <p:txBody>
+          <a:bodyPr wrap="square" rtlCol="0">
+            <a:spAutoFit/>
+          </a:bodyPr>
+          <a:lstStyle/>
+          <a:p>
+            <a:pPr algn="ctr"/>
+            <a:r>
+              <a:rPr lang="it-IT" dirty="0">
+                <a:solidFill>
+                  <a:schemeClr val="accent2"/>
+                </a:solidFill>
+              </a:rPr>
+              <a:t>300</a:t>
+            </a:r>
+            <a:endParaRPr lang="nl-NL" dirty="0">
+              <a:solidFill>
+                <a:schemeClr val="accent2"/>
+              </a:solidFill>
+            </a:endParaRPr>
+          </a:p>
+        </p:txBody>
+      </p:sp>
+      <p:sp>
+        <p:nvSpPr>
+          <p:cNvPr id="55" name="Arrow: Right 54">
+            <a:extLst>
+              <a:ext uri="{FF2B5EF4-FFF2-40B4-BE49-F238E27FC236}">
+                <a16:creationId xmlns:a16="http://schemas.microsoft.com/office/drawing/2014/main" id="{CF186115-EF21-4E45-BA1A-F7A01B55B725}"/>
+              </a:ext>
+            </a:extLst>
+          </p:cNvPr>
+          <p:cNvSpPr/>
+          <p:nvPr/>
+        </p:nvSpPr>
+        <p:spPr>
+          <a:xfrm>
+            <a:off x="5654279" y="3364185"/>
+            <a:ext cx="1094205" cy="369332"/>
+          </a:xfrm>
+          <a:prstGeom prst="rightArrow">
+            <a:avLst/>
+          </a:prstGeom>
+        </p:spPr>
+        <p:style>
+          <a:lnRef idx="2">
+            <a:schemeClr val="accent2">
+              <a:shade val="50000"/>
+            </a:schemeClr>
+          </a:lnRef>
+          <a:fillRef idx="1">
+            <a:schemeClr val="accent2"/>
+          </a:fillRef>
+          <a:effectRef idx="0">
+            <a:schemeClr val="accent2"/>
+          </a:effectRef>
+          <a:fontRef idx="minor">
+            <a:schemeClr val="lt1"/>
+          </a:fontRef>
+        </p:style>
+        <p:txBody>
+          <a:bodyPr rtlCol="0" anchor="ctr"/>
+          <a:lstStyle/>
+          <a:p>
+            <a:pPr algn="ctr"/>
+            <a:endParaRPr lang="nl-NL"/>
+          </a:p>
+        </p:txBody>
+      </p:sp>
+      <p:sp>
+        <p:nvSpPr>
+          <p:cNvPr id="57" name="Oval 56">
+            <a:extLst>
+              <a:ext uri="{FF2B5EF4-FFF2-40B4-BE49-F238E27FC236}">
+                <a16:creationId xmlns:a16="http://schemas.microsoft.com/office/drawing/2014/main" id="{F946F1D0-67D6-45FC-AEDB-3F765ADB089F}"/>
+              </a:ext>
+            </a:extLst>
+          </p:cNvPr>
+          <p:cNvSpPr/>
+          <p:nvPr/>
+        </p:nvSpPr>
+        <p:spPr>
+          <a:xfrm>
+            <a:off x="1444235" y="4886330"/>
+            <a:ext cx="352926" cy="473862"/>
+          </a:xfrm>
+          <a:prstGeom prst="ellipse">
+            <a:avLst/>
+          </a:prstGeom>
+          <a:noFill/>
+          <a:ln w="9525" cap="flat" cmpd="sng" algn="ctr">
+            <a:solidFill>
+              <a:schemeClr val="accent1"/>
+            </a:solidFill>
+            <a:prstDash val="solid"/>
+            <a:round/>
+            <a:headEnd type="none" w="med" len="med"/>
+            <a:tailEnd type="none" w="med" len="med"/>
+          </a:ln>
+        </p:spPr>
+        <p:style>
+          <a:lnRef idx="0">
+            <a:scrgbClr r="0" g="0" b="0"/>
+          </a:lnRef>
+          <a:fillRef idx="0">
+            <a:scrgbClr r="0" g="0" b="0"/>
+          </a:fillRef>
+          <a:effectRef idx="0">
+            <a:scrgbClr r="0" g="0" b="0"/>
+          </a:effectRef>
+          <a:fontRef idx="minor">
+            <a:schemeClr val="accent1"/>
+          </a:fontRef>
+        </p:style>
+        <p:txBody>
+          <a:bodyPr rtlCol="0" anchor="ctr"/>
+          <a:lstStyle/>
+          <a:p>
+            <a:pPr algn="ctr"/>
+            <a:endParaRPr lang="nl-NL"/>
+          </a:p>
+        </p:txBody>
+      </p:sp>
+    </p:spTree>
+    <p:extLst>
+      <p:ext uri="{BB962C8B-B14F-4D97-AF65-F5344CB8AC3E}">
+        <p14:creationId xmlns:p14="http://schemas.microsoft.com/office/powerpoint/2010/main" val="2308014033"/>
+      </p:ext>
+    </p:extLst>
+  </p:cSld>
+  <p:clrMapOvr>
+    <a:masterClrMapping/>
+  </p:clrMapOvr>
+  <mc:AlternateContent xmlns:mc="http://schemas.openxmlformats.org/markup-compatibility/2006" xmlns:p159="http://schemas.microsoft.com/office/powerpoint/2015/09/main">
+    <mc:Choice Requires="p159">
+      <p:transition spd="slow">
+        <p159:morph option="byObject"/>
+      </p:transition>
+    </mc:Choice>
+    <mc:Fallback xmlns="">
+      <p:transition spd="slow">
+        <p:fade/>
+      </p:transition>
+    </mc:Fallback>
+  </mc:AlternateContent>
+</p:sld>
+</file>
+
+<file path=ppt/slides/slide32.xml><?xml version="1.0" encoding="utf-8"?>
+<p:sld xmlns:a="http://schemas.openxmlformats.org/drawingml/2006/main" xmlns:r="http://schemas.openxmlformats.org/officeDocument/2006/relationships" xmlns:p="http://schemas.openxmlformats.org/presentationml/2006/main">
+  <p:cSld>
+    <p:spTree>
+      <p:nvGrpSpPr>
+        <p:cNvPr id="1" name=""/>
+        <p:cNvGrpSpPr/>
+        <p:nvPr/>
+      </p:nvGrpSpPr>
+      <p:grpSpPr>
+        <a:xfrm>
+          <a:off x="0" y="0"/>
+          <a:ext cx="0" cy="0"/>
+          <a:chOff x="0" y="0"/>
+          <a:chExt cx="0" cy="0"/>
+        </a:xfrm>
+      </p:grpSpPr>
+      <p:pic>
+        <p:nvPicPr>
+          <p:cNvPr id="2" name="Picture 1">
+            <a:extLst>
+              <a:ext uri="{FF2B5EF4-FFF2-40B4-BE49-F238E27FC236}">
+                <a16:creationId xmlns:a16="http://schemas.microsoft.com/office/drawing/2014/main" id="{EFCA64AE-70C0-46DC-9DE0-3BD016877CF0}"/>
+              </a:ext>
+            </a:extLst>
+          </p:cNvPr>
+          <p:cNvPicPr>
+            <a:picLocks noChangeAspect="1"/>
+          </p:cNvPicPr>
+          <p:nvPr/>
+        </p:nvPicPr>
+        <p:blipFill>
+          <a:blip r:embed="rId2">
+            <a:extLst>
+              <a:ext uri="{28A0092B-C50C-407E-A947-70E740481C1C}">
+                <a14:useLocalDpi xmlns:a14="http://schemas.microsoft.com/office/drawing/2010/main" val="0"/>
+              </a:ext>
+            </a:extLst>
+          </a:blip>
+          <a:stretch>
+            <a:fillRect/>
+          </a:stretch>
+        </p:blipFill>
+        <p:spPr>
+          <a:xfrm>
+            <a:off x="2471014" y="2125452"/>
+            <a:ext cx="7249970" cy="4405816"/>
+          </a:xfrm>
+          <a:prstGeom prst="rect">
+            <a:avLst/>
+          </a:prstGeom>
+        </p:spPr>
+      </p:pic>
+      <p:sp>
+        <p:nvSpPr>
+          <p:cNvPr id="3" name="TextBox 2">
+            <a:extLst>
+              <a:ext uri="{FF2B5EF4-FFF2-40B4-BE49-F238E27FC236}">
+                <a16:creationId xmlns:a16="http://schemas.microsoft.com/office/drawing/2014/main" id="{669BC41E-7A1B-450B-AE56-57E23EBB368B}"/>
+              </a:ext>
+            </a:extLst>
+          </p:cNvPr>
+          <p:cNvSpPr txBox="1"/>
+          <p:nvPr/>
+        </p:nvSpPr>
+        <p:spPr>
+          <a:xfrm>
+            <a:off x="0" y="0"/>
+            <a:ext cx="4395537" cy="369332"/>
+          </a:xfrm>
+          <a:prstGeom prst="rect">
+            <a:avLst/>
+          </a:prstGeom>
+          <a:noFill/>
+        </p:spPr>
+        <p:txBody>
+          <a:bodyPr wrap="square" rtlCol="0">
+            <a:spAutoFit/>
+          </a:bodyPr>
+          <a:lstStyle/>
+          <a:p>
+            <a:r>
+              <a:rPr lang="it-IT" u="sng" dirty="0"/>
+              <a:t>Blood Pressure Measurements - Outliers</a:t>
+            </a:r>
+            <a:endParaRPr lang="nl-NL" u="sng" dirty="0"/>
+          </a:p>
+        </p:txBody>
+      </p:sp>
+      <p:sp>
+        <p:nvSpPr>
+          <p:cNvPr id="4" name="TextBox 3">
+            <a:extLst>
+              <a:ext uri="{FF2B5EF4-FFF2-40B4-BE49-F238E27FC236}">
+                <a16:creationId xmlns:a16="http://schemas.microsoft.com/office/drawing/2014/main" id="{9D83727A-AEE6-4E01-9A07-195FB57628BF}"/>
+              </a:ext>
+            </a:extLst>
+          </p:cNvPr>
+          <p:cNvSpPr txBox="1"/>
+          <p:nvPr/>
+        </p:nvSpPr>
+        <p:spPr>
+          <a:xfrm>
+            <a:off x="2709862" y="811929"/>
+            <a:ext cx="6772275" cy="1200329"/>
+          </a:xfrm>
+          <a:prstGeom prst="rect">
+            <a:avLst/>
+          </a:prstGeom>
+          <a:noFill/>
+        </p:spPr>
+        <p:txBody>
+          <a:bodyPr wrap="square" rtlCol="0">
+            <a:spAutoFit/>
+          </a:bodyPr>
+          <a:lstStyle/>
+          <a:p>
+            <a:pPr algn="ctr"/>
+            <a:r>
+              <a:rPr lang="it-IT" sz="2400" dirty="0"/>
+              <a:t>Replaced with Mean value </a:t>
+            </a:r>
+          </a:p>
+          <a:p>
+            <a:pPr algn="ctr"/>
+            <a:r>
+              <a:rPr lang="it-IT" sz="2400" dirty="0"/>
+              <a:t>if </a:t>
+            </a:r>
+          </a:p>
+          <a:p>
+            <a:pPr algn="ctr"/>
+            <a:r>
+              <a:rPr lang="it-IT" sz="2400" dirty="0"/>
+              <a:t>|BP</a:t>
+            </a:r>
+            <a:r>
+              <a:rPr lang="it-IT" sz="2400" baseline="-25000" dirty="0"/>
+              <a:t>Sys,Dia</a:t>
+            </a:r>
+            <a:r>
+              <a:rPr lang="it-IT" sz="2400" dirty="0"/>
+              <a:t>| </a:t>
+            </a:r>
+            <a:r>
+              <a:rPr lang="nl-NL" sz="2400" dirty="0"/>
+              <a:t>&lt; 3·</a:t>
+            </a:r>
+            <a:r>
+              <a:rPr lang="el-GR" sz="2400" dirty="0"/>
+              <a:t>σ</a:t>
+            </a:r>
+            <a:endParaRPr lang="nl-NL" sz="2400" dirty="0"/>
+          </a:p>
+        </p:txBody>
+      </p:sp>
+    </p:spTree>
+    <p:extLst>
+      <p:ext uri="{BB962C8B-B14F-4D97-AF65-F5344CB8AC3E}">
+        <p14:creationId xmlns:p14="http://schemas.microsoft.com/office/powerpoint/2010/main" val="483860090"/>
+      </p:ext>
+    </p:extLst>
+  </p:cSld>
+  <p:clrMapOvr>
+    <a:masterClrMapping/>
+  </p:clrMapOvr>
+  <mc:AlternateContent xmlns:mc="http://schemas.openxmlformats.org/markup-compatibility/2006" xmlns:p159="http://schemas.microsoft.com/office/powerpoint/2015/09/main">
+    <mc:Choice Requires="p159">
+      <p:transition spd="slow">
+        <p159:morph option="byObject"/>
+      </p:transition>
+    </mc:Choice>
+    <mc:Fallback xmlns="">
+      <p:transition spd="slow">
+        <p:fade/>
+      </p:transition>
+    </mc:Fallback>
+  </mc:AlternateContent>
+</p:sld>
+</file>
+
+<file path=ppt/slides/slide33.xml><?xml version="1.0" encoding="utf-8"?>
+<p:sld xmlns:a="http://schemas.openxmlformats.org/drawingml/2006/main" xmlns:r="http://schemas.openxmlformats.org/officeDocument/2006/relationships" xmlns:p="http://schemas.openxmlformats.org/presentationml/2006/main">
+  <p:cSld>
+    <p:spTree>
+      <p:nvGrpSpPr>
+        <p:cNvPr id="1" name=""/>
+        <p:cNvGrpSpPr/>
+        <p:nvPr/>
+      </p:nvGrpSpPr>
+      <p:grpSpPr>
+        <a:xfrm>
+          <a:off x="0" y="0"/>
+          <a:ext cx="0" cy="0"/>
+          <a:chOff x="0" y="0"/>
+          <a:chExt cx="0" cy="0"/>
+        </a:xfrm>
+      </p:grpSpPr>
+      <p:sp>
+        <p:nvSpPr>
+          <p:cNvPr id="2" name="Title 1">
+            <a:extLst>
+              <a:ext uri="{FF2B5EF4-FFF2-40B4-BE49-F238E27FC236}">
+                <a16:creationId xmlns:a16="http://schemas.microsoft.com/office/drawing/2014/main" id="{E2742523-2057-44B4-9FB1-A3B7126FBF7F}"/>
+              </a:ext>
+            </a:extLst>
+          </p:cNvPr>
+          <p:cNvSpPr>
+            <a:spLocks noGrp="1"/>
+          </p:cNvSpPr>
+          <p:nvPr>
+            <p:ph type="title"/>
+          </p:nvPr>
+        </p:nvSpPr>
+        <p:spPr>
+          <a:xfrm>
+            <a:off x="838200" y="2766218"/>
+            <a:ext cx="10515600" cy="1325563"/>
+          </a:xfrm>
+        </p:spPr>
+        <p:txBody>
+          <a:bodyPr/>
+          <a:lstStyle/>
+          <a:p>
+            <a:pPr algn="ctr"/>
+            <a:r>
+              <a:rPr lang="it-IT" dirty="0"/>
+              <a:t>Eligibility to LHS</a:t>
+            </a:r>
+            <a:endParaRPr lang="nl-NL" dirty="0"/>
+          </a:p>
+        </p:txBody>
+      </p:sp>
+    </p:spTree>
+    <p:extLst>
+      <p:ext uri="{BB962C8B-B14F-4D97-AF65-F5344CB8AC3E}">
+        <p14:creationId xmlns:p14="http://schemas.microsoft.com/office/powerpoint/2010/main" val="64685501"/>
+      </p:ext>
+    </p:extLst>
+  </p:cSld>
+  <p:clrMapOvr>
+    <a:masterClrMapping/>
+  </p:clrMapOvr>
+  <mc:AlternateContent xmlns:mc="http://schemas.openxmlformats.org/markup-compatibility/2006" xmlns:p159="http://schemas.microsoft.com/office/powerpoint/2015/09/main">
+    <mc:Choice Requires="p159">
+      <p:transition spd="slow">
+        <p159:morph option="byObject"/>
+      </p:transition>
+    </mc:Choice>
+    <mc:Fallback xmlns="">
+      <p:transition spd="slow">
+        <p:fade/>
+      </p:transition>
+    </mc:Fallback>
+  </mc:AlternateContent>
+</p:sld>
+</file>
+
+<file path=ppt/slides/slide34.xml><?xml version="1.0" encoding="utf-8"?>
 <p:sld xmlns:a="http://schemas.openxmlformats.org/drawingml/2006/main" xmlns:r="http://schemas.openxmlformats.org/officeDocument/2006/relationships" xmlns:p="http://schemas.openxmlformats.org/presentationml/2006/main">
   <p:cSld>
     <p:spTree>
@@ -11179,7 +12183,7 @@
 </p:sld>
 </file>
 
-<file path=ppt/slides/slide31.xml><?xml version="1.0" encoding="utf-8"?>
+<file path=ppt/slides/slide35.xml><?xml version="1.0" encoding="utf-8"?>
 <p:sld xmlns:a="http://schemas.openxmlformats.org/drawingml/2006/main" xmlns:r="http://schemas.openxmlformats.org/officeDocument/2006/relationships" xmlns:p="http://schemas.openxmlformats.org/presentationml/2006/main">
   <p:cSld>
     <p:spTree>
@@ -11548,7 +12552,7 @@
 </p:sld>
 </file>
 
-<file path=ppt/slides/slide32.xml><?xml version="1.0" encoding="utf-8"?>
+<file path=ppt/slides/slide36.xml><?xml version="1.0" encoding="utf-8"?>
 <p:sld xmlns:a="http://schemas.openxmlformats.org/drawingml/2006/main" xmlns:r="http://schemas.openxmlformats.org/officeDocument/2006/relationships" xmlns:p="http://schemas.openxmlformats.org/presentationml/2006/main">
   <p:cSld>
     <p:spTree>
@@ -12040,7 +13044,7 @@
 </p:sld>
 </file>
 
-<file path=ppt/slides/slide33.xml><?xml version="1.0" encoding="utf-8"?>
+<file path=ppt/slides/slide37.xml><?xml version="1.0" encoding="utf-8"?>
 <p:sld xmlns:a="http://schemas.openxmlformats.org/drawingml/2006/main" xmlns:r="http://schemas.openxmlformats.org/officeDocument/2006/relationships" xmlns:p="http://schemas.openxmlformats.org/presentationml/2006/main">
   <p:cSld>
     <p:spTree>
@@ -14544,7 +15548,7 @@
 </file>
 
 <file path=ppt/slides/slide7.xml><?xml version="1.0" encoding="utf-8"?>
-<p:sld xmlns:a="http://schemas.openxmlformats.org/drawingml/2006/main" xmlns:r="http://schemas.openxmlformats.org/officeDocument/2006/relationships" xmlns:p="http://schemas.openxmlformats.org/presentationml/2006/main" show="0">
+<p:sld xmlns:a="http://schemas.openxmlformats.org/drawingml/2006/main" xmlns:r="http://schemas.openxmlformats.org/officeDocument/2006/relationships" xmlns:p="http://schemas.openxmlformats.org/presentationml/2006/main">
   <p:cSld>
     <p:spTree>
       <p:nvGrpSpPr>
@@ -14820,7 +15824,7 @@
 </file>
 
 <file path=ppt/slides/slide8.xml><?xml version="1.0" encoding="utf-8"?>
-<p:sld xmlns:a="http://schemas.openxmlformats.org/drawingml/2006/main" xmlns:r="http://schemas.openxmlformats.org/officeDocument/2006/relationships" xmlns:p="http://schemas.openxmlformats.org/presentationml/2006/main" show="0">
+<p:sld xmlns:a="http://schemas.openxmlformats.org/drawingml/2006/main" xmlns:r="http://schemas.openxmlformats.org/officeDocument/2006/relationships" xmlns:p="http://schemas.openxmlformats.org/presentationml/2006/main">
   <p:cSld>
     <p:spTree>
       <p:nvGrpSpPr>
@@ -15256,7 +16260,7 @@
           <a:p>
             <a:r>
               <a:rPr lang="it-IT" dirty="0"/>
-              <a:t>This is the Pivoted data, that can increase the scarcity of the data</a:t>
+              <a:t>This is the Pivoted table, that can increase the scarcity of the data</a:t>
             </a:r>
             <a:endParaRPr lang="nl-NL" dirty="0"/>
           </a:p>

--- a/assets/ppt/data_exploration.pptx
+++ b/assets/ppt/data_exploration.pptx
@@ -5,7 +5,7 @@
     <p:sldMasterId id="2147483648" r:id="rId1"/>
   </p:sldMasterIdLst>
   <p:notesMasterIdLst>
-    <p:notesMasterId r:id="rId39"/>
+    <p:notesMasterId r:id="rId42"/>
   </p:notesMasterIdLst>
   <p:sldIdLst>
     <p:sldId id="257" r:id="rId2"/>
@@ -38,13 +38,16 @@
     <p:sldId id="275" r:id="rId29"/>
     <p:sldId id="279" r:id="rId30"/>
     <p:sldId id="278" r:id="rId31"/>
-    <p:sldId id="276" r:id="rId32"/>
-    <p:sldId id="277" r:id="rId33"/>
-    <p:sldId id="268" r:id="rId34"/>
-    <p:sldId id="269" r:id="rId35"/>
-    <p:sldId id="271" r:id="rId36"/>
-    <p:sldId id="272" r:id="rId37"/>
-    <p:sldId id="267" r:id="rId38"/>
+    <p:sldId id="295" r:id="rId32"/>
+    <p:sldId id="276" r:id="rId33"/>
+    <p:sldId id="277" r:id="rId34"/>
+    <p:sldId id="296" r:id="rId35"/>
+    <p:sldId id="294" r:id="rId36"/>
+    <p:sldId id="268" r:id="rId37"/>
+    <p:sldId id="269" r:id="rId38"/>
+    <p:sldId id="271" r:id="rId39"/>
+    <p:sldId id="272" r:id="rId40"/>
+    <p:sldId id="267" r:id="rId41"/>
   </p:sldIdLst>
   <p:sldSz cx="12192000" cy="6858000"/>
   <p:notesSz cx="6858000" cy="9144000"/>
@@ -319,7 +322,7 @@
                     <a:cs typeface="+mn-cs"/>
                   </a:defRPr>
                 </a:pPr>
-                <a:endParaRPr lang="nl-NL"/>
+                <a:endParaRPr lang="en-US"/>
               </a:p>
             </c:txPr>
             <c:showLegendKey val="0"/>
@@ -428,7 +431,7 @@
               <a:cs typeface="+mn-cs"/>
             </a:defRPr>
           </a:pPr>
-          <a:endParaRPr lang="nl-NL"/>
+          <a:endParaRPr lang="en-US"/>
         </a:p>
       </c:txPr>
     </c:legend>
@@ -457,7 +460,7 @@
       <a:pPr>
         <a:defRPr/>
       </a:pPr>
-      <a:endParaRPr lang="nl-NL"/>
+      <a:endParaRPr lang="en-US"/>
     </a:p>
   </c:txPr>
   <c:externalData r:id="rId3">
@@ -1056,7 +1059,7 @@
           <a:p>
             <a:fld id="{511A67EE-E303-4967-962F-9A28980F7F51}" type="datetimeFigureOut">
               <a:rPr lang="nl-NL" smtClean="0"/>
-              <a:t>29-8-2024</a:t>
+              <a:t>9-9-2024</a:t>
             </a:fld>
             <a:endParaRPr lang="nl-NL"/>
           </a:p>
@@ -1473,7 +1476,7 @@
           <a:p>
             <a:fld id="{FED566F3-1D76-4AEC-ABE9-AFABCF495913}" type="datetime1">
               <a:rPr lang="nl-NL" smtClean="0"/>
-              <a:t>29-8-2024</a:t>
+              <a:t>9-9-2024</a:t>
             </a:fld>
             <a:endParaRPr lang="nl-NL"/>
           </a:p>
@@ -1685,7 +1688,7 @@
           <a:p>
             <a:fld id="{BC7E55A1-B228-4CF1-BFC3-6AC3B8574AC2}" type="datetime1">
               <a:rPr lang="nl-NL" smtClean="0"/>
-              <a:t>29-8-2024</a:t>
+              <a:t>9-9-2024</a:t>
             </a:fld>
             <a:endParaRPr lang="nl-NL"/>
           </a:p>
@@ -1907,7 +1910,7 @@
           <a:p>
             <a:fld id="{31AEBC58-6519-439D-8982-F0178170B57B}" type="datetime1">
               <a:rPr lang="nl-NL" smtClean="0"/>
-              <a:t>29-8-2024</a:t>
+              <a:t>9-9-2024</a:t>
             </a:fld>
             <a:endParaRPr lang="nl-NL"/>
           </a:p>
@@ -2119,7 +2122,7 @@
           <a:p>
             <a:fld id="{86DED964-D172-498F-BB83-2F7DE2692B37}" type="datetime1">
               <a:rPr lang="nl-NL" smtClean="0"/>
-              <a:t>29-8-2024</a:t>
+              <a:t>9-9-2024</a:t>
             </a:fld>
             <a:endParaRPr lang="nl-NL"/>
           </a:p>
@@ -2407,7 +2410,7 @@
           <a:p>
             <a:fld id="{230F72AC-D91D-48F5-81B4-4889AEA39D06}" type="datetime1">
               <a:rPr lang="nl-NL" smtClean="0"/>
-              <a:t>29-8-2024</a:t>
+              <a:t>9-9-2024</a:t>
             </a:fld>
             <a:endParaRPr lang="nl-NL"/>
           </a:p>
@@ -2687,7 +2690,7 @@
           <a:p>
             <a:fld id="{A0669485-26A9-497C-AD22-BCEA88DF9055}" type="datetime1">
               <a:rPr lang="nl-NL" smtClean="0"/>
-              <a:t>29-8-2024</a:t>
+              <a:t>9-9-2024</a:t>
             </a:fld>
             <a:endParaRPr lang="nl-NL"/>
           </a:p>
@@ -3114,7 +3117,7 @@
           <a:p>
             <a:fld id="{6216D00C-0C62-40DF-B6FF-B9A70701552F}" type="datetime1">
               <a:rPr lang="nl-NL" smtClean="0"/>
-              <a:t>29-8-2024</a:t>
+              <a:t>9-9-2024</a:t>
             </a:fld>
             <a:endParaRPr lang="nl-NL"/>
           </a:p>
@@ -3268,7 +3271,7 @@
           <a:p>
             <a:fld id="{88FE9515-DD39-459B-B4EF-789D74C861A5}" type="datetime1">
               <a:rPr lang="nl-NL" smtClean="0"/>
-              <a:t>29-8-2024</a:t>
+              <a:t>9-9-2024</a:t>
             </a:fld>
             <a:endParaRPr lang="nl-NL"/>
           </a:p>
@@ -3393,7 +3396,7 @@
           <a:p>
             <a:fld id="{DFA27954-A76F-4E23-8576-A7D9667CDBCC}" type="datetime1">
               <a:rPr lang="nl-NL" smtClean="0"/>
-              <a:t>29-8-2024</a:t>
+              <a:t>9-9-2024</a:t>
             </a:fld>
             <a:endParaRPr lang="nl-NL"/>
           </a:p>
@@ -3718,7 +3721,7 @@
           <a:p>
             <a:fld id="{53C17D54-D850-41AA-94F6-0F7316E4F326}" type="datetime1">
               <a:rPr lang="nl-NL" smtClean="0"/>
-              <a:t>29-8-2024</a:t>
+              <a:t>9-9-2024</a:t>
             </a:fld>
             <a:endParaRPr lang="nl-NL"/>
           </a:p>
@@ -4019,7 +4022,7 @@
           <a:p>
             <a:fld id="{0596A96E-3739-43D3-93E5-DAA507EA7B79}" type="datetime1">
               <a:rPr lang="nl-NL" smtClean="0"/>
-              <a:t>29-8-2024</a:t>
+              <a:t>9-9-2024</a:t>
             </a:fld>
             <a:endParaRPr lang="nl-NL"/>
           </a:p>
@@ -4274,7 +4277,7 @@
           <a:p>
             <a:fld id="{CFBB0748-A22F-4137-ADB1-6D5A09F7B1DF}" type="datetime1">
               <a:rPr lang="nl-NL" smtClean="0"/>
-              <a:t>29-8-2024</a:t>
+              <a:t>9-9-2024</a:t>
             </a:fld>
             <a:endParaRPr lang="nl-NL"/>
           </a:p>
@@ -10671,7 +10674,7 @@
           <p:cNvPr id="2" name="TextBox 1">
             <a:extLst>
               <a:ext uri="{FF2B5EF4-FFF2-40B4-BE49-F238E27FC236}">
-                <a16:creationId xmlns:a16="http://schemas.microsoft.com/office/drawing/2014/main" id="{CC0200F0-ABFF-45F8-A6F5-9F8372AE5C7D}"/>
+                <a16:creationId xmlns:a16="http://schemas.microsoft.com/office/drawing/2014/main" id="{4681F579-B7BD-43D4-967F-0C07FCDCD24F}"/>
               </a:ext>
             </a:extLst>
           </p:cNvPr>
@@ -10681,7 +10684,7 @@
         <p:spPr>
           <a:xfrm>
             <a:off x="0" y="0"/>
-            <a:ext cx="4395537" cy="369332"/>
+            <a:ext cx="3729790" cy="369332"/>
           </a:xfrm>
           <a:prstGeom prst="rect">
             <a:avLst/>
@@ -10696,18 +10699,18 @@
           <a:p>
             <a:r>
               <a:rPr lang="it-IT" u="sng" dirty="0"/>
-              <a:t>Blood Pressure Measurements - Outliers</a:t>
+              <a:t>Dataset</a:t>
             </a:r>
-            <a:endParaRPr lang="nl-NL" u="sng" dirty="0"/>
+            <a:endParaRPr lang="en-US" u="sng" dirty="0"/>
           </a:p>
         </p:txBody>
       </p:sp>
       <p:pic>
         <p:nvPicPr>
-          <p:cNvPr id="4" name="Picture 3">
-            <a:extLst>
-              <a:ext uri="{FF2B5EF4-FFF2-40B4-BE49-F238E27FC236}">
-                <a16:creationId xmlns:a16="http://schemas.microsoft.com/office/drawing/2014/main" id="{B141D145-8AC1-45C7-8D61-50D4BD1CC9DF}"/>
+          <p:cNvPr id="3" name="Graphic 2" descr="Users">
+            <a:extLst>
+              <a:ext uri="{FF2B5EF4-FFF2-40B4-BE49-F238E27FC236}">
+                <a16:creationId xmlns:a16="http://schemas.microsoft.com/office/drawing/2014/main" id="{6A96EAA8-88F7-4B8F-9D92-7D32260EB0BA}"/>
               </a:ext>
             </a:extLst>
           </p:cNvPr>
@@ -10721,6 +10724,9 @@
             <a:extLst>
               <a:ext uri="{28A0092B-C50C-407E-A947-70E740481C1C}">
                 <a14:useLocalDpi xmlns:a14="http://schemas.microsoft.com/office/drawing/2010/main" val="0"/>
+              </a:ext>
+              <a:ext uri="{96DAC541-7B7A-43D3-8B79-37D633B846F1}">
+                <asvg:svgBlip xmlns:asvg="http://schemas.microsoft.com/office/drawing/2016/SVG/main" r:embed="rId3"/>
               </a:ext>
             </a:extLst>
           </a:blip>
@@ -10730,20 +10736,56 @@
         </p:blipFill>
         <p:spPr>
           <a:xfrm>
-            <a:off x="6186458" y="1957137"/>
-            <a:ext cx="6005542" cy="3649580"/>
+            <a:off x="1379623" y="642889"/>
+            <a:ext cx="1394355" cy="1394355"/>
           </a:xfrm>
           <a:prstGeom prst="rect">
             <a:avLst/>
           </a:prstGeom>
         </p:spPr>
       </p:pic>
+      <p:sp>
+        <p:nvSpPr>
+          <p:cNvPr id="4" name="TextBox 3">
+            <a:extLst>
+              <a:ext uri="{FF2B5EF4-FFF2-40B4-BE49-F238E27FC236}">
+                <a16:creationId xmlns:a16="http://schemas.microsoft.com/office/drawing/2014/main" id="{1992D4E9-A94E-4A1F-90F9-D850F574D118}"/>
+              </a:ext>
+            </a:extLst>
+          </p:cNvPr>
+          <p:cNvSpPr txBox="1"/>
+          <p:nvPr/>
+        </p:nvSpPr>
+        <p:spPr>
+          <a:xfrm>
+            <a:off x="9016321" y="5610925"/>
+            <a:ext cx="1809478" cy="461665"/>
+          </a:xfrm>
+          <a:prstGeom prst="rect">
+            <a:avLst/>
+          </a:prstGeom>
+          <a:noFill/>
+        </p:spPr>
+        <p:txBody>
+          <a:bodyPr wrap="square" rtlCol="0">
+            <a:spAutoFit/>
+          </a:bodyPr>
+          <a:lstStyle/>
+          <a:p>
+            <a:r>
+              <a:rPr lang="it-IT" sz="2400" dirty="0"/>
+              <a:t>1322 pts</a:t>
+            </a:r>
+            <a:endParaRPr lang="en-US" sz="2400" dirty="0"/>
+          </a:p>
+        </p:txBody>
+      </p:sp>
       <p:pic>
         <p:nvPicPr>
-          <p:cNvPr id="8" name="Picture 7">
-            <a:extLst>
-              <a:ext uri="{FF2B5EF4-FFF2-40B4-BE49-F238E27FC236}">
-                <a16:creationId xmlns:a16="http://schemas.microsoft.com/office/drawing/2014/main" id="{B78D7C7E-C973-4558-835C-AE7A82ECC7EF}"/>
+          <p:cNvPr id="5" name="Graphic 4" descr="Users">
+            <a:extLst>
+              <a:ext uri="{FF2B5EF4-FFF2-40B4-BE49-F238E27FC236}">
+                <a16:creationId xmlns:a16="http://schemas.microsoft.com/office/drawing/2014/main" id="{A99F3A23-BC07-43D9-B812-6E19ECCC48B1}"/>
               </a:ext>
             </a:extLst>
           </p:cNvPr>
@@ -10753,10 +10795,13 @@
           <p:nvPr/>
         </p:nvPicPr>
         <p:blipFill>
-          <a:blip r:embed="rId3">
+          <a:blip r:embed="rId2">
             <a:extLst>
               <a:ext uri="{28A0092B-C50C-407E-A947-70E740481C1C}">
                 <a14:useLocalDpi xmlns:a14="http://schemas.microsoft.com/office/drawing/2010/main" val="0"/>
+              </a:ext>
+              <a:ext uri="{96DAC541-7B7A-43D3-8B79-37D633B846F1}">
+                <asvg:svgBlip xmlns:asvg="http://schemas.microsoft.com/office/drawing/2016/SVG/main" r:embed="rId3"/>
               </a:ext>
             </a:extLst>
           </a:blip>
@@ -10766,8 +10811,197 @@
         </p:blipFill>
         <p:spPr>
           <a:xfrm>
-            <a:off x="14258" y="1957137"/>
-            <a:ext cx="6005542" cy="3649580"/>
+            <a:off x="4742408" y="2754561"/>
+            <a:ext cx="1394355" cy="1394355"/>
+          </a:xfrm>
+          <a:prstGeom prst="rect">
+            <a:avLst/>
+          </a:prstGeom>
+        </p:spPr>
+      </p:pic>
+      <p:sp>
+        <p:nvSpPr>
+          <p:cNvPr id="6" name="TextBox 5">
+            <a:extLst>
+              <a:ext uri="{FF2B5EF4-FFF2-40B4-BE49-F238E27FC236}">
+                <a16:creationId xmlns:a16="http://schemas.microsoft.com/office/drawing/2014/main" id="{3312CAA4-B6D5-45F6-815B-3A9186D27E0F}"/>
+              </a:ext>
+            </a:extLst>
+          </p:cNvPr>
+          <p:cNvSpPr txBox="1"/>
+          <p:nvPr/>
+        </p:nvSpPr>
+        <p:spPr>
+          <a:xfrm>
+            <a:off x="2932930" y="1109233"/>
+            <a:ext cx="1270103" cy="461665"/>
+          </a:xfrm>
+          <a:prstGeom prst="rect">
+            <a:avLst/>
+          </a:prstGeom>
+          <a:noFill/>
+        </p:spPr>
+        <p:txBody>
+          <a:bodyPr wrap="square" rtlCol="0">
+            <a:spAutoFit/>
+          </a:bodyPr>
+          <a:lstStyle/>
+          <a:p>
+            <a:r>
+              <a:rPr lang="it-IT" sz="2400" dirty="0"/>
+              <a:t>3886 pts</a:t>
+            </a:r>
+            <a:endParaRPr lang="en-US" sz="2400" dirty="0"/>
+          </a:p>
+        </p:txBody>
+      </p:sp>
+      <p:pic>
+        <p:nvPicPr>
+          <p:cNvPr id="7" name="Graphic 6" descr="Users">
+            <a:extLst>
+              <a:ext uri="{FF2B5EF4-FFF2-40B4-BE49-F238E27FC236}">
+                <a16:creationId xmlns:a16="http://schemas.microsoft.com/office/drawing/2014/main" id="{AFF97BB8-6FE7-4FBD-B776-C87782736AB0}"/>
+              </a:ext>
+            </a:extLst>
+          </p:cNvPr>
+          <p:cNvPicPr>
+            <a:picLocks noChangeAspect="1"/>
+          </p:cNvPicPr>
+          <p:nvPr/>
+        </p:nvPicPr>
+        <p:blipFill>
+          <a:blip r:embed="rId2">
+            <a:extLst>
+              <a:ext uri="{28A0092B-C50C-407E-A947-70E740481C1C}">
+                <a14:useLocalDpi xmlns:a14="http://schemas.microsoft.com/office/drawing/2010/main" val="0"/>
+              </a:ext>
+              <a:ext uri="{96DAC541-7B7A-43D3-8B79-37D633B846F1}">
+                <asvg:svgBlip xmlns:asvg="http://schemas.microsoft.com/office/drawing/2016/SVG/main" r:embed="rId3"/>
+              </a:ext>
+            </a:extLst>
+          </a:blip>
+          <a:stretch>
+            <a:fillRect/>
+          </a:stretch>
+        </p:blipFill>
+        <p:spPr>
+          <a:xfrm>
+            <a:off x="7405400" y="5144579"/>
+            <a:ext cx="1394355" cy="1394355"/>
+          </a:xfrm>
+          <a:prstGeom prst="rect">
+            <a:avLst/>
+          </a:prstGeom>
+        </p:spPr>
+      </p:pic>
+      <p:sp>
+        <p:nvSpPr>
+          <p:cNvPr id="8" name="TextBox 7">
+            <a:extLst>
+              <a:ext uri="{FF2B5EF4-FFF2-40B4-BE49-F238E27FC236}">
+                <a16:creationId xmlns:a16="http://schemas.microsoft.com/office/drawing/2014/main" id="{EFFDE2BE-B1C4-4574-ADCA-875014948100}"/>
+              </a:ext>
+            </a:extLst>
+          </p:cNvPr>
+          <p:cNvSpPr txBox="1"/>
+          <p:nvPr/>
+        </p:nvSpPr>
+        <p:spPr>
+          <a:xfrm>
+            <a:off x="6200932" y="3220905"/>
+            <a:ext cx="1274690" cy="461665"/>
+          </a:xfrm>
+          <a:prstGeom prst="rect">
+            <a:avLst/>
+          </a:prstGeom>
+          <a:noFill/>
+        </p:spPr>
+        <p:txBody>
+          <a:bodyPr wrap="square" rtlCol="0">
+            <a:spAutoFit/>
+          </a:bodyPr>
+          <a:lstStyle/>
+          <a:p>
+            <a:r>
+              <a:rPr lang="it-IT" sz="2400" dirty="0"/>
+              <a:t>3878 pts</a:t>
+            </a:r>
+            <a:endParaRPr lang="en-US" sz="2400" dirty="0"/>
+          </a:p>
+        </p:txBody>
+      </p:sp>
+      <p:pic>
+        <p:nvPicPr>
+          <p:cNvPr id="9" name="Graphic 8" descr="Filter">
+            <a:extLst>
+              <a:ext uri="{FF2B5EF4-FFF2-40B4-BE49-F238E27FC236}">
+                <a16:creationId xmlns:a16="http://schemas.microsoft.com/office/drawing/2014/main" id="{CD1340A2-8DFC-435E-AA11-7885EC868770}"/>
+              </a:ext>
+            </a:extLst>
+          </p:cNvPr>
+          <p:cNvPicPr>
+            <a:picLocks noChangeAspect="1"/>
+          </p:cNvPicPr>
+          <p:nvPr/>
+        </p:nvPicPr>
+        <p:blipFill>
+          <a:blip r:embed="rId4">
+            <a:extLst>
+              <a:ext uri="{28A0092B-C50C-407E-A947-70E740481C1C}">
+                <a14:useLocalDpi xmlns:a14="http://schemas.microsoft.com/office/drawing/2010/main" val="0"/>
+              </a:ext>
+              <a:ext uri="{96DAC541-7B7A-43D3-8B79-37D633B846F1}">
+                <asvg:svgBlip xmlns:asvg="http://schemas.microsoft.com/office/drawing/2016/SVG/main" r:embed="rId5"/>
+              </a:ext>
+            </a:extLst>
+          </a:blip>
+          <a:stretch>
+            <a:fillRect/>
+          </a:stretch>
+        </p:blipFill>
+        <p:spPr>
+          <a:xfrm>
+            <a:off x="5600965" y="1882893"/>
+            <a:ext cx="1071596" cy="1071596"/>
+          </a:xfrm>
+          <a:prstGeom prst="rect">
+            <a:avLst/>
+          </a:prstGeom>
+        </p:spPr>
+      </p:pic>
+      <p:pic>
+        <p:nvPicPr>
+          <p:cNvPr id="10" name="Graphic 9" descr="Filter">
+            <a:extLst>
+              <a:ext uri="{FF2B5EF4-FFF2-40B4-BE49-F238E27FC236}">
+                <a16:creationId xmlns:a16="http://schemas.microsoft.com/office/drawing/2014/main" id="{76F3D8BB-DFA0-46E2-B653-293B5D739FE9}"/>
+              </a:ext>
+            </a:extLst>
+          </p:cNvPr>
+          <p:cNvPicPr>
+            <a:picLocks noChangeAspect="1"/>
+          </p:cNvPicPr>
+          <p:nvPr/>
+        </p:nvPicPr>
+        <p:blipFill>
+          <a:blip r:embed="rId4">
+            <a:extLst>
+              <a:ext uri="{28A0092B-C50C-407E-A947-70E740481C1C}">
+                <a14:useLocalDpi xmlns:a14="http://schemas.microsoft.com/office/drawing/2010/main" val="0"/>
+              </a:ext>
+              <a:ext uri="{96DAC541-7B7A-43D3-8B79-37D633B846F1}">
+                <asvg:svgBlip xmlns:asvg="http://schemas.microsoft.com/office/drawing/2016/SVG/main" r:embed="rId5"/>
+              </a:ext>
+            </a:extLst>
+          </a:blip>
+          <a:stretch>
+            <a:fillRect/>
+          </a:stretch>
+        </p:blipFill>
+        <p:spPr>
+          <a:xfrm>
+            <a:off x="8480523" y="4422021"/>
+            <a:ext cx="1071596" cy="1071596"/>
           </a:xfrm>
           <a:prstGeom prst="rect">
             <a:avLst/>
@@ -10776,26 +11010,26 @@
       </p:pic>
       <p:cxnSp>
         <p:nvCxnSpPr>
-          <p:cNvPr id="10" name="Straight Arrow Connector 9">
-            <a:extLst>
-              <a:ext uri="{FF2B5EF4-FFF2-40B4-BE49-F238E27FC236}">
-                <a16:creationId xmlns:a16="http://schemas.microsoft.com/office/drawing/2014/main" id="{D2D21716-6BD7-4A50-9558-0D0C13985C2D}"/>
+          <p:cNvPr id="12" name="Connector: Elbow 11">
+            <a:extLst>
+              <a:ext uri="{FF2B5EF4-FFF2-40B4-BE49-F238E27FC236}">
+                <a16:creationId xmlns:a16="http://schemas.microsoft.com/office/drawing/2014/main" id="{3D5E1246-60C5-4610-B8DF-C43828FC49BA}"/>
               </a:ext>
             </a:extLst>
           </p:cNvPr>
           <p:cNvCxnSpPr>
             <a:cxnSpLocks/>
-            <a:stCxn id="13" idx="2"/>
-            <a:endCxn id="28" idx="7"/>
+            <a:stCxn id="6" idx="3"/>
+            <a:endCxn id="9" idx="0"/>
           </p:cNvCxnSpPr>
           <p:nvPr/>
         </p:nvCxnSpPr>
         <p:spPr>
-          <a:xfrm flipH="1">
-            <a:off x="1745476" y="1706964"/>
-            <a:ext cx="1271553" cy="618127"/>
-          </a:xfrm>
-          <a:prstGeom prst="straightConnector1">
+          <a:xfrm>
+            <a:off x="4203033" y="1340066"/>
+            <a:ext cx="1933730" cy="542827"/>
+          </a:xfrm>
+          <a:prstGeom prst="bentConnector2">
             <a:avLst/>
           </a:prstGeom>
           <a:ln>
@@ -10803,13 +11037,13 @@
           </a:ln>
         </p:spPr>
         <p:style>
-          <a:lnRef idx="3">
+          <a:lnRef idx="1">
             <a:schemeClr val="dk1"/>
           </a:lnRef>
           <a:fillRef idx="0">
             <a:schemeClr val="dk1"/>
           </a:fillRef>
-          <a:effectRef idx="2">
+          <a:effectRef idx="0">
             <a:schemeClr val="dk1"/>
           </a:effectRef>
           <a:fontRef idx="minor">
@@ -10819,26 +11053,26 @@
       </p:cxnSp>
       <p:cxnSp>
         <p:nvCxnSpPr>
-          <p:cNvPr id="12" name="Straight Arrow Connector 11">
-            <a:extLst>
-              <a:ext uri="{FF2B5EF4-FFF2-40B4-BE49-F238E27FC236}">
-                <a16:creationId xmlns:a16="http://schemas.microsoft.com/office/drawing/2014/main" id="{8588E362-09B2-4B0B-BBDE-2EFEFF000F9B}"/>
+          <p:cNvPr id="15" name="Connector: Elbow 14">
+            <a:extLst>
+              <a:ext uri="{FF2B5EF4-FFF2-40B4-BE49-F238E27FC236}">
+                <a16:creationId xmlns:a16="http://schemas.microsoft.com/office/drawing/2014/main" id="{BFF78C70-6E1E-47AF-BDA2-9274F33D7C22}"/>
               </a:ext>
             </a:extLst>
           </p:cNvPr>
           <p:cNvCxnSpPr>
             <a:cxnSpLocks/>
-            <a:stCxn id="13" idx="2"/>
-            <a:endCxn id="30" idx="1"/>
+            <a:stCxn id="8" idx="3"/>
+            <a:endCxn id="10" idx="0"/>
           </p:cNvCxnSpPr>
           <p:nvPr/>
         </p:nvCxnSpPr>
         <p:spPr>
           <a:xfrm>
-            <a:off x="3017029" y="1706964"/>
-            <a:ext cx="1532465" cy="797849"/>
-          </a:xfrm>
-          <a:prstGeom prst="straightConnector1">
+            <a:off x="7475622" y="3451738"/>
+            <a:ext cx="1540699" cy="970283"/>
+          </a:xfrm>
+          <a:prstGeom prst="bentConnector2">
             <a:avLst/>
           </a:prstGeom>
           <a:ln>
@@ -10846,13 +11080,13 @@
           </a:ln>
         </p:spPr>
         <p:style>
-          <a:lnRef idx="3">
+          <a:lnRef idx="1">
             <a:schemeClr val="dk1"/>
           </a:lnRef>
           <a:fillRef idx="0">
             <a:schemeClr val="dk1"/>
           </a:fillRef>
-          <a:effectRef idx="2">
+          <a:effectRef idx="0">
             <a:schemeClr val="dk1"/>
           </a:effectRef>
           <a:fontRef idx="minor">
@@ -10862,625 +11096,36 @@
       </p:cxnSp>
       <p:sp>
         <p:nvSpPr>
-          <p:cNvPr id="13" name="TextBox 12">
-            <a:extLst>
-              <a:ext uri="{FF2B5EF4-FFF2-40B4-BE49-F238E27FC236}">
-                <a16:creationId xmlns:a16="http://schemas.microsoft.com/office/drawing/2014/main" id="{6406D038-F66B-4859-9416-A23E4E34906D}"/>
-              </a:ext>
-            </a:extLst>
-          </p:cNvPr>
-          <p:cNvSpPr txBox="1"/>
+          <p:cNvPr id="17" name="Oval 16">
+            <a:extLst>
+              <a:ext uri="{FF2B5EF4-FFF2-40B4-BE49-F238E27FC236}">
+                <a16:creationId xmlns:a16="http://schemas.microsoft.com/office/drawing/2014/main" id="{8882FB95-C5B8-4A7C-9060-1FECD62FC466}"/>
+              </a:ext>
+            </a:extLst>
+          </p:cNvPr>
+          <p:cNvSpPr/>
           <p:nvPr/>
         </p:nvSpPr>
         <p:spPr>
           <a:xfrm>
-            <a:off x="1490242" y="1337632"/>
-            <a:ext cx="3053573" cy="369332"/>
-          </a:xfrm>
-          <a:prstGeom prst="rect">
-            <a:avLst/>
-          </a:prstGeom>
-          <a:noFill/>
-        </p:spPr>
-        <p:txBody>
-          <a:bodyPr wrap="square" rtlCol="0">
-            <a:spAutoFit/>
-          </a:bodyPr>
-          <a:lstStyle/>
-          <a:p>
-            <a:pPr algn="ctr"/>
-            <a:r>
-              <a:rPr lang="it-IT" dirty="0"/>
-              <a:t>Set to NaN... Imputation?</a:t>
-            </a:r>
-            <a:endParaRPr lang="nl-NL" dirty="0"/>
-          </a:p>
-        </p:txBody>
-      </p:sp>
-      <p:sp>
-        <p:nvSpPr>
-          <p:cNvPr id="14" name="TextBox 13">
-            <a:extLst>
-              <a:ext uri="{FF2B5EF4-FFF2-40B4-BE49-F238E27FC236}">
-                <a16:creationId xmlns:a16="http://schemas.microsoft.com/office/drawing/2014/main" id="{F98F7243-8499-4EB9-8006-57DE1509E5C3}"/>
-              </a:ext>
-            </a:extLst>
-          </p:cNvPr>
-          <p:cNvSpPr txBox="1"/>
-          <p:nvPr/>
-        </p:nvSpPr>
-        <p:spPr>
-          <a:xfrm>
-            <a:off x="8060265" y="1152966"/>
-            <a:ext cx="2229853" cy="369332"/>
-          </a:xfrm>
-          <a:prstGeom prst="rect">
-            <a:avLst/>
-          </a:prstGeom>
-          <a:noFill/>
-        </p:spPr>
-        <p:txBody>
-          <a:bodyPr wrap="square" rtlCol="0">
-            <a:spAutoFit/>
-          </a:bodyPr>
-          <a:lstStyle/>
-          <a:p>
-            <a:r>
-              <a:rPr lang="it-IT" dirty="0"/>
-              <a:t>Considered Outliers</a:t>
-            </a:r>
-            <a:endParaRPr lang="nl-NL" dirty="0"/>
-          </a:p>
-        </p:txBody>
-      </p:sp>
-      <p:cxnSp>
-        <p:nvCxnSpPr>
-          <p:cNvPr id="16" name="Straight Arrow Connector 15">
-            <a:extLst>
-              <a:ext uri="{FF2B5EF4-FFF2-40B4-BE49-F238E27FC236}">
-                <a16:creationId xmlns:a16="http://schemas.microsoft.com/office/drawing/2014/main" id="{EF44B29E-148B-46BB-A8FF-E530EC852232}"/>
-              </a:ext>
-            </a:extLst>
-          </p:cNvPr>
-          <p:cNvCxnSpPr>
-            <a:cxnSpLocks/>
-            <a:stCxn id="14" idx="2"/>
-          </p:cNvCxnSpPr>
-          <p:nvPr/>
-        </p:nvCxnSpPr>
-        <p:spPr>
-          <a:xfrm>
-            <a:off x="9175192" y="1522298"/>
-            <a:ext cx="1451811" cy="1108426"/>
-          </a:xfrm>
-          <a:prstGeom prst="straightConnector1">
-            <a:avLst/>
-          </a:prstGeom>
-          <a:ln>
-            <a:tailEnd type="triangle"/>
-          </a:ln>
-        </p:spPr>
-        <p:style>
-          <a:lnRef idx="3">
-            <a:schemeClr val="dk1"/>
-          </a:lnRef>
-          <a:fillRef idx="0">
-            <a:schemeClr val="dk1"/>
-          </a:fillRef>
-          <a:effectRef idx="2">
-            <a:schemeClr val="dk1"/>
-          </a:effectRef>
-          <a:fontRef idx="minor">
-            <a:schemeClr val="tx1"/>
-          </a:fontRef>
-        </p:style>
-      </p:cxnSp>
-      <p:cxnSp>
-        <p:nvCxnSpPr>
-          <p:cNvPr id="18" name="Straight Arrow Connector 17">
-            <a:extLst>
-              <a:ext uri="{FF2B5EF4-FFF2-40B4-BE49-F238E27FC236}">
-                <a16:creationId xmlns:a16="http://schemas.microsoft.com/office/drawing/2014/main" id="{496788B4-CBEF-49A2-B29F-3DAC5165F805}"/>
-              </a:ext>
-            </a:extLst>
-          </p:cNvPr>
-          <p:cNvCxnSpPr>
-            <a:cxnSpLocks/>
-            <a:stCxn id="14" idx="2"/>
-          </p:cNvCxnSpPr>
-          <p:nvPr/>
-        </p:nvCxnSpPr>
-        <p:spPr>
-          <a:xfrm flipH="1">
-            <a:off x="7955994" y="1522298"/>
-            <a:ext cx="1219198" cy="1212700"/>
-          </a:xfrm>
-          <a:prstGeom prst="straightConnector1">
-            <a:avLst/>
-          </a:prstGeom>
-          <a:ln>
-            <a:tailEnd type="triangle"/>
-          </a:ln>
-        </p:spPr>
-        <p:style>
-          <a:lnRef idx="3">
-            <a:schemeClr val="dk1"/>
-          </a:lnRef>
-          <a:fillRef idx="0">
-            <a:schemeClr val="dk1"/>
-          </a:fillRef>
-          <a:effectRef idx="2">
-            <a:schemeClr val="dk1"/>
-          </a:effectRef>
-          <a:fontRef idx="minor">
-            <a:schemeClr val="tx1"/>
-          </a:fontRef>
-        </p:style>
-      </p:cxnSp>
-      <p:sp>
-        <p:nvSpPr>
-          <p:cNvPr id="28" name="Oval 27">
-            <a:extLst>
-              <a:ext uri="{FF2B5EF4-FFF2-40B4-BE49-F238E27FC236}">
-                <a16:creationId xmlns:a16="http://schemas.microsoft.com/office/drawing/2014/main" id="{5D3BB183-A2CA-46A2-B9C3-ADAE972B9027}"/>
-              </a:ext>
-            </a:extLst>
-          </p:cNvPr>
-          <p:cNvSpPr/>
-          <p:nvPr/>
-        </p:nvSpPr>
-        <p:spPr>
-          <a:xfrm>
-            <a:off x="1444235" y="2056559"/>
-            <a:ext cx="352926" cy="1833652"/>
+            <a:off x="5998557" y="2042315"/>
+            <a:ext cx="276411" cy="276411"/>
           </a:xfrm>
           <a:prstGeom prst="ellipse">
-            <a:avLst/>
-          </a:prstGeom>
-          <a:noFill/>
-          <a:ln w="9525" cap="flat" cmpd="sng" algn="ctr">
-            <a:solidFill>
-              <a:schemeClr val="accent1"/>
-            </a:solidFill>
-            <a:prstDash val="solid"/>
-            <a:round/>
-            <a:headEnd type="none" w="med" len="med"/>
-            <a:tailEnd type="none" w="med" len="med"/>
-          </a:ln>
-        </p:spPr>
-        <p:style>
-          <a:lnRef idx="0">
-            <a:scrgbClr r="0" g="0" b="0"/>
-          </a:lnRef>
-          <a:fillRef idx="0">
-            <a:scrgbClr r="0" g="0" b="0"/>
-          </a:fillRef>
-          <a:effectRef idx="0">
-            <a:scrgbClr r="0" g="0" b="0"/>
-          </a:effectRef>
-          <a:fontRef idx="minor">
-            <a:schemeClr val="accent1"/>
-          </a:fontRef>
-        </p:style>
-        <p:txBody>
-          <a:bodyPr rtlCol="0" anchor="ctr"/>
-          <a:lstStyle/>
-          <a:p>
-            <a:pPr algn="ctr"/>
-            <a:endParaRPr lang="nl-NL"/>
-          </a:p>
-        </p:txBody>
-      </p:sp>
-      <p:sp>
-        <p:nvSpPr>
-          <p:cNvPr id="30" name="Oval 29">
-            <a:extLst>
-              <a:ext uri="{FF2B5EF4-FFF2-40B4-BE49-F238E27FC236}">
-                <a16:creationId xmlns:a16="http://schemas.microsoft.com/office/drawing/2014/main" id="{DFC1405A-A1FB-4B7D-A729-6F366D78F1F5}"/>
-              </a:ext>
-            </a:extLst>
-          </p:cNvPr>
-          <p:cNvSpPr/>
-          <p:nvPr/>
-        </p:nvSpPr>
-        <p:spPr>
-          <a:xfrm>
-            <a:off x="4497809" y="2056558"/>
-            <a:ext cx="352926" cy="3060874"/>
-          </a:xfrm>
-          <a:prstGeom prst="ellipse">
-            <a:avLst/>
-          </a:prstGeom>
-          <a:noFill/>
-          <a:ln w="9525" cap="flat" cmpd="sng" algn="ctr">
-            <a:solidFill>
-              <a:schemeClr val="accent1"/>
-            </a:solidFill>
-            <a:prstDash val="solid"/>
-            <a:round/>
-            <a:headEnd type="none" w="med" len="med"/>
-            <a:tailEnd type="none" w="med" len="med"/>
-          </a:ln>
-        </p:spPr>
-        <p:style>
-          <a:lnRef idx="0">
-            <a:scrgbClr r="0" g="0" b="0"/>
-          </a:lnRef>
-          <a:fillRef idx="0">
-            <a:scrgbClr r="0" g="0" b="0"/>
-          </a:fillRef>
-          <a:effectRef idx="0">
-            <a:scrgbClr r="0" g="0" b="0"/>
-          </a:effectRef>
-          <a:fontRef idx="minor">
-            <a:schemeClr val="accent1"/>
-          </a:fontRef>
-        </p:style>
-        <p:txBody>
-          <a:bodyPr rtlCol="0" anchor="ctr"/>
-          <a:lstStyle/>
-          <a:p>
-            <a:pPr algn="ctr"/>
-            <a:endParaRPr lang="nl-NL"/>
-          </a:p>
-        </p:txBody>
-      </p:sp>
-      <p:cxnSp>
-        <p:nvCxnSpPr>
-          <p:cNvPr id="47" name="Straight Connector 46">
-            <a:extLst>
-              <a:ext uri="{FF2B5EF4-FFF2-40B4-BE49-F238E27FC236}">
-                <a16:creationId xmlns:a16="http://schemas.microsoft.com/office/drawing/2014/main" id="{BB77F60D-AA92-4E88-9238-C37C7FCED343}"/>
-              </a:ext>
-            </a:extLst>
-          </p:cNvPr>
-          <p:cNvCxnSpPr/>
-          <p:nvPr/>
-        </p:nvCxnSpPr>
-        <p:spPr>
-          <a:xfrm>
-            <a:off x="344905" y="4868779"/>
-            <a:ext cx="2334126" cy="0"/>
-          </a:xfrm>
-          <a:prstGeom prst="line">
-            <a:avLst/>
-          </a:prstGeom>
-        </p:spPr>
-        <p:style>
-          <a:lnRef idx="3">
-            <a:schemeClr val="accent2"/>
-          </a:lnRef>
-          <a:fillRef idx="0">
-            <a:schemeClr val="accent2"/>
-          </a:fillRef>
-          <a:effectRef idx="2">
-            <a:schemeClr val="accent2"/>
-          </a:effectRef>
-          <a:fontRef idx="minor">
-            <a:schemeClr val="tx1"/>
-          </a:fontRef>
-        </p:style>
-      </p:cxnSp>
-      <p:sp>
-        <p:nvSpPr>
-          <p:cNvPr id="48" name="TextBox 47">
-            <a:extLst>
-              <a:ext uri="{FF2B5EF4-FFF2-40B4-BE49-F238E27FC236}">
-                <a16:creationId xmlns:a16="http://schemas.microsoft.com/office/drawing/2014/main" id="{210063D6-AB12-4D1A-8DD9-1B596D004A2F}"/>
-              </a:ext>
-            </a:extLst>
-          </p:cNvPr>
-          <p:cNvSpPr txBox="1"/>
-          <p:nvPr/>
-        </p:nvSpPr>
-        <p:spPr>
-          <a:xfrm>
-            <a:off x="2310061" y="4588042"/>
-            <a:ext cx="471458" cy="369332"/>
-          </a:xfrm>
-          <a:prstGeom prst="rect">
-            <a:avLst/>
-          </a:prstGeom>
-          <a:noFill/>
-        </p:spPr>
-        <p:txBody>
-          <a:bodyPr wrap="square" rtlCol="0">
-            <a:spAutoFit/>
-          </a:bodyPr>
-          <a:lstStyle/>
-          <a:p>
-            <a:pPr algn="ctr"/>
-            <a:r>
-              <a:rPr lang="it-IT" dirty="0">
-                <a:solidFill>
-                  <a:schemeClr val="accent2"/>
-                </a:solidFill>
-              </a:rPr>
-              <a:t>20</a:t>
-            </a:r>
-            <a:endParaRPr lang="nl-NL" dirty="0">
-              <a:solidFill>
-                <a:schemeClr val="accent2"/>
-              </a:solidFill>
-            </a:endParaRPr>
-          </a:p>
-        </p:txBody>
-      </p:sp>
-      <p:cxnSp>
-        <p:nvCxnSpPr>
-          <p:cNvPr id="49" name="Straight Connector 48">
-            <a:extLst>
-              <a:ext uri="{FF2B5EF4-FFF2-40B4-BE49-F238E27FC236}">
-                <a16:creationId xmlns:a16="http://schemas.microsoft.com/office/drawing/2014/main" id="{0BD6F6C2-AA8F-4637-B394-6AEB8944AE70}"/>
-              </a:ext>
-            </a:extLst>
-          </p:cNvPr>
-          <p:cNvCxnSpPr/>
-          <p:nvPr/>
-        </p:nvCxnSpPr>
-        <p:spPr>
-          <a:xfrm>
-            <a:off x="351141" y="3890211"/>
-            <a:ext cx="2334126" cy="0"/>
-          </a:xfrm>
-          <a:prstGeom prst="line">
-            <a:avLst/>
-          </a:prstGeom>
-        </p:spPr>
-        <p:style>
-          <a:lnRef idx="3">
-            <a:schemeClr val="accent2"/>
-          </a:lnRef>
-          <a:fillRef idx="0">
-            <a:schemeClr val="accent2"/>
-          </a:fillRef>
-          <a:effectRef idx="2">
-            <a:schemeClr val="accent2"/>
-          </a:effectRef>
-          <a:fontRef idx="minor">
-            <a:schemeClr val="tx1"/>
-          </a:fontRef>
-        </p:style>
-      </p:cxnSp>
-      <p:sp>
-        <p:nvSpPr>
-          <p:cNvPr id="50" name="TextBox 49">
-            <a:extLst>
-              <a:ext uri="{FF2B5EF4-FFF2-40B4-BE49-F238E27FC236}">
-                <a16:creationId xmlns:a16="http://schemas.microsoft.com/office/drawing/2014/main" id="{DC3D5BFC-C2C7-4C0B-8CCD-B5F0EF51BD42}"/>
-              </a:ext>
-            </a:extLst>
-          </p:cNvPr>
-          <p:cNvSpPr txBox="1"/>
-          <p:nvPr/>
-        </p:nvSpPr>
-        <p:spPr>
-          <a:xfrm>
-            <a:off x="2181726" y="3609474"/>
-            <a:ext cx="606029" cy="369332"/>
-          </a:xfrm>
-          <a:prstGeom prst="rect">
-            <a:avLst/>
-          </a:prstGeom>
-          <a:noFill/>
-        </p:spPr>
-        <p:txBody>
-          <a:bodyPr wrap="square" rtlCol="0">
-            <a:spAutoFit/>
-          </a:bodyPr>
-          <a:lstStyle/>
-          <a:p>
-            <a:pPr algn="ctr"/>
-            <a:r>
-              <a:rPr lang="it-IT" dirty="0">
-                <a:solidFill>
-                  <a:schemeClr val="accent2"/>
-                </a:solidFill>
-              </a:rPr>
-              <a:t>300</a:t>
-            </a:r>
-            <a:endParaRPr lang="nl-NL" dirty="0">
-              <a:solidFill>
-                <a:schemeClr val="accent2"/>
-              </a:solidFill>
-            </a:endParaRPr>
-          </a:p>
-        </p:txBody>
-      </p:sp>
-      <p:cxnSp>
-        <p:nvCxnSpPr>
-          <p:cNvPr id="51" name="Straight Connector 50">
-            <a:extLst>
-              <a:ext uri="{FF2B5EF4-FFF2-40B4-BE49-F238E27FC236}">
-                <a16:creationId xmlns:a16="http://schemas.microsoft.com/office/drawing/2014/main" id="{44BEA9E8-8FA9-4EBF-ADB1-F15EF59D545A}"/>
-              </a:ext>
-            </a:extLst>
-          </p:cNvPr>
-          <p:cNvCxnSpPr/>
-          <p:nvPr/>
-        </p:nvCxnSpPr>
-        <p:spPr>
-          <a:xfrm>
-            <a:off x="3376752" y="5219798"/>
-            <a:ext cx="2334126" cy="0"/>
-          </a:xfrm>
-          <a:prstGeom prst="line">
-            <a:avLst/>
-          </a:prstGeom>
-        </p:spPr>
-        <p:style>
-          <a:lnRef idx="3">
-            <a:schemeClr val="accent2"/>
-          </a:lnRef>
-          <a:fillRef idx="0">
-            <a:schemeClr val="accent2"/>
-          </a:fillRef>
-          <a:effectRef idx="2">
-            <a:schemeClr val="accent2"/>
-          </a:effectRef>
-          <a:fontRef idx="minor">
-            <a:schemeClr val="tx1"/>
-          </a:fontRef>
-        </p:style>
-      </p:cxnSp>
-      <p:sp>
-        <p:nvSpPr>
-          <p:cNvPr id="52" name="TextBox 51">
-            <a:extLst>
-              <a:ext uri="{FF2B5EF4-FFF2-40B4-BE49-F238E27FC236}">
-                <a16:creationId xmlns:a16="http://schemas.microsoft.com/office/drawing/2014/main" id="{A166A446-0273-44CD-8582-FA57872289AC}"/>
-              </a:ext>
-            </a:extLst>
-          </p:cNvPr>
-          <p:cNvSpPr txBox="1"/>
-          <p:nvPr/>
-        </p:nvSpPr>
-        <p:spPr>
-          <a:xfrm>
-            <a:off x="5624542" y="5035132"/>
-            <a:ext cx="471458" cy="369332"/>
-          </a:xfrm>
-          <a:prstGeom prst="rect">
-            <a:avLst/>
-          </a:prstGeom>
-          <a:noFill/>
-        </p:spPr>
-        <p:txBody>
-          <a:bodyPr wrap="square" rtlCol="0">
-            <a:spAutoFit/>
-          </a:bodyPr>
-          <a:lstStyle/>
-          <a:p>
-            <a:pPr algn="ctr"/>
-            <a:r>
-              <a:rPr lang="it-IT" dirty="0">
-                <a:solidFill>
-                  <a:schemeClr val="accent2"/>
-                </a:solidFill>
-              </a:rPr>
-              <a:t>20</a:t>
-            </a:r>
-            <a:endParaRPr lang="nl-NL" dirty="0">
-              <a:solidFill>
-                <a:schemeClr val="accent2"/>
-              </a:solidFill>
-            </a:endParaRPr>
-          </a:p>
-        </p:txBody>
-      </p:sp>
-      <p:cxnSp>
-        <p:nvCxnSpPr>
-          <p:cNvPr id="53" name="Straight Connector 52">
-            <a:extLst>
-              <a:ext uri="{FF2B5EF4-FFF2-40B4-BE49-F238E27FC236}">
-                <a16:creationId xmlns:a16="http://schemas.microsoft.com/office/drawing/2014/main" id="{7EEC18CD-74D0-4FAF-8860-CE57F8D1CFA6}"/>
-              </a:ext>
-            </a:extLst>
-          </p:cNvPr>
-          <p:cNvCxnSpPr/>
-          <p:nvPr/>
-        </p:nvCxnSpPr>
-        <p:spPr>
-          <a:xfrm>
-            <a:off x="3382988" y="5112781"/>
-            <a:ext cx="2334126" cy="0"/>
-          </a:xfrm>
-          <a:prstGeom prst="line">
-            <a:avLst/>
-          </a:prstGeom>
-        </p:spPr>
-        <p:style>
-          <a:lnRef idx="3">
-            <a:schemeClr val="accent2"/>
-          </a:lnRef>
-          <a:fillRef idx="0">
-            <a:schemeClr val="accent2"/>
-          </a:fillRef>
-          <a:effectRef idx="2">
-            <a:schemeClr val="accent2"/>
-          </a:effectRef>
-          <a:fontRef idx="minor">
-            <a:schemeClr val="tx1"/>
-          </a:fontRef>
-        </p:style>
-      </p:cxnSp>
-      <p:sp>
-        <p:nvSpPr>
-          <p:cNvPr id="54" name="TextBox 53">
-            <a:extLst>
-              <a:ext uri="{FF2B5EF4-FFF2-40B4-BE49-F238E27FC236}">
-                <a16:creationId xmlns:a16="http://schemas.microsoft.com/office/drawing/2014/main" id="{79388AA8-1909-4DBD-B882-1AB427F2771E}"/>
-              </a:ext>
-            </a:extLst>
-          </p:cNvPr>
-          <p:cNvSpPr txBox="1"/>
-          <p:nvPr/>
-        </p:nvSpPr>
-        <p:spPr>
-          <a:xfrm>
-            <a:off x="5566173" y="4796958"/>
-            <a:ext cx="606029" cy="369332"/>
-          </a:xfrm>
-          <a:prstGeom prst="rect">
-            <a:avLst/>
-          </a:prstGeom>
-          <a:noFill/>
-        </p:spPr>
-        <p:txBody>
-          <a:bodyPr wrap="square" rtlCol="0">
-            <a:spAutoFit/>
-          </a:bodyPr>
-          <a:lstStyle/>
-          <a:p>
-            <a:pPr algn="ctr"/>
-            <a:r>
-              <a:rPr lang="it-IT" dirty="0">
-                <a:solidFill>
-                  <a:schemeClr val="accent2"/>
-                </a:solidFill>
-              </a:rPr>
-              <a:t>300</a:t>
-            </a:r>
-            <a:endParaRPr lang="nl-NL" dirty="0">
-              <a:solidFill>
-                <a:schemeClr val="accent2"/>
-              </a:solidFill>
-            </a:endParaRPr>
-          </a:p>
-        </p:txBody>
-      </p:sp>
-      <p:sp>
-        <p:nvSpPr>
-          <p:cNvPr id="55" name="Arrow: Right 54">
-            <a:extLst>
-              <a:ext uri="{FF2B5EF4-FFF2-40B4-BE49-F238E27FC236}">
-                <a16:creationId xmlns:a16="http://schemas.microsoft.com/office/drawing/2014/main" id="{CF186115-EF21-4E45-BA1A-F7A01B55B725}"/>
-              </a:ext>
-            </a:extLst>
-          </p:cNvPr>
-          <p:cNvSpPr/>
-          <p:nvPr/>
-        </p:nvSpPr>
-        <p:spPr>
-          <a:xfrm>
-            <a:off x="5654279" y="3364185"/>
-            <a:ext cx="1094205" cy="369332"/>
-          </a:xfrm>
-          <a:prstGeom prst="rightArrow">
             <a:avLst/>
           </a:prstGeom>
         </p:spPr>
         <p:style>
           <a:lnRef idx="2">
-            <a:schemeClr val="accent2">
+            <a:schemeClr val="accent6">
               <a:shade val="50000"/>
             </a:schemeClr>
           </a:lnRef>
           <a:fillRef idx="1">
-            <a:schemeClr val="accent2"/>
+            <a:schemeClr val="accent6"/>
           </a:fillRef>
           <a:effectRef idx="0">
-            <a:schemeClr val="accent2"/>
+            <a:schemeClr val="accent6"/>
           </a:effectRef>
           <a:fontRef idx="minor">
             <a:schemeClr val="lt1"/>
@@ -11491,16 +11136,20 @@
           <a:lstStyle/>
           <a:p>
             <a:pPr algn="ctr"/>
-            <a:endParaRPr lang="nl-NL"/>
+            <a:r>
+              <a:rPr lang="it-IT" dirty="0"/>
+              <a:t>1</a:t>
+            </a:r>
+            <a:endParaRPr lang="en-US" dirty="0"/>
           </a:p>
         </p:txBody>
       </p:sp>
       <p:sp>
         <p:nvSpPr>
-          <p:cNvPr id="57" name="Oval 56">
-            <a:extLst>
-              <a:ext uri="{FF2B5EF4-FFF2-40B4-BE49-F238E27FC236}">
-                <a16:creationId xmlns:a16="http://schemas.microsoft.com/office/drawing/2014/main" id="{F946F1D0-67D6-45FC-AEDB-3F765ADB089F}"/>
+          <p:cNvPr id="18" name="Oval 17">
+            <a:extLst>
+              <a:ext uri="{FF2B5EF4-FFF2-40B4-BE49-F238E27FC236}">
+                <a16:creationId xmlns:a16="http://schemas.microsoft.com/office/drawing/2014/main" id="{A4FBC9D2-E203-4B5E-8A87-78CEEFD8BF62}"/>
               </a:ext>
             </a:extLst>
           </p:cNvPr>
@@ -11509,35 +11158,27 @@
         </p:nvSpPr>
         <p:spPr>
           <a:xfrm>
-            <a:off x="1444235" y="4886330"/>
-            <a:ext cx="352926" cy="473862"/>
+            <a:off x="8878115" y="4607439"/>
+            <a:ext cx="276411" cy="276411"/>
           </a:xfrm>
           <a:prstGeom prst="ellipse">
             <a:avLst/>
           </a:prstGeom>
-          <a:noFill/>
-          <a:ln w="9525" cap="flat" cmpd="sng" algn="ctr">
-            <a:solidFill>
-              <a:schemeClr val="accent1"/>
-            </a:solidFill>
-            <a:prstDash val="solid"/>
-            <a:round/>
-            <a:headEnd type="none" w="med" len="med"/>
-            <a:tailEnd type="none" w="med" len="med"/>
-          </a:ln>
         </p:spPr>
         <p:style>
-          <a:lnRef idx="0">
-            <a:scrgbClr r="0" g="0" b="0"/>
+          <a:lnRef idx="2">
+            <a:schemeClr val="accent6">
+              <a:shade val="50000"/>
+            </a:schemeClr>
           </a:lnRef>
-          <a:fillRef idx="0">
-            <a:scrgbClr r="0" g="0" b="0"/>
+          <a:fillRef idx="1">
+            <a:schemeClr val="accent6"/>
           </a:fillRef>
           <a:effectRef idx="0">
-            <a:scrgbClr r="0" g="0" b="0"/>
+            <a:schemeClr val="accent6"/>
           </a:effectRef>
           <a:fontRef idx="minor">
-            <a:schemeClr val="accent1"/>
+            <a:schemeClr val="lt1"/>
           </a:fontRef>
         </p:style>
         <p:txBody>
@@ -11545,14 +11186,18 @@
           <a:lstStyle/>
           <a:p>
             <a:pPr algn="ctr"/>
-            <a:endParaRPr lang="nl-NL"/>
+            <a:r>
+              <a:rPr lang="it-IT" dirty="0"/>
+              <a:t>2</a:t>
+            </a:r>
+            <a:endParaRPr lang="en-US" dirty="0"/>
           </a:p>
         </p:txBody>
       </p:sp>
     </p:spTree>
     <p:extLst>
       <p:ext uri="{BB962C8B-B14F-4D97-AF65-F5344CB8AC3E}">
-        <p14:creationId xmlns:p14="http://schemas.microsoft.com/office/powerpoint/2010/main" val="2308014033"/>
+        <p14:creationId xmlns:p14="http://schemas.microsoft.com/office/powerpoint/2010/main" val="4271207440"/>
       </p:ext>
     </p:extLst>
   </p:cSld>
@@ -11591,12 +11236,48 @@
           <a:chExt cx="0" cy="0"/>
         </a:xfrm>
       </p:grpSpPr>
+      <p:sp>
+        <p:nvSpPr>
+          <p:cNvPr id="2" name="TextBox 1">
+            <a:extLst>
+              <a:ext uri="{FF2B5EF4-FFF2-40B4-BE49-F238E27FC236}">
+                <a16:creationId xmlns:a16="http://schemas.microsoft.com/office/drawing/2014/main" id="{CC0200F0-ABFF-45F8-A6F5-9F8372AE5C7D}"/>
+              </a:ext>
+            </a:extLst>
+          </p:cNvPr>
+          <p:cNvSpPr txBox="1"/>
+          <p:nvPr/>
+        </p:nvSpPr>
+        <p:spPr>
+          <a:xfrm>
+            <a:off x="0" y="0"/>
+            <a:ext cx="5566173" cy="369332"/>
+          </a:xfrm>
+          <a:prstGeom prst="rect">
+            <a:avLst/>
+          </a:prstGeom>
+          <a:noFill/>
+        </p:spPr>
+        <p:txBody>
+          <a:bodyPr wrap="square" rtlCol="0">
+            <a:spAutoFit/>
+          </a:bodyPr>
+          <a:lstStyle/>
+          <a:p>
+            <a:r>
+              <a:rPr lang="it-IT" u="sng" dirty="0"/>
+              <a:t>Blood Pressure Measurements – Range Adjustment</a:t>
+            </a:r>
+            <a:endParaRPr lang="nl-NL" u="sng" dirty="0"/>
+          </a:p>
+        </p:txBody>
+      </p:sp>
       <p:pic>
         <p:nvPicPr>
-          <p:cNvPr id="2" name="Picture 1">
-            <a:extLst>
-              <a:ext uri="{FF2B5EF4-FFF2-40B4-BE49-F238E27FC236}">
-                <a16:creationId xmlns:a16="http://schemas.microsoft.com/office/drawing/2014/main" id="{EFCA64AE-70C0-46DC-9DE0-3BD016877CF0}"/>
+          <p:cNvPr id="5" name="Picture 4">
+            <a:extLst>
+              <a:ext uri="{FF2B5EF4-FFF2-40B4-BE49-F238E27FC236}">
+                <a16:creationId xmlns:a16="http://schemas.microsoft.com/office/drawing/2014/main" id="{9C0CBEDB-1F65-483D-AD68-5B4D7ECBFD27}"/>
               </a:ext>
             </a:extLst>
           </p:cNvPr>
@@ -11619,20 +11300,58 @@
         </p:blipFill>
         <p:spPr>
           <a:xfrm>
-            <a:off x="2471014" y="2125452"/>
-            <a:ext cx="7249970" cy="4405816"/>
+            <a:off x="1355560" y="1132695"/>
+            <a:ext cx="8783049" cy="4752076"/>
           </a:xfrm>
           <a:prstGeom prst="rect">
             <a:avLst/>
           </a:prstGeom>
         </p:spPr>
       </p:pic>
+      <p:cxnSp>
+        <p:nvCxnSpPr>
+          <p:cNvPr id="47" name="Straight Connector 46">
+            <a:extLst>
+              <a:ext uri="{FF2B5EF4-FFF2-40B4-BE49-F238E27FC236}">
+                <a16:creationId xmlns:a16="http://schemas.microsoft.com/office/drawing/2014/main" id="{BB77F60D-AA92-4E88-9238-C37C7FCED343}"/>
+              </a:ext>
+            </a:extLst>
+          </p:cNvPr>
+          <p:cNvCxnSpPr>
+            <a:cxnSpLocks/>
+          </p:cNvCxnSpPr>
+          <p:nvPr/>
+        </p:nvCxnSpPr>
+        <p:spPr>
+          <a:xfrm>
+            <a:off x="1696014" y="4956572"/>
+            <a:ext cx="2458891" cy="0"/>
+          </a:xfrm>
+          <a:prstGeom prst="line">
+            <a:avLst/>
+          </a:prstGeom>
+        </p:spPr>
+        <p:style>
+          <a:lnRef idx="3">
+            <a:schemeClr val="accent2"/>
+          </a:lnRef>
+          <a:fillRef idx="0">
+            <a:schemeClr val="accent2"/>
+          </a:fillRef>
+          <a:effectRef idx="2">
+            <a:schemeClr val="accent2"/>
+          </a:effectRef>
+          <a:fontRef idx="minor">
+            <a:schemeClr val="tx1"/>
+          </a:fontRef>
+        </p:style>
+      </p:cxnSp>
       <p:sp>
         <p:nvSpPr>
-          <p:cNvPr id="3" name="TextBox 2">
-            <a:extLst>
-              <a:ext uri="{FF2B5EF4-FFF2-40B4-BE49-F238E27FC236}">
-                <a16:creationId xmlns:a16="http://schemas.microsoft.com/office/drawing/2014/main" id="{669BC41E-7A1B-450B-AE56-57E23EBB368B}"/>
+          <p:cNvPr id="48" name="TextBox 47">
+            <a:extLst>
+              <a:ext uri="{FF2B5EF4-FFF2-40B4-BE49-F238E27FC236}">
+                <a16:creationId xmlns:a16="http://schemas.microsoft.com/office/drawing/2014/main" id="{210063D6-AB12-4D1A-8DD9-1B596D004A2F}"/>
               </a:ext>
             </a:extLst>
           </p:cNvPr>
@@ -11641,8 +11360,8 @@
         </p:nvSpPr>
         <p:spPr>
           <a:xfrm>
-            <a:off x="0" y="0"/>
-            <a:ext cx="4395537" cy="369332"/>
+            <a:off x="3699536" y="4674496"/>
+            <a:ext cx="650720" cy="369332"/>
           </a:xfrm>
           <a:prstGeom prst="rect">
             <a:avLst/>
@@ -11655,20 +11374,67 @@
           </a:bodyPr>
           <a:lstStyle/>
           <a:p>
+            <a:pPr algn="ctr"/>
             <a:r>
-              <a:rPr lang="it-IT" u="sng" dirty="0"/>
-              <a:t>Blood Pressure Measurements - Outliers</a:t>
+              <a:rPr lang="it-IT" dirty="0">
+                <a:solidFill>
+                  <a:schemeClr val="accent2"/>
+                </a:solidFill>
+              </a:rPr>
+              <a:t>50</a:t>
             </a:r>
-            <a:endParaRPr lang="nl-NL" u="sng" dirty="0"/>
+            <a:endParaRPr lang="nl-NL" dirty="0">
+              <a:solidFill>
+                <a:schemeClr val="accent2"/>
+              </a:solidFill>
+            </a:endParaRPr>
           </a:p>
         </p:txBody>
       </p:sp>
+      <p:cxnSp>
+        <p:nvCxnSpPr>
+          <p:cNvPr id="49" name="Straight Connector 48">
+            <a:extLst>
+              <a:ext uri="{FF2B5EF4-FFF2-40B4-BE49-F238E27FC236}">
+                <a16:creationId xmlns:a16="http://schemas.microsoft.com/office/drawing/2014/main" id="{0BD6F6C2-AA8F-4637-B394-6AEB8944AE70}"/>
+              </a:ext>
+            </a:extLst>
+          </p:cNvPr>
+          <p:cNvCxnSpPr>
+            <a:cxnSpLocks/>
+          </p:cNvCxnSpPr>
+          <p:nvPr/>
+        </p:nvCxnSpPr>
+        <p:spPr>
+          <a:xfrm>
+            <a:off x="1696014" y="3966047"/>
+            <a:ext cx="2458891" cy="0"/>
+          </a:xfrm>
+          <a:prstGeom prst="line">
+            <a:avLst/>
+          </a:prstGeom>
+        </p:spPr>
+        <p:style>
+          <a:lnRef idx="3">
+            <a:schemeClr val="accent2"/>
+          </a:lnRef>
+          <a:fillRef idx="0">
+            <a:schemeClr val="accent2"/>
+          </a:fillRef>
+          <a:effectRef idx="2">
+            <a:schemeClr val="accent2"/>
+          </a:effectRef>
+          <a:fontRef idx="minor">
+            <a:schemeClr val="tx1"/>
+          </a:fontRef>
+        </p:style>
+      </p:cxnSp>
       <p:sp>
         <p:nvSpPr>
-          <p:cNvPr id="4" name="TextBox 3">
-            <a:extLst>
-              <a:ext uri="{FF2B5EF4-FFF2-40B4-BE49-F238E27FC236}">
-                <a16:creationId xmlns:a16="http://schemas.microsoft.com/office/drawing/2014/main" id="{9D83727A-AEE6-4E01-9A07-195FB57628BF}"/>
+          <p:cNvPr id="50" name="TextBox 49">
+            <a:extLst>
+              <a:ext uri="{FF2B5EF4-FFF2-40B4-BE49-F238E27FC236}">
+                <a16:creationId xmlns:a16="http://schemas.microsoft.com/office/drawing/2014/main" id="{DC3D5BFC-C2C7-4C0B-8CCD-B5F0EF51BD42}"/>
               </a:ext>
             </a:extLst>
           </p:cNvPr>
@@ -11677,8 +11443,8 @@
         </p:nvSpPr>
         <p:spPr>
           <a:xfrm>
-            <a:off x="2709862" y="811929"/>
-            <a:ext cx="6772275" cy="1200329"/>
+            <a:off x="3535063" y="3907312"/>
+            <a:ext cx="836459" cy="369332"/>
           </a:xfrm>
           <a:prstGeom prst="rect">
             <a:avLst/>
@@ -11693,47 +11459,317 @@
           <a:p>
             <a:pPr algn="ctr"/>
             <a:r>
-              <a:rPr lang="it-IT" sz="2400" dirty="0"/>
-              <a:t>Replaced with Mean value </a:t>
+              <a:rPr lang="it-IT" dirty="0">
+                <a:solidFill>
+                  <a:schemeClr val="accent2"/>
+                </a:solidFill>
+              </a:rPr>
+              <a:t>250</a:t>
             </a:r>
-          </a:p>
+            <a:endParaRPr lang="nl-NL" dirty="0">
+              <a:solidFill>
+                <a:schemeClr val="accent2"/>
+              </a:solidFill>
+            </a:endParaRPr>
+          </a:p>
+        </p:txBody>
+      </p:sp>
+      <p:cxnSp>
+        <p:nvCxnSpPr>
+          <p:cNvPr id="51" name="Straight Connector 50">
+            <a:extLst>
+              <a:ext uri="{FF2B5EF4-FFF2-40B4-BE49-F238E27FC236}">
+                <a16:creationId xmlns:a16="http://schemas.microsoft.com/office/drawing/2014/main" id="{44BEA9E8-8FA9-4EBF-ADB1-F15EF59D545A}"/>
+              </a:ext>
+            </a:extLst>
+          </p:cNvPr>
+          <p:cNvCxnSpPr>
+            <a:cxnSpLocks/>
+          </p:cNvCxnSpPr>
+          <p:nvPr/>
+        </p:nvCxnSpPr>
+        <p:spPr>
+          <a:xfrm>
+            <a:off x="4648392" y="5430433"/>
+            <a:ext cx="2450240" cy="0"/>
+          </a:xfrm>
+          <a:prstGeom prst="line">
+            <a:avLst/>
+          </a:prstGeom>
+        </p:spPr>
+        <p:style>
+          <a:lnRef idx="3">
+            <a:schemeClr val="accent2"/>
+          </a:lnRef>
+          <a:fillRef idx="0">
+            <a:schemeClr val="accent2"/>
+          </a:fillRef>
+          <a:effectRef idx="2">
+            <a:schemeClr val="accent2"/>
+          </a:effectRef>
+          <a:fontRef idx="minor">
+            <a:schemeClr val="tx1"/>
+          </a:fontRef>
+        </p:style>
+      </p:cxnSp>
+      <p:cxnSp>
+        <p:nvCxnSpPr>
+          <p:cNvPr id="53" name="Straight Connector 52">
+            <a:extLst>
+              <a:ext uri="{FF2B5EF4-FFF2-40B4-BE49-F238E27FC236}">
+                <a16:creationId xmlns:a16="http://schemas.microsoft.com/office/drawing/2014/main" id="{7EEC18CD-74D0-4FAF-8860-CE57F8D1CFA6}"/>
+              </a:ext>
+            </a:extLst>
+          </p:cNvPr>
+          <p:cNvCxnSpPr>
+            <a:cxnSpLocks/>
+          </p:cNvCxnSpPr>
+          <p:nvPr/>
+        </p:nvCxnSpPr>
+        <p:spPr>
+          <a:xfrm>
+            <a:off x="4648392" y="5385157"/>
+            <a:ext cx="2450240" cy="0"/>
+          </a:xfrm>
+          <a:prstGeom prst="line">
+            <a:avLst/>
+          </a:prstGeom>
+        </p:spPr>
+        <p:style>
+          <a:lnRef idx="3">
+            <a:schemeClr val="accent2"/>
+          </a:lnRef>
+          <a:fillRef idx="0">
+            <a:schemeClr val="accent2"/>
+          </a:fillRef>
+          <a:effectRef idx="2">
+            <a:schemeClr val="accent2"/>
+          </a:effectRef>
+          <a:fontRef idx="minor">
+            <a:schemeClr val="tx1"/>
+          </a:fontRef>
+        </p:style>
+      </p:cxnSp>
+      <p:sp>
+        <p:nvSpPr>
+          <p:cNvPr id="23" name="Oval 22">
+            <a:extLst>
+              <a:ext uri="{FF2B5EF4-FFF2-40B4-BE49-F238E27FC236}">
+                <a16:creationId xmlns:a16="http://schemas.microsoft.com/office/drawing/2014/main" id="{E87794CF-5ABA-4E13-BBCD-D7036DA047EB}"/>
+              </a:ext>
+            </a:extLst>
+          </p:cNvPr>
+          <p:cNvSpPr/>
+          <p:nvPr/>
+        </p:nvSpPr>
+        <p:spPr>
+          <a:xfrm>
+            <a:off x="4963841" y="47048"/>
+            <a:ext cx="276411" cy="276411"/>
+          </a:xfrm>
+          <a:prstGeom prst="ellipse">
+            <a:avLst/>
+          </a:prstGeom>
+        </p:spPr>
+        <p:style>
+          <a:lnRef idx="2">
+            <a:schemeClr val="accent6">
+              <a:shade val="50000"/>
+            </a:schemeClr>
+          </a:lnRef>
+          <a:fillRef idx="1">
+            <a:schemeClr val="accent6"/>
+          </a:fillRef>
+          <a:effectRef idx="0">
+            <a:schemeClr val="accent6"/>
+          </a:effectRef>
+          <a:fontRef idx="minor">
+            <a:schemeClr val="lt1"/>
+          </a:fontRef>
+        </p:style>
+        <p:txBody>
+          <a:bodyPr rtlCol="0" anchor="ctr"/>
+          <a:lstStyle/>
           <a:p>
             <a:pPr algn="ctr"/>
             <a:r>
-              <a:rPr lang="it-IT" sz="2400" dirty="0"/>
-              <a:t>if </a:t>
+              <a:rPr lang="it-IT" dirty="0"/>
+              <a:t>1</a:t>
             </a:r>
-          </a:p>
+            <a:endParaRPr lang="en-US" dirty="0"/>
+          </a:p>
+        </p:txBody>
+      </p:sp>
+      <p:cxnSp>
+        <p:nvCxnSpPr>
+          <p:cNvPr id="34" name="Straight Connector 33">
+            <a:extLst>
+              <a:ext uri="{FF2B5EF4-FFF2-40B4-BE49-F238E27FC236}">
+                <a16:creationId xmlns:a16="http://schemas.microsoft.com/office/drawing/2014/main" id="{7E10BD71-331C-4D97-A49B-AB0838C6A1FF}"/>
+              </a:ext>
+            </a:extLst>
+          </p:cNvPr>
+          <p:cNvCxnSpPr>
+            <a:cxnSpLocks/>
+          </p:cNvCxnSpPr>
+          <p:nvPr/>
+        </p:nvCxnSpPr>
+        <p:spPr>
+          <a:xfrm>
+            <a:off x="7611980" y="5495562"/>
+            <a:ext cx="2518609" cy="0"/>
+          </a:xfrm>
+          <a:prstGeom prst="line">
+            <a:avLst/>
+          </a:prstGeom>
+        </p:spPr>
+        <p:style>
+          <a:lnRef idx="3">
+            <a:schemeClr val="accent2"/>
+          </a:lnRef>
+          <a:fillRef idx="0">
+            <a:schemeClr val="accent2"/>
+          </a:fillRef>
+          <a:effectRef idx="2">
+            <a:schemeClr val="accent2"/>
+          </a:effectRef>
+          <a:fontRef idx="minor">
+            <a:schemeClr val="tx1"/>
+          </a:fontRef>
+        </p:style>
+      </p:cxnSp>
+      <p:sp>
+        <p:nvSpPr>
+          <p:cNvPr id="35" name="TextBox 34">
+            <a:extLst>
+              <a:ext uri="{FF2B5EF4-FFF2-40B4-BE49-F238E27FC236}">
+                <a16:creationId xmlns:a16="http://schemas.microsoft.com/office/drawing/2014/main" id="{BEFD171C-002F-46BD-BDBD-1F529FACAA90}"/>
+              </a:ext>
+            </a:extLst>
+          </p:cNvPr>
+          <p:cNvSpPr txBox="1"/>
+          <p:nvPr/>
+        </p:nvSpPr>
+        <p:spPr>
+          <a:xfrm>
+            <a:off x="10039393" y="5364488"/>
+            <a:ext cx="532450" cy="369332"/>
+          </a:xfrm>
+          <a:prstGeom prst="rect">
+            <a:avLst/>
+          </a:prstGeom>
+          <a:noFill/>
+        </p:spPr>
+        <p:txBody>
+          <a:bodyPr wrap="square" rtlCol="0">
+            <a:spAutoFit/>
+          </a:bodyPr>
+          <a:lstStyle/>
           <a:p>
             <a:pPr algn="ctr"/>
             <a:r>
-              <a:rPr lang="it-IT" sz="2400" dirty="0"/>
-              <a:t>|BP</a:t>
+              <a:rPr lang="it-IT" dirty="0">
+                <a:solidFill>
+                  <a:schemeClr val="accent2"/>
+                </a:solidFill>
+              </a:rPr>
+              <a:t>50</a:t>
             </a:r>
+            <a:endParaRPr lang="nl-NL" dirty="0">
+              <a:solidFill>
+                <a:schemeClr val="accent2"/>
+              </a:solidFill>
+            </a:endParaRPr>
+          </a:p>
+        </p:txBody>
+      </p:sp>
+      <p:cxnSp>
+        <p:nvCxnSpPr>
+          <p:cNvPr id="36" name="Straight Connector 35">
+            <a:extLst>
+              <a:ext uri="{FF2B5EF4-FFF2-40B4-BE49-F238E27FC236}">
+                <a16:creationId xmlns:a16="http://schemas.microsoft.com/office/drawing/2014/main" id="{036E6A2C-F1F7-4D61-B2B8-70288F481747}"/>
+              </a:ext>
+            </a:extLst>
+          </p:cNvPr>
+          <p:cNvCxnSpPr>
+            <a:cxnSpLocks/>
+          </p:cNvCxnSpPr>
+          <p:nvPr/>
+        </p:nvCxnSpPr>
+        <p:spPr>
+          <a:xfrm>
+            <a:off x="7620000" y="5385157"/>
+            <a:ext cx="2510589" cy="0"/>
+          </a:xfrm>
+          <a:prstGeom prst="line">
+            <a:avLst/>
+          </a:prstGeom>
+        </p:spPr>
+        <p:style>
+          <a:lnRef idx="3">
+            <a:schemeClr val="accent2"/>
+          </a:lnRef>
+          <a:fillRef idx="0">
+            <a:schemeClr val="accent2"/>
+          </a:fillRef>
+          <a:effectRef idx="2">
+            <a:schemeClr val="accent2"/>
+          </a:effectRef>
+          <a:fontRef idx="minor">
+            <a:schemeClr val="tx1"/>
+          </a:fontRef>
+        </p:style>
+      </p:cxnSp>
+      <p:sp>
+        <p:nvSpPr>
+          <p:cNvPr id="37" name="TextBox 36">
+            <a:extLst>
+              <a:ext uri="{FF2B5EF4-FFF2-40B4-BE49-F238E27FC236}">
+                <a16:creationId xmlns:a16="http://schemas.microsoft.com/office/drawing/2014/main" id="{B5A25B90-05D6-44F3-B057-C36955290462}"/>
+              </a:ext>
+            </a:extLst>
+          </p:cNvPr>
+          <p:cNvSpPr txBox="1"/>
+          <p:nvPr/>
+        </p:nvSpPr>
+        <p:spPr>
+          <a:xfrm>
+            <a:off x="9936997" y="5094601"/>
+            <a:ext cx="836459" cy="369332"/>
+          </a:xfrm>
+          <a:prstGeom prst="rect">
+            <a:avLst/>
+          </a:prstGeom>
+          <a:noFill/>
+        </p:spPr>
+        <p:txBody>
+          <a:bodyPr wrap="square" rtlCol="0">
+            <a:spAutoFit/>
+          </a:bodyPr>
+          <a:lstStyle/>
+          <a:p>
+            <a:pPr algn="ctr"/>
             <a:r>
-              <a:rPr lang="it-IT" sz="2400" baseline="-25000" dirty="0"/>
-              <a:t>Sys,Dia</a:t>
+              <a:rPr lang="it-IT" dirty="0">
+                <a:solidFill>
+                  <a:schemeClr val="accent2"/>
+                </a:solidFill>
+              </a:rPr>
+              <a:t>250</a:t>
             </a:r>
-            <a:r>
-              <a:rPr lang="it-IT" sz="2400" dirty="0"/>
-              <a:t>| </a:t>
-            </a:r>
-            <a:r>
-              <a:rPr lang="nl-NL" sz="2400" dirty="0"/>
-              <a:t>&lt; 3·</a:t>
-            </a:r>
-            <a:r>
-              <a:rPr lang="el-GR" sz="2400" dirty="0"/>
-              <a:t>σ</a:t>
-            </a:r>
-            <a:endParaRPr lang="nl-NL" sz="2400" dirty="0"/>
+            <a:endParaRPr lang="nl-NL" dirty="0">
+              <a:solidFill>
+                <a:schemeClr val="accent2"/>
+              </a:solidFill>
+            </a:endParaRPr>
           </a:p>
         </p:txBody>
       </p:sp>
     </p:spTree>
     <p:extLst>
       <p:ext uri="{BB962C8B-B14F-4D97-AF65-F5344CB8AC3E}">
-        <p14:creationId xmlns:p14="http://schemas.microsoft.com/office/powerpoint/2010/main" val="483860090"/>
+        <p14:creationId xmlns:p14="http://schemas.microsoft.com/office/powerpoint/2010/main" val="2308014033"/>
       </p:ext>
     </p:extLst>
   </p:cSld>
@@ -11774,6 +11810,2037 @@
       </p:grpSpPr>
       <p:sp>
         <p:nvSpPr>
+          <p:cNvPr id="3" name="TextBox 2">
+            <a:extLst>
+              <a:ext uri="{FF2B5EF4-FFF2-40B4-BE49-F238E27FC236}">
+                <a16:creationId xmlns:a16="http://schemas.microsoft.com/office/drawing/2014/main" id="{669BC41E-7A1B-450B-AE56-57E23EBB368B}"/>
+              </a:ext>
+            </a:extLst>
+          </p:cNvPr>
+          <p:cNvSpPr txBox="1"/>
+          <p:nvPr/>
+        </p:nvSpPr>
+        <p:spPr>
+          <a:xfrm>
+            <a:off x="0" y="0"/>
+            <a:ext cx="5358063" cy="369332"/>
+          </a:xfrm>
+          <a:prstGeom prst="rect">
+            <a:avLst/>
+          </a:prstGeom>
+          <a:noFill/>
+        </p:spPr>
+        <p:txBody>
+          <a:bodyPr wrap="square" rtlCol="0">
+            <a:spAutoFit/>
+          </a:bodyPr>
+          <a:lstStyle/>
+          <a:p>
+            <a:r>
+              <a:rPr lang="it-IT" u="sng" dirty="0"/>
+              <a:t>Blood Pressure Measurements – Measure Reliability</a:t>
+            </a:r>
+            <a:endParaRPr lang="nl-NL" u="sng" dirty="0"/>
+          </a:p>
+        </p:txBody>
+      </p:sp>
+      <p:sp>
+        <p:nvSpPr>
+          <p:cNvPr id="20" name="Oval 19">
+            <a:extLst>
+              <a:ext uri="{FF2B5EF4-FFF2-40B4-BE49-F238E27FC236}">
+                <a16:creationId xmlns:a16="http://schemas.microsoft.com/office/drawing/2014/main" id="{0DD9478D-3955-4C7A-BC02-6A3CED041958}"/>
+              </a:ext>
+            </a:extLst>
+          </p:cNvPr>
+          <p:cNvSpPr/>
+          <p:nvPr/>
+        </p:nvSpPr>
+        <p:spPr>
+          <a:xfrm>
+            <a:off x="5032880" y="46460"/>
+            <a:ext cx="276411" cy="276411"/>
+          </a:xfrm>
+          <a:prstGeom prst="ellipse">
+            <a:avLst/>
+          </a:prstGeom>
+        </p:spPr>
+        <p:style>
+          <a:lnRef idx="2">
+            <a:schemeClr val="accent6">
+              <a:shade val="50000"/>
+            </a:schemeClr>
+          </a:lnRef>
+          <a:fillRef idx="1">
+            <a:schemeClr val="accent6"/>
+          </a:fillRef>
+          <a:effectRef idx="0">
+            <a:schemeClr val="accent6"/>
+          </a:effectRef>
+          <a:fontRef idx="minor">
+            <a:schemeClr val="lt1"/>
+          </a:fontRef>
+        </p:style>
+        <p:txBody>
+          <a:bodyPr rtlCol="0" anchor="ctr"/>
+          <a:lstStyle/>
+          <a:p>
+            <a:pPr algn="ctr"/>
+            <a:r>
+              <a:rPr lang="it-IT" dirty="0"/>
+              <a:t>2</a:t>
+            </a:r>
+            <a:endParaRPr lang="en-US" dirty="0"/>
+          </a:p>
+        </p:txBody>
+      </p:sp>
+      <p:pic>
+        <p:nvPicPr>
+          <p:cNvPr id="22" name="Picture 21">
+            <a:extLst>
+              <a:ext uri="{FF2B5EF4-FFF2-40B4-BE49-F238E27FC236}">
+                <a16:creationId xmlns:a16="http://schemas.microsoft.com/office/drawing/2014/main" id="{9884ACF2-1861-49C2-B028-4F7BEC9E3726}"/>
+              </a:ext>
+            </a:extLst>
+          </p:cNvPr>
+          <p:cNvPicPr>
+            <a:picLocks noChangeAspect="1"/>
+          </p:cNvPicPr>
+          <p:nvPr/>
+        </p:nvPicPr>
+        <p:blipFill>
+          <a:blip r:embed="rId2">
+            <a:extLst>
+              <a:ext uri="{28A0092B-C50C-407E-A947-70E740481C1C}">
+                <a14:useLocalDpi xmlns:a14="http://schemas.microsoft.com/office/drawing/2010/main" val="0"/>
+              </a:ext>
+            </a:extLst>
+          </a:blip>
+          <a:stretch>
+            <a:fillRect/>
+          </a:stretch>
+        </p:blipFill>
+        <p:spPr>
+          <a:xfrm>
+            <a:off x="2717810" y="1379620"/>
+            <a:ext cx="5922189" cy="4298531"/>
+          </a:xfrm>
+          <a:prstGeom prst="rect">
+            <a:avLst/>
+          </a:prstGeom>
+        </p:spPr>
+      </p:pic>
+      <mc:AlternateContent xmlns:mc="http://schemas.openxmlformats.org/markup-compatibility/2006">
+        <mc:Choice xmlns:a14="http://schemas.microsoft.com/office/drawing/2010/main" Requires="a14">
+          <p:sp>
+            <p:nvSpPr>
+              <p:cNvPr id="24" name="Rectangle 23">
+                <a:extLst>
+                  <a:ext uri="{FF2B5EF4-FFF2-40B4-BE49-F238E27FC236}">
+                    <a16:creationId xmlns:a16="http://schemas.microsoft.com/office/drawing/2014/main" id="{C4ABEA7F-29D1-43EE-AC0F-B99628F50A6D}"/>
+                  </a:ext>
+                </a:extLst>
+              </p:cNvPr>
+              <p:cNvSpPr/>
+              <p:nvPr/>
+            </p:nvSpPr>
+            <p:spPr>
+              <a:xfrm>
+                <a:off x="5387782" y="822416"/>
+                <a:ext cx="1125052" cy="557204"/>
+              </a:xfrm>
+              <a:prstGeom prst="rect">
+                <a:avLst/>
+              </a:prstGeom>
+            </p:spPr>
+            <p:txBody>
+              <a:bodyPr wrap="none">
+                <a:spAutoFit/>
+              </a:bodyPr>
+              <a:lstStyle/>
+              <a:p>
+                <a14:m>
+                  <m:oMathPara xmlns:m="http://schemas.openxmlformats.org/officeDocument/2006/math">
+                    <m:oMathParaPr>
+                      <m:jc m:val="centerGroup"/>
+                    </m:oMathParaPr>
+                    <m:oMath xmlns:m="http://schemas.openxmlformats.org/officeDocument/2006/math">
+                      <m:sSub>
+                        <m:sSubPr>
+                          <m:ctrlPr>
+                            <a:rPr lang="en-US" sz="2800" i="1">
+                              <a:solidFill>
+                                <a:schemeClr val="accent5">
+                                  <a:lumMod val="50000"/>
+                                </a:schemeClr>
+                              </a:solidFill>
+                              <a:latin typeface="Cambria Math" panose="02040503050406030204" pitchFamily="18" charset="0"/>
+                            </a:rPr>
+                          </m:ctrlPr>
+                        </m:sSubPr>
+                        <m:e>
+                          <m:r>
+                            <a:rPr lang="en-US" sz="2800" i="1">
+                              <a:solidFill>
+                                <a:schemeClr val="accent5">
+                                  <a:lumMod val="50000"/>
+                                </a:schemeClr>
+                              </a:solidFill>
+                              <a:latin typeface="Cambria Math" panose="02040503050406030204" pitchFamily="18" charset="0"/>
+                            </a:rPr>
+                            <m:t>∆</m:t>
+                          </m:r>
+                        </m:e>
+                        <m:sub>
+                          <m:r>
+                            <a:rPr lang="en-US" sz="2800" i="1">
+                              <a:solidFill>
+                                <a:schemeClr val="accent5">
+                                  <a:lumMod val="50000"/>
+                                </a:schemeClr>
+                              </a:solidFill>
+                              <a:latin typeface="Cambria Math" panose="02040503050406030204" pitchFamily="18" charset="0"/>
+                            </a:rPr>
+                            <m:t>𝑑</m:t>
+                          </m:r>
+                          <m:r>
+                            <a:rPr lang="it-IT" sz="2800" i="1">
+                              <a:solidFill>
+                                <a:schemeClr val="accent5">
+                                  <a:lumMod val="50000"/>
+                                </a:schemeClr>
+                              </a:solidFill>
+                              <a:latin typeface="Cambria Math" panose="02040503050406030204" pitchFamily="18" charset="0"/>
+                            </a:rPr>
+                            <m:t>𝑎</m:t>
+                          </m:r>
+                          <m:r>
+                            <a:rPr lang="en-US" sz="2800" i="1">
+                              <a:solidFill>
+                                <a:schemeClr val="accent5">
+                                  <a:lumMod val="50000"/>
+                                </a:schemeClr>
+                              </a:solidFill>
+                              <a:latin typeface="Cambria Math" panose="02040503050406030204" pitchFamily="18" charset="0"/>
+                            </a:rPr>
+                            <m:t>𝑦</m:t>
+                          </m:r>
+                          <m:r>
+                            <a:rPr lang="it-IT" sz="2800" i="1">
+                              <a:solidFill>
+                                <a:schemeClr val="accent5">
+                                  <a:lumMod val="50000"/>
+                                </a:schemeClr>
+                              </a:solidFill>
+                              <a:latin typeface="Cambria Math" panose="02040503050406030204" pitchFamily="18" charset="0"/>
+                            </a:rPr>
+                            <m:t>𝑠</m:t>
+                          </m:r>
+                        </m:sub>
+                      </m:sSub>
+                    </m:oMath>
+                  </m:oMathPara>
+                </a14:m>
+                <a:endParaRPr lang="en-US" sz="2800" dirty="0"/>
+              </a:p>
+            </p:txBody>
+          </p:sp>
+        </mc:Choice>
+        <mc:Fallback>
+          <p:sp>
+            <p:nvSpPr>
+              <p:cNvPr id="24" name="Rectangle 23">
+                <a:extLst>
+                  <a:ext uri="{FF2B5EF4-FFF2-40B4-BE49-F238E27FC236}">
+                    <a16:creationId xmlns:a16="http://schemas.microsoft.com/office/drawing/2014/main" id="{C4ABEA7F-29D1-43EE-AC0F-B99628F50A6D}"/>
+                  </a:ext>
+                </a:extLst>
+              </p:cNvPr>
+              <p:cNvSpPr>
+                <a:spLocks noRot="1" noChangeAspect="1" noMove="1" noResize="1" noEditPoints="1" noAdjustHandles="1" noChangeArrowheads="1" noChangeShapeType="1" noTextEdit="1"/>
+              </p:cNvSpPr>
+              <p:nvPr/>
+            </p:nvSpPr>
+            <p:spPr>
+              <a:xfrm>
+                <a:off x="5387782" y="822416"/>
+                <a:ext cx="1125052" cy="557204"/>
+              </a:xfrm>
+              <a:prstGeom prst="rect">
+                <a:avLst/>
+              </a:prstGeom>
+              <a:blipFill>
+                <a:blip r:embed="rId3"/>
+                <a:stretch>
+                  <a:fillRect/>
+                </a:stretch>
+              </a:blipFill>
+            </p:spPr>
+            <p:txBody>
+              <a:bodyPr/>
+              <a:lstStyle/>
+              <a:p>
+                <a:r>
+                  <a:rPr lang="en-US">
+                    <a:noFill/>
+                  </a:rPr>
+                  <a:t> </a:t>
+                </a:r>
+              </a:p>
+            </p:txBody>
+          </p:sp>
+        </mc:Fallback>
+      </mc:AlternateContent>
+      <mc:AlternateContent xmlns:mc="http://schemas.openxmlformats.org/markup-compatibility/2006">
+        <mc:Choice xmlns:a14="http://schemas.microsoft.com/office/drawing/2010/main" Requires="a14">
+          <p:sp>
+            <p:nvSpPr>
+              <p:cNvPr id="25" name="TextBox 24">
+                <a:extLst>
+                  <a:ext uri="{FF2B5EF4-FFF2-40B4-BE49-F238E27FC236}">
+                    <a16:creationId xmlns:a16="http://schemas.microsoft.com/office/drawing/2014/main" id="{399C914C-423A-45B5-B744-4047998FB919}"/>
+                  </a:ext>
+                </a:extLst>
+              </p:cNvPr>
+              <p:cNvSpPr txBox="1"/>
+              <p:nvPr/>
+            </p:nvSpPr>
+            <p:spPr>
+              <a:xfrm>
+                <a:off x="8282458" y="6417113"/>
+                <a:ext cx="3829190" cy="298928"/>
+              </a:xfrm>
+              <a:prstGeom prst="rect">
+                <a:avLst/>
+              </a:prstGeom>
+              <a:noFill/>
+            </p:spPr>
+            <p:txBody>
+              <a:bodyPr wrap="none" lIns="0" tIns="0" rIns="0" bIns="0" rtlCol="0">
+                <a:spAutoFit/>
+              </a:bodyPr>
+              <a:lstStyle/>
+              <a:p>
+                <a14:m>
+                  <m:oMathPara xmlns:m="http://schemas.openxmlformats.org/officeDocument/2006/math">
+                    <m:oMathParaPr>
+                      <m:jc m:val="centerGroup"/>
+                    </m:oMathParaPr>
+                    <m:oMath xmlns:m="http://schemas.openxmlformats.org/officeDocument/2006/math">
+                      <m:sSub>
+                        <m:sSubPr>
+                          <m:ctrlPr>
+                            <a:rPr lang="en-US" i="1" smtClean="0">
+                              <a:solidFill>
+                                <a:schemeClr val="accent5">
+                                  <a:lumMod val="50000"/>
+                                </a:schemeClr>
+                              </a:solidFill>
+                              <a:latin typeface="Cambria Math" panose="02040503050406030204" pitchFamily="18" charset="0"/>
+                            </a:rPr>
+                          </m:ctrlPr>
+                        </m:sSubPr>
+                        <m:e>
+                          <m:r>
+                            <a:rPr lang="en-US" i="1">
+                              <a:solidFill>
+                                <a:schemeClr val="accent5">
+                                  <a:lumMod val="50000"/>
+                                </a:schemeClr>
+                              </a:solidFill>
+                              <a:latin typeface="Cambria Math" panose="02040503050406030204" pitchFamily="18" charset="0"/>
+                            </a:rPr>
+                            <m:t>∆</m:t>
+                          </m:r>
+                        </m:e>
+                        <m:sub>
+                          <m:r>
+                            <a:rPr lang="en-US" i="1">
+                              <a:solidFill>
+                                <a:schemeClr val="accent5">
+                                  <a:lumMod val="50000"/>
+                                </a:schemeClr>
+                              </a:solidFill>
+                              <a:latin typeface="Cambria Math" panose="02040503050406030204" pitchFamily="18" charset="0"/>
+                            </a:rPr>
+                            <m:t>𝑑</m:t>
+                          </m:r>
+                          <m:r>
+                            <a:rPr lang="it-IT" i="1">
+                              <a:solidFill>
+                                <a:schemeClr val="accent5">
+                                  <a:lumMod val="50000"/>
+                                </a:schemeClr>
+                              </a:solidFill>
+                              <a:latin typeface="Cambria Math" panose="02040503050406030204" pitchFamily="18" charset="0"/>
+                            </a:rPr>
+                            <m:t>𝑎</m:t>
+                          </m:r>
+                          <m:r>
+                            <a:rPr lang="en-US" i="1">
+                              <a:solidFill>
+                                <a:schemeClr val="accent5">
+                                  <a:lumMod val="50000"/>
+                                </a:schemeClr>
+                              </a:solidFill>
+                              <a:latin typeface="Cambria Math" panose="02040503050406030204" pitchFamily="18" charset="0"/>
+                            </a:rPr>
+                            <m:t>𝑦</m:t>
+                          </m:r>
+                          <m:r>
+                            <a:rPr lang="it-IT" i="1">
+                              <a:solidFill>
+                                <a:schemeClr val="accent5">
+                                  <a:lumMod val="50000"/>
+                                </a:schemeClr>
+                              </a:solidFill>
+                              <a:latin typeface="Cambria Math" panose="02040503050406030204" pitchFamily="18" charset="0"/>
+                            </a:rPr>
+                            <m:t>𝑠</m:t>
+                          </m:r>
+                        </m:sub>
+                      </m:sSub>
+                      <m:r>
+                        <a:rPr lang="it-IT" b="0" i="1" smtClean="0">
+                          <a:solidFill>
+                            <a:schemeClr val="accent5">
+                              <a:lumMod val="50000"/>
+                            </a:schemeClr>
+                          </a:solidFill>
+                          <a:latin typeface="Cambria Math" panose="02040503050406030204" pitchFamily="18" charset="0"/>
+                        </a:rPr>
+                        <m:t>=</m:t>
+                      </m:r>
+                      <m:r>
+                        <a:rPr lang="it-IT" b="0" i="1" smtClean="0">
+                          <a:solidFill>
+                            <a:schemeClr val="accent5">
+                              <a:lumMod val="50000"/>
+                            </a:schemeClr>
+                          </a:solidFill>
+                          <a:latin typeface="Cambria Math" panose="02040503050406030204" pitchFamily="18" charset="0"/>
+                        </a:rPr>
+                        <m:t>𝐶𝑜𝑛𝑠𝑢𝑙𝑡</m:t>
+                      </m:r>
+                      <m:r>
+                        <a:rPr lang="it-IT" b="0" i="1" smtClean="0">
+                          <a:solidFill>
+                            <a:schemeClr val="accent5">
+                              <a:lumMod val="50000"/>
+                            </a:schemeClr>
+                          </a:solidFill>
+                          <a:latin typeface="Cambria Math" panose="02040503050406030204" pitchFamily="18" charset="0"/>
+                        </a:rPr>
+                        <m:t> </m:t>
+                      </m:r>
+                      <m:r>
+                        <a:rPr lang="it-IT" b="0" i="1" smtClean="0">
+                          <a:solidFill>
+                            <a:schemeClr val="accent5">
+                              <a:lumMod val="50000"/>
+                            </a:schemeClr>
+                          </a:solidFill>
+                          <a:latin typeface="Cambria Math" panose="02040503050406030204" pitchFamily="18" charset="0"/>
+                        </a:rPr>
+                        <m:t>𝐷𝑎𝑦</m:t>
+                      </m:r>
+                      <m:r>
+                        <a:rPr lang="it-IT" b="0" i="1" smtClean="0">
+                          <a:solidFill>
+                            <a:schemeClr val="accent5">
+                              <a:lumMod val="50000"/>
+                            </a:schemeClr>
+                          </a:solidFill>
+                          <a:latin typeface="Cambria Math" panose="02040503050406030204" pitchFamily="18" charset="0"/>
+                        </a:rPr>
+                        <m:t> −</m:t>
+                      </m:r>
+                      <m:r>
+                        <a:rPr lang="it-IT" b="0" i="1" smtClean="0">
+                          <a:solidFill>
+                            <a:schemeClr val="accent5">
+                              <a:lumMod val="50000"/>
+                            </a:schemeClr>
+                          </a:solidFill>
+                          <a:latin typeface="Cambria Math" panose="02040503050406030204" pitchFamily="18" charset="0"/>
+                        </a:rPr>
+                        <m:t>𝑀𝑒𝑎𝑠𝑢𝑟𝑒</m:t>
+                      </m:r>
+                      <m:r>
+                        <a:rPr lang="it-IT" b="0" i="1" smtClean="0">
+                          <a:solidFill>
+                            <a:schemeClr val="accent5">
+                              <a:lumMod val="50000"/>
+                            </a:schemeClr>
+                          </a:solidFill>
+                          <a:latin typeface="Cambria Math" panose="02040503050406030204" pitchFamily="18" charset="0"/>
+                        </a:rPr>
+                        <m:t> </m:t>
+                      </m:r>
+                      <m:r>
+                        <a:rPr lang="it-IT" b="0" i="1" smtClean="0">
+                          <a:solidFill>
+                            <a:schemeClr val="accent5">
+                              <a:lumMod val="50000"/>
+                            </a:schemeClr>
+                          </a:solidFill>
+                          <a:latin typeface="Cambria Math" panose="02040503050406030204" pitchFamily="18" charset="0"/>
+                        </a:rPr>
+                        <m:t>𝐷𝑎𝑦</m:t>
+                      </m:r>
+                    </m:oMath>
+                  </m:oMathPara>
+                </a14:m>
+                <a:endParaRPr lang="en-US" dirty="0"/>
+              </a:p>
+            </p:txBody>
+          </p:sp>
+        </mc:Choice>
+        <mc:Fallback>
+          <p:sp>
+            <p:nvSpPr>
+              <p:cNvPr id="25" name="TextBox 24">
+                <a:extLst>
+                  <a:ext uri="{FF2B5EF4-FFF2-40B4-BE49-F238E27FC236}">
+                    <a16:creationId xmlns:a16="http://schemas.microsoft.com/office/drawing/2014/main" id="{399C914C-423A-45B5-B744-4047998FB919}"/>
+                  </a:ext>
+                </a:extLst>
+              </p:cNvPr>
+              <p:cNvSpPr txBox="1">
+                <a:spLocks noRot="1" noChangeAspect="1" noMove="1" noResize="1" noEditPoints="1" noAdjustHandles="1" noChangeArrowheads="1" noChangeShapeType="1" noTextEdit="1"/>
+              </p:cNvSpPr>
+              <p:nvPr/>
+            </p:nvSpPr>
+            <p:spPr>
+              <a:xfrm>
+                <a:off x="8282458" y="6417113"/>
+                <a:ext cx="3829190" cy="298928"/>
+              </a:xfrm>
+              <a:prstGeom prst="rect">
+                <a:avLst/>
+              </a:prstGeom>
+              <a:blipFill>
+                <a:blip r:embed="rId4"/>
+                <a:stretch>
+                  <a:fillRect l="-1115" r="-1433" b="-24490"/>
+                </a:stretch>
+              </a:blipFill>
+            </p:spPr>
+            <p:txBody>
+              <a:bodyPr/>
+              <a:lstStyle/>
+              <a:p>
+                <a:r>
+                  <a:rPr lang="en-US">
+                    <a:noFill/>
+                  </a:rPr>
+                  <a:t> </a:t>
+                </a:r>
+              </a:p>
+            </p:txBody>
+          </p:sp>
+        </mc:Fallback>
+      </mc:AlternateContent>
+      <p:cxnSp>
+        <p:nvCxnSpPr>
+          <p:cNvPr id="27" name="Straight Connector 26">
+            <a:extLst>
+              <a:ext uri="{FF2B5EF4-FFF2-40B4-BE49-F238E27FC236}">
+                <a16:creationId xmlns:a16="http://schemas.microsoft.com/office/drawing/2014/main" id="{37C04FE1-E5B0-4953-9277-7EFD99F86083}"/>
+              </a:ext>
+            </a:extLst>
+          </p:cNvPr>
+          <p:cNvCxnSpPr>
+            <a:cxnSpLocks/>
+          </p:cNvCxnSpPr>
+          <p:nvPr/>
+        </p:nvCxnSpPr>
+        <p:spPr>
+          <a:xfrm>
+            <a:off x="5085347" y="1479507"/>
+            <a:ext cx="0" cy="3850105"/>
+          </a:xfrm>
+          <a:prstGeom prst="line">
+            <a:avLst/>
+          </a:prstGeom>
+          <a:ln w="38100"/>
+        </p:spPr>
+        <p:style>
+          <a:lnRef idx="3">
+            <a:schemeClr val="accent6"/>
+          </a:lnRef>
+          <a:fillRef idx="0">
+            <a:schemeClr val="accent6"/>
+          </a:fillRef>
+          <a:effectRef idx="2">
+            <a:schemeClr val="accent6"/>
+          </a:effectRef>
+          <a:fontRef idx="minor">
+            <a:schemeClr val="tx1"/>
+          </a:fontRef>
+        </p:style>
+      </p:cxnSp>
+      <p:cxnSp>
+        <p:nvCxnSpPr>
+          <p:cNvPr id="29" name="Straight Connector 28">
+            <a:extLst>
+              <a:ext uri="{FF2B5EF4-FFF2-40B4-BE49-F238E27FC236}">
+                <a16:creationId xmlns:a16="http://schemas.microsoft.com/office/drawing/2014/main" id="{9CDF3AED-5F1F-4B75-B404-396D3FC6CA6A}"/>
+              </a:ext>
+            </a:extLst>
+          </p:cNvPr>
+          <p:cNvCxnSpPr>
+            <a:cxnSpLocks/>
+          </p:cNvCxnSpPr>
+          <p:nvPr/>
+        </p:nvCxnSpPr>
+        <p:spPr>
+          <a:xfrm>
+            <a:off x="5301915" y="1479507"/>
+            <a:ext cx="0" cy="3850105"/>
+          </a:xfrm>
+          <a:prstGeom prst="line">
+            <a:avLst/>
+          </a:prstGeom>
+          <a:ln w="38100"/>
+        </p:spPr>
+        <p:style>
+          <a:lnRef idx="3">
+            <a:schemeClr val="accent6"/>
+          </a:lnRef>
+          <a:fillRef idx="0">
+            <a:schemeClr val="accent6"/>
+          </a:fillRef>
+          <a:effectRef idx="2">
+            <a:schemeClr val="accent6"/>
+          </a:effectRef>
+          <a:fontRef idx="minor">
+            <a:schemeClr val="tx1"/>
+          </a:fontRef>
+        </p:style>
+      </p:cxnSp>
+      <p:sp>
+        <p:nvSpPr>
+          <p:cNvPr id="30" name="Rectangle 29">
+            <a:extLst>
+              <a:ext uri="{FF2B5EF4-FFF2-40B4-BE49-F238E27FC236}">
+                <a16:creationId xmlns:a16="http://schemas.microsoft.com/office/drawing/2014/main" id="{8F4CB710-53F0-4CD8-B5F9-ADDD834DAB0E}"/>
+              </a:ext>
+            </a:extLst>
+          </p:cNvPr>
+          <p:cNvSpPr/>
+          <p:nvPr/>
+        </p:nvSpPr>
+        <p:spPr>
+          <a:xfrm>
+            <a:off x="5085347" y="1479507"/>
+            <a:ext cx="216541" cy="3850105"/>
+          </a:xfrm>
+          <a:prstGeom prst="rect">
+            <a:avLst/>
+          </a:prstGeom>
+          <a:solidFill>
+            <a:schemeClr val="accent6">
+              <a:alpha val="50000"/>
+            </a:schemeClr>
+          </a:solidFill>
+          <a:ln>
+            <a:noFill/>
+          </a:ln>
+        </p:spPr>
+        <p:style>
+          <a:lnRef idx="0">
+            <a:scrgbClr r="0" g="0" b="0"/>
+          </a:lnRef>
+          <a:fillRef idx="0">
+            <a:scrgbClr r="0" g="0" b="0"/>
+          </a:fillRef>
+          <a:effectRef idx="0">
+            <a:scrgbClr r="0" g="0" b="0"/>
+          </a:effectRef>
+          <a:fontRef idx="minor">
+            <a:schemeClr val="lt1"/>
+          </a:fontRef>
+        </p:style>
+        <p:txBody>
+          <a:bodyPr rtlCol="0" anchor="ctr"/>
+          <a:lstStyle/>
+          <a:p>
+            <a:pPr algn="ctr"/>
+            <a:endParaRPr lang="en-US"/>
+          </a:p>
+        </p:txBody>
+      </p:sp>
+      <p:sp>
+        <p:nvSpPr>
+          <p:cNvPr id="31" name="Rectangle 30">
+            <a:extLst>
+              <a:ext uri="{FF2B5EF4-FFF2-40B4-BE49-F238E27FC236}">
+                <a16:creationId xmlns:a16="http://schemas.microsoft.com/office/drawing/2014/main" id="{8E0C5457-17E5-45D5-BEC0-7EAB852DBC68}"/>
+              </a:ext>
+            </a:extLst>
+          </p:cNvPr>
+          <p:cNvSpPr/>
+          <p:nvPr/>
+        </p:nvSpPr>
+        <p:spPr>
+          <a:xfrm>
+            <a:off x="3384884" y="1479507"/>
+            <a:ext cx="1700397" cy="3850105"/>
+          </a:xfrm>
+          <a:prstGeom prst="rect">
+            <a:avLst/>
+          </a:prstGeom>
+          <a:solidFill>
+            <a:schemeClr val="accent2">
+              <a:alpha val="50000"/>
+            </a:schemeClr>
+          </a:solidFill>
+          <a:ln>
+            <a:noFill/>
+          </a:ln>
+        </p:spPr>
+        <p:style>
+          <a:lnRef idx="0">
+            <a:scrgbClr r="0" g="0" b="0"/>
+          </a:lnRef>
+          <a:fillRef idx="0">
+            <a:scrgbClr r="0" g="0" b="0"/>
+          </a:fillRef>
+          <a:effectRef idx="0">
+            <a:scrgbClr r="0" g="0" b="0"/>
+          </a:effectRef>
+          <a:fontRef idx="minor">
+            <a:schemeClr val="lt1"/>
+          </a:fontRef>
+        </p:style>
+        <p:txBody>
+          <a:bodyPr rtlCol="0" anchor="ctr"/>
+          <a:lstStyle/>
+          <a:p>
+            <a:pPr algn="ctr"/>
+            <a:endParaRPr lang="en-US"/>
+          </a:p>
+        </p:txBody>
+      </p:sp>
+      <p:sp>
+        <p:nvSpPr>
+          <p:cNvPr id="32" name="Rectangle 31">
+            <a:extLst>
+              <a:ext uri="{FF2B5EF4-FFF2-40B4-BE49-F238E27FC236}">
+                <a16:creationId xmlns:a16="http://schemas.microsoft.com/office/drawing/2014/main" id="{2524B5AE-5AAF-4DD1-8BE7-954D9D648376}"/>
+              </a:ext>
+            </a:extLst>
+          </p:cNvPr>
+          <p:cNvSpPr/>
+          <p:nvPr/>
+        </p:nvSpPr>
+        <p:spPr>
+          <a:xfrm>
+            <a:off x="5301888" y="1479506"/>
+            <a:ext cx="3272617" cy="3850105"/>
+          </a:xfrm>
+          <a:prstGeom prst="rect">
+            <a:avLst/>
+          </a:prstGeom>
+          <a:solidFill>
+            <a:schemeClr val="accent2">
+              <a:alpha val="50000"/>
+            </a:schemeClr>
+          </a:solidFill>
+          <a:ln>
+            <a:noFill/>
+          </a:ln>
+        </p:spPr>
+        <p:style>
+          <a:lnRef idx="0">
+            <a:scrgbClr r="0" g="0" b="0"/>
+          </a:lnRef>
+          <a:fillRef idx="0">
+            <a:scrgbClr r="0" g="0" b="0"/>
+          </a:fillRef>
+          <a:effectRef idx="0">
+            <a:scrgbClr r="0" g="0" b="0"/>
+          </a:effectRef>
+          <a:fontRef idx="minor">
+            <a:schemeClr val="lt1"/>
+          </a:fontRef>
+        </p:style>
+        <p:txBody>
+          <a:bodyPr rtlCol="0" anchor="ctr"/>
+          <a:lstStyle/>
+          <a:p>
+            <a:pPr algn="ctr"/>
+            <a:endParaRPr lang="en-US"/>
+          </a:p>
+        </p:txBody>
+      </p:sp>
+      <p:sp>
+        <p:nvSpPr>
+          <p:cNvPr id="35" name="TextBox 34">
+            <a:extLst>
+              <a:ext uri="{FF2B5EF4-FFF2-40B4-BE49-F238E27FC236}">
+                <a16:creationId xmlns:a16="http://schemas.microsoft.com/office/drawing/2014/main" id="{7A1DA289-AADC-4ED7-A0C6-A250108DCE32}"/>
+              </a:ext>
+            </a:extLst>
+          </p:cNvPr>
+          <p:cNvSpPr txBox="1"/>
+          <p:nvPr/>
+        </p:nvSpPr>
+        <p:spPr>
+          <a:xfrm>
+            <a:off x="228932" y="1379620"/>
+            <a:ext cx="2077453" cy="369332"/>
+          </a:xfrm>
+          <a:prstGeom prst="rect">
+            <a:avLst/>
+          </a:prstGeom>
+          <a:noFill/>
+        </p:spPr>
+        <p:txBody>
+          <a:bodyPr wrap="square" rtlCol="0">
+            <a:spAutoFit/>
+          </a:bodyPr>
+          <a:lstStyle/>
+          <a:p>
+            <a:r>
+              <a:rPr lang="it-IT" dirty="0">
+                <a:solidFill>
+                  <a:schemeClr val="accent6"/>
+                </a:solidFill>
+              </a:rPr>
+              <a:t>Reliable</a:t>
+            </a:r>
+            <a:endParaRPr lang="en-US" dirty="0">
+              <a:solidFill>
+                <a:schemeClr val="accent6"/>
+              </a:solidFill>
+            </a:endParaRPr>
+          </a:p>
+        </p:txBody>
+      </p:sp>
+      <p:sp>
+        <p:nvSpPr>
+          <p:cNvPr id="38" name="TextBox 37">
+            <a:extLst>
+              <a:ext uri="{FF2B5EF4-FFF2-40B4-BE49-F238E27FC236}">
+                <a16:creationId xmlns:a16="http://schemas.microsoft.com/office/drawing/2014/main" id="{2A1457D8-ED1F-4AB7-84B0-ED7A84AE6BCE}"/>
+              </a:ext>
+            </a:extLst>
+          </p:cNvPr>
+          <p:cNvSpPr txBox="1"/>
+          <p:nvPr/>
+        </p:nvSpPr>
+        <p:spPr>
+          <a:xfrm>
+            <a:off x="218343" y="1748952"/>
+            <a:ext cx="2077453" cy="369332"/>
+          </a:xfrm>
+          <a:prstGeom prst="rect">
+            <a:avLst/>
+          </a:prstGeom>
+          <a:noFill/>
+        </p:spPr>
+        <p:txBody>
+          <a:bodyPr wrap="square" rtlCol="0">
+            <a:spAutoFit/>
+          </a:bodyPr>
+          <a:lstStyle/>
+          <a:p>
+            <a:r>
+              <a:rPr lang="it-IT" dirty="0">
+                <a:solidFill>
+                  <a:schemeClr val="accent2">
+                    <a:lumMod val="75000"/>
+                  </a:schemeClr>
+                </a:solidFill>
+              </a:rPr>
+              <a:t>Not Reliable</a:t>
+            </a:r>
+            <a:endParaRPr lang="en-US" dirty="0">
+              <a:solidFill>
+                <a:schemeClr val="accent2">
+                  <a:lumMod val="75000"/>
+                </a:schemeClr>
+              </a:solidFill>
+            </a:endParaRPr>
+          </a:p>
+        </p:txBody>
+      </p:sp>
+    </p:spTree>
+    <p:extLst>
+      <p:ext uri="{BB962C8B-B14F-4D97-AF65-F5344CB8AC3E}">
+        <p14:creationId xmlns:p14="http://schemas.microsoft.com/office/powerpoint/2010/main" val="483860090"/>
+      </p:ext>
+    </p:extLst>
+  </p:cSld>
+  <p:clrMapOvr>
+    <a:masterClrMapping/>
+  </p:clrMapOvr>
+  <mc:AlternateContent xmlns:mc="http://schemas.openxmlformats.org/markup-compatibility/2006" xmlns:p159="http://schemas.microsoft.com/office/powerpoint/2015/09/main">
+    <mc:Choice Requires="p159">
+      <p:transition spd="slow">
+        <p159:morph option="byObject"/>
+      </p:transition>
+    </mc:Choice>
+    <mc:Fallback xmlns="">
+      <p:transition spd="slow">
+        <p:fade/>
+      </p:transition>
+    </mc:Fallback>
+  </mc:AlternateContent>
+</p:sld>
+</file>
+
+<file path=ppt/slides/slide34.xml><?xml version="1.0" encoding="utf-8"?>
+<p:sld xmlns:a="http://schemas.openxmlformats.org/drawingml/2006/main" xmlns:r="http://schemas.openxmlformats.org/officeDocument/2006/relationships" xmlns:p="http://schemas.openxmlformats.org/presentationml/2006/main">
+  <p:cSld>
+    <p:spTree>
+      <p:nvGrpSpPr>
+        <p:cNvPr id="1" name=""/>
+        <p:cNvGrpSpPr/>
+        <p:nvPr/>
+      </p:nvGrpSpPr>
+      <p:grpSpPr>
+        <a:xfrm>
+          <a:off x="0" y="0"/>
+          <a:ext cx="0" cy="0"/>
+          <a:chOff x="0" y="0"/>
+          <a:chExt cx="0" cy="0"/>
+        </a:xfrm>
+      </p:grpSpPr>
+      <p:sp>
+        <p:nvSpPr>
+          <p:cNvPr id="3" name="TextBox 2">
+            <a:extLst>
+              <a:ext uri="{FF2B5EF4-FFF2-40B4-BE49-F238E27FC236}">
+                <a16:creationId xmlns:a16="http://schemas.microsoft.com/office/drawing/2014/main" id="{669BC41E-7A1B-450B-AE56-57E23EBB368B}"/>
+              </a:ext>
+            </a:extLst>
+          </p:cNvPr>
+          <p:cNvSpPr txBox="1"/>
+          <p:nvPr/>
+        </p:nvSpPr>
+        <p:spPr>
+          <a:xfrm>
+            <a:off x="0" y="0"/>
+            <a:ext cx="5358063" cy="369332"/>
+          </a:xfrm>
+          <a:prstGeom prst="rect">
+            <a:avLst/>
+          </a:prstGeom>
+          <a:noFill/>
+        </p:spPr>
+        <p:txBody>
+          <a:bodyPr wrap="square" rtlCol="0">
+            <a:spAutoFit/>
+          </a:bodyPr>
+          <a:lstStyle/>
+          <a:p>
+            <a:r>
+              <a:rPr lang="it-IT" u="sng" dirty="0"/>
+              <a:t>Blood Pressure Measurements – Measure Reliability</a:t>
+            </a:r>
+            <a:endParaRPr lang="nl-NL" u="sng" dirty="0"/>
+          </a:p>
+        </p:txBody>
+      </p:sp>
+      <p:pic>
+        <p:nvPicPr>
+          <p:cNvPr id="6" name="Graphic 5" descr="Filter">
+            <a:extLst>
+              <a:ext uri="{FF2B5EF4-FFF2-40B4-BE49-F238E27FC236}">
+                <a16:creationId xmlns:a16="http://schemas.microsoft.com/office/drawing/2014/main" id="{63347700-8BD1-4C02-B797-92E5FAF85884}"/>
+              </a:ext>
+            </a:extLst>
+          </p:cNvPr>
+          <p:cNvPicPr>
+            <a:picLocks noChangeAspect="1"/>
+          </p:cNvPicPr>
+          <p:nvPr/>
+        </p:nvPicPr>
+        <p:blipFill>
+          <a:blip r:embed="rId2">
+            <a:extLst>
+              <a:ext uri="{28A0092B-C50C-407E-A947-70E740481C1C}">
+                <a14:useLocalDpi xmlns:a14="http://schemas.microsoft.com/office/drawing/2010/main" val="0"/>
+              </a:ext>
+              <a:ext uri="{96DAC541-7B7A-43D3-8B79-37D633B846F1}">
+                <asvg:svgBlip xmlns:asvg="http://schemas.microsoft.com/office/drawing/2016/SVG/main" r:embed="rId3"/>
+              </a:ext>
+            </a:extLst>
+          </a:blip>
+          <a:stretch>
+            <a:fillRect/>
+          </a:stretch>
+        </p:blipFill>
+        <p:spPr>
+          <a:xfrm>
+            <a:off x="4181536" y="2658137"/>
+            <a:ext cx="1599074" cy="1599074"/>
+          </a:xfrm>
+          <a:prstGeom prst="rect">
+            <a:avLst/>
+          </a:prstGeom>
+        </p:spPr>
+      </p:pic>
+      <p:grpSp>
+        <p:nvGrpSpPr>
+          <p:cNvPr id="10" name="Group 9">
+            <a:extLst>
+              <a:ext uri="{FF2B5EF4-FFF2-40B4-BE49-F238E27FC236}">
+                <a16:creationId xmlns:a16="http://schemas.microsoft.com/office/drawing/2014/main" id="{4E8B18F0-E38C-4F46-AB8E-50445F6ED9EF}"/>
+              </a:ext>
+            </a:extLst>
+          </p:cNvPr>
+          <p:cNvGrpSpPr/>
+          <p:nvPr/>
+        </p:nvGrpSpPr>
+        <p:grpSpPr>
+          <a:xfrm>
+            <a:off x="4358105" y="1076169"/>
+            <a:ext cx="3008344" cy="1206318"/>
+            <a:chOff x="4491790" y="1327484"/>
+            <a:chExt cx="1780673" cy="689810"/>
+          </a:xfrm>
+        </p:grpSpPr>
+        <p:pic>
+          <p:nvPicPr>
+            <p:cNvPr id="8" name="Graphic 7" descr="Water">
+              <a:extLst>
+                <a:ext uri="{FF2B5EF4-FFF2-40B4-BE49-F238E27FC236}">
+                  <a16:creationId xmlns:a16="http://schemas.microsoft.com/office/drawing/2014/main" id="{92A02B8B-6955-4216-8990-9304DE7C7A76}"/>
+                </a:ext>
+              </a:extLst>
+            </p:cNvPr>
+            <p:cNvPicPr>
+              <a:picLocks noChangeAspect="1"/>
+            </p:cNvPicPr>
+            <p:nvPr/>
+          </p:nvPicPr>
+          <p:blipFill>
+            <a:blip r:embed="rId4">
+              <a:extLst>
+                <a:ext uri="{28A0092B-C50C-407E-A947-70E740481C1C}">
+                  <a14:useLocalDpi xmlns:a14="http://schemas.microsoft.com/office/drawing/2010/main" val="0"/>
+                </a:ext>
+                <a:ext uri="{96DAC541-7B7A-43D3-8B79-37D633B846F1}">
+                  <asvg:svgBlip xmlns:asvg="http://schemas.microsoft.com/office/drawing/2016/SVG/main" r:embed="rId5"/>
+                </a:ext>
+              </a:extLst>
+            </a:blip>
+            <a:stretch>
+              <a:fillRect/>
+            </a:stretch>
+          </p:blipFill>
+          <p:spPr>
+            <a:xfrm>
+              <a:off x="4491790" y="1327484"/>
+              <a:ext cx="689810" cy="689810"/>
+            </a:xfrm>
+            <a:prstGeom prst="rect">
+              <a:avLst/>
+            </a:prstGeom>
+          </p:spPr>
+        </p:pic>
+        <p:sp>
+          <p:nvSpPr>
+            <p:cNvPr id="9" name="TextBox 8">
+              <a:extLst>
+                <a:ext uri="{FF2B5EF4-FFF2-40B4-BE49-F238E27FC236}">
+                  <a16:creationId xmlns:a16="http://schemas.microsoft.com/office/drawing/2014/main" id="{F7B65646-7830-4AB1-9530-52DBA0638F61}"/>
+                </a:ext>
+              </a:extLst>
+            </p:cNvPr>
+            <p:cNvSpPr txBox="1"/>
+            <p:nvPr/>
+          </p:nvSpPr>
+          <p:spPr>
+            <a:xfrm>
+              <a:off x="5237747" y="1408395"/>
+              <a:ext cx="1034716" cy="527989"/>
+            </a:xfrm>
+            <a:prstGeom prst="rect">
+              <a:avLst/>
+            </a:prstGeom>
+            <a:noFill/>
+          </p:spPr>
+          <p:txBody>
+            <a:bodyPr wrap="square" rtlCol="0" anchor="ctr">
+              <a:spAutoFit/>
+            </a:bodyPr>
+            <a:lstStyle/>
+            <a:p>
+              <a:r>
+                <a:rPr lang="it-IT" dirty="0"/>
+                <a:t>Sys BP</a:t>
+              </a:r>
+            </a:p>
+            <a:p>
+              <a:r>
+                <a:rPr lang="it-IT" dirty="0"/>
+                <a:t>Dia BP</a:t>
+              </a:r>
+            </a:p>
+            <a:p>
+              <a:r>
+                <a:rPr lang="it-IT" dirty="0"/>
+                <a:t>Mean BP</a:t>
+              </a:r>
+              <a:endParaRPr lang="en-US" dirty="0"/>
+            </a:p>
+          </p:txBody>
+        </p:sp>
+      </p:grpSp>
+      <mc:AlternateContent xmlns:mc="http://schemas.openxmlformats.org/markup-compatibility/2006">
+        <mc:Choice xmlns:a14="http://schemas.microsoft.com/office/drawing/2010/main" Requires="a14">
+          <p:sp>
+            <p:nvSpPr>
+              <p:cNvPr id="11" name="Rectangle: Rounded Corners 10">
+                <a:extLst>
+                  <a:ext uri="{FF2B5EF4-FFF2-40B4-BE49-F238E27FC236}">
+                    <a16:creationId xmlns:a16="http://schemas.microsoft.com/office/drawing/2014/main" id="{A8C295C3-ABE7-4F5C-A0DC-B3741AE070EB}"/>
+                  </a:ext>
+                </a:extLst>
+              </p:cNvPr>
+              <p:cNvSpPr/>
+              <p:nvPr/>
+            </p:nvSpPr>
+            <p:spPr>
+              <a:xfrm>
+                <a:off x="5034982" y="3241133"/>
+                <a:ext cx="2396132" cy="658474"/>
+              </a:xfrm>
+              <a:prstGeom prst="roundRect">
+                <a:avLst/>
+              </a:prstGeom>
+              <a:noFill/>
+              <a:ln>
+                <a:noFill/>
+              </a:ln>
+            </p:spPr>
+            <p:style>
+              <a:lnRef idx="2">
+                <a:schemeClr val="accent1">
+                  <a:shade val="50000"/>
+                </a:schemeClr>
+              </a:lnRef>
+              <a:fillRef idx="1">
+                <a:schemeClr val="accent1"/>
+              </a:fillRef>
+              <a:effectRef idx="0">
+                <a:schemeClr val="accent1"/>
+              </a:effectRef>
+              <a:fontRef idx="minor">
+                <a:schemeClr val="lt1"/>
+              </a:fontRef>
+            </p:style>
+            <p:txBody>
+              <a:bodyPr rtlCol="0" anchor="ctr"/>
+              <a:lstStyle/>
+              <a:p>
+                <a:pPr algn="ctr"/>
+                <a14:m>
+                  <m:oMathPara xmlns:m="http://schemas.openxmlformats.org/officeDocument/2006/math">
+                    <m:oMathParaPr>
+                      <m:jc m:val="centerGroup"/>
+                    </m:oMathParaPr>
+                    <m:oMath xmlns:m="http://schemas.openxmlformats.org/officeDocument/2006/math">
+                      <m:d>
+                        <m:dPr>
+                          <m:begChr m:val="|"/>
+                          <m:endChr m:val="|"/>
+                          <m:ctrlPr>
+                            <a:rPr lang="en-US" sz="2000" i="1" smtClean="0">
+                              <a:solidFill>
+                                <a:schemeClr val="accent5">
+                                  <a:lumMod val="50000"/>
+                                </a:schemeClr>
+                              </a:solidFill>
+                              <a:latin typeface="Cambria Math" panose="02040503050406030204" pitchFamily="18" charset="0"/>
+                            </a:rPr>
+                          </m:ctrlPr>
+                        </m:dPr>
+                        <m:e>
+                          <m:sSub>
+                            <m:sSubPr>
+                              <m:ctrlPr>
+                                <a:rPr lang="en-US" sz="2000" i="1" smtClean="0">
+                                  <a:solidFill>
+                                    <a:schemeClr val="accent5">
+                                      <a:lumMod val="50000"/>
+                                    </a:schemeClr>
+                                  </a:solidFill>
+                                  <a:latin typeface="Cambria Math" panose="02040503050406030204" pitchFamily="18" charset="0"/>
+                                </a:rPr>
+                              </m:ctrlPr>
+                            </m:sSubPr>
+                            <m:e>
+                              <m:r>
+                                <a:rPr lang="en-US" sz="2000" i="1" smtClean="0">
+                                  <a:solidFill>
+                                    <a:schemeClr val="accent5">
+                                      <a:lumMod val="50000"/>
+                                    </a:schemeClr>
+                                  </a:solidFill>
+                                  <a:latin typeface="Cambria Math" panose="02040503050406030204" pitchFamily="18" charset="0"/>
+                                </a:rPr>
+                                <m:t>∆</m:t>
+                              </m:r>
+                            </m:e>
+                            <m:sub>
+                              <m:r>
+                                <a:rPr lang="en-US" sz="2000" i="1" smtClean="0">
+                                  <a:solidFill>
+                                    <a:schemeClr val="accent5">
+                                      <a:lumMod val="50000"/>
+                                    </a:schemeClr>
+                                  </a:solidFill>
+                                  <a:latin typeface="Cambria Math" panose="02040503050406030204" pitchFamily="18" charset="0"/>
+                                </a:rPr>
+                                <m:t>𝑑</m:t>
+                              </m:r>
+                              <m:r>
+                                <a:rPr lang="it-IT" sz="2000" b="0" i="1" smtClean="0">
+                                  <a:solidFill>
+                                    <a:schemeClr val="accent5">
+                                      <a:lumMod val="50000"/>
+                                    </a:schemeClr>
+                                  </a:solidFill>
+                                  <a:latin typeface="Cambria Math" panose="02040503050406030204" pitchFamily="18" charset="0"/>
+                                </a:rPr>
+                                <m:t>𝑎</m:t>
+                              </m:r>
+                              <m:r>
+                                <a:rPr lang="en-US" sz="2000" b="0" i="1" smtClean="0">
+                                  <a:solidFill>
+                                    <a:schemeClr val="accent5">
+                                      <a:lumMod val="50000"/>
+                                    </a:schemeClr>
+                                  </a:solidFill>
+                                  <a:latin typeface="Cambria Math" panose="02040503050406030204" pitchFamily="18" charset="0"/>
+                                </a:rPr>
+                                <m:t>𝑦</m:t>
+                              </m:r>
+                              <m:r>
+                                <a:rPr lang="it-IT" sz="2000" b="0" i="1" smtClean="0">
+                                  <a:solidFill>
+                                    <a:schemeClr val="accent5">
+                                      <a:lumMod val="50000"/>
+                                    </a:schemeClr>
+                                  </a:solidFill>
+                                  <a:latin typeface="Cambria Math" panose="02040503050406030204" pitchFamily="18" charset="0"/>
+                                </a:rPr>
+                                <m:t>𝑠</m:t>
+                              </m:r>
+                            </m:sub>
+                          </m:sSub>
+                        </m:e>
+                      </m:d>
+                      <m:r>
+                        <a:rPr lang="en-US" sz="2000" i="1" smtClean="0">
+                          <a:solidFill>
+                            <a:schemeClr val="accent5">
+                              <a:lumMod val="50000"/>
+                            </a:schemeClr>
+                          </a:solidFill>
+                          <a:latin typeface="Cambria Math" panose="02040503050406030204" pitchFamily="18" charset="0"/>
+                        </a:rPr>
+                        <m:t>≤15</m:t>
+                      </m:r>
+                      <m:r>
+                        <a:rPr lang="en-US" sz="2000" b="0" i="1" smtClean="0">
+                          <a:solidFill>
+                            <a:schemeClr val="accent5">
+                              <a:lumMod val="50000"/>
+                            </a:schemeClr>
+                          </a:solidFill>
+                          <a:latin typeface="Cambria Math" panose="02040503050406030204" pitchFamily="18" charset="0"/>
+                        </a:rPr>
+                        <m:t> </m:t>
+                      </m:r>
+                      <m:r>
+                        <a:rPr lang="en-US" sz="2000" i="1" smtClean="0">
+                          <a:solidFill>
+                            <a:schemeClr val="accent5">
+                              <a:lumMod val="50000"/>
+                            </a:schemeClr>
+                          </a:solidFill>
+                          <a:latin typeface="Cambria Math" panose="02040503050406030204" pitchFamily="18" charset="0"/>
+                        </a:rPr>
+                        <m:t>𝑑</m:t>
+                      </m:r>
+                      <m:r>
+                        <a:rPr lang="en-US" sz="2000" b="0" i="1" smtClean="0">
+                          <a:solidFill>
+                            <a:schemeClr val="accent5">
+                              <a:lumMod val="50000"/>
+                            </a:schemeClr>
+                          </a:solidFill>
+                          <a:latin typeface="Cambria Math" panose="02040503050406030204" pitchFamily="18" charset="0"/>
+                        </a:rPr>
+                        <m:t>𝑎𝑦𝑠</m:t>
+                      </m:r>
+                    </m:oMath>
+                  </m:oMathPara>
+                </a14:m>
+                <a:endParaRPr lang="en-US" sz="2000" dirty="0">
+                  <a:solidFill>
+                    <a:schemeClr val="accent5">
+                      <a:lumMod val="50000"/>
+                    </a:schemeClr>
+                  </a:solidFill>
+                </a:endParaRPr>
+              </a:p>
+            </p:txBody>
+          </p:sp>
+        </mc:Choice>
+        <mc:Fallback>
+          <p:sp>
+            <p:nvSpPr>
+              <p:cNvPr id="11" name="Rectangle: Rounded Corners 10">
+                <a:extLst>
+                  <a:ext uri="{FF2B5EF4-FFF2-40B4-BE49-F238E27FC236}">
+                    <a16:creationId xmlns:a16="http://schemas.microsoft.com/office/drawing/2014/main" id="{A8C295C3-ABE7-4F5C-A0DC-B3741AE070EB}"/>
+                  </a:ext>
+                </a:extLst>
+              </p:cNvPr>
+              <p:cNvSpPr>
+                <a:spLocks noRot="1" noChangeAspect="1" noMove="1" noResize="1" noEditPoints="1" noAdjustHandles="1" noChangeArrowheads="1" noChangeShapeType="1" noTextEdit="1"/>
+              </p:cNvSpPr>
+              <p:nvPr/>
+            </p:nvSpPr>
+            <p:spPr>
+              <a:xfrm>
+                <a:off x="5034982" y="3241133"/>
+                <a:ext cx="2396132" cy="658474"/>
+              </a:xfrm>
+              <a:prstGeom prst="roundRect">
+                <a:avLst/>
+              </a:prstGeom>
+              <a:blipFill>
+                <a:blip r:embed="rId6"/>
+                <a:stretch>
+                  <a:fillRect/>
+                </a:stretch>
+              </a:blipFill>
+              <a:ln>
+                <a:noFill/>
+              </a:ln>
+            </p:spPr>
+            <p:txBody>
+              <a:bodyPr/>
+              <a:lstStyle/>
+              <a:p>
+                <a:r>
+                  <a:rPr lang="en-US">
+                    <a:noFill/>
+                  </a:rPr>
+                  <a:t> </a:t>
+                </a:r>
+              </a:p>
+            </p:txBody>
+          </p:sp>
+        </mc:Fallback>
+      </mc:AlternateContent>
+      <p:pic>
+        <p:nvPicPr>
+          <p:cNvPr id="13" name="Graphic 12" descr="Users">
+            <a:extLst>
+              <a:ext uri="{FF2B5EF4-FFF2-40B4-BE49-F238E27FC236}">
+                <a16:creationId xmlns:a16="http://schemas.microsoft.com/office/drawing/2014/main" id="{4B97E128-F851-46A5-80C9-F3F7E373AA1B}"/>
+              </a:ext>
+            </a:extLst>
+          </p:cNvPr>
+          <p:cNvPicPr>
+            <a:picLocks noChangeAspect="1"/>
+          </p:cNvPicPr>
+          <p:nvPr/>
+        </p:nvPicPr>
+        <p:blipFill>
+          <a:blip r:embed="rId7">
+            <a:extLst>
+              <a:ext uri="{28A0092B-C50C-407E-A947-70E740481C1C}">
+                <a14:useLocalDpi xmlns:a14="http://schemas.microsoft.com/office/drawing/2010/main" val="0"/>
+              </a:ext>
+              <a:ext uri="{96DAC541-7B7A-43D3-8B79-37D633B846F1}">
+                <asvg:svgBlip xmlns:asvg="http://schemas.microsoft.com/office/drawing/2016/SVG/main" r:embed="rId8"/>
+              </a:ext>
+            </a:extLst>
+          </a:blip>
+          <a:stretch>
+            <a:fillRect/>
+          </a:stretch>
+        </p:blipFill>
+        <p:spPr>
+          <a:xfrm>
+            <a:off x="4266741" y="4302567"/>
+            <a:ext cx="1394355" cy="1394355"/>
+          </a:xfrm>
+          <a:prstGeom prst="rect">
+            <a:avLst/>
+          </a:prstGeom>
+        </p:spPr>
+      </p:pic>
+      <p:sp>
+        <p:nvSpPr>
+          <p:cNvPr id="14" name="TextBox 13">
+            <a:extLst>
+              <a:ext uri="{FF2B5EF4-FFF2-40B4-BE49-F238E27FC236}">
+                <a16:creationId xmlns:a16="http://schemas.microsoft.com/office/drawing/2014/main" id="{B1BCACD8-D43E-4C5F-BF31-2DC76081704D}"/>
+              </a:ext>
+            </a:extLst>
+          </p:cNvPr>
+          <p:cNvSpPr txBox="1"/>
+          <p:nvPr/>
+        </p:nvSpPr>
+        <p:spPr>
+          <a:xfrm>
+            <a:off x="5701856" y="4774353"/>
+            <a:ext cx="1809478" cy="461665"/>
+          </a:xfrm>
+          <a:prstGeom prst="rect">
+            <a:avLst/>
+          </a:prstGeom>
+          <a:noFill/>
+        </p:spPr>
+        <p:txBody>
+          <a:bodyPr wrap="square" rtlCol="0">
+            <a:spAutoFit/>
+          </a:bodyPr>
+          <a:lstStyle/>
+          <a:p>
+            <a:r>
+              <a:rPr lang="it-IT" sz="2400" dirty="0"/>
+              <a:t>1322 pts</a:t>
+            </a:r>
+            <a:endParaRPr lang="en-US" sz="2400" dirty="0"/>
+          </a:p>
+        </p:txBody>
+      </p:sp>
+      <mc:AlternateContent xmlns:mc="http://schemas.openxmlformats.org/markup-compatibility/2006">
+        <mc:Choice xmlns:a14="http://schemas.microsoft.com/office/drawing/2010/main" Requires="a14">
+          <p:sp>
+            <p:nvSpPr>
+              <p:cNvPr id="15" name="TextBox 14">
+                <a:extLst>
+                  <a:ext uri="{FF2B5EF4-FFF2-40B4-BE49-F238E27FC236}">
+                    <a16:creationId xmlns:a16="http://schemas.microsoft.com/office/drawing/2014/main" id="{3B5B43CE-56C0-4324-A937-B56BAF89180C}"/>
+                  </a:ext>
+                </a:extLst>
+              </p:cNvPr>
+              <p:cNvSpPr txBox="1"/>
+              <p:nvPr/>
+            </p:nvSpPr>
+            <p:spPr>
+              <a:xfrm>
+                <a:off x="8282458" y="6417113"/>
+                <a:ext cx="3829190" cy="298928"/>
+              </a:xfrm>
+              <a:prstGeom prst="rect">
+                <a:avLst/>
+              </a:prstGeom>
+              <a:noFill/>
+            </p:spPr>
+            <p:txBody>
+              <a:bodyPr wrap="none" lIns="0" tIns="0" rIns="0" bIns="0" rtlCol="0">
+                <a:spAutoFit/>
+              </a:bodyPr>
+              <a:lstStyle/>
+              <a:p>
+                <a14:m>
+                  <m:oMathPara xmlns:m="http://schemas.openxmlformats.org/officeDocument/2006/math">
+                    <m:oMathParaPr>
+                      <m:jc m:val="centerGroup"/>
+                    </m:oMathParaPr>
+                    <m:oMath xmlns:m="http://schemas.openxmlformats.org/officeDocument/2006/math">
+                      <m:sSub>
+                        <m:sSubPr>
+                          <m:ctrlPr>
+                            <a:rPr lang="en-US" i="1" smtClean="0">
+                              <a:solidFill>
+                                <a:schemeClr val="accent5">
+                                  <a:lumMod val="50000"/>
+                                </a:schemeClr>
+                              </a:solidFill>
+                              <a:latin typeface="Cambria Math" panose="02040503050406030204" pitchFamily="18" charset="0"/>
+                            </a:rPr>
+                          </m:ctrlPr>
+                        </m:sSubPr>
+                        <m:e>
+                          <m:r>
+                            <a:rPr lang="en-US" i="1">
+                              <a:solidFill>
+                                <a:schemeClr val="accent5">
+                                  <a:lumMod val="50000"/>
+                                </a:schemeClr>
+                              </a:solidFill>
+                              <a:latin typeface="Cambria Math" panose="02040503050406030204" pitchFamily="18" charset="0"/>
+                            </a:rPr>
+                            <m:t>∆</m:t>
+                          </m:r>
+                        </m:e>
+                        <m:sub>
+                          <m:r>
+                            <a:rPr lang="en-US" i="1">
+                              <a:solidFill>
+                                <a:schemeClr val="accent5">
+                                  <a:lumMod val="50000"/>
+                                </a:schemeClr>
+                              </a:solidFill>
+                              <a:latin typeface="Cambria Math" panose="02040503050406030204" pitchFamily="18" charset="0"/>
+                            </a:rPr>
+                            <m:t>𝑑</m:t>
+                          </m:r>
+                          <m:r>
+                            <a:rPr lang="it-IT" i="1">
+                              <a:solidFill>
+                                <a:schemeClr val="accent5">
+                                  <a:lumMod val="50000"/>
+                                </a:schemeClr>
+                              </a:solidFill>
+                              <a:latin typeface="Cambria Math" panose="02040503050406030204" pitchFamily="18" charset="0"/>
+                            </a:rPr>
+                            <m:t>𝑎</m:t>
+                          </m:r>
+                          <m:r>
+                            <a:rPr lang="en-US" i="1">
+                              <a:solidFill>
+                                <a:schemeClr val="accent5">
+                                  <a:lumMod val="50000"/>
+                                </a:schemeClr>
+                              </a:solidFill>
+                              <a:latin typeface="Cambria Math" panose="02040503050406030204" pitchFamily="18" charset="0"/>
+                            </a:rPr>
+                            <m:t>𝑦</m:t>
+                          </m:r>
+                          <m:r>
+                            <a:rPr lang="it-IT" i="1">
+                              <a:solidFill>
+                                <a:schemeClr val="accent5">
+                                  <a:lumMod val="50000"/>
+                                </a:schemeClr>
+                              </a:solidFill>
+                              <a:latin typeface="Cambria Math" panose="02040503050406030204" pitchFamily="18" charset="0"/>
+                            </a:rPr>
+                            <m:t>𝑠</m:t>
+                          </m:r>
+                        </m:sub>
+                      </m:sSub>
+                      <m:r>
+                        <a:rPr lang="it-IT" b="0" i="1" smtClean="0">
+                          <a:solidFill>
+                            <a:schemeClr val="accent5">
+                              <a:lumMod val="50000"/>
+                            </a:schemeClr>
+                          </a:solidFill>
+                          <a:latin typeface="Cambria Math" panose="02040503050406030204" pitchFamily="18" charset="0"/>
+                        </a:rPr>
+                        <m:t>=</m:t>
+                      </m:r>
+                      <m:r>
+                        <a:rPr lang="it-IT" b="0" i="1" smtClean="0">
+                          <a:solidFill>
+                            <a:schemeClr val="accent5">
+                              <a:lumMod val="50000"/>
+                            </a:schemeClr>
+                          </a:solidFill>
+                          <a:latin typeface="Cambria Math" panose="02040503050406030204" pitchFamily="18" charset="0"/>
+                        </a:rPr>
+                        <m:t>𝐶𝑜𝑛𝑠𝑢𝑙𝑡</m:t>
+                      </m:r>
+                      <m:r>
+                        <a:rPr lang="it-IT" b="0" i="1" smtClean="0">
+                          <a:solidFill>
+                            <a:schemeClr val="accent5">
+                              <a:lumMod val="50000"/>
+                            </a:schemeClr>
+                          </a:solidFill>
+                          <a:latin typeface="Cambria Math" panose="02040503050406030204" pitchFamily="18" charset="0"/>
+                        </a:rPr>
+                        <m:t> </m:t>
+                      </m:r>
+                      <m:r>
+                        <a:rPr lang="it-IT" b="0" i="1" smtClean="0">
+                          <a:solidFill>
+                            <a:schemeClr val="accent5">
+                              <a:lumMod val="50000"/>
+                            </a:schemeClr>
+                          </a:solidFill>
+                          <a:latin typeface="Cambria Math" panose="02040503050406030204" pitchFamily="18" charset="0"/>
+                        </a:rPr>
+                        <m:t>𝐷𝑎𝑦</m:t>
+                      </m:r>
+                      <m:r>
+                        <a:rPr lang="it-IT" b="0" i="1" smtClean="0">
+                          <a:solidFill>
+                            <a:schemeClr val="accent5">
+                              <a:lumMod val="50000"/>
+                            </a:schemeClr>
+                          </a:solidFill>
+                          <a:latin typeface="Cambria Math" panose="02040503050406030204" pitchFamily="18" charset="0"/>
+                        </a:rPr>
+                        <m:t> −</m:t>
+                      </m:r>
+                      <m:r>
+                        <a:rPr lang="it-IT" b="0" i="1" smtClean="0">
+                          <a:solidFill>
+                            <a:schemeClr val="accent5">
+                              <a:lumMod val="50000"/>
+                            </a:schemeClr>
+                          </a:solidFill>
+                          <a:latin typeface="Cambria Math" panose="02040503050406030204" pitchFamily="18" charset="0"/>
+                        </a:rPr>
+                        <m:t>𝑀𝑒𝑎𝑠𝑢𝑟𝑒</m:t>
+                      </m:r>
+                      <m:r>
+                        <a:rPr lang="it-IT" b="0" i="1" smtClean="0">
+                          <a:solidFill>
+                            <a:schemeClr val="accent5">
+                              <a:lumMod val="50000"/>
+                            </a:schemeClr>
+                          </a:solidFill>
+                          <a:latin typeface="Cambria Math" panose="02040503050406030204" pitchFamily="18" charset="0"/>
+                        </a:rPr>
+                        <m:t> </m:t>
+                      </m:r>
+                      <m:r>
+                        <a:rPr lang="it-IT" b="0" i="1" smtClean="0">
+                          <a:solidFill>
+                            <a:schemeClr val="accent5">
+                              <a:lumMod val="50000"/>
+                            </a:schemeClr>
+                          </a:solidFill>
+                          <a:latin typeface="Cambria Math" panose="02040503050406030204" pitchFamily="18" charset="0"/>
+                        </a:rPr>
+                        <m:t>𝐷𝑎𝑦</m:t>
+                      </m:r>
+                    </m:oMath>
+                  </m:oMathPara>
+                </a14:m>
+                <a:endParaRPr lang="en-US" dirty="0"/>
+              </a:p>
+            </p:txBody>
+          </p:sp>
+        </mc:Choice>
+        <mc:Fallback>
+          <p:sp>
+            <p:nvSpPr>
+              <p:cNvPr id="15" name="TextBox 14">
+                <a:extLst>
+                  <a:ext uri="{FF2B5EF4-FFF2-40B4-BE49-F238E27FC236}">
+                    <a16:creationId xmlns:a16="http://schemas.microsoft.com/office/drawing/2014/main" id="{3B5B43CE-56C0-4324-A937-B56BAF89180C}"/>
+                  </a:ext>
+                </a:extLst>
+              </p:cNvPr>
+              <p:cNvSpPr txBox="1">
+                <a:spLocks noRot="1" noChangeAspect="1" noMove="1" noResize="1" noEditPoints="1" noAdjustHandles="1" noChangeArrowheads="1" noChangeShapeType="1" noTextEdit="1"/>
+              </p:cNvSpPr>
+              <p:nvPr/>
+            </p:nvSpPr>
+            <p:spPr>
+              <a:xfrm>
+                <a:off x="8282458" y="6417113"/>
+                <a:ext cx="3829190" cy="298928"/>
+              </a:xfrm>
+              <a:prstGeom prst="rect">
+                <a:avLst/>
+              </a:prstGeom>
+              <a:blipFill>
+                <a:blip r:embed="rId9"/>
+                <a:stretch>
+                  <a:fillRect l="-1115" r="-1433" b="-24490"/>
+                </a:stretch>
+              </a:blipFill>
+            </p:spPr>
+            <p:txBody>
+              <a:bodyPr/>
+              <a:lstStyle/>
+              <a:p>
+                <a:r>
+                  <a:rPr lang="en-US">
+                    <a:noFill/>
+                  </a:rPr>
+                  <a:t> </a:t>
+                </a:r>
+              </a:p>
+            </p:txBody>
+          </p:sp>
+        </mc:Fallback>
+      </mc:AlternateContent>
+      <p:cxnSp>
+        <p:nvCxnSpPr>
+          <p:cNvPr id="17" name="Straight Arrow Connector 16">
+            <a:extLst>
+              <a:ext uri="{FF2B5EF4-FFF2-40B4-BE49-F238E27FC236}">
+                <a16:creationId xmlns:a16="http://schemas.microsoft.com/office/drawing/2014/main" id="{7DA3842F-371B-42E6-85F3-98263B1D62E5}"/>
+              </a:ext>
+            </a:extLst>
+          </p:cNvPr>
+          <p:cNvCxnSpPr>
+            <a:cxnSpLocks/>
+            <a:stCxn id="18" idx="2"/>
+          </p:cNvCxnSpPr>
+          <p:nvPr/>
+        </p:nvCxnSpPr>
+        <p:spPr>
+          <a:xfrm flipH="1">
+            <a:off x="7177731" y="2395137"/>
+            <a:ext cx="1267762" cy="1037873"/>
+          </a:xfrm>
+          <a:prstGeom prst="straightConnector1">
+            <a:avLst/>
+          </a:prstGeom>
+          <a:ln>
+            <a:tailEnd type="triangle"/>
+          </a:ln>
+        </p:spPr>
+        <p:style>
+          <a:lnRef idx="1">
+            <a:schemeClr val="accent6"/>
+          </a:lnRef>
+          <a:fillRef idx="0">
+            <a:schemeClr val="accent6"/>
+          </a:fillRef>
+          <a:effectRef idx="0">
+            <a:schemeClr val="accent6"/>
+          </a:effectRef>
+          <a:fontRef idx="minor">
+            <a:schemeClr val="tx1"/>
+          </a:fontRef>
+        </p:style>
+      </p:cxnSp>
+      <p:sp>
+        <p:nvSpPr>
+          <p:cNvPr id="18" name="Oval 17">
+            <a:extLst>
+              <a:ext uri="{FF2B5EF4-FFF2-40B4-BE49-F238E27FC236}">
+                <a16:creationId xmlns:a16="http://schemas.microsoft.com/office/drawing/2014/main" id="{7815F66E-BCE4-4BEE-88D9-E8D215CB1C2B}"/>
+              </a:ext>
+            </a:extLst>
+          </p:cNvPr>
+          <p:cNvSpPr/>
+          <p:nvPr/>
+        </p:nvSpPr>
+        <p:spPr>
+          <a:xfrm>
+            <a:off x="8445493" y="1873768"/>
+            <a:ext cx="1828800" cy="1042737"/>
+          </a:xfrm>
+          <a:prstGeom prst="ellipse">
+            <a:avLst/>
+          </a:prstGeom>
+          <a:solidFill>
+            <a:schemeClr val="accent6">
+              <a:alpha val="50000"/>
+            </a:schemeClr>
+          </a:solidFill>
+          <a:ln>
+            <a:noFill/>
+          </a:ln>
+        </p:spPr>
+        <p:style>
+          <a:lnRef idx="0">
+            <a:scrgbClr r="0" g="0" b="0"/>
+          </a:lnRef>
+          <a:fillRef idx="0">
+            <a:scrgbClr r="0" g="0" b="0"/>
+          </a:fillRef>
+          <a:effectRef idx="0">
+            <a:scrgbClr r="0" g="0" b="0"/>
+          </a:effectRef>
+          <a:fontRef idx="minor">
+            <a:schemeClr val="lt1"/>
+          </a:fontRef>
+        </p:style>
+        <p:txBody>
+          <a:bodyPr rtlCol="0" anchor="ctr"/>
+          <a:lstStyle/>
+          <a:p>
+            <a:pPr algn="ctr"/>
+            <a:r>
+              <a:rPr lang="it-IT" dirty="0"/>
+              <a:t>Maybe too large</a:t>
+            </a:r>
+            <a:endParaRPr lang="en-US" dirty="0"/>
+          </a:p>
+        </p:txBody>
+      </p:sp>
+      <p:sp>
+        <p:nvSpPr>
+          <p:cNvPr id="20" name="Oval 19">
+            <a:extLst>
+              <a:ext uri="{FF2B5EF4-FFF2-40B4-BE49-F238E27FC236}">
+                <a16:creationId xmlns:a16="http://schemas.microsoft.com/office/drawing/2014/main" id="{0DD9478D-3955-4C7A-BC02-6A3CED041958}"/>
+              </a:ext>
+            </a:extLst>
+          </p:cNvPr>
+          <p:cNvSpPr/>
+          <p:nvPr/>
+        </p:nvSpPr>
+        <p:spPr>
+          <a:xfrm>
+            <a:off x="5032880" y="46460"/>
+            <a:ext cx="276411" cy="276411"/>
+          </a:xfrm>
+          <a:prstGeom prst="ellipse">
+            <a:avLst/>
+          </a:prstGeom>
+        </p:spPr>
+        <p:style>
+          <a:lnRef idx="2">
+            <a:schemeClr val="accent6">
+              <a:shade val="50000"/>
+            </a:schemeClr>
+          </a:lnRef>
+          <a:fillRef idx="1">
+            <a:schemeClr val="accent6"/>
+          </a:fillRef>
+          <a:effectRef idx="0">
+            <a:schemeClr val="accent6"/>
+          </a:effectRef>
+          <a:fontRef idx="minor">
+            <a:schemeClr val="lt1"/>
+          </a:fontRef>
+        </p:style>
+        <p:txBody>
+          <a:bodyPr rtlCol="0" anchor="ctr"/>
+          <a:lstStyle/>
+          <a:p>
+            <a:pPr algn="ctr"/>
+            <a:r>
+              <a:rPr lang="it-IT" dirty="0"/>
+              <a:t>2</a:t>
+            </a:r>
+            <a:endParaRPr lang="en-US" dirty="0"/>
+          </a:p>
+        </p:txBody>
+      </p:sp>
+    </p:spTree>
+    <p:extLst>
+      <p:ext uri="{BB962C8B-B14F-4D97-AF65-F5344CB8AC3E}">
+        <p14:creationId xmlns:p14="http://schemas.microsoft.com/office/powerpoint/2010/main" val="34712826"/>
+      </p:ext>
+    </p:extLst>
+  </p:cSld>
+  <p:clrMapOvr>
+    <a:masterClrMapping/>
+  </p:clrMapOvr>
+  <mc:AlternateContent xmlns:mc="http://schemas.openxmlformats.org/markup-compatibility/2006" xmlns:p159="http://schemas.microsoft.com/office/powerpoint/2015/09/main">
+    <mc:Choice Requires="p159">
+      <p:transition spd="slow">
+        <p159:morph option="byObject"/>
+      </p:transition>
+    </mc:Choice>
+    <mc:Fallback xmlns="">
+      <p:transition spd="slow">
+        <p:fade/>
+      </p:transition>
+    </mc:Fallback>
+  </mc:AlternateContent>
+</p:sld>
+</file>
+
+<file path=ppt/slides/slide35.xml><?xml version="1.0" encoding="utf-8"?>
+<p:sld xmlns:a="http://schemas.openxmlformats.org/drawingml/2006/main" xmlns:r="http://schemas.openxmlformats.org/officeDocument/2006/relationships" xmlns:p="http://schemas.openxmlformats.org/presentationml/2006/main">
+  <p:cSld>
+    <p:spTree>
+      <p:nvGrpSpPr>
+        <p:cNvPr id="1" name=""/>
+        <p:cNvGrpSpPr/>
+        <p:nvPr/>
+      </p:nvGrpSpPr>
+      <p:grpSpPr>
+        <a:xfrm>
+          <a:off x="0" y="0"/>
+          <a:ext cx="0" cy="0"/>
+          <a:chOff x="0" y="0"/>
+          <a:chExt cx="0" cy="0"/>
+        </a:xfrm>
+      </p:grpSpPr>
+      <p:sp>
+        <p:nvSpPr>
+          <p:cNvPr id="3" name="TextBox 2">
+            <a:extLst>
+              <a:ext uri="{FF2B5EF4-FFF2-40B4-BE49-F238E27FC236}">
+                <a16:creationId xmlns:a16="http://schemas.microsoft.com/office/drawing/2014/main" id="{669BC41E-7A1B-450B-AE56-57E23EBB368B}"/>
+              </a:ext>
+            </a:extLst>
+          </p:cNvPr>
+          <p:cNvSpPr txBox="1"/>
+          <p:nvPr/>
+        </p:nvSpPr>
+        <p:spPr>
+          <a:xfrm>
+            <a:off x="0" y="0"/>
+            <a:ext cx="5662863" cy="369332"/>
+          </a:xfrm>
+          <a:prstGeom prst="rect">
+            <a:avLst/>
+          </a:prstGeom>
+          <a:noFill/>
+        </p:spPr>
+        <p:txBody>
+          <a:bodyPr wrap="square" rtlCol="0">
+            <a:spAutoFit/>
+          </a:bodyPr>
+          <a:lstStyle/>
+          <a:p>
+            <a:r>
+              <a:rPr lang="it-IT" u="sng" dirty="0"/>
+              <a:t>Blood Pressure Measurements – Measures Distributions</a:t>
+            </a:r>
+            <a:endParaRPr lang="nl-NL" u="sng" dirty="0"/>
+          </a:p>
+        </p:txBody>
+      </p:sp>
+      <p:pic>
+        <p:nvPicPr>
+          <p:cNvPr id="4" name="Picture 3">
+            <a:extLst>
+              <a:ext uri="{FF2B5EF4-FFF2-40B4-BE49-F238E27FC236}">
+                <a16:creationId xmlns:a16="http://schemas.microsoft.com/office/drawing/2014/main" id="{1FAC74D6-0584-4CA3-9344-0078CB98C0EE}"/>
+              </a:ext>
+            </a:extLst>
+          </p:cNvPr>
+          <p:cNvPicPr>
+            <a:picLocks noChangeAspect="1"/>
+          </p:cNvPicPr>
+          <p:nvPr/>
+        </p:nvPicPr>
+        <p:blipFill>
+          <a:blip r:embed="rId2">
+            <a:extLst>
+              <a:ext uri="{28A0092B-C50C-407E-A947-70E740481C1C}">
+                <a14:useLocalDpi xmlns:a14="http://schemas.microsoft.com/office/drawing/2010/main" val="0"/>
+              </a:ext>
+            </a:extLst>
+          </a:blip>
+          <a:stretch>
+            <a:fillRect/>
+          </a:stretch>
+        </p:blipFill>
+        <p:spPr>
+          <a:xfrm>
+            <a:off x="1234526" y="673243"/>
+            <a:ext cx="8246358" cy="5511511"/>
+          </a:xfrm>
+          <a:prstGeom prst="rect">
+            <a:avLst/>
+          </a:prstGeom>
+        </p:spPr>
+      </p:pic>
+      <p:pic>
+        <p:nvPicPr>
+          <p:cNvPr id="7" name="Picture 6">
+            <a:extLst>
+              <a:ext uri="{FF2B5EF4-FFF2-40B4-BE49-F238E27FC236}">
+                <a16:creationId xmlns:a16="http://schemas.microsoft.com/office/drawing/2014/main" id="{4BE24283-ED82-45F4-B31B-8802048036EF}"/>
+              </a:ext>
+            </a:extLst>
+          </p:cNvPr>
+          <p:cNvPicPr>
+            <a:picLocks noChangeAspect="1"/>
+          </p:cNvPicPr>
+          <p:nvPr/>
+        </p:nvPicPr>
+        <p:blipFill>
+          <a:blip r:embed="rId3"/>
+          <a:stretch>
+            <a:fillRect/>
+          </a:stretch>
+        </p:blipFill>
+        <p:spPr>
+          <a:xfrm>
+            <a:off x="10198768" y="3106151"/>
+            <a:ext cx="1383632" cy="1383632"/>
+          </a:xfrm>
+          <a:prstGeom prst="rect">
+            <a:avLst/>
+          </a:prstGeom>
+        </p:spPr>
+      </p:pic>
+      <p:sp>
+        <p:nvSpPr>
+          <p:cNvPr id="16" name="TextBox 15">
+            <a:extLst>
+              <a:ext uri="{FF2B5EF4-FFF2-40B4-BE49-F238E27FC236}">
+                <a16:creationId xmlns:a16="http://schemas.microsoft.com/office/drawing/2014/main" id="{7E97ACC2-B084-4E15-BE9B-EC679B1F6845}"/>
+              </a:ext>
+            </a:extLst>
+          </p:cNvPr>
+          <p:cNvSpPr txBox="1"/>
+          <p:nvPr/>
+        </p:nvSpPr>
+        <p:spPr>
+          <a:xfrm>
+            <a:off x="9767637" y="2855496"/>
+            <a:ext cx="2245894" cy="369332"/>
+          </a:xfrm>
+          <a:prstGeom prst="rect">
+            <a:avLst/>
+          </a:prstGeom>
+          <a:noFill/>
+        </p:spPr>
+        <p:txBody>
+          <a:bodyPr wrap="square" rtlCol="0">
+            <a:spAutoFit/>
+          </a:bodyPr>
+          <a:lstStyle/>
+          <a:p>
+            <a:pPr algn="ctr"/>
+            <a:r>
+              <a:rPr lang="it-IT" dirty="0"/>
+              <a:t>No Missing Values</a:t>
+            </a:r>
+            <a:endParaRPr lang="en-US" dirty="0"/>
+          </a:p>
+        </p:txBody>
+      </p:sp>
+    </p:spTree>
+    <p:extLst>
+      <p:ext uri="{BB962C8B-B14F-4D97-AF65-F5344CB8AC3E}">
+        <p14:creationId xmlns:p14="http://schemas.microsoft.com/office/powerpoint/2010/main" val="289913623"/>
+      </p:ext>
+    </p:extLst>
+  </p:cSld>
+  <p:clrMapOvr>
+    <a:masterClrMapping/>
+  </p:clrMapOvr>
+  <mc:AlternateContent xmlns:mc="http://schemas.openxmlformats.org/markup-compatibility/2006" xmlns:p159="http://schemas.microsoft.com/office/powerpoint/2015/09/main">
+    <mc:Choice Requires="p159">
+      <p:transition spd="slow">
+        <p159:morph option="byObject"/>
+      </p:transition>
+    </mc:Choice>
+    <mc:Fallback xmlns="">
+      <p:transition spd="slow">
+        <p:fade/>
+      </p:transition>
+    </mc:Fallback>
+  </mc:AlternateContent>
+</p:sld>
+</file>
+
+<file path=ppt/slides/slide36.xml><?xml version="1.0" encoding="utf-8"?>
+<p:sld xmlns:a="http://schemas.openxmlformats.org/drawingml/2006/main" xmlns:r="http://schemas.openxmlformats.org/officeDocument/2006/relationships" xmlns:p="http://schemas.openxmlformats.org/presentationml/2006/main">
+  <p:cSld>
+    <p:spTree>
+      <p:nvGrpSpPr>
+        <p:cNvPr id="1" name=""/>
+        <p:cNvGrpSpPr/>
+        <p:nvPr/>
+      </p:nvGrpSpPr>
+      <p:grpSpPr>
+        <a:xfrm>
+          <a:off x="0" y="0"/>
+          <a:ext cx="0" cy="0"/>
+          <a:chOff x="0" y="0"/>
+          <a:chExt cx="0" cy="0"/>
+        </a:xfrm>
+      </p:grpSpPr>
+      <p:sp>
+        <p:nvSpPr>
           <p:cNvPr id="2" name="Title 1">
             <a:extLst>
               <a:ext uri="{FF2B5EF4-FFF2-40B4-BE49-F238E27FC236}">
@@ -11832,7 +13899,7 @@
 </p:sld>
 </file>
 
-<file path=ppt/slides/slide34.xml><?xml version="1.0" encoding="utf-8"?>
+<file path=ppt/slides/slide37.xml><?xml version="1.0" encoding="utf-8"?>
 <p:sld xmlns:a="http://schemas.openxmlformats.org/drawingml/2006/main" xmlns:r="http://schemas.openxmlformats.org/officeDocument/2006/relationships" xmlns:p="http://schemas.openxmlformats.org/presentationml/2006/main">
   <p:cSld>
     <p:spTree>
@@ -12183,7 +14250,7 @@
 </p:sld>
 </file>
 
-<file path=ppt/slides/slide35.xml><?xml version="1.0" encoding="utf-8"?>
+<file path=ppt/slides/slide38.xml><?xml version="1.0" encoding="utf-8"?>
 <p:sld xmlns:a="http://schemas.openxmlformats.org/drawingml/2006/main" xmlns:r="http://schemas.openxmlformats.org/officeDocument/2006/relationships" xmlns:p="http://schemas.openxmlformats.org/presentationml/2006/main">
   <p:cSld>
     <p:spTree>
@@ -12552,7 +14619,7 @@
 </p:sld>
 </file>
 
-<file path=ppt/slides/slide36.xml><?xml version="1.0" encoding="utf-8"?>
+<file path=ppt/slides/slide39.xml><?xml version="1.0" encoding="utf-8"?>
 <p:sld xmlns:a="http://schemas.openxmlformats.org/drawingml/2006/main" xmlns:r="http://schemas.openxmlformats.org/officeDocument/2006/relationships" xmlns:p="http://schemas.openxmlformats.org/presentationml/2006/main">
   <p:cSld>
     <p:spTree>
@@ -13023,216 +15090,6 @@
     <p:extLst>
       <p:ext uri="{BB962C8B-B14F-4D97-AF65-F5344CB8AC3E}">
         <p14:creationId xmlns:p14="http://schemas.microsoft.com/office/powerpoint/2010/main" val="1747298928"/>
-      </p:ext>
-    </p:extLst>
-  </p:cSld>
-  <p:clrMapOvr>
-    <a:masterClrMapping/>
-  </p:clrMapOvr>
-  <mc:AlternateContent xmlns:mc="http://schemas.openxmlformats.org/markup-compatibility/2006" xmlns:p159="http://schemas.microsoft.com/office/powerpoint/2015/09/main">
-    <mc:Choice Requires="p159">
-      <p:transition spd="slow">
-        <p159:morph option="byObject"/>
-      </p:transition>
-    </mc:Choice>
-    <mc:Fallback xmlns="">
-      <p:transition spd="slow">
-        <p:fade/>
-      </p:transition>
-    </mc:Fallback>
-  </mc:AlternateContent>
-</p:sld>
-</file>
-
-<file path=ppt/slides/slide37.xml><?xml version="1.0" encoding="utf-8"?>
-<p:sld xmlns:a="http://schemas.openxmlformats.org/drawingml/2006/main" xmlns:r="http://schemas.openxmlformats.org/officeDocument/2006/relationships" xmlns:p="http://schemas.openxmlformats.org/presentationml/2006/main">
-  <p:cSld>
-    <p:spTree>
-      <p:nvGrpSpPr>
-        <p:cNvPr id="1" name=""/>
-        <p:cNvGrpSpPr/>
-        <p:nvPr/>
-      </p:nvGrpSpPr>
-      <p:grpSpPr>
-        <a:xfrm>
-          <a:off x="0" y="0"/>
-          <a:ext cx="0" cy="0"/>
-          <a:chOff x="0" y="0"/>
-          <a:chExt cx="0" cy="0"/>
-        </a:xfrm>
-      </p:grpSpPr>
-      <p:graphicFrame>
-        <p:nvGraphicFramePr>
-          <p:cNvPr id="4" name="Chart 3">
-            <a:extLst>
-              <a:ext uri="{FF2B5EF4-FFF2-40B4-BE49-F238E27FC236}">
-                <a16:creationId xmlns:a16="http://schemas.microsoft.com/office/drawing/2014/main" id="{1E6EDE02-5888-4D59-B9D2-2A6DB51F3CF2}"/>
-              </a:ext>
-            </a:extLst>
-          </p:cNvPr>
-          <p:cNvGraphicFramePr/>
-          <p:nvPr>
-            <p:extLst>
-              <p:ext uri="{D42A27DB-BD31-4B8C-83A1-F6EECF244321}">
-                <p14:modId xmlns:p14="http://schemas.microsoft.com/office/powerpoint/2010/main" val="3490993891"/>
-              </p:ext>
-            </p:extLst>
-          </p:nvPr>
-        </p:nvGraphicFramePr>
-        <p:xfrm>
-          <a:off x="2967579" y="1343386"/>
-          <a:ext cx="6256841" cy="4171227"/>
-        </p:xfrm>
-        <a:graphic>
-          <a:graphicData uri="http://schemas.openxmlformats.org/drawingml/2006/chart">
-            <c:chart xmlns:c="http://schemas.openxmlformats.org/drawingml/2006/chart" xmlns:r="http://schemas.openxmlformats.org/officeDocument/2006/relationships" r:id="rId2"/>
-          </a:graphicData>
-        </a:graphic>
-      </p:graphicFrame>
-      <p:sp>
-        <p:nvSpPr>
-          <p:cNvPr id="5" name="TextBox 4">
-            <a:extLst>
-              <a:ext uri="{FF2B5EF4-FFF2-40B4-BE49-F238E27FC236}">
-                <a16:creationId xmlns:a16="http://schemas.microsoft.com/office/drawing/2014/main" id="{2DDB85C5-949E-4452-A569-0502A3BA6778}"/>
-              </a:ext>
-            </a:extLst>
-          </p:cNvPr>
-          <p:cNvSpPr txBox="1"/>
-          <p:nvPr/>
-        </p:nvSpPr>
-        <p:spPr>
-          <a:xfrm>
-            <a:off x="0" y="0"/>
-            <a:ext cx="3895725" cy="369332"/>
-          </a:xfrm>
-          <a:prstGeom prst="rect">
-            <a:avLst/>
-          </a:prstGeom>
-          <a:noFill/>
-        </p:spPr>
-        <p:txBody>
-          <a:bodyPr wrap="square" rtlCol="0">
-            <a:spAutoFit/>
-          </a:bodyPr>
-          <a:lstStyle/>
-          <a:p>
-            <a:r>
-              <a:rPr lang="it-IT" u="sng" dirty="0"/>
-              <a:t>Eligibility based on agenda codes</a:t>
-            </a:r>
-            <a:endParaRPr lang="nl-NL" u="sng" dirty="0"/>
-          </a:p>
-        </p:txBody>
-      </p:sp>
-      <mc:AlternateContent xmlns:mc="http://schemas.openxmlformats.org/markup-compatibility/2006" xmlns:a14="http://schemas.microsoft.com/office/drawing/2010/main">
-        <mc:Choice Requires="a14">
-          <p:sp>
-            <p:nvSpPr>
-              <p:cNvPr id="6" name="TextBox 5">
-                <a:extLst>
-                  <a:ext uri="{FF2B5EF4-FFF2-40B4-BE49-F238E27FC236}">
-                    <a16:creationId xmlns:a16="http://schemas.microsoft.com/office/drawing/2014/main" id="{E769CF4A-89C6-4175-8EB5-AA434C76692C}"/>
-                  </a:ext>
-                </a:extLst>
-              </p:cNvPr>
-              <p:cNvSpPr txBox="1"/>
-              <p:nvPr/>
-            </p:nvSpPr>
-            <p:spPr>
-              <a:xfrm>
-                <a:off x="3895725" y="1112553"/>
-                <a:ext cx="3781425" cy="461665"/>
-              </a:xfrm>
-              <a:prstGeom prst="rect">
-                <a:avLst/>
-              </a:prstGeom>
-              <a:noFill/>
-            </p:spPr>
-            <p:txBody>
-              <a:bodyPr wrap="square" rtlCol="0">
-                <a:spAutoFit/>
-              </a:bodyPr>
-              <a:lstStyle/>
-              <a:p>
-                <a:pPr algn="ctr"/>
-                <a:r>
-                  <a:rPr lang="it-IT" sz="2400" dirty="0"/>
-                  <a:t>Agenda </a:t>
-                </a:r>
-                <a14:m>
-                  <m:oMath xmlns:m="http://schemas.openxmlformats.org/officeDocument/2006/math">
-                    <m:r>
-                      <a:rPr lang="it-IT" sz="2400" i="1" smtClean="0">
-                        <a:latin typeface="Cambria Math" panose="02040503050406030204" pitchFamily="18" charset="0"/>
-                        <a:ea typeface="Cambria Math" panose="02040503050406030204" pitchFamily="18" charset="0"/>
-                      </a:rPr>
-                      <m:t>∩</m:t>
-                    </m:r>
-                  </m:oMath>
-                </a14:m>
-                <a:r>
-                  <a:rPr lang="nl-NL" sz="2400" dirty="0"/>
-                  <a:t> </a:t>
-                </a:r>
-                <a:r>
-                  <a:rPr lang="it-IT" sz="2400" dirty="0"/>
-                  <a:t>Lab Measures</a:t>
-                </a:r>
-                <a:endParaRPr lang="nl-NL" sz="2400" dirty="0"/>
-              </a:p>
-            </p:txBody>
-          </p:sp>
-        </mc:Choice>
-        <mc:Fallback xmlns="">
-          <p:sp>
-            <p:nvSpPr>
-              <p:cNvPr id="6" name="TextBox 5">
-                <a:extLst>
-                  <a:ext uri="{FF2B5EF4-FFF2-40B4-BE49-F238E27FC236}">
-                    <a16:creationId xmlns:a16="http://schemas.microsoft.com/office/drawing/2014/main" id="{E769CF4A-89C6-4175-8EB5-AA434C76692C}"/>
-                  </a:ext>
-                </a:extLst>
-              </p:cNvPr>
-              <p:cNvSpPr txBox="1">
-                <a:spLocks noRot="1" noChangeAspect="1" noMove="1" noResize="1" noEditPoints="1" noAdjustHandles="1" noChangeArrowheads="1" noChangeShapeType="1" noTextEdit="1"/>
-              </p:cNvSpPr>
-              <p:nvPr/>
-            </p:nvSpPr>
-            <p:spPr>
-              <a:xfrm>
-                <a:off x="3895725" y="1112553"/>
-                <a:ext cx="3781425" cy="461665"/>
-              </a:xfrm>
-              <a:prstGeom prst="rect">
-                <a:avLst/>
-              </a:prstGeom>
-              <a:blipFill>
-                <a:blip r:embed="rId3"/>
-                <a:stretch>
-                  <a:fillRect t="-10667" b="-30667"/>
-                </a:stretch>
-              </a:blipFill>
-            </p:spPr>
-            <p:txBody>
-              <a:bodyPr/>
-              <a:lstStyle/>
-              <a:p>
-                <a:r>
-                  <a:rPr lang="nl-NL">
-                    <a:noFill/>
-                  </a:rPr>
-                  <a:t> </a:t>
-                </a:r>
-              </a:p>
-            </p:txBody>
-          </p:sp>
-        </mc:Fallback>
-      </mc:AlternateContent>
-    </p:spTree>
-    <p:extLst>
-      <p:ext uri="{BB962C8B-B14F-4D97-AF65-F5344CB8AC3E}">
-        <p14:creationId xmlns:p14="http://schemas.microsoft.com/office/powerpoint/2010/main" val="2652313884"/>
       </p:ext>
     </p:extLst>
   </p:cSld>
@@ -13644,6 +15501,216 @@
     <p:extLst>
       <p:ext uri="{BB962C8B-B14F-4D97-AF65-F5344CB8AC3E}">
         <p14:creationId xmlns:p14="http://schemas.microsoft.com/office/powerpoint/2010/main" val="1651137104"/>
+      </p:ext>
+    </p:extLst>
+  </p:cSld>
+  <p:clrMapOvr>
+    <a:masterClrMapping/>
+  </p:clrMapOvr>
+  <mc:AlternateContent xmlns:mc="http://schemas.openxmlformats.org/markup-compatibility/2006" xmlns:p159="http://schemas.microsoft.com/office/powerpoint/2015/09/main">
+    <mc:Choice Requires="p159">
+      <p:transition spd="slow">
+        <p159:morph option="byObject"/>
+      </p:transition>
+    </mc:Choice>
+    <mc:Fallback xmlns="">
+      <p:transition spd="slow">
+        <p:fade/>
+      </p:transition>
+    </mc:Fallback>
+  </mc:AlternateContent>
+</p:sld>
+</file>
+
+<file path=ppt/slides/slide40.xml><?xml version="1.0" encoding="utf-8"?>
+<p:sld xmlns:a="http://schemas.openxmlformats.org/drawingml/2006/main" xmlns:r="http://schemas.openxmlformats.org/officeDocument/2006/relationships" xmlns:p="http://schemas.openxmlformats.org/presentationml/2006/main">
+  <p:cSld>
+    <p:spTree>
+      <p:nvGrpSpPr>
+        <p:cNvPr id="1" name=""/>
+        <p:cNvGrpSpPr/>
+        <p:nvPr/>
+      </p:nvGrpSpPr>
+      <p:grpSpPr>
+        <a:xfrm>
+          <a:off x="0" y="0"/>
+          <a:ext cx="0" cy="0"/>
+          <a:chOff x="0" y="0"/>
+          <a:chExt cx="0" cy="0"/>
+        </a:xfrm>
+      </p:grpSpPr>
+      <p:graphicFrame>
+        <p:nvGraphicFramePr>
+          <p:cNvPr id="4" name="Chart 3">
+            <a:extLst>
+              <a:ext uri="{FF2B5EF4-FFF2-40B4-BE49-F238E27FC236}">
+                <a16:creationId xmlns:a16="http://schemas.microsoft.com/office/drawing/2014/main" id="{1E6EDE02-5888-4D59-B9D2-2A6DB51F3CF2}"/>
+              </a:ext>
+            </a:extLst>
+          </p:cNvPr>
+          <p:cNvGraphicFramePr/>
+          <p:nvPr>
+            <p:extLst>
+              <p:ext uri="{D42A27DB-BD31-4B8C-83A1-F6EECF244321}">
+                <p14:modId xmlns:p14="http://schemas.microsoft.com/office/powerpoint/2010/main" val="3490993891"/>
+              </p:ext>
+            </p:extLst>
+          </p:nvPr>
+        </p:nvGraphicFramePr>
+        <p:xfrm>
+          <a:off x="2967579" y="1343386"/>
+          <a:ext cx="6256841" cy="4171227"/>
+        </p:xfrm>
+        <a:graphic>
+          <a:graphicData uri="http://schemas.openxmlformats.org/drawingml/2006/chart">
+            <c:chart xmlns:c="http://schemas.openxmlformats.org/drawingml/2006/chart" xmlns:r="http://schemas.openxmlformats.org/officeDocument/2006/relationships" r:id="rId2"/>
+          </a:graphicData>
+        </a:graphic>
+      </p:graphicFrame>
+      <p:sp>
+        <p:nvSpPr>
+          <p:cNvPr id="5" name="TextBox 4">
+            <a:extLst>
+              <a:ext uri="{FF2B5EF4-FFF2-40B4-BE49-F238E27FC236}">
+                <a16:creationId xmlns:a16="http://schemas.microsoft.com/office/drawing/2014/main" id="{2DDB85C5-949E-4452-A569-0502A3BA6778}"/>
+              </a:ext>
+            </a:extLst>
+          </p:cNvPr>
+          <p:cNvSpPr txBox="1"/>
+          <p:nvPr/>
+        </p:nvSpPr>
+        <p:spPr>
+          <a:xfrm>
+            <a:off x="0" y="0"/>
+            <a:ext cx="3895725" cy="369332"/>
+          </a:xfrm>
+          <a:prstGeom prst="rect">
+            <a:avLst/>
+          </a:prstGeom>
+          <a:noFill/>
+        </p:spPr>
+        <p:txBody>
+          <a:bodyPr wrap="square" rtlCol="0">
+            <a:spAutoFit/>
+          </a:bodyPr>
+          <a:lstStyle/>
+          <a:p>
+            <a:r>
+              <a:rPr lang="it-IT" u="sng" dirty="0"/>
+              <a:t>Eligibility based on agenda codes</a:t>
+            </a:r>
+            <a:endParaRPr lang="nl-NL" u="sng" dirty="0"/>
+          </a:p>
+        </p:txBody>
+      </p:sp>
+      <mc:AlternateContent xmlns:mc="http://schemas.openxmlformats.org/markup-compatibility/2006" xmlns:a14="http://schemas.microsoft.com/office/drawing/2010/main">
+        <mc:Choice Requires="a14">
+          <p:sp>
+            <p:nvSpPr>
+              <p:cNvPr id="6" name="TextBox 5">
+                <a:extLst>
+                  <a:ext uri="{FF2B5EF4-FFF2-40B4-BE49-F238E27FC236}">
+                    <a16:creationId xmlns:a16="http://schemas.microsoft.com/office/drawing/2014/main" id="{E769CF4A-89C6-4175-8EB5-AA434C76692C}"/>
+                  </a:ext>
+                </a:extLst>
+              </p:cNvPr>
+              <p:cNvSpPr txBox="1"/>
+              <p:nvPr/>
+            </p:nvSpPr>
+            <p:spPr>
+              <a:xfrm>
+                <a:off x="3895725" y="1112553"/>
+                <a:ext cx="3781425" cy="461665"/>
+              </a:xfrm>
+              <a:prstGeom prst="rect">
+                <a:avLst/>
+              </a:prstGeom>
+              <a:noFill/>
+            </p:spPr>
+            <p:txBody>
+              <a:bodyPr wrap="square" rtlCol="0">
+                <a:spAutoFit/>
+              </a:bodyPr>
+              <a:lstStyle/>
+              <a:p>
+                <a:pPr algn="ctr"/>
+                <a:r>
+                  <a:rPr lang="it-IT" sz="2400" dirty="0"/>
+                  <a:t>Agenda </a:t>
+                </a:r>
+                <a14:m>
+                  <m:oMath xmlns:m="http://schemas.openxmlformats.org/officeDocument/2006/math">
+                    <m:r>
+                      <a:rPr lang="it-IT" sz="2400" i="1" smtClean="0">
+                        <a:latin typeface="Cambria Math" panose="02040503050406030204" pitchFamily="18" charset="0"/>
+                        <a:ea typeface="Cambria Math" panose="02040503050406030204" pitchFamily="18" charset="0"/>
+                      </a:rPr>
+                      <m:t>∩</m:t>
+                    </m:r>
+                  </m:oMath>
+                </a14:m>
+                <a:r>
+                  <a:rPr lang="nl-NL" sz="2400" dirty="0"/>
+                  <a:t> </a:t>
+                </a:r>
+                <a:r>
+                  <a:rPr lang="it-IT" sz="2400" dirty="0"/>
+                  <a:t>Lab Measures</a:t>
+                </a:r>
+                <a:endParaRPr lang="nl-NL" sz="2400" dirty="0"/>
+              </a:p>
+            </p:txBody>
+          </p:sp>
+        </mc:Choice>
+        <mc:Fallback xmlns="">
+          <p:sp>
+            <p:nvSpPr>
+              <p:cNvPr id="6" name="TextBox 5">
+                <a:extLst>
+                  <a:ext uri="{FF2B5EF4-FFF2-40B4-BE49-F238E27FC236}">
+                    <a16:creationId xmlns:a16="http://schemas.microsoft.com/office/drawing/2014/main" id="{E769CF4A-89C6-4175-8EB5-AA434C76692C}"/>
+                  </a:ext>
+                </a:extLst>
+              </p:cNvPr>
+              <p:cNvSpPr txBox="1">
+                <a:spLocks noRot="1" noChangeAspect="1" noMove="1" noResize="1" noEditPoints="1" noAdjustHandles="1" noChangeArrowheads="1" noChangeShapeType="1" noTextEdit="1"/>
+              </p:cNvSpPr>
+              <p:nvPr/>
+            </p:nvSpPr>
+            <p:spPr>
+              <a:xfrm>
+                <a:off x="3895725" y="1112553"/>
+                <a:ext cx="3781425" cy="461665"/>
+              </a:xfrm>
+              <a:prstGeom prst="rect">
+                <a:avLst/>
+              </a:prstGeom>
+              <a:blipFill>
+                <a:blip r:embed="rId3"/>
+                <a:stretch>
+                  <a:fillRect t="-10667" b="-30667"/>
+                </a:stretch>
+              </a:blipFill>
+            </p:spPr>
+            <p:txBody>
+              <a:bodyPr/>
+              <a:lstStyle/>
+              <a:p>
+                <a:r>
+                  <a:rPr lang="nl-NL">
+                    <a:noFill/>
+                  </a:rPr>
+                  <a:t> </a:t>
+                </a:r>
+              </a:p>
+            </p:txBody>
+          </p:sp>
+        </mc:Fallback>
+      </mc:AlternateContent>
+    </p:spTree>
+    <p:extLst>
+      <p:ext uri="{BB962C8B-B14F-4D97-AF65-F5344CB8AC3E}">
+        <p14:creationId xmlns:p14="http://schemas.microsoft.com/office/powerpoint/2010/main" val="2652313884"/>
       </p:ext>
     </p:extLst>
   </p:cSld>

--- a/assets/ppt/data_exploration.pptx
+++ b/assets/ppt/data_exploration.pptx
@@ -1059,7 +1059,7 @@
           <a:p>
             <a:fld id="{511A67EE-E303-4967-962F-9A28980F7F51}" type="datetimeFigureOut">
               <a:rPr lang="nl-NL" smtClean="0"/>
-              <a:t>9-9-2024</a:t>
+              <a:t>11-9-2024</a:t>
             </a:fld>
             <a:endParaRPr lang="nl-NL"/>
           </a:p>
@@ -1476,7 +1476,7 @@
           <a:p>
             <a:fld id="{FED566F3-1D76-4AEC-ABE9-AFABCF495913}" type="datetime1">
               <a:rPr lang="nl-NL" smtClean="0"/>
-              <a:t>9-9-2024</a:t>
+              <a:t>11-9-2024</a:t>
             </a:fld>
             <a:endParaRPr lang="nl-NL"/>
           </a:p>
@@ -1688,7 +1688,7 @@
           <a:p>
             <a:fld id="{BC7E55A1-B228-4CF1-BFC3-6AC3B8574AC2}" type="datetime1">
               <a:rPr lang="nl-NL" smtClean="0"/>
-              <a:t>9-9-2024</a:t>
+              <a:t>11-9-2024</a:t>
             </a:fld>
             <a:endParaRPr lang="nl-NL"/>
           </a:p>
@@ -1910,7 +1910,7 @@
           <a:p>
             <a:fld id="{31AEBC58-6519-439D-8982-F0178170B57B}" type="datetime1">
               <a:rPr lang="nl-NL" smtClean="0"/>
-              <a:t>9-9-2024</a:t>
+              <a:t>11-9-2024</a:t>
             </a:fld>
             <a:endParaRPr lang="nl-NL"/>
           </a:p>
@@ -2122,7 +2122,7 @@
           <a:p>
             <a:fld id="{86DED964-D172-498F-BB83-2F7DE2692B37}" type="datetime1">
               <a:rPr lang="nl-NL" smtClean="0"/>
-              <a:t>9-9-2024</a:t>
+              <a:t>11-9-2024</a:t>
             </a:fld>
             <a:endParaRPr lang="nl-NL"/>
           </a:p>
@@ -2410,7 +2410,7 @@
           <a:p>
             <a:fld id="{230F72AC-D91D-48F5-81B4-4889AEA39D06}" type="datetime1">
               <a:rPr lang="nl-NL" smtClean="0"/>
-              <a:t>9-9-2024</a:t>
+              <a:t>11-9-2024</a:t>
             </a:fld>
             <a:endParaRPr lang="nl-NL"/>
           </a:p>
@@ -2690,7 +2690,7 @@
           <a:p>
             <a:fld id="{A0669485-26A9-497C-AD22-BCEA88DF9055}" type="datetime1">
               <a:rPr lang="nl-NL" smtClean="0"/>
-              <a:t>9-9-2024</a:t>
+              <a:t>11-9-2024</a:t>
             </a:fld>
             <a:endParaRPr lang="nl-NL"/>
           </a:p>
@@ -3117,7 +3117,7 @@
           <a:p>
             <a:fld id="{6216D00C-0C62-40DF-B6FF-B9A70701552F}" type="datetime1">
               <a:rPr lang="nl-NL" smtClean="0"/>
-              <a:t>9-9-2024</a:t>
+              <a:t>11-9-2024</a:t>
             </a:fld>
             <a:endParaRPr lang="nl-NL"/>
           </a:p>
@@ -3271,7 +3271,7 @@
           <a:p>
             <a:fld id="{88FE9515-DD39-459B-B4EF-789D74C861A5}" type="datetime1">
               <a:rPr lang="nl-NL" smtClean="0"/>
-              <a:t>9-9-2024</a:t>
+              <a:t>11-9-2024</a:t>
             </a:fld>
             <a:endParaRPr lang="nl-NL"/>
           </a:p>
@@ -3396,7 +3396,7 @@
           <a:p>
             <a:fld id="{DFA27954-A76F-4E23-8576-A7D9667CDBCC}" type="datetime1">
               <a:rPr lang="nl-NL" smtClean="0"/>
-              <a:t>9-9-2024</a:t>
+              <a:t>11-9-2024</a:t>
             </a:fld>
             <a:endParaRPr lang="nl-NL"/>
           </a:p>
@@ -3721,7 +3721,7 @@
           <a:p>
             <a:fld id="{53C17D54-D850-41AA-94F6-0F7316E4F326}" type="datetime1">
               <a:rPr lang="nl-NL" smtClean="0"/>
-              <a:t>9-9-2024</a:t>
+              <a:t>11-9-2024</a:t>
             </a:fld>
             <a:endParaRPr lang="nl-NL"/>
           </a:p>
@@ -4022,7 +4022,7 @@
           <a:p>
             <a:fld id="{0596A96E-3739-43D3-93E5-DAA507EA7B79}" type="datetime1">
               <a:rPr lang="nl-NL" smtClean="0"/>
-              <a:t>9-9-2024</a:t>
+              <a:t>11-9-2024</a:t>
             </a:fld>
             <a:endParaRPr lang="nl-NL"/>
           </a:p>
@@ -4277,7 +4277,7 @@
           <a:p>
             <a:fld id="{CFBB0748-A22F-4137-ADB1-6D5A09F7B1DF}" type="datetime1">
               <a:rPr lang="nl-NL" smtClean="0"/>
-              <a:t>9-9-2024</a:t>
+              <a:t>11-9-2024</a:t>
             </a:fld>
             <a:endParaRPr lang="nl-NL"/>
           </a:p>
@@ -11930,8 +11930,8 @@
           </a:prstGeom>
         </p:spPr>
       </p:pic>
-      <mc:AlternateContent xmlns:mc="http://schemas.openxmlformats.org/markup-compatibility/2006">
-        <mc:Choice xmlns:a14="http://schemas.microsoft.com/office/drawing/2010/main" Requires="a14">
+      <mc:AlternateContent xmlns:mc="http://schemas.openxmlformats.org/markup-compatibility/2006" xmlns:a14="http://schemas.microsoft.com/office/drawing/2010/main">
+        <mc:Choice Requires="a14">
           <p:sp>
             <p:nvSpPr>
               <p:cNvPr id="24" name="Rectangle 23">
@@ -11959,6 +11959,7 @@
               </a:bodyPr>
               <a:lstStyle/>
               <a:p>
+                <a:pPr/>
                 <a14:m>
                   <m:oMathPara xmlns:m="http://schemas.openxmlformats.org/officeDocument/2006/math">
                     <m:oMathParaPr>
@@ -12046,7 +12047,7 @@
             </p:txBody>
           </p:sp>
         </mc:Choice>
-        <mc:Fallback>
+        <mc:Fallback xmlns="">
           <p:sp>
             <p:nvSpPr>
               <p:cNvPr id="24" name="Rectangle 23">
@@ -12091,8 +12092,8 @@
           </p:sp>
         </mc:Fallback>
       </mc:AlternateContent>
-      <mc:AlternateContent xmlns:mc="http://schemas.openxmlformats.org/markup-compatibility/2006">
-        <mc:Choice xmlns:a14="http://schemas.microsoft.com/office/drawing/2010/main" Requires="a14">
+      <mc:AlternateContent xmlns:mc="http://schemas.openxmlformats.org/markup-compatibility/2006" xmlns:a14="http://schemas.microsoft.com/office/drawing/2010/main">
+        <mc:Choice Requires="a14">
           <p:sp>
             <p:nvSpPr>
               <p:cNvPr id="25" name="TextBox 24">
@@ -12121,6 +12122,7 @@
               </a:bodyPr>
               <a:lstStyle/>
               <a:p>
+                <a:pPr/>
                 <a14:m>
                   <m:oMathPara xmlns:m="http://schemas.openxmlformats.org/officeDocument/2006/math">
                     <m:oMathParaPr>
@@ -12296,7 +12298,7 @@
             </p:txBody>
           </p:sp>
         </mc:Choice>
-        <mc:Fallback>
+        <mc:Fallback xmlns="">
           <p:sp>
             <p:nvSpPr>
               <p:cNvPr id="25" name="TextBox 24">
@@ -12892,8 +12894,8 @@
           </p:txBody>
         </p:sp>
       </p:grpSp>
-      <mc:AlternateContent xmlns:mc="http://schemas.openxmlformats.org/markup-compatibility/2006">
-        <mc:Choice xmlns:a14="http://schemas.microsoft.com/office/drawing/2010/main" Requires="a14">
+      <mc:AlternateContent xmlns:mc="http://schemas.openxmlformats.org/markup-compatibility/2006" xmlns:a14="http://schemas.microsoft.com/office/drawing/2010/main">
+        <mc:Choice Requires="a14">
           <p:sp>
             <p:nvSpPr>
               <p:cNvPr id="11" name="Rectangle: Rounded Corners 10">
@@ -13095,7 +13097,7 @@
             </p:txBody>
           </p:sp>
         </mc:Choice>
-        <mc:Fallback>
+        <mc:Fallback xmlns="">
           <p:sp>
             <p:nvSpPr>
               <p:cNvPr id="11" name="Rectangle: Rounded Corners 10">
@@ -13218,8 +13220,8 @@
           </a:p>
         </p:txBody>
       </p:sp>
-      <mc:AlternateContent xmlns:mc="http://schemas.openxmlformats.org/markup-compatibility/2006">
-        <mc:Choice xmlns:a14="http://schemas.microsoft.com/office/drawing/2010/main" Requires="a14">
+      <mc:AlternateContent xmlns:mc="http://schemas.openxmlformats.org/markup-compatibility/2006" xmlns:a14="http://schemas.microsoft.com/office/drawing/2010/main">
+        <mc:Choice Requires="a14">
           <p:sp>
             <p:nvSpPr>
               <p:cNvPr id="15" name="TextBox 14">
@@ -13248,6 +13250,7 @@
               </a:bodyPr>
               <a:lstStyle/>
               <a:p>
+                <a:pPr/>
                 <a14:m>
                   <m:oMathPara xmlns:m="http://schemas.openxmlformats.org/officeDocument/2006/math">
                     <m:oMathParaPr>
@@ -13423,7 +13426,7 @@
             </p:txBody>
           </p:sp>
         </mc:Choice>
-        <mc:Fallback>
+        <mc:Fallback xmlns="">
           <p:sp>
             <p:nvSpPr>
               <p:cNvPr id="15" name="TextBox 14">

--- a/assets/ppt/data_exploration.pptx
+++ b/assets/ppt/data_exploration.pptx
@@ -4762,7 +4762,7 @@
 </file>
 
 <file path=ppt/slides/slide10.xml><?xml version="1.0" encoding="utf-8"?>
-<p:sld xmlns:a="http://schemas.openxmlformats.org/drawingml/2006/main" xmlns:r="http://schemas.openxmlformats.org/officeDocument/2006/relationships" xmlns:p="http://schemas.openxmlformats.org/presentationml/2006/main">
+<p:sld xmlns:a="http://schemas.openxmlformats.org/drawingml/2006/main" xmlns:r="http://schemas.openxmlformats.org/officeDocument/2006/relationships" xmlns:p="http://schemas.openxmlformats.org/presentationml/2006/main" show="0">
   <p:cSld>
     <p:spTree>
       <p:nvGrpSpPr>
@@ -4940,13 +4940,13 @@
   <p:clrMapOvr>
     <a:masterClrMapping/>
   </p:clrMapOvr>
-  <mc:AlternateContent xmlns:mc="http://schemas.openxmlformats.org/markup-compatibility/2006" xmlns:p159="http://schemas.microsoft.com/office/powerpoint/2015/09/main">
-    <mc:Choice Requires="p159">
+  <mc:AlternateContent xmlns:mc="http://schemas.openxmlformats.org/markup-compatibility/2006">
+    <mc:Choice xmlns:p159="http://schemas.microsoft.com/office/powerpoint/2015/09/main" Requires="p159">
       <p:transition spd="slow">
         <p159:morph option="byObject"/>
       </p:transition>
     </mc:Choice>
-    <mc:Fallback xmlns="">
+    <mc:Fallback>
       <p:transition spd="slow">
         <p:fade/>
       </p:transition>
@@ -4956,7 +4956,7 @@
 </file>
 
 <file path=ppt/slides/slide11.xml><?xml version="1.0" encoding="utf-8"?>
-<p:sld xmlns:a="http://schemas.openxmlformats.org/drawingml/2006/main" xmlns:r="http://schemas.openxmlformats.org/officeDocument/2006/relationships" xmlns:p="http://schemas.openxmlformats.org/presentationml/2006/main">
+<p:sld xmlns:a="http://schemas.openxmlformats.org/drawingml/2006/main" xmlns:r="http://schemas.openxmlformats.org/officeDocument/2006/relationships" xmlns:p="http://schemas.openxmlformats.org/presentationml/2006/main" show="0">
   <p:cSld>
     <p:spTree>
       <p:nvGrpSpPr>
@@ -5054,13 +5054,13 @@
   <p:clrMapOvr>
     <a:masterClrMapping/>
   </p:clrMapOvr>
-  <mc:AlternateContent xmlns:mc="http://schemas.openxmlformats.org/markup-compatibility/2006" xmlns:p159="http://schemas.microsoft.com/office/powerpoint/2015/09/main">
-    <mc:Choice Requires="p159">
+  <mc:AlternateContent xmlns:mc="http://schemas.openxmlformats.org/markup-compatibility/2006">
+    <mc:Choice xmlns:p159="http://schemas.microsoft.com/office/powerpoint/2015/09/main" Requires="p159">
       <p:transition spd="slow">
         <p159:morph option="byObject"/>
       </p:transition>
     </mc:Choice>
-    <mc:Fallback xmlns="">
+    <mc:Fallback>
       <p:transition spd="slow">
         <p:fade/>
       </p:transition>
@@ -5070,7 +5070,7 @@
 </file>
 
 <file path=ppt/slides/slide12.xml><?xml version="1.0" encoding="utf-8"?>
-<p:sld xmlns:a="http://schemas.openxmlformats.org/drawingml/2006/main" xmlns:r="http://schemas.openxmlformats.org/officeDocument/2006/relationships" xmlns:p="http://schemas.openxmlformats.org/presentationml/2006/main">
+<p:sld xmlns:a="http://schemas.openxmlformats.org/drawingml/2006/main" xmlns:r="http://schemas.openxmlformats.org/officeDocument/2006/relationships" xmlns:p="http://schemas.openxmlformats.org/presentationml/2006/main" show="0">
   <p:cSld>
     <p:spTree>
       <p:nvGrpSpPr>
@@ -5168,13 +5168,13 @@
   <p:clrMapOvr>
     <a:masterClrMapping/>
   </p:clrMapOvr>
-  <mc:AlternateContent xmlns:mc="http://schemas.openxmlformats.org/markup-compatibility/2006" xmlns:p159="http://schemas.microsoft.com/office/powerpoint/2015/09/main">
-    <mc:Choice Requires="p159">
+  <mc:AlternateContent xmlns:mc="http://schemas.openxmlformats.org/markup-compatibility/2006">
+    <mc:Choice xmlns:p159="http://schemas.microsoft.com/office/powerpoint/2015/09/main" Requires="p159">
       <p:transition spd="slow">
         <p159:morph option="byObject"/>
       </p:transition>
     </mc:Choice>
-    <mc:Fallback xmlns="">
+    <mc:Fallback>
       <p:transition spd="slow">
         <p:fade/>
       </p:transition>
@@ -5184,7 +5184,7 @@
 </file>
 
 <file path=ppt/slides/slide13.xml><?xml version="1.0" encoding="utf-8"?>
-<p:sld xmlns:a="http://schemas.openxmlformats.org/drawingml/2006/main" xmlns:r="http://schemas.openxmlformats.org/officeDocument/2006/relationships" xmlns:p="http://schemas.openxmlformats.org/presentationml/2006/main">
+<p:sld xmlns:a="http://schemas.openxmlformats.org/drawingml/2006/main" xmlns:r="http://schemas.openxmlformats.org/officeDocument/2006/relationships" xmlns:p="http://schemas.openxmlformats.org/presentationml/2006/main" show="0">
   <p:cSld>
     <p:spTree>
       <p:nvGrpSpPr>
@@ -5318,13 +5318,13 @@
   <p:clrMapOvr>
     <a:masterClrMapping/>
   </p:clrMapOvr>
-  <mc:AlternateContent xmlns:mc="http://schemas.openxmlformats.org/markup-compatibility/2006" xmlns:p159="http://schemas.microsoft.com/office/powerpoint/2015/09/main">
-    <mc:Choice Requires="p159">
+  <mc:AlternateContent xmlns:mc="http://schemas.openxmlformats.org/markup-compatibility/2006">
+    <mc:Choice xmlns:p159="http://schemas.microsoft.com/office/powerpoint/2015/09/main" Requires="p159">
       <p:transition spd="slow">
         <p159:morph option="byObject"/>
       </p:transition>
     </mc:Choice>
-    <mc:Fallback xmlns="">
+    <mc:Fallback>
       <p:transition spd="slow">
         <p:fade/>
       </p:transition>
@@ -5334,7 +5334,7 @@
 </file>
 
 <file path=ppt/slides/slide14.xml><?xml version="1.0" encoding="utf-8"?>
-<p:sld xmlns:a="http://schemas.openxmlformats.org/drawingml/2006/main" xmlns:r="http://schemas.openxmlformats.org/officeDocument/2006/relationships" xmlns:p="http://schemas.openxmlformats.org/presentationml/2006/main">
+<p:sld xmlns:a="http://schemas.openxmlformats.org/drawingml/2006/main" xmlns:r="http://schemas.openxmlformats.org/officeDocument/2006/relationships" xmlns:p="http://schemas.openxmlformats.org/presentationml/2006/main" show="0">
   <p:cSld>
     <p:spTree>
       <p:nvGrpSpPr>
@@ -5432,13 +5432,13 @@
   <p:clrMapOvr>
     <a:masterClrMapping/>
   </p:clrMapOvr>
-  <mc:AlternateContent xmlns:mc="http://schemas.openxmlformats.org/markup-compatibility/2006" xmlns:p159="http://schemas.microsoft.com/office/powerpoint/2015/09/main">
-    <mc:Choice Requires="p159">
+  <mc:AlternateContent xmlns:mc="http://schemas.openxmlformats.org/markup-compatibility/2006">
+    <mc:Choice xmlns:p159="http://schemas.microsoft.com/office/powerpoint/2015/09/main" Requires="p159">
       <p:transition spd="slow">
         <p159:morph option="byObject"/>
       </p:transition>
     </mc:Choice>
-    <mc:Fallback xmlns="">
+    <mc:Fallback>
       <p:transition spd="slow">
         <p:fade/>
       </p:transition>
@@ -5448,7 +5448,7 @@
 </file>
 
 <file path=ppt/slides/slide15.xml><?xml version="1.0" encoding="utf-8"?>
-<p:sld xmlns:a="http://schemas.openxmlformats.org/drawingml/2006/main" xmlns:r="http://schemas.openxmlformats.org/officeDocument/2006/relationships" xmlns:p="http://schemas.openxmlformats.org/presentationml/2006/main">
+<p:sld xmlns:a="http://schemas.openxmlformats.org/drawingml/2006/main" xmlns:r="http://schemas.openxmlformats.org/officeDocument/2006/relationships" xmlns:p="http://schemas.openxmlformats.org/presentationml/2006/main" show="0">
   <p:cSld>
     <p:spTree>
       <p:nvGrpSpPr>
@@ -5546,13 +5546,13 @@
   <p:clrMapOvr>
     <a:masterClrMapping/>
   </p:clrMapOvr>
-  <mc:AlternateContent xmlns:mc="http://schemas.openxmlformats.org/markup-compatibility/2006" xmlns:p159="http://schemas.microsoft.com/office/powerpoint/2015/09/main">
-    <mc:Choice Requires="p159">
+  <mc:AlternateContent xmlns:mc="http://schemas.openxmlformats.org/markup-compatibility/2006">
+    <mc:Choice xmlns:p159="http://schemas.microsoft.com/office/powerpoint/2015/09/main" Requires="p159">
       <p:transition spd="slow">
         <p159:morph option="byObject"/>
       </p:transition>
     </mc:Choice>
-    <mc:Fallback xmlns="">
+    <mc:Fallback>
       <p:transition spd="slow">
         <p:fade/>
       </p:transition>
@@ -5562,7 +5562,7 @@
 </file>
 
 <file path=ppt/slides/slide16.xml><?xml version="1.0" encoding="utf-8"?>
-<p:sld xmlns:a="http://schemas.openxmlformats.org/drawingml/2006/main" xmlns:r="http://schemas.openxmlformats.org/officeDocument/2006/relationships" xmlns:p="http://schemas.openxmlformats.org/presentationml/2006/main">
+<p:sld xmlns:a="http://schemas.openxmlformats.org/drawingml/2006/main" xmlns:r="http://schemas.openxmlformats.org/officeDocument/2006/relationships" xmlns:p="http://schemas.openxmlformats.org/presentationml/2006/main" show="0">
   <p:cSld>
     <p:spTree>
       <p:nvGrpSpPr>
@@ -5770,13 +5770,13 @@
   <p:clrMapOvr>
     <a:masterClrMapping/>
   </p:clrMapOvr>
-  <mc:AlternateContent xmlns:mc="http://schemas.openxmlformats.org/markup-compatibility/2006" xmlns:p159="http://schemas.microsoft.com/office/powerpoint/2015/09/main">
-    <mc:Choice Requires="p159">
+  <mc:AlternateContent xmlns:mc="http://schemas.openxmlformats.org/markup-compatibility/2006">
+    <mc:Choice xmlns:p159="http://schemas.microsoft.com/office/powerpoint/2015/09/main" Requires="p159">
       <p:transition spd="slow">
         <p159:morph option="byObject"/>
       </p:transition>
     </mc:Choice>
-    <mc:Fallback xmlns="">
+    <mc:Fallback>
       <p:transition spd="slow">
         <p:fade/>
       </p:transition>
@@ -5786,7 +5786,7 @@
 </file>
 
 <file path=ppt/slides/slide17.xml><?xml version="1.0" encoding="utf-8"?>
-<p:sld xmlns:a="http://schemas.openxmlformats.org/drawingml/2006/main" xmlns:r="http://schemas.openxmlformats.org/officeDocument/2006/relationships" xmlns:p="http://schemas.openxmlformats.org/presentationml/2006/main">
+<p:sld xmlns:a="http://schemas.openxmlformats.org/drawingml/2006/main" xmlns:r="http://schemas.openxmlformats.org/officeDocument/2006/relationships" xmlns:p="http://schemas.openxmlformats.org/presentationml/2006/main" show="0">
   <p:cSld>
     <p:spTree>
       <p:nvGrpSpPr>
@@ -6114,13 +6114,13 @@
   <p:clrMapOvr>
     <a:masterClrMapping/>
   </p:clrMapOvr>
-  <mc:AlternateContent xmlns:mc="http://schemas.openxmlformats.org/markup-compatibility/2006" xmlns:p159="http://schemas.microsoft.com/office/powerpoint/2015/09/main">
-    <mc:Choice Requires="p159">
+  <mc:AlternateContent xmlns:mc="http://schemas.openxmlformats.org/markup-compatibility/2006">
+    <mc:Choice xmlns:p159="http://schemas.microsoft.com/office/powerpoint/2015/09/main" Requires="p159">
       <p:transition spd="slow">
         <p159:morph option="byObject"/>
       </p:transition>
     </mc:Choice>
-    <mc:Fallback xmlns="">
+    <mc:Fallback>
       <p:transition spd="slow">
         <p:fade/>
       </p:transition>
@@ -6130,7 +6130,7 @@
 </file>
 
 <file path=ppt/slides/slide18.xml><?xml version="1.0" encoding="utf-8"?>
-<p:sld xmlns:a="http://schemas.openxmlformats.org/drawingml/2006/main" xmlns:r="http://schemas.openxmlformats.org/officeDocument/2006/relationships" xmlns:p="http://schemas.openxmlformats.org/presentationml/2006/main">
+<p:sld xmlns:a="http://schemas.openxmlformats.org/drawingml/2006/main" xmlns:r="http://schemas.openxmlformats.org/officeDocument/2006/relationships" xmlns:p="http://schemas.openxmlformats.org/presentationml/2006/main" show="0">
   <p:cSld>
     <p:spTree>
       <p:nvGrpSpPr>
@@ -6193,13 +6193,13 @@
   <p:clrMapOvr>
     <a:masterClrMapping/>
   </p:clrMapOvr>
-  <mc:AlternateContent xmlns:mc="http://schemas.openxmlformats.org/markup-compatibility/2006" xmlns:p159="http://schemas.microsoft.com/office/powerpoint/2015/09/main">
-    <mc:Choice Requires="p159">
+  <mc:AlternateContent xmlns:mc="http://schemas.openxmlformats.org/markup-compatibility/2006">
+    <mc:Choice xmlns:p159="http://schemas.microsoft.com/office/powerpoint/2015/09/main" Requires="p159">
       <p:transition spd="slow">
         <p159:morph option="byObject"/>
       </p:transition>
     </mc:Choice>
-    <mc:Fallback xmlns="">
+    <mc:Fallback>
       <p:transition spd="slow">
         <p:fade/>
       </p:transition>
@@ -6209,7 +6209,7 @@
 </file>
 
 <file path=ppt/slides/slide19.xml><?xml version="1.0" encoding="utf-8"?>
-<p:sld xmlns:a="http://schemas.openxmlformats.org/drawingml/2006/main" xmlns:r="http://schemas.openxmlformats.org/officeDocument/2006/relationships" xmlns:p="http://schemas.openxmlformats.org/presentationml/2006/main">
+<p:sld xmlns:a="http://schemas.openxmlformats.org/drawingml/2006/main" xmlns:r="http://schemas.openxmlformats.org/officeDocument/2006/relationships" xmlns:p="http://schemas.openxmlformats.org/presentationml/2006/main" show="0">
   <p:cSld>
     <p:spTree>
       <p:nvGrpSpPr>
@@ -7215,13 +7215,13 @@
   <p:clrMapOvr>
     <a:masterClrMapping/>
   </p:clrMapOvr>
-  <mc:AlternateContent xmlns:mc="http://schemas.openxmlformats.org/markup-compatibility/2006" xmlns:p159="http://schemas.microsoft.com/office/powerpoint/2015/09/main">
-    <mc:Choice Requires="p159">
+  <mc:AlternateContent xmlns:mc="http://schemas.openxmlformats.org/markup-compatibility/2006">
+    <mc:Choice xmlns:p159="http://schemas.microsoft.com/office/powerpoint/2015/09/main" Requires="p159">
       <p:transition spd="slow">
         <p159:morph option="byObject"/>
       </p:transition>
     </mc:Choice>
-    <mc:Fallback xmlns="">
+    <mc:Fallback>
       <p:transition spd="slow">
         <p:fade/>
       </p:transition>
@@ -7385,7 +7385,7 @@
 </file>
 
 <file path=ppt/slides/slide20.xml><?xml version="1.0" encoding="utf-8"?>
-<p:sld xmlns:a="http://schemas.openxmlformats.org/drawingml/2006/main" xmlns:r="http://schemas.openxmlformats.org/officeDocument/2006/relationships" xmlns:p="http://schemas.openxmlformats.org/presentationml/2006/main">
+<p:sld xmlns:a="http://schemas.openxmlformats.org/drawingml/2006/main" xmlns:r="http://schemas.openxmlformats.org/officeDocument/2006/relationships" xmlns:p="http://schemas.openxmlformats.org/presentationml/2006/main" show="0">
   <p:cSld>
     <p:spTree>
       <p:nvGrpSpPr>
@@ -9177,13 +9177,13 @@
   <p:clrMapOvr>
     <a:masterClrMapping/>
   </p:clrMapOvr>
-  <mc:AlternateContent xmlns:mc="http://schemas.openxmlformats.org/markup-compatibility/2006" xmlns:p159="http://schemas.microsoft.com/office/powerpoint/2015/09/main">
-    <mc:Choice Requires="p159">
+  <mc:AlternateContent xmlns:mc="http://schemas.openxmlformats.org/markup-compatibility/2006">
+    <mc:Choice xmlns:p159="http://schemas.microsoft.com/office/powerpoint/2015/09/main" Requires="p159">
       <p:transition spd="slow">
         <p159:morph option="byObject"/>
       </p:transition>
     </mc:Choice>
-    <mc:Fallback xmlns="">
+    <mc:Fallback>
       <p:transition spd="slow">
         <p:fade/>
       </p:transition>
@@ -9193,7 +9193,7 @@
 </file>
 
 <file path=ppt/slides/slide21.xml><?xml version="1.0" encoding="utf-8"?>
-<p:sld xmlns:a="http://schemas.openxmlformats.org/drawingml/2006/main" xmlns:r="http://schemas.openxmlformats.org/officeDocument/2006/relationships" xmlns:p="http://schemas.openxmlformats.org/presentationml/2006/main">
+<p:sld xmlns:a="http://schemas.openxmlformats.org/drawingml/2006/main" xmlns:r="http://schemas.openxmlformats.org/officeDocument/2006/relationships" xmlns:p="http://schemas.openxmlformats.org/presentationml/2006/main" show="0">
   <p:cSld>
     <p:spTree>
       <p:nvGrpSpPr>
@@ -9256,13 +9256,13 @@
   <p:clrMapOvr>
     <a:masterClrMapping/>
   </p:clrMapOvr>
-  <mc:AlternateContent xmlns:mc="http://schemas.openxmlformats.org/markup-compatibility/2006" xmlns:p159="http://schemas.microsoft.com/office/powerpoint/2015/09/main">
-    <mc:Choice Requires="p159">
+  <mc:AlternateContent xmlns:mc="http://schemas.openxmlformats.org/markup-compatibility/2006">
+    <mc:Choice xmlns:p159="http://schemas.microsoft.com/office/powerpoint/2015/09/main" Requires="p159">
       <p:transition spd="slow">
         <p159:morph option="byObject"/>
       </p:transition>
     </mc:Choice>
-    <mc:Fallback xmlns="">
+    <mc:Fallback>
       <p:transition spd="slow">
         <p:fade/>
       </p:transition>
@@ -10460,6 +10460,1333 @@
           <a:chExt cx="0" cy="0"/>
         </a:xfrm>
       </p:grpSpPr>
+      <p:pic>
+        <p:nvPicPr>
+          <p:cNvPr id="2" name="Graphic 1" descr="Database">
+            <a:extLst>
+              <a:ext uri="{FF2B5EF4-FFF2-40B4-BE49-F238E27FC236}">
+                <a16:creationId xmlns:a16="http://schemas.microsoft.com/office/drawing/2014/main" id="{7405DEB1-F797-41FD-AC52-AE5153BED84B}"/>
+              </a:ext>
+            </a:extLst>
+          </p:cNvPr>
+          <p:cNvPicPr>
+            <a:picLocks noChangeAspect="1"/>
+          </p:cNvPicPr>
+          <p:nvPr/>
+        </p:nvPicPr>
+        <p:blipFill>
+          <a:blip r:embed="rId2">
+            <a:extLst>
+              <a:ext uri="{28A0092B-C50C-407E-A947-70E740481C1C}">
+                <a14:useLocalDpi xmlns:a14="http://schemas.microsoft.com/office/drawing/2010/main" val="0"/>
+              </a:ext>
+              <a:ext uri="{96DAC541-7B7A-43D3-8B79-37D633B846F1}">
+                <asvg:svgBlip xmlns:asvg="http://schemas.microsoft.com/office/drawing/2016/SVG/main" r:embed="rId3"/>
+              </a:ext>
+            </a:extLst>
+          </a:blip>
+          <a:stretch>
+            <a:fillRect/>
+          </a:stretch>
+        </p:blipFill>
+        <p:spPr>
+          <a:xfrm>
+            <a:off x="1915583" y="2999691"/>
+            <a:ext cx="914400" cy="914400"/>
+          </a:xfrm>
+          <a:prstGeom prst="rect">
+            <a:avLst/>
+          </a:prstGeom>
+        </p:spPr>
+      </p:pic>
+      <p:pic>
+        <p:nvPicPr>
+          <p:cNvPr id="5" name="Graphic 4" descr="Database">
+            <a:extLst>
+              <a:ext uri="{FF2B5EF4-FFF2-40B4-BE49-F238E27FC236}">
+                <a16:creationId xmlns:a16="http://schemas.microsoft.com/office/drawing/2014/main" id="{2FC5F5C2-6DCF-4E5C-AC31-5042C508BCB0}"/>
+              </a:ext>
+            </a:extLst>
+          </p:cNvPr>
+          <p:cNvPicPr>
+            <a:picLocks noChangeAspect="1"/>
+          </p:cNvPicPr>
+          <p:nvPr/>
+        </p:nvPicPr>
+        <p:blipFill>
+          <a:blip r:embed="rId2">
+            <a:extLst>
+              <a:ext uri="{28A0092B-C50C-407E-A947-70E740481C1C}">
+                <a14:useLocalDpi xmlns:a14="http://schemas.microsoft.com/office/drawing/2010/main" val="0"/>
+              </a:ext>
+              <a:ext uri="{96DAC541-7B7A-43D3-8B79-37D633B846F1}">
+                <asvg:svgBlip xmlns:asvg="http://schemas.microsoft.com/office/drawing/2016/SVG/main" r:embed="rId3"/>
+              </a:ext>
+            </a:extLst>
+          </a:blip>
+          <a:stretch>
+            <a:fillRect/>
+          </a:stretch>
+        </p:blipFill>
+        <p:spPr>
+          <a:xfrm>
+            <a:off x="4774534" y="4106965"/>
+            <a:ext cx="577514" cy="577514"/>
+          </a:xfrm>
+          <a:prstGeom prst="rect">
+            <a:avLst/>
+          </a:prstGeom>
+        </p:spPr>
+      </p:pic>
+      <p:pic>
+        <p:nvPicPr>
+          <p:cNvPr id="6" name="Graphic 5" descr="Database">
+            <a:extLst>
+              <a:ext uri="{FF2B5EF4-FFF2-40B4-BE49-F238E27FC236}">
+                <a16:creationId xmlns:a16="http://schemas.microsoft.com/office/drawing/2014/main" id="{4247EEB0-3DA4-4027-A3AF-B37C18EE0AAC}"/>
+              </a:ext>
+            </a:extLst>
+          </p:cNvPr>
+          <p:cNvPicPr>
+            <a:picLocks noChangeAspect="1"/>
+          </p:cNvPicPr>
+          <p:nvPr/>
+        </p:nvPicPr>
+        <p:blipFill>
+          <a:blip r:embed="rId2">
+            <a:extLst>
+              <a:ext uri="{28A0092B-C50C-407E-A947-70E740481C1C}">
+                <a14:useLocalDpi xmlns:a14="http://schemas.microsoft.com/office/drawing/2010/main" val="0"/>
+              </a:ext>
+              <a:ext uri="{96DAC541-7B7A-43D3-8B79-37D633B846F1}">
+                <asvg:svgBlip xmlns:asvg="http://schemas.microsoft.com/office/drawing/2016/SVG/main" r:embed="rId3"/>
+              </a:ext>
+            </a:extLst>
+          </a:blip>
+          <a:stretch>
+            <a:fillRect/>
+          </a:stretch>
+        </p:blipFill>
+        <p:spPr>
+          <a:xfrm>
+            <a:off x="4774534" y="2422177"/>
+            <a:ext cx="577514" cy="577514"/>
+          </a:xfrm>
+          <a:prstGeom prst="rect">
+            <a:avLst/>
+          </a:prstGeom>
+        </p:spPr>
+      </p:pic>
+      <p:cxnSp>
+        <p:nvCxnSpPr>
+          <p:cNvPr id="8" name="Straight Arrow Connector 7">
+            <a:extLst>
+              <a:ext uri="{FF2B5EF4-FFF2-40B4-BE49-F238E27FC236}">
+                <a16:creationId xmlns:a16="http://schemas.microsoft.com/office/drawing/2014/main" id="{9E3FCF76-11AD-41A8-997C-012106AAC6EF}"/>
+              </a:ext>
+            </a:extLst>
+          </p:cNvPr>
+          <p:cNvCxnSpPr>
+            <a:stCxn id="2" idx="3"/>
+            <a:endCxn id="6" idx="1"/>
+          </p:cNvCxnSpPr>
+          <p:nvPr/>
+        </p:nvCxnSpPr>
+        <p:spPr>
+          <a:xfrm flipV="1">
+            <a:off x="2829983" y="2710934"/>
+            <a:ext cx="1944551" cy="745957"/>
+          </a:xfrm>
+          <a:prstGeom prst="straightConnector1">
+            <a:avLst/>
+          </a:prstGeom>
+          <a:ln w="9525" cap="flat" cmpd="sng" algn="ctr">
+            <a:solidFill>
+              <a:schemeClr val="dk1"/>
+            </a:solidFill>
+            <a:prstDash val="solid"/>
+            <a:round/>
+            <a:headEnd type="none" w="med" len="med"/>
+            <a:tailEnd type="arrow" w="med" len="med"/>
+          </a:ln>
+        </p:spPr>
+        <p:style>
+          <a:lnRef idx="0">
+            <a:scrgbClr r="0" g="0" b="0"/>
+          </a:lnRef>
+          <a:fillRef idx="0">
+            <a:scrgbClr r="0" g="0" b="0"/>
+          </a:fillRef>
+          <a:effectRef idx="0">
+            <a:scrgbClr r="0" g="0" b="0"/>
+          </a:effectRef>
+          <a:fontRef idx="minor">
+            <a:schemeClr val="tx1"/>
+          </a:fontRef>
+        </p:style>
+      </p:cxnSp>
+      <p:cxnSp>
+        <p:nvCxnSpPr>
+          <p:cNvPr id="10" name="Straight Arrow Connector 9">
+            <a:extLst>
+              <a:ext uri="{FF2B5EF4-FFF2-40B4-BE49-F238E27FC236}">
+                <a16:creationId xmlns:a16="http://schemas.microsoft.com/office/drawing/2014/main" id="{B5B291E3-ACA9-4C6C-9C01-90F93198D824}"/>
+              </a:ext>
+            </a:extLst>
+          </p:cNvPr>
+          <p:cNvCxnSpPr>
+            <a:stCxn id="2" idx="3"/>
+            <a:endCxn id="5" idx="1"/>
+          </p:cNvCxnSpPr>
+          <p:nvPr/>
+        </p:nvCxnSpPr>
+        <p:spPr>
+          <a:xfrm>
+            <a:off x="2829983" y="3456891"/>
+            <a:ext cx="1944551" cy="938831"/>
+          </a:xfrm>
+          <a:prstGeom prst="straightConnector1">
+            <a:avLst/>
+          </a:prstGeom>
+          <a:ln w="9525" cap="flat" cmpd="sng" algn="ctr">
+            <a:solidFill>
+              <a:schemeClr val="dk1"/>
+            </a:solidFill>
+            <a:prstDash val="solid"/>
+            <a:round/>
+            <a:headEnd type="none" w="med" len="med"/>
+            <a:tailEnd type="arrow" w="med" len="med"/>
+          </a:ln>
+        </p:spPr>
+        <p:style>
+          <a:lnRef idx="0">
+            <a:scrgbClr r="0" g="0" b="0"/>
+          </a:lnRef>
+          <a:fillRef idx="0">
+            <a:scrgbClr r="0" g="0" b="0"/>
+          </a:fillRef>
+          <a:effectRef idx="0">
+            <a:scrgbClr r="0" g="0" b="0"/>
+          </a:effectRef>
+          <a:fontRef idx="minor">
+            <a:schemeClr val="tx1"/>
+          </a:fontRef>
+        </p:style>
+      </p:cxnSp>
+      <p:sp>
+        <p:nvSpPr>
+          <p:cNvPr id="12" name="TextBox 11">
+            <a:extLst>
+              <a:ext uri="{FF2B5EF4-FFF2-40B4-BE49-F238E27FC236}">
+                <a16:creationId xmlns:a16="http://schemas.microsoft.com/office/drawing/2014/main" id="{074E7333-1183-4CE6-9A27-22DFDEC462A6}"/>
+              </a:ext>
+            </a:extLst>
+          </p:cNvPr>
+          <p:cNvSpPr txBox="1"/>
+          <p:nvPr/>
+        </p:nvSpPr>
+        <p:spPr>
+          <a:xfrm>
+            <a:off x="3992481" y="2028962"/>
+            <a:ext cx="2141620" cy="369332"/>
+          </a:xfrm>
+          <a:prstGeom prst="rect">
+            <a:avLst/>
+          </a:prstGeom>
+          <a:noFill/>
+        </p:spPr>
+        <p:txBody>
+          <a:bodyPr wrap="square" rtlCol="0">
+            <a:spAutoFit/>
+          </a:bodyPr>
+          <a:lstStyle/>
+          <a:p>
+            <a:pPr algn="ctr"/>
+            <a:r>
+              <a:rPr lang="it-IT" dirty="0"/>
+              <a:t>Base Measurements</a:t>
+            </a:r>
+            <a:endParaRPr lang="en-US" dirty="0"/>
+          </a:p>
+        </p:txBody>
+      </p:sp>
+      <p:sp>
+        <p:nvSpPr>
+          <p:cNvPr id="13" name="TextBox 12">
+            <a:extLst>
+              <a:ext uri="{FF2B5EF4-FFF2-40B4-BE49-F238E27FC236}">
+                <a16:creationId xmlns:a16="http://schemas.microsoft.com/office/drawing/2014/main" id="{75BD85AE-4829-44BB-AF28-37B3DCA7EAAB}"/>
+              </a:ext>
+            </a:extLst>
+          </p:cNvPr>
+          <p:cNvSpPr txBox="1"/>
+          <p:nvPr/>
+        </p:nvSpPr>
+        <p:spPr>
+          <a:xfrm>
+            <a:off x="3942349" y="4684478"/>
+            <a:ext cx="2241883" cy="369332"/>
+          </a:xfrm>
+          <a:prstGeom prst="rect">
+            <a:avLst/>
+          </a:prstGeom>
+          <a:noFill/>
+        </p:spPr>
+        <p:txBody>
+          <a:bodyPr wrap="square" rtlCol="0">
+            <a:spAutoFit/>
+          </a:bodyPr>
+          <a:lstStyle/>
+          <a:p>
+            <a:pPr algn="ctr"/>
+            <a:r>
+              <a:rPr lang="it-IT" dirty="0"/>
+              <a:t>Score Measurements</a:t>
+            </a:r>
+            <a:endParaRPr lang="en-US" dirty="0"/>
+          </a:p>
+        </p:txBody>
+      </p:sp>
+      <p:sp>
+        <p:nvSpPr>
+          <p:cNvPr id="14" name="TextBox 13">
+            <a:extLst>
+              <a:ext uri="{FF2B5EF4-FFF2-40B4-BE49-F238E27FC236}">
+                <a16:creationId xmlns:a16="http://schemas.microsoft.com/office/drawing/2014/main" id="{E7F1FC96-EBE4-4DD6-AE78-89CA7084A6F0}"/>
+              </a:ext>
+            </a:extLst>
+          </p:cNvPr>
+          <p:cNvSpPr txBox="1"/>
+          <p:nvPr/>
+        </p:nvSpPr>
+        <p:spPr>
+          <a:xfrm>
+            <a:off x="0" y="0"/>
+            <a:ext cx="3729790" cy="369332"/>
+          </a:xfrm>
+          <a:prstGeom prst="rect">
+            <a:avLst/>
+          </a:prstGeom>
+          <a:noFill/>
+        </p:spPr>
+        <p:txBody>
+          <a:bodyPr wrap="square" rtlCol="0">
+            <a:spAutoFit/>
+          </a:bodyPr>
+          <a:lstStyle/>
+          <a:p>
+            <a:r>
+              <a:rPr lang="it-IT" u="sng" dirty="0"/>
+              <a:t>Dataset Overall Pipeline</a:t>
+            </a:r>
+            <a:endParaRPr lang="en-US" u="sng" dirty="0"/>
+          </a:p>
+        </p:txBody>
+      </p:sp>
+      <p:pic>
+        <p:nvPicPr>
+          <p:cNvPr id="15" name="Graphic 14" descr="Filter">
+            <a:extLst>
+              <a:ext uri="{FF2B5EF4-FFF2-40B4-BE49-F238E27FC236}">
+                <a16:creationId xmlns:a16="http://schemas.microsoft.com/office/drawing/2014/main" id="{77EFA052-BE58-4D1D-B8A8-F655071A6ABC}"/>
+              </a:ext>
+            </a:extLst>
+          </p:cNvPr>
+          <p:cNvPicPr>
+            <a:picLocks noChangeAspect="1"/>
+          </p:cNvPicPr>
+          <p:nvPr/>
+        </p:nvPicPr>
+        <p:blipFill>
+          <a:blip r:embed="rId4">
+            <a:extLst>
+              <a:ext uri="{28A0092B-C50C-407E-A947-70E740481C1C}">
+                <a14:useLocalDpi xmlns:a14="http://schemas.microsoft.com/office/drawing/2010/main" val="0"/>
+              </a:ext>
+              <a:ext uri="{96DAC541-7B7A-43D3-8B79-37D633B846F1}">
+                <asvg:svgBlip xmlns:asvg="http://schemas.microsoft.com/office/drawing/2016/SVG/main" r:embed="rId5"/>
+              </a:ext>
+            </a:extLst>
+          </a:blip>
+          <a:stretch>
+            <a:fillRect/>
+          </a:stretch>
+        </p:blipFill>
+        <p:spPr>
+          <a:xfrm>
+            <a:off x="7216942" y="2430855"/>
+            <a:ext cx="560158" cy="560158"/>
+          </a:xfrm>
+          <a:prstGeom prst="rect">
+            <a:avLst/>
+          </a:prstGeom>
+        </p:spPr>
+      </p:pic>
+      <p:pic>
+        <p:nvPicPr>
+          <p:cNvPr id="16" name="Graphic 15" descr="Filter">
+            <a:extLst>
+              <a:ext uri="{FF2B5EF4-FFF2-40B4-BE49-F238E27FC236}">
+                <a16:creationId xmlns:a16="http://schemas.microsoft.com/office/drawing/2014/main" id="{8CE6F089-4292-41E2-A4CB-9CE900294558}"/>
+              </a:ext>
+            </a:extLst>
+          </p:cNvPr>
+          <p:cNvPicPr>
+            <a:picLocks noChangeAspect="1"/>
+          </p:cNvPicPr>
+          <p:nvPr/>
+        </p:nvPicPr>
+        <p:blipFill>
+          <a:blip r:embed="rId4">
+            <a:extLst>
+              <a:ext uri="{28A0092B-C50C-407E-A947-70E740481C1C}">
+                <a14:useLocalDpi xmlns:a14="http://schemas.microsoft.com/office/drawing/2010/main" val="0"/>
+              </a:ext>
+              <a:ext uri="{96DAC541-7B7A-43D3-8B79-37D633B846F1}">
+                <asvg:svgBlip xmlns:asvg="http://schemas.microsoft.com/office/drawing/2016/SVG/main" r:embed="rId5"/>
+              </a:ext>
+            </a:extLst>
+          </a:blip>
+          <a:stretch>
+            <a:fillRect/>
+          </a:stretch>
+        </p:blipFill>
+        <p:spPr>
+          <a:xfrm>
+            <a:off x="7216942" y="4106965"/>
+            <a:ext cx="560158" cy="560158"/>
+          </a:xfrm>
+          <a:prstGeom prst="rect">
+            <a:avLst/>
+          </a:prstGeom>
+        </p:spPr>
+      </p:pic>
+      <p:cxnSp>
+        <p:nvCxnSpPr>
+          <p:cNvPr id="18" name="Straight Arrow Connector 17">
+            <a:extLst>
+              <a:ext uri="{FF2B5EF4-FFF2-40B4-BE49-F238E27FC236}">
+                <a16:creationId xmlns:a16="http://schemas.microsoft.com/office/drawing/2014/main" id="{555783A9-DA1F-458D-8AC7-9F29C7BF3301}"/>
+              </a:ext>
+            </a:extLst>
+          </p:cNvPr>
+          <p:cNvCxnSpPr>
+            <a:stCxn id="6" idx="3"/>
+            <a:endCxn id="15" idx="1"/>
+          </p:cNvCxnSpPr>
+          <p:nvPr/>
+        </p:nvCxnSpPr>
+        <p:spPr>
+          <a:xfrm>
+            <a:off x="5352048" y="2710934"/>
+            <a:ext cx="1864894" cy="0"/>
+          </a:xfrm>
+          <a:prstGeom prst="straightConnector1">
+            <a:avLst/>
+          </a:prstGeom>
+          <a:ln w="9525" cap="flat" cmpd="sng" algn="ctr">
+            <a:solidFill>
+              <a:schemeClr val="dk1"/>
+            </a:solidFill>
+            <a:prstDash val="solid"/>
+            <a:round/>
+            <a:headEnd type="none" w="med" len="med"/>
+            <a:tailEnd type="arrow" w="med" len="med"/>
+          </a:ln>
+        </p:spPr>
+        <p:style>
+          <a:lnRef idx="0">
+            <a:scrgbClr r="0" g="0" b="0"/>
+          </a:lnRef>
+          <a:fillRef idx="0">
+            <a:scrgbClr r="0" g="0" b="0"/>
+          </a:fillRef>
+          <a:effectRef idx="0">
+            <a:scrgbClr r="0" g="0" b="0"/>
+          </a:effectRef>
+          <a:fontRef idx="minor">
+            <a:schemeClr val="tx1"/>
+          </a:fontRef>
+        </p:style>
+      </p:cxnSp>
+      <p:cxnSp>
+        <p:nvCxnSpPr>
+          <p:cNvPr id="21" name="Straight Arrow Connector 20">
+            <a:extLst>
+              <a:ext uri="{FF2B5EF4-FFF2-40B4-BE49-F238E27FC236}">
+                <a16:creationId xmlns:a16="http://schemas.microsoft.com/office/drawing/2014/main" id="{8A796B5C-4D51-4010-A70E-8C95CEFCB608}"/>
+              </a:ext>
+            </a:extLst>
+          </p:cNvPr>
+          <p:cNvCxnSpPr>
+            <a:stCxn id="5" idx="3"/>
+            <a:endCxn id="16" idx="1"/>
+          </p:cNvCxnSpPr>
+          <p:nvPr/>
+        </p:nvCxnSpPr>
+        <p:spPr>
+          <a:xfrm flipV="1">
+            <a:off x="5352048" y="4387044"/>
+            <a:ext cx="1864894" cy="8678"/>
+          </a:xfrm>
+          <a:prstGeom prst="straightConnector1">
+            <a:avLst/>
+          </a:prstGeom>
+          <a:ln w="9525" cap="flat" cmpd="sng" algn="ctr">
+            <a:solidFill>
+              <a:schemeClr val="dk1"/>
+            </a:solidFill>
+            <a:prstDash val="solid"/>
+            <a:round/>
+            <a:headEnd type="none" w="med" len="med"/>
+            <a:tailEnd type="arrow" w="med" len="med"/>
+          </a:ln>
+        </p:spPr>
+        <p:style>
+          <a:lnRef idx="0">
+            <a:scrgbClr r="0" g="0" b="0"/>
+          </a:lnRef>
+          <a:fillRef idx="0">
+            <a:scrgbClr r="0" g="0" b="0"/>
+          </a:fillRef>
+          <a:effectRef idx="0">
+            <a:scrgbClr r="0" g="0" b="0"/>
+          </a:effectRef>
+          <a:fontRef idx="minor">
+            <a:schemeClr val="tx1"/>
+          </a:fontRef>
+        </p:style>
+      </p:cxnSp>
+      <p:sp>
+        <p:nvSpPr>
+          <p:cNvPr id="22" name="TextBox 21">
+            <a:extLst>
+              <a:ext uri="{FF2B5EF4-FFF2-40B4-BE49-F238E27FC236}">
+                <a16:creationId xmlns:a16="http://schemas.microsoft.com/office/drawing/2014/main" id="{65879BE2-3BDB-435A-A601-3F95ED3E8624}"/>
+              </a:ext>
+            </a:extLst>
+          </p:cNvPr>
+          <p:cNvSpPr txBox="1"/>
+          <p:nvPr/>
+        </p:nvSpPr>
+        <p:spPr>
+          <a:xfrm>
+            <a:off x="6603332" y="2024867"/>
+            <a:ext cx="1787378" cy="369332"/>
+          </a:xfrm>
+          <a:prstGeom prst="rect">
+            <a:avLst/>
+          </a:prstGeom>
+          <a:noFill/>
+        </p:spPr>
+        <p:txBody>
+          <a:bodyPr wrap="square" rtlCol="0">
+            <a:spAutoFit/>
+          </a:bodyPr>
+          <a:lstStyle/>
+          <a:p>
+            <a:pPr algn="ctr"/>
+            <a:r>
+              <a:rPr lang="it-IT" dirty="0"/>
+              <a:t>25% presence</a:t>
+            </a:r>
+            <a:endParaRPr lang="en-US" dirty="0"/>
+          </a:p>
+        </p:txBody>
+      </p:sp>
+      <p:sp>
+        <p:nvSpPr>
+          <p:cNvPr id="25" name="TextBox 24">
+            <a:extLst>
+              <a:ext uri="{FF2B5EF4-FFF2-40B4-BE49-F238E27FC236}">
+                <a16:creationId xmlns:a16="http://schemas.microsoft.com/office/drawing/2014/main" id="{010D410E-647F-4FE6-995F-3F96C38EA75C}"/>
+              </a:ext>
+            </a:extLst>
+          </p:cNvPr>
+          <p:cNvSpPr txBox="1"/>
+          <p:nvPr/>
+        </p:nvSpPr>
+        <p:spPr>
+          <a:xfrm>
+            <a:off x="6603332" y="3736620"/>
+            <a:ext cx="1787378" cy="369332"/>
+          </a:xfrm>
+          <a:prstGeom prst="rect">
+            <a:avLst/>
+          </a:prstGeom>
+          <a:noFill/>
+        </p:spPr>
+        <p:txBody>
+          <a:bodyPr wrap="square" rtlCol="0">
+            <a:spAutoFit/>
+          </a:bodyPr>
+          <a:lstStyle/>
+          <a:p>
+            <a:pPr algn="ctr"/>
+            <a:r>
+              <a:rPr lang="it-IT" dirty="0"/>
+              <a:t>25% presence</a:t>
+            </a:r>
+            <a:endParaRPr lang="en-US" dirty="0"/>
+          </a:p>
+        </p:txBody>
+      </p:sp>
+      <p:grpSp>
+        <p:nvGrpSpPr>
+          <p:cNvPr id="45" name="Group 44">
+            <a:extLst>
+              <a:ext uri="{FF2B5EF4-FFF2-40B4-BE49-F238E27FC236}">
+                <a16:creationId xmlns:a16="http://schemas.microsoft.com/office/drawing/2014/main" id="{EFCDFCF5-3CB5-44E5-9669-2EA232528336}"/>
+              </a:ext>
+            </a:extLst>
+          </p:cNvPr>
+          <p:cNvGrpSpPr/>
+          <p:nvPr/>
+        </p:nvGrpSpPr>
+        <p:grpSpPr>
+          <a:xfrm>
+            <a:off x="8866787" y="2341955"/>
+            <a:ext cx="660962" cy="656371"/>
+            <a:chOff x="8659054" y="1554760"/>
+            <a:chExt cx="660962" cy="656371"/>
+          </a:xfrm>
+        </p:grpSpPr>
+        <p:pic>
+          <p:nvPicPr>
+            <p:cNvPr id="31" name="Graphic 30" descr="Fir tree">
+              <a:extLst>
+                <a:ext uri="{FF2B5EF4-FFF2-40B4-BE49-F238E27FC236}">
+                  <a16:creationId xmlns:a16="http://schemas.microsoft.com/office/drawing/2014/main" id="{A28448D4-A5BA-4AA1-914C-F81207800F37}"/>
+                </a:ext>
+              </a:extLst>
+            </p:cNvPr>
+            <p:cNvPicPr>
+              <a:picLocks noChangeAspect="1"/>
+            </p:cNvPicPr>
+            <p:nvPr/>
+          </p:nvPicPr>
+          <p:blipFill>
+            <a:blip r:embed="rId6">
+              <a:extLst>
+                <a:ext uri="{28A0092B-C50C-407E-A947-70E740481C1C}">
+                  <a14:useLocalDpi xmlns:a14="http://schemas.microsoft.com/office/drawing/2010/main" val="0"/>
+                </a:ext>
+                <a:ext uri="{96DAC541-7B7A-43D3-8B79-37D633B846F1}">
+                  <asvg:svgBlip xmlns:asvg="http://schemas.microsoft.com/office/drawing/2016/SVG/main" r:embed="rId7"/>
+                </a:ext>
+              </a:extLst>
+            </a:blip>
+            <a:stretch>
+              <a:fillRect/>
+            </a:stretch>
+          </p:blipFill>
+          <p:spPr>
+            <a:xfrm>
+              <a:off x="8804250" y="1554760"/>
+              <a:ext cx="369331" cy="369331"/>
+            </a:xfrm>
+            <a:prstGeom prst="rect">
+              <a:avLst/>
+            </a:prstGeom>
+          </p:spPr>
+        </p:pic>
+        <p:pic>
+          <p:nvPicPr>
+            <p:cNvPr id="33" name="Graphic 32" descr="Fir tree">
+              <a:extLst>
+                <a:ext uri="{FF2B5EF4-FFF2-40B4-BE49-F238E27FC236}">
+                  <a16:creationId xmlns:a16="http://schemas.microsoft.com/office/drawing/2014/main" id="{FA5DFC68-AF0D-4662-B2B3-AB729F785AD7}"/>
+                </a:ext>
+              </a:extLst>
+            </p:cNvPr>
+            <p:cNvPicPr>
+              <a:picLocks noChangeAspect="1"/>
+            </p:cNvPicPr>
+            <p:nvPr/>
+          </p:nvPicPr>
+          <p:blipFill>
+            <a:blip r:embed="rId6">
+              <a:extLst>
+                <a:ext uri="{28A0092B-C50C-407E-A947-70E740481C1C}">
+                  <a14:useLocalDpi xmlns:a14="http://schemas.microsoft.com/office/drawing/2010/main" val="0"/>
+                </a:ext>
+                <a:ext uri="{96DAC541-7B7A-43D3-8B79-37D633B846F1}">
+                  <asvg:svgBlip xmlns:asvg="http://schemas.microsoft.com/office/drawing/2016/SVG/main" r:embed="rId7"/>
+                </a:ext>
+              </a:extLst>
+            </a:blip>
+            <a:stretch>
+              <a:fillRect/>
+            </a:stretch>
+          </p:blipFill>
+          <p:spPr>
+            <a:xfrm>
+              <a:off x="8659054" y="1631712"/>
+              <a:ext cx="369331" cy="369331"/>
+            </a:xfrm>
+            <a:prstGeom prst="rect">
+              <a:avLst/>
+            </a:prstGeom>
+          </p:spPr>
+        </p:pic>
+        <p:pic>
+          <p:nvPicPr>
+            <p:cNvPr id="34" name="Graphic 33" descr="Fir tree">
+              <a:extLst>
+                <a:ext uri="{FF2B5EF4-FFF2-40B4-BE49-F238E27FC236}">
+                  <a16:creationId xmlns:a16="http://schemas.microsoft.com/office/drawing/2014/main" id="{A87B39C9-9355-4F04-85A8-68975E2D1931}"/>
+                </a:ext>
+              </a:extLst>
+            </p:cNvPr>
+            <p:cNvPicPr>
+              <a:picLocks noChangeAspect="1"/>
+            </p:cNvPicPr>
+            <p:nvPr/>
+          </p:nvPicPr>
+          <p:blipFill>
+            <a:blip r:embed="rId6">
+              <a:extLst>
+                <a:ext uri="{28A0092B-C50C-407E-A947-70E740481C1C}">
+                  <a14:useLocalDpi xmlns:a14="http://schemas.microsoft.com/office/drawing/2010/main" val="0"/>
+                </a:ext>
+                <a:ext uri="{96DAC541-7B7A-43D3-8B79-37D633B846F1}">
+                  <asvg:svgBlip xmlns:asvg="http://schemas.microsoft.com/office/drawing/2016/SVG/main" r:embed="rId7"/>
+                </a:ext>
+              </a:extLst>
+            </a:blip>
+            <a:stretch>
+              <a:fillRect/>
+            </a:stretch>
+          </p:blipFill>
+          <p:spPr>
+            <a:xfrm>
+              <a:off x="8950685" y="1652154"/>
+              <a:ext cx="369331" cy="369331"/>
+            </a:xfrm>
+            <a:prstGeom prst="rect">
+              <a:avLst/>
+            </a:prstGeom>
+          </p:spPr>
+        </p:pic>
+        <p:pic>
+          <p:nvPicPr>
+            <p:cNvPr id="27" name="Graphic 26" descr="Rat">
+              <a:extLst>
+                <a:ext uri="{FF2B5EF4-FFF2-40B4-BE49-F238E27FC236}">
+                  <a16:creationId xmlns:a16="http://schemas.microsoft.com/office/drawing/2014/main" id="{E0A02F5C-79F0-4D89-8F50-304FD4BD9848}"/>
+                </a:ext>
+              </a:extLst>
+            </p:cNvPr>
+            <p:cNvPicPr>
+              <a:picLocks noChangeAspect="1"/>
+            </p:cNvPicPr>
+            <p:nvPr/>
+          </p:nvPicPr>
+          <p:blipFill>
+            <a:blip r:embed="rId8">
+              <a:extLst>
+                <a:ext uri="{28A0092B-C50C-407E-A947-70E740481C1C}">
+                  <a14:useLocalDpi xmlns:a14="http://schemas.microsoft.com/office/drawing/2010/main" val="0"/>
+                </a:ext>
+                <a:ext uri="{96DAC541-7B7A-43D3-8B79-37D633B846F1}">
+                  <asvg:svgBlip xmlns:asvg="http://schemas.microsoft.com/office/drawing/2016/SVG/main" r:embed="rId9"/>
+                </a:ext>
+              </a:extLst>
+            </a:blip>
+            <a:stretch>
+              <a:fillRect/>
+            </a:stretch>
+          </p:blipFill>
+          <p:spPr>
+            <a:xfrm>
+              <a:off x="8753807" y="1914827"/>
+              <a:ext cx="268922" cy="268922"/>
+            </a:xfrm>
+            <a:prstGeom prst="rect">
+              <a:avLst/>
+            </a:prstGeom>
+          </p:spPr>
+        </p:pic>
+        <p:pic>
+          <p:nvPicPr>
+            <p:cNvPr id="28" name="Graphic 27" descr="Rat">
+              <a:extLst>
+                <a:ext uri="{FF2B5EF4-FFF2-40B4-BE49-F238E27FC236}">
+                  <a16:creationId xmlns:a16="http://schemas.microsoft.com/office/drawing/2014/main" id="{E52DBD8A-0DAA-4002-B99A-3279FA56CC7D}"/>
+                </a:ext>
+              </a:extLst>
+            </p:cNvPr>
+            <p:cNvPicPr>
+              <a:picLocks noChangeAspect="1"/>
+            </p:cNvPicPr>
+            <p:nvPr/>
+          </p:nvPicPr>
+          <p:blipFill>
+            <a:blip r:embed="rId8">
+              <a:extLst>
+                <a:ext uri="{28A0092B-C50C-407E-A947-70E740481C1C}">
+                  <a14:useLocalDpi xmlns:a14="http://schemas.microsoft.com/office/drawing/2010/main" val="0"/>
+                </a:ext>
+                <a:ext uri="{96DAC541-7B7A-43D3-8B79-37D633B846F1}">
+                  <asvg:svgBlip xmlns:asvg="http://schemas.microsoft.com/office/drawing/2016/SVG/main" r:embed="rId9"/>
+                </a:ext>
+              </a:extLst>
+            </a:blip>
+            <a:stretch>
+              <a:fillRect/>
+            </a:stretch>
+          </p:blipFill>
+          <p:spPr>
+            <a:xfrm flipH="1">
+              <a:off x="8939164" y="2068427"/>
+              <a:ext cx="142704" cy="142704"/>
+            </a:xfrm>
+            <a:prstGeom prst="rect">
+              <a:avLst/>
+            </a:prstGeom>
+          </p:spPr>
+        </p:pic>
+        <p:pic>
+          <p:nvPicPr>
+            <p:cNvPr id="35" name="Graphic 34" descr="Rat">
+              <a:extLst>
+                <a:ext uri="{FF2B5EF4-FFF2-40B4-BE49-F238E27FC236}">
+                  <a16:creationId xmlns:a16="http://schemas.microsoft.com/office/drawing/2014/main" id="{6D33A84E-4C0D-4033-8FCF-EC2E10BDF52D}"/>
+                </a:ext>
+              </a:extLst>
+            </p:cNvPr>
+            <p:cNvPicPr>
+              <a:picLocks noChangeAspect="1"/>
+            </p:cNvPicPr>
+            <p:nvPr/>
+          </p:nvPicPr>
+          <p:blipFill>
+            <a:blip r:embed="rId8">
+              <a:extLst>
+                <a:ext uri="{28A0092B-C50C-407E-A947-70E740481C1C}">
+                  <a14:useLocalDpi xmlns:a14="http://schemas.microsoft.com/office/drawing/2010/main" val="0"/>
+                </a:ext>
+                <a:ext uri="{96DAC541-7B7A-43D3-8B79-37D633B846F1}">
+                  <asvg:svgBlip xmlns:asvg="http://schemas.microsoft.com/office/drawing/2016/SVG/main" r:embed="rId9"/>
+                </a:ext>
+              </a:extLst>
+            </a:blip>
+            <a:stretch>
+              <a:fillRect/>
+            </a:stretch>
+          </p:blipFill>
+          <p:spPr>
+            <a:xfrm flipH="1">
+              <a:off x="8969417" y="1908414"/>
+              <a:ext cx="224902" cy="221156"/>
+            </a:xfrm>
+            <a:prstGeom prst="rect">
+              <a:avLst/>
+            </a:prstGeom>
+          </p:spPr>
+        </p:pic>
+        <p:pic>
+          <p:nvPicPr>
+            <p:cNvPr id="36" name="Graphic 35" descr="Rat">
+              <a:extLst>
+                <a:ext uri="{FF2B5EF4-FFF2-40B4-BE49-F238E27FC236}">
+                  <a16:creationId xmlns:a16="http://schemas.microsoft.com/office/drawing/2014/main" id="{9C8F06A7-7870-4608-AA82-B4F3C3504D7E}"/>
+                </a:ext>
+              </a:extLst>
+            </p:cNvPr>
+            <p:cNvPicPr>
+              <a:picLocks noChangeAspect="1"/>
+            </p:cNvPicPr>
+            <p:nvPr/>
+          </p:nvPicPr>
+          <p:blipFill>
+            <a:blip r:embed="rId8">
+              <a:extLst>
+                <a:ext uri="{28A0092B-C50C-407E-A947-70E740481C1C}">
+                  <a14:useLocalDpi xmlns:a14="http://schemas.microsoft.com/office/drawing/2010/main" val="0"/>
+                </a:ext>
+                <a:ext uri="{96DAC541-7B7A-43D3-8B79-37D633B846F1}">
+                  <asvg:svgBlip xmlns:asvg="http://schemas.microsoft.com/office/drawing/2016/SVG/main" r:embed="rId9"/>
+                </a:ext>
+              </a:extLst>
+            </a:blip>
+            <a:stretch>
+              <a:fillRect/>
+            </a:stretch>
+          </p:blipFill>
+          <p:spPr>
+            <a:xfrm>
+              <a:off x="9058905" y="2035427"/>
+              <a:ext cx="142704" cy="142704"/>
+            </a:xfrm>
+            <a:prstGeom prst="rect">
+              <a:avLst/>
+            </a:prstGeom>
+          </p:spPr>
+        </p:pic>
+      </p:grpSp>
+      <p:grpSp>
+        <p:nvGrpSpPr>
+          <p:cNvPr id="44" name="Group 43">
+            <a:extLst>
+              <a:ext uri="{FF2B5EF4-FFF2-40B4-BE49-F238E27FC236}">
+                <a16:creationId xmlns:a16="http://schemas.microsoft.com/office/drawing/2014/main" id="{04F9F91F-2781-44FE-98AE-7E4D07F97208}"/>
+              </a:ext>
+            </a:extLst>
+          </p:cNvPr>
+          <p:cNvGrpSpPr/>
+          <p:nvPr/>
+        </p:nvGrpSpPr>
+        <p:grpSpPr>
+          <a:xfrm>
+            <a:off x="8936157" y="4010752"/>
+            <a:ext cx="660962" cy="656371"/>
+            <a:chOff x="8659054" y="4532119"/>
+            <a:chExt cx="660962" cy="656371"/>
+          </a:xfrm>
+        </p:grpSpPr>
+        <p:pic>
+          <p:nvPicPr>
+            <p:cNvPr id="37" name="Graphic 36" descr="Fir tree">
+              <a:extLst>
+                <a:ext uri="{FF2B5EF4-FFF2-40B4-BE49-F238E27FC236}">
+                  <a16:creationId xmlns:a16="http://schemas.microsoft.com/office/drawing/2014/main" id="{0E363A89-E105-4E57-91E1-3E875915792D}"/>
+                </a:ext>
+              </a:extLst>
+            </p:cNvPr>
+            <p:cNvPicPr>
+              <a:picLocks noChangeAspect="1"/>
+            </p:cNvPicPr>
+            <p:nvPr/>
+          </p:nvPicPr>
+          <p:blipFill>
+            <a:blip r:embed="rId6">
+              <a:extLst>
+                <a:ext uri="{28A0092B-C50C-407E-A947-70E740481C1C}">
+                  <a14:useLocalDpi xmlns:a14="http://schemas.microsoft.com/office/drawing/2010/main" val="0"/>
+                </a:ext>
+                <a:ext uri="{96DAC541-7B7A-43D3-8B79-37D633B846F1}">
+                  <asvg:svgBlip xmlns:asvg="http://schemas.microsoft.com/office/drawing/2016/SVG/main" r:embed="rId7"/>
+                </a:ext>
+              </a:extLst>
+            </a:blip>
+            <a:stretch>
+              <a:fillRect/>
+            </a:stretch>
+          </p:blipFill>
+          <p:spPr>
+            <a:xfrm>
+              <a:off x="8804250" y="4532119"/>
+              <a:ext cx="369331" cy="369331"/>
+            </a:xfrm>
+            <a:prstGeom prst="rect">
+              <a:avLst/>
+            </a:prstGeom>
+          </p:spPr>
+        </p:pic>
+        <p:pic>
+          <p:nvPicPr>
+            <p:cNvPr id="38" name="Graphic 37" descr="Fir tree">
+              <a:extLst>
+                <a:ext uri="{FF2B5EF4-FFF2-40B4-BE49-F238E27FC236}">
+                  <a16:creationId xmlns:a16="http://schemas.microsoft.com/office/drawing/2014/main" id="{770005CA-79DF-4370-88CD-7C3EB7DAF6FD}"/>
+                </a:ext>
+              </a:extLst>
+            </p:cNvPr>
+            <p:cNvPicPr>
+              <a:picLocks noChangeAspect="1"/>
+            </p:cNvPicPr>
+            <p:nvPr/>
+          </p:nvPicPr>
+          <p:blipFill>
+            <a:blip r:embed="rId6">
+              <a:extLst>
+                <a:ext uri="{28A0092B-C50C-407E-A947-70E740481C1C}">
+                  <a14:useLocalDpi xmlns:a14="http://schemas.microsoft.com/office/drawing/2010/main" val="0"/>
+                </a:ext>
+                <a:ext uri="{96DAC541-7B7A-43D3-8B79-37D633B846F1}">
+                  <asvg:svgBlip xmlns:asvg="http://schemas.microsoft.com/office/drawing/2016/SVG/main" r:embed="rId7"/>
+                </a:ext>
+              </a:extLst>
+            </a:blip>
+            <a:stretch>
+              <a:fillRect/>
+            </a:stretch>
+          </p:blipFill>
+          <p:spPr>
+            <a:xfrm>
+              <a:off x="8659054" y="4609071"/>
+              <a:ext cx="369331" cy="369331"/>
+            </a:xfrm>
+            <a:prstGeom prst="rect">
+              <a:avLst/>
+            </a:prstGeom>
+          </p:spPr>
+        </p:pic>
+        <p:pic>
+          <p:nvPicPr>
+            <p:cNvPr id="39" name="Graphic 38" descr="Fir tree">
+              <a:extLst>
+                <a:ext uri="{FF2B5EF4-FFF2-40B4-BE49-F238E27FC236}">
+                  <a16:creationId xmlns:a16="http://schemas.microsoft.com/office/drawing/2014/main" id="{289005B1-E3F6-4D74-8657-EBA911FA0743}"/>
+                </a:ext>
+              </a:extLst>
+            </p:cNvPr>
+            <p:cNvPicPr>
+              <a:picLocks noChangeAspect="1"/>
+            </p:cNvPicPr>
+            <p:nvPr/>
+          </p:nvPicPr>
+          <p:blipFill>
+            <a:blip r:embed="rId6">
+              <a:extLst>
+                <a:ext uri="{28A0092B-C50C-407E-A947-70E740481C1C}">
+                  <a14:useLocalDpi xmlns:a14="http://schemas.microsoft.com/office/drawing/2010/main" val="0"/>
+                </a:ext>
+                <a:ext uri="{96DAC541-7B7A-43D3-8B79-37D633B846F1}">
+                  <asvg:svgBlip xmlns:asvg="http://schemas.microsoft.com/office/drawing/2016/SVG/main" r:embed="rId7"/>
+                </a:ext>
+              </a:extLst>
+            </a:blip>
+            <a:stretch>
+              <a:fillRect/>
+            </a:stretch>
+          </p:blipFill>
+          <p:spPr>
+            <a:xfrm>
+              <a:off x="8950685" y="4629513"/>
+              <a:ext cx="369331" cy="369331"/>
+            </a:xfrm>
+            <a:prstGeom prst="rect">
+              <a:avLst/>
+            </a:prstGeom>
+          </p:spPr>
+        </p:pic>
+        <p:pic>
+          <p:nvPicPr>
+            <p:cNvPr id="40" name="Graphic 39" descr="Rat">
+              <a:extLst>
+                <a:ext uri="{FF2B5EF4-FFF2-40B4-BE49-F238E27FC236}">
+                  <a16:creationId xmlns:a16="http://schemas.microsoft.com/office/drawing/2014/main" id="{3790F890-04F6-4F83-9FB3-08B39B7B162B}"/>
+                </a:ext>
+              </a:extLst>
+            </p:cNvPr>
+            <p:cNvPicPr>
+              <a:picLocks noChangeAspect="1"/>
+            </p:cNvPicPr>
+            <p:nvPr/>
+          </p:nvPicPr>
+          <p:blipFill>
+            <a:blip r:embed="rId8">
+              <a:extLst>
+                <a:ext uri="{28A0092B-C50C-407E-A947-70E740481C1C}">
+                  <a14:useLocalDpi xmlns:a14="http://schemas.microsoft.com/office/drawing/2010/main" val="0"/>
+                </a:ext>
+                <a:ext uri="{96DAC541-7B7A-43D3-8B79-37D633B846F1}">
+                  <asvg:svgBlip xmlns:asvg="http://schemas.microsoft.com/office/drawing/2016/SVG/main" r:embed="rId9"/>
+                </a:ext>
+              </a:extLst>
+            </a:blip>
+            <a:stretch>
+              <a:fillRect/>
+            </a:stretch>
+          </p:blipFill>
+          <p:spPr>
+            <a:xfrm>
+              <a:off x="8753807" y="4892186"/>
+              <a:ext cx="268922" cy="268922"/>
+            </a:xfrm>
+            <a:prstGeom prst="rect">
+              <a:avLst/>
+            </a:prstGeom>
+          </p:spPr>
+        </p:pic>
+        <p:pic>
+          <p:nvPicPr>
+            <p:cNvPr id="41" name="Graphic 40" descr="Rat">
+              <a:extLst>
+                <a:ext uri="{FF2B5EF4-FFF2-40B4-BE49-F238E27FC236}">
+                  <a16:creationId xmlns:a16="http://schemas.microsoft.com/office/drawing/2014/main" id="{7A52470C-137D-4771-8BEE-0C2423A4F498}"/>
+                </a:ext>
+              </a:extLst>
+            </p:cNvPr>
+            <p:cNvPicPr>
+              <a:picLocks noChangeAspect="1"/>
+            </p:cNvPicPr>
+            <p:nvPr/>
+          </p:nvPicPr>
+          <p:blipFill>
+            <a:blip r:embed="rId8">
+              <a:extLst>
+                <a:ext uri="{28A0092B-C50C-407E-A947-70E740481C1C}">
+                  <a14:useLocalDpi xmlns:a14="http://schemas.microsoft.com/office/drawing/2010/main" val="0"/>
+                </a:ext>
+                <a:ext uri="{96DAC541-7B7A-43D3-8B79-37D633B846F1}">
+                  <asvg:svgBlip xmlns:asvg="http://schemas.microsoft.com/office/drawing/2016/SVG/main" r:embed="rId9"/>
+                </a:ext>
+              </a:extLst>
+            </a:blip>
+            <a:stretch>
+              <a:fillRect/>
+            </a:stretch>
+          </p:blipFill>
+          <p:spPr>
+            <a:xfrm flipH="1">
+              <a:off x="8939164" y="5045786"/>
+              <a:ext cx="142704" cy="142704"/>
+            </a:xfrm>
+            <a:prstGeom prst="rect">
+              <a:avLst/>
+            </a:prstGeom>
+          </p:spPr>
+        </p:pic>
+        <p:pic>
+          <p:nvPicPr>
+            <p:cNvPr id="42" name="Graphic 41" descr="Rat">
+              <a:extLst>
+                <a:ext uri="{FF2B5EF4-FFF2-40B4-BE49-F238E27FC236}">
+                  <a16:creationId xmlns:a16="http://schemas.microsoft.com/office/drawing/2014/main" id="{FD3ADE60-EA42-4A59-8BC6-FB7B717A80CE}"/>
+                </a:ext>
+              </a:extLst>
+            </p:cNvPr>
+            <p:cNvPicPr>
+              <a:picLocks noChangeAspect="1"/>
+            </p:cNvPicPr>
+            <p:nvPr/>
+          </p:nvPicPr>
+          <p:blipFill>
+            <a:blip r:embed="rId8">
+              <a:extLst>
+                <a:ext uri="{28A0092B-C50C-407E-A947-70E740481C1C}">
+                  <a14:useLocalDpi xmlns:a14="http://schemas.microsoft.com/office/drawing/2010/main" val="0"/>
+                </a:ext>
+                <a:ext uri="{96DAC541-7B7A-43D3-8B79-37D633B846F1}">
+                  <asvg:svgBlip xmlns:asvg="http://schemas.microsoft.com/office/drawing/2016/SVG/main" r:embed="rId9"/>
+                </a:ext>
+              </a:extLst>
+            </a:blip>
+            <a:stretch>
+              <a:fillRect/>
+            </a:stretch>
+          </p:blipFill>
+          <p:spPr>
+            <a:xfrm flipH="1">
+              <a:off x="8969417" y="4885773"/>
+              <a:ext cx="224902" cy="221156"/>
+            </a:xfrm>
+            <a:prstGeom prst="rect">
+              <a:avLst/>
+            </a:prstGeom>
+          </p:spPr>
+        </p:pic>
+        <p:pic>
+          <p:nvPicPr>
+            <p:cNvPr id="43" name="Graphic 42" descr="Rat">
+              <a:extLst>
+                <a:ext uri="{FF2B5EF4-FFF2-40B4-BE49-F238E27FC236}">
+                  <a16:creationId xmlns:a16="http://schemas.microsoft.com/office/drawing/2014/main" id="{F353A656-F1AF-4FC7-ADD9-491A9B3BF874}"/>
+                </a:ext>
+              </a:extLst>
+            </p:cNvPr>
+            <p:cNvPicPr>
+              <a:picLocks noChangeAspect="1"/>
+            </p:cNvPicPr>
+            <p:nvPr/>
+          </p:nvPicPr>
+          <p:blipFill>
+            <a:blip r:embed="rId8">
+              <a:extLst>
+                <a:ext uri="{28A0092B-C50C-407E-A947-70E740481C1C}">
+                  <a14:useLocalDpi xmlns:a14="http://schemas.microsoft.com/office/drawing/2010/main" val="0"/>
+                </a:ext>
+                <a:ext uri="{96DAC541-7B7A-43D3-8B79-37D633B846F1}">
+                  <asvg:svgBlip xmlns:asvg="http://schemas.microsoft.com/office/drawing/2016/SVG/main" r:embed="rId9"/>
+                </a:ext>
+              </a:extLst>
+            </a:blip>
+            <a:stretch>
+              <a:fillRect/>
+            </a:stretch>
+          </p:blipFill>
+          <p:spPr>
+            <a:xfrm>
+              <a:off x="9058905" y="5012786"/>
+              <a:ext cx="142704" cy="142704"/>
+            </a:xfrm>
+            <a:prstGeom prst="rect">
+              <a:avLst/>
+            </a:prstGeom>
+          </p:spPr>
+        </p:pic>
+      </p:grpSp>
+      <p:cxnSp>
+        <p:nvCxnSpPr>
+          <p:cNvPr id="47" name="Straight Arrow Connector 46">
+            <a:extLst>
+              <a:ext uri="{FF2B5EF4-FFF2-40B4-BE49-F238E27FC236}">
+                <a16:creationId xmlns:a16="http://schemas.microsoft.com/office/drawing/2014/main" id="{21D791B7-BCEC-4B7D-8AF4-F64002B1ECC4}"/>
+              </a:ext>
+            </a:extLst>
+          </p:cNvPr>
+          <p:cNvCxnSpPr>
+            <a:stCxn id="15" idx="3"/>
+          </p:cNvCxnSpPr>
+          <p:nvPr/>
+        </p:nvCxnSpPr>
+        <p:spPr>
+          <a:xfrm>
+            <a:off x="7777100" y="2710934"/>
+            <a:ext cx="1089067" cy="0"/>
+          </a:xfrm>
+          <a:prstGeom prst="straightConnector1">
+            <a:avLst/>
+          </a:prstGeom>
+          <a:ln w="9525" cap="flat" cmpd="sng" algn="ctr">
+            <a:solidFill>
+              <a:schemeClr val="dk1"/>
+            </a:solidFill>
+            <a:prstDash val="solid"/>
+            <a:round/>
+            <a:headEnd type="none" w="med" len="med"/>
+            <a:tailEnd type="arrow" w="med" len="med"/>
+          </a:ln>
+        </p:spPr>
+        <p:style>
+          <a:lnRef idx="0">
+            <a:scrgbClr r="0" g="0" b="0"/>
+          </a:lnRef>
+          <a:fillRef idx="0">
+            <a:scrgbClr r="0" g="0" b="0"/>
+          </a:fillRef>
+          <a:effectRef idx="0">
+            <a:scrgbClr r="0" g="0" b="0"/>
+          </a:effectRef>
+          <a:fontRef idx="minor">
+            <a:schemeClr val="tx1"/>
+          </a:fontRef>
+        </p:style>
+      </p:cxnSp>
+      <p:cxnSp>
+        <p:nvCxnSpPr>
+          <p:cNvPr id="49" name="Straight Arrow Connector 48">
+            <a:extLst>
+              <a:ext uri="{FF2B5EF4-FFF2-40B4-BE49-F238E27FC236}">
+                <a16:creationId xmlns:a16="http://schemas.microsoft.com/office/drawing/2014/main" id="{60EF8F11-6F77-4F18-8FE0-357F66B187C9}"/>
+              </a:ext>
+            </a:extLst>
+          </p:cNvPr>
+          <p:cNvCxnSpPr>
+            <a:stCxn id="16" idx="3"/>
+          </p:cNvCxnSpPr>
+          <p:nvPr/>
+        </p:nvCxnSpPr>
+        <p:spPr>
+          <a:xfrm>
+            <a:off x="7777100" y="4387044"/>
+            <a:ext cx="1089067" cy="8678"/>
+          </a:xfrm>
+          <a:prstGeom prst="straightConnector1">
+            <a:avLst/>
+          </a:prstGeom>
+          <a:ln w="9525" cap="flat" cmpd="sng" algn="ctr">
+            <a:solidFill>
+              <a:schemeClr val="dk1"/>
+            </a:solidFill>
+            <a:prstDash val="solid"/>
+            <a:round/>
+            <a:headEnd type="none" w="med" len="med"/>
+            <a:tailEnd type="arrow" w="med" len="med"/>
+          </a:ln>
+        </p:spPr>
+        <p:style>
+          <a:lnRef idx="0">
+            <a:scrgbClr r="0" g="0" b="0"/>
+          </a:lnRef>
+          <a:fillRef idx="0">
+            <a:scrgbClr r="0" g="0" b="0"/>
+          </a:fillRef>
+          <a:effectRef idx="0">
+            <a:scrgbClr r="0" g="0" b="0"/>
+          </a:effectRef>
+          <a:fontRef idx="minor">
+            <a:schemeClr val="tx1"/>
+          </a:fontRef>
+        </p:style>
+      </p:cxnSp>
+      <p:sp>
+        <p:nvSpPr>
+          <p:cNvPr id="50" name="TextBox 49">
+            <a:extLst>
+              <a:ext uri="{FF2B5EF4-FFF2-40B4-BE49-F238E27FC236}">
+                <a16:creationId xmlns:a16="http://schemas.microsoft.com/office/drawing/2014/main" id="{245E91A3-D02A-4899-B0C7-967A56251B12}"/>
+              </a:ext>
+            </a:extLst>
+          </p:cNvPr>
+          <p:cNvSpPr txBox="1"/>
+          <p:nvPr/>
+        </p:nvSpPr>
+        <p:spPr>
+          <a:xfrm>
+            <a:off x="8302339" y="2024867"/>
+            <a:ext cx="1787378" cy="369332"/>
+          </a:xfrm>
+          <a:prstGeom prst="rect">
+            <a:avLst/>
+          </a:prstGeom>
+          <a:noFill/>
+        </p:spPr>
+        <p:txBody>
+          <a:bodyPr wrap="square" rtlCol="0">
+            <a:spAutoFit/>
+          </a:bodyPr>
+          <a:lstStyle/>
+          <a:p>
+            <a:pPr algn="ctr"/>
+            <a:r>
+              <a:rPr lang="it-IT" dirty="0"/>
+              <a:t>MICE Forest</a:t>
+            </a:r>
+            <a:endParaRPr lang="en-US" dirty="0"/>
+          </a:p>
+        </p:txBody>
+      </p:sp>
+      <p:sp>
+        <p:nvSpPr>
+          <p:cNvPr id="51" name="TextBox 50">
+            <a:extLst>
+              <a:ext uri="{FF2B5EF4-FFF2-40B4-BE49-F238E27FC236}">
+                <a16:creationId xmlns:a16="http://schemas.microsoft.com/office/drawing/2014/main" id="{92B6B99E-4147-4597-8C5E-0518FED712B3}"/>
+              </a:ext>
+            </a:extLst>
+          </p:cNvPr>
+          <p:cNvSpPr txBox="1"/>
+          <p:nvPr/>
+        </p:nvSpPr>
+        <p:spPr>
+          <a:xfrm>
+            <a:off x="8352831" y="3736620"/>
+            <a:ext cx="1787378" cy="369332"/>
+          </a:xfrm>
+          <a:prstGeom prst="rect">
+            <a:avLst/>
+          </a:prstGeom>
+          <a:noFill/>
+        </p:spPr>
+        <p:txBody>
+          <a:bodyPr wrap="square" rtlCol="0">
+            <a:spAutoFit/>
+          </a:bodyPr>
+          <a:lstStyle/>
+          <a:p>
+            <a:pPr algn="ctr"/>
+            <a:r>
+              <a:rPr lang="it-IT" dirty="0"/>
+              <a:t>MICE Forest</a:t>
+            </a:r>
+            <a:endParaRPr lang="en-US" dirty="0"/>
+          </a:p>
+        </p:txBody>
+      </p:sp>
     </p:spTree>
     <p:extLst>
       <p:ext uri="{BB962C8B-B14F-4D97-AF65-F5344CB8AC3E}">
@@ -17618,7 +18945,7 @@
 </file>
 
 <file path=ppt/slides/slide7.xml><?xml version="1.0" encoding="utf-8"?>
-<p:sld xmlns:a="http://schemas.openxmlformats.org/drawingml/2006/main" xmlns:r="http://schemas.openxmlformats.org/officeDocument/2006/relationships" xmlns:p="http://schemas.openxmlformats.org/presentationml/2006/main">
+<p:sld xmlns:a="http://schemas.openxmlformats.org/drawingml/2006/main" xmlns:r="http://schemas.openxmlformats.org/officeDocument/2006/relationships" xmlns:p="http://schemas.openxmlformats.org/presentationml/2006/main" show="0">
   <p:cSld>
     <p:spTree>
       <p:nvGrpSpPr>
@@ -17878,13 +19205,13 @@
   <p:clrMapOvr>
     <a:masterClrMapping/>
   </p:clrMapOvr>
-  <mc:AlternateContent xmlns:mc="http://schemas.openxmlformats.org/markup-compatibility/2006" xmlns:p159="http://schemas.microsoft.com/office/powerpoint/2015/09/main">
-    <mc:Choice Requires="p159">
+  <mc:AlternateContent xmlns:mc="http://schemas.openxmlformats.org/markup-compatibility/2006">
+    <mc:Choice xmlns:p159="http://schemas.microsoft.com/office/powerpoint/2015/09/main" Requires="p159">
       <p:transition spd="slow">
         <p159:morph option="byObject"/>
       </p:transition>
     </mc:Choice>
-    <mc:Fallback xmlns="">
+    <mc:Fallback>
       <p:transition spd="slow">
         <p:fade/>
       </p:transition>
@@ -17894,7 +19221,7 @@
 </file>
 
 <file path=ppt/slides/slide8.xml><?xml version="1.0" encoding="utf-8"?>
-<p:sld xmlns:a="http://schemas.openxmlformats.org/drawingml/2006/main" xmlns:r="http://schemas.openxmlformats.org/officeDocument/2006/relationships" xmlns:p="http://schemas.openxmlformats.org/presentationml/2006/main">
+<p:sld xmlns:a="http://schemas.openxmlformats.org/drawingml/2006/main" xmlns:r="http://schemas.openxmlformats.org/officeDocument/2006/relationships" xmlns:p="http://schemas.openxmlformats.org/presentationml/2006/main" show="0">
   <p:cSld>
     <p:spTree>
       <p:nvGrpSpPr>
@@ -18154,13 +19481,13 @@
   <p:clrMapOvr>
     <a:masterClrMapping/>
   </p:clrMapOvr>
-  <mc:AlternateContent xmlns:mc="http://schemas.openxmlformats.org/markup-compatibility/2006" xmlns:p159="http://schemas.microsoft.com/office/powerpoint/2015/09/main">
-    <mc:Choice Requires="p159">
+  <mc:AlternateContent xmlns:mc="http://schemas.openxmlformats.org/markup-compatibility/2006">
+    <mc:Choice xmlns:p159="http://schemas.microsoft.com/office/powerpoint/2015/09/main" Requires="p159">
       <p:transition spd="slow">
         <p159:morph option="byObject"/>
       </p:transition>
     </mc:Choice>
-    <mc:Fallback xmlns="">
+    <mc:Fallback>
       <p:transition spd="slow">
         <p:fade/>
       </p:transition>
@@ -18170,7 +19497,7 @@
 </file>
 
 <file path=ppt/slides/slide9.xml><?xml version="1.0" encoding="utf-8"?>
-<p:sld xmlns:a="http://schemas.openxmlformats.org/drawingml/2006/main" xmlns:r="http://schemas.openxmlformats.org/officeDocument/2006/relationships" xmlns:p="http://schemas.openxmlformats.org/presentationml/2006/main">
+<p:sld xmlns:a="http://schemas.openxmlformats.org/drawingml/2006/main" xmlns:r="http://schemas.openxmlformats.org/officeDocument/2006/relationships" xmlns:p="http://schemas.openxmlformats.org/presentationml/2006/main" show="0">
   <p:cSld>
     <p:spTree>
       <p:nvGrpSpPr>
@@ -18346,13 +19673,13 @@
   <p:clrMapOvr>
     <a:masterClrMapping/>
   </p:clrMapOvr>
-  <mc:AlternateContent xmlns:mc="http://schemas.openxmlformats.org/markup-compatibility/2006" xmlns:p159="http://schemas.microsoft.com/office/powerpoint/2015/09/main">
-    <mc:Choice Requires="p159">
+  <mc:AlternateContent xmlns:mc="http://schemas.openxmlformats.org/markup-compatibility/2006">
+    <mc:Choice xmlns:p159="http://schemas.microsoft.com/office/powerpoint/2015/09/main" Requires="p159">
       <p:transition spd="slow">
         <p159:morph option="byObject"/>
       </p:transition>
     </mc:Choice>
-    <mc:Fallback xmlns="">
+    <mc:Fallback>
       <p:transition spd="slow">
         <p:fade/>
       </p:transition>

--- a/assets/ppt/data_exploration.pptx
+++ b/assets/ppt/data_exploration.pptx
@@ -1059,7 +1059,7 @@
           <a:p>
             <a:fld id="{511A67EE-E303-4967-962F-9A28980F7F51}" type="datetimeFigureOut">
               <a:rPr lang="nl-NL" smtClean="0"/>
-              <a:t>11-9-2024</a:t>
+              <a:t>18-9-2024</a:t>
             </a:fld>
             <a:endParaRPr lang="nl-NL"/>
           </a:p>
@@ -1476,7 +1476,7 @@
           <a:p>
             <a:fld id="{FED566F3-1D76-4AEC-ABE9-AFABCF495913}" type="datetime1">
               <a:rPr lang="nl-NL" smtClean="0"/>
-              <a:t>11-9-2024</a:t>
+              <a:t>18-9-2024</a:t>
             </a:fld>
             <a:endParaRPr lang="nl-NL"/>
           </a:p>
@@ -1688,7 +1688,7 @@
           <a:p>
             <a:fld id="{BC7E55A1-B228-4CF1-BFC3-6AC3B8574AC2}" type="datetime1">
               <a:rPr lang="nl-NL" smtClean="0"/>
-              <a:t>11-9-2024</a:t>
+              <a:t>18-9-2024</a:t>
             </a:fld>
             <a:endParaRPr lang="nl-NL"/>
           </a:p>
@@ -1910,7 +1910,7 @@
           <a:p>
             <a:fld id="{31AEBC58-6519-439D-8982-F0178170B57B}" type="datetime1">
               <a:rPr lang="nl-NL" smtClean="0"/>
-              <a:t>11-9-2024</a:t>
+              <a:t>18-9-2024</a:t>
             </a:fld>
             <a:endParaRPr lang="nl-NL"/>
           </a:p>
@@ -2122,7 +2122,7 @@
           <a:p>
             <a:fld id="{86DED964-D172-498F-BB83-2F7DE2692B37}" type="datetime1">
               <a:rPr lang="nl-NL" smtClean="0"/>
-              <a:t>11-9-2024</a:t>
+              <a:t>18-9-2024</a:t>
             </a:fld>
             <a:endParaRPr lang="nl-NL"/>
           </a:p>
@@ -2410,7 +2410,7 @@
           <a:p>
             <a:fld id="{230F72AC-D91D-48F5-81B4-4889AEA39D06}" type="datetime1">
               <a:rPr lang="nl-NL" smtClean="0"/>
-              <a:t>11-9-2024</a:t>
+              <a:t>18-9-2024</a:t>
             </a:fld>
             <a:endParaRPr lang="nl-NL"/>
           </a:p>
@@ -2690,7 +2690,7 @@
           <a:p>
             <a:fld id="{A0669485-26A9-497C-AD22-BCEA88DF9055}" type="datetime1">
               <a:rPr lang="nl-NL" smtClean="0"/>
-              <a:t>11-9-2024</a:t>
+              <a:t>18-9-2024</a:t>
             </a:fld>
             <a:endParaRPr lang="nl-NL"/>
           </a:p>
@@ -3117,7 +3117,7 @@
           <a:p>
             <a:fld id="{6216D00C-0C62-40DF-B6FF-B9A70701552F}" type="datetime1">
               <a:rPr lang="nl-NL" smtClean="0"/>
-              <a:t>11-9-2024</a:t>
+              <a:t>18-9-2024</a:t>
             </a:fld>
             <a:endParaRPr lang="nl-NL"/>
           </a:p>
@@ -3271,7 +3271,7 @@
           <a:p>
             <a:fld id="{88FE9515-DD39-459B-B4EF-789D74C861A5}" type="datetime1">
               <a:rPr lang="nl-NL" smtClean="0"/>
-              <a:t>11-9-2024</a:t>
+              <a:t>18-9-2024</a:t>
             </a:fld>
             <a:endParaRPr lang="nl-NL"/>
           </a:p>
@@ -3396,7 +3396,7 @@
           <a:p>
             <a:fld id="{DFA27954-A76F-4E23-8576-A7D9667CDBCC}" type="datetime1">
               <a:rPr lang="nl-NL" smtClean="0"/>
-              <a:t>11-9-2024</a:t>
+              <a:t>18-9-2024</a:t>
             </a:fld>
             <a:endParaRPr lang="nl-NL"/>
           </a:p>
@@ -3721,7 +3721,7 @@
           <a:p>
             <a:fld id="{53C17D54-D850-41AA-94F6-0F7316E4F326}" type="datetime1">
               <a:rPr lang="nl-NL" smtClean="0"/>
-              <a:t>11-9-2024</a:t>
+              <a:t>18-9-2024</a:t>
             </a:fld>
             <a:endParaRPr lang="nl-NL"/>
           </a:p>
@@ -4022,7 +4022,7 @@
           <a:p>
             <a:fld id="{0596A96E-3739-43D3-93E5-DAA507EA7B79}" type="datetime1">
               <a:rPr lang="nl-NL" smtClean="0"/>
-              <a:t>11-9-2024</a:t>
+              <a:t>18-9-2024</a:t>
             </a:fld>
             <a:endParaRPr lang="nl-NL"/>
           </a:p>
@@ -4277,7 +4277,7 @@
           <a:p>
             <a:fld id="{CFBB0748-A22F-4137-ADB1-6D5A09F7B1DF}" type="datetime1">
               <a:rPr lang="nl-NL" smtClean="0"/>
-              <a:t>11-9-2024</a:t>
+              <a:t>18-9-2024</a:t>
             </a:fld>
             <a:endParaRPr lang="nl-NL"/>
           </a:p>
@@ -4940,13 +4940,13 @@
   <p:clrMapOvr>
     <a:masterClrMapping/>
   </p:clrMapOvr>
-  <mc:AlternateContent xmlns:mc="http://schemas.openxmlformats.org/markup-compatibility/2006">
-    <mc:Choice xmlns:p159="http://schemas.microsoft.com/office/powerpoint/2015/09/main" Requires="p159">
+  <mc:AlternateContent xmlns:mc="http://schemas.openxmlformats.org/markup-compatibility/2006" xmlns:p159="http://schemas.microsoft.com/office/powerpoint/2015/09/main">
+    <mc:Choice Requires="p159">
       <p:transition spd="slow">
         <p159:morph option="byObject"/>
       </p:transition>
     </mc:Choice>
-    <mc:Fallback>
+    <mc:Fallback xmlns="">
       <p:transition spd="slow">
         <p:fade/>
       </p:transition>
@@ -5054,13 +5054,13 @@
   <p:clrMapOvr>
     <a:masterClrMapping/>
   </p:clrMapOvr>
-  <mc:AlternateContent xmlns:mc="http://schemas.openxmlformats.org/markup-compatibility/2006">
-    <mc:Choice xmlns:p159="http://schemas.microsoft.com/office/powerpoint/2015/09/main" Requires="p159">
+  <mc:AlternateContent xmlns:mc="http://schemas.openxmlformats.org/markup-compatibility/2006" xmlns:p159="http://schemas.microsoft.com/office/powerpoint/2015/09/main">
+    <mc:Choice Requires="p159">
       <p:transition spd="slow">
         <p159:morph option="byObject"/>
       </p:transition>
     </mc:Choice>
-    <mc:Fallback>
+    <mc:Fallback xmlns="">
       <p:transition spd="slow">
         <p:fade/>
       </p:transition>
@@ -5168,13 +5168,13 @@
   <p:clrMapOvr>
     <a:masterClrMapping/>
   </p:clrMapOvr>
-  <mc:AlternateContent xmlns:mc="http://schemas.openxmlformats.org/markup-compatibility/2006">
-    <mc:Choice xmlns:p159="http://schemas.microsoft.com/office/powerpoint/2015/09/main" Requires="p159">
+  <mc:AlternateContent xmlns:mc="http://schemas.openxmlformats.org/markup-compatibility/2006" xmlns:p159="http://schemas.microsoft.com/office/powerpoint/2015/09/main">
+    <mc:Choice Requires="p159">
       <p:transition spd="slow">
         <p159:morph option="byObject"/>
       </p:transition>
     </mc:Choice>
-    <mc:Fallback>
+    <mc:Fallback xmlns="">
       <p:transition spd="slow">
         <p:fade/>
       </p:transition>
@@ -5318,13 +5318,13 @@
   <p:clrMapOvr>
     <a:masterClrMapping/>
   </p:clrMapOvr>
-  <mc:AlternateContent xmlns:mc="http://schemas.openxmlformats.org/markup-compatibility/2006">
-    <mc:Choice xmlns:p159="http://schemas.microsoft.com/office/powerpoint/2015/09/main" Requires="p159">
+  <mc:AlternateContent xmlns:mc="http://schemas.openxmlformats.org/markup-compatibility/2006" xmlns:p159="http://schemas.microsoft.com/office/powerpoint/2015/09/main">
+    <mc:Choice Requires="p159">
       <p:transition spd="slow">
         <p159:morph option="byObject"/>
       </p:transition>
     </mc:Choice>
-    <mc:Fallback>
+    <mc:Fallback xmlns="">
       <p:transition spd="slow">
         <p:fade/>
       </p:transition>
@@ -5432,13 +5432,13 @@
   <p:clrMapOvr>
     <a:masterClrMapping/>
   </p:clrMapOvr>
-  <mc:AlternateContent xmlns:mc="http://schemas.openxmlformats.org/markup-compatibility/2006">
-    <mc:Choice xmlns:p159="http://schemas.microsoft.com/office/powerpoint/2015/09/main" Requires="p159">
+  <mc:AlternateContent xmlns:mc="http://schemas.openxmlformats.org/markup-compatibility/2006" xmlns:p159="http://schemas.microsoft.com/office/powerpoint/2015/09/main">
+    <mc:Choice Requires="p159">
       <p:transition spd="slow">
         <p159:morph option="byObject"/>
       </p:transition>
     </mc:Choice>
-    <mc:Fallback>
+    <mc:Fallback xmlns="">
       <p:transition spd="slow">
         <p:fade/>
       </p:transition>
@@ -5546,13 +5546,13 @@
   <p:clrMapOvr>
     <a:masterClrMapping/>
   </p:clrMapOvr>
-  <mc:AlternateContent xmlns:mc="http://schemas.openxmlformats.org/markup-compatibility/2006">
-    <mc:Choice xmlns:p159="http://schemas.microsoft.com/office/powerpoint/2015/09/main" Requires="p159">
+  <mc:AlternateContent xmlns:mc="http://schemas.openxmlformats.org/markup-compatibility/2006" xmlns:p159="http://schemas.microsoft.com/office/powerpoint/2015/09/main">
+    <mc:Choice Requires="p159">
       <p:transition spd="slow">
         <p159:morph option="byObject"/>
       </p:transition>
     </mc:Choice>
-    <mc:Fallback>
+    <mc:Fallback xmlns="">
       <p:transition spd="slow">
         <p:fade/>
       </p:transition>
@@ -5770,13 +5770,13 @@
   <p:clrMapOvr>
     <a:masterClrMapping/>
   </p:clrMapOvr>
-  <mc:AlternateContent xmlns:mc="http://schemas.openxmlformats.org/markup-compatibility/2006">
-    <mc:Choice xmlns:p159="http://schemas.microsoft.com/office/powerpoint/2015/09/main" Requires="p159">
+  <mc:AlternateContent xmlns:mc="http://schemas.openxmlformats.org/markup-compatibility/2006" xmlns:p159="http://schemas.microsoft.com/office/powerpoint/2015/09/main">
+    <mc:Choice Requires="p159">
       <p:transition spd="slow">
         <p159:morph option="byObject"/>
       </p:transition>
     </mc:Choice>
-    <mc:Fallback>
+    <mc:Fallback xmlns="">
       <p:transition spd="slow">
         <p:fade/>
       </p:transition>
@@ -6114,13 +6114,13 @@
   <p:clrMapOvr>
     <a:masterClrMapping/>
   </p:clrMapOvr>
-  <mc:AlternateContent xmlns:mc="http://schemas.openxmlformats.org/markup-compatibility/2006">
-    <mc:Choice xmlns:p159="http://schemas.microsoft.com/office/powerpoint/2015/09/main" Requires="p159">
+  <mc:AlternateContent xmlns:mc="http://schemas.openxmlformats.org/markup-compatibility/2006" xmlns:p159="http://schemas.microsoft.com/office/powerpoint/2015/09/main">
+    <mc:Choice Requires="p159">
       <p:transition spd="slow">
         <p159:morph option="byObject"/>
       </p:transition>
     </mc:Choice>
-    <mc:Fallback>
+    <mc:Fallback xmlns="">
       <p:transition spd="slow">
         <p:fade/>
       </p:transition>
@@ -6193,13 +6193,13 @@
   <p:clrMapOvr>
     <a:masterClrMapping/>
   </p:clrMapOvr>
-  <mc:AlternateContent xmlns:mc="http://schemas.openxmlformats.org/markup-compatibility/2006">
-    <mc:Choice xmlns:p159="http://schemas.microsoft.com/office/powerpoint/2015/09/main" Requires="p159">
+  <mc:AlternateContent xmlns:mc="http://schemas.openxmlformats.org/markup-compatibility/2006" xmlns:p159="http://schemas.microsoft.com/office/powerpoint/2015/09/main">
+    <mc:Choice Requires="p159">
       <p:transition spd="slow">
         <p159:morph option="byObject"/>
       </p:transition>
     </mc:Choice>
-    <mc:Fallback>
+    <mc:Fallback xmlns="">
       <p:transition spd="slow">
         <p:fade/>
       </p:transition>
@@ -7215,13 +7215,13 @@
   <p:clrMapOvr>
     <a:masterClrMapping/>
   </p:clrMapOvr>
-  <mc:AlternateContent xmlns:mc="http://schemas.openxmlformats.org/markup-compatibility/2006">
-    <mc:Choice xmlns:p159="http://schemas.microsoft.com/office/powerpoint/2015/09/main" Requires="p159">
+  <mc:AlternateContent xmlns:mc="http://schemas.openxmlformats.org/markup-compatibility/2006" xmlns:p159="http://schemas.microsoft.com/office/powerpoint/2015/09/main">
+    <mc:Choice Requires="p159">
       <p:transition spd="slow">
         <p159:morph option="byObject"/>
       </p:transition>
     </mc:Choice>
-    <mc:Fallback>
+    <mc:Fallback xmlns="">
       <p:transition spd="slow">
         <p:fade/>
       </p:transition>
@@ -9177,13 +9177,13 @@
   <p:clrMapOvr>
     <a:masterClrMapping/>
   </p:clrMapOvr>
-  <mc:AlternateContent xmlns:mc="http://schemas.openxmlformats.org/markup-compatibility/2006">
-    <mc:Choice xmlns:p159="http://schemas.microsoft.com/office/powerpoint/2015/09/main" Requires="p159">
+  <mc:AlternateContent xmlns:mc="http://schemas.openxmlformats.org/markup-compatibility/2006" xmlns:p159="http://schemas.microsoft.com/office/powerpoint/2015/09/main">
+    <mc:Choice Requires="p159">
       <p:transition spd="slow">
         <p159:morph option="byObject"/>
       </p:transition>
     </mc:Choice>
-    <mc:Fallback>
+    <mc:Fallback xmlns="">
       <p:transition spd="slow">
         <p:fade/>
       </p:transition>
@@ -9256,13 +9256,13 @@
   <p:clrMapOvr>
     <a:masterClrMapping/>
   </p:clrMapOvr>
-  <mc:AlternateContent xmlns:mc="http://schemas.openxmlformats.org/markup-compatibility/2006">
-    <mc:Choice xmlns:p159="http://schemas.microsoft.com/office/powerpoint/2015/09/main" Requires="p159">
+  <mc:AlternateContent xmlns:mc="http://schemas.openxmlformats.org/markup-compatibility/2006" xmlns:p159="http://schemas.microsoft.com/office/powerpoint/2015/09/main">
+    <mc:Choice Requires="p159">
       <p:transition spd="slow">
         <p159:morph option="byObject"/>
       </p:transition>
     </mc:Choice>
-    <mc:Fallback>
+    <mc:Fallback xmlns="">
       <p:transition spd="slow">
         <p:fade/>
       </p:transition>
@@ -15153,7 +15153,7 @@
 </file>
 
 <file path=ppt/slides/slide36.xml><?xml version="1.0" encoding="utf-8"?>
-<p:sld xmlns:a="http://schemas.openxmlformats.org/drawingml/2006/main" xmlns:r="http://schemas.openxmlformats.org/officeDocument/2006/relationships" xmlns:p="http://schemas.openxmlformats.org/presentationml/2006/main">
+<p:sld xmlns:a="http://schemas.openxmlformats.org/drawingml/2006/main" xmlns:r="http://schemas.openxmlformats.org/officeDocument/2006/relationships" xmlns:p="http://schemas.openxmlformats.org/presentationml/2006/main" show="0">
   <p:cSld>
     <p:spTree>
       <p:nvGrpSpPr>
@@ -15214,13 +15214,13 @@
   <p:clrMapOvr>
     <a:masterClrMapping/>
   </p:clrMapOvr>
-  <mc:AlternateContent xmlns:mc="http://schemas.openxmlformats.org/markup-compatibility/2006" xmlns:p159="http://schemas.microsoft.com/office/powerpoint/2015/09/main">
-    <mc:Choice Requires="p159">
+  <mc:AlternateContent xmlns:mc="http://schemas.openxmlformats.org/markup-compatibility/2006">
+    <mc:Choice xmlns:p159="http://schemas.microsoft.com/office/powerpoint/2015/09/main" Requires="p159">
       <p:transition spd="slow">
         <p159:morph option="byObject"/>
       </p:transition>
     </mc:Choice>
-    <mc:Fallback xmlns="">
+    <mc:Fallback>
       <p:transition spd="slow">
         <p:fade/>
       </p:transition>
@@ -15230,7 +15230,7 @@
 </file>
 
 <file path=ppt/slides/slide37.xml><?xml version="1.0" encoding="utf-8"?>
-<p:sld xmlns:a="http://schemas.openxmlformats.org/drawingml/2006/main" xmlns:r="http://schemas.openxmlformats.org/officeDocument/2006/relationships" xmlns:p="http://schemas.openxmlformats.org/presentationml/2006/main">
+<p:sld xmlns:a="http://schemas.openxmlformats.org/drawingml/2006/main" xmlns:r="http://schemas.openxmlformats.org/officeDocument/2006/relationships" xmlns:p="http://schemas.openxmlformats.org/presentationml/2006/main" show="0">
   <p:cSld>
     <p:spTree>
       <p:nvGrpSpPr>
@@ -15565,13 +15565,13 @@
   <p:clrMapOvr>
     <a:masterClrMapping/>
   </p:clrMapOvr>
-  <mc:AlternateContent xmlns:mc="http://schemas.openxmlformats.org/markup-compatibility/2006" xmlns:p159="http://schemas.microsoft.com/office/powerpoint/2015/09/main">
-    <mc:Choice Requires="p159">
+  <mc:AlternateContent xmlns:mc="http://schemas.openxmlformats.org/markup-compatibility/2006">
+    <mc:Choice xmlns:p159="http://schemas.microsoft.com/office/powerpoint/2015/09/main" Requires="p159">
       <p:transition spd="slow">
         <p159:morph option="byObject"/>
       </p:transition>
     </mc:Choice>
-    <mc:Fallback xmlns="">
+    <mc:Fallback>
       <p:transition spd="slow">
         <p:fade/>
       </p:transition>
@@ -15581,7 +15581,7 @@
 </file>
 
 <file path=ppt/slides/slide38.xml><?xml version="1.0" encoding="utf-8"?>
-<p:sld xmlns:a="http://schemas.openxmlformats.org/drawingml/2006/main" xmlns:r="http://schemas.openxmlformats.org/officeDocument/2006/relationships" xmlns:p="http://schemas.openxmlformats.org/presentationml/2006/main">
+<p:sld xmlns:a="http://schemas.openxmlformats.org/drawingml/2006/main" xmlns:r="http://schemas.openxmlformats.org/officeDocument/2006/relationships" xmlns:p="http://schemas.openxmlformats.org/presentationml/2006/main" show="0">
   <p:cSld>
     <p:spTree>
       <p:nvGrpSpPr>
@@ -15934,13 +15934,13 @@
   <p:clrMapOvr>
     <a:masterClrMapping/>
   </p:clrMapOvr>
-  <mc:AlternateContent xmlns:mc="http://schemas.openxmlformats.org/markup-compatibility/2006" xmlns:p159="http://schemas.microsoft.com/office/powerpoint/2015/09/main">
-    <mc:Choice Requires="p159">
+  <mc:AlternateContent xmlns:mc="http://schemas.openxmlformats.org/markup-compatibility/2006">
+    <mc:Choice xmlns:p159="http://schemas.microsoft.com/office/powerpoint/2015/09/main" Requires="p159">
       <p:transition spd="slow">
         <p159:morph option="byObject"/>
       </p:transition>
     </mc:Choice>
-    <mc:Fallback xmlns="">
+    <mc:Fallback>
       <p:transition spd="slow">
         <p:fade/>
       </p:transition>
@@ -15950,7 +15950,7 @@
 </file>
 
 <file path=ppt/slides/slide39.xml><?xml version="1.0" encoding="utf-8"?>
-<p:sld xmlns:a="http://schemas.openxmlformats.org/drawingml/2006/main" xmlns:r="http://schemas.openxmlformats.org/officeDocument/2006/relationships" xmlns:p="http://schemas.openxmlformats.org/presentationml/2006/main">
+<p:sld xmlns:a="http://schemas.openxmlformats.org/drawingml/2006/main" xmlns:r="http://schemas.openxmlformats.org/officeDocument/2006/relationships" xmlns:p="http://schemas.openxmlformats.org/presentationml/2006/main" show="0">
   <p:cSld>
     <p:spTree>
       <p:nvGrpSpPr>
@@ -16426,13 +16426,13 @@
   <p:clrMapOvr>
     <a:masterClrMapping/>
   </p:clrMapOvr>
-  <mc:AlternateContent xmlns:mc="http://schemas.openxmlformats.org/markup-compatibility/2006" xmlns:p159="http://schemas.microsoft.com/office/powerpoint/2015/09/main">
-    <mc:Choice Requires="p159">
+  <mc:AlternateContent xmlns:mc="http://schemas.openxmlformats.org/markup-compatibility/2006">
+    <mc:Choice xmlns:p159="http://schemas.microsoft.com/office/powerpoint/2015/09/main" Requires="p159">
       <p:transition spd="slow">
         <p159:morph option="byObject"/>
       </p:transition>
     </mc:Choice>
-    <mc:Fallback xmlns="">
+    <mc:Fallback>
       <p:transition spd="slow">
         <p:fade/>
       </p:transition>
@@ -16853,7 +16853,7 @@
 </file>
 
 <file path=ppt/slides/slide40.xml><?xml version="1.0" encoding="utf-8"?>
-<p:sld xmlns:a="http://schemas.openxmlformats.org/drawingml/2006/main" xmlns:r="http://schemas.openxmlformats.org/officeDocument/2006/relationships" xmlns:p="http://schemas.openxmlformats.org/presentationml/2006/main">
+<p:sld xmlns:a="http://schemas.openxmlformats.org/drawingml/2006/main" xmlns:r="http://schemas.openxmlformats.org/officeDocument/2006/relationships" xmlns:p="http://schemas.openxmlformats.org/presentationml/2006/main" show="0">
   <p:cSld>
     <p:spTree>
       <p:nvGrpSpPr>
@@ -17047,13 +17047,13 @@
   <p:clrMapOvr>
     <a:masterClrMapping/>
   </p:clrMapOvr>
-  <mc:AlternateContent xmlns:mc="http://schemas.openxmlformats.org/markup-compatibility/2006" xmlns:p159="http://schemas.microsoft.com/office/powerpoint/2015/09/main">
-    <mc:Choice Requires="p159">
+  <mc:AlternateContent xmlns:mc="http://schemas.openxmlformats.org/markup-compatibility/2006">
+    <mc:Choice xmlns:p159="http://schemas.microsoft.com/office/powerpoint/2015/09/main" Requires="p159">
       <p:transition spd="slow">
         <p159:morph option="byObject"/>
       </p:transition>
     </mc:Choice>
-    <mc:Fallback xmlns="">
+    <mc:Fallback>
       <p:transition spd="slow">
         <p:fade/>
       </p:transition>
@@ -19205,13 +19205,13 @@
   <p:clrMapOvr>
     <a:masterClrMapping/>
   </p:clrMapOvr>
-  <mc:AlternateContent xmlns:mc="http://schemas.openxmlformats.org/markup-compatibility/2006">
-    <mc:Choice xmlns:p159="http://schemas.microsoft.com/office/powerpoint/2015/09/main" Requires="p159">
+  <mc:AlternateContent xmlns:mc="http://schemas.openxmlformats.org/markup-compatibility/2006" xmlns:p159="http://schemas.microsoft.com/office/powerpoint/2015/09/main">
+    <mc:Choice Requires="p159">
       <p:transition spd="slow">
         <p159:morph option="byObject"/>
       </p:transition>
     </mc:Choice>
-    <mc:Fallback>
+    <mc:Fallback xmlns="">
       <p:transition spd="slow">
         <p:fade/>
       </p:transition>
@@ -19481,13 +19481,13 @@
   <p:clrMapOvr>
     <a:masterClrMapping/>
   </p:clrMapOvr>
-  <mc:AlternateContent xmlns:mc="http://schemas.openxmlformats.org/markup-compatibility/2006">
-    <mc:Choice xmlns:p159="http://schemas.microsoft.com/office/powerpoint/2015/09/main" Requires="p159">
+  <mc:AlternateContent xmlns:mc="http://schemas.openxmlformats.org/markup-compatibility/2006" xmlns:p159="http://schemas.microsoft.com/office/powerpoint/2015/09/main">
+    <mc:Choice Requires="p159">
       <p:transition spd="slow">
         <p159:morph option="byObject"/>
       </p:transition>
     </mc:Choice>
-    <mc:Fallback>
+    <mc:Fallback xmlns="">
       <p:transition spd="slow">
         <p:fade/>
       </p:transition>
@@ -19673,13 +19673,13 @@
   <p:clrMapOvr>
     <a:masterClrMapping/>
   </p:clrMapOvr>
-  <mc:AlternateContent xmlns:mc="http://schemas.openxmlformats.org/markup-compatibility/2006">
-    <mc:Choice xmlns:p159="http://schemas.microsoft.com/office/powerpoint/2015/09/main" Requires="p159">
+  <mc:AlternateContent xmlns:mc="http://schemas.openxmlformats.org/markup-compatibility/2006" xmlns:p159="http://schemas.microsoft.com/office/powerpoint/2015/09/main">
+    <mc:Choice Requires="p159">
       <p:transition spd="slow">
         <p159:morph option="byObject"/>
       </p:transition>
     </mc:Choice>
-    <mc:Fallback>
+    <mc:Fallback xmlns="">
       <p:transition spd="slow">
         <p:fade/>
       </p:transition>

--- a/assets/ppt/data_exploration.pptx
+++ b/assets/ppt/data_exploration.pptx
@@ -5,7 +5,7 @@
     <p:sldMasterId id="2147483648" r:id="rId1"/>
   </p:sldMasterIdLst>
   <p:notesMasterIdLst>
-    <p:notesMasterId r:id="rId42"/>
+    <p:notesMasterId r:id="rId46"/>
   </p:notesMasterIdLst>
   <p:sldIdLst>
     <p:sldId id="257" r:id="rId2"/>
@@ -35,19 +35,23 @@
     <p:sldId id="293" r:id="rId26"/>
     <p:sldId id="259" r:id="rId27"/>
     <p:sldId id="274" r:id="rId28"/>
-    <p:sldId id="275" r:id="rId29"/>
-    <p:sldId id="279" r:id="rId30"/>
-    <p:sldId id="278" r:id="rId31"/>
-    <p:sldId id="295" r:id="rId32"/>
-    <p:sldId id="276" r:id="rId33"/>
-    <p:sldId id="277" r:id="rId34"/>
-    <p:sldId id="296" r:id="rId35"/>
-    <p:sldId id="294" r:id="rId36"/>
-    <p:sldId id="268" r:id="rId37"/>
-    <p:sldId id="269" r:id="rId38"/>
-    <p:sldId id="271" r:id="rId39"/>
-    <p:sldId id="272" r:id="rId40"/>
-    <p:sldId id="267" r:id="rId41"/>
+    <p:sldId id="297" r:id="rId29"/>
+    <p:sldId id="298" r:id="rId30"/>
+    <p:sldId id="299" r:id="rId31"/>
+    <p:sldId id="300" r:id="rId32"/>
+    <p:sldId id="275" r:id="rId33"/>
+    <p:sldId id="279" r:id="rId34"/>
+    <p:sldId id="278" r:id="rId35"/>
+    <p:sldId id="295" r:id="rId36"/>
+    <p:sldId id="276" r:id="rId37"/>
+    <p:sldId id="277" r:id="rId38"/>
+    <p:sldId id="296" r:id="rId39"/>
+    <p:sldId id="294" r:id="rId40"/>
+    <p:sldId id="268" r:id="rId41"/>
+    <p:sldId id="269" r:id="rId42"/>
+    <p:sldId id="271" r:id="rId43"/>
+    <p:sldId id="272" r:id="rId44"/>
+    <p:sldId id="267" r:id="rId45"/>
   </p:sldIdLst>
   <p:sldSz cx="12192000" cy="6858000"/>
   <p:notesSz cx="6858000" cy="9144000"/>
@@ -163,6 +167,198 @@
     </p:ext>
   </p:extLst>
 </p:presentation>
+</file>
+
+<file path=ppt/revisionInfo.xml><?xml version="1.0" encoding="utf-8"?>
+<p1510:revInfo xmlns:a="http://schemas.openxmlformats.org/drawingml/2006/main" xmlns:r="http://schemas.openxmlformats.org/officeDocument/2006/relationships" xmlns:p1510="http://schemas.microsoft.com/office/powerpoint/2015/10/main">
+  <p1510:revLst>
+    <p1510:client id="{2B1F4453-3A08-4063-8531-83E4A0933A57}" v="13" dt="2024-11-11T16:41:13.162"/>
+  </p1510:revLst>
+</p1510:revInfo>
+</file>
+
+<file path=ppt/changesInfos/changesInfo1.xml><?xml version="1.0" encoding="utf-8"?>
+<pc:chgInfo xmlns:a="http://schemas.openxmlformats.org/drawingml/2006/main" xmlns:r="http://schemas.openxmlformats.org/officeDocument/2006/relationships" xmlns:ac="http://schemas.microsoft.com/office/drawing/2013/main/command" xmlns:pc="http://schemas.microsoft.com/office/powerpoint/2013/main/command">
+  <pc:docChgLst>
+    <pc:chgData name="Della Morte, D. (David)" userId="3c5e67f7-a0bf-49c4-b007-9de27f055a84" providerId="ADAL" clId="{2B1F4453-3A08-4063-8531-83E4A0933A57}"/>
+    <pc:docChg chg="undo custSel addSld delSld modSld">
+      <pc:chgData name="Della Morte, D. (David)" userId="3c5e67f7-a0bf-49c4-b007-9de27f055a84" providerId="ADAL" clId="{2B1F4453-3A08-4063-8531-83E4A0933A57}" dt="2024-11-11T16:46:30.274" v="1343" actId="1035"/>
+      <pc:docMkLst>
+        <pc:docMk/>
+      </pc:docMkLst>
+      <pc:sldChg chg="addSp modSp mod">
+        <pc:chgData name="Della Morte, D. (David)" userId="3c5e67f7-a0bf-49c4-b007-9de27f055a84" providerId="ADAL" clId="{2B1F4453-3A08-4063-8531-83E4A0933A57}" dt="2024-11-11T16:17:00.729" v="238" actId="20577"/>
+        <pc:sldMkLst>
+          <pc:docMk/>
+          <pc:sldMk cId="2469779366" sldId="274"/>
+        </pc:sldMkLst>
+        <pc:spChg chg="add mod">
+          <ac:chgData name="Della Morte, D. (David)" userId="3c5e67f7-a0bf-49c4-b007-9de27f055a84" providerId="ADAL" clId="{2B1F4453-3A08-4063-8531-83E4A0933A57}" dt="2024-11-11T16:16:49.495" v="230" actId="20577"/>
+          <ac:spMkLst>
+            <pc:docMk/>
+            <pc:sldMk cId="2469779366" sldId="274"/>
+            <ac:spMk id="2" creationId="{1B94D29F-EC16-B936-B5E6-3D46ADDD2F75}"/>
+          </ac:spMkLst>
+        </pc:spChg>
+        <pc:spChg chg="add mod">
+          <ac:chgData name="Della Morte, D. (David)" userId="3c5e67f7-a0bf-49c4-b007-9de27f055a84" providerId="ADAL" clId="{2B1F4453-3A08-4063-8531-83E4A0933A57}" dt="2024-11-11T16:17:00.729" v="238" actId="20577"/>
+          <ac:spMkLst>
+            <pc:docMk/>
+            <pc:sldMk cId="2469779366" sldId="274"/>
+            <ac:spMk id="4" creationId="{21CA0B5B-9788-C35A-440F-872467DA6F45}"/>
+          </ac:spMkLst>
+        </pc:spChg>
+        <pc:picChg chg="add mod">
+          <ac:chgData name="Della Morte, D. (David)" userId="3c5e67f7-a0bf-49c4-b007-9de27f055a84" providerId="ADAL" clId="{2B1F4453-3A08-4063-8531-83E4A0933A57}" dt="2024-11-11T13:31:21.433" v="7" actId="1076"/>
+          <ac:picMkLst>
+            <pc:docMk/>
+            <pc:sldMk cId="2469779366" sldId="274"/>
+            <ac:picMk id="3" creationId="{FEE82702-62C0-A793-AC54-171266B00338}"/>
+          </ac:picMkLst>
+        </pc:picChg>
+        <pc:picChg chg="add mod">
+          <ac:chgData name="Della Morte, D. (David)" userId="3c5e67f7-a0bf-49c4-b007-9de27f055a84" providerId="ADAL" clId="{2B1F4453-3A08-4063-8531-83E4A0933A57}" dt="2024-11-11T13:31:37.816" v="12" actId="1076"/>
+          <ac:picMkLst>
+            <pc:docMk/>
+            <pc:sldMk cId="2469779366" sldId="274"/>
+            <ac:picMk id="5" creationId="{D90762A5-DE7D-A3BD-3D4F-4A044C11AEED}"/>
+          </ac:picMkLst>
+        </pc:picChg>
+      </pc:sldChg>
+      <pc:sldChg chg="addSp delSp modSp new mod">
+        <pc:chgData name="Della Morte, D. (David)" userId="3c5e67f7-a0bf-49c4-b007-9de27f055a84" providerId="ADAL" clId="{2B1F4453-3A08-4063-8531-83E4A0933A57}" dt="2024-11-11T16:20:45.988" v="593" actId="14100"/>
+        <pc:sldMkLst>
+          <pc:docMk/>
+          <pc:sldMk cId="1189710876" sldId="297"/>
+        </pc:sldMkLst>
+        <pc:spChg chg="add mod">
+          <ac:chgData name="Della Morte, D. (David)" userId="3c5e67f7-a0bf-49c4-b007-9de27f055a84" providerId="ADAL" clId="{2B1F4453-3A08-4063-8531-83E4A0933A57}" dt="2024-11-11T16:20:45.988" v="593" actId="14100"/>
+          <ac:spMkLst>
+            <pc:docMk/>
+            <pc:sldMk cId="1189710876" sldId="297"/>
+            <ac:spMk id="8" creationId="{2DD48FE3-4279-35A8-1C5C-CCECF3CD6E60}"/>
+          </ac:spMkLst>
+        </pc:spChg>
+        <pc:picChg chg="add del mod">
+          <ac:chgData name="Della Morte, D. (David)" userId="3c5e67f7-a0bf-49c4-b007-9de27f055a84" providerId="ADAL" clId="{2B1F4453-3A08-4063-8531-83E4A0933A57}" dt="2024-11-11T16:13:32.067" v="18" actId="478"/>
+          <ac:picMkLst>
+            <pc:docMk/>
+            <pc:sldMk cId="1189710876" sldId="297"/>
+            <ac:picMk id="3" creationId="{FFE98BA2-B362-B1E6-183B-FFBCF4598E4C}"/>
+          </ac:picMkLst>
+        </pc:picChg>
+        <pc:picChg chg="add mod">
+          <ac:chgData name="Della Morte, D. (David)" userId="3c5e67f7-a0bf-49c4-b007-9de27f055a84" providerId="ADAL" clId="{2B1F4453-3A08-4063-8531-83E4A0933A57}" dt="2024-11-11T16:20:40.895" v="591" actId="1076"/>
+          <ac:picMkLst>
+            <pc:docMk/>
+            <pc:sldMk cId="1189710876" sldId="297"/>
+            <ac:picMk id="5" creationId="{441E34C8-6CFE-1EA6-C69B-CEB8B34A862F}"/>
+          </ac:picMkLst>
+        </pc:picChg>
+        <pc:picChg chg="add del mod">
+          <ac:chgData name="Della Morte, D. (David)" userId="3c5e67f7-a0bf-49c4-b007-9de27f055a84" providerId="ADAL" clId="{2B1F4453-3A08-4063-8531-83E4A0933A57}" dt="2024-11-11T16:15:25.513" v="29" actId="21"/>
+          <ac:picMkLst>
+            <pc:docMk/>
+            <pc:sldMk cId="1189710876" sldId="297"/>
+            <ac:picMk id="7" creationId="{DE7877D4-2099-8E25-FA34-A24AB4707485}"/>
+          </ac:picMkLst>
+        </pc:picChg>
+      </pc:sldChg>
+      <pc:sldChg chg="new del">
+        <pc:chgData name="Della Morte, D. (David)" userId="3c5e67f7-a0bf-49c4-b007-9de27f055a84" providerId="ADAL" clId="{2B1F4453-3A08-4063-8531-83E4A0933A57}" dt="2024-11-11T13:15:30.404" v="1" actId="47"/>
+        <pc:sldMkLst>
+          <pc:docMk/>
+          <pc:sldMk cId="2529491958" sldId="297"/>
+        </pc:sldMkLst>
+      </pc:sldChg>
+      <pc:sldChg chg="addSp modSp new mod">
+        <pc:chgData name="Della Morte, D. (David)" userId="3c5e67f7-a0bf-49c4-b007-9de27f055a84" providerId="ADAL" clId="{2B1F4453-3A08-4063-8531-83E4A0933A57}" dt="2024-11-11T16:21:56.710" v="753" actId="20577"/>
+        <pc:sldMkLst>
+          <pc:docMk/>
+          <pc:sldMk cId="922527501" sldId="298"/>
+        </pc:sldMkLst>
+        <pc:spChg chg="add mod">
+          <ac:chgData name="Della Morte, D. (David)" userId="3c5e67f7-a0bf-49c4-b007-9de27f055a84" providerId="ADAL" clId="{2B1F4453-3A08-4063-8531-83E4A0933A57}" dt="2024-11-11T16:21:56.710" v="753" actId="20577"/>
+          <ac:spMkLst>
+            <pc:docMk/>
+            <pc:sldMk cId="922527501" sldId="298"/>
+            <ac:spMk id="2" creationId="{C81EEF24-450E-EB19-CF13-BD3DB05F867C}"/>
+          </ac:spMkLst>
+        </pc:spChg>
+        <pc:picChg chg="add mod">
+          <ac:chgData name="Della Morte, D. (David)" userId="3c5e67f7-a0bf-49c4-b007-9de27f055a84" providerId="ADAL" clId="{2B1F4453-3A08-4063-8531-83E4A0933A57}" dt="2024-11-11T16:15:32.014" v="33" actId="14100"/>
+          <ac:picMkLst>
+            <pc:docMk/>
+            <pc:sldMk cId="922527501" sldId="298"/>
+            <ac:picMk id="7" creationId="{DE7877D4-2099-8E25-FA34-A24AB4707485}"/>
+          </ac:picMkLst>
+        </pc:picChg>
+      </pc:sldChg>
+      <pc:sldChg chg="addSp modSp new mod">
+        <pc:chgData name="Della Morte, D. (David)" userId="3c5e67f7-a0bf-49c4-b007-9de27f055a84" providerId="ADAL" clId="{2B1F4453-3A08-4063-8531-83E4A0933A57}" dt="2024-11-11T16:46:30.274" v="1343" actId="1035"/>
+        <pc:sldMkLst>
+          <pc:docMk/>
+          <pc:sldMk cId="3880638226" sldId="299"/>
+        </pc:sldMkLst>
+        <pc:spChg chg="add mod">
+          <ac:chgData name="Della Morte, D. (David)" userId="3c5e67f7-a0bf-49c4-b007-9de27f055a84" providerId="ADAL" clId="{2B1F4453-3A08-4063-8531-83E4A0933A57}" dt="2024-11-11T16:46:30.274" v="1343" actId="1035"/>
+          <ac:spMkLst>
+            <pc:docMk/>
+            <pc:sldMk cId="3880638226" sldId="299"/>
+            <ac:spMk id="3" creationId="{130BE27A-1ED6-7354-2F83-252505E3F819}"/>
+          </ac:spMkLst>
+        </pc:spChg>
+        <pc:spChg chg="add mod">
+          <ac:chgData name="Della Morte, D. (David)" userId="3c5e67f7-a0bf-49c4-b007-9de27f055a84" providerId="ADAL" clId="{2B1F4453-3A08-4063-8531-83E4A0933A57}" dt="2024-11-11T16:34:38.528" v="1115" actId="20577"/>
+          <ac:spMkLst>
+            <pc:docMk/>
+            <pc:sldMk cId="3880638226" sldId="299"/>
+            <ac:spMk id="4" creationId="{06BFBDEA-9954-05ED-E78A-C9D1A327F3E5}"/>
+          </ac:spMkLst>
+        </pc:spChg>
+        <pc:spChg chg="add mod">
+          <ac:chgData name="Della Morte, D. (David)" userId="3c5e67f7-a0bf-49c4-b007-9de27f055a84" providerId="ADAL" clId="{2B1F4453-3A08-4063-8531-83E4A0933A57}" dt="2024-11-11T16:46:30.274" v="1343" actId="1035"/>
+          <ac:spMkLst>
+            <pc:docMk/>
+            <pc:sldMk cId="3880638226" sldId="299"/>
+            <ac:spMk id="6" creationId="{F0C8BBCE-D889-4C4B-1386-EC69452C9B7C}"/>
+          </ac:spMkLst>
+        </pc:spChg>
+        <pc:spChg chg="add mod">
+          <ac:chgData name="Della Morte, D. (David)" userId="3c5e67f7-a0bf-49c4-b007-9de27f055a84" providerId="ADAL" clId="{2B1F4453-3A08-4063-8531-83E4A0933A57}" dt="2024-11-11T16:46:30.274" v="1343" actId="1035"/>
+          <ac:spMkLst>
+            <pc:docMk/>
+            <pc:sldMk cId="3880638226" sldId="299"/>
+            <ac:spMk id="8" creationId="{99A21139-01FE-FF92-1AF2-C7B30C13A66D}"/>
+          </ac:spMkLst>
+        </pc:spChg>
+      </pc:sldChg>
+      <pc:sldChg chg="addSp modSp new mod">
+        <pc:chgData name="Della Morte, D. (David)" userId="3c5e67f7-a0bf-49c4-b007-9de27f055a84" providerId="ADAL" clId="{2B1F4453-3A08-4063-8531-83E4A0933A57}" dt="2024-11-11T16:45:27.369" v="1294" actId="20577"/>
+        <pc:sldMkLst>
+          <pc:docMk/>
+          <pc:sldMk cId="2717820577" sldId="300"/>
+        </pc:sldMkLst>
+        <pc:spChg chg="add mod">
+          <ac:chgData name="Della Morte, D. (David)" userId="3c5e67f7-a0bf-49c4-b007-9de27f055a84" providerId="ADAL" clId="{2B1F4453-3A08-4063-8531-83E4A0933A57}" dt="2024-11-11T16:45:27.369" v="1294" actId="20577"/>
+          <ac:spMkLst>
+            <pc:docMk/>
+            <pc:sldMk cId="2717820577" sldId="300"/>
+            <ac:spMk id="4" creationId="{344149A8-3AB5-2048-2C37-1E73986F28CD}"/>
+          </ac:spMkLst>
+        </pc:spChg>
+        <pc:picChg chg="add mod">
+          <ac:chgData name="Della Morte, D. (David)" userId="3c5e67f7-a0bf-49c4-b007-9de27f055a84" providerId="ADAL" clId="{2B1F4453-3A08-4063-8531-83E4A0933A57}" dt="2024-11-11T16:39:55.904" v="1173" actId="1076"/>
+          <ac:picMkLst>
+            <pc:docMk/>
+            <pc:sldMk cId="2717820577" sldId="300"/>
+            <ac:picMk id="3" creationId="{69407E6F-9533-2669-E1A4-8F7994D91E2D}"/>
+          </ac:picMkLst>
+        </pc:picChg>
+      </pc:sldChg>
+    </pc:docChg>
+  </pc:docChgLst>
+</pc:chgInfo>
 </file>
 
 <file path=ppt/charts/chart1.xml><?xml version="1.0" encoding="utf-8"?>
@@ -322,7 +518,7 @@
                     <a:cs typeface="+mn-cs"/>
                   </a:defRPr>
                 </a:pPr>
-                <a:endParaRPr lang="en-US"/>
+                <a:endParaRPr lang="en-150"/>
               </a:p>
             </c:txPr>
             <c:showLegendKey val="0"/>
@@ -431,7 +627,7 @@
               <a:cs typeface="+mn-cs"/>
             </a:defRPr>
           </a:pPr>
-          <a:endParaRPr lang="en-US"/>
+          <a:endParaRPr lang="en-150"/>
         </a:p>
       </c:txPr>
     </c:legend>
@@ -460,7 +656,7 @@
       <a:pPr>
         <a:defRPr/>
       </a:pPr>
-      <a:endParaRPr lang="en-US"/>
+      <a:endParaRPr lang="en-150"/>
     </a:p>
   </c:txPr>
   <c:externalData r:id="rId3">
@@ -1059,7 +1255,7 @@
           <a:p>
             <a:fld id="{511A67EE-E303-4967-962F-9A28980F7F51}" type="datetimeFigureOut">
               <a:rPr lang="nl-NL" smtClean="0"/>
-              <a:t>18-9-2024</a:t>
+              <a:t>11-11-2024</a:t>
             </a:fld>
             <a:endParaRPr lang="nl-NL"/>
           </a:p>
@@ -1476,7 +1672,7 @@
           <a:p>
             <a:fld id="{FED566F3-1D76-4AEC-ABE9-AFABCF495913}" type="datetime1">
               <a:rPr lang="nl-NL" smtClean="0"/>
-              <a:t>18-9-2024</a:t>
+              <a:t>11-11-2024</a:t>
             </a:fld>
             <a:endParaRPr lang="nl-NL"/>
           </a:p>
@@ -1688,7 +1884,7 @@
           <a:p>
             <a:fld id="{BC7E55A1-B228-4CF1-BFC3-6AC3B8574AC2}" type="datetime1">
               <a:rPr lang="nl-NL" smtClean="0"/>
-              <a:t>18-9-2024</a:t>
+              <a:t>11-11-2024</a:t>
             </a:fld>
             <a:endParaRPr lang="nl-NL"/>
           </a:p>
@@ -1910,7 +2106,7 @@
           <a:p>
             <a:fld id="{31AEBC58-6519-439D-8982-F0178170B57B}" type="datetime1">
               <a:rPr lang="nl-NL" smtClean="0"/>
-              <a:t>18-9-2024</a:t>
+              <a:t>11-11-2024</a:t>
             </a:fld>
             <a:endParaRPr lang="nl-NL"/>
           </a:p>
@@ -2122,7 +2318,7 @@
           <a:p>
             <a:fld id="{86DED964-D172-498F-BB83-2F7DE2692B37}" type="datetime1">
               <a:rPr lang="nl-NL" smtClean="0"/>
-              <a:t>18-9-2024</a:t>
+              <a:t>11-11-2024</a:t>
             </a:fld>
             <a:endParaRPr lang="nl-NL"/>
           </a:p>
@@ -2410,7 +2606,7 @@
           <a:p>
             <a:fld id="{230F72AC-D91D-48F5-81B4-4889AEA39D06}" type="datetime1">
               <a:rPr lang="nl-NL" smtClean="0"/>
-              <a:t>18-9-2024</a:t>
+              <a:t>11-11-2024</a:t>
             </a:fld>
             <a:endParaRPr lang="nl-NL"/>
           </a:p>
@@ -2690,7 +2886,7 @@
           <a:p>
             <a:fld id="{A0669485-26A9-497C-AD22-BCEA88DF9055}" type="datetime1">
               <a:rPr lang="nl-NL" smtClean="0"/>
-              <a:t>18-9-2024</a:t>
+              <a:t>11-11-2024</a:t>
             </a:fld>
             <a:endParaRPr lang="nl-NL"/>
           </a:p>
@@ -3117,7 +3313,7 @@
           <a:p>
             <a:fld id="{6216D00C-0C62-40DF-B6FF-B9A70701552F}" type="datetime1">
               <a:rPr lang="nl-NL" smtClean="0"/>
-              <a:t>18-9-2024</a:t>
+              <a:t>11-11-2024</a:t>
             </a:fld>
             <a:endParaRPr lang="nl-NL"/>
           </a:p>
@@ -3271,7 +3467,7 @@
           <a:p>
             <a:fld id="{88FE9515-DD39-459B-B4EF-789D74C861A5}" type="datetime1">
               <a:rPr lang="nl-NL" smtClean="0"/>
-              <a:t>18-9-2024</a:t>
+              <a:t>11-11-2024</a:t>
             </a:fld>
             <a:endParaRPr lang="nl-NL"/>
           </a:p>
@@ -3396,7 +3592,7 @@
           <a:p>
             <a:fld id="{DFA27954-A76F-4E23-8576-A7D9667CDBCC}" type="datetime1">
               <a:rPr lang="nl-NL" smtClean="0"/>
-              <a:t>18-9-2024</a:t>
+              <a:t>11-11-2024</a:t>
             </a:fld>
             <a:endParaRPr lang="nl-NL"/>
           </a:p>
@@ -3721,7 +3917,7 @@
           <a:p>
             <a:fld id="{53C17D54-D850-41AA-94F6-0F7316E4F326}" type="datetime1">
               <a:rPr lang="nl-NL" smtClean="0"/>
-              <a:t>18-9-2024</a:t>
+              <a:t>11-11-2024</a:t>
             </a:fld>
             <a:endParaRPr lang="nl-NL"/>
           </a:p>
@@ -4022,7 +4218,7 @@
           <a:p>
             <a:fld id="{0596A96E-3739-43D3-93E5-DAA507EA7B79}" type="datetime1">
               <a:rPr lang="nl-NL" smtClean="0"/>
-              <a:t>18-9-2024</a:t>
+              <a:t>11-11-2024</a:t>
             </a:fld>
             <a:endParaRPr lang="nl-NL"/>
           </a:p>
@@ -4277,7 +4473,7 @@
           <a:p>
             <a:fld id="{CFBB0748-A22F-4137-ADB1-6D5A09F7B1DF}" type="datetime1">
               <a:rPr lang="nl-NL" smtClean="0"/>
-              <a:t>18-9-2024</a:t>
+              <a:t>11-11-2024</a:t>
             </a:fld>
             <a:endParaRPr lang="nl-NL"/>
           </a:p>
@@ -10322,6 +10518,318 @@
           <a:chExt cx="0" cy="0"/>
         </a:xfrm>
       </p:grpSpPr>
+      <p:pic>
+        <p:nvPicPr>
+          <p:cNvPr id="3" name="Picture 2" descr="A screen shot of a diagram&#10;&#10;Description automatically generated">
+            <a:extLst>
+              <a:ext uri="{FF2B5EF4-FFF2-40B4-BE49-F238E27FC236}">
+                <a16:creationId xmlns:a16="http://schemas.microsoft.com/office/drawing/2014/main" id="{FEE82702-62C0-A793-AC54-171266B00338}"/>
+              </a:ext>
+            </a:extLst>
+          </p:cNvPr>
+          <p:cNvPicPr>
+            <a:picLocks noChangeAspect="1"/>
+          </p:cNvPicPr>
+          <p:nvPr/>
+        </p:nvPicPr>
+        <p:blipFill>
+          <a:blip r:embed="rId2">
+            <a:extLst>
+              <a:ext uri="{28A0092B-C50C-407E-A947-70E740481C1C}">
+                <a14:useLocalDpi xmlns:a14="http://schemas.microsoft.com/office/drawing/2010/main" val="0"/>
+              </a:ext>
+            </a:extLst>
+          </a:blip>
+          <a:stretch>
+            <a:fillRect/>
+          </a:stretch>
+        </p:blipFill>
+        <p:spPr>
+          <a:xfrm>
+            <a:off x="313322" y="1455606"/>
+            <a:ext cx="5525503" cy="3946788"/>
+          </a:xfrm>
+          <a:prstGeom prst="rect">
+            <a:avLst/>
+          </a:prstGeom>
+        </p:spPr>
+      </p:pic>
+      <p:pic>
+        <p:nvPicPr>
+          <p:cNvPr id="5" name="Picture 4" descr="A diagram of a plot&#10;&#10;Description automatically generated with medium confidence">
+            <a:extLst>
+              <a:ext uri="{FF2B5EF4-FFF2-40B4-BE49-F238E27FC236}">
+                <a16:creationId xmlns:a16="http://schemas.microsoft.com/office/drawing/2014/main" id="{D90762A5-DE7D-A3BD-3D4F-4A044C11AEED}"/>
+              </a:ext>
+            </a:extLst>
+          </p:cNvPr>
+          <p:cNvPicPr>
+            <a:picLocks noChangeAspect="1"/>
+          </p:cNvPicPr>
+          <p:nvPr/>
+        </p:nvPicPr>
+        <p:blipFill>
+          <a:blip r:embed="rId3">
+            <a:extLst>
+              <a:ext uri="{28A0092B-C50C-407E-A947-70E740481C1C}">
+                <a14:useLocalDpi xmlns:a14="http://schemas.microsoft.com/office/drawing/2010/main" val="0"/>
+              </a:ext>
+            </a:extLst>
+          </a:blip>
+          <a:stretch>
+            <a:fillRect/>
+          </a:stretch>
+        </p:blipFill>
+        <p:spPr>
+          <a:xfrm>
+            <a:off x="6353177" y="1619250"/>
+            <a:ext cx="5067300" cy="3619500"/>
+          </a:xfrm>
+          <a:prstGeom prst="rect">
+            <a:avLst/>
+          </a:prstGeom>
+        </p:spPr>
+      </p:pic>
+      <p:sp>
+        <p:nvSpPr>
+          <p:cNvPr id="2" name="TextBox 1">
+            <a:extLst>
+              <a:ext uri="{FF2B5EF4-FFF2-40B4-BE49-F238E27FC236}">
+                <a16:creationId xmlns:a16="http://schemas.microsoft.com/office/drawing/2014/main" id="{1B94D29F-EC16-B936-B5E6-3D46ADDD2F75}"/>
+              </a:ext>
+            </a:extLst>
+          </p:cNvPr>
+          <p:cNvSpPr txBox="1"/>
+          <p:nvPr/>
+        </p:nvSpPr>
+        <p:spPr>
+          <a:xfrm>
+            <a:off x="542925" y="5334000"/>
+            <a:ext cx="4781550" cy="923330"/>
+          </a:xfrm>
+          <a:prstGeom prst="rect">
+            <a:avLst/>
+          </a:prstGeom>
+          <a:noFill/>
+        </p:spPr>
+        <p:txBody>
+          <a:bodyPr wrap="square" rtlCol="0">
+            <a:spAutoFit/>
+          </a:bodyPr>
+          <a:lstStyle/>
+          <a:p>
+            <a:r>
+              <a:rPr lang="nl-NL" dirty="0"/>
+              <a:t>Plot </a:t>
+            </a:r>
+            <a:r>
+              <a:rPr lang="nl-NL" dirty="0" err="1"/>
+              <a:t>della</a:t>
+            </a:r>
+            <a:r>
+              <a:rPr lang="nl-NL" dirty="0"/>
+              <a:t> PCA con </a:t>
+            </a:r>
+            <a:r>
+              <a:rPr lang="nl-NL" dirty="0" err="1"/>
+              <a:t>le</a:t>
+            </a:r>
+            <a:r>
+              <a:rPr lang="nl-NL" dirty="0"/>
+              <a:t> prime </a:t>
+            </a:r>
+            <a:r>
+              <a:rPr lang="nl-NL" dirty="0" err="1"/>
+              <a:t>due</a:t>
+            </a:r>
+            <a:r>
+              <a:rPr lang="nl-NL" dirty="0"/>
+              <a:t> </a:t>
+            </a:r>
+            <a:r>
+              <a:rPr lang="nl-NL" dirty="0" err="1"/>
+              <a:t>componenti</a:t>
+            </a:r>
+            <a:r>
+              <a:rPr lang="nl-NL" dirty="0"/>
+              <a:t> per </a:t>
+            </a:r>
+            <a:r>
+              <a:rPr lang="nl-NL" dirty="0" err="1"/>
+              <a:t>vedere</a:t>
+            </a:r>
+            <a:r>
+              <a:rPr lang="nl-NL" dirty="0"/>
+              <a:t> ad </a:t>
+            </a:r>
+            <a:r>
+              <a:rPr lang="nl-NL" dirty="0" err="1"/>
+              <a:t>occhio</a:t>
+            </a:r>
+            <a:r>
+              <a:rPr lang="nl-NL" dirty="0"/>
+              <a:t> se i </a:t>
+            </a:r>
+            <a:r>
+              <a:rPr lang="nl-NL" dirty="0" err="1"/>
+              <a:t>gruppi</a:t>
+            </a:r>
+            <a:r>
+              <a:rPr lang="nl-NL" dirty="0"/>
+              <a:t> </a:t>
+            </a:r>
+            <a:r>
+              <a:rPr lang="nl-NL" dirty="0" err="1"/>
+              <a:t>degli</a:t>
+            </a:r>
+            <a:r>
+              <a:rPr lang="nl-NL" dirty="0"/>
+              <a:t> ATC code </a:t>
+            </a:r>
+            <a:r>
+              <a:rPr lang="nl-NL" dirty="0" err="1"/>
+              <a:t>sono</a:t>
+            </a:r>
+            <a:r>
+              <a:rPr lang="nl-NL" dirty="0"/>
+              <a:t> </a:t>
+            </a:r>
+            <a:r>
+              <a:rPr lang="nl-NL" dirty="0" err="1"/>
+              <a:t>separabili</a:t>
+            </a:r>
+            <a:r>
+              <a:rPr lang="nl-NL" dirty="0"/>
+              <a:t> </a:t>
+            </a:r>
+            <a:r>
+              <a:rPr lang="nl-NL" dirty="0" err="1"/>
+              <a:t>facilmente</a:t>
+            </a:r>
+            <a:endParaRPr lang="en-150" dirty="0"/>
+          </a:p>
+        </p:txBody>
+      </p:sp>
+      <p:sp>
+        <p:nvSpPr>
+          <p:cNvPr id="4" name="TextBox 3">
+            <a:extLst>
+              <a:ext uri="{FF2B5EF4-FFF2-40B4-BE49-F238E27FC236}">
+                <a16:creationId xmlns:a16="http://schemas.microsoft.com/office/drawing/2014/main" id="{21CA0B5B-9788-C35A-440F-872467DA6F45}"/>
+              </a:ext>
+            </a:extLst>
+          </p:cNvPr>
+          <p:cNvSpPr txBox="1"/>
+          <p:nvPr/>
+        </p:nvSpPr>
+        <p:spPr>
+          <a:xfrm>
+            <a:off x="6496052" y="5209580"/>
+            <a:ext cx="4781550" cy="923330"/>
+          </a:xfrm>
+          <a:prstGeom prst="rect">
+            <a:avLst/>
+          </a:prstGeom>
+          <a:noFill/>
+        </p:spPr>
+        <p:txBody>
+          <a:bodyPr wrap="square" rtlCol="0">
+            <a:spAutoFit/>
+          </a:bodyPr>
+          <a:lstStyle/>
+          <a:p>
+            <a:r>
+              <a:rPr lang="nl-NL" dirty="0"/>
+              <a:t>Plot </a:t>
+            </a:r>
+            <a:r>
+              <a:rPr lang="nl-NL" dirty="0" err="1"/>
+              <a:t>della</a:t>
+            </a:r>
+            <a:r>
+              <a:rPr lang="nl-NL" dirty="0"/>
+              <a:t> PCA con </a:t>
+            </a:r>
+            <a:r>
+              <a:rPr lang="nl-NL" dirty="0" err="1"/>
+              <a:t>le</a:t>
+            </a:r>
+            <a:r>
+              <a:rPr lang="nl-NL" dirty="0"/>
+              <a:t> prime </a:t>
+            </a:r>
+            <a:r>
+              <a:rPr lang="nl-NL" dirty="0" err="1"/>
+              <a:t>tre</a:t>
+            </a:r>
+            <a:r>
+              <a:rPr lang="nl-NL" dirty="0"/>
+              <a:t> </a:t>
+            </a:r>
+            <a:r>
+              <a:rPr lang="nl-NL" dirty="0" err="1"/>
+              <a:t>componenti</a:t>
+            </a:r>
+            <a:r>
+              <a:rPr lang="nl-NL" dirty="0"/>
+              <a:t> per </a:t>
+            </a:r>
+            <a:r>
+              <a:rPr lang="nl-NL" dirty="0" err="1"/>
+              <a:t>vedere</a:t>
+            </a:r>
+            <a:r>
+              <a:rPr lang="nl-NL" dirty="0"/>
+              <a:t> ad </a:t>
+            </a:r>
+            <a:r>
+              <a:rPr lang="nl-NL" dirty="0" err="1"/>
+              <a:t>occhio</a:t>
+            </a:r>
+            <a:r>
+              <a:rPr lang="nl-NL" dirty="0"/>
+              <a:t> se i </a:t>
+            </a:r>
+            <a:r>
+              <a:rPr lang="nl-NL" dirty="0" err="1"/>
+              <a:t>gruppi</a:t>
+            </a:r>
+            <a:r>
+              <a:rPr lang="nl-NL" dirty="0"/>
+              <a:t> </a:t>
+            </a:r>
+            <a:r>
+              <a:rPr lang="nl-NL" dirty="0" err="1"/>
+              <a:t>degli</a:t>
+            </a:r>
+            <a:r>
+              <a:rPr lang="nl-NL" dirty="0"/>
+              <a:t> ATC code </a:t>
+            </a:r>
+            <a:r>
+              <a:rPr lang="nl-NL" dirty="0" err="1"/>
+              <a:t>sono</a:t>
+            </a:r>
+            <a:r>
+              <a:rPr lang="nl-NL" dirty="0"/>
+              <a:t> </a:t>
+            </a:r>
+            <a:r>
+              <a:rPr lang="nl-NL" dirty="0" err="1"/>
+              <a:t>separabili</a:t>
+            </a:r>
+            <a:r>
+              <a:rPr lang="nl-NL" dirty="0"/>
+              <a:t> </a:t>
+            </a:r>
+            <a:r>
+              <a:rPr lang="nl-NL" dirty="0" err="1"/>
+              <a:t>facilmente</a:t>
+            </a:r>
+            <a:endParaRPr lang="en-150" dirty="0"/>
+          </a:p>
+        </p:txBody>
+      </p:sp>
     </p:spTree>
     <p:extLst>
       <p:ext uri="{BB962C8B-B14F-4D97-AF65-F5344CB8AC3E}">
@@ -10364,6 +10872,1316 @@
           <a:chExt cx="0" cy="0"/>
         </a:xfrm>
       </p:grpSpPr>
+      <p:pic>
+        <p:nvPicPr>
+          <p:cNvPr id="5" name="Picture 4" descr="A screenshot of a graph&#10;&#10;Description automatically generated">
+            <a:extLst>
+              <a:ext uri="{FF2B5EF4-FFF2-40B4-BE49-F238E27FC236}">
+                <a16:creationId xmlns:a16="http://schemas.microsoft.com/office/drawing/2014/main" id="{441E34C8-6CFE-1EA6-C69B-CEB8B34A862F}"/>
+              </a:ext>
+            </a:extLst>
+          </p:cNvPr>
+          <p:cNvPicPr>
+            <a:picLocks noChangeAspect="1"/>
+          </p:cNvPicPr>
+          <p:nvPr/>
+        </p:nvPicPr>
+        <p:blipFill>
+          <a:blip r:embed="rId2">
+            <a:extLst>
+              <a:ext uri="{28A0092B-C50C-407E-A947-70E740481C1C}">
+                <a14:useLocalDpi xmlns:a14="http://schemas.microsoft.com/office/drawing/2010/main" val="0"/>
+              </a:ext>
+            </a:extLst>
+          </a:blip>
+          <a:stretch>
+            <a:fillRect/>
+          </a:stretch>
+        </p:blipFill>
+        <p:spPr>
+          <a:xfrm>
+            <a:off x="3048950" y="152400"/>
+            <a:ext cx="6094095" cy="4352925"/>
+          </a:xfrm>
+          <a:prstGeom prst="rect">
+            <a:avLst/>
+          </a:prstGeom>
+        </p:spPr>
+      </p:pic>
+      <p:sp>
+        <p:nvSpPr>
+          <p:cNvPr id="8" name="TextBox 7">
+            <a:extLst>
+              <a:ext uri="{FF2B5EF4-FFF2-40B4-BE49-F238E27FC236}">
+                <a16:creationId xmlns:a16="http://schemas.microsoft.com/office/drawing/2014/main" id="{2DD48FE3-4279-35A8-1C5C-CCECF3CD6E60}"/>
+              </a:ext>
+            </a:extLst>
+          </p:cNvPr>
+          <p:cNvSpPr txBox="1"/>
+          <p:nvPr/>
+        </p:nvSpPr>
+        <p:spPr>
+          <a:xfrm>
+            <a:off x="1315453" y="4186237"/>
+            <a:ext cx="9633283" cy="2585323"/>
+          </a:xfrm>
+          <a:prstGeom prst="rect">
+            <a:avLst/>
+          </a:prstGeom>
+          <a:noFill/>
+        </p:spPr>
+        <p:txBody>
+          <a:bodyPr wrap="square" rtlCol="0">
+            <a:spAutoFit/>
+          </a:bodyPr>
+          <a:lstStyle/>
+          <a:p>
+            <a:r>
+              <a:rPr lang="nl-NL" dirty="0" err="1"/>
+              <a:t>Boxplot</a:t>
+            </a:r>
+            <a:r>
+              <a:rPr lang="nl-NL" dirty="0"/>
+              <a:t> </a:t>
+            </a:r>
+            <a:r>
+              <a:rPr lang="nl-NL" dirty="0" err="1"/>
+              <a:t>relativo</a:t>
+            </a:r>
+            <a:r>
+              <a:rPr lang="nl-NL" dirty="0"/>
+              <a:t> alla PCA con </a:t>
+            </a:r>
+            <a:r>
+              <a:rPr lang="nl-NL" dirty="0" err="1"/>
+              <a:t>due</a:t>
+            </a:r>
+            <a:r>
+              <a:rPr lang="nl-NL" dirty="0"/>
+              <a:t> </a:t>
+            </a:r>
+            <a:r>
+              <a:rPr lang="nl-NL" dirty="0" err="1"/>
+              <a:t>componenti</a:t>
+            </a:r>
+            <a:r>
+              <a:rPr lang="nl-NL" dirty="0"/>
+              <a:t> per </a:t>
+            </a:r>
+            <a:r>
+              <a:rPr lang="nl-NL" dirty="0" err="1"/>
+              <a:t>vedere</a:t>
+            </a:r>
+            <a:r>
+              <a:rPr lang="nl-NL" dirty="0"/>
+              <a:t> se i </a:t>
+            </a:r>
+            <a:r>
+              <a:rPr lang="nl-NL" dirty="0" err="1"/>
+              <a:t>vari</a:t>
+            </a:r>
+            <a:r>
+              <a:rPr lang="nl-NL" dirty="0"/>
+              <a:t> </a:t>
+            </a:r>
+            <a:r>
+              <a:rPr lang="nl-NL" dirty="0" err="1"/>
+              <a:t>gruppi</a:t>
+            </a:r>
+            <a:r>
+              <a:rPr lang="nl-NL" dirty="0"/>
+              <a:t> </a:t>
+            </a:r>
+            <a:r>
+              <a:rPr lang="nl-NL" dirty="0" err="1"/>
+              <a:t>hanno</a:t>
+            </a:r>
+            <a:r>
+              <a:rPr lang="nl-NL" dirty="0"/>
+              <a:t> </a:t>
+            </a:r>
+            <a:r>
+              <a:rPr lang="nl-NL" dirty="0" err="1"/>
+              <a:t>valore</a:t>
+            </a:r>
+            <a:r>
+              <a:rPr lang="nl-NL" dirty="0"/>
+              <a:t> medio differente. È </a:t>
+            </a:r>
+            <a:r>
+              <a:rPr lang="nl-NL" dirty="0" err="1"/>
+              <a:t>stato</a:t>
+            </a:r>
+            <a:r>
+              <a:rPr lang="nl-NL" dirty="0"/>
+              <a:t> </a:t>
+            </a:r>
+            <a:r>
+              <a:rPr lang="nl-NL" dirty="0" err="1"/>
+              <a:t>svolto</a:t>
+            </a:r>
+            <a:r>
+              <a:rPr lang="nl-NL" dirty="0"/>
+              <a:t> </a:t>
+            </a:r>
+            <a:r>
+              <a:rPr lang="nl-NL" dirty="0" err="1"/>
+              <a:t>contestualmente</a:t>
+            </a:r>
+            <a:r>
+              <a:rPr lang="nl-NL" dirty="0"/>
+              <a:t> al test ANOVA per </a:t>
+            </a:r>
+            <a:r>
+              <a:rPr lang="nl-NL" dirty="0" err="1"/>
+              <a:t>entrambe</a:t>
+            </a:r>
+            <a:r>
+              <a:rPr lang="nl-NL" dirty="0"/>
+              <a:t> </a:t>
+            </a:r>
+            <a:r>
+              <a:rPr lang="nl-NL" dirty="0" err="1"/>
+              <a:t>le</a:t>
+            </a:r>
+            <a:r>
+              <a:rPr lang="nl-NL" dirty="0"/>
+              <a:t> </a:t>
+            </a:r>
+            <a:r>
+              <a:rPr lang="nl-NL" dirty="0" err="1"/>
+              <a:t>componenti</a:t>
+            </a:r>
+            <a:r>
+              <a:rPr lang="nl-NL" dirty="0"/>
+              <a:t>, </a:t>
+            </a:r>
+            <a:r>
+              <a:rPr lang="nl-NL" dirty="0" err="1"/>
+              <a:t>questi</a:t>
+            </a:r>
+            <a:r>
+              <a:rPr lang="nl-NL" dirty="0"/>
+              <a:t> </a:t>
+            </a:r>
+            <a:r>
+              <a:rPr lang="nl-NL" dirty="0" err="1"/>
+              <a:t>sono</a:t>
+            </a:r>
+            <a:r>
+              <a:rPr lang="nl-NL" dirty="0"/>
+              <a:t> i </a:t>
+            </a:r>
+            <a:r>
+              <a:rPr lang="nl-NL" dirty="0" err="1"/>
+              <a:t>risultati</a:t>
+            </a:r>
+            <a:r>
+              <a:rPr lang="nl-NL" dirty="0"/>
+              <a:t>:</a:t>
+            </a:r>
+          </a:p>
+          <a:p>
+            <a:r>
+              <a:rPr lang="nl-NL" dirty="0"/>
+              <a:t>PC1</a:t>
+            </a:r>
+          </a:p>
+          <a:p>
+            <a:r>
+              <a:rPr lang="nl-NL" dirty="0"/>
+              <a:t>- Statistica F = 7.7e+04</a:t>
+            </a:r>
+          </a:p>
+          <a:p>
+            <a:pPr marL="285750" indent="-285750">
+              <a:buFontTx/>
+              <a:buChar char="-"/>
+            </a:pPr>
+            <a:r>
+              <a:rPr lang="nl-NL" dirty="0" err="1"/>
+              <a:t>Pvalue</a:t>
+            </a:r>
+            <a:r>
+              <a:rPr lang="nl-NL" dirty="0"/>
+              <a:t> = 0</a:t>
+            </a:r>
+          </a:p>
+          <a:p>
+            <a:r>
+              <a:rPr lang="nl-NL" dirty="0"/>
+              <a:t>PC2</a:t>
+            </a:r>
+          </a:p>
+          <a:p>
+            <a:r>
+              <a:rPr lang="nl-NL" dirty="0"/>
+              <a:t>- Statistica F = 4.3e+04</a:t>
+            </a:r>
+          </a:p>
+          <a:p>
+            <a:r>
+              <a:rPr lang="nl-NL" dirty="0"/>
+              <a:t>- </a:t>
+            </a:r>
+            <a:r>
+              <a:rPr lang="nl-NL" dirty="0" err="1"/>
+              <a:t>Pvalue</a:t>
+            </a:r>
+            <a:r>
+              <a:rPr lang="nl-NL" dirty="0"/>
+              <a:t> = 0</a:t>
+            </a:r>
+            <a:endParaRPr lang="en-150" dirty="0"/>
+          </a:p>
+        </p:txBody>
+      </p:sp>
+    </p:spTree>
+    <p:extLst>
+      <p:ext uri="{BB962C8B-B14F-4D97-AF65-F5344CB8AC3E}">
+        <p14:creationId xmlns:p14="http://schemas.microsoft.com/office/powerpoint/2010/main" val="1189710876"/>
+      </p:ext>
+    </p:extLst>
+  </p:cSld>
+  <p:clrMapOvr>
+    <a:masterClrMapping/>
+  </p:clrMapOvr>
+  <mc:AlternateContent xmlns:mc="http://schemas.openxmlformats.org/markup-compatibility/2006" xmlns:p159="http://schemas.microsoft.com/office/powerpoint/2015/09/main">
+    <mc:Choice Requires="p159">
+      <p:transition spd="slow">
+        <p159:morph option="byObject"/>
+      </p:transition>
+    </mc:Choice>
+    <mc:Fallback xmlns="">
+      <p:transition spd="slow">
+        <p:fade/>
+      </p:transition>
+    </mc:Fallback>
+  </mc:AlternateContent>
+</p:sld>
+</file>
+
+<file path=ppt/slides/slide29.xml><?xml version="1.0" encoding="utf-8"?>
+<p:sld xmlns:a="http://schemas.openxmlformats.org/drawingml/2006/main" xmlns:r="http://schemas.openxmlformats.org/officeDocument/2006/relationships" xmlns:p="http://schemas.openxmlformats.org/presentationml/2006/main">
+  <p:cSld>
+    <p:spTree>
+      <p:nvGrpSpPr>
+        <p:cNvPr id="1" name=""/>
+        <p:cNvGrpSpPr/>
+        <p:nvPr/>
+      </p:nvGrpSpPr>
+      <p:grpSpPr>
+        <a:xfrm>
+          <a:off x="0" y="0"/>
+          <a:ext cx="0" cy="0"/>
+          <a:chOff x="0" y="0"/>
+          <a:chExt cx="0" cy="0"/>
+        </a:xfrm>
+      </p:grpSpPr>
+      <p:pic>
+        <p:nvPicPr>
+          <p:cNvPr id="7" name="Picture 6" descr="A graph with a curve&#10;&#10;Description automatically generated">
+            <a:extLst>
+              <a:ext uri="{FF2B5EF4-FFF2-40B4-BE49-F238E27FC236}">
+                <a16:creationId xmlns:a16="http://schemas.microsoft.com/office/drawing/2014/main" id="{DE7877D4-2099-8E25-FA34-A24AB4707485}"/>
+              </a:ext>
+            </a:extLst>
+          </p:cNvPr>
+          <p:cNvPicPr>
+            <a:picLocks noChangeAspect="1"/>
+          </p:cNvPicPr>
+          <p:nvPr/>
+        </p:nvPicPr>
+        <p:blipFill>
+          <a:blip r:embed="rId2">
+            <a:extLst>
+              <a:ext uri="{28A0092B-C50C-407E-A947-70E740481C1C}">
+                <a14:useLocalDpi xmlns:a14="http://schemas.microsoft.com/office/drawing/2010/main" val="0"/>
+              </a:ext>
+            </a:extLst>
+          </a:blip>
+          <a:stretch>
+            <a:fillRect/>
+          </a:stretch>
+        </p:blipFill>
+        <p:spPr>
+          <a:xfrm>
+            <a:off x="2628899" y="1604961"/>
+            <a:ext cx="6848475" cy="3424238"/>
+          </a:xfrm>
+          <a:prstGeom prst="rect">
+            <a:avLst/>
+          </a:prstGeom>
+        </p:spPr>
+      </p:pic>
+      <p:sp>
+        <p:nvSpPr>
+          <p:cNvPr id="2" name="TextBox 1">
+            <a:extLst>
+              <a:ext uri="{FF2B5EF4-FFF2-40B4-BE49-F238E27FC236}">
+                <a16:creationId xmlns:a16="http://schemas.microsoft.com/office/drawing/2014/main" id="{C81EEF24-450E-EB19-CF13-BD3DB05F867C}"/>
+              </a:ext>
+            </a:extLst>
+          </p:cNvPr>
+          <p:cNvSpPr txBox="1"/>
+          <p:nvPr/>
+        </p:nvSpPr>
+        <p:spPr>
+          <a:xfrm>
+            <a:off x="2366211" y="5398168"/>
+            <a:ext cx="7844589" cy="646331"/>
+          </a:xfrm>
+          <a:prstGeom prst="rect">
+            <a:avLst/>
+          </a:prstGeom>
+          <a:noFill/>
+        </p:spPr>
+        <p:txBody>
+          <a:bodyPr wrap="square" rtlCol="0">
+            <a:spAutoFit/>
+          </a:bodyPr>
+          <a:lstStyle/>
+          <a:p>
+            <a:r>
+              <a:rPr lang="nl-NL" dirty="0" err="1"/>
+              <a:t>Questo</a:t>
+            </a:r>
+            <a:r>
+              <a:rPr lang="nl-NL" dirty="0"/>
+              <a:t> </a:t>
+            </a:r>
+            <a:r>
+              <a:rPr lang="nl-NL" dirty="0" err="1"/>
+              <a:t>grafico</a:t>
+            </a:r>
+            <a:r>
+              <a:rPr lang="nl-NL" dirty="0"/>
+              <a:t> </a:t>
+            </a:r>
+            <a:r>
+              <a:rPr lang="nl-NL" dirty="0" err="1"/>
+              <a:t>mostra</a:t>
+            </a:r>
+            <a:r>
+              <a:rPr lang="nl-NL" dirty="0"/>
+              <a:t> </a:t>
+            </a:r>
+            <a:r>
+              <a:rPr lang="nl-NL" dirty="0" err="1"/>
+              <a:t>che</a:t>
+            </a:r>
+            <a:r>
+              <a:rPr lang="nl-NL" dirty="0"/>
+              <a:t> </a:t>
+            </a:r>
+            <a:r>
+              <a:rPr lang="nl-NL" dirty="0" err="1"/>
+              <a:t>sono</a:t>
+            </a:r>
+            <a:r>
+              <a:rPr lang="nl-NL" dirty="0"/>
+              <a:t> state </a:t>
+            </a:r>
+            <a:r>
+              <a:rPr lang="nl-NL" dirty="0" err="1"/>
+              <a:t>scelte</a:t>
+            </a:r>
+            <a:r>
+              <a:rPr lang="nl-NL" dirty="0"/>
+              <a:t> </a:t>
+            </a:r>
+            <a:r>
+              <a:rPr lang="nl-NL" dirty="0" err="1"/>
+              <a:t>le</a:t>
+            </a:r>
+            <a:r>
+              <a:rPr lang="nl-NL" dirty="0"/>
+              <a:t> 37 prime </a:t>
+            </a:r>
+            <a:r>
+              <a:rPr lang="nl-NL" dirty="0" err="1"/>
+              <a:t>componenti</a:t>
+            </a:r>
+            <a:r>
+              <a:rPr lang="nl-NL" dirty="0"/>
+              <a:t> per </a:t>
+            </a:r>
+            <a:r>
+              <a:rPr lang="nl-NL" dirty="0" err="1"/>
+              <a:t>avere</a:t>
+            </a:r>
+            <a:r>
+              <a:rPr lang="nl-NL" dirty="0"/>
+              <a:t> </a:t>
+            </a:r>
+            <a:r>
+              <a:rPr lang="nl-NL" dirty="0" err="1"/>
+              <a:t>il</a:t>
+            </a:r>
+            <a:r>
+              <a:rPr lang="nl-NL" dirty="0"/>
+              <a:t> 90% di </a:t>
+            </a:r>
+            <a:r>
+              <a:rPr lang="nl-NL" dirty="0" err="1"/>
+              <a:t>contenuto</a:t>
+            </a:r>
+            <a:r>
+              <a:rPr lang="nl-NL" dirty="0"/>
+              <a:t> </a:t>
+            </a:r>
+            <a:r>
+              <a:rPr lang="nl-NL" dirty="0" err="1"/>
+              <a:t>informativo</a:t>
+            </a:r>
+            <a:r>
+              <a:rPr lang="nl-NL" dirty="0"/>
+              <a:t> </a:t>
+            </a:r>
+            <a:r>
+              <a:rPr lang="nl-NL" dirty="0" err="1"/>
+              <a:t>sull’intero</a:t>
+            </a:r>
+            <a:r>
+              <a:rPr lang="nl-NL" dirty="0"/>
+              <a:t> database</a:t>
+            </a:r>
+            <a:endParaRPr lang="en-150" dirty="0"/>
+          </a:p>
+        </p:txBody>
+      </p:sp>
+    </p:spTree>
+    <p:extLst>
+      <p:ext uri="{BB962C8B-B14F-4D97-AF65-F5344CB8AC3E}">
+        <p14:creationId xmlns:p14="http://schemas.microsoft.com/office/powerpoint/2010/main" val="922527501"/>
+      </p:ext>
+    </p:extLst>
+  </p:cSld>
+  <p:clrMapOvr>
+    <a:masterClrMapping/>
+  </p:clrMapOvr>
+  <mc:AlternateContent xmlns:mc="http://schemas.openxmlformats.org/markup-compatibility/2006" xmlns:p159="http://schemas.microsoft.com/office/powerpoint/2015/09/main">
+    <mc:Choice Requires="p159">
+      <p:transition spd="slow">
+        <p159:morph option="byObject"/>
+      </p:transition>
+    </mc:Choice>
+    <mc:Fallback xmlns="">
+      <p:transition spd="slow">
+        <p:fade/>
+      </p:transition>
+    </mc:Fallback>
+  </mc:AlternateContent>
+</p:sld>
+</file>
+
+<file path=ppt/slides/slide3.xml><?xml version="1.0" encoding="utf-8"?>
+<p:sld xmlns:a="http://schemas.openxmlformats.org/drawingml/2006/main" xmlns:r="http://schemas.openxmlformats.org/officeDocument/2006/relationships" xmlns:p="http://schemas.openxmlformats.org/presentationml/2006/main">
+  <p:cSld>
+    <p:spTree>
+      <p:nvGrpSpPr>
+        <p:cNvPr id="1" name=""/>
+        <p:cNvGrpSpPr/>
+        <p:nvPr/>
+      </p:nvGrpSpPr>
+      <p:grpSpPr>
+        <a:xfrm>
+          <a:off x="0" y="0"/>
+          <a:ext cx="0" cy="0"/>
+          <a:chOff x="0" y="0"/>
+          <a:chExt cx="0" cy="0"/>
+        </a:xfrm>
+      </p:grpSpPr>
+      <p:sp>
+        <p:nvSpPr>
+          <p:cNvPr id="2" name="Title 1">
+            <a:extLst>
+              <a:ext uri="{FF2B5EF4-FFF2-40B4-BE49-F238E27FC236}">
+                <a16:creationId xmlns:a16="http://schemas.microsoft.com/office/drawing/2014/main" id="{317E23D3-032D-4C20-8F5B-1840BC892975}"/>
+              </a:ext>
+            </a:extLst>
+          </p:cNvPr>
+          <p:cNvSpPr>
+            <a:spLocks noGrp="1"/>
+          </p:cNvSpPr>
+          <p:nvPr>
+            <p:ph type="ctrTitle"/>
+          </p:nvPr>
+        </p:nvSpPr>
+        <p:spPr/>
+        <p:txBody>
+          <a:bodyPr/>
+          <a:lstStyle/>
+          <a:p>
+            <a:r>
+              <a:rPr lang="it-IT" dirty="0"/>
+              <a:t>Afspraken</a:t>
+            </a:r>
+            <a:endParaRPr lang="nl-NL" dirty="0"/>
+          </a:p>
+        </p:txBody>
+      </p:sp>
+    </p:spTree>
+    <p:extLst>
+      <p:ext uri="{BB962C8B-B14F-4D97-AF65-F5344CB8AC3E}">
+        <p14:creationId xmlns:p14="http://schemas.microsoft.com/office/powerpoint/2010/main" val="1242301480"/>
+      </p:ext>
+    </p:extLst>
+  </p:cSld>
+  <p:clrMapOvr>
+    <a:masterClrMapping/>
+  </p:clrMapOvr>
+  <mc:AlternateContent xmlns:mc="http://schemas.openxmlformats.org/markup-compatibility/2006" xmlns:p159="http://schemas.microsoft.com/office/powerpoint/2015/09/main">
+    <mc:Choice Requires="p159">
+      <p:transition spd="slow">
+        <p159:morph option="byObject"/>
+      </p:transition>
+    </mc:Choice>
+    <mc:Fallback xmlns="">
+      <p:transition spd="slow">
+        <p:fade/>
+      </p:transition>
+    </mc:Fallback>
+  </mc:AlternateContent>
+</p:sld>
+</file>
+
+<file path=ppt/slides/slide30.xml><?xml version="1.0" encoding="utf-8"?>
+<p:sld xmlns:a="http://schemas.openxmlformats.org/drawingml/2006/main" xmlns:r="http://schemas.openxmlformats.org/officeDocument/2006/relationships" xmlns:p="http://schemas.openxmlformats.org/presentationml/2006/main">
+  <p:cSld>
+    <p:spTree>
+      <p:nvGrpSpPr>
+        <p:cNvPr id="1" name=""/>
+        <p:cNvGrpSpPr/>
+        <p:nvPr/>
+      </p:nvGrpSpPr>
+      <p:grpSpPr>
+        <a:xfrm>
+          <a:off x="0" y="0"/>
+          <a:ext cx="0" cy="0"/>
+          <a:chOff x="0" y="0"/>
+          <a:chExt cx="0" cy="0"/>
+        </a:xfrm>
+      </p:grpSpPr>
+      <p:sp>
+        <p:nvSpPr>
+          <p:cNvPr id="3" name="TextBox 2">
+            <a:extLst>
+              <a:ext uri="{FF2B5EF4-FFF2-40B4-BE49-F238E27FC236}">
+                <a16:creationId xmlns:a16="http://schemas.microsoft.com/office/drawing/2014/main" id="{130BE27A-1ED6-7354-2F83-252505E3F819}"/>
+              </a:ext>
+            </a:extLst>
+          </p:cNvPr>
+          <p:cNvSpPr txBox="1"/>
+          <p:nvPr/>
+        </p:nvSpPr>
+        <p:spPr>
+          <a:xfrm>
+            <a:off x="553451" y="2806370"/>
+            <a:ext cx="4555959" cy="1815882"/>
+          </a:xfrm>
+          <a:prstGeom prst="rect">
+            <a:avLst/>
+          </a:prstGeom>
+          <a:noFill/>
+        </p:spPr>
+        <p:txBody>
+          <a:bodyPr wrap="square">
+            <a:spAutoFit/>
+          </a:bodyPr>
+          <a:lstStyle/>
+          <a:p>
+            <a:r>
+              <a:rPr lang="nl-NL" sz="1600" b="1" dirty="0" err="1"/>
+              <a:t>Risultati</a:t>
+            </a:r>
+            <a:r>
+              <a:rPr lang="nl-NL" sz="1600" b="1" dirty="0"/>
+              <a:t> </a:t>
+            </a:r>
+            <a:r>
+              <a:rPr lang="nl-NL" sz="1600" b="1" dirty="0" err="1"/>
+              <a:t>Kmeans</a:t>
+            </a:r>
+            <a:r>
+              <a:rPr lang="nl-NL" sz="1600" b="1" dirty="0"/>
+              <a:t> (dataset non </a:t>
+            </a:r>
+            <a:r>
+              <a:rPr lang="nl-NL" sz="1600" b="1" dirty="0" err="1"/>
+              <a:t>standardizzato</a:t>
+            </a:r>
+            <a:r>
+              <a:rPr lang="nl-NL" sz="1600" b="1" dirty="0"/>
+              <a:t>)</a:t>
+            </a:r>
+          </a:p>
+          <a:p>
+            <a:endParaRPr lang="nl-NL" sz="1600" dirty="0"/>
+          </a:p>
+          <a:p>
+            <a:r>
+              <a:rPr lang="en-150" sz="1600" dirty="0" err="1"/>
+              <a:t>adjusted_mutual_info_score</a:t>
+            </a:r>
+            <a:r>
+              <a:rPr lang="en-150" sz="1600" dirty="0"/>
+              <a:t>        0.706002</a:t>
+            </a:r>
+            <a:endParaRPr lang="nl-NL" sz="1600" dirty="0"/>
+          </a:p>
+          <a:p>
+            <a:r>
+              <a:rPr lang="en-150" sz="1600" dirty="0" err="1"/>
+              <a:t>adjusted_rand_score</a:t>
+            </a:r>
+            <a:r>
+              <a:rPr lang="en-150" sz="1600" dirty="0"/>
+              <a:t>               0.455319</a:t>
+            </a:r>
+            <a:endParaRPr lang="nl-NL" sz="1600" dirty="0"/>
+          </a:p>
+          <a:p>
+            <a:r>
+              <a:rPr lang="en-150" sz="1600" dirty="0" err="1"/>
+              <a:t>calinski_harabasz_score</a:t>
+            </a:r>
+            <a:r>
+              <a:rPr lang="en-150" sz="1600" dirty="0"/>
+              <a:t>       15643.525264</a:t>
+            </a:r>
+            <a:endParaRPr lang="nl-NL" sz="1600" dirty="0"/>
+          </a:p>
+          <a:p>
+            <a:r>
+              <a:rPr lang="en-150" sz="1600" dirty="0" err="1"/>
+              <a:t>completeness_score</a:t>
+            </a:r>
+            <a:r>
+              <a:rPr lang="en-150" sz="1600" dirty="0"/>
+              <a:t>                0.637271</a:t>
+            </a:r>
+            <a:endParaRPr lang="nl-NL" sz="1600" dirty="0"/>
+          </a:p>
+          <a:p>
+            <a:r>
+              <a:rPr lang="en-150" sz="1600" dirty="0" err="1"/>
+              <a:t>fowlkes_mallows_score</a:t>
+            </a:r>
+            <a:r>
+              <a:rPr lang="en-150" sz="1600" dirty="0"/>
+              <a:t>             0.543254</a:t>
+            </a:r>
+          </a:p>
+        </p:txBody>
+      </p:sp>
+      <p:sp>
+        <p:nvSpPr>
+          <p:cNvPr id="4" name="TextBox 3">
+            <a:extLst>
+              <a:ext uri="{FF2B5EF4-FFF2-40B4-BE49-F238E27FC236}">
+                <a16:creationId xmlns:a16="http://schemas.microsoft.com/office/drawing/2014/main" id="{06BFBDEA-9954-05ED-E78A-C9D1A327F3E5}"/>
+              </a:ext>
+            </a:extLst>
+          </p:cNvPr>
+          <p:cNvSpPr txBox="1"/>
+          <p:nvPr/>
+        </p:nvSpPr>
+        <p:spPr>
+          <a:xfrm>
+            <a:off x="2799347" y="513346"/>
+            <a:ext cx="6657474" cy="1785104"/>
+          </a:xfrm>
+          <a:prstGeom prst="rect">
+            <a:avLst/>
+          </a:prstGeom>
+          <a:noFill/>
+        </p:spPr>
+        <p:txBody>
+          <a:bodyPr wrap="square" rtlCol="0">
+            <a:spAutoFit/>
+          </a:bodyPr>
+          <a:lstStyle/>
+          <a:p>
+            <a:pPr algn="ctr"/>
+            <a:r>
+              <a:rPr lang="nl-NL" sz="3000" dirty="0"/>
+              <a:t>Clustering</a:t>
+            </a:r>
+          </a:p>
+          <a:p>
+            <a:r>
+              <a:rPr lang="nl-NL" sz="2000" dirty="0" err="1"/>
+              <a:t>Viene</a:t>
+            </a:r>
+            <a:r>
+              <a:rPr lang="nl-NL" sz="2000" dirty="0"/>
+              <a:t> </a:t>
+            </a:r>
+            <a:r>
+              <a:rPr lang="nl-NL" sz="2000" dirty="0" err="1"/>
+              <a:t>fatto</a:t>
+            </a:r>
+            <a:r>
+              <a:rPr lang="nl-NL" sz="2000" dirty="0"/>
+              <a:t> per </a:t>
+            </a:r>
+            <a:r>
+              <a:rPr lang="nl-NL" sz="2000" dirty="0" err="1"/>
+              <a:t>vedere</a:t>
+            </a:r>
+            <a:r>
+              <a:rPr lang="nl-NL" sz="2000" dirty="0"/>
+              <a:t> se </a:t>
+            </a:r>
+            <a:r>
+              <a:rPr lang="nl-NL" sz="2000" dirty="0" err="1"/>
+              <a:t>una</a:t>
+            </a:r>
+            <a:r>
+              <a:rPr lang="nl-NL" sz="2000" dirty="0"/>
+              <a:t> </a:t>
+            </a:r>
+            <a:r>
+              <a:rPr lang="nl-NL" sz="2000" dirty="0" err="1"/>
+              <a:t>tecnica</a:t>
+            </a:r>
+            <a:r>
+              <a:rPr lang="nl-NL" sz="2000" dirty="0"/>
+              <a:t> non </a:t>
+            </a:r>
+            <a:r>
+              <a:rPr lang="nl-NL" sz="2000" dirty="0" err="1"/>
+              <a:t>supervisionata</a:t>
+            </a:r>
+            <a:r>
+              <a:rPr lang="nl-NL" sz="2000" dirty="0"/>
+              <a:t> </a:t>
+            </a:r>
+            <a:r>
+              <a:rPr lang="nl-NL" sz="2000" dirty="0" err="1"/>
+              <a:t>riesce</a:t>
+            </a:r>
+            <a:r>
+              <a:rPr lang="nl-NL" sz="2000" dirty="0"/>
+              <a:t> a </a:t>
+            </a:r>
+            <a:r>
+              <a:rPr lang="nl-NL" sz="2000" dirty="0" err="1"/>
+              <a:t>riconoscere</a:t>
+            </a:r>
+            <a:r>
+              <a:rPr lang="nl-NL" sz="2000" dirty="0"/>
+              <a:t> i </a:t>
+            </a:r>
+            <a:r>
+              <a:rPr lang="nl-NL" sz="2000" dirty="0" err="1"/>
+              <a:t>vari</a:t>
+            </a:r>
+            <a:r>
+              <a:rPr lang="nl-NL" sz="2000" dirty="0"/>
+              <a:t> </a:t>
+            </a:r>
+            <a:r>
+              <a:rPr lang="nl-NL" sz="2000" dirty="0" err="1"/>
+              <a:t>gruppi</a:t>
+            </a:r>
+            <a:r>
+              <a:rPr lang="nl-NL" sz="2000" dirty="0"/>
+              <a:t> </a:t>
+            </a:r>
+            <a:r>
+              <a:rPr lang="nl-NL" sz="2000" dirty="0" err="1"/>
+              <a:t>basandosi</a:t>
+            </a:r>
+            <a:r>
+              <a:rPr lang="nl-NL" sz="2000" dirty="0"/>
+              <a:t> </a:t>
+            </a:r>
+            <a:r>
+              <a:rPr lang="nl-NL" sz="2000" dirty="0" err="1"/>
+              <a:t>sulle</a:t>
+            </a:r>
+            <a:r>
+              <a:rPr lang="nl-NL" sz="2000" dirty="0"/>
+              <a:t> </a:t>
+            </a:r>
+            <a:r>
+              <a:rPr lang="nl-NL" sz="2000" dirty="0" err="1"/>
+              <a:t>componenti</a:t>
+            </a:r>
+            <a:r>
+              <a:rPr lang="nl-NL" sz="2000" dirty="0"/>
+              <a:t> </a:t>
+            </a:r>
+            <a:r>
+              <a:rPr lang="nl-NL" sz="2000" dirty="0" err="1"/>
+              <a:t>della</a:t>
+            </a:r>
+            <a:r>
+              <a:rPr lang="nl-NL" sz="2000" dirty="0"/>
+              <a:t> PCA </a:t>
+            </a:r>
+            <a:r>
+              <a:rPr lang="nl-NL" sz="2000" dirty="0" err="1"/>
+              <a:t>sufficienti</a:t>
+            </a:r>
+            <a:r>
+              <a:rPr lang="nl-NL" sz="2000" dirty="0"/>
+              <a:t> per </a:t>
+            </a:r>
+            <a:r>
+              <a:rPr lang="nl-NL" sz="2000" dirty="0" err="1"/>
+              <a:t>avere</a:t>
+            </a:r>
+            <a:r>
+              <a:rPr lang="nl-NL" sz="2000" dirty="0"/>
+              <a:t> </a:t>
+            </a:r>
+            <a:r>
+              <a:rPr lang="nl-NL" sz="2000" dirty="0" err="1"/>
+              <a:t>un</a:t>
+            </a:r>
+            <a:r>
+              <a:rPr lang="nl-NL" sz="2000" dirty="0"/>
+              <a:t> </a:t>
+            </a:r>
+            <a:r>
+              <a:rPr lang="nl-NL" sz="2000" dirty="0" err="1"/>
+              <a:t>contenuto</a:t>
+            </a:r>
+            <a:r>
+              <a:rPr lang="nl-NL" sz="2000" dirty="0"/>
+              <a:t> </a:t>
+            </a:r>
+            <a:r>
+              <a:rPr lang="nl-NL" sz="2000" dirty="0" err="1"/>
+              <a:t>informativo</a:t>
+            </a:r>
+            <a:r>
+              <a:rPr lang="nl-NL" sz="2000" dirty="0"/>
+              <a:t> del 90%</a:t>
+            </a:r>
+            <a:endParaRPr lang="en-150" sz="2000" dirty="0"/>
+          </a:p>
+        </p:txBody>
+      </p:sp>
+      <p:sp>
+        <p:nvSpPr>
+          <p:cNvPr id="6" name="TextBox 5">
+            <a:extLst>
+              <a:ext uri="{FF2B5EF4-FFF2-40B4-BE49-F238E27FC236}">
+                <a16:creationId xmlns:a16="http://schemas.microsoft.com/office/drawing/2014/main" id="{F0C8BBCE-D889-4C4B-1386-EC69452C9B7C}"/>
+              </a:ext>
+            </a:extLst>
+          </p:cNvPr>
+          <p:cNvSpPr txBox="1"/>
+          <p:nvPr/>
+        </p:nvSpPr>
+        <p:spPr>
+          <a:xfrm>
+            <a:off x="5542549" y="2806370"/>
+            <a:ext cx="6096000" cy="1815882"/>
+          </a:xfrm>
+          <a:prstGeom prst="rect">
+            <a:avLst/>
+          </a:prstGeom>
+          <a:noFill/>
+        </p:spPr>
+        <p:txBody>
+          <a:bodyPr wrap="square">
+            <a:spAutoFit/>
+          </a:bodyPr>
+          <a:lstStyle/>
+          <a:p>
+            <a:r>
+              <a:rPr lang="nl-NL" sz="1600" b="1" dirty="0" err="1"/>
+              <a:t>Risultati</a:t>
+            </a:r>
+            <a:r>
+              <a:rPr lang="nl-NL" sz="1600" b="1" dirty="0"/>
+              <a:t> </a:t>
+            </a:r>
+            <a:r>
+              <a:rPr lang="nl-NL" sz="1600" b="1" dirty="0" err="1"/>
+              <a:t>Kmeans</a:t>
+            </a:r>
+            <a:r>
+              <a:rPr lang="nl-NL" sz="1600" b="1" dirty="0"/>
+              <a:t> (dataset </a:t>
+            </a:r>
+            <a:r>
+              <a:rPr lang="nl-NL" sz="1600" b="1" dirty="0" err="1"/>
+              <a:t>standardizzato</a:t>
+            </a:r>
+            <a:r>
+              <a:rPr lang="nl-NL" sz="1600" b="1" dirty="0"/>
+              <a:t>)</a:t>
+            </a:r>
+          </a:p>
+          <a:p>
+            <a:endParaRPr lang="nl-NL" sz="1600" dirty="0"/>
+          </a:p>
+          <a:p>
+            <a:r>
+              <a:rPr lang="en-150" sz="1600" dirty="0" err="1"/>
+              <a:t>adjusted_mutual_info_score</a:t>
+            </a:r>
+            <a:r>
+              <a:rPr lang="en-150" sz="1600" dirty="0"/>
+              <a:t>        0.711714</a:t>
+            </a:r>
+            <a:endParaRPr lang="nl-NL" sz="1600" dirty="0"/>
+          </a:p>
+          <a:p>
+            <a:r>
+              <a:rPr lang="en-150" sz="1600" dirty="0" err="1"/>
+              <a:t>adjusted_rand_score</a:t>
+            </a:r>
+            <a:r>
+              <a:rPr lang="en-150" sz="1600" dirty="0"/>
+              <a:t>               0.450901</a:t>
+            </a:r>
+            <a:endParaRPr lang="nl-NL" sz="1600" dirty="0"/>
+          </a:p>
+          <a:p>
+            <a:r>
+              <a:rPr lang="en-150" sz="1600" dirty="0" err="1"/>
+              <a:t>calinski_harabasz_score</a:t>
+            </a:r>
+            <a:r>
+              <a:rPr lang="en-150" sz="1600" dirty="0"/>
+              <a:t>       15810.418535</a:t>
+            </a:r>
+            <a:endParaRPr lang="nl-NL" sz="1600" dirty="0"/>
+          </a:p>
+          <a:p>
+            <a:r>
+              <a:rPr lang="en-150" sz="1600" dirty="0" err="1"/>
+              <a:t>completeness_score</a:t>
+            </a:r>
+            <a:r>
+              <a:rPr lang="en-150" sz="1600" dirty="0"/>
+              <a:t>                0.641948</a:t>
+            </a:r>
+            <a:endParaRPr lang="nl-NL" sz="1600" dirty="0"/>
+          </a:p>
+          <a:p>
+            <a:r>
+              <a:rPr lang="en-150" sz="1600" dirty="0" err="1"/>
+              <a:t>fowlkes_mallows_score</a:t>
+            </a:r>
+            <a:r>
+              <a:rPr lang="en-150" sz="1600" dirty="0"/>
+              <a:t>             0.539452</a:t>
+            </a:r>
+          </a:p>
+        </p:txBody>
+      </p:sp>
+      <p:sp>
+        <p:nvSpPr>
+          <p:cNvPr id="8" name="TextBox 7">
+            <a:extLst>
+              <a:ext uri="{FF2B5EF4-FFF2-40B4-BE49-F238E27FC236}">
+                <a16:creationId xmlns:a16="http://schemas.microsoft.com/office/drawing/2014/main" id="{99A21139-01FE-FF92-1AF2-C7B30C13A66D}"/>
+              </a:ext>
+            </a:extLst>
+          </p:cNvPr>
+          <p:cNvSpPr txBox="1"/>
+          <p:nvPr/>
+        </p:nvSpPr>
+        <p:spPr>
+          <a:xfrm>
+            <a:off x="3080084" y="5058689"/>
+            <a:ext cx="6096000" cy="1754326"/>
+          </a:xfrm>
+          <a:prstGeom prst="rect">
+            <a:avLst/>
+          </a:prstGeom>
+          <a:noFill/>
+        </p:spPr>
+        <p:txBody>
+          <a:bodyPr wrap="square">
+            <a:spAutoFit/>
+          </a:bodyPr>
+          <a:lstStyle/>
+          <a:p>
+            <a:r>
+              <a:rPr lang="nl-NL" sz="1800" b="1" dirty="0" err="1"/>
+              <a:t>Risultati</a:t>
+            </a:r>
+            <a:r>
+              <a:rPr lang="nl-NL" sz="1800" b="1" dirty="0"/>
+              <a:t> random </a:t>
+            </a:r>
+            <a:r>
+              <a:rPr lang="nl-NL" sz="1800" b="1" dirty="0" err="1"/>
+              <a:t>selection</a:t>
+            </a:r>
+            <a:endParaRPr lang="nl-NL" dirty="0"/>
+          </a:p>
+          <a:p>
+            <a:r>
+              <a:rPr lang="en-150" dirty="0" err="1"/>
+              <a:t>adjusted_mutual_info_score</a:t>
+            </a:r>
+            <a:r>
+              <a:rPr lang="en-150" dirty="0"/>
+              <a:t>   -0.000003</a:t>
+            </a:r>
+            <a:endParaRPr lang="nl-NL" dirty="0"/>
+          </a:p>
+          <a:p>
+            <a:r>
+              <a:rPr lang="en-150" dirty="0" err="1"/>
+              <a:t>adjusted_rand_score</a:t>
+            </a:r>
+            <a:r>
+              <a:rPr lang="en-150" dirty="0"/>
+              <a:t>           0.000015</a:t>
+            </a:r>
+            <a:endParaRPr lang="nl-NL" dirty="0"/>
+          </a:p>
+          <a:p>
+            <a:r>
+              <a:rPr lang="en-150" dirty="0" err="1"/>
+              <a:t>calinski_harabasz_score</a:t>
+            </a:r>
+            <a:r>
+              <a:rPr lang="en-150" dirty="0"/>
+              <a:t>       0.990769</a:t>
+            </a:r>
+            <a:endParaRPr lang="nl-NL" dirty="0"/>
+          </a:p>
+          <a:p>
+            <a:r>
+              <a:rPr lang="en-150" dirty="0" err="1"/>
+              <a:t>completeness_score</a:t>
+            </a:r>
+            <a:r>
+              <a:rPr lang="en-150" dirty="0"/>
+              <a:t>            0.000256</a:t>
+            </a:r>
+            <a:endParaRPr lang="nl-NL" dirty="0"/>
+          </a:p>
+          <a:p>
+            <a:r>
+              <a:rPr lang="en-150" dirty="0" err="1"/>
+              <a:t>fowlkes_mallows_score</a:t>
+            </a:r>
+            <a:r>
+              <a:rPr lang="en-150" dirty="0"/>
+              <a:t>         0.159002</a:t>
+            </a:r>
+          </a:p>
+        </p:txBody>
+      </p:sp>
+    </p:spTree>
+    <p:extLst>
+      <p:ext uri="{BB962C8B-B14F-4D97-AF65-F5344CB8AC3E}">
+        <p14:creationId xmlns:p14="http://schemas.microsoft.com/office/powerpoint/2010/main" val="3880638226"/>
+      </p:ext>
+    </p:extLst>
+  </p:cSld>
+  <p:clrMapOvr>
+    <a:masterClrMapping/>
+  </p:clrMapOvr>
+  <mc:AlternateContent xmlns:mc="http://schemas.openxmlformats.org/markup-compatibility/2006" xmlns:p159="http://schemas.microsoft.com/office/powerpoint/2015/09/main">
+    <mc:Choice Requires="p159">
+      <p:transition spd="slow">
+        <p159:morph option="byObject"/>
+      </p:transition>
+    </mc:Choice>
+    <mc:Fallback xmlns="">
+      <p:transition spd="slow">
+        <p:fade/>
+      </p:transition>
+    </mc:Fallback>
+  </mc:AlternateContent>
+</p:sld>
+</file>
+
+<file path=ppt/slides/slide31.xml><?xml version="1.0" encoding="utf-8"?>
+<p:sld xmlns:a="http://schemas.openxmlformats.org/drawingml/2006/main" xmlns:r="http://schemas.openxmlformats.org/officeDocument/2006/relationships" xmlns:p="http://schemas.openxmlformats.org/presentationml/2006/main">
+  <p:cSld>
+    <p:spTree>
+      <p:nvGrpSpPr>
+        <p:cNvPr id="1" name=""/>
+        <p:cNvGrpSpPr/>
+        <p:nvPr/>
+      </p:nvGrpSpPr>
+      <p:grpSpPr>
+        <a:xfrm>
+          <a:off x="0" y="0"/>
+          <a:ext cx="0" cy="0"/>
+          <a:chOff x="0" y="0"/>
+          <a:chExt cx="0" cy="0"/>
+        </a:xfrm>
+      </p:grpSpPr>
+      <p:pic>
+        <p:nvPicPr>
+          <p:cNvPr id="3" name="Picture 2">
+            <a:extLst>
+              <a:ext uri="{FF2B5EF4-FFF2-40B4-BE49-F238E27FC236}">
+                <a16:creationId xmlns:a16="http://schemas.microsoft.com/office/drawing/2014/main" id="{69407E6F-9533-2669-E1A4-8F7994D91E2D}"/>
+              </a:ext>
+            </a:extLst>
+          </p:cNvPr>
+          <p:cNvPicPr>
+            <a:picLocks noChangeAspect="1"/>
+          </p:cNvPicPr>
+          <p:nvPr/>
+        </p:nvPicPr>
+        <p:blipFill>
+          <a:blip r:embed="rId2"/>
+          <a:stretch>
+            <a:fillRect/>
+          </a:stretch>
+        </p:blipFill>
+        <p:spPr>
+          <a:xfrm>
+            <a:off x="2873827" y="333375"/>
+            <a:ext cx="6444346" cy="4767980"/>
+          </a:xfrm>
+          <a:prstGeom prst="rect">
+            <a:avLst/>
+          </a:prstGeom>
+        </p:spPr>
+      </p:pic>
+      <p:sp>
+        <p:nvSpPr>
+          <p:cNvPr id="4" name="TextBox 3">
+            <a:extLst>
+              <a:ext uri="{FF2B5EF4-FFF2-40B4-BE49-F238E27FC236}">
+                <a16:creationId xmlns:a16="http://schemas.microsoft.com/office/drawing/2014/main" id="{344149A8-3AB5-2048-2C37-1E73986F28CD}"/>
+              </a:ext>
+            </a:extLst>
+          </p:cNvPr>
+          <p:cNvSpPr txBox="1"/>
+          <p:nvPr/>
+        </p:nvSpPr>
+        <p:spPr>
+          <a:xfrm>
+            <a:off x="2101516" y="5462337"/>
+            <a:ext cx="8855242" cy="369332"/>
+          </a:xfrm>
+          <a:prstGeom prst="rect">
+            <a:avLst/>
+          </a:prstGeom>
+          <a:noFill/>
+        </p:spPr>
+        <p:txBody>
+          <a:bodyPr wrap="square" rtlCol="0">
+            <a:spAutoFit/>
+          </a:bodyPr>
+          <a:lstStyle/>
+          <a:p>
+            <a:r>
+              <a:rPr lang="nl-NL" dirty="0" err="1"/>
+              <a:t>Sono</a:t>
+            </a:r>
+            <a:r>
+              <a:rPr lang="nl-NL" dirty="0"/>
+              <a:t> state </a:t>
+            </a:r>
+            <a:r>
+              <a:rPr lang="nl-NL" dirty="0" err="1"/>
+              <a:t>fatte</a:t>
+            </a:r>
+            <a:r>
+              <a:rPr lang="nl-NL" dirty="0"/>
+              <a:t> 100 </a:t>
+            </a:r>
+            <a:r>
+              <a:rPr lang="nl-NL" dirty="0" err="1"/>
+              <a:t>iterazioni</a:t>
+            </a:r>
+            <a:r>
+              <a:rPr lang="nl-NL" dirty="0"/>
+              <a:t> per </a:t>
+            </a:r>
+            <a:r>
+              <a:rPr lang="nl-NL" dirty="0" err="1"/>
+              <a:t>il</a:t>
+            </a:r>
+            <a:r>
+              <a:rPr lang="nl-NL" dirty="0"/>
+              <a:t> K-means e </a:t>
+            </a:r>
+            <a:r>
+              <a:rPr lang="nl-NL" dirty="0" err="1"/>
+              <a:t>poi</a:t>
+            </a:r>
+            <a:r>
+              <a:rPr lang="nl-NL" dirty="0"/>
+              <a:t> </a:t>
+            </a:r>
+            <a:r>
+              <a:rPr lang="nl-NL" dirty="0" err="1"/>
+              <a:t>abbiamo</a:t>
+            </a:r>
+            <a:r>
+              <a:rPr lang="nl-NL" dirty="0"/>
+              <a:t> </a:t>
+            </a:r>
+            <a:r>
+              <a:rPr lang="nl-NL" dirty="0" err="1"/>
+              <a:t>tracciato</a:t>
+            </a:r>
+            <a:r>
+              <a:rPr lang="nl-NL" dirty="0"/>
+              <a:t> la </a:t>
+            </a:r>
+            <a:r>
+              <a:rPr lang="nl-NL" dirty="0" err="1"/>
+              <a:t>distribuzione</a:t>
+            </a:r>
+            <a:endParaRPr lang="en-150" dirty="0"/>
+          </a:p>
+        </p:txBody>
+      </p:sp>
+    </p:spTree>
+    <p:extLst>
+      <p:ext uri="{BB962C8B-B14F-4D97-AF65-F5344CB8AC3E}">
+        <p14:creationId xmlns:p14="http://schemas.microsoft.com/office/powerpoint/2010/main" val="2717820577"/>
+      </p:ext>
+    </p:extLst>
+  </p:cSld>
+  <p:clrMapOvr>
+    <a:masterClrMapping/>
+  </p:clrMapOvr>
+  <mc:AlternateContent xmlns:mc="http://schemas.openxmlformats.org/markup-compatibility/2006" xmlns:p159="http://schemas.microsoft.com/office/powerpoint/2015/09/main">
+    <mc:Choice Requires="p159">
+      <p:transition spd="slow">
+        <p159:morph option="byObject"/>
+      </p:transition>
+    </mc:Choice>
+    <mc:Fallback xmlns="">
+      <p:transition spd="slow">
+        <p:fade/>
+      </p:transition>
+    </mc:Fallback>
+  </mc:AlternateContent>
+</p:sld>
+</file>
+
+<file path=ppt/slides/slide32.xml><?xml version="1.0" encoding="utf-8"?>
+<p:sld xmlns:a="http://schemas.openxmlformats.org/drawingml/2006/main" xmlns:r="http://schemas.openxmlformats.org/officeDocument/2006/relationships" xmlns:p="http://schemas.openxmlformats.org/presentationml/2006/main">
+  <p:cSld>
+    <p:spTree>
+      <p:nvGrpSpPr>
+        <p:cNvPr id="1" name=""/>
+        <p:cNvGrpSpPr/>
+        <p:nvPr/>
+      </p:nvGrpSpPr>
+      <p:grpSpPr>
+        <a:xfrm>
+          <a:off x="0" y="0"/>
+          <a:ext cx="0" cy="0"/>
+          <a:chOff x="0" y="0"/>
+          <a:chExt cx="0" cy="0"/>
+        </a:xfrm>
+      </p:grpSpPr>
       <p:sp>
         <p:nvSpPr>
           <p:cNvPr id="2" name="Title 1">
@@ -10443,7 +12261,7 @@
 </p:sld>
 </file>
 
-<file path=ppt/slides/slide29.xml><?xml version="1.0" encoding="utf-8"?>
+<file path=ppt/slides/slide33.xml><?xml version="1.0" encoding="utf-8"?>
 <p:sld xmlns:a="http://schemas.openxmlformats.org/drawingml/2006/main" xmlns:r="http://schemas.openxmlformats.org/officeDocument/2006/relationships" xmlns:p="http://schemas.openxmlformats.org/presentationml/2006/main">
   <p:cSld>
     <p:spTree>
@@ -11812,78 +13630,7 @@
 </p:sld>
 </file>
 
-<file path=ppt/slides/slide3.xml><?xml version="1.0" encoding="utf-8"?>
-<p:sld xmlns:a="http://schemas.openxmlformats.org/drawingml/2006/main" xmlns:r="http://schemas.openxmlformats.org/officeDocument/2006/relationships" xmlns:p="http://schemas.openxmlformats.org/presentationml/2006/main">
-  <p:cSld>
-    <p:spTree>
-      <p:nvGrpSpPr>
-        <p:cNvPr id="1" name=""/>
-        <p:cNvGrpSpPr/>
-        <p:nvPr/>
-      </p:nvGrpSpPr>
-      <p:grpSpPr>
-        <a:xfrm>
-          <a:off x="0" y="0"/>
-          <a:ext cx="0" cy="0"/>
-          <a:chOff x="0" y="0"/>
-          <a:chExt cx="0" cy="0"/>
-        </a:xfrm>
-      </p:grpSpPr>
-      <p:sp>
-        <p:nvSpPr>
-          <p:cNvPr id="2" name="Title 1">
-            <a:extLst>
-              <a:ext uri="{FF2B5EF4-FFF2-40B4-BE49-F238E27FC236}">
-                <a16:creationId xmlns:a16="http://schemas.microsoft.com/office/drawing/2014/main" id="{317E23D3-032D-4C20-8F5B-1840BC892975}"/>
-              </a:ext>
-            </a:extLst>
-          </p:cNvPr>
-          <p:cNvSpPr>
-            <a:spLocks noGrp="1"/>
-          </p:cNvSpPr>
-          <p:nvPr>
-            <p:ph type="ctrTitle"/>
-          </p:nvPr>
-        </p:nvSpPr>
-        <p:spPr/>
-        <p:txBody>
-          <a:bodyPr/>
-          <a:lstStyle/>
-          <a:p>
-            <a:r>
-              <a:rPr lang="it-IT" dirty="0"/>
-              <a:t>Afspraken</a:t>
-            </a:r>
-            <a:endParaRPr lang="nl-NL" dirty="0"/>
-          </a:p>
-        </p:txBody>
-      </p:sp>
-    </p:spTree>
-    <p:extLst>
-      <p:ext uri="{BB962C8B-B14F-4D97-AF65-F5344CB8AC3E}">
-        <p14:creationId xmlns:p14="http://schemas.microsoft.com/office/powerpoint/2010/main" val="1242301480"/>
-      </p:ext>
-    </p:extLst>
-  </p:cSld>
-  <p:clrMapOvr>
-    <a:masterClrMapping/>
-  </p:clrMapOvr>
-  <mc:AlternateContent xmlns:mc="http://schemas.openxmlformats.org/markup-compatibility/2006" xmlns:p159="http://schemas.microsoft.com/office/powerpoint/2015/09/main">
-    <mc:Choice Requires="p159">
-      <p:transition spd="slow">
-        <p159:morph option="byObject"/>
-      </p:transition>
-    </mc:Choice>
-    <mc:Fallback xmlns="">
-      <p:transition spd="slow">
-        <p:fade/>
-      </p:transition>
-    </mc:Fallback>
-  </mc:AlternateContent>
-</p:sld>
-</file>
-
-<file path=ppt/slides/slide30.xml><?xml version="1.0" encoding="utf-8"?>
+<file path=ppt/slides/slide34.xml><?xml version="1.0" encoding="utf-8"?>
 <p:sld xmlns:a="http://schemas.openxmlformats.org/drawingml/2006/main" xmlns:r="http://schemas.openxmlformats.org/officeDocument/2006/relationships" xmlns:p="http://schemas.openxmlformats.org/presentationml/2006/main">
   <p:cSld>
     <p:spTree>
@@ -11979,7 +13726,7 @@
 </p:sld>
 </file>
 
-<file path=ppt/slides/slide31.xml><?xml version="1.0" encoding="utf-8"?>
+<file path=ppt/slides/slide35.xml><?xml version="1.0" encoding="utf-8"?>
 <p:sld xmlns:a="http://schemas.openxmlformats.org/drawingml/2006/main" xmlns:r="http://schemas.openxmlformats.org/officeDocument/2006/relationships" xmlns:p="http://schemas.openxmlformats.org/presentationml/2006/main">
   <p:cSld>
     <p:spTree>
@@ -12546,7 +14293,7 @@
 </p:sld>
 </file>
 
-<file path=ppt/slides/slide32.xml><?xml version="1.0" encoding="utf-8"?>
+<file path=ppt/slides/slide36.xml><?xml version="1.0" encoding="utf-8"?>
 <p:sld xmlns:a="http://schemas.openxmlformats.org/drawingml/2006/main" xmlns:r="http://schemas.openxmlformats.org/officeDocument/2006/relationships" xmlns:p="http://schemas.openxmlformats.org/presentationml/2006/main">
   <p:cSld>
     <p:spTree>
@@ -13118,7 +14865,7 @@
 </p:sld>
 </file>
 
-<file path=ppt/slides/slide33.xml><?xml version="1.0" encoding="utf-8"?>
+<file path=ppt/slides/slide37.xml><?xml version="1.0" encoding="utf-8"?>
 <p:sld xmlns:a="http://schemas.openxmlformats.org/drawingml/2006/main" xmlns:r="http://schemas.openxmlformats.org/officeDocument/2006/relationships" xmlns:p="http://schemas.openxmlformats.org/presentationml/2006/main">
   <p:cSld>
     <p:spTree>
@@ -14021,7 +15768,7 @@
 </p:sld>
 </file>
 
-<file path=ppt/slides/slide34.xml><?xml version="1.0" encoding="utf-8"?>
+<file path=ppt/slides/slide38.xml><?xml version="1.0" encoding="utf-8"?>
 <p:sld xmlns:a="http://schemas.openxmlformats.org/drawingml/2006/main" xmlns:r="http://schemas.openxmlformats.org/officeDocument/2006/relationships" xmlns:p="http://schemas.openxmlformats.org/presentationml/2006/main">
   <p:cSld>
     <p:spTree>
@@ -14971,7 +16718,7 @@
 </p:sld>
 </file>
 
-<file path=ppt/slides/slide35.xml><?xml version="1.0" encoding="utf-8"?>
+<file path=ppt/slides/slide39.xml><?xml version="1.0" encoding="utf-8"?>
 <p:sld xmlns:a="http://schemas.openxmlformats.org/drawingml/2006/main" xmlns:r="http://schemas.openxmlformats.org/officeDocument/2006/relationships" xmlns:p="http://schemas.openxmlformats.org/presentationml/2006/main">
   <p:cSld>
     <p:spTree>
@@ -15144,1295 +16891,6 @@
       </p:transition>
     </mc:Choice>
     <mc:Fallback xmlns="">
-      <p:transition spd="slow">
-        <p:fade/>
-      </p:transition>
-    </mc:Fallback>
-  </mc:AlternateContent>
-</p:sld>
-</file>
-
-<file path=ppt/slides/slide36.xml><?xml version="1.0" encoding="utf-8"?>
-<p:sld xmlns:a="http://schemas.openxmlformats.org/drawingml/2006/main" xmlns:r="http://schemas.openxmlformats.org/officeDocument/2006/relationships" xmlns:p="http://schemas.openxmlformats.org/presentationml/2006/main" show="0">
-  <p:cSld>
-    <p:spTree>
-      <p:nvGrpSpPr>
-        <p:cNvPr id="1" name=""/>
-        <p:cNvGrpSpPr/>
-        <p:nvPr/>
-      </p:nvGrpSpPr>
-      <p:grpSpPr>
-        <a:xfrm>
-          <a:off x="0" y="0"/>
-          <a:ext cx="0" cy="0"/>
-          <a:chOff x="0" y="0"/>
-          <a:chExt cx="0" cy="0"/>
-        </a:xfrm>
-      </p:grpSpPr>
-      <p:sp>
-        <p:nvSpPr>
-          <p:cNvPr id="2" name="Title 1">
-            <a:extLst>
-              <a:ext uri="{FF2B5EF4-FFF2-40B4-BE49-F238E27FC236}">
-                <a16:creationId xmlns:a16="http://schemas.microsoft.com/office/drawing/2014/main" id="{E2742523-2057-44B4-9FB1-A3B7126FBF7F}"/>
-              </a:ext>
-            </a:extLst>
-          </p:cNvPr>
-          <p:cNvSpPr>
-            <a:spLocks noGrp="1"/>
-          </p:cNvSpPr>
-          <p:nvPr>
-            <p:ph type="title"/>
-          </p:nvPr>
-        </p:nvSpPr>
-        <p:spPr>
-          <a:xfrm>
-            <a:off x="838200" y="2766218"/>
-            <a:ext cx="10515600" cy="1325563"/>
-          </a:xfrm>
-        </p:spPr>
-        <p:txBody>
-          <a:bodyPr/>
-          <a:lstStyle/>
-          <a:p>
-            <a:pPr algn="ctr"/>
-            <a:r>
-              <a:rPr lang="it-IT" dirty="0"/>
-              <a:t>Eligibility to LHS</a:t>
-            </a:r>
-            <a:endParaRPr lang="nl-NL" dirty="0"/>
-          </a:p>
-        </p:txBody>
-      </p:sp>
-    </p:spTree>
-    <p:extLst>
-      <p:ext uri="{BB962C8B-B14F-4D97-AF65-F5344CB8AC3E}">
-        <p14:creationId xmlns:p14="http://schemas.microsoft.com/office/powerpoint/2010/main" val="64685501"/>
-      </p:ext>
-    </p:extLst>
-  </p:cSld>
-  <p:clrMapOvr>
-    <a:masterClrMapping/>
-  </p:clrMapOvr>
-  <mc:AlternateContent xmlns:mc="http://schemas.openxmlformats.org/markup-compatibility/2006">
-    <mc:Choice xmlns:p159="http://schemas.microsoft.com/office/powerpoint/2015/09/main" Requires="p159">
-      <p:transition spd="slow">
-        <p159:morph option="byObject"/>
-      </p:transition>
-    </mc:Choice>
-    <mc:Fallback>
-      <p:transition spd="slow">
-        <p:fade/>
-      </p:transition>
-    </mc:Fallback>
-  </mc:AlternateContent>
-</p:sld>
-</file>
-
-<file path=ppt/slides/slide37.xml><?xml version="1.0" encoding="utf-8"?>
-<p:sld xmlns:a="http://schemas.openxmlformats.org/drawingml/2006/main" xmlns:r="http://schemas.openxmlformats.org/officeDocument/2006/relationships" xmlns:p="http://schemas.openxmlformats.org/presentationml/2006/main" show="0">
-  <p:cSld>
-    <p:spTree>
-      <p:nvGrpSpPr>
-        <p:cNvPr id="1" name=""/>
-        <p:cNvGrpSpPr/>
-        <p:nvPr/>
-      </p:nvGrpSpPr>
-      <p:grpSpPr>
-        <a:xfrm>
-          <a:off x="0" y="0"/>
-          <a:ext cx="0" cy="0"/>
-          <a:chOff x="0" y="0"/>
-          <a:chExt cx="0" cy="0"/>
-        </a:xfrm>
-      </p:grpSpPr>
-      <p:sp>
-        <p:nvSpPr>
-          <p:cNvPr id="4" name="TextBox 3">
-            <a:extLst>
-              <a:ext uri="{FF2B5EF4-FFF2-40B4-BE49-F238E27FC236}">
-                <a16:creationId xmlns:a16="http://schemas.microsoft.com/office/drawing/2014/main" id="{E34F9682-BC94-4EF7-B59C-7F339EBAD685}"/>
-              </a:ext>
-            </a:extLst>
-          </p:cNvPr>
-          <p:cNvSpPr txBox="1"/>
-          <p:nvPr/>
-        </p:nvSpPr>
-        <p:spPr>
-          <a:xfrm>
-            <a:off x="0" y="0"/>
-            <a:ext cx="3946358" cy="369332"/>
-          </a:xfrm>
-          <a:prstGeom prst="rect">
-            <a:avLst/>
-          </a:prstGeom>
-          <a:noFill/>
-        </p:spPr>
-        <p:txBody>
-          <a:bodyPr wrap="square" rtlCol="0">
-            <a:spAutoFit/>
-          </a:bodyPr>
-          <a:lstStyle/>
-          <a:p>
-            <a:r>
-              <a:rPr lang="it-IT" u="sng" dirty="0"/>
-              <a:t>Afspraken DB</a:t>
-            </a:r>
-          </a:p>
-        </p:txBody>
-      </p:sp>
-      <p:grpSp>
-        <p:nvGrpSpPr>
-          <p:cNvPr id="9" name="Group 8">
-            <a:extLst>
-              <a:ext uri="{FF2B5EF4-FFF2-40B4-BE49-F238E27FC236}">
-                <a16:creationId xmlns:a16="http://schemas.microsoft.com/office/drawing/2014/main" id="{6E904B1F-4ED8-416C-A086-E6529D5565A8}"/>
-              </a:ext>
-            </a:extLst>
-          </p:cNvPr>
-          <p:cNvGrpSpPr/>
-          <p:nvPr/>
-        </p:nvGrpSpPr>
-        <p:grpSpPr>
-          <a:xfrm>
-            <a:off x="1973179" y="1741640"/>
-            <a:ext cx="2762250" cy="3374720"/>
-            <a:chOff x="1944604" y="1803095"/>
-            <a:chExt cx="2762250" cy="3374720"/>
-          </a:xfrm>
-        </p:grpSpPr>
-        <p:sp>
-          <p:nvSpPr>
-            <p:cNvPr id="7" name="TextBox 6">
-              <a:extLst>
-                <a:ext uri="{FF2B5EF4-FFF2-40B4-BE49-F238E27FC236}">
-                  <a16:creationId xmlns:a16="http://schemas.microsoft.com/office/drawing/2014/main" id="{FCD9424F-73E8-44E7-BE2B-0983785925DE}"/>
-                </a:ext>
-              </a:extLst>
-            </p:cNvPr>
-            <p:cNvSpPr txBox="1"/>
-            <p:nvPr/>
-          </p:nvSpPr>
-          <p:spPr>
-            <a:xfrm>
-              <a:off x="2150645" y="4808483"/>
-              <a:ext cx="2350168" cy="369332"/>
-            </a:xfrm>
-            <a:prstGeom prst="rect">
-              <a:avLst/>
-            </a:prstGeom>
-            <a:noFill/>
-            <a:ln>
-              <a:noFill/>
-            </a:ln>
-          </p:spPr>
-          <p:style>
-            <a:lnRef idx="0">
-              <a:scrgbClr r="0" g="0" b="0"/>
-            </a:lnRef>
-            <a:fillRef idx="0">
-              <a:scrgbClr r="0" g="0" b="0"/>
-            </a:fillRef>
-            <a:effectRef idx="0">
-              <a:scrgbClr r="0" g="0" b="0"/>
-            </a:effectRef>
-            <a:fontRef idx="minor">
-              <a:schemeClr val="dk1"/>
-            </a:fontRef>
-          </p:style>
-          <p:txBody>
-            <a:bodyPr wrap="square" rtlCol="0">
-              <a:spAutoFit/>
-            </a:bodyPr>
-            <a:lstStyle/>
-            <a:p>
-              <a:pPr algn="ctr"/>
-              <a:r>
-                <a:rPr lang="it-IT" dirty="0"/>
-                <a:t>4435 patients records</a:t>
-              </a:r>
-              <a:endParaRPr lang="nl-NL" dirty="0"/>
-            </a:p>
-          </p:txBody>
-        </p:sp>
-        <p:sp>
-          <p:nvSpPr>
-            <p:cNvPr id="8" name="Oval 7">
-              <a:extLst>
-                <a:ext uri="{FF2B5EF4-FFF2-40B4-BE49-F238E27FC236}">
-                  <a16:creationId xmlns:a16="http://schemas.microsoft.com/office/drawing/2014/main" id="{F4B023E9-86D6-4B7C-B948-43D4B9C4890F}"/>
-                </a:ext>
-              </a:extLst>
-            </p:cNvPr>
-            <p:cNvSpPr/>
-            <p:nvPr/>
-          </p:nvSpPr>
-          <p:spPr>
-            <a:xfrm>
-              <a:off x="1944604" y="1803095"/>
-              <a:ext cx="2762250" cy="2762250"/>
-            </a:xfrm>
-            <a:prstGeom prst="ellipse">
-              <a:avLst/>
-            </a:prstGeom>
-          </p:spPr>
-          <p:style>
-            <a:lnRef idx="0">
-              <a:schemeClr val="accent1"/>
-            </a:lnRef>
-            <a:fillRef idx="3">
-              <a:schemeClr val="accent1"/>
-            </a:fillRef>
-            <a:effectRef idx="3">
-              <a:schemeClr val="accent1"/>
-            </a:effectRef>
-            <a:fontRef idx="minor">
-              <a:schemeClr val="lt1"/>
-            </a:fontRef>
-          </p:style>
-          <p:txBody>
-            <a:bodyPr rtlCol="0" anchor="ctr"/>
-            <a:lstStyle/>
-            <a:p>
-              <a:pPr algn="ctr"/>
-              <a:endParaRPr lang="nl-NL"/>
-            </a:p>
-          </p:txBody>
-        </p:sp>
-      </p:grpSp>
-      <p:grpSp>
-        <p:nvGrpSpPr>
-          <p:cNvPr id="10" name="Group 9">
-            <a:extLst>
-              <a:ext uri="{FF2B5EF4-FFF2-40B4-BE49-F238E27FC236}">
-                <a16:creationId xmlns:a16="http://schemas.microsoft.com/office/drawing/2014/main" id="{0CD3A9A0-2489-4D82-A634-95332E6C96A1}"/>
-              </a:ext>
-            </a:extLst>
-          </p:cNvPr>
-          <p:cNvGrpSpPr/>
-          <p:nvPr/>
-        </p:nvGrpSpPr>
-        <p:grpSpPr>
-          <a:xfrm>
-            <a:off x="7782929" y="1844660"/>
-            <a:ext cx="2556209" cy="3271700"/>
-            <a:chOff x="2150644" y="2009135"/>
-            <a:chExt cx="2556209" cy="3271700"/>
-          </a:xfrm>
-        </p:grpSpPr>
-        <p:sp>
-          <p:nvSpPr>
-            <p:cNvPr id="11" name="TextBox 10">
-              <a:extLst>
-                <a:ext uri="{FF2B5EF4-FFF2-40B4-BE49-F238E27FC236}">
-                  <a16:creationId xmlns:a16="http://schemas.microsoft.com/office/drawing/2014/main" id="{1DB8A1FF-34D3-4172-A7C9-8D2FE1ACE8A4}"/>
-                </a:ext>
-              </a:extLst>
-            </p:cNvPr>
-            <p:cNvSpPr txBox="1"/>
-            <p:nvPr/>
-          </p:nvSpPr>
-          <p:spPr>
-            <a:xfrm>
-              <a:off x="2253664" y="4911503"/>
-              <a:ext cx="2350168" cy="369332"/>
-            </a:xfrm>
-            <a:prstGeom prst="rect">
-              <a:avLst/>
-            </a:prstGeom>
-            <a:noFill/>
-            <a:ln>
-              <a:noFill/>
-            </a:ln>
-          </p:spPr>
-          <p:style>
-            <a:lnRef idx="0">
-              <a:scrgbClr r="0" g="0" b="0"/>
-            </a:lnRef>
-            <a:fillRef idx="0">
-              <a:scrgbClr r="0" g="0" b="0"/>
-            </a:fillRef>
-            <a:effectRef idx="0">
-              <a:scrgbClr r="0" g="0" b="0"/>
-            </a:effectRef>
-            <a:fontRef idx="minor">
-              <a:schemeClr val="dk1"/>
-            </a:fontRef>
-          </p:style>
-          <p:txBody>
-            <a:bodyPr wrap="square" rtlCol="0">
-              <a:spAutoFit/>
-            </a:bodyPr>
-            <a:lstStyle/>
-            <a:p>
-              <a:pPr algn="ctr"/>
-              <a:r>
-                <a:rPr lang="it-IT" dirty="0"/>
-                <a:t>4206 patients records</a:t>
-              </a:r>
-              <a:endParaRPr lang="nl-NL" dirty="0"/>
-            </a:p>
-          </p:txBody>
-        </p:sp>
-        <p:sp>
-          <p:nvSpPr>
-            <p:cNvPr id="12" name="Oval 11">
-              <a:extLst>
-                <a:ext uri="{FF2B5EF4-FFF2-40B4-BE49-F238E27FC236}">
-                  <a16:creationId xmlns:a16="http://schemas.microsoft.com/office/drawing/2014/main" id="{ACF602D0-F806-4700-9C47-0F278131D424}"/>
-                </a:ext>
-              </a:extLst>
-            </p:cNvPr>
-            <p:cNvSpPr/>
-            <p:nvPr/>
-          </p:nvSpPr>
-          <p:spPr>
-            <a:xfrm>
-              <a:off x="2150644" y="2009135"/>
-              <a:ext cx="2556209" cy="2556209"/>
-            </a:xfrm>
-            <a:prstGeom prst="ellipse">
-              <a:avLst/>
-            </a:prstGeom>
-          </p:spPr>
-          <p:style>
-            <a:lnRef idx="0">
-              <a:schemeClr val="accent6"/>
-            </a:lnRef>
-            <a:fillRef idx="3">
-              <a:schemeClr val="accent6"/>
-            </a:fillRef>
-            <a:effectRef idx="3">
-              <a:schemeClr val="accent6"/>
-            </a:effectRef>
-            <a:fontRef idx="minor">
-              <a:schemeClr val="lt1"/>
-            </a:fontRef>
-          </p:style>
-          <p:txBody>
-            <a:bodyPr rtlCol="0" anchor="ctr"/>
-            <a:lstStyle/>
-            <a:p>
-              <a:pPr algn="ctr"/>
-              <a:endParaRPr lang="nl-NL"/>
-            </a:p>
-          </p:txBody>
-        </p:sp>
-      </p:grpSp>
-      <p:sp>
-        <p:nvSpPr>
-          <p:cNvPr id="16" name="TextBox 15">
-            <a:extLst>
-              <a:ext uri="{FF2B5EF4-FFF2-40B4-BE49-F238E27FC236}">
-                <a16:creationId xmlns:a16="http://schemas.microsoft.com/office/drawing/2014/main" id="{D5523F38-46EB-4439-B403-339A9CCB84BD}"/>
-              </a:ext>
-            </a:extLst>
-          </p:cNvPr>
-          <p:cNvSpPr txBox="1"/>
-          <p:nvPr/>
-        </p:nvSpPr>
-        <p:spPr>
-          <a:xfrm>
-            <a:off x="8245642" y="0"/>
-            <a:ext cx="3946358" cy="369332"/>
-          </a:xfrm>
-          <a:prstGeom prst="rect">
-            <a:avLst/>
-          </a:prstGeom>
-          <a:noFill/>
-        </p:spPr>
-        <p:txBody>
-          <a:bodyPr wrap="square" rtlCol="0">
-            <a:spAutoFit/>
-          </a:bodyPr>
-          <a:lstStyle/>
-          <a:p>
-            <a:pPr algn="r"/>
-            <a:r>
-              <a:rPr lang="it-IT" u="sng" dirty="0"/>
-              <a:t>Lab Measures DB</a:t>
-            </a:r>
-          </a:p>
-        </p:txBody>
-      </p:sp>
-    </p:spTree>
-    <p:extLst>
-      <p:ext uri="{BB962C8B-B14F-4D97-AF65-F5344CB8AC3E}">
-        <p14:creationId xmlns:p14="http://schemas.microsoft.com/office/powerpoint/2010/main" val="2641032109"/>
-      </p:ext>
-    </p:extLst>
-  </p:cSld>
-  <p:clrMapOvr>
-    <a:masterClrMapping/>
-  </p:clrMapOvr>
-  <mc:AlternateContent xmlns:mc="http://schemas.openxmlformats.org/markup-compatibility/2006">
-    <mc:Choice xmlns:p159="http://schemas.microsoft.com/office/powerpoint/2015/09/main" Requires="p159">
-      <p:transition spd="slow">
-        <p159:morph option="byObject"/>
-      </p:transition>
-    </mc:Choice>
-    <mc:Fallback>
-      <p:transition spd="slow">
-        <p:fade/>
-      </p:transition>
-    </mc:Fallback>
-  </mc:AlternateContent>
-</p:sld>
-</file>
-
-<file path=ppt/slides/slide38.xml><?xml version="1.0" encoding="utf-8"?>
-<p:sld xmlns:a="http://schemas.openxmlformats.org/drawingml/2006/main" xmlns:r="http://schemas.openxmlformats.org/officeDocument/2006/relationships" xmlns:p="http://schemas.openxmlformats.org/presentationml/2006/main" show="0">
-  <p:cSld>
-    <p:spTree>
-      <p:nvGrpSpPr>
-        <p:cNvPr id="1" name=""/>
-        <p:cNvGrpSpPr/>
-        <p:nvPr/>
-      </p:nvGrpSpPr>
-      <p:grpSpPr>
-        <a:xfrm>
-          <a:off x="0" y="0"/>
-          <a:ext cx="0" cy="0"/>
-          <a:chOff x="0" y="0"/>
-          <a:chExt cx="0" cy="0"/>
-        </a:xfrm>
-      </p:grpSpPr>
-      <p:sp>
-        <p:nvSpPr>
-          <p:cNvPr id="4" name="TextBox 3">
-            <a:extLst>
-              <a:ext uri="{FF2B5EF4-FFF2-40B4-BE49-F238E27FC236}">
-                <a16:creationId xmlns:a16="http://schemas.microsoft.com/office/drawing/2014/main" id="{E34F9682-BC94-4EF7-B59C-7F339EBAD685}"/>
-              </a:ext>
-            </a:extLst>
-          </p:cNvPr>
-          <p:cNvSpPr txBox="1"/>
-          <p:nvPr/>
-        </p:nvSpPr>
-        <p:spPr>
-          <a:xfrm>
-            <a:off x="0" y="0"/>
-            <a:ext cx="3946358" cy="369332"/>
-          </a:xfrm>
-          <a:prstGeom prst="rect">
-            <a:avLst/>
-          </a:prstGeom>
-          <a:noFill/>
-        </p:spPr>
-        <p:txBody>
-          <a:bodyPr wrap="square" rtlCol="0">
-            <a:spAutoFit/>
-          </a:bodyPr>
-          <a:lstStyle/>
-          <a:p>
-            <a:r>
-              <a:rPr lang="it-IT" u="sng" dirty="0"/>
-              <a:t>Afspraken DB</a:t>
-            </a:r>
-          </a:p>
-        </p:txBody>
-      </p:sp>
-      <p:grpSp>
-        <p:nvGrpSpPr>
-          <p:cNvPr id="9" name="Group 8">
-            <a:extLst>
-              <a:ext uri="{FF2B5EF4-FFF2-40B4-BE49-F238E27FC236}">
-                <a16:creationId xmlns:a16="http://schemas.microsoft.com/office/drawing/2014/main" id="{6E904B1F-4ED8-416C-A086-E6529D5565A8}"/>
-              </a:ext>
-            </a:extLst>
-          </p:cNvPr>
-          <p:cNvGrpSpPr/>
-          <p:nvPr/>
-        </p:nvGrpSpPr>
-        <p:grpSpPr>
-          <a:xfrm>
-            <a:off x="4714875" y="1741640"/>
-            <a:ext cx="2762250" cy="3374720"/>
-            <a:chOff x="1944604" y="1803095"/>
-            <a:chExt cx="2762250" cy="3374720"/>
-          </a:xfrm>
-        </p:grpSpPr>
-        <p:sp>
-          <p:nvSpPr>
-            <p:cNvPr id="7" name="TextBox 6">
-              <a:extLst>
-                <a:ext uri="{FF2B5EF4-FFF2-40B4-BE49-F238E27FC236}">
-                  <a16:creationId xmlns:a16="http://schemas.microsoft.com/office/drawing/2014/main" id="{FCD9424F-73E8-44E7-BE2B-0983785925DE}"/>
-                </a:ext>
-              </a:extLst>
-            </p:cNvPr>
-            <p:cNvSpPr txBox="1"/>
-            <p:nvPr/>
-          </p:nvSpPr>
-          <p:spPr>
-            <a:xfrm>
-              <a:off x="2150645" y="4808483"/>
-              <a:ext cx="2350168" cy="369332"/>
-            </a:xfrm>
-            <a:prstGeom prst="rect">
-              <a:avLst/>
-            </a:prstGeom>
-            <a:noFill/>
-            <a:ln>
-              <a:noFill/>
-            </a:ln>
-          </p:spPr>
-          <p:style>
-            <a:lnRef idx="0">
-              <a:scrgbClr r="0" g="0" b="0"/>
-            </a:lnRef>
-            <a:fillRef idx="0">
-              <a:scrgbClr r="0" g="0" b="0"/>
-            </a:fillRef>
-            <a:effectRef idx="0">
-              <a:scrgbClr r="0" g="0" b="0"/>
-            </a:effectRef>
-            <a:fontRef idx="minor">
-              <a:schemeClr val="dk1"/>
-            </a:fontRef>
-          </p:style>
-          <p:txBody>
-            <a:bodyPr wrap="square" rtlCol="0">
-              <a:spAutoFit/>
-            </a:bodyPr>
-            <a:lstStyle/>
-            <a:p>
-              <a:pPr algn="ctr"/>
-              <a:r>
-                <a:rPr lang="it-IT" dirty="0"/>
-                <a:t>4206 Patients</a:t>
-              </a:r>
-              <a:endParaRPr lang="nl-NL" dirty="0"/>
-            </a:p>
-          </p:txBody>
-        </p:sp>
-        <p:sp>
-          <p:nvSpPr>
-            <p:cNvPr id="8" name="Oval 7">
-              <a:extLst>
-                <a:ext uri="{FF2B5EF4-FFF2-40B4-BE49-F238E27FC236}">
-                  <a16:creationId xmlns:a16="http://schemas.microsoft.com/office/drawing/2014/main" id="{F4B023E9-86D6-4B7C-B948-43D4B9C4890F}"/>
-                </a:ext>
-              </a:extLst>
-            </p:cNvPr>
-            <p:cNvSpPr/>
-            <p:nvPr/>
-          </p:nvSpPr>
-          <p:spPr>
-            <a:xfrm>
-              <a:off x="1944604" y="1803095"/>
-              <a:ext cx="2762250" cy="2762250"/>
-            </a:xfrm>
-            <a:prstGeom prst="ellipse">
-              <a:avLst/>
-            </a:prstGeom>
-          </p:spPr>
-          <p:style>
-            <a:lnRef idx="0">
-              <a:schemeClr val="accent1"/>
-            </a:lnRef>
-            <a:fillRef idx="3">
-              <a:schemeClr val="accent1"/>
-            </a:fillRef>
-            <a:effectRef idx="3">
-              <a:schemeClr val="accent1"/>
-            </a:effectRef>
-            <a:fontRef idx="minor">
-              <a:schemeClr val="lt1"/>
-            </a:fontRef>
-          </p:style>
-          <p:txBody>
-            <a:bodyPr rtlCol="0" anchor="ctr"/>
-            <a:lstStyle/>
-            <a:p>
-              <a:pPr algn="ctr"/>
-              <a:endParaRPr lang="nl-NL"/>
-            </a:p>
-          </p:txBody>
-        </p:sp>
-      </p:grpSp>
-      <p:sp>
-        <p:nvSpPr>
-          <p:cNvPr id="12" name="Oval 11">
-            <a:extLst>
-              <a:ext uri="{FF2B5EF4-FFF2-40B4-BE49-F238E27FC236}">
-                <a16:creationId xmlns:a16="http://schemas.microsoft.com/office/drawing/2014/main" id="{ACF602D0-F806-4700-9C47-0F278131D424}"/>
-              </a:ext>
-            </a:extLst>
-          </p:cNvPr>
-          <p:cNvSpPr/>
-          <p:nvPr/>
-        </p:nvSpPr>
-        <p:spPr>
-          <a:xfrm>
-            <a:off x="4923925" y="1844660"/>
-            <a:ext cx="2556209" cy="2556209"/>
-          </a:xfrm>
-          <a:prstGeom prst="ellipse">
-            <a:avLst/>
-          </a:prstGeom>
-        </p:spPr>
-        <p:style>
-          <a:lnRef idx="0">
-            <a:schemeClr val="accent6"/>
-          </a:lnRef>
-          <a:fillRef idx="3">
-            <a:schemeClr val="accent6"/>
-          </a:fillRef>
-          <a:effectRef idx="3">
-            <a:schemeClr val="accent6"/>
-          </a:effectRef>
-          <a:fontRef idx="minor">
-            <a:schemeClr val="lt1"/>
-          </a:fontRef>
-        </p:style>
-        <p:txBody>
-          <a:bodyPr rtlCol="0" anchor="ctr"/>
-          <a:lstStyle/>
-          <a:p>
-            <a:pPr algn="ctr"/>
-            <a:endParaRPr lang="nl-NL"/>
-          </a:p>
-        </p:txBody>
-      </p:sp>
-      <p:sp>
-        <p:nvSpPr>
-          <p:cNvPr id="16" name="TextBox 15">
-            <a:extLst>
-              <a:ext uri="{FF2B5EF4-FFF2-40B4-BE49-F238E27FC236}">
-                <a16:creationId xmlns:a16="http://schemas.microsoft.com/office/drawing/2014/main" id="{D5523F38-46EB-4439-B403-339A9CCB84BD}"/>
-              </a:ext>
-            </a:extLst>
-          </p:cNvPr>
-          <p:cNvSpPr txBox="1"/>
-          <p:nvPr/>
-        </p:nvSpPr>
-        <p:spPr>
-          <a:xfrm>
-            <a:off x="8245642" y="0"/>
-            <a:ext cx="3946358" cy="369332"/>
-          </a:xfrm>
-          <a:prstGeom prst="rect">
-            <a:avLst/>
-          </a:prstGeom>
-          <a:noFill/>
-        </p:spPr>
-        <p:txBody>
-          <a:bodyPr wrap="square" rtlCol="0">
-            <a:spAutoFit/>
-          </a:bodyPr>
-          <a:lstStyle/>
-          <a:p>
-            <a:pPr algn="r"/>
-            <a:r>
-              <a:rPr lang="it-IT" u="sng" dirty="0"/>
-              <a:t>Lab Measures DB</a:t>
-            </a:r>
-          </a:p>
-        </p:txBody>
-      </p:sp>
-      <p:cxnSp>
-        <p:nvCxnSpPr>
-          <p:cNvPr id="3" name="Straight Arrow Connector 2">
-            <a:extLst>
-              <a:ext uri="{FF2B5EF4-FFF2-40B4-BE49-F238E27FC236}">
-                <a16:creationId xmlns:a16="http://schemas.microsoft.com/office/drawing/2014/main" id="{FA02BA0B-1B27-4720-8234-9ED4A43D6ED8}"/>
-              </a:ext>
-            </a:extLst>
-          </p:cNvPr>
-          <p:cNvCxnSpPr/>
-          <p:nvPr/>
-        </p:nvCxnSpPr>
-        <p:spPr>
-          <a:xfrm flipH="1">
-            <a:off x="6286500" y="1933575"/>
-            <a:ext cx="2171700" cy="1181100"/>
-          </a:xfrm>
-          <a:prstGeom prst="straightConnector1">
-            <a:avLst/>
-          </a:prstGeom>
-          <a:ln>
-            <a:tailEnd type="triangle"/>
-          </a:ln>
-        </p:spPr>
-        <p:style>
-          <a:lnRef idx="3">
-            <a:schemeClr val="dk1"/>
-          </a:lnRef>
-          <a:fillRef idx="0">
-            <a:schemeClr val="dk1"/>
-          </a:fillRef>
-          <a:effectRef idx="2">
-            <a:schemeClr val="dk1"/>
-          </a:effectRef>
-          <a:fontRef idx="minor">
-            <a:schemeClr val="tx1"/>
-          </a:fontRef>
-        </p:style>
-      </p:cxnSp>
-      <p:sp>
-        <p:nvSpPr>
-          <p:cNvPr id="13" name="TextBox 12">
-            <a:extLst>
-              <a:ext uri="{FF2B5EF4-FFF2-40B4-BE49-F238E27FC236}">
-                <a16:creationId xmlns:a16="http://schemas.microsoft.com/office/drawing/2014/main" id="{480CBE3B-7DBD-4CCB-AA01-92C56653F80D}"/>
-              </a:ext>
-            </a:extLst>
-          </p:cNvPr>
-          <p:cNvSpPr txBox="1"/>
-          <p:nvPr/>
-        </p:nvSpPr>
-        <p:spPr>
-          <a:xfrm>
-            <a:off x="8064166" y="1521494"/>
-            <a:ext cx="2350168" cy="646331"/>
-          </a:xfrm>
-          <a:prstGeom prst="rect">
-            <a:avLst/>
-          </a:prstGeom>
-          <a:noFill/>
-          <a:ln>
-            <a:noFill/>
-          </a:ln>
-        </p:spPr>
-        <p:style>
-          <a:lnRef idx="0">
-            <a:scrgbClr r="0" g="0" b="0"/>
-          </a:lnRef>
-          <a:fillRef idx="0">
-            <a:scrgbClr r="0" g="0" b="0"/>
-          </a:fillRef>
-          <a:effectRef idx="0">
-            <a:scrgbClr r="0" g="0" b="0"/>
-          </a:effectRef>
-          <a:fontRef idx="minor">
-            <a:schemeClr val="dk1"/>
-          </a:fontRef>
-        </p:style>
-        <p:txBody>
-          <a:bodyPr wrap="square" rtlCol="0">
-            <a:spAutoFit/>
-          </a:bodyPr>
-          <a:lstStyle/>
-          <a:p>
-            <a:pPr algn="ctr"/>
-            <a:r>
-              <a:rPr lang="it-IT" dirty="0"/>
-              <a:t>Patient who has lab meas is kept</a:t>
-            </a:r>
-            <a:endParaRPr lang="nl-NL" dirty="0"/>
-          </a:p>
-        </p:txBody>
-      </p:sp>
-    </p:spTree>
-    <p:extLst>
-      <p:ext uri="{BB962C8B-B14F-4D97-AF65-F5344CB8AC3E}">
-        <p14:creationId xmlns:p14="http://schemas.microsoft.com/office/powerpoint/2010/main" val="3364121093"/>
-      </p:ext>
-    </p:extLst>
-  </p:cSld>
-  <p:clrMapOvr>
-    <a:masterClrMapping/>
-  </p:clrMapOvr>
-  <mc:AlternateContent xmlns:mc="http://schemas.openxmlformats.org/markup-compatibility/2006">
-    <mc:Choice xmlns:p159="http://schemas.microsoft.com/office/powerpoint/2015/09/main" Requires="p159">
-      <p:transition spd="slow">
-        <p159:morph option="byObject"/>
-      </p:transition>
-    </mc:Choice>
-    <mc:Fallback>
-      <p:transition spd="slow">
-        <p:fade/>
-      </p:transition>
-    </mc:Fallback>
-  </mc:AlternateContent>
-</p:sld>
-</file>
-
-<file path=ppt/slides/slide39.xml><?xml version="1.0" encoding="utf-8"?>
-<p:sld xmlns:a="http://schemas.openxmlformats.org/drawingml/2006/main" xmlns:r="http://schemas.openxmlformats.org/officeDocument/2006/relationships" xmlns:p="http://schemas.openxmlformats.org/presentationml/2006/main" show="0">
-  <p:cSld>
-    <p:spTree>
-      <p:nvGrpSpPr>
-        <p:cNvPr id="1" name=""/>
-        <p:cNvGrpSpPr/>
-        <p:nvPr/>
-      </p:nvGrpSpPr>
-      <p:grpSpPr>
-        <a:xfrm>
-          <a:off x="0" y="0"/>
-          <a:ext cx="0" cy="0"/>
-          <a:chOff x="0" y="0"/>
-          <a:chExt cx="0" cy="0"/>
-        </a:xfrm>
-      </p:grpSpPr>
-      <p:sp>
-        <p:nvSpPr>
-          <p:cNvPr id="4" name="TextBox 3">
-            <a:extLst>
-              <a:ext uri="{FF2B5EF4-FFF2-40B4-BE49-F238E27FC236}">
-                <a16:creationId xmlns:a16="http://schemas.microsoft.com/office/drawing/2014/main" id="{E34F9682-BC94-4EF7-B59C-7F339EBAD685}"/>
-              </a:ext>
-            </a:extLst>
-          </p:cNvPr>
-          <p:cNvSpPr txBox="1"/>
-          <p:nvPr/>
-        </p:nvSpPr>
-        <p:spPr>
-          <a:xfrm>
-            <a:off x="0" y="0"/>
-            <a:ext cx="3946358" cy="369332"/>
-          </a:xfrm>
-          <a:prstGeom prst="rect">
-            <a:avLst/>
-          </a:prstGeom>
-          <a:noFill/>
-        </p:spPr>
-        <p:txBody>
-          <a:bodyPr wrap="square" rtlCol="0">
-            <a:spAutoFit/>
-          </a:bodyPr>
-          <a:lstStyle/>
-          <a:p>
-            <a:r>
-              <a:rPr lang="it-IT" u="sng" dirty="0"/>
-              <a:t>Afspraken DB</a:t>
-            </a:r>
-          </a:p>
-        </p:txBody>
-      </p:sp>
-      <p:sp>
-        <p:nvSpPr>
-          <p:cNvPr id="7" name="TextBox 6">
-            <a:extLst>
-              <a:ext uri="{FF2B5EF4-FFF2-40B4-BE49-F238E27FC236}">
-                <a16:creationId xmlns:a16="http://schemas.microsoft.com/office/drawing/2014/main" id="{FCD9424F-73E8-44E7-BE2B-0983785925DE}"/>
-              </a:ext>
-            </a:extLst>
-          </p:cNvPr>
-          <p:cNvSpPr txBox="1"/>
-          <p:nvPr/>
-        </p:nvSpPr>
-        <p:spPr>
-          <a:xfrm>
-            <a:off x="4920916" y="4747028"/>
-            <a:ext cx="2350168" cy="369332"/>
-          </a:xfrm>
-          <a:prstGeom prst="rect">
-            <a:avLst/>
-          </a:prstGeom>
-          <a:noFill/>
-          <a:ln>
-            <a:noFill/>
-          </a:ln>
-        </p:spPr>
-        <p:style>
-          <a:lnRef idx="0">
-            <a:scrgbClr r="0" g="0" b="0"/>
-          </a:lnRef>
-          <a:fillRef idx="0">
-            <a:scrgbClr r="0" g="0" b="0"/>
-          </a:fillRef>
-          <a:effectRef idx="0">
-            <a:scrgbClr r="0" g="0" b="0"/>
-          </a:effectRef>
-          <a:fontRef idx="minor">
-            <a:schemeClr val="dk1"/>
-          </a:fontRef>
-        </p:style>
-        <p:txBody>
-          <a:bodyPr wrap="square" rtlCol="0">
-            <a:spAutoFit/>
-          </a:bodyPr>
-          <a:lstStyle/>
-          <a:p>
-            <a:pPr algn="ctr"/>
-            <a:r>
-              <a:rPr lang="it-IT" dirty="0"/>
-              <a:t>229 Patients</a:t>
-            </a:r>
-            <a:endParaRPr lang="nl-NL" dirty="0"/>
-          </a:p>
-        </p:txBody>
-      </p:sp>
-      <p:sp>
-        <p:nvSpPr>
-          <p:cNvPr id="10" name="Freeform: Shape 9">
-            <a:extLst>
-              <a:ext uri="{FF2B5EF4-FFF2-40B4-BE49-F238E27FC236}">
-                <a16:creationId xmlns:a16="http://schemas.microsoft.com/office/drawing/2014/main" id="{7F0FAA5D-3950-414F-8178-6F612CCEC657}"/>
-              </a:ext>
-            </a:extLst>
-          </p:cNvPr>
-          <p:cNvSpPr/>
-          <p:nvPr/>
-        </p:nvSpPr>
-        <p:spPr>
-          <a:xfrm>
-            <a:off x="4717884" y="1741639"/>
-            <a:ext cx="2762251" cy="2762250"/>
-          </a:xfrm>
-          <a:custGeom>
-            <a:avLst/>
-            <a:gdLst>
-              <a:gd name="connsiteX0" fmla="*/ 2755651 w 2762251"/>
-              <a:gd name="connsiteY0" fmla="*/ 1250436 h 2762250"/>
-              <a:gd name="connsiteX1" fmla="*/ 2755653 w 2762251"/>
-              <a:gd name="connsiteY1" fmla="*/ 1250446 h 2762250"/>
-              <a:gd name="connsiteX2" fmla="*/ 2762251 w 2762251"/>
-              <a:gd name="connsiteY2" fmla="*/ 1381125 h 2762250"/>
-              <a:gd name="connsiteX3" fmla="*/ 2755653 w 2762251"/>
-              <a:gd name="connsiteY3" fmla="*/ 1511804 h 2762250"/>
-              <a:gd name="connsiteX4" fmla="*/ 2755651 w 2762251"/>
-              <a:gd name="connsiteY4" fmla="*/ 1511814 h 2762250"/>
-              <a:gd name="connsiteX5" fmla="*/ 2762250 w 2762251"/>
-              <a:gd name="connsiteY5" fmla="*/ 1381125 h 2762250"/>
-              <a:gd name="connsiteX6" fmla="*/ 1381125 w 2762251"/>
-              <a:gd name="connsiteY6" fmla="*/ 0 h 2762250"/>
-              <a:gd name="connsiteX7" fmla="*/ 2755120 w 2762251"/>
-              <a:gd name="connsiteY7" fmla="*/ 1239913 h 2762250"/>
-              <a:gd name="connsiteX8" fmla="*/ 2755651 w 2762251"/>
-              <a:gd name="connsiteY8" fmla="*/ 1250436 h 2762250"/>
-              <a:gd name="connsiteX9" fmla="*/ 2736285 w 2762251"/>
-              <a:gd name="connsiteY9" fmla="*/ 1123542 h 2762250"/>
-              <a:gd name="connsiteX10" fmla="*/ 1484146 w 2762251"/>
-              <a:gd name="connsiteY10" fmla="*/ 103020 h 2762250"/>
-              <a:gd name="connsiteX11" fmla="*/ 206041 w 2762251"/>
-              <a:gd name="connsiteY11" fmla="*/ 1381125 h 2762250"/>
-              <a:gd name="connsiteX12" fmla="*/ 1484146 w 2762251"/>
-              <a:gd name="connsiteY12" fmla="*/ 2659230 h 2762250"/>
-              <a:gd name="connsiteX13" fmla="*/ 2736285 w 2762251"/>
-              <a:gd name="connsiteY13" fmla="*/ 1638708 h 2762250"/>
-              <a:gd name="connsiteX14" fmla="*/ 2755651 w 2762251"/>
-              <a:gd name="connsiteY14" fmla="*/ 1511814 h 2762250"/>
-              <a:gd name="connsiteX15" fmla="*/ 2755120 w 2762251"/>
-              <a:gd name="connsiteY15" fmla="*/ 1522337 h 2762250"/>
-              <a:gd name="connsiteX16" fmla="*/ 1381125 w 2762251"/>
-              <a:gd name="connsiteY16" fmla="*/ 2762250 h 2762250"/>
-              <a:gd name="connsiteX17" fmla="*/ 0 w 2762251"/>
-              <a:gd name="connsiteY17" fmla="*/ 1381125 h 2762250"/>
-              <a:gd name="connsiteX18" fmla="*/ 1381125 w 2762251"/>
-              <a:gd name="connsiteY18" fmla="*/ 0 h 2762250"/>
-            </a:gdLst>
-            <a:ahLst/>
-            <a:cxnLst>
-              <a:cxn ang="0">
-                <a:pos x="connsiteX0" y="connsiteY0"/>
-              </a:cxn>
-              <a:cxn ang="0">
-                <a:pos x="connsiteX1" y="connsiteY1"/>
-              </a:cxn>
-              <a:cxn ang="0">
-                <a:pos x="connsiteX2" y="connsiteY2"/>
-              </a:cxn>
-              <a:cxn ang="0">
-                <a:pos x="connsiteX3" y="connsiteY3"/>
-              </a:cxn>
-              <a:cxn ang="0">
-                <a:pos x="connsiteX4" y="connsiteY4"/>
-              </a:cxn>
-              <a:cxn ang="0">
-                <a:pos x="connsiteX5" y="connsiteY5"/>
-              </a:cxn>
-              <a:cxn ang="0">
-                <a:pos x="connsiteX6" y="connsiteY6"/>
-              </a:cxn>
-              <a:cxn ang="0">
-                <a:pos x="connsiteX7" y="connsiteY7"/>
-              </a:cxn>
-              <a:cxn ang="0">
-                <a:pos x="connsiteX8" y="connsiteY8"/>
-              </a:cxn>
-              <a:cxn ang="0">
-                <a:pos x="connsiteX9" y="connsiteY9"/>
-              </a:cxn>
-              <a:cxn ang="0">
-                <a:pos x="connsiteX10" y="connsiteY10"/>
-              </a:cxn>
-              <a:cxn ang="0">
-                <a:pos x="connsiteX11" y="connsiteY11"/>
-              </a:cxn>
-              <a:cxn ang="0">
-                <a:pos x="connsiteX12" y="connsiteY12"/>
-              </a:cxn>
-              <a:cxn ang="0">
-                <a:pos x="connsiteX13" y="connsiteY13"/>
-              </a:cxn>
-              <a:cxn ang="0">
-                <a:pos x="connsiteX14" y="connsiteY14"/>
-              </a:cxn>
-              <a:cxn ang="0">
-                <a:pos x="connsiteX15" y="connsiteY15"/>
-              </a:cxn>
-              <a:cxn ang="0">
-                <a:pos x="connsiteX16" y="connsiteY16"/>
-              </a:cxn>
-              <a:cxn ang="0">
-                <a:pos x="connsiteX17" y="connsiteY17"/>
-              </a:cxn>
-              <a:cxn ang="0">
-                <a:pos x="connsiteX18" y="connsiteY18"/>
-              </a:cxn>
-            </a:cxnLst>
-            <a:rect l="l" t="t" r="r" b="b"/>
-            <a:pathLst>
-              <a:path w="2762251" h="2762250">
-                <a:moveTo>
-                  <a:pt x="2755651" y="1250436"/>
-                </a:moveTo>
-                <a:lnTo>
-                  <a:pt x="2755653" y="1250446"/>
-                </a:lnTo>
-                <a:cubicBezTo>
-                  <a:pt x="2760016" y="1293412"/>
-                  <a:pt x="2762251" y="1337008"/>
-                  <a:pt x="2762251" y="1381125"/>
-                </a:cubicBezTo>
-                <a:cubicBezTo>
-                  <a:pt x="2762251" y="1425243"/>
-                  <a:pt x="2760016" y="1468838"/>
-                  <a:pt x="2755653" y="1511804"/>
-                </a:cubicBezTo>
-                <a:lnTo>
-                  <a:pt x="2755651" y="1511814"/>
-                </a:lnTo>
-                <a:lnTo>
-                  <a:pt x="2762250" y="1381125"/>
-                </a:lnTo>
-                <a:close/>
-                <a:moveTo>
-                  <a:pt x="1381125" y="0"/>
-                </a:moveTo>
-                <a:cubicBezTo>
-                  <a:pt x="2096226" y="0"/>
-                  <a:pt x="2684392" y="543473"/>
-                  <a:pt x="2755120" y="1239913"/>
-                </a:cubicBezTo>
-                <a:lnTo>
-                  <a:pt x="2755651" y="1250436"/>
-                </a:lnTo>
-                <a:lnTo>
-                  <a:pt x="2736285" y="1123542"/>
-                </a:lnTo>
-                <a:cubicBezTo>
-                  <a:pt x="2617106" y="541131"/>
-                  <a:pt x="2101790" y="103020"/>
-                  <a:pt x="1484146" y="103020"/>
-                </a:cubicBezTo>
-                <a:cubicBezTo>
-                  <a:pt x="778268" y="103020"/>
-                  <a:pt x="206041" y="675247"/>
-                  <a:pt x="206041" y="1381125"/>
-                </a:cubicBezTo>
-                <a:cubicBezTo>
-                  <a:pt x="206041" y="2087003"/>
-                  <a:pt x="778268" y="2659230"/>
-                  <a:pt x="1484146" y="2659230"/>
-                </a:cubicBezTo>
-                <a:cubicBezTo>
-                  <a:pt x="2101790" y="2659230"/>
-                  <a:pt x="2617106" y="2221119"/>
-                  <a:pt x="2736285" y="1638708"/>
-                </a:cubicBezTo>
-                <a:lnTo>
-                  <a:pt x="2755651" y="1511814"/>
-                </a:lnTo>
-                <a:lnTo>
-                  <a:pt x="2755120" y="1522337"/>
-                </a:lnTo>
-                <a:cubicBezTo>
-                  <a:pt x="2684392" y="2218778"/>
-                  <a:pt x="2096226" y="2762250"/>
-                  <a:pt x="1381125" y="2762250"/>
-                </a:cubicBezTo>
-                <a:cubicBezTo>
-                  <a:pt x="618351" y="2762250"/>
-                  <a:pt x="0" y="2143899"/>
-                  <a:pt x="0" y="1381125"/>
-                </a:cubicBezTo>
-                <a:cubicBezTo>
-                  <a:pt x="0" y="618351"/>
-                  <a:pt x="618351" y="0"/>
-                  <a:pt x="1381125" y="0"/>
-                </a:cubicBezTo>
-                <a:close/>
-              </a:path>
-            </a:pathLst>
-          </a:custGeom>
-        </p:spPr>
-        <p:style>
-          <a:lnRef idx="0">
-            <a:schemeClr val="accent3"/>
-          </a:lnRef>
-          <a:fillRef idx="3">
-            <a:schemeClr val="accent3"/>
-          </a:fillRef>
-          <a:effectRef idx="3">
-            <a:schemeClr val="accent3"/>
-          </a:effectRef>
-          <a:fontRef idx="minor">
-            <a:schemeClr val="lt1"/>
-          </a:fontRef>
-        </p:style>
-        <p:txBody>
-          <a:bodyPr rtlCol="0" anchor="ctr"/>
-          <a:lstStyle/>
-          <a:p>
-            <a:pPr algn="ctr"/>
-            <a:endParaRPr lang="nl-NL"/>
-          </a:p>
-        </p:txBody>
-      </p:sp>
-      <p:sp>
-        <p:nvSpPr>
-          <p:cNvPr id="16" name="TextBox 15">
-            <a:extLst>
-              <a:ext uri="{FF2B5EF4-FFF2-40B4-BE49-F238E27FC236}">
-                <a16:creationId xmlns:a16="http://schemas.microsoft.com/office/drawing/2014/main" id="{D5523F38-46EB-4439-B403-339A9CCB84BD}"/>
-              </a:ext>
-            </a:extLst>
-          </p:cNvPr>
-          <p:cNvSpPr txBox="1"/>
-          <p:nvPr/>
-        </p:nvSpPr>
-        <p:spPr>
-          <a:xfrm>
-            <a:off x="8245642" y="0"/>
-            <a:ext cx="3946358" cy="369332"/>
-          </a:xfrm>
-          <a:prstGeom prst="rect">
-            <a:avLst/>
-          </a:prstGeom>
-          <a:noFill/>
-        </p:spPr>
-        <p:txBody>
-          <a:bodyPr wrap="square" rtlCol="0">
-            <a:spAutoFit/>
-          </a:bodyPr>
-          <a:lstStyle/>
-          <a:p>
-            <a:pPr algn="r"/>
-            <a:r>
-              <a:rPr lang="it-IT" u="sng" dirty="0"/>
-              <a:t>Lab Measures DB</a:t>
-            </a:r>
-          </a:p>
-        </p:txBody>
-      </p:sp>
-      <p:cxnSp>
-        <p:nvCxnSpPr>
-          <p:cNvPr id="3" name="Straight Arrow Connector 2">
-            <a:extLst>
-              <a:ext uri="{FF2B5EF4-FFF2-40B4-BE49-F238E27FC236}">
-                <a16:creationId xmlns:a16="http://schemas.microsoft.com/office/drawing/2014/main" id="{FA02BA0B-1B27-4720-8234-9ED4A43D6ED8}"/>
-              </a:ext>
-            </a:extLst>
-          </p:cNvPr>
-          <p:cNvCxnSpPr>
-            <a:cxnSpLocks/>
-            <a:stCxn id="13" idx="2"/>
-            <a:endCxn id="10" idx="17"/>
-          </p:cNvCxnSpPr>
-          <p:nvPr/>
-        </p:nvCxnSpPr>
-        <p:spPr>
-          <a:xfrm>
-            <a:off x="2133600" y="1882849"/>
-            <a:ext cx="2584284" cy="1239915"/>
-          </a:xfrm>
-          <a:prstGeom prst="straightConnector1">
-            <a:avLst/>
-          </a:prstGeom>
-          <a:ln>
-            <a:tailEnd type="triangle"/>
-          </a:ln>
-        </p:spPr>
-        <p:style>
-          <a:lnRef idx="3">
-            <a:schemeClr val="dk1"/>
-          </a:lnRef>
-          <a:fillRef idx="0">
-            <a:schemeClr val="dk1"/>
-          </a:fillRef>
-          <a:effectRef idx="2">
-            <a:schemeClr val="dk1"/>
-          </a:effectRef>
-          <a:fontRef idx="minor">
-            <a:schemeClr val="tx1"/>
-          </a:fontRef>
-        </p:style>
-      </p:cxnSp>
-      <p:sp>
-        <p:nvSpPr>
-          <p:cNvPr id="13" name="TextBox 12">
-            <a:extLst>
-              <a:ext uri="{FF2B5EF4-FFF2-40B4-BE49-F238E27FC236}">
-                <a16:creationId xmlns:a16="http://schemas.microsoft.com/office/drawing/2014/main" id="{480CBE3B-7DBD-4CCB-AA01-92C56653F80D}"/>
-              </a:ext>
-            </a:extLst>
-          </p:cNvPr>
-          <p:cNvSpPr txBox="1"/>
-          <p:nvPr/>
-        </p:nvSpPr>
-        <p:spPr>
-          <a:xfrm>
-            <a:off x="958516" y="959519"/>
-            <a:ext cx="2350168" cy="923330"/>
-          </a:xfrm>
-          <a:prstGeom prst="rect">
-            <a:avLst/>
-          </a:prstGeom>
-          <a:noFill/>
-          <a:ln>
-            <a:noFill/>
-          </a:ln>
-        </p:spPr>
-        <p:style>
-          <a:lnRef idx="0">
-            <a:scrgbClr r="0" g="0" b="0"/>
-          </a:lnRef>
-          <a:fillRef idx="0">
-            <a:scrgbClr r="0" g="0" b="0"/>
-          </a:fillRef>
-          <a:effectRef idx="0">
-            <a:scrgbClr r="0" g="0" b="0"/>
-          </a:effectRef>
-          <a:fontRef idx="minor">
-            <a:schemeClr val="dk1"/>
-          </a:fontRef>
-        </p:style>
-        <p:txBody>
-          <a:bodyPr wrap="square" rtlCol="0">
-            <a:spAutoFit/>
-          </a:bodyPr>
-          <a:lstStyle/>
-          <a:p>
-            <a:pPr algn="ctr"/>
-            <a:r>
-              <a:rPr lang="it-IT" dirty="0"/>
-              <a:t>Patient who has appointment but no lab meas</a:t>
-            </a:r>
-            <a:endParaRPr lang="nl-NL" dirty="0"/>
-          </a:p>
-        </p:txBody>
-      </p:sp>
-    </p:spTree>
-    <p:extLst>
-      <p:ext uri="{BB962C8B-B14F-4D97-AF65-F5344CB8AC3E}">
-        <p14:creationId xmlns:p14="http://schemas.microsoft.com/office/powerpoint/2010/main" val="1747298928"/>
-      </p:ext>
-    </p:extLst>
-  </p:cSld>
-  <p:clrMapOvr>
-    <a:masterClrMapping/>
-  </p:clrMapOvr>
-  <mc:AlternateContent xmlns:mc="http://schemas.openxmlformats.org/markup-compatibility/2006">
-    <mc:Choice xmlns:p159="http://schemas.microsoft.com/office/powerpoint/2015/09/main" Requires="p159">
-      <p:transition spd="slow">
-        <p159:morph option="byObject"/>
-      </p:transition>
-    </mc:Choice>
-    <mc:Fallback>
       <p:transition spd="slow">
         <p:fade/>
       </p:transition>
@@ -16869,6 +17327,1295 @@
           <a:chExt cx="0" cy="0"/>
         </a:xfrm>
       </p:grpSpPr>
+      <p:sp>
+        <p:nvSpPr>
+          <p:cNvPr id="2" name="Title 1">
+            <a:extLst>
+              <a:ext uri="{FF2B5EF4-FFF2-40B4-BE49-F238E27FC236}">
+                <a16:creationId xmlns:a16="http://schemas.microsoft.com/office/drawing/2014/main" id="{E2742523-2057-44B4-9FB1-A3B7126FBF7F}"/>
+              </a:ext>
+            </a:extLst>
+          </p:cNvPr>
+          <p:cNvSpPr>
+            <a:spLocks noGrp="1"/>
+          </p:cNvSpPr>
+          <p:nvPr>
+            <p:ph type="title"/>
+          </p:nvPr>
+        </p:nvSpPr>
+        <p:spPr>
+          <a:xfrm>
+            <a:off x="838200" y="2766218"/>
+            <a:ext cx="10515600" cy="1325563"/>
+          </a:xfrm>
+        </p:spPr>
+        <p:txBody>
+          <a:bodyPr/>
+          <a:lstStyle/>
+          <a:p>
+            <a:pPr algn="ctr"/>
+            <a:r>
+              <a:rPr lang="it-IT" dirty="0"/>
+              <a:t>Eligibility to LHS</a:t>
+            </a:r>
+            <a:endParaRPr lang="nl-NL" dirty="0"/>
+          </a:p>
+        </p:txBody>
+      </p:sp>
+    </p:spTree>
+    <p:extLst>
+      <p:ext uri="{BB962C8B-B14F-4D97-AF65-F5344CB8AC3E}">
+        <p14:creationId xmlns:p14="http://schemas.microsoft.com/office/powerpoint/2010/main" val="64685501"/>
+      </p:ext>
+    </p:extLst>
+  </p:cSld>
+  <p:clrMapOvr>
+    <a:masterClrMapping/>
+  </p:clrMapOvr>
+  <mc:AlternateContent xmlns:mc="http://schemas.openxmlformats.org/markup-compatibility/2006" xmlns:p159="http://schemas.microsoft.com/office/powerpoint/2015/09/main">
+    <mc:Choice Requires="p159">
+      <p:transition spd="slow">
+        <p159:morph option="byObject"/>
+      </p:transition>
+    </mc:Choice>
+    <mc:Fallback xmlns="">
+      <p:transition spd="slow">
+        <p:fade/>
+      </p:transition>
+    </mc:Fallback>
+  </mc:AlternateContent>
+</p:sld>
+</file>
+
+<file path=ppt/slides/slide41.xml><?xml version="1.0" encoding="utf-8"?>
+<p:sld xmlns:a="http://schemas.openxmlformats.org/drawingml/2006/main" xmlns:r="http://schemas.openxmlformats.org/officeDocument/2006/relationships" xmlns:p="http://schemas.openxmlformats.org/presentationml/2006/main" show="0">
+  <p:cSld>
+    <p:spTree>
+      <p:nvGrpSpPr>
+        <p:cNvPr id="1" name=""/>
+        <p:cNvGrpSpPr/>
+        <p:nvPr/>
+      </p:nvGrpSpPr>
+      <p:grpSpPr>
+        <a:xfrm>
+          <a:off x="0" y="0"/>
+          <a:ext cx="0" cy="0"/>
+          <a:chOff x="0" y="0"/>
+          <a:chExt cx="0" cy="0"/>
+        </a:xfrm>
+      </p:grpSpPr>
+      <p:sp>
+        <p:nvSpPr>
+          <p:cNvPr id="4" name="TextBox 3">
+            <a:extLst>
+              <a:ext uri="{FF2B5EF4-FFF2-40B4-BE49-F238E27FC236}">
+                <a16:creationId xmlns:a16="http://schemas.microsoft.com/office/drawing/2014/main" id="{E34F9682-BC94-4EF7-B59C-7F339EBAD685}"/>
+              </a:ext>
+            </a:extLst>
+          </p:cNvPr>
+          <p:cNvSpPr txBox="1"/>
+          <p:nvPr/>
+        </p:nvSpPr>
+        <p:spPr>
+          <a:xfrm>
+            <a:off x="0" y="0"/>
+            <a:ext cx="3946358" cy="369332"/>
+          </a:xfrm>
+          <a:prstGeom prst="rect">
+            <a:avLst/>
+          </a:prstGeom>
+          <a:noFill/>
+        </p:spPr>
+        <p:txBody>
+          <a:bodyPr wrap="square" rtlCol="0">
+            <a:spAutoFit/>
+          </a:bodyPr>
+          <a:lstStyle/>
+          <a:p>
+            <a:r>
+              <a:rPr lang="it-IT" u="sng" dirty="0"/>
+              <a:t>Afspraken DB</a:t>
+            </a:r>
+          </a:p>
+        </p:txBody>
+      </p:sp>
+      <p:grpSp>
+        <p:nvGrpSpPr>
+          <p:cNvPr id="9" name="Group 8">
+            <a:extLst>
+              <a:ext uri="{FF2B5EF4-FFF2-40B4-BE49-F238E27FC236}">
+                <a16:creationId xmlns:a16="http://schemas.microsoft.com/office/drawing/2014/main" id="{6E904B1F-4ED8-416C-A086-E6529D5565A8}"/>
+              </a:ext>
+            </a:extLst>
+          </p:cNvPr>
+          <p:cNvGrpSpPr/>
+          <p:nvPr/>
+        </p:nvGrpSpPr>
+        <p:grpSpPr>
+          <a:xfrm>
+            <a:off x="1973179" y="1741640"/>
+            <a:ext cx="2762250" cy="3374720"/>
+            <a:chOff x="1944604" y="1803095"/>
+            <a:chExt cx="2762250" cy="3374720"/>
+          </a:xfrm>
+        </p:grpSpPr>
+        <p:sp>
+          <p:nvSpPr>
+            <p:cNvPr id="7" name="TextBox 6">
+              <a:extLst>
+                <a:ext uri="{FF2B5EF4-FFF2-40B4-BE49-F238E27FC236}">
+                  <a16:creationId xmlns:a16="http://schemas.microsoft.com/office/drawing/2014/main" id="{FCD9424F-73E8-44E7-BE2B-0983785925DE}"/>
+                </a:ext>
+              </a:extLst>
+            </p:cNvPr>
+            <p:cNvSpPr txBox="1"/>
+            <p:nvPr/>
+          </p:nvSpPr>
+          <p:spPr>
+            <a:xfrm>
+              <a:off x="2150645" y="4808483"/>
+              <a:ext cx="2350168" cy="369332"/>
+            </a:xfrm>
+            <a:prstGeom prst="rect">
+              <a:avLst/>
+            </a:prstGeom>
+            <a:noFill/>
+            <a:ln>
+              <a:noFill/>
+            </a:ln>
+          </p:spPr>
+          <p:style>
+            <a:lnRef idx="0">
+              <a:scrgbClr r="0" g="0" b="0"/>
+            </a:lnRef>
+            <a:fillRef idx="0">
+              <a:scrgbClr r="0" g="0" b="0"/>
+            </a:fillRef>
+            <a:effectRef idx="0">
+              <a:scrgbClr r="0" g="0" b="0"/>
+            </a:effectRef>
+            <a:fontRef idx="minor">
+              <a:schemeClr val="dk1"/>
+            </a:fontRef>
+          </p:style>
+          <p:txBody>
+            <a:bodyPr wrap="square" rtlCol="0">
+              <a:spAutoFit/>
+            </a:bodyPr>
+            <a:lstStyle/>
+            <a:p>
+              <a:pPr algn="ctr"/>
+              <a:r>
+                <a:rPr lang="it-IT" dirty="0"/>
+                <a:t>4435 patients records</a:t>
+              </a:r>
+              <a:endParaRPr lang="nl-NL" dirty="0"/>
+            </a:p>
+          </p:txBody>
+        </p:sp>
+        <p:sp>
+          <p:nvSpPr>
+            <p:cNvPr id="8" name="Oval 7">
+              <a:extLst>
+                <a:ext uri="{FF2B5EF4-FFF2-40B4-BE49-F238E27FC236}">
+                  <a16:creationId xmlns:a16="http://schemas.microsoft.com/office/drawing/2014/main" id="{F4B023E9-86D6-4B7C-B948-43D4B9C4890F}"/>
+                </a:ext>
+              </a:extLst>
+            </p:cNvPr>
+            <p:cNvSpPr/>
+            <p:nvPr/>
+          </p:nvSpPr>
+          <p:spPr>
+            <a:xfrm>
+              <a:off x="1944604" y="1803095"/>
+              <a:ext cx="2762250" cy="2762250"/>
+            </a:xfrm>
+            <a:prstGeom prst="ellipse">
+              <a:avLst/>
+            </a:prstGeom>
+          </p:spPr>
+          <p:style>
+            <a:lnRef idx="0">
+              <a:schemeClr val="accent1"/>
+            </a:lnRef>
+            <a:fillRef idx="3">
+              <a:schemeClr val="accent1"/>
+            </a:fillRef>
+            <a:effectRef idx="3">
+              <a:schemeClr val="accent1"/>
+            </a:effectRef>
+            <a:fontRef idx="minor">
+              <a:schemeClr val="lt1"/>
+            </a:fontRef>
+          </p:style>
+          <p:txBody>
+            <a:bodyPr rtlCol="0" anchor="ctr"/>
+            <a:lstStyle/>
+            <a:p>
+              <a:pPr algn="ctr"/>
+              <a:endParaRPr lang="nl-NL"/>
+            </a:p>
+          </p:txBody>
+        </p:sp>
+      </p:grpSp>
+      <p:grpSp>
+        <p:nvGrpSpPr>
+          <p:cNvPr id="10" name="Group 9">
+            <a:extLst>
+              <a:ext uri="{FF2B5EF4-FFF2-40B4-BE49-F238E27FC236}">
+                <a16:creationId xmlns:a16="http://schemas.microsoft.com/office/drawing/2014/main" id="{0CD3A9A0-2489-4D82-A634-95332E6C96A1}"/>
+              </a:ext>
+            </a:extLst>
+          </p:cNvPr>
+          <p:cNvGrpSpPr/>
+          <p:nvPr/>
+        </p:nvGrpSpPr>
+        <p:grpSpPr>
+          <a:xfrm>
+            <a:off x="7782929" y="1844660"/>
+            <a:ext cx="2556209" cy="3271700"/>
+            <a:chOff x="2150644" y="2009135"/>
+            <a:chExt cx="2556209" cy="3271700"/>
+          </a:xfrm>
+        </p:grpSpPr>
+        <p:sp>
+          <p:nvSpPr>
+            <p:cNvPr id="11" name="TextBox 10">
+              <a:extLst>
+                <a:ext uri="{FF2B5EF4-FFF2-40B4-BE49-F238E27FC236}">
+                  <a16:creationId xmlns:a16="http://schemas.microsoft.com/office/drawing/2014/main" id="{1DB8A1FF-34D3-4172-A7C9-8D2FE1ACE8A4}"/>
+                </a:ext>
+              </a:extLst>
+            </p:cNvPr>
+            <p:cNvSpPr txBox="1"/>
+            <p:nvPr/>
+          </p:nvSpPr>
+          <p:spPr>
+            <a:xfrm>
+              <a:off x="2253664" y="4911503"/>
+              <a:ext cx="2350168" cy="369332"/>
+            </a:xfrm>
+            <a:prstGeom prst="rect">
+              <a:avLst/>
+            </a:prstGeom>
+            <a:noFill/>
+            <a:ln>
+              <a:noFill/>
+            </a:ln>
+          </p:spPr>
+          <p:style>
+            <a:lnRef idx="0">
+              <a:scrgbClr r="0" g="0" b="0"/>
+            </a:lnRef>
+            <a:fillRef idx="0">
+              <a:scrgbClr r="0" g="0" b="0"/>
+            </a:fillRef>
+            <a:effectRef idx="0">
+              <a:scrgbClr r="0" g="0" b="0"/>
+            </a:effectRef>
+            <a:fontRef idx="minor">
+              <a:schemeClr val="dk1"/>
+            </a:fontRef>
+          </p:style>
+          <p:txBody>
+            <a:bodyPr wrap="square" rtlCol="0">
+              <a:spAutoFit/>
+            </a:bodyPr>
+            <a:lstStyle/>
+            <a:p>
+              <a:pPr algn="ctr"/>
+              <a:r>
+                <a:rPr lang="it-IT" dirty="0"/>
+                <a:t>4206 patients records</a:t>
+              </a:r>
+              <a:endParaRPr lang="nl-NL" dirty="0"/>
+            </a:p>
+          </p:txBody>
+        </p:sp>
+        <p:sp>
+          <p:nvSpPr>
+            <p:cNvPr id="12" name="Oval 11">
+              <a:extLst>
+                <a:ext uri="{FF2B5EF4-FFF2-40B4-BE49-F238E27FC236}">
+                  <a16:creationId xmlns:a16="http://schemas.microsoft.com/office/drawing/2014/main" id="{ACF602D0-F806-4700-9C47-0F278131D424}"/>
+                </a:ext>
+              </a:extLst>
+            </p:cNvPr>
+            <p:cNvSpPr/>
+            <p:nvPr/>
+          </p:nvSpPr>
+          <p:spPr>
+            <a:xfrm>
+              <a:off x="2150644" y="2009135"/>
+              <a:ext cx="2556209" cy="2556209"/>
+            </a:xfrm>
+            <a:prstGeom prst="ellipse">
+              <a:avLst/>
+            </a:prstGeom>
+          </p:spPr>
+          <p:style>
+            <a:lnRef idx="0">
+              <a:schemeClr val="accent6"/>
+            </a:lnRef>
+            <a:fillRef idx="3">
+              <a:schemeClr val="accent6"/>
+            </a:fillRef>
+            <a:effectRef idx="3">
+              <a:schemeClr val="accent6"/>
+            </a:effectRef>
+            <a:fontRef idx="minor">
+              <a:schemeClr val="lt1"/>
+            </a:fontRef>
+          </p:style>
+          <p:txBody>
+            <a:bodyPr rtlCol="0" anchor="ctr"/>
+            <a:lstStyle/>
+            <a:p>
+              <a:pPr algn="ctr"/>
+              <a:endParaRPr lang="nl-NL"/>
+            </a:p>
+          </p:txBody>
+        </p:sp>
+      </p:grpSp>
+      <p:sp>
+        <p:nvSpPr>
+          <p:cNvPr id="16" name="TextBox 15">
+            <a:extLst>
+              <a:ext uri="{FF2B5EF4-FFF2-40B4-BE49-F238E27FC236}">
+                <a16:creationId xmlns:a16="http://schemas.microsoft.com/office/drawing/2014/main" id="{D5523F38-46EB-4439-B403-339A9CCB84BD}"/>
+              </a:ext>
+            </a:extLst>
+          </p:cNvPr>
+          <p:cNvSpPr txBox="1"/>
+          <p:nvPr/>
+        </p:nvSpPr>
+        <p:spPr>
+          <a:xfrm>
+            <a:off x="8245642" y="0"/>
+            <a:ext cx="3946358" cy="369332"/>
+          </a:xfrm>
+          <a:prstGeom prst="rect">
+            <a:avLst/>
+          </a:prstGeom>
+          <a:noFill/>
+        </p:spPr>
+        <p:txBody>
+          <a:bodyPr wrap="square" rtlCol="0">
+            <a:spAutoFit/>
+          </a:bodyPr>
+          <a:lstStyle/>
+          <a:p>
+            <a:pPr algn="r"/>
+            <a:r>
+              <a:rPr lang="it-IT" u="sng" dirty="0"/>
+              <a:t>Lab Measures DB</a:t>
+            </a:r>
+          </a:p>
+        </p:txBody>
+      </p:sp>
+    </p:spTree>
+    <p:extLst>
+      <p:ext uri="{BB962C8B-B14F-4D97-AF65-F5344CB8AC3E}">
+        <p14:creationId xmlns:p14="http://schemas.microsoft.com/office/powerpoint/2010/main" val="2641032109"/>
+      </p:ext>
+    </p:extLst>
+  </p:cSld>
+  <p:clrMapOvr>
+    <a:masterClrMapping/>
+  </p:clrMapOvr>
+  <mc:AlternateContent xmlns:mc="http://schemas.openxmlformats.org/markup-compatibility/2006" xmlns:p159="http://schemas.microsoft.com/office/powerpoint/2015/09/main">
+    <mc:Choice Requires="p159">
+      <p:transition spd="slow">
+        <p159:morph option="byObject"/>
+      </p:transition>
+    </mc:Choice>
+    <mc:Fallback xmlns="">
+      <p:transition spd="slow">
+        <p:fade/>
+      </p:transition>
+    </mc:Fallback>
+  </mc:AlternateContent>
+</p:sld>
+</file>
+
+<file path=ppt/slides/slide42.xml><?xml version="1.0" encoding="utf-8"?>
+<p:sld xmlns:a="http://schemas.openxmlformats.org/drawingml/2006/main" xmlns:r="http://schemas.openxmlformats.org/officeDocument/2006/relationships" xmlns:p="http://schemas.openxmlformats.org/presentationml/2006/main" show="0">
+  <p:cSld>
+    <p:spTree>
+      <p:nvGrpSpPr>
+        <p:cNvPr id="1" name=""/>
+        <p:cNvGrpSpPr/>
+        <p:nvPr/>
+      </p:nvGrpSpPr>
+      <p:grpSpPr>
+        <a:xfrm>
+          <a:off x="0" y="0"/>
+          <a:ext cx="0" cy="0"/>
+          <a:chOff x="0" y="0"/>
+          <a:chExt cx="0" cy="0"/>
+        </a:xfrm>
+      </p:grpSpPr>
+      <p:sp>
+        <p:nvSpPr>
+          <p:cNvPr id="4" name="TextBox 3">
+            <a:extLst>
+              <a:ext uri="{FF2B5EF4-FFF2-40B4-BE49-F238E27FC236}">
+                <a16:creationId xmlns:a16="http://schemas.microsoft.com/office/drawing/2014/main" id="{E34F9682-BC94-4EF7-B59C-7F339EBAD685}"/>
+              </a:ext>
+            </a:extLst>
+          </p:cNvPr>
+          <p:cNvSpPr txBox="1"/>
+          <p:nvPr/>
+        </p:nvSpPr>
+        <p:spPr>
+          <a:xfrm>
+            <a:off x="0" y="0"/>
+            <a:ext cx="3946358" cy="369332"/>
+          </a:xfrm>
+          <a:prstGeom prst="rect">
+            <a:avLst/>
+          </a:prstGeom>
+          <a:noFill/>
+        </p:spPr>
+        <p:txBody>
+          <a:bodyPr wrap="square" rtlCol="0">
+            <a:spAutoFit/>
+          </a:bodyPr>
+          <a:lstStyle/>
+          <a:p>
+            <a:r>
+              <a:rPr lang="it-IT" u="sng" dirty="0"/>
+              <a:t>Afspraken DB</a:t>
+            </a:r>
+          </a:p>
+        </p:txBody>
+      </p:sp>
+      <p:grpSp>
+        <p:nvGrpSpPr>
+          <p:cNvPr id="9" name="Group 8">
+            <a:extLst>
+              <a:ext uri="{FF2B5EF4-FFF2-40B4-BE49-F238E27FC236}">
+                <a16:creationId xmlns:a16="http://schemas.microsoft.com/office/drawing/2014/main" id="{6E904B1F-4ED8-416C-A086-E6529D5565A8}"/>
+              </a:ext>
+            </a:extLst>
+          </p:cNvPr>
+          <p:cNvGrpSpPr/>
+          <p:nvPr/>
+        </p:nvGrpSpPr>
+        <p:grpSpPr>
+          <a:xfrm>
+            <a:off x="4714875" y="1741640"/>
+            <a:ext cx="2762250" cy="3374720"/>
+            <a:chOff x="1944604" y="1803095"/>
+            <a:chExt cx="2762250" cy="3374720"/>
+          </a:xfrm>
+        </p:grpSpPr>
+        <p:sp>
+          <p:nvSpPr>
+            <p:cNvPr id="7" name="TextBox 6">
+              <a:extLst>
+                <a:ext uri="{FF2B5EF4-FFF2-40B4-BE49-F238E27FC236}">
+                  <a16:creationId xmlns:a16="http://schemas.microsoft.com/office/drawing/2014/main" id="{FCD9424F-73E8-44E7-BE2B-0983785925DE}"/>
+                </a:ext>
+              </a:extLst>
+            </p:cNvPr>
+            <p:cNvSpPr txBox="1"/>
+            <p:nvPr/>
+          </p:nvSpPr>
+          <p:spPr>
+            <a:xfrm>
+              <a:off x="2150645" y="4808483"/>
+              <a:ext cx="2350168" cy="369332"/>
+            </a:xfrm>
+            <a:prstGeom prst="rect">
+              <a:avLst/>
+            </a:prstGeom>
+            <a:noFill/>
+            <a:ln>
+              <a:noFill/>
+            </a:ln>
+          </p:spPr>
+          <p:style>
+            <a:lnRef idx="0">
+              <a:scrgbClr r="0" g="0" b="0"/>
+            </a:lnRef>
+            <a:fillRef idx="0">
+              <a:scrgbClr r="0" g="0" b="0"/>
+            </a:fillRef>
+            <a:effectRef idx="0">
+              <a:scrgbClr r="0" g="0" b="0"/>
+            </a:effectRef>
+            <a:fontRef idx="minor">
+              <a:schemeClr val="dk1"/>
+            </a:fontRef>
+          </p:style>
+          <p:txBody>
+            <a:bodyPr wrap="square" rtlCol="0">
+              <a:spAutoFit/>
+            </a:bodyPr>
+            <a:lstStyle/>
+            <a:p>
+              <a:pPr algn="ctr"/>
+              <a:r>
+                <a:rPr lang="it-IT" dirty="0"/>
+                <a:t>4206 Patients</a:t>
+              </a:r>
+              <a:endParaRPr lang="nl-NL" dirty="0"/>
+            </a:p>
+          </p:txBody>
+        </p:sp>
+        <p:sp>
+          <p:nvSpPr>
+            <p:cNvPr id="8" name="Oval 7">
+              <a:extLst>
+                <a:ext uri="{FF2B5EF4-FFF2-40B4-BE49-F238E27FC236}">
+                  <a16:creationId xmlns:a16="http://schemas.microsoft.com/office/drawing/2014/main" id="{F4B023E9-86D6-4B7C-B948-43D4B9C4890F}"/>
+                </a:ext>
+              </a:extLst>
+            </p:cNvPr>
+            <p:cNvSpPr/>
+            <p:nvPr/>
+          </p:nvSpPr>
+          <p:spPr>
+            <a:xfrm>
+              <a:off x="1944604" y="1803095"/>
+              <a:ext cx="2762250" cy="2762250"/>
+            </a:xfrm>
+            <a:prstGeom prst="ellipse">
+              <a:avLst/>
+            </a:prstGeom>
+          </p:spPr>
+          <p:style>
+            <a:lnRef idx="0">
+              <a:schemeClr val="accent1"/>
+            </a:lnRef>
+            <a:fillRef idx="3">
+              <a:schemeClr val="accent1"/>
+            </a:fillRef>
+            <a:effectRef idx="3">
+              <a:schemeClr val="accent1"/>
+            </a:effectRef>
+            <a:fontRef idx="minor">
+              <a:schemeClr val="lt1"/>
+            </a:fontRef>
+          </p:style>
+          <p:txBody>
+            <a:bodyPr rtlCol="0" anchor="ctr"/>
+            <a:lstStyle/>
+            <a:p>
+              <a:pPr algn="ctr"/>
+              <a:endParaRPr lang="nl-NL"/>
+            </a:p>
+          </p:txBody>
+        </p:sp>
+      </p:grpSp>
+      <p:sp>
+        <p:nvSpPr>
+          <p:cNvPr id="12" name="Oval 11">
+            <a:extLst>
+              <a:ext uri="{FF2B5EF4-FFF2-40B4-BE49-F238E27FC236}">
+                <a16:creationId xmlns:a16="http://schemas.microsoft.com/office/drawing/2014/main" id="{ACF602D0-F806-4700-9C47-0F278131D424}"/>
+              </a:ext>
+            </a:extLst>
+          </p:cNvPr>
+          <p:cNvSpPr/>
+          <p:nvPr/>
+        </p:nvSpPr>
+        <p:spPr>
+          <a:xfrm>
+            <a:off x="4923925" y="1844660"/>
+            <a:ext cx="2556209" cy="2556209"/>
+          </a:xfrm>
+          <a:prstGeom prst="ellipse">
+            <a:avLst/>
+          </a:prstGeom>
+        </p:spPr>
+        <p:style>
+          <a:lnRef idx="0">
+            <a:schemeClr val="accent6"/>
+          </a:lnRef>
+          <a:fillRef idx="3">
+            <a:schemeClr val="accent6"/>
+          </a:fillRef>
+          <a:effectRef idx="3">
+            <a:schemeClr val="accent6"/>
+          </a:effectRef>
+          <a:fontRef idx="minor">
+            <a:schemeClr val="lt1"/>
+          </a:fontRef>
+        </p:style>
+        <p:txBody>
+          <a:bodyPr rtlCol="0" anchor="ctr"/>
+          <a:lstStyle/>
+          <a:p>
+            <a:pPr algn="ctr"/>
+            <a:endParaRPr lang="nl-NL"/>
+          </a:p>
+        </p:txBody>
+      </p:sp>
+      <p:sp>
+        <p:nvSpPr>
+          <p:cNvPr id="16" name="TextBox 15">
+            <a:extLst>
+              <a:ext uri="{FF2B5EF4-FFF2-40B4-BE49-F238E27FC236}">
+                <a16:creationId xmlns:a16="http://schemas.microsoft.com/office/drawing/2014/main" id="{D5523F38-46EB-4439-B403-339A9CCB84BD}"/>
+              </a:ext>
+            </a:extLst>
+          </p:cNvPr>
+          <p:cNvSpPr txBox="1"/>
+          <p:nvPr/>
+        </p:nvSpPr>
+        <p:spPr>
+          <a:xfrm>
+            <a:off x="8245642" y="0"/>
+            <a:ext cx="3946358" cy="369332"/>
+          </a:xfrm>
+          <a:prstGeom prst="rect">
+            <a:avLst/>
+          </a:prstGeom>
+          <a:noFill/>
+        </p:spPr>
+        <p:txBody>
+          <a:bodyPr wrap="square" rtlCol="0">
+            <a:spAutoFit/>
+          </a:bodyPr>
+          <a:lstStyle/>
+          <a:p>
+            <a:pPr algn="r"/>
+            <a:r>
+              <a:rPr lang="it-IT" u="sng" dirty="0"/>
+              <a:t>Lab Measures DB</a:t>
+            </a:r>
+          </a:p>
+        </p:txBody>
+      </p:sp>
+      <p:cxnSp>
+        <p:nvCxnSpPr>
+          <p:cNvPr id="3" name="Straight Arrow Connector 2">
+            <a:extLst>
+              <a:ext uri="{FF2B5EF4-FFF2-40B4-BE49-F238E27FC236}">
+                <a16:creationId xmlns:a16="http://schemas.microsoft.com/office/drawing/2014/main" id="{FA02BA0B-1B27-4720-8234-9ED4A43D6ED8}"/>
+              </a:ext>
+            </a:extLst>
+          </p:cNvPr>
+          <p:cNvCxnSpPr/>
+          <p:nvPr/>
+        </p:nvCxnSpPr>
+        <p:spPr>
+          <a:xfrm flipH="1">
+            <a:off x="6286500" y="1933575"/>
+            <a:ext cx="2171700" cy="1181100"/>
+          </a:xfrm>
+          <a:prstGeom prst="straightConnector1">
+            <a:avLst/>
+          </a:prstGeom>
+          <a:ln>
+            <a:tailEnd type="triangle"/>
+          </a:ln>
+        </p:spPr>
+        <p:style>
+          <a:lnRef idx="3">
+            <a:schemeClr val="dk1"/>
+          </a:lnRef>
+          <a:fillRef idx="0">
+            <a:schemeClr val="dk1"/>
+          </a:fillRef>
+          <a:effectRef idx="2">
+            <a:schemeClr val="dk1"/>
+          </a:effectRef>
+          <a:fontRef idx="minor">
+            <a:schemeClr val="tx1"/>
+          </a:fontRef>
+        </p:style>
+      </p:cxnSp>
+      <p:sp>
+        <p:nvSpPr>
+          <p:cNvPr id="13" name="TextBox 12">
+            <a:extLst>
+              <a:ext uri="{FF2B5EF4-FFF2-40B4-BE49-F238E27FC236}">
+                <a16:creationId xmlns:a16="http://schemas.microsoft.com/office/drawing/2014/main" id="{480CBE3B-7DBD-4CCB-AA01-92C56653F80D}"/>
+              </a:ext>
+            </a:extLst>
+          </p:cNvPr>
+          <p:cNvSpPr txBox="1"/>
+          <p:nvPr/>
+        </p:nvSpPr>
+        <p:spPr>
+          <a:xfrm>
+            <a:off x="8064166" y="1521494"/>
+            <a:ext cx="2350168" cy="646331"/>
+          </a:xfrm>
+          <a:prstGeom prst="rect">
+            <a:avLst/>
+          </a:prstGeom>
+          <a:noFill/>
+          <a:ln>
+            <a:noFill/>
+          </a:ln>
+        </p:spPr>
+        <p:style>
+          <a:lnRef idx="0">
+            <a:scrgbClr r="0" g="0" b="0"/>
+          </a:lnRef>
+          <a:fillRef idx="0">
+            <a:scrgbClr r="0" g="0" b="0"/>
+          </a:fillRef>
+          <a:effectRef idx="0">
+            <a:scrgbClr r="0" g="0" b="0"/>
+          </a:effectRef>
+          <a:fontRef idx="minor">
+            <a:schemeClr val="dk1"/>
+          </a:fontRef>
+        </p:style>
+        <p:txBody>
+          <a:bodyPr wrap="square" rtlCol="0">
+            <a:spAutoFit/>
+          </a:bodyPr>
+          <a:lstStyle/>
+          <a:p>
+            <a:pPr algn="ctr"/>
+            <a:r>
+              <a:rPr lang="it-IT" dirty="0"/>
+              <a:t>Patient who has lab meas is kept</a:t>
+            </a:r>
+            <a:endParaRPr lang="nl-NL" dirty="0"/>
+          </a:p>
+        </p:txBody>
+      </p:sp>
+    </p:spTree>
+    <p:extLst>
+      <p:ext uri="{BB962C8B-B14F-4D97-AF65-F5344CB8AC3E}">
+        <p14:creationId xmlns:p14="http://schemas.microsoft.com/office/powerpoint/2010/main" val="3364121093"/>
+      </p:ext>
+    </p:extLst>
+  </p:cSld>
+  <p:clrMapOvr>
+    <a:masterClrMapping/>
+  </p:clrMapOvr>
+  <mc:AlternateContent xmlns:mc="http://schemas.openxmlformats.org/markup-compatibility/2006" xmlns:p159="http://schemas.microsoft.com/office/powerpoint/2015/09/main">
+    <mc:Choice Requires="p159">
+      <p:transition spd="slow">
+        <p159:morph option="byObject"/>
+      </p:transition>
+    </mc:Choice>
+    <mc:Fallback xmlns="">
+      <p:transition spd="slow">
+        <p:fade/>
+      </p:transition>
+    </mc:Fallback>
+  </mc:AlternateContent>
+</p:sld>
+</file>
+
+<file path=ppt/slides/slide43.xml><?xml version="1.0" encoding="utf-8"?>
+<p:sld xmlns:a="http://schemas.openxmlformats.org/drawingml/2006/main" xmlns:r="http://schemas.openxmlformats.org/officeDocument/2006/relationships" xmlns:p="http://schemas.openxmlformats.org/presentationml/2006/main" show="0">
+  <p:cSld>
+    <p:spTree>
+      <p:nvGrpSpPr>
+        <p:cNvPr id="1" name=""/>
+        <p:cNvGrpSpPr/>
+        <p:nvPr/>
+      </p:nvGrpSpPr>
+      <p:grpSpPr>
+        <a:xfrm>
+          <a:off x="0" y="0"/>
+          <a:ext cx="0" cy="0"/>
+          <a:chOff x="0" y="0"/>
+          <a:chExt cx="0" cy="0"/>
+        </a:xfrm>
+      </p:grpSpPr>
+      <p:sp>
+        <p:nvSpPr>
+          <p:cNvPr id="4" name="TextBox 3">
+            <a:extLst>
+              <a:ext uri="{FF2B5EF4-FFF2-40B4-BE49-F238E27FC236}">
+                <a16:creationId xmlns:a16="http://schemas.microsoft.com/office/drawing/2014/main" id="{E34F9682-BC94-4EF7-B59C-7F339EBAD685}"/>
+              </a:ext>
+            </a:extLst>
+          </p:cNvPr>
+          <p:cNvSpPr txBox="1"/>
+          <p:nvPr/>
+        </p:nvSpPr>
+        <p:spPr>
+          <a:xfrm>
+            <a:off x="0" y="0"/>
+            <a:ext cx="3946358" cy="369332"/>
+          </a:xfrm>
+          <a:prstGeom prst="rect">
+            <a:avLst/>
+          </a:prstGeom>
+          <a:noFill/>
+        </p:spPr>
+        <p:txBody>
+          <a:bodyPr wrap="square" rtlCol="0">
+            <a:spAutoFit/>
+          </a:bodyPr>
+          <a:lstStyle/>
+          <a:p>
+            <a:r>
+              <a:rPr lang="it-IT" u="sng" dirty="0"/>
+              <a:t>Afspraken DB</a:t>
+            </a:r>
+          </a:p>
+        </p:txBody>
+      </p:sp>
+      <p:sp>
+        <p:nvSpPr>
+          <p:cNvPr id="7" name="TextBox 6">
+            <a:extLst>
+              <a:ext uri="{FF2B5EF4-FFF2-40B4-BE49-F238E27FC236}">
+                <a16:creationId xmlns:a16="http://schemas.microsoft.com/office/drawing/2014/main" id="{FCD9424F-73E8-44E7-BE2B-0983785925DE}"/>
+              </a:ext>
+            </a:extLst>
+          </p:cNvPr>
+          <p:cNvSpPr txBox="1"/>
+          <p:nvPr/>
+        </p:nvSpPr>
+        <p:spPr>
+          <a:xfrm>
+            <a:off x="4920916" y="4747028"/>
+            <a:ext cx="2350168" cy="369332"/>
+          </a:xfrm>
+          <a:prstGeom prst="rect">
+            <a:avLst/>
+          </a:prstGeom>
+          <a:noFill/>
+          <a:ln>
+            <a:noFill/>
+          </a:ln>
+        </p:spPr>
+        <p:style>
+          <a:lnRef idx="0">
+            <a:scrgbClr r="0" g="0" b="0"/>
+          </a:lnRef>
+          <a:fillRef idx="0">
+            <a:scrgbClr r="0" g="0" b="0"/>
+          </a:fillRef>
+          <a:effectRef idx="0">
+            <a:scrgbClr r="0" g="0" b="0"/>
+          </a:effectRef>
+          <a:fontRef idx="minor">
+            <a:schemeClr val="dk1"/>
+          </a:fontRef>
+        </p:style>
+        <p:txBody>
+          <a:bodyPr wrap="square" rtlCol="0">
+            <a:spAutoFit/>
+          </a:bodyPr>
+          <a:lstStyle/>
+          <a:p>
+            <a:pPr algn="ctr"/>
+            <a:r>
+              <a:rPr lang="it-IT" dirty="0"/>
+              <a:t>229 Patients</a:t>
+            </a:r>
+            <a:endParaRPr lang="nl-NL" dirty="0"/>
+          </a:p>
+        </p:txBody>
+      </p:sp>
+      <p:sp>
+        <p:nvSpPr>
+          <p:cNvPr id="10" name="Freeform: Shape 9">
+            <a:extLst>
+              <a:ext uri="{FF2B5EF4-FFF2-40B4-BE49-F238E27FC236}">
+                <a16:creationId xmlns:a16="http://schemas.microsoft.com/office/drawing/2014/main" id="{7F0FAA5D-3950-414F-8178-6F612CCEC657}"/>
+              </a:ext>
+            </a:extLst>
+          </p:cNvPr>
+          <p:cNvSpPr/>
+          <p:nvPr/>
+        </p:nvSpPr>
+        <p:spPr>
+          <a:xfrm>
+            <a:off x="4717884" y="1741639"/>
+            <a:ext cx="2762251" cy="2762250"/>
+          </a:xfrm>
+          <a:custGeom>
+            <a:avLst/>
+            <a:gdLst>
+              <a:gd name="connsiteX0" fmla="*/ 2755651 w 2762251"/>
+              <a:gd name="connsiteY0" fmla="*/ 1250436 h 2762250"/>
+              <a:gd name="connsiteX1" fmla="*/ 2755653 w 2762251"/>
+              <a:gd name="connsiteY1" fmla="*/ 1250446 h 2762250"/>
+              <a:gd name="connsiteX2" fmla="*/ 2762251 w 2762251"/>
+              <a:gd name="connsiteY2" fmla="*/ 1381125 h 2762250"/>
+              <a:gd name="connsiteX3" fmla="*/ 2755653 w 2762251"/>
+              <a:gd name="connsiteY3" fmla="*/ 1511804 h 2762250"/>
+              <a:gd name="connsiteX4" fmla="*/ 2755651 w 2762251"/>
+              <a:gd name="connsiteY4" fmla="*/ 1511814 h 2762250"/>
+              <a:gd name="connsiteX5" fmla="*/ 2762250 w 2762251"/>
+              <a:gd name="connsiteY5" fmla="*/ 1381125 h 2762250"/>
+              <a:gd name="connsiteX6" fmla="*/ 1381125 w 2762251"/>
+              <a:gd name="connsiteY6" fmla="*/ 0 h 2762250"/>
+              <a:gd name="connsiteX7" fmla="*/ 2755120 w 2762251"/>
+              <a:gd name="connsiteY7" fmla="*/ 1239913 h 2762250"/>
+              <a:gd name="connsiteX8" fmla="*/ 2755651 w 2762251"/>
+              <a:gd name="connsiteY8" fmla="*/ 1250436 h 2762250"/>
+              <a:gd name="connsiteX9" fmla="*/ 2736285 w 2762251"/>
+              <a:gd name="connsiteY9" fmla="*/ 1123542 h 2762250"/>
+              <a:gd name="connsiteX10" fmla="*/ 1484146 w 2762251"/>
+              <a:gd name="connsiteY10" fmla="*/ 103020 h 2762250"/>
+              <a:gd name="connsiteX11" fmla="*/ 206041 w 2762251"/>
+              <a:gd name="connsiteY11" fmla="*/ 1381125 h 2762250"/>
+              <a:gd name="connsiteX12" fmla="*/ 1484146 w 2762251"/>
+              <a:gd name="connsiteY12" fmla="*/ 2659230 h 2762250"/>
+              <a:gd name="connsiteX13" fmla="*/ 2736285 w 2762251"/>
+              <a:gd name="connsiteY13" fmla="*/ 1638708 h 2762250"/>
+              <a:gd name="connsiteX14" fmla="*/ 2755651 w 2762251"/>
+              <a:gd name="connsiteY14" fmla="*/ 1511814 h 2762250"/>
+              <a:gd name="connsiteX15" fmla="*/ 2755120 w 2762251"/>
+              <a:gd name="connsiteY15" fmla="*/ 1522337 h 2762250"/>
+              <a:gd name="connsiteX16" fmla="*/ 1381125 w 2762251"/>
+              <a:gd name="connsiteY16" fmla="*/ 2762250 h 2762250"/>
+              <a:gd name="connsiteX17" fmla="*/ 0 w 2762251"/>
+              <a:gd name="connsiteY17" fmla="*/ 1381125 h 2762250"/>
+              <a:gd name="connsiteX18" fmla="*/ 1381125 w 2762251"/>
+              <a:gd name="connsiteY18" fmla="*/ 0 h 2762250"/>
+            </a:gdLst>
+            <a:ahLst/>
+            <a:cxnLst>
+              <a:cxn ang="0">
+                <a:pos x="connsiteX0" y="connsiteY0"/>
+              </a:cxn>
+              <a:cxn ang="0">
+                <a:pos x="connsiteX1" y="connsiteY1"/>
+              </a:cxn>
+              <a:cxn ang="0">
+                <a:pos x="connsiteX2" y="connsiteY2"/>
+              </a:cxn>
+              <a:cxn ang="0">
+                <a:pos x="connsiteX3" y="connsiteY3"/>
+              </a:cxn>
+              <a:cxn ang="0">
+                <a:pos x="connsiteX4" y="connsiteY4"/>
+              </a:cxn>
+              <a:cxn ang="0">
+                <a:pos x="connsiteX5" y="connsiteY5"/>
+              </a:cxn>
+              <a:cxn ang="0">
+                <a:pos x="connsiteX6" y="connsiteY6"/>
+              </a:cxn>
+              <a:cxn ang="0">
+                <a:pos x="connsiteX7" y="connsiteY7"/>
+              </a:cxn>
+              <a:cxn ang="0">
+                <a:pos x="connsiteX8" y="connsiteY8"/>
+              </a:cxn>
+              <a:cxn ang="0">
+                <a:pos x="connsiteX9" y="connsiteY9"/>
+              </a:cxn>
+              <a:cxn ang="0">
+                <a:pos x="connsiteX10" y="connsiteY10"/>
+              </a:cxn>
+              <a:cxn ang="0">
+                <a:pos x="connsiteX11" y="connsiteY11"/>
+              </a:cxn>
+              <a:cxn ang="0">
+                <a:pos x="connsiteX12" y="connsiteY12"/>
+              </a:cxn>
+              <a:cxn ang="0">
+                <a:pos x="connsiteX13" y="connsiteY13"/>
+              </a:cxn>
+              <a:cxn ang="0">
+                <a:pos x="connsiteX14" y="connsiteY14"/>
+              </a:cxn>
+              <a:cxn ang="0">
+                <a:pos x="connsiteX15" y="connsiteY15"/>
+              </a:cxn>
+              <a:cxn ang="0">
+                <a:pos x="connsiteX16" y="connsiteY16"/>
+              </a:cxn>
+              <a:cxn ang="0">
+                <a:pos x="connsiteX17" y="connsiteY17"/>
+              </a:cxn>
+              <a:cxn ang="0">
+                <a:pos x="connsiteX18" y="connsiteY18"/>
+              </a:cxn>
+            </a:cxnLst>
+            <a:rect l="l" t="t" r="r" b="b"/>
+            <a:pathLst>
+              <a:path w="2762251" h="2762250">
+                <a:moveTo>
+                  <a:pt x="2755651" y="1250436"/>
+                </a:moveTo>
+                <a:lnTo>
+                  <a:pt x="2755653" y="1250446"/>
+                </a:lnTo>
+                <a:cubicBezTo>
+                  <a:pt x="2760016" y="1293412"/>
+                  <a:pt x="2762251" y="1337008"/>
+                  <a:pt x="2762251" y="1381125"/>
+                </a:cubicBezTo>
+                <a:cubicBezTo>
+                  <a:pt x="2762251" y="1425243"/>
+                  <a:pt x="2760016" y="1468838"/>
+                  <a:pt x="2755653" y="1511804"/>
+                </a:cubicBezTo>
+                <a:lnTo>
+                  <a:pt x="2755651" y="1511814"/>
+                </a:lnTo>
+                <a:lnTo>
+                  <a:pt x="2762250" y="1381125"/>
+                </a:lnTo>
+                <a:close/>
+                <a:moveTo>
+                  <a:pt x="1381125" y="0"/>
+                </a:moveTo>
+                <a:cubicBezTo>
+                  <a:pt x="2096226" y="0"/>
+                  <a:pt x="2684392" y="543473"/>
+                  <a:pt x="2755120" y="1239913"/>
+                </a:cubicBezTo>
+                <a:lnTo>
+                  <a:pt x="2755651" y="1250436"/>
+                </a:lnTo>
+                <a:lnTo>
+                  <a:pt x="2736285" y="1123542"/>
+                </a:lnTo>
+                <a:cubicBezTo>
+                  <a:pt x="2617106" y="541131"/>
+                  <a:pt x="2101790" y="103020"/>
+                  <a:pt x="1484146" y="103020"/>
+                </a:cubicBezTo>
+                <a:cubicBezTo>
+                  <a:pt x="778268" y="103020"/>
+                  <a:pt x="206041" y="675247"/>
+                  <a:pt x="206041" y="1381125"/>
+                </a:cubicBezTo>
+                <a:cubicBezTo>
+                  <a:pt x="206041" y="2087003"/>
+                  <a:pt x="778268" y="2659230"/>
+                  <a:pt x="1484146" y="2659230"/>
+                </a:cubicBezTo>
+                <a:cubicBezTo>
+                  <a:pt x="2101790" y="2659230"/>
+                  <a:pt x="2617106" y="2221119"/>
+                  <a:pt x="2736285" y="1638708"/>
+                </a:cubicBezTo>
+                <a:lnTo>
+                  <a:pt x="2755651" y="1511814"/>
+                </a:lnTo>
+                <a:lnTo>
+                  <a:pt x="2755120" y="1522337"/>
+                </a:lnTo>
+                <a:cubicBezTo>
+                  <a:pt x="2684392" y="2218778"/>
+                  <a:pt x="2096226" y="2762250"/>
+                  <a:pt x="1381125" y="2762250"/>
+                </a:cubicBezTo>
+                <a:cubicBezTo>
+                  <a:pt x="618351" y="2762250"/>
+                  <a:pt x="0" y="2143899"/>
+                  <a:pt x="0" y="1381125"/>
+                </a:cubicBezTo>
+                <a:cubicBezTo>
+                  <a:pt x="0" y="618351"/>
+                  <a:pt x="618351" y="0"/>
+                  <a:pt x="1381125" y="0"/>
+                </a:cubicBezTo>
+                <a:close/>
+              </a:path>
+            </a:pathLst>
+          </a:custGeom>
+        </p:spPr>
+        <p:style>
+          <a:lnRef idx="0">
+            <a:schemeClr val="accent3"/>
+          </a:lnRef>
+          <a:fillRef idx="3">
+            <a:schemeClr val="accent3"/>
+          </a:fillRef>
+          <a:effectRef idx="3">
+            <a:schemeClr val="accent3"/>
+          </a:effectRef>
+          <a:fontRef idx="minor">
+            <a:schemeClr val="lt1"/>
+          </a:fontRef>
+        </p:style>
+        <p:txBody>
+          <a:bodyPr rtlCol="0" anchor="ctr"/>
+          <a:lstStyle/>
+          <a:p>
+            <a:pPr algn="ctr"/>
+            <a:endParaRPr lang="nl-NL"/>
+          </a:p>
+        </p:txBody>
+      </p:sp>
+      <p:sp>
+        <p:nvSpPr>
+          <p:cNvPr id="16" name="TextBox 15">
+            <a:extLst>
+              <a:ext uri="{FF2B5EF4-FFF2-40B4-BE49-F238E27FC236}">
+                <a16:creationId xmlns:a16="http://schemas.microsoft.com/office/drawing/2014/main" id="{D5523F38-46EB-4439-B403-339A9CCB84BD}"/>
+              </a:ext>
+            </a:extLst>
+          </p:cNvPr>
+          <p:cNvSpPr txBox="1"/>
+          <p:nvPr/>
+        </p:nvSpPr>
+        <p:spPr>
+          <a:xfrm>
+            <a:off x="8245642" y="0"/>
+            <a:ext cx="3946358" cy="369332"/>
+          </a:xfrm>
+          <a:prstGeom prst="rect">
+            <a:avLst/>
+          </a:prstGeom>
+          <a:noFill/>
+        </p:spPr>
+        <p:txBody>
+          <a:bodyPr wrap="square" rtlCol="0">
+            <a:spAutoFit/>
+          </a:bodyPr>
+          <a:lstStyle/>
+          <a:p>
+            <a:pPr algn="r"/>
+            <a:r>
+              <a:rPr lang="it-IT" u="sng" dirty="0"/>
+              <a:t>Lab Measures DB</a:t>
+            </a:r>
+          </a:p>
+        </p:txBody>
+      </p:sp>
+      <p:cxnSp>
+        <p:nvCxnSpPr>
+          <p:cNvPr id="3" name="Straight Arrow Connector 2">
+            <a:extLst>
+              <a:ext uri="{FF2B5EF4-FFF2-40B4-BE49-F238E27FC236}">
+                <a16:creationId xmlns:a16="http://schemas.microsoft.com/office/drawing/2014/main" id="{FA02BA0B-1B27-4720-8234-9ED4A43D6ED8}"/>
+              </a:ext>
+            </a:extLst>
+          </p:cNvPr>
+          <p:cNvCxnSpPr>
+            <a:cxnSpLocks/>
+            <a:stCxn id="13" idx="2"/>
+            <a:endCxn id="10" idx="17"/>
+          </p:cNvCxnSpPr>
+          <p:nvPr/>
+        </p:nvCxnSpPr>
+        <p:spPr>
+          <a:xfrm>
+            <a:off x="2133600" y="1882849"/>
+            <a:ext cx="2584284" cy="1239915"/>
+          </a:xfrm>
+          <a:prstGeom prst="straightConnector1">
+            <a:avLst/>
+          </a:prstGeom>
+          <a:ln>
+            <a:tailEnd type="triangle"/>
+          </a:ln>
+        </p:spPr>
+        <p:style>
+          <a:lnRef idx="3">
+            <a:schemeClr val="dk1"/>
+          </a:lnRef>
+          <a:fillRef idx="0">
+            <a:schemeClr val="dk1"/>
+          </a:fillRef>
+          <a:effectRef idx="2">
+            <a:schemeClr val="dk1"/>
+          </a:effectRef>
+          <a:fontRef idx="minor">
+            <a:schemeClr val="tx1"/>
+          </a:fontRef>
+        </p:style>
+      </p:cxnSp>
+      <p:sp>
+        <p:nvSpPr>
+          <p:cNvPr id="13" name="TextBox 12">
+            <a:extLst>
+              <a:ext uri="{FF2B5EF4-FFF2-40B4-BE49-F238E27FC236}">
+                <a16:creationId xmlns:a16="http://schemas.microsoft.com/office/drawing/2014/main" id="{480CBE3B-7DBD-4CCB-AA01-92C56653F80D}"/>
+              </a:ext>
+            </a:extLst>
+          </p:cNvPr>
+          <p:cNvSpPr txBox="1"/>
+          <p:nvPr/>
+        </p:nvSpPr>
+        <p:spPr>
+          <a:xfrm>
+            <a:off x="958516" y="959519"/>
+            <a:ext cx="2350168" cy="923330"/>
+          </a:xfrm>
+          <a:prstGeom prst="rect">
+            <a:avLst/>
+          </a:prstGeom>
+          <a:noFill/>
+          <a:ln>
+            <a:noFill/>
+          </a:ln>
+        </p:spPr>
+        <p:style>
+          <a:lnRef idx="0">
+            <a:scrgbClr r="0" g="0" b="0"/>
+          </a:lnRef>
+          <a:fillRef idx="0">
+            <a:scrgbClr r="0" g="0" b="0"/>
+          </a:fillRef>
+          <a:effectRef idx="0">
+            <a:scrgbClr r="0" g="0" b="0"/>
+          </a:effectRef>
+          <a:fontRef idx="minor">
+            <a:schemeClr val="dk1"/>
+          </a:fontRef>
+        </p:style>
+        <p:txBody>
+          <a:bodyPr wrap="square" rtlCol="0">
+            <a:spAutoFit/>
+          </a:bodyPr>
+          <a:lstStyle/>
+          <a:p>
+            <a:pPr algn="ctr"/>
+            <a:r>
+              <a:rPr lang="it-IT" dirty="0"/>
+              <a:t>Patient who has appointment but no lab meas</a:t>
+            </a:r>
+            <a:endParaRPr lang="nl-NL" dirty="0"/>
+          </a:p>
+        </p:txBody>
+      </p:sp>
+    </p:spTree>
+    <p:extLst>
+      <p:ext uri="{BB962C8B-B14F-4D97-AF65-F5344CB8AC3E}">
+        <p14:creationId xmlns:p14="http://schemas.microsoft.com/office/powerpoint/2010/main" val="1747298928"/>
+      </p:ext>
+    </p:extLst>
+  </p:cSld>
+  <p:clrMapOvr>
+    <a:masterClrMapping/>
+  </p:clrMapOvr>
+  <mc:AlternateContent xmlns:mc="http://schemas.openxmlformats.org/markup-compatibility/2006" xmlns:p159="http://schemas.microsoft.com/office/powerpoint/2015/09/main">
+    <mc:Choice Requires="p159">
+      <p:transition spd="slow">
+        <p159:morph option="byObject"/>
+      </p:transition>
+    </mc:Choice>
+    <mc:Fallback xmlns="">
+      <p:transition spd="slow">
+        <p:fade/>
+      </p:transition>
+    </mc:Fallback>
+  </mc:AlternateContent>
+</p:sld>
+</file>
+
+<file path=ppt/slides/slide44.xml><?xml version="1.0" encoding="utf-8"?>
+<p:sld xmlns:a="http://schemas.openxmlformats.org/drawingml/2006/main" xmlns:r="http://schemas.openxmlformats.org/officeDocument/2006/relationships" xmlns:p="http://schemas.openxmlformats.org/presentationml/2006/main" show="0">
+  <p:cSld>
+    <p:spTree>
+      <p:nvGrpSpPr>
+        <p:cNvPr id="1" name=""/>
+        <p:cNvGrpSpPr/>
+        <p:nvPr/>
+      </p:nvGrpSpPr>
+      <p:grpSpPr>
+        <a:xfrm>
+          <a:off x="0" y="0"/>
+          <a:ext cx="0" cy="0"/>
+          <a:chOff x="0" y="0"/>
+          <a:chExt cx="0" cy="0"/>
+        </a:xfrm>
+      </p:grpSpPr>
       <p:graphicFrame>
         <p:nvGraphicFramePr>
           <p:cNvPr id="4" name="Chart 3">
@@ -17047,13 +18794,13 @@
   <p:clrMapOvr>
     <a:masterClrMapping/>
   </p:clrMapOvr>
-  <mc:AlternateContent xmlns:mc="http://schemas.openxmlformats.org/markup-compatibility/2006">
-    <mc:Choice xmlns:p159="http://schemas.microsoft.com/office/powerpoint/2015/09/main" Requires="p159">
+  <mc:AlternateContent xmlns:mc="http://schemas.openxmlformats.org/markup-compatibility/2006" xmlns:p159="http://schemas.microsoft.com/office/powerpoint/2015/09/main">
+    <mc:Choice Requires="p159">
       <p:transition spd="slow">
         <p159:morph option="byObject"/>
       </p:transition>
     </mc:Choice>
-    <mc:Fallback>
+    <mc:Fallback xmlns="">
       <p:transition spd="slow">
         <p:fade/>
       </p:transition>
